--- a/docs/PAPER/proposal-defense/slides/NDNSF_proposal_hybrid_editable.pptx
+++ b/docs/PAPER/proposal-defense/slides/NDNSF_proposal_hybrid_editable.pptx
@@ -391,7 +391,7 @@
           <a:p>
             <a:r>
               <a:rPr lang="en-US" sz="1200"/>
-              <a:t>Design Execution authorization Discovery confidentiality DNMP-inspired roles [12] Role/command signing rules, credential and request-state checks Add encryption and group/key distribution Our per-service role cer- tificates Service/message rules plus caller or Provider credential Add equivalent encryption and lifecycle handling NDNSF ABE-backed Identity signature, encrypted challenges, and authorization/request state Service-level ABE protection of descriptor Content Trust Schema [16] alone does not encrypt Content. Trust Schema plus encryption is a valid alternative, not an impossible design.</a:t>
+              <a:t>Nodes may retrieve the same encrypted Request Data; only matching decryption capabilities expose its descriptor. The User encrypts by service attributes, without listing Provider identities. The Controller still authorizes entities and issues keys. [19] Different entities retain overlapping service permissions in individual policy keys, independently of identity-signing credentials. Architectural benefit: shared dissemination with distinct access scopes. Aggregation preserves distinctions only while objects retain separate encryption scopes.</a:t>
             </a:r>
             <a:endParaRPr lang="en-US" sz="1200"/>
           </a:p>
@@ -447,7 +447,7 @@
           <a:p>
             <a:r>
               <a:rPr lang="en-US" sz="1200"/>
-              <a:t>Enhanced NAC-ABE [19] supports key-policy ABE (KP-ABE): ciphertext attributes meet a policy in an individually issued decryption key (DKEY). Service permissions can be aggregated while identity-signing credentials remain unchanged. Challenges reuse those service permissions instead of introducing additional service-role signing credentials. This saves a second entitlement representation in this design---not all key work. User DKEYs, challenge processing, policy growth, status and rekeying still cost resources.</a:t>
+              <a:t>Design Execution authorization Discovery confidentiality DNMP-inspired roles [12] Role/command signing rules, credential and request-state checks Add encryption and group/key distribution Our per-service role cer- tificates Service/message rules plus caller or Provider credential Add equivalent encryption and lifecycle handling NDNSF ABE-backed Identity signature, encrypted challenges, and authorization/request state Service-level ABE protection of descriptor Content Trust Schema [16] validates signing relationships; it alone does not encrypt Content. NAC [4] also protects distributed content. ABE contributes attribute-policy-based decryption.</a:t>
             </a:r>
             <a:endParaRPr lang="en-US" sz="1200"/>
           </a:p>
@@ -559,7 +559,7 @@
           <a:p>
             <a:r>
               <a:rPr lang="en-US" sz="1200"/>
-              <a:t>Symmetric request-scoped keys protect input and result Content. Selection supplies necessary keys only to the selected Provider through recipient encryption. The requesting User and selected Provider share the result key; other Users are excluded under key-secrecy assumptions. Controller-signed status affects authorization after retrieval and validation. ABE rotation limits subsequent encrypted exchanges. Current rotation is Controller-wide. Disconnected revocation is not immediate; old plaintext and keys cannot be recalled. Runtime tests do not establish lower cost than certificate revocation. [28]</a:t>
+              <a:t>Challenges check decryption capability; signatures, service permissions and request state still determine invocation acceptance. Request-scoped keys protect input/results. Selection delivers keys to selected Providers; the requesting User retains access. Withdrawal requires retrieved, validated Controller status. Current ABE rotation is Controller-wide. [28] Lifecycle requirement, not a third advantage: measure policy/key size, challenge cost, propagation and rekeying. No immediate disconnected revocation or recall of old plaintext/keys.</a:t>
             </a:r>
             <a:endParaRPr lang="en-US" sz="1200"/>
           </a:p>
@@ -6372,7 +6372,7 @@
                 </a:solidFill>
                 <a:latin typeface="Latin Modern Sans"/>
               </a:rPr>
-              <a:t>RQ1: Why Protect Discovery Content?</a:t>
+              <a:t>Reason 1: Confidential Discovery Before Selection</a:t>
             </a:r>
           </a:p>
         </p:txBody>
@@ -6985,7 +6985,7 @@
       <p:grpSpPr/>
       <p:pic>
         <p:nvPicPr>
-          <p:cNvPr id="2" name="TEXT_FREE_BACKGROUND_12" descr="background-012.png"/>
+          <p:cNvPr id="2" name="TEXT_FREE_BACKGROUND_12" descr="background-005.png"/>
           <p:cNvPicPr>
             <a:picLocks noChangeAspect="1"/>
           </p:cNvPicPr>
@@ -7050,7 +7050,7 @@
                 </a:solidFill>
                 <a:latin typeface="Latin Modern Sans"/>
               </a:rPr>
-              <a:t>A Fair Comparison Includes Encryption on Both Sides</a:t>
+              <a:t>Reason 2: Separate Dissemination from Access</a:t>
             </a:r>
           </a:p>
         </p:txBody>
@@ -7063,42 +7063,51 @@
         </p:nvSpPr>
         <p:spPr>
           <a:xfrm>
-            <a:off x="1107736" y="1358722"/>
-            <a:ext cx="1082791" cy="385554"/>
-          </a:xfrm>
-          <a:prstGeom prst="rect">
-            <a:avLst/>
-          </a:prstGeom>
-          <a:noFill/>
-          <a:ln>
-            <a:noFill/>
-          </a:ln>
-        </p:spPr>
-        <p:txBody>
-          <a:bodyPr wrap="square" anchor="t" lIns="0" rIns="0" tIns="0" bIns="0">
-            <a:noAutofit/>
-          </a:bodyPr>
-          <a:lstStyle/>
-          <a:p>
-            <a:pPr algn="l">
-              <a:lnSpc>
-                <a:spcPct val="100000"/>
-              </a:lnSpc>
-              <a:spcBef>
-                <a:spcPts val="0"/>
-              </a:spcBef>
-              <a:spcAft>
-                <a:spcPts val="0"/>
-              </a:spcAft>
-            </a:pPr>
-            <a:r>
-              <a:rPr sz="2371" b="0" i="0">
-                <a:solidFill>
-                  <a:srgbClr val="000000"/>
-                </a:solidFill>
-                <a:latin typeface="Latin Modern Sans"/>
-              </a:rPr>
-              <a:t>Design</a:t>
+            <a:off x="1618972" y="2029557"/>
+            <a:ext cx="11999210" cy="929891"/>
+          </a:xfrm>
+          <a:prstGeom prst="rect">
+            <a:avLst/>
+          </a:prstGeom>
+          <a:noFill/>
+          <a:ln>
+            <a:noFill/>
+          </a:ln>
+        </p:spPr>
+        <p:txBody>
+          <a:bodyPr wrap="square" anchor="t" lIns="0" rIns="0" tIns="0" bIns="0">
+            <a:noAutofit/>
+          </a:bodyPr>
+          <a:lstStyle/>
+          <a:p>
+            <a:pPr algn="l">
+              <a:lnSpc>
+                <a:spcPct val="100000"/>
+              </a:lnSpc>
+              <a:spcBef>
+                <a:spcPts val="0"/>
+              </a:spcBef>
+              <a:spcAft>
+                <a:spcPts val="0"/>
+              </a:spcAft>
+            </a:pPr>
+            <a:r>
+              <a:rPr sz="2710" b="0" i="0">
+                <a:solidFill>
+                  <a:srgbClr val="000000"/>
+                </a:solidFill>
+                <a:latin typeface="Latin Modern Sans"/>
+              </a:rPr>
+              <a:t>Nodes may retrieve the same encrypted Request Data; only matching decryption</a:t>
+            </a:r>
+            <a:r>
+              <a:rPr sz="2710" b="0" i="0">
+                <a:solidFill>
+                  <a:srgbClr val="000000"/>
+                </a:solidFill>
+                <a:latin typeface="Latin Modern Sans"/>
+              </a:rPr>
+              <a:t> capabilities expose its descriptor.</a:t>
             </a:r>
           </a:p>
         </p:txBody>
@@ -7111,42 +7120,51 @@
         </p:nvSpPr>
         <p:spPr>
           <a:xfrm>
-            <a:off x="4951729" y="1358722"/>
-            <a:ext cx="3428411" cy="385554"/>
-          </a:xfrm>
-          <a:prstGeom prst="rect">
-            <a:avLst/>
-          </a:prstGeom>
-          <a:noFill/>
-          <a:ln>
-            <a:noFill/>
-          </a:ln>
-        </p:spPr>
-        <p:txBody>
-          <a:bodyPr wrap="square" anchor="t" lIns="0" rIns="0" tIns="0" bIns="0">
-            <a:noAutofit/>
-          </a:bodyPr>
-          <a:lstStyle/>
-          <a:p>
-            <a:pPr algn="l">
-              <a:lnSpc>
-                <a:spcPct val="100000"/>
-              </a:lnSpc>
-              <a:spcBef>
-                <a:spcPts val="0"/>
-              </a:spcBef>
-              <a:spcAft>
-                <a:spcPts val="0"/>
-              </a:spcAft>
-            </a:pPr>
-            <a:r>
-              <a:rPr sz="2371" b="0" i="0">
-                <a:solidFill>
-                  <a:srgbClr val="000000"/>
-                </a:solidFill>
-                <a:latin typeface="Latin Modern Sans"/>
-              </a:rPr>
-              <a:t>Execution authorization</a:t>
+            <a:off x="1618972" y="3001824"/>
+            <a:ext cx="11819233" cy="929891"/>
+          </a:xfrm>
+          <a:prstGeom prst="rect">
+            <a:avLst/>
+          </a:prstGeom>
+          <a:noFill/>
+          <a:ln>
+            <a:noFill/>
+          </a:ln>
+        </p:spPr>
+        <p:txBody>
+          <a:bodyPr wrap="square" anchor="t" lIns="0" rIns="0" tIns="0" bIns="0">
+            <a:noAutofit/>
+          </a:bodyPr>
+          <a:lstStyle/>
+          <a:p>
+            <a:pPr algn="l">
+              <a:lnSpc>
+                <a:spcPct val="100000"/>
+              </a:lnSpc>
+              <a:spcBef>
+                <a:spcPts val="0"/>
+              </a:spcBef>
+              <a:spcAft>
+                <a:spcPts val="0"/>
+              </a:spcAft>
+            </a:pPr>
+            <a:r>
+              <a:rPr sz="2710" b="0" i="0">
+                <a:solidFill>
+                  <a:srgbClr val="000000"/>
+                </a:solidFill>
+                <a:latin typeface="Latin Modern Sans"/>
+              </a:rPr>
+              <a:t>The User encrypts by service attributes, without listing Provider identities. The</a:t>
+            </a:r>
+            <a:r>
+              <a:rPr sz="2710" b="0" i="0">
+                <a:solidFill>
+                  <a:srgbClr val="000000"/>
+                </a:solidFill>
+                <a:latin typeface="Latin Modern Sans"/>
+              </a:rPr>
+              <a:t> Controller still authorizes entities and issues keys. [19]</a:t>
             </a:r>
           </a:p>
         </p:txBody>
@@ -7159,42 +7177,51 @@
         </p:nvSpPr>
         <p:spPr>
           <a:xfrm>
-            <a:off x="9433494" y="1358722"/>
-            <a:ext cx="3527306" cy="385554"/>
-          </a:xfrm>
-          <a:prstGeom prst="rect">
-            <a:avLst/>
-          </a:prstGeom>
-          <a:noFill/>
-          <a:ln>
-            <a:noFill/>
-          </a:ln>
-        </p:spPr>
-        <p:txBody>
-          <a:bodyPr wrap="square" anchor="t" lIns="0" rIns="0" tIns="0" bIns="0">
-            <a:noAutofit/>
-          </a:bodyPr>
-          <a:lstStyle/>
-          <a:p>
-            <a:pPr algn="l">
-              <a:lnSpc>
-                <a:spcPct val="100000"/>
-              </a:lnSpc>
-              <a:spcBef>
-                <a:spcPts val="0"/>
-              </a:spcBef>
-              <a:spcAft>
-                <a:spcPts val="0"/>
-              </a:spcAft>
-            </a:pPr>
-            <a:r>
-              <a:rPr sz="2371" b="0" i="0">
-                <a:solidFill>
-                  <a:srgbClr val="000000"/>
-                </a:solidFill>
-                <a:latin typeface="Latin Modern Sans"/>
-              </a:rPr>
-              <a:t>Discovery confidentiality</a:t>
+            <a:off x="1618972" y="3974091"/>
+            <a:ext cx="11916509" cy="929924"/>
+          </a:xfrm>
+          <a:prstGeom prst="rect">
+            <a:avLst/>
+          </a:prstGeom>
+          <a:noFill/>
+          <a:ln>
+            <a:noFill/>
+          </a:ln>
+        </p:spPr>
+        <p:txBody>
+          <a:bodyPr wrap="square" anchor="t" lIns="0" rIns="0" tIns="0" bIns="0">
+            <a:noAutofit/>
+          </a:bodyPr>
+          <a:lstStyle/>
+          <a:p>
+            <a:pPr algn="l">
+              <a:lnSpc>
+                <a:spcPct val="100000"/>
+              </a:lnSpc>
+              <a:spcBef>
+                <a:spcPts val="0"/>
+              </a:spcBef>
+              <a:spcAft>
+                <a:spcPts val="0"/>
+              </a:spcAft>
+            </a:pPr>
+            <a:r>
+              <a:rPr sz="2710" b="0" i="0">
+                <a:solidFill>
+                  <a:srgbClr val="000000"/>
+                </a:solidFill>
+                <a:latin typeface="Latin Modern Sans"/>
+              </a:rPr>
+              <a:t>Different entities retain overlapping service permissions in individual policy keys,</a:t>
+            </a:r>
+            <a:r>
+              <a:rPr sz="2710" b="0" i="0">
+                <a:solidFill>
+                  <a:srgbClr val="000000"/>
+                </a:solidFill>
+                <a:latin typeface="Latin Modern Sans"/>
+              </a:rPr>
+              <a:t> independently of identity-signing credentials.</a:t>
             </a:r>
           </a:p>
         </p:txBody>
@@ -7207,42 +7234,51 @@
         </p:nvSpPr>
         <p:spPr>
           <a:xfrm>
-            <a:off x="1107736" y="1927082"/>
-            <a:ext cx="3690615" cy="385554"/>
-          </a:xfrm>
-          <a:prstGeom prst="rect">
-            <a:avLst/>
-          </a:prstGeom>
-          <a:noFill/>
-          <a:ln>
-            <a:noFill/>
-          </a:ln>
-        </p:spPr>
-        <p:txBody>
-          <a:bodyPr wrap="square" anchor="t" lIns="0" rIns="0" tIns="0" bIns="0">
-            <a:noAutofit/>
-          </a:bodyPr>
-          <a:lstStyle/>
-          <a:p>
-            <a:pPr algn="l">
-              <a:lnSpc>
-                <a:spcPct val="100000"/>
-              </a:lnSpc>
-              <a:spcBef>
-                <a:spcPts val="0"/>
-              </a:spcBef>
-              <a:spcAft>
-                <a:spcPts val="0"/>
-              </a:spcAft>
-            </a:pPr>
-            <a:r>
-              <a:rPr sz="2371" b="0" i="0">
-                <a:solidFill>
-                  <a:srgbClr val="000000"/>
-                </a:solidFill>
-                <a:latin typeface="Latin Modern Sans"/>
-              </a:rPr>
-              <a:t>DNMP-inspired roles [12]</a:t>
+            <a:off x="1143656" y="5567779"/>
+            <a:ext cx="12477953" cy="929891"/>
+          </a:xfrm>
+          <a:prstGeom prst="rect">
+            <a:avLst/>
+          </a:prstGeom>
+          <a:noFill/>
+          <a:ln>
+            <a:noFill/>
+          </a:ln>
+        </p:spPr>
+        <p:txBody>
+          <a:bodyPr wrap="square" anchor="t" lIns="0" rIns="0" tIns="0" bIns="0">
+            <a:noAutofit/>
+          </a:bodyPr>
+          <a:lstStyle/>
+          <a:p>
+            <a:pPr algn="l">
+              <a:lnSpc>
+                <a:spcPct val="100000"/>
+              </a:lnSpc>
+              <a:spcBef>
+                <a:spcPts val="0"/>
+              </a:spcBef>
+              <a:spcAft>
+                <a:spcPts val="0"/>
+              </a:spcAft>
+            </a:pPr>
+            <a:r>
+              <a:rPr sz="2710" b="0" i="0">
+                <a:solidFill>
+                  <a:srgbClr val="000000"/>
+                </a:solidFill>
+                <a:latin typeface="Latin Modern Sans"/>
+              </a:rPr>
+              <a:t>Architectural benefit: shared dissemination with distinct access scopes. Aggregation</a:t>
+            </a:r>
+            <a:r>
+              <a:rPr sz="2710" b="0" i="0">
+                <a:solidFill>
+                  <a:srgbClr val="000000"/>
+                </a:solidFill>
+                <a:latin typeface="Latin Modern Sans"/>
+              </a:rPr>
+              <a:t> preserves distinctions only while objects retain separate encryption scopes.</a:t>
             </a:r>
           </a:p>
         </p:txBody>
@@ -7250,684 +7286,6 @@
       <p:sp>
         <p:nvSpPr>
           <p:cNvPr id="8" name="PDF_TEXT_GROUP_150"/>
-          <p:cNvSpPr txBox="1"/>
-          <p:nvPr/>
-        </p:nvSpPr>
-        <p:spPr>
-          <a:xfrm>
-            <a:off x="4951633" y="1927082"/>
-            <a:ext cx="4215475" cy="385554"/>
-          </a:xfrm>
-          <a:prstGeom prst="rect">
-            <a:avLst/>
-          </a:prstGeom>
-          <a:noFill/>
-          <a:ln>
-            <a:noFill/>
-          </a:ln>
-        </p:spPr>
-        <p:txBody>
-          <a:bodyPr wrap="square" anchor="t" lIns="0" rIns="0" tIns="0" bIns="0">
-            <a:noAutofit/>
-          </a:bodyPr>
-          <a:lstStyle/>
-          <a:p>
-            <a:pPr algn="l">
-              <a:lnSpc>
-                <a:spcPct val="100000"/>
-              </a:lnSpc>
-              <a:spcBef>
-                <a:spcPts val="0"/>
-              </a:spcBef>
-              <a:spcAft>
-                <a:spcPts val="0"/>
-              </a:spcAft>
-            </a:pPr>
-            <a:r>
-              <a:rPr sz="2371" b="0" i="0">
-                <a:solidFill>
-                  <a:srgbClr val="000000"/>
-                </a:solidFill>
-                <a:latin typeface="Latin Modern Sans"/>
-              </a:rPr>
-              <a:t>Role/command signing rules,</a:t>
-            </a:r>
-          </a:p>
-        </p:txBody>
-      </p:sp>
-      <p:sp>
-        <p:nvSpPr>
-          <p:cNvPr id="9" name="PDF_TEXT_GROUP_151"/>
-          <p:cNvSpPr txBox="1"/>
-          <p:nvPr/>
-        </p:nvSpPr>
-        <p:spPr>
-          <a:xfrm>
-            <a:off x="9433445" y="1927082"/>
-            <a:ext cx="4423717" cy="385554"/>
-          </a:xfrm>
-          <a:prstGeom prst="rect">
-            <a:avLst/>
-          </a:prstGeom>
-          <a:noFill/>
-          <a:ln>
-            <a:noFill/>
-          </a:ln>
-        </p:spPr>
-        <p:txBody>
-          <a:bodyPr wrap="square" anchor="t" lIns="0" rIns="0" tIns="0" bIns="0">
-            <a:noAutofit/>
-          </a:bodyPr>
-          <a:lstStyle/>
-          <a:p>
-            <a:pPr algn="l">
-              <a:lnSpc>
-                <a:spcPct val="100000"/>
-              </a:lnSpc>
-              <a:spcBef>
-                <a:spcPts val="0"/>
-              </a:spcBef>
-              <a:spcAft>
-                <a:spcPts val="0"/>
-              </a:spcAft>
-            </a:pPr>
-            <a:r>
-              <a:rPr sz="2371" b="0" i="0">
-                <a:solidFill>
-                  <a:srgbClr val="000000"/>
-                </a:solidFill>
-                <a:latin typeface="Latin Modern Sans"/>
-              </a:rPr>
-              <a:t>Add encryption and group/key</a:t>
-            </a:r>
-          </a:p>
-        </p:txBody>
-      </p:sp>
-      <p:sp>
-        <p:nvSpPr>
-          <p:cNvPr id="10" name="PDF_TEXT_GROUP_152"/>
-          <p:cNvSpPr txBox="1"/>
-          <p:nvPr/>
-        </p:nvSpPr>
-        <p:spPr>
-          <a:xfrm>
-            <a:off x="4951637" y="2313410"/>
-            <a:ext cx="3851309" cy="828877"/>
-          </a:xfrm>
-          <a:prstGeom prst="rect">
-            <a:avLst/>
-          </a:prstGeom>
-          <a:noFill/>
-          <a:ln>
-            <a:noFill/>
-          </a:ln>
-        </p:spPr>
-        <p:txBody>
-          <a:bodyPr wrap="square" anchor="t" lIns="0" rIns="0" tIns="0" bIns="0">
-            <a:noAutofit/>
-          </a:bodyPr>
-          <a:lstStyle/>
-          <a:p>
-            <a:pPr algn="l">
-              <a:lnSpc>
-                <a:spcPct val="100000"/>
-              </a:lnSpc>
-              <a:spcBef>
-                <a:spcPts val="0"/>
-              </a:spcBef>
-              <a:spcAft>
-                <a:spcPts val="0"/>
-              </a:spcAft>
-            </a:pPr>
-            <a:r>
-              <a:rPr sz="2371" b="0" i="0">
-                <a:solidFill>
-                  <a:srgbClr val="000000"/>
-                </a:solidFill>
-                <a:latin typeface="Latin Modern Sans"/>
-              </a:rPr>
-              <a:t>credential and request-state</a:t>
-            </a:r>
-            <a:r>
-              <a:rPr sz="2371" b="0" i="0">
-                <a:solidFill>
-                  <a:srgbClr val="000000"/>
-                </a:solidFill>
-                <a:latin typeface="Latin Modern Sans"/>
-              </a:rPr>
-              <a:t> checks</a:t>
-            </a:r>
-          </a:p>
-        </p:txBody>
-      </p:sp>
-      <p:sp>
-        <p:nvSpPr>
-          <p:cNvPr id="11" name="PDF_TEXT_GROUP_153"/>
-          <p:cNvSpPr txBox="1"/>
-          <p:nvPr/>
-        </p:nvSpPr>
-        <p:spPr>
-          <a:xfrm>
-            <a:off x="9433445" y="2313410"/>
-            <a:ext cx="1701754" cy="385554"/>
-          </a:xfrm>
-          <a:prstGeom prst="rect">
-            <a:avLst/>
-          </a:prstGeom>
-          <a:noFill/>
-          <a:ln>
-            <a:noFill/>
-          </a:ln>
-        </p:spPr>
-        <p:txBody>
-          <a:bodyPr wrap="square" anchor="t" lIns="0" rIns="0" tIns="0" bIns="0">
-            <a:noAutofit/>
-          </a:bodyPr>
-          <a:lstStyle/>
-          <a:p>
-            <a:pPr algn="l">
-              <a:lnSpc>
-                <a:spcPct val="100000"/>
-              </a:lnSpc>
-              <a:spcBef>
-                <a:spcPts val="0"/>
-              </a:spcBef>
-              <a:spcAft>
-                <a:spcPts val="0"/>
-              </a:spcAft>
-            </a:pPr>
-            <a:r>
-              <a:rPr sz="2371" b="0" i="0">
-                <a:solidFill>
-                  <a:srgbClr val="000000"/>
-                </a:solidFill>
-                <a:latin typeface="Latin Modern Sans"/>
-              </a:rPr>
-              <a:t>distribution</a:t>
-            </a:r>
-          </a:p>
-        </p:txBody>
-      </p:sp>
-      <p:sp>
-        <p:nvSpPr>
-          <p:cNvPr id="12" name="PDF_TEXT_GROUP_154"/>
-          <p:cNvSpPr txBox="1"/>
-          <p:nvPr/>
-        </p:nvSpPr>
-        <p:spPr>
-          <a:xfrm>
-            <a:off x="1107736" y="3268129"/>
-            <a:ext cx="3586085" cy="828844"/>
-          </a:xfrm>
-          <a:prstGeom prst="rect">
-            <a:avLst/>
-          </a:prstGeom>
-          <a:noFill/>
-          <a:ln>
-            <a:noFill/>
-          </a:ln>
-        </p:spPr>
-        <p:txBody>
-          <a:bodyPr wrap="square" anchor="t" lIns="0" rIns="0" tIns="0" bIns="0">
-            <a:noAutofit/>
-          </a:bodyPr>
-          <a:lstStyle/>
-          <a:p>
-            <a:pPr algn="l">
-              <a:lnSpc>
-                <a:spcPct val="100000"/>
-              </a:lnSpc>
-              <a:spcBef>
-                <a:spcPts val="0"/>
-              </a:spcBef>
-              <a:spcAft>
-                <a:spcPts val="0"/>
-              </a:spcAft>
-            </a:pPr>
-            <a:r>
-              <a:rPr sz="2371" b="0" i="0">
-                <a:solidFill>
-                  <a:srgbClr val="000000"/>
-                </a:solidFill>
-                <a:latin typeface="Latin Modern Sans"/>
-              </a:rPr>
-              <a:t>Our per-service role cer-</a:t>
-            </a:r>
-            <a:r>
-              <a:rPr sz="2371" b="0" i="0">
-                <a:solidFill>
-                  <a:srgbClr val="000000"/>
-                </a:solidFill>
-                <a:latin typeface="Latin Modern Sans"/>
-              </a:rPr>
-              <a:t>tificates</a:t>
-            </a:r>
-          </a:p>
-        </p:txBody>
-      </p:sp>
-      <p:sp>
-        <p:nvSpPr>
-          <p:cNvPr id="13" name="PDF_TEXT_GROUP_155"/>
-          <p:cNvSpPr txBox="1"/>
-          <p:nvPr/>
-        </p:nvSpPr>
-        <p:spPr>
-          <a:xfrm>
-            <a:off x="4951637" y="3268129"/>
-            <a:ext cx="3857153" cy="385554"/>
-          </a:xfrm>
-          <a:prstGeom prst="rect">
-            <a:avLst/>
-          </a:prstGeom>
-          <a:noFill/>
-          <a:ln>
-            <a:noFill/>
-          </a:ln>
-        </p:spPr>
-        <p:txBody>
-          <a:bodyPr wrap="square" anchor="t" lIns="0" rIns="0" tIns="0" bIns="0">
-            <a:noAutofit/>
-          </a:bodyPr>
-          <a:lstStyle/>
-          <a:p>
-            <a:pPr algn="l">
-              <a:lnSpc>
-                <a:spcPct val="100000"/>
-              </a:lnSpc>
-              <a:spcBef>
-                <a:spcPts val="0"/>
-              </a:spcBef>
-              <a:spcAft>
-                <a:spcPts val="0"/>
-              </a:spcAft>
-            </a:pPr>
-            <a:r>
-              <a:rPr sz="2371" b="0" i="0">
-                <a:solidFill>
-                  <a:srgbClr val="000000"/>
-                </a:solidFill>
-                <a:latin typeface="Latin Modern Sans"/>
-              </a:rPr>
-              <a:t>Service/message rules plus</a:t>
-            </a:r>
-          </a:p>
-        </p:txBody>
-      </p:sp>
-      <p:sp>
-        <p:nvSpPr>
-          <p:cNvPr id="14" name="PDF_TEXT_GROUP_156"/>
-          <p:cNvSpPr txBox="1"/>
-          <p:nvPr/>
-        </p:nvSpPr>
-        <p:spPr>
-          <a:xfrm>
-            <a:off x="9433445" y="3268129"/>
-            <a:ext cx="4423717" cy="385554"/>
-          </a:xfrm>
-          <a:prstGeom prst="rect">
-            <a:avLst/>
-          </a:prstGeom>
-          <a:noFill/>
-          <a:ln>
-            <a:noFill/>
-          </a:ln>
-        </p:spPr>
-        <p:txBody>
-          <a:bodyPr wrap="square" anchor="t" lIns="0" rIns="0" tIns="0" bIns="0">
-            <a:noAutofit/>
-          </a:bodyPr>
-          <a:lstStyle/>
-          <a:p>
-            <a:pPr algn="l">
-              <a:lnSpc>
-                <a:spcPct val="100000"/>
-              </a:lnSpc>
-              <a:spcBef>
-                <a:spcPts val="0"/>
-              </a:spcBef>
-              <a:spcAft>
-                <a:spcPts val="0"/>
-              </a:spcAft>
-            </a:pPr>
-            <a:r>
-              <a:rPr sz="2371" b="0" i="0">
-                <a:solidFill>
-                  <a:srgbClr val="000000"/>
-                </a:solidFill>
-                <a:latin typeface="Latin Modern Sans"/>
-              </a:rPr>
-              <a:t>Add equivalent encryption and</a:t>
-            </a:r>
-          </a:p>
-        </p:txBody>
-      </p:sp>
-      <p:sp>
-        <p:nvSpPr>
-          <p:cNvPr id="15" name="PDF_TEXT_GROUP_157"/>
-          <p:cNvSpPr txBox="1"/>
-          <p:nvPr/>
-        </p:nvSpPr>
-        <p:spPr>
-          <a:xfrm>
-            <a:off x="4951637" y="3654457"/>
-            <a:ext cx="3998239" cy="385554"/>
-          </a:xfrm>
-          <a:prstGeom prst="rect">
-            <a:avLst/>
-          </a:prstGeom>
-          <a:noFill/>
-          <a:ln>
-            <a:noFill/>
-          </a:ln>
-        </p:spPr>
-        <p:txBody>
-          <a:bodyPr wrap="square" anchor="t" lIns="0" rIns="0" tIns="0" bIns="0">
-            <a:noAutofit/>
-          </a:bodyPr>
-          <a:lstStyle/>
-          <a:p>
-            <a:pPr algn="l">
-              <a:lnSpc>
-                <a:spcPct val="100000"/>
-              </a:lnSpc>
-              <a:spcBef>
-                <a:spcPts val="0"/>
-              </a:spcBef>
-              <a:spcAft>
-                <a:spcPts val="0"/>
-              </a:spcAft>
-            </a:pPr>
-            <a:r>
-              <a:rPr sz="2371" b="0" i="0">
-                <a:solidFill>
-                  <a:srgbClr val="000000"/>
-                </a:solidFill>
-                <a:latin typeface="Latin Modern Sans"/>
-              </a:rPr>
-              <a:t>caller or Provider credential</a:t>
-            </a:r>
-          </a:p>
-        </p:txBody>
-      </p:sp>
-      <p:sp>
-        <p:nvSpPr>
-          <p:cNvPr id="16" name="PDF_TEXT_GROUP_158"/>
-          <p:cNvSpPr txBox="1"/>
-          <p:nvPr/>
-        </p:nvSpPr>
-        <p:spPr>
-          <a:xfrm>
-            <a:off x="9433445" y="3654457"/>
-            <a:ext cx="2472170" cy="385554"/>
-          </a:xfrm>
-          <a:prstGeom prst="rect">
-            <a:avLst/>
-          </a:prstGeom>
-          <a:noFill/>
-          <a:ln>
-            <a:noFill/>
-          </a:ln>
-        </p:spPr>
-        <p:txBody>
-          <a:bodyPr wrap="square" anchor="t" lIns="0" rIns="0" tIns="0" bIns="0">
-            <a:noAutofit/>
-          </a:bodyPr>
-          <a:lstStyle/>
-          <a:p>
-            <a:pPr algn="l">
-              <a:lnSpc>
-                <a:spcPct val="100000"/>
-              </a:lnSpc>
-              <a:spcBef>
-                <a:spcPts val="0"/>
-              </a:spcBef>
-              <a:spcAft>
-                <a:spcPts val="0"/>
-              </a:spcAft>
-            </a:pPr>
-            <a:r>
-              <a:rPr sz="2371" b="0" i="0">
-                <a:solidFill>
-                  <a:srgbClr val="000000"/>
-                </a:solidFill>
-                <a:latin typeface="Latin Modern Sans"/>
-              </a:rPr>
-              <a:t>lifecycle handling</a:t>
-            </a:r>
-          </a:p>
-        </p:txBody>
-      </p:sp>
-      <p:sp>
-        <p:nvSpPr>
-          <p:cNvPr id="17" name="PDF_TEXT_GROUP_159"/>
-          <p:cNvSpPr txBox="1"/>
-          <p:nvPr/>
-        </p:nvSpPr>
-        <p:spPr>
-          <a:xfrm>
-            <a:off x="1107736" y="4222817"/>
-            <a:ext cx="3029497" cy="385554"/>
-          </a:xfrm>
-          <a:prstGeom prst="rect">
-            <a:avLst/>
-          </a:prstGeom>
-          <a:noFill/>
-          <a:ln>
-            <a:noFill/>
-          </a:ln>
-        </p:spPr>
-        <p:txBody>
-          <a:bodyPr wrap="square" anchor="t" lIns="0" rIns="0" tIns="0" bIns="0">
-            <a:noAutofit/>
-          </a:bodyPr>
-          <a:lstStyle/>
-          <a:p>
-            <a:pPr algn="l">
-              <a:lnSpc>
-                <a:spcPct val="100000"/>
-              </a:lnSpc>
-              <a:spcBef>
-                <a:spcPts val="0"/>
-              </a:spcBef>
-              <a:spcAft>
-                <a:spcPts val="0"/>
-              </a:spcAft>
-            </a:pPr>
-            <a:r>
-              <a:rPr sz="2371" b="0" i="0">
-                <a:solidFill>
-                  <a:srgbClr val="000000"/>
-                </a:solidFill>
-                <a:latin typeface="Latin Modern Sans"/>
-              </a:rPr>
-              <a:t>NDNSF ABE-backed</a:t>
-            </a:r>
-          </a:p>
-        </p:txBody>
-      </p:sp>
-      <p:sp>
-        <p:nvSpPr>
-          <p:cNvPr id="18" name="PDF_TEXT_GROUP_160"/>
-          <p:cNvSpPr txBox="1"/>
-          <p:nvPr/>
-        </p:nvSpPr>
-        <p:spPr>
-          <a:xfrm>
-            <a:off x="4951637" y="4222817"/>
-            <a:ext cx="3962070" cy="1215172"/>
-          </a:xfrm>
-          <a:prstGeom prst="rect">
-            <a:avLst/>
-          </a:prstGeom>
-          <a:noFill/>
-          <a:ln>
-            <a:noFill/>
-          </a:ln>
-        </p:spPr>
-        <p:txBody>
-          <a:bodyPr wrap="square" anchor="t" lIns="0" rIns="0" tIns="0" bIns="0">
-            <a:noAutofit/>
-          </a:bodyPr>
-          <a:lstStyle/>
-          <a:p>
-            <a:pPr algn="l">
-              <a:lnSpc>
-                <a:spcPct val="100000"/>
-              </a:lnSpc>
-              <a:spcBef>
-                <a:spcPts val="0"/>
-              </a:spcBef>
-              <a:spcAft>
-                <a:spcPts val="0"/>
-              </a:spcAft>
-            </a:pPr>
-            <a:r>
-              <a:rPr sz="2371" b="0" i="0">
-                <a:solidFill>
-                  <a:srgbClr val="000000"/>
-                </a:solidFill>
-                <a:latin typeface="Latin Modern Sans"/>
-              </a:rPr>
-              <a:t>Identity signature, encrypted</a:t>
-            </a:r>
-            <a:r>
-              <a:rPr sz="2371" b="0" i="0">
-                <a:solidFill>
-                  <a:srgbClr val="000000"/>
-                </a:solidFill>
-                <a:latin typeface="Latin Modern Sans"/>
-              </a:rPr>
-              <a:t> challenges, and</a:t>
-            </a:r>
-            <a:r>
-              <a:rPr sz="2371" b="0" i="0">
-                <a:solidFill>
-                  <a:srgbClr val="000000"/>
-                </a:solidFill>
-                <a:latin typeface="Latin Modern Sans"/>
-              </a:rPr>
-              <a:t> authorization/request state</a:t>
-            </a:r>
-          </a:p>
-        </p:txBody>
-      </p:sp>
-      <p:sp>
-        <p:nvSpPr>
-          <p:cNvPr id="19" name="PDF_TEXT_GROUP_161"/>
-          <p:cNvSpPr txBox="1"/>
-          <p:nvPr/>
-        </p:nvSpPr>
-        <p:spPr>
-          <a:xfrm>
-            <a:off x="9433445" y="4222817"/>
-            <a:ext cx="3949534" cy="828844"/>
-          </a:xfrm>
-          <a:prstGeom prst="rect">
-            <a:avLst/>
-          </a:prstGeom>
-          <a:noFill/>
-          <a:ln>
-            <a:noFill/>
-          </a:ln>
-        </p:spPr>
-        <p:txBody>
-          <a:bodyPr wrap="square" anchor="t" lIns="0" rIns="0" tIns="0" bIns="0">
-            <a:noAutofit/>
-          </a:bodyPr>
-          <a:lstStyle/>
-          <a:p>
-            <a:pPr algn="l">
-              <a:lnSpc>
-                <a:spcPct val="100000"/>
-              </a:lnSpc>
-              <a:spcBef>
-                <a:spcPts val="0"/>
-              </a:spcBef>
-              <a:spcAft>
-                <a:spcPts val="0"/>
-              </a:spcAft>
-            </a:pPr>
-            <a:r>
-              <a:rPr sz="2371" b="0" i="0">
-                <a:solidFill>
-                  <a:srgbClr val="000000"/>
-                </a:solidFill>
-                <a:latin typeface="Latin Modern Sans"/>
-              </a:rPr>
-              <a:t>Service-level ABE protection</a:t>
-            </a:r>
-            <a:r>
-              <a:rPr sz="2371" b="0" i="0">
-                <a:solidFill>
-                  <a:srgbClr val="000000"/>
-                </a:solidFill>
-                <a:latin typeface="Latin Modern Sans"/>
-              </a:rPr>
-              <a:t> of descriptor Content</a:t>
-            </a:r>
-          </a:p>
-        </p:txBody>
-      </p:sp>
-      <p:sp>
-        <p:nvSpPr>
-          <p:cNvPr id="20" name="PDF_TEXT_GROUP_162"/>
-          <p:cNvSpPr txBox="1"/>
-          <p:nvPr/>
-        </p:nvSpPr>
-        <p:spPr>
-          <a:xfrm>
-            <a:off x="1123808" y="5890377"/>
-            <a:ext cx="12473158" cy="828844"/>
-          </a:xfrm>
-          <a:prstGeom prst="rect">
-            <a:avLst/>
-          </a:prstGeom>
-          <a:noFill/>
-          <a:ln>
-            <a:noFill/>
-          </a:ln>
-        </p:spPr>
-        <p:txBody>
-          <a:bodyPr wrap="square" anchor="t" lIns="0" rIns="0" tIns="0" bIns="0">
-            <a:noAutofit/>
-          </a:bodyPr>
-          <a:lstStyle/>
-          <a:p>
-            <a:pPr algn="l">
-              <a:lnSpc>
-                <a:spcPct val="100000"/>
-              </a:lnSpc>
-              <a:spcBef>
-                <a:spcPts val="0"/>
-              </a:spcBef>
-              <a:spcAft>
-                <a:spcPts val="0"/>
-              </a:spcAft>
-            </a:pPr>
-            <a:r>
-              <a:rPr sz="2371" b="0" i="0">
-                <a:solidFill>
-                  <a:srgbClr val="000000"/>
-                </a:solidFill>
-                <a:latin typeface="Latin Modern Sans"/>
-              </a:rPr>
-              <a:t>Trust Schema [16] alone does not encrypt Content. Trust Schema plus encryption is a valid</a:t>
-            </a:r>
-            <a:r>
-              <a:rPr sz="2371" b="0" i="0">
-                <a:solidFill>
-                  <a:srgbClr val="000000"/>
-                </a:solidFill>
-                <a:latin typeface="Latin Modern Sans"/>
-              </a:rPr>
-              <a:t> alternative, not an impossible design.</a:t>
-            </a:r>
-          </a:p>
-        </p:txBody>
-      </p:sp>
-      <p:sp>
-        <p:nvSpPr>
-          <p:cNvPr id="21" name="PDF_TEXT_GROUP_163"/>
           <p:cNvSpPr txBox="1"/>
           <p:nvPr/>
         </p:nvSpPr>
@@ -7975,7 +7333,7 @@
       </p:sp>
       <p:sp>
         <p:nvSpPr>
-          <p:cNvPr id="22" name="PDF_TEXT_GROUP_164"/>
+          <p:cNvPr id="9" name="PDF_TEXT_GROUP_151"/>
           <p:cNvSpPr txBox="1"/>
           <p:nvPr/>
         </p:nvSpPr>
@@ -8023,7 +7381,7 @@
       </p:sp>
       <p:sp>
         <p:nvSpPr>
-          <p:cNvPr id="23" name="PDF_TEXT_GROUP_165"/>
+          <p:cNvPr id="10" name="PDF_TEXT_GROUP_152"/>
           <p:cNvSpPr txBox="1"/>
           <p:nvPr/>
         </p:nvSpPr>
@@ -8071,7 +7429,7 @@
       </p:sp>
       <p:sp>
         <p:nvSpPr>
-          <p:cNvPr id="24" name="PDF_TEXT_GROUP_166"/>
+          <p:cNvPr id="11" name="PDF_TEXT_GROUP_153"/>
           <p:cNvSpPr txBox="1"/>
           <p:nvPr/>
         </p:nvSpPr>
@@ -8119,7 +7477,7 @@
       </p:sp>
       <p:sp>
         <p:nvSpPr>
-          <p:cNvPr id="25" name="PDF_TEXT_GROUP_167"/>
+          <p:cNvPr id="12" name="PDF_TEXT_GROUP_154"/>
           <p:cNvSpPr txBox="1"/>
           <p:nvPr/>
         </p:nvSpPr>
@@ -8162,6 +7520,135 @@
               </a:rPr>
               <a:t>12/38</a:t>
             </a:r>
+          </a:p>
+        </p:txBody>
+      </p:sp>
+      <p:sp>
+        <p:nvSpPr>
+          <p:cNvPr id="13" name="PDF_BULLET_SPAN_215"/>
+          <p:cNvSpPr/>
+          <p:nvPr/>
+        </p:nvSpPr>
+        <p:spPr>
+          <a:xfrm rot="5400000">
+            <a:off x="1207424" y="2115348"/>
+            <a:ext cx="197164" cy="197164"/>
+          </a:xfrm>
+          <a:prstGeom prst="triangle">
+            <a:avLst/>
+          </a:prstGeom>
+          <a:solidFill>
+            <a:srgbClr val="1A3E79"/>
+          </a:solidFill>
+          <a:ln>
+            <a:noFill/>
+          </a:ln>
+        </p:spPr>
+        <p:style>
+          <a:lnRef idx="1">
+            <a:schemeClr val="accent1"/>
+          </a:lnRef>
+          <a:fillRef idx="3">
+            <a:schemeClr val="accent1"/>
+          </a:fillRef>
+          <a:effectRef idx="2">
+            <a:schemeClr val="accent1"/>
+          </a:effectRef>
+          <a:fontRef idx="minor">
+            <a:schemeClr val="lt1"/>
+          </a:fontRef>
+        </p:style>
+        <p:txBody>
+          <a:bodyPr rtlCol="0" anchor="ctr"/>
+          <a:lstStyle/>
+          <a:p>
+            <a:pPr algn="ctr"/>
+          </a:p>
+        </p:txBody>
+      </p:sp>
+      <p:sp>
+        <p:nvSpPr>
+          <p:cNvPr id="14" name="PDF_BULLET_SPAN_218"/>
+          <p:cNvSpPr/>
+          <p:nvPr/>
+        </p:nvSpPr>
+        <p:spPr>
+          <a:xfrm rot="5400000">
+            <a:off x="1207424" y="3087615"/>
+            <a:ext cx="197164" cy="197164"/>
+          </a:xfrm>
+          <a:prstGeom prst="triangle">
+            <a:avLst/>
+          </a:prstGeom>
+          <a:solidFill>
+            <a:srgbClr val="1A3E79"/>
+          </a:solidFill>
+          <a:ln>
+            <a:noFill/>
+          </a:ln>
+        </p:spPr>
+        <p:style>
+          <a:lnRef idx="1">
+            <a:schemeClr val="accent1"/>
+          </a:lnRef>
+          <a:fillRef idx="3">
+            <a:schemeClr val="accent1"/>
+          </a:fillRef>
+          <a:effectRef idx="2">
+            <a:schemeClr val="accent1"/>
+          </a:effectRef>
+          <a:fontRef idx="minor">
+            <a:schemeClr val="lt1"/>
+          </a:fontRef>
+        </p:style>
+        <p:txBody>
+          <a:bodyPr rtlCol="0" anchor="ctr"/>
+          <a:lstStyle/>
+          <a:p>
+            <a:pPr algn="ctr"/>
+          </a:p>
+        </p:txBody>
+      </p:sp>
+      <p:sp>
+        <p:nvSpPr>
+          <p:cNvPr id="15" name="PDF_BULLET_SPAN_221"/>
+          <p:cNvSpPr/>
+          <p:nvPr/>
+        </p:nvSpPr>
+        <p:spPr>
+          <a:xfrm rot="5400000">
+            <a:off x="1207424" y="4059882"/>
+            <a:ext cx="197164" cy="197164"/>
+          </a:xfrm>
+          <a:prstGeom prst="triangle">
+            <a:avLst/>
+          </a:prstGeom>
+          <a:solidFill>
+            <a:srgbClr val="1A3E79"/>
+          </a:solidFill>
+          <a:ln>
+            <a:noFill/>
+          </a:ln>
+        </p:spPr>
+        <p:style>
+          <a:lnRef idx="1">
+            <a:schemeClr val="accent1"/>
+          </a:lnRef>
+          <a:fillRef idx="3">
+            <a:schemeClr val="accent1"/>
+          </a:fillRef>
+          <a:effectRef idx="2">
+            <a:schemeClr val="accent1"/>
+          </a:effectRef>
+          <a:fontRef idx="minor">
+            <a:schemeClr val="lt1"/>
+          </a:fontRef>
+        </p:style>
+        <p:txBody>
+          <a:bodyPr rtlCol="0" anchor="ctr"/>
+          <a:lstStyle/>
+          <a:p>
+            <a:pPr algn="ctr"/>
           </a:p>
         </p:txBody>
       </p:sp>
@@ -8209,7 +7696,7 @@
       </p:pic>
       <p:sp>
         <p:nvSpPr>
-          <p:cNvPr id="3" name="PDF_TEXT_GROUP_168"/>
+          <p:cNvPr id="3" name="PDF_TEXT_GROUP_155"/>
           <p:cNvSpPr txBox="1"/>
           <p:nvPr/>
         </p:nvSpPr>
@@ -8250,251 +7737,884 @@
                 </a:solidFill>
                 <a:latin typeface="Latin Modern Sans"/>
               </a:rPr>
-              <a:t>Why Reuse ABE Capability for Authorization?</a:t>
-            </a:r>
-          </a:p>
-        </p:txBody>
-      </p:sp>
-      <p:sp>
-        <p:nvSpPr>
-          <p:cNvPr id="4" name="PDF_TEXT_GROUP_169"/>
-          <p:cNvSpPr txBox="1"/>
-          <p:nvPr/>
-        </p:nvSpPr>
-        <p:spPr>
-          <a:xfrm>
-            <a:off x="1618972" y="1881845"/>
-            <a:ext cx="10914134" cy="929891"/>
-          </a:xfrm>
-          <a:prstGeom prst="rect">
-            <a:avLst/>
-          </a:prstGeom>
-          <a:noFill/>
-          <a:ln>
-            <a:noFill/>
-          </a:ln>
-        </p:spPr>
-        <p:txBody>
-          <a:bodyPr wrap="square" anchor="t" lIns="0" rIns="0" tIns="0" bIns="0">
-            <a:noAutofit/>
-          </a:bodyPr>
-          <a:lstStyle/>
-          <a:p>
-            <a:pPr algn="l">
-              <a:lnSpc>
-                <a:spcPct val="100000"/>
-              </a:lnSpc>
-              <a:spcBef>
-                <a:spcPts val="0"/>
-              </a:spcBef>
-              <a:spcAft>
-                <a:spcPts val="0"/>
-              </a:spcAft>
-            </a:pPr>
-            <a:r>
-              <a:rPr sz="2710" b="0" i="0">
-                <a:solidFill>
-                  <a:srgbClr val="000000"/>
-                </a:solidFill>
-                <a:latin typeface="Latin Modern Sans"/>
-              </a:rPr>
-              <a:t>Enhanced NAC-ABE [19] supports key-policy ABE (KP-ABE): ciphertext</a:t>
-            </a:r>
-            <a:r>
-              <a:rPr sz="2710" b="0" i="0">
-                <a:solidFill>
-                  <a:srgbClr val="000000"/>
-                </a:solidFill>
-                <a:latin typeface="Latin Modern Sans"/>
-              </a:rPr>
-              <a:t> attributes meet a policy in an individually issued decryption key (DKEY).</a:t>
-            </a:r>
-          </a:p>
-        </p:txBody>
-      </p:sp>
-      <p:sp>
-        <p:nvSpPr>
-          <p:cNvPr id="5" name="PDF_TEXT_GROUP_170"/>
-          <p:cNvSpPr txBox="1"/>
-          <p:nvPr/>
-        </p:nvSpPr>
-        <p:spPr>
-          <a:xfrm>
-            <a:off x="1618972" y="2854112"/>
-            <a:ext cx="11765965" cy="929891"/>
-          </a:xfrm>
-          <a:prstGeom prst="rect">
-            <a:avLst/>
-          </a:prstGeom>
-          <a:noFill/>
-          <a:ln>
-            <a:noFill/>
-          </a:ln>
-        </p:spPr>
-        <p:txBody>
-          <a:bodyPr wrap="square" anchor="t" lIns="0" rIns="0" tIns="0" bIns="0">
-            <a:noAutofit/>
-          </a:bodyPr>
-          <a:lstStyle/>
-          <a:p>
-            <a:pPr algn="l">
-              <a:lnSpc>
-                <a:spcPct val="100000"/>
-              </a:lnSpc>
-              <a:spcBef>
-                <a:spcPts val="0"/>
-              </a:spcBef>
-              <a:spcAft>
-                <a:spcPts val="0"/>
-              </a:spcAft>
-            </a:pPr>
-            <a:r>
-              <a:rPr sz="2710" b="0" i="0">
-                <a:solidFill>
-                  <a:srgbClr val="000000"/>
-                </a:solidFill>
-                <a:latin typeface="Latin Modern Sans"/>
-              </a:rPr>
-              <a:t>Service permissions can be aggregated while identity-signing credentials remain</a:t>
-            </a:r>
-            <a:r>
-              <a:rPr sz="2710" b="0" i="0">
-                <a:solidFill>
-                  <a:srgbClr val="000000"/>
-                </a:solidFill>
-                <a:latin typeface="Latin Modern Sans"/>
-              </a:rPr>
-              <a:t> unchanged.</a:t>
-            </a:r>
-          </a:p>
-        </p:txBody>
-      </p:sp>
-      <p:sp>
-        <p:nvSpPr>
-          <p:cNvPr id="6" name="PDF_TEXT_GROUP_171"/>
-          <p:cNvSpPr txBox="1"/>
-          <p:nvPr/>
-        </p:nvSpPr>
-        <p:spPr>
-          <a:xfrm>
-            <a:off x="1618972" y="3826378"/>
-            <a:ext cx="11214449" cy="929891"/>
-          </a:xfrm>
-          <a:prstGeom prst="rect">
-            <a:avLst/>
-          </a:prstGeom>
-          <a:noFill/>
-          <a:ln>
-            <a:noFill/>
-          </a:ln>
-        </p:spPr>
-        <p:txBody>
-          <a:bodyPr wrap="square" anchor="t" lIns="0" rIns="0" tIns="0" bIns="0">
-            <a:noAutofit/>
-          </a:bodyPr>
-          <a:lstStyle/>
-          <a:p>
-            <a:pPr algn="l">
-              <a:lnSpc>
-                <a:spcPct val="100000"/>
-              </a:lnSpc>
-              <a:spcBef>
-                <a:spcPts val="0"/>
-              </a:spcBef>
-              <a:spcAft>
-                <a:spcPts val="0"/>
-              </a:spcAft>
-            </a:pPr>
-            <a:r>
-              <a:rPr sz="2710" b="0" i="0">
-                <a:solidFill>
-                  <a:srgbClr val="000000"/>
-                </a:solidFill>
-                <a:latin typeface="Latin Modern Sans"/>
-              </a:rPr>
-              <a:t>Challenges reuse those service permissions instead of introducing additional</a:t>
-            </a:r>
-            <a:r>
-              <a:rPr sz="2710" b="0" i="0">
-                <a:solidFill>
-                  <a:srgbClr val="000000"/>
-                </a:solidFill>
-                <a:latin typeface="Latin Modern Sans"/>
-              </a:rPr>
-              <a:t> service-role signing credentials.</a:t>
-            </a:r>
-          </a:p>
-        </p:txBody>
-      </p:sp>
-      <p:sp>
-        <p:nvSpPr>
-          <p:cNvPr id="7" name="PDF_TEXT_GROUP_172"/>
-          <p:cNvSpPr txBox="1"/>
-          <p:nvPr/>
-        </p:nvSpPr>
-        <p:spPr>
-          <a:xfrm>
-            <a:off x="1143656" y="5420066"/>
-            <a:ext cx="11853876" cy="1367730"/>
-          </a:xfrm>
-          <a:prstGeom prst="rect">
-            <a:avLst/>
-          </a:prstGeom>
-          <a:noFill/>
-          <a:ln>
-            <a:noFill/>
-          </a:ln>
-        </p:spPr>
-        <p:txBody>
-          <a:bodyPr wrap="square" anchor="t" lIns="0" rIns="0" tIns="0" bIns="0">
-            <a:noAutofit/>
-          </a:bodyPr>
-          <a:lstStyle/>
-          <a:p>
-            <a:pPr algn="l">
-              <a:lnSpc>
-                <a:spcPct val="100000"/>
-              </a:lnSpc>
-              <a:spcBef>
-                <a:spcPts val="0"/>
-              </a:spcBef>
-              <a:spcAft>
-                <a:spcPts val="0"/>
-              </a:spcAft>
-            </a:pPr>
-            <a:r>
-              <a:rPr sz="2710" b="0" i="0">
-                <a:solidFill>
-                  <a:srgbClr val="000000"/>
-                </a:solidFill>
-                <a:latin typeface="Latin Modern Sans"/>
-              </a:rPr>
-              <a:t>This saves a second entitlement representation in this design—not all key work.</a:t>
-            </a:r>
-            <a:r>
-              <a:rPr sz="2710" b="0" i="0">
-                <a:solidFill>
-                  <a:srgbClr val="000000"/>
-                </a:solidFill>
-                <a:latin typeface="Latin Modern Sans"/>
-              </a:rPr>
-              <a:t> User DKEYs, challenge processing, policy growth, status and rekeying still cost</a:t>
-            </a:r>
-            <a:r>
-              <a:rPr sz="2710" b="0" i="0">
-                <a:solidFill>
-                  <a:srgbClr val="000000"/>
-                </a:solidFill>
-                <a:latin typeface="Latin Modern Sans"/>
-              </a:rPr>
-              <a:t> resources.</a:t>
-            </a:r>
-          </a:p>
-        </p:txBody>
-      </p:sp>
-      <p:sp>
-        <p:nvSpPr>
-          <p:cNvPr id="8" name="PDF_TEXT_GROUP_173"/>
+              <a:t>A Fair Comparison Includes Encryption on Both Sides</a:t>
+            </a:r>
+          </a:p>
+        </p:txBody>
+      </p:sp>
+      <p:sp>
+        <p:nvSpPr>
+          <p:cNvPr id="4" name="PDF_TEXT_GROUP_156"/>
+          <p:cNvSpPr txBox="1"/>
+          <p:nvPr/>
+        </p:nvSpPr>
+        <p:spPr>
+          <a:xfrm>
+            <a:off x="1107736" y="1351581"/>
+            <a:ext cx="1082791" cy="385554"/>
+          </a:xfrm>
+          <a:prstGeom prst="rect">
+            <a:avLst/>
+          </a:prstGeom>
+          <a:noFill/>
+          <a:ln>
+            <a:noFill/>
+          </a:ln>
+        </p:spPr>
+        <p:txBody>
+          <a:bodyPr wrap="square" anchor="t" lIns="0" rIns="0" tIns="0" bIns="0">
+            <a:noAutofit/>
+          </a:bodyPr>
+          <a:lstStyle/>
+          <a:p>
+            <a:pPr algn="l">
+              <a:lnSpc>
+                <a:spcPct val="100000"/>
+              </a:lnSpc>
+              <a:spcBef>
+                <a:spcPts val="0"/>
+              </a:spcBef>
+              <a:spcAft>
+                <a:spcPts val="0"/>
+              </a:spcAft>
+            </a:pPr>
+            <a:r>
+              <a:rPr sz="2371" b="0" i="0">
+                <a:solidFill>
+                  <a:srgbClr val="000000"/>
+                </a:solidFill>
+                <a:latin typeface="Latin Modern Sans"/>
+              </a:rPr>
+              <a:t>Design</a:t>
+            </a:r>
+          </a:p>
+        </p:txBody>
+      </p:sp>
+      <p:sp>
+        <p:nvSpPr>
+          <p:cNvPr id="5" name="PDF_TEXT_GROUP_157"/>
+          <p:cNvSpPr txBox="1"/>
+          <p:nvPr/>
+        </p:nvSpPr>
+        <p:spPr>
+          <a:xfrm>
+            <a:off x="4951729" y="1351581"/>
+            <a:ext cx="3428411" cy="385554"/>
+          </a:xfrm>
+          <a:prstGeom prst="rect">
+            <a:avLst/>
+          </a:prstGeom>
+          <a:noFill/>
+          <a:ln>
+            <a:noFill/>
+          </a:ln>
+        </p:spPr>
+        <p:txBody>
+          <a:bodyPr wrap="square" anchor="t" lIns="0" rIns="0" tIns="0" bIns="0">
+            <a:noAutofit/>
+          </a:bodyPr>
+          <a:lstStyle/>
+          <a:p>
+            <a:pPr algn="l">
+              <a:lnSpc>
+                <a:spcPct val="100000"/>
+              </a:lnSpc>
+              <a:spcBef>
+                <a:spcPts val="0"/>
+              </a:spcBef>
+              <a:spcAft>
+                <a:spcPts val="0"/>
+              </a:spcAft>
+            </a:pPr>
+            <a:r>
+              <a:rPr sz="2371" b="0" i="0">
+                <a:solidFill>
+                  <a:srgbClr val="000000"/>
+                </a:solidFill>
+                <a:latin typeface="Latin Modern Sans"/>
+              </a:rPr>
+              <a:t>Execution authorization</a:t>
+            </a:r>
+          </a:p>
+        </p:txBody>
+      </p:sp>
+      <p:sp>
+        <p:nvSpPr>
+          <p:cNvPr id="6" name="PDF_TEXT_GROUP_158"/>
+          <p:cNvSpPr txBox="1"/>
+          <p:nvPr/>
+        </p:nvSpPr>
+        <p:spPr>
+          <a:xfrm>
+            <a:off x="9433494" y="1351581"/>
+            <a:ext cx="3527306" cy="385554"/>
+          </a:xfrm>
+          <a:prstGeom prst="rect">
+            <a:avLst/>
+          </a:prstGeom>
+          <a:noFill/>
+          <a:ln>
+            <a:noFill/>
+          </a:ln>
+        </p:spPr>
+        <p:txBody>
+          <a:bodyPr wrap="square" anchor="t" lIns="0" rIns="0" tIns="0" bIns="0">
+            <a:noAutofit/>
+          </a:bodyPr>
+          <a:lstStyle/>
+          <a:p>
+            <a:pPr algn="l">
+              <a:lnSpc>
+                <a:spcPct val="100000"/>
+              </a:lnSpc>
+              <a:spcBef>
+                <a:spcPts val="0"/>
+              </a:spcBef>
+              <a:spcAft>
+                <a:spcPts val="0"/>
+              </a:spcAft>
+            </a:pPr>
+            <a:r>
+              <a:rPr sz="2371" b="0" i="0">
+                <a:solidFill>
+                  <a:srgbClr val="000000"/>
+                </a:solidFill>
+                <a:latin typeface="Latin Modern Sans"/>
+              </a:rPr>
+              <a:t>Discovery confidentiality</a:t>
+            </a:r>
+          </a:p>
+        </p:txBody>
+      </p:sp>
+      <p:sp>
+        <p:nvSpPr>
+          <p:cNvPr id="7" name="PDF_TEXT_GROUP_159"/>
+          <p:cNvSpPr txBox="1"/>
+          <p:nvPr/>
+        </p:nvSpPr>
+        <p:spPr>
+          <a:xfrm>
+            <a:off x="1107736" y="1919940"/>
+            <a:ext cx="3690615" cy="385554"/>
+          </a:xfrm>
+          <a:prstGeom prst="rect">
+            <a:avLst/>
+          </a:prstGeom>
+          <a:noFill/>
+          <a:ln>
+            <a:noFill/>
+          </a:ln>
+        </p:spPr>
+        <p:txBody>
+          <a:bodyPr wrap="square" anchor="t" lIns="0" rIns="0" tIns="0" bIns="0">
+            <a:noAutofit/>
+          </a:bodyPr>
+          <a:lstStyle/>
+          <a:p>
+            <a:pPr algn="l">
+              <a:lnSpc>
+                <a:spcPct val="100000"/>
+              </a:lnSpc>
+              <a:spcBef>
+                <a:spcPts val="0"/>
+              </a:spcBef>
+              <a:spcAft>
+                <a:spcPts val="0"/>
+              </a:spcAft>
+            </a:pPr>
+            <a:r>
+              <a:rPr sz="2371" b="0" i="0">
+                <a:solidFill>
+                  <a:srgbClr val="000000"/>
+                </a:solidFill>
+                <a:latin typeface="Latin Modern Sans"/>
+              </a:rPr>
+              <a:t>DNMP-inspired roles [12]</a:t>
+            </a:r>
+          </a:p>
+        </p:txBody>
+      </p:sp>
+      <p:sp>
+        <p:nvSpPr>
+          <p:cNvPr id="8" name="PDF_TEXT_GROUP_160"/>
+          <p:cNvSpPr txBox="1"/>
+          <p:nvPr/>
+        </p:nvSpPr>
+        <p:spPr>
+          <a:xfrm>
+            <a:off x="4951633" y="1919940"/>
+            <a:ext cx="4215475" cy="385554"/>
+          </a:xfrm>
+          <a:prstGeom prst="rect">
+            <a:avLst/>
+          </a:prstGeom>
+          <a:noFill/>
+          <a:ln>
+            <a:noFill/>
+          </a:ln>
+        </p:spPr>
+        <p:txBody>
+          <a:bodyPr wrap="square" anchor="t" lIns="0" rIns="0" tIns="0" bIns="0">
+            <a:noAutofit/>
+          </a:bodyPr>
+          <a:lstStyle/>
+          <a:p>
+            <a:pPr algn="l">
+              <a:lnSpc>
+                <a:spcPct val="100000"/>
+              </a:lnSpc>
+              <a:spcBef>
+                <a:spcPts val="0"/>
+              </a:spcBef>
+              <a:spcAft>
+                <a:spcPts val="0"/>
+              </a:spcAft>
+            </a:pPr>
+            <a:r>
+              <a:rPr sz="2371" b="0" i="0">
+                <a:solidFill>
+                  <a:srgbClr val="000000"/>
+                </a:solidFill>
+                <a:latin typeface="Latin Modern Sans"/>
+              </a:rPr>
+              <a:t>Role/command signing rules,</a:t>
+            </a:r>
+          </a:p>
+        </p:txBody>
+      </p:sp>
+      <p:sp>
+        <p:nvSpPr>
+          <p:cNvPr id="9" name="PDF_TEXT_GROUP_161"/>
+          <p:cNvSpPr txBox="1"/>
+          <p:nvPr/>
+        </p:nvSpPr>
+        <p:spPr>
+          <a:xfrm>
+            <a:off x="9433445" y="1919940"/>
+            <a:ext cx="4423717" cy="385554"/>
+          </a:xfrm>
+          <a:prstGeom prst="rect">
+            <a:avLst/>
+          </a:prstGeom>
+          <a:noFill/>
+          <a:ln>
+            <a:noFill/>
+          </a:ln>
+        </p:spPr>
+        <p:txBody>
+          <a:bodyPr wrap="square" anchor="t" lIns="0" rIns="0" tIns="0" bIns="0">
+            <a:noAutofit/>
+          </a:bodyPr>
+          <a:lstStyle/>
+          <a:p>
+            <a:pPr algn="l">
+              <a:lnSpc>
+                <a:spcPct val="100000"/>
+              </a:lnSpc>
+              <a:spcBef>
+                <a:spcPts val="0"/>
+              </a:spcBef>
+              <a:spcAft>
+                <a:spcPts val="0"/>
+              </a:spcAft>
+            </a:pPr>
+            <a:r>
+              <a:rPr sz="2371" b="0" i="0">
+                <a:solidFill>
+                  <a:srgbClr val="000000"/>
+                </a:solidFill>
+                <a:latin typeface="Latin Modern Sans"/>
+              </a:rPr>
+              <a:t>Add encryption and group/key</a:t>
+            </a:r>
+          </a:p>
+        </p:txBody>
+      </p:sp>
+      <p:sp>
+        <p:nvSpPr>
+          <p:cNvPr id="10" name="PDF_TEXT_GROUP_162"/>
+          <p:cNvSpPr txBox="1"/>
+          <p:nvPr/>
+        </p:nvSpPr>
+        <p:spPr>
+          <a:xfrm>
+            <a:off x="4951637" y="2306268"/>
+            <a:ext cx="3851309" cy="828844"/>
+          </a:xfrm>
+          <a:prstGeom prst="rect">
+            <a:avLst/>
+          </a:prstGeom>
+          <a:noFill/>
+          <a:ln>
+            <a:noFill/>
+          </a:ln>
+        </p:spPr>
+        <p:txBody>
+          <a:bodyPr wrap="square" anchor="t" lIns="0" rIns="0" tIns="0" bIns="0">
+            <a:noAutofit/>
+          </a:bodyPr>
+          <a:lstStyle/>
+          <a:p>
+            <a:pPr algn="l">
+              <a:lnSpc>
+                <a:spcPct val="100000"/>
+              </a:lnSpc>
+              <a:spcBef>
+                <a:spcPts val="0"/>
+              </a:spcBef>
+              <a:spcAft>
+                <a:spcPts val="0"/>
+              </a:spcAft>
+            </a:pPr>
+            <a:r>
+              <a:rPr sz="2371" b="0" i="0">
+                <a:solidFill>
+                  <a:srgbClr val="000000"/>
+                </a:solidFill>
+                <a:latin typeface="Latin Modern Sans"/>
+              </a:rPr>
+              <a:t>credential and request-state</a:t>
+            </a:r>
+            <a:r>
+              <a:rPr sz="2371" b="0" i="0">
+                <a:solidFill>
+                  <a:srgbClr val="000000"/>
+                </a:solidFill>
+                <a:latin typeface="Latin Modern Sans"/>
+              </a:rPr>
+              <a:t> checks</a:t>
+            </a:r>
+          </a:p>
+        </p:txBody>
+      </p:sp>
+      <p:sp>
+        <p:nvSpPr>
+          <p:cNvPr id="11" name="PDF_TEXT_GROUP_163"/>
+          <p:cNvSpPr txBox="1"/>
+          <p:nvPr/>
+        </p:nvSpPr>
+        <p:spPr>
+          <a:xfrm>
+            <a:off x="9433445" y="2306268"/>
+            <a:ext cx="1701754" cy="385554"/>
+          </a:xfrm>
+          <a:prstGeom prst="rect">
+            <a:avLst/>
+          </a:prstGeom>
+          <a:noFill/>
+          <a:ln>
+            <a:noFill/>
+          </a:ln>
+        </p:spPr>
+        <p:txBody>
+          <a:bodyPr wrap="square" anchor="t" lIns="0" rIns="0" tIns="0" bIns="0">
+            <a:noAutofit/>
+          </a:bodyPr>
+          <a:lstStyle/>
+          <a:p>
+            <a:pPr algn="l">
+              <a:lnSpc>
+                <a:spcPct val="100000"/>
+              </a:lnSpc>
+              <a:spcBef>
+                <a:spcPts val="0"/>
+              </a:spcBef>
+              <a:spcAft>
+                <a:spcPts val="0"/>
+              </a:spcAft>
+            </a:pPr>
+            <a:r>
+              <a:rPr sz="2371" b="0" i="0">
+                <a:solidFill>
+                  <a:srgbClr val="000000"/>
+                </a:solidFill>
+                <a:latin typeface="Latin Modern Sans"/>
+              </a:rPr>
+              <a:t>distribution</a:t>
+            </a:r>
+          </a:p>
+        </p:txBody>
+      </p:sp>
+      <p:sp>
+        <p:nvSpPr>
+          <p:cNvPr id="12" name="PDF_TEXT_GROUP_164"/>
+          <p:cNvSpPr txBox="1"/>
+          <p:nvPr/>
+        </p:nvSpPr>
+        <p:spPr>
+          <a:xfrm>
+            <a:off x="1107736" y="3260956"/>
+            <a:ext cx="3586085" cy="828844"/>
+          </a:xfrm>
+          <a:prstGeom prst="rect">
+            <a:avLst/>
+          </a:prstGeom>
+          <a:noFill/>
+          <a:ln>
+            <a:noFill/>
+          </a:ln>
+        </p:spPr>
+        <p:txBody>
+          <a:bodyPr wrap="square" anchor="t" lIns="0" rIns="0" tIns="0" bIns="0">
+            <a:noAutofit/>
+          </a:bodyPr>
+          <a:lstStyle/>
+          <a:p>
+            <a:pPr algn="l">
+              <a:lnSpc>
+                <a:spcPct val="100000"/>
+              </a:lnSpc>
+              <a:spcBef>
+                <a:spcPts val="0"/>
+              </a:spcBef>
+              <a:spcAft>
+                <a:spcPts val="0"/>
+              </a:spcAft>
+            </a:pPr>
+            <a:r>
+              <a:rPr sz="2371" b="0" i="0">
+                <a:solidFill>
+                  <a:srgbClr val="000000"/>
+                </a:solidFill>
+                <a:latin typeface="Latin Modern Sans"/>
+              </a:rPr>
+              <a:t>Our per-service role cer-</a:t>
+            </a:r>
+            <a:r>
+              <a:rPr sz="2371" b="0" i="0">
+                <a:solidFill>
+                  <a:srgbClr val="000000"/>
+                </a:solidFill>
+                <a:latin typeface="Latin Modern Sans"/>
+              </a:rPr>
+              <a:t>tificates</a:t>
+            </a:r>
+          </a:p>
+        </p:txBody>
+      </p:sp>
+      <p:sp>
+        <p:nvSpPr>
+          <p:cNvPr id="13" name="PDF_TEXT_GROUP_165"/>
+          <p:cNvSpPr txBox="1"/>
+          <p:nvPr/>
+        </p:nvSpPr>
+        <p:spPr>
+          <a:xfrm>
+            <a:off x="4951637" y="3260956"/>
+            <a:ext cx="3857153" cy="385554"/>
+          </a:xfrm>
+          <a:prstGeom prst="rect">
+            <a:avLst/>
+          </a:prstGeom>
+          <a:noFill/>
+          <a:ln>
+            <a:noFill/>
+          </a:ln>
+        </p:spPr>
+        <p:txBody>
+          <a:bodyPr wrap="square" anchor="t" lIns="0" rIns="0" tIns="0" bIns="0">
+            <a:noAutofit/>
+          </a:bodyPr>
+          <a:lstStyle/>
+          <a:p>
+            <a:pPr algn="l">
+              <a:lnSpc>
+                <a:spcPct val="100000"/>
+              </a:lnSpc>
+              <a:spcBef>
+                <a:spcPts val="0"/>
+              </a:spcBef>
+              <a:spcAft>
+                <a:spcPts val="0"/>
+              </a:spcAft>
+            </a:pPr>
+            <a:r>
+              <a:rPr sz="2371" b="0" i="0">
+                <a:solidFill>
+                  <a:srgbClr val="000000"/>
+                </a:solidFill>
+                <a:latin typeface="Latin Modern Sans"/>
+              </a:rPr>
+              <a:t>Service/message rules plus</a:t>
+            </a:r>
+          </a:p>
+        </p:txBody>
+      </p:sp>
+      <p:sp>
+        <p:nvSpPr>
+          <p:cNvPr id="14" name="PDF_TEXT_GROUP_166"/>
+          <p:cNvSpPr txBox="1"/>
+          <p:nvPr/>
+        </p:nvSpPr>
+        <p:spPr>
+          <a:xfrm>
+            <a:off x="9433445" y="3260956"/>
+            <a:ext cx="4423717" cy="385554"/>
+          </a:xfrm>
+          <a:prstGeom prst="rect">
+            <a:avLst/>
+          </a:prstGeom>
+          <a:noFill/>
+          <a:ln>
+            <a:noFill/>
+          </a:ln>
+        </p:spPr>
+        <p:txBody>
+          <a:bodyPr wrap="square" anchor="t" lIns="0" rIns="0" tIns="0" bIns="0">
+            <a:noAutofit/>
+          </a:bodyPr>
+          <a:lstStyle/>
+          <a:p>
+            <a:pPr algn="l">
+              <a:lnSpc>
+                <a:spcPct val="100000"/>
+              </a:lnSpc>
+              <a:spcBef>
+                <a:spcPts val="0"/>
+              </a:spcBef>
+              <a:spcAft>
+                <a:spcPts val="0"/>
+              </a:spcAft>
+            </a:pPr>
+            <a:r>
+              <a:rPr sz="2371" b="0" i="0">
+                <a:solidFill>
+                  <a:srgbClr val="000000"/>
+                </a:solidFill>
+                <a:latin typeface="Latin Modern Sans"/>
+              </a:rPr>
+              <a:t>Add equivalent encryption and</a:t>
+            </a:r>
+          </a:p>
+        </p:txBody>
+      </p:sp>
+      <p:sp>
+        <p:nvSpPr>
+          <p:cNvPr id="15" name="PDF_TEXT_GROUP_167"/>
+          <p:cNvSpPr txBox="1"/>
+          <p:nvPr/>
+        </p:nvSpPr>
+        <p:spPr>
+          <a:xfrm>
+            <a:off x="4951637" y="3647284"/>
+            <a:ext cx="3998239" cy="385554"/>
+          </a:xfrm>
+          <a:prstGeom prst="rect">
+            <a:avLst/>
+          </a:prstGeom>
+          <a:noFill/>
+          <a:ln>
+            <a:noFill/>
+          </a:ln>
+        </p:spPr>
+        <p:txBody>
+          <a:bodyPr wrap="square" anchor="t" lIns="0" rIns="0" tIns="0" bIns="0">
+            <a:noAutofit/>
+          </a:bodyPr>
+          <a:lstStyle/>
+          <a:p>
+            <a:pPr algn="l">
+              <a:lnSpc>
+                <a:spcPct val="100000"/>
+              </a:lnSpc>
+              <a:spcBef>
+                <a:spcPts val="0"/>
+              </a:spcBef>
+              <a:spcAft>
+                <a:spcPts val="0"/>
+              </a:spcAft>
+            </a:pPr>
+            <a:r>
+              <a:rPr sz="2371" b="0" i="0">
+                <a:solidFill>
+                  <a:srgbClr val="000000"/>
+                </a:solidFill>
+                <a:latin typeface="Latin Modern Sans"/>
+              </a:rPr>
+              <a:t>caller or Provider credential</a:t>
+            </a:r>
+          </a:p>
+        </p:txBody>
+      </p:sp>
+      <p:sp>
+        <p:nvSpPr>
+          <p:cNvPr id="16" name="PDF_TEXT_GROUP_168"/>
+          <p:cNvSpPr txBox="1"/>
+          <p:nvPr/>
+        </p:nvSpPr>
+        <p:spPr>
+          <a:xfrm>
+            <a:off x="9433445" y="3647284"/>
+            <a:ext cx="2472170" cy="385554"/>
+          </a:xfrm>
+          <a:prstGeom prst="rect">
+            <a:avLst/>
+          </a:prstGeom>
+          <a:noFill/>
+          <a:ln>
+            <a:noFill/>
+          </a:ln>
+        </p:spPr>
+        <p:txBody>
+          <a:bodyPr wrap="square" anchor="t" lIns="0" rIns="0" tIns="0" bIns="0">
+            <a:noAutofit/>
+          </a:bodyPr>
+          <a:lstStyle/>
+          <a:p>
+            <a:pPr algn="l">
+              <a:lnSpc>
+                <a:spcPct val="100000"/>
+              </a:lnSpc>
+              <a:spcBef>
+                <a:spcPts val="0"/>
+              </a:spcBef>
+              <a:spcAft>
+                <a:spcPts val="0"/>
+              </a:spcAft>
+            </a:pPr>
+            <a:r>
+              <a:rPr sz="2371" b="0" i="0">
+                <a:solidFill>
+                  <a:srgbClr val="000000"/>
+                </a:solidFill>
+                <a:latin typeface="Latin Modern Sans"/>
+              </a:rPr>
+              <a:t>lifecycle handling</a:t>
+            </a:r>
+          </a:p>
+        </p:txBody>
+      </p:sp>
+      <p:sp>
+        <p:nvSpPr>
+          <p:cNvPr id="17" name="PDF_TEXT_GROUP_169"/>
+          <p:cNvSpPr txBox="1"/>
+          <p:nvPr/>
+        </p:nvSpPr>
+        <p:spPr>
+          <a:xfrm>
+            <a:off x="1107736" y="4215643"/>
+            <a:ext cx="3029497" cy="385554"/>
+          </a:xfrm>
+          <a:prstGeom prst="rect">
+            <a:avLst/>
+          </a:prstGeom>
+          <a:noFill/>
+          <a:ln>
+            <a:noFill/>
+          </a:ln>
+        </p:spPr>
+        <p:txBody>
+          <a:bodyPr wrap="square" anchor="t" lIns="0" rIns="0" tIns="0" bIns="0">
+            <a:noAutofit/>
+          </a:bodyPr>
+          <a:lstStyle/>
+          <a:p>
+            <a:pPr algn="l">
+              <a:lnSpc>
+                <a:spcPct val="100000"/>
+              </a:lnSpc>
+              <a:spcBef>
+                <a:spcPts val="0"/>
+              </a:spcBef>
+              <a:spcAft>
+                <a:spcPts val="0"/>
+              </a:spcAft>
+            </a:pPr>
+            <a:r>
+              <a:rPr sz="2371" b="0" i="0">
+                <a:solidFill>
+                  <a:srgbClr val="000000"/>
+                </a:solidFill>
+                <a:latin typeface="Latin Modern Sans"/>
+              </a:rPr>
+              <a:t>NDNSF ABE-backed</a:t>
+            </a:r>
+          </a:p>
+        </p:txBody>
+      </p:sp>
+      <p:sp>
+        <p:nvSpPr>
+          <p:cNvPr id="18" name="PDF_TEXT_GROUP_170"/>
+          <p:cNvSpPr txBox="1"/>
+          <p:nvPr/>
+        </p:nvSpPr>
+        <p:spPr>
+          <a:xfrm>
+            <a:off x="4951637" y="4215643"/>
+            <a:ext cx="3962070" cy="1215205"/>
+          </a:xfrm>
+          <a:prstGeom prst="rect">
+            <a:avLst/>
+          </a:prstGeom>
+          <a:noFill/>
+          <a:ln>
+            <a:noFill/>
+          </a:ln>
+        </p:spPr>
+        <p:txBody>
+          <a:bodyPr wrap="square" anchor="t" lIns="0" rIns="0" tIns="0" bIns="0">
+            <a:noAutofit/>
+          </a:bodyPr>
+          <a:lstStyle/>
+          <a:p>
+            <a:pPr algn="l">
+              <a:lnSpc>
+                <a:spcPct val="100000"/>
+              </a:lnSpc>
+              <a:spcBef>
+                <a:spcPts val="0"/>
+              </a:spcBef>
+              <a:spcAft>
+                <a:spcPts val="0"/>
+              </a:spcAft>
+            </a:pPr>
+            <a:r>
+              <a:rPr sz="2371" b="0" i="0">
+                <a:solidFill>
+                  <a:srgbClr val="000000"/>
+                </a:solidFill>
+                <a:latin typeface="Latin Modern Sans"/>
+              </a:rPr>
+              <a:t>Identity signature, encrypted</a:t>
+            </a:r>
+            <a:r>
+              <a:rPr sz="2371" b="0" i="0">
+                <a:solidFill>
+                  <a:srgbClr val="000000"/>
+                </a:solidFill>
+                <a:latin typeface="Latin Modern Sans"/>
+              </a:rPr>
+              <a:t> challenges, and</a:t>
+            </a:r>
+            <a:r>
+              <a:rPr sz="2371" b="0" i="0">
+                <a:solidFill>
+                  <a:srgbClr val="000000"/>
+                </a:solidFill>
+                <a:latin typeface="Latin Modern Sans"/>
+              </a:rPr>
+              <a:t> authorization/request state</a:t>
+            </a:r>
+          </a:p>
+        </p:txBody>
+      </p:sp>
+      <p:sp>
+        <p:nvSpPr>
+          <p:cNvPr id="19" name="PDF_TEXT_GROUP_171"/>
+          <p:cNvSpPr txBox="1"/>
+          <p:nvPr/>
+        </p:nvSpPr>
+        <p:spPr>
+          <a:xfrm>
+            <a:off x="9433445" y="4215643"/>
+            <a:ext cx="3949534" cy="828844"/>
+          </a:xfrm>
+          <a:prstGeom prst="rect">
+            <a:avLst/>
+          </a:prstGeom>
+          <a:noFill/>
+          <a:ln>
+            <a:noFill/>
+          </a:ln>
+        </p:spPr>
+        <p:txBody>
+          <a:bodyPr wrap="square" anchor="t" lIns="0" rIns="0" tIns="0" bIns="0">
+            <a:noAutofit/>
+          </a:bodyPr>
+          <a:lstStyle/>
+          <a:p>
+            <a:pPr algn="l">
+              <a:lnSpc>
+                <a:spcPct val="100000"/>
+              </a:lnSpc>
+              <a:spcBef>
+                <a:spcPts val="0"/>
+              </a:spcBef>
+              <a:spcAft>
+                <a:spcPts val="0"/>
+              </a:spcAft>
+            </a:pPr>
+            <a:r>
+              <a:rPr sz="2371" b="0" i="0">
+                <a:solidFill>
+                  <a:srgbClr val="000000"/>
+                </a:solidFill>
+                <a:latin typeface="Latin Modern Sans"/>
+              </a:rPr>
+              <a:t>Service-level ABE protection</a:t>
+            </a:r>
+            <a:r>
+              <a:rPr sz="2371" b="0" i="0">
+                <a:solidFill>
+                  <a:srgbClr val="000000"/>
+                </a:solidFill>
+                <a:latin typeface="Latin Modern Sans"/>
+              </a:rPr>
+              <a:t> of descriptor Content</a:t>
+            </a:r>
+          </a:p>
+        </p:txBody>
+      </p:sp>
+      <p:sp>
+        <p:nvSpPr>
+          <p:cNvPr id="20" name="PDF_TEXT_GROUP_172"/>
+          <p:cNvSpPr txBox="1"/>
+          <p:nvPr/>
+        </p:nvSpPr>
+        <p:spPr>
+          <a:xfrm>
+            <a:off x="1123808" y="5883236"/>
+            <a:ext cx="12276129" cy="828844"/>
+          </a:xfrm>
+          <a:prstGeom prst="rect">
+            <a:avLst/>
+          </a:prstGeom>
+          <a:noFill/>
+          <a:ln>
+            <a:noFill/>
+          </a:ln>
+        </p:spPr>
+        <p:txBody>
+          <a:bodyPr wrap="square" anchor="t" lIns="0" rIns="0" tIns="0" bIns="0">
+            <a:noAutofit/>
+          </a:bodyPr>
+          <a:lstStyle/>
+          <a:p>
+            <a:pPr algn="l">
+              <a:lnSpc>
+                <a:spcPct val="100000"/>
+              </a:lnSpc>
+              <a:spcBef>
+                <a:spcPts val="0"/>
+              </a:spcBef>
+              <a:spcAft>
+                <a:spcPts val="0"/>
+              </a:spcAft>
+            </a:pPr>
+            <a:r>
+              <a:rPr sz="2371" b="0" i="0">
+                <a:solidFill>
+                  <a:srgbClr val="000000"/>
+                </a:solidFill>
+                <a:latin typeface="Latin Modern Sans"/>
+              </a:rPr>
+              <a:t>Trust Schema [16] validates signing relationships; it alone does not encrypt Content. NAC</a:t>
+            </a:r>
+            <a:r>
+              <a:rPr sz="2371" b="0" i="0">
+                <a:solidFill>
+                  <a:srgbClr val="000000"/>
+                </a:solidFill>
+                <a:latin typeface="Latin Modern Sans"/>
+              </a:rPr>
+              <a:t> [4] also protects distributed content. ABE contributes attribute-policy-based decryption.</a:t>
+            </a:r>
+          </a:p>
+        </p:txBody>
+      </p:sp>
+      <p:sp>
+        <p:nvSpPr>
+          <p:cNvPr id="21" name="PDF_TEXT_GROUP_173"/>
           <p:cNvSpPr txBox="1"/>
           <p:nvPr/>
         </p:nvSpPr>
@@ -8542,7 +8662,7 @@
       </p:sp>
       <p:sp>
         <p:nvSpPr>
-          <p:cNvPr id="9" name="PDF_TEXT_GROUP_174"/>
+          <p:cNvPr id="22" name="PDF_TEXT_GROUP_174"/>
           <p:cNvSpPr txBox="1"/>
           <p:nvPr/>
         </p:nvSpPr>
@@ -8590,7 +8710,7 @@
       </p:sp>
       <p:sp>
         <p:nvSpPr>
-          <p:cNvPr id="10" name="PDF_TEXT_GROUP_175"/>
+          <p:cNvPr id="23" name="PDF_TEXT_GROUP_175"/>
           <p:cNvSpPr txBox="1"/>
           <p:nvPr/>
         </p:nvSpPr>
@@ -8638,7 +8758,7 @@
       </p:sp>
       <p:sp>
         <p:nvSpPr>
-          <p:cNvPr id="11" name="PDF_TEXT_GROUP_176"/>
+          <p:cNvPr id="24" name="PDF_TEXT_GROUP_176"/>
           <p:cNvSpPr txBox="1"/>
           <p:nvPr/>
         </p:nvSpPr>
@@ -8686,7 +8806,7 @@
       </p:sp>
       <p:sp>
         <p:nvSpPr>
-          <p:cNvPr id="12" name="PDF_TEXT_GROUP_177"/>
+          <p:cNvPr id="25" name="PDF_TEXT_GROUP_177"/>
           <p:cNvSpPr txBox="1"/>
           <p:nvPr/>
         </p:nvSpPr>
@@ -8729,135 +8849,6 @@
               </a:rPr>
               <a:t>13/38</a:t>
             </a:r>
-          </a:p>
-        </p:txBody>
-      </p:sp>
-      <p:sp>
-        <p:nvSpPr>
-          <p:cNvPr id="13" name="PDF_BULLET_SPAN_244"/>
-          <p:cNvSpPr/>
-          <p:nvPr/>
-        </p:nvSpPr>
-        <p:spPr>
-          <a:xfrm rot="5400000">
-            <a:off x="1207424" y="1967636"/>
-            <a:ext cx="197164" cy="197164"/>
-          </a:xfrm>
-          <a:prstGeom prst="triangle">
-            <a:avLst/>
-          </a:prstGeom>
-          <a:solidFill>
-            <a:srgbClr val="1A3E79"/>
-          </a:solidFill>
-          <a:ln>
-            <a:noFill/>
-          </a:ln>
-        </p:spPr>
-        <p:style>
-          <a:lnRef idx="1">
-            <a:schemeClr val="accent1"/>
-          </a:lnRef>
-          <a:fillRef idx="3">
-            <a:schemeClr val="accent1"/>
-          </a:fillRef>
-          <a:effectRef idx="2">
-            <a:schemeClr val="accent1"/>
-          </a:effectRef>
-          <a:fontRef idx="minor">
-            <a:schemeClr val="lt1"/>
-          </a:fontRef>
-        </p:style>
-        <p:txBody>
-          <a:bodyPr rtlCol="0" anchor="ctr"/>
-          <a:lstStyle/>
-          <a:p>
-            <a:pPr algn="ctr"/>
-          </a:p>
-        </p:txBody>
-      </p:sp>
-      <p:sp>
-        <p:nvSpPr>
-          <p:cNvPr id="14" name="PDF_BULLET_SPAN_247"/>
-          <p:cNvSpPr/>
-          <p:nvPr/>
-        </p:nvSpPr>
-        <p:spPr>
-          <a:xfrm rot="5400000">
-            <a:off x="1207424" y="2939902"/>
-            <a:ext cx="197164" cy="197164"/>
-          </a:xfrm>
-          <a:prstGeom prst="triangle">
-            <a:avLst/>
-          </a:prstGeom>
-          <a:solidFill>
-            <a:srgbClr val="1A3E79"/>
-          </a:solidFill>
-          <a:ln>
-            <a:noFill/>
-          </a:ln>
-        </p:spPr>
-        <p:style>
-          <a:lnRef idx="1">
-            <a:schemeClr val="accent1"/>
-          </a:lnRef>
-          <a:fillRef idx="3">
-            <a:schemeClr val="accent1"/>
-          </a:fillRef>
-          <a:effectRef idx="2">
-            <a:schemeClr val="accent1"/>
-          </a:effectRef>
-          <a:fontRef idx="minor">
-            <a:schemeClr val="lt1"/>
-          </a:fontRef>
-        </p:style>
-        <p:txBody>
-          <a:bodyPr rtlCol="0" anchor="ctr"/>
-          <a:lstStyle/>
-          <a:p>
-            <a:pPr algn="ctr"/>
-          </a:p>
-        </p:txBody>
-      </p:sp>
-      <p:sp>
-        <p:nvSpPr>
-          <p:cNvPr id="15" name="PDF_BULLET_SPAN_250"/>
-          <p:cNvSpPr/>
-          <p:nvPr/>
-        </p:nvSpPr>
-        <p:spPr>
-          <a:xfrm rot="5400000">
-            <a:off x="1207424" y="3912169"/>
-            <a:ext cx="197164" cy="197164"/>
-          </a:xfrm>
-          <a:prstGeom prst="triangle">
-            <a:avLst/>
-          </a:prstGeom>
-          <a:solidFill>
-            <a:srgbClr val="1A3E79"/>
-          </a:solidFill>
-          <a:ln>
-            <a:noFill/>
-          </a:ln>
-        </p:spPr>
-        <p:style>
-          <a:lnRef idx="1">
-            <a:schemeClr val="accent1"/>
-          </a:lnRef>
-          <a:fillRef idx="3">
-            <a:schemeClr val="accent1"/>
-          </a:fillRef>
-          <a:effectRef idx="2">
-            <a:schemeClr val="accent1"/>
-          </a:effectRef>
-          <a:fontRef idx="minor">
-            <a:schemeClr val="lt1"/>
-          </a:fontRef>
-        </p:style>
-        <p:txBody>
-          <a:bodyPr rtlCol="0" anchor="ctr"/>
-          <a:lstStyle/>
-          <a:p>
-            <a:pPr algn="ctr"/>
           </a:p>
         </p:txBody>
       </p:sp>
@@ -9469,7 +9460,7 @@
       </p:sp>
       <p:sp>
         <p:nvSpPr>
-          <p:cNvPr id="14" name="PDF_BULLET_SPAN_262"/>
+          <p:cNvPr id="14" name="PDF_BULLET_SPAN_261"/>
           <p:cNvSpPr/>
           <p:nvPr/>
         </p:nvSpPr>
@@ -9512,7 +9503,7 @@
       </p:sp>
       <p:sp>
         <p:nvSpPr>
-          <p:cNvPr id="15" name="PDF_BULLET_SPAN_265"/>
+          <p:cNvPr id="15" name="PDF_BULLET_SPAN_264"/>
           <p:cNvSpPr/>
           <p:nvPr/>
         </p:nvSpPr>
@@ -9555,7 +9546,7 @@
       </p:sp>
       <p:sp>
         <p:nvSpPr>
-          <p:cNvPr id="16" name="PDF_BULLET_SPAN_267"/>
+          <p:cNvPr id="16" name="PDF_BULLET_SPAN_266"/>
           <p:cNvSpPr/>
           <p:nvPr/>
         </p:nvSpPr>
@@ -9598,7 +9589,7 @@
       </p:sp>
       <p:sp>
         <p:nvSpPr>
-          <p:cNvPr id="17" name="PDF_BULLET_SPAN_270"/>
+          <p:cNvPr id="17" name="PDF_BULLET_SPAN_269"/>
           <p:cNvSpPr/>
           <p:nvPr/>
         </p:nvSpPr>
@@ -9724,7 +9715,7 @@
                 </a:solidFill>
                 <a:latin typeface="Latin Modern Sans"/>
               </a:rPr>
-              <a:t>Selected Exchanges and Permission Withdrawal</a:t>
+              <a:t>Authorization Lifecycle and Costs</a:t>
             </a:r>
           </a:p>
         </p:txBody>
@@ -9737,8 +9728,8 @@
         </p:nvSpPr>
         <p:spPr>
           <a:xfrm>
-            <a:off x="1618972" y="1846589"/>
-            <a:ext cx="12195031" cy="929891"/>
+            <a:off x="1618972" y="1832822"/>
+            <a:ext cx="12231294" cy="929891"/>
           </a:xfrm>
           <a:prstGeom prst="rect">
             <a:avLst/>
@@ -9772,7 +9763,7 @@
                 </a:solidFill>
                 <a:latin typeface="Latin Modern Sans"/>
               </a:rPr>
-              <a:t>Symmetric request-scoped keys protect input and result Content. Selection</a:t>
+              <a:t>Challenges check decryption capability; signatures, service permissions and request</a:t>
             </a:r>
             <a:r>
               <a:rPr sz="2710" b="0" i="0">
@@ -9781,7 +9772,7 @@
                 </a:solidFill>
                 <a:latin typeface="Latin Modern Sans"/>
               </a:rPr>
-              <a:t> supplies necessary keys only to the selected Provider through recipient encryption.</a:t>
+              <a:t> state still determine invocation acceptance.</a:t>
             </a:r>
           </a:p>
         </p:txBody>
@@ -9794,8 +9785,8 @@
         </p:nvSpPr>
         <p:spPr>
           <a:xfrm>
-            <a:off x="1618972" y="2818856"/>
-            <a:ext cx="11771879" cy="929891"/>
+            <a:off x="1618972" y="2805089"/>
+            <a:ext cx="11481704" cy="929891"/>
           </a:xfrm>
           <a:prstGeom prst="rect">
             <a:avLst/>
@@ -9829,7 +9820,7 @@
                 </a:solidFill>
                 <a:latin typeface="Latin Modern Sans"/>
               </a:rPr>
-              <a:t>The requesting User and selected Provider share the result key; other Users are</a:t>
+              <a:t>Request-scoped keys protect input/results. Selection delivers keys to selected</a:t>
             </a:r>
             <a:r>
               <a:rPr sz="2710" b="0" i="0">
@@ -9838,7 +9829,7 @@
                 </a:solidFill>
                 <a:latin typeface="Latin Modern Sans"/>
               </a:rPr>
-              <a:t> excluded under key-secrecy assumptions.</a:t>
+              <a:t> Providers; the requesting User retains access.</a:t>
             </a:r>
           </a:p>
         </p:txBody>
@@ -9851,8 +9842,8 @@
         </p:nvSpPr>
         <p:spPr>
           <a:xfrm>
-            <a:off x="1618972" y="3791123"/>
-            <a:ext cx="11928761" cy="929891"/>
+            <a:off x="1618972" y="3777356"/>
+            <a:ext cx="11972030" cy="929924"/>
           </a:xfrm>
           <a:prstGeom prst="rect">
             <a:avLst/>
@@ -9886,7 +9877,7 @@
                 </a:solidFill>
                 <a:latin typeface="Latin Modern Sans"/>
               </a:rPr>
-              <a:t>Controller-signed status affects authorization after retrieval and validation. ABE</a:t>
+              <a:t>Withdrawal requires retrieved, validated Controller status. Current ABE rotation</a:t>
             </a:r>
             <a:r>
               <a:rPr sz="2710" b="0" i="0">
@@ -9895,7 +9886,7 @@
                 </a:solidFill>
                 <a:latin typeface="Latin Modern Sans"/>
               </a:rPr>
-              <a:t> rotation limits subsequent encrypted exchanges.</a:t>
+              <a:t> is Controller-wide. [28]</a:t>
             </a:r>
           </a:p>
         </p:txBody>
@@ -9908,8 +9899,8 @@
         </p:nvSpPr>
         <p:spPr>
           <a:xfrm>
-            <a:off x="1143656" y="5384810"/>
-            <a:ext cx="12277309" cy="1367730"/>
+            <a:off x="1143656" y="5405460"/>
+            <a:ext cx="12278260" cy="1367730"/>
           </a:xfrm>
           <a:prstGeom prst="rect">
             <a:avLst/>
@@ -9943,7 +9934,7 @@
                 </a:solidFill>
                 <a:latin typeface="Latin Modern Sans"/>
               </a:rPr>
-              <a:t>Current rotation is Controller-wide. Disconnected revocation is not immediate; old</a:t>
+              <a:t>Lifecycle requirement, not a third advantage: measure policy/key size, challenge</a:t>
             </a:r>
             <a:r>
               <a:rPr sz="2710" b="0" i="0">
@@ -9952,7 +9943,7 @@
                 </a:solidFill>
                 <a:latin typeface="Latin Modern Sans"/>
               </a:rPr>
-              <a:t> plaintext and keys cannot be recalled. Runtime tests do not establish lower cost</a:t>
+              <a:t> cost, propagation and rekeying. No immediate disconnected revocation or recall of</a:t>
             </a:r>
             <a:r>
               <a:rPr sz="2710" b="0" i="0">
@@ -9961,7 +9952,7 @@
                 </a:solidFill>
                 <a:latin typeface="Latin Modern Sans"/>
               </a:rPr>
-              <a:t> than certificate revocation. [28]</a:t>
+              <a:t> old plaintext/keys.</a:t>
             </a:r>
           </a:p>
         </p:txBody>
@@ -10208,13 +10199,13 @@
       </p:sp>
       <p:sp>
         <p:nvSpPr>
-          <p:cNvPr id="13" name="PDF_BULLET_SPAN_281"/>
+          <p:cNvPr id="13" name="PDF_BULLET_SPAN_280"/>
           <p:cNvSpPr/>
           <p:nvPr/>
         </p:nvSpPr>
         <p:spPr>
           <a:xfrm rot="5400000">
-            <a:off x="1207424" y="1932380"/>
+            <a:off x="1207424" y="1918613"/>
             <a:ext cx="197164" cy="197164"/>
           </a:xfrm>
           <a:prstGeom prst="triangle">
@@ -10251,13 +10242,13 @@
       </p:sp>
       <p:sp>
         <p:nvSpPr>
-          <p:cNvPr id="14" name="PDF_BULLET_SPAN_284"/>
+          <p:cNvPr id="14" name="PDF_BULLET_SPAN_283"/>
           <p:cNvSpPr/>
           <p:nvPr/>
         </p:nvSpPr>
         <p:spPr>
           <a:xfrm rot="5400000">
-            <a:off x="1207424" y="2904647"/>
+            <a:off x="1207424" y="2890880"/>
             <a:ext cx="197164" cy="197164"/>
           </a:xfrm>
           <a:prstGeom prst="triangle">
@@ -10294,13 +10285,13 @@
       </p:sp>
       <p:sp>
         <p:nvSpPr>
-          <p:cNvPr id="15" name="PDF_BULLET_SPAN_287"/>
+          <p:cNvPr id="15" name="PDF_BULLET_SPAN_286"/>
           <p:cNvSpPr/>
           <p:nvPr/>
         </p:nvSpPr>
         <p:spPr>
           <a:xfrm rot="5400000">
-            <a:off x="1207424" y="3876913"/>
+            <a:off x="1207424" y="3863147"/>
             <a:ext cx="197164" cy="197164"/>
           </a:xfrm>
           <a:prstGeom prst="triangle">
@@ -10943,7 +10934,7 @@
       </p:sp>
       <p:sp>
         <p:nvSpPr>
-          <p:cNvPr id="14" name="PDF_BULLET_SPAN_299"/>
+          <p:cNvPr id="14" name="PDF_BULLET_SPAN_298"/>
           <p:cNvSpPr/>
           <p:nvPr/>
         </p:nvSpPr>
@@ -10986,7 +10977,7 @@
       </p:sp>
       <p:sp>
         <p:nvSpPr>
-          <p:cNvPr id="15" name="PDF_BULLET_SPAN_301"/>
+          <p:cNvPr id="15" name="PDF_BULLET_SPAN_300"/>
           <p:cNvSpPr/>
           <p:nvPr/>
         </p:nvSpPr>
@@ -11029,7 +11020,7 @@
       </p:sp>
       <p:sp>
         <p:nvSpPr>
-          <p:cNvPr id="16" name="PDF_BULLET_SPAN_304"/>
+          <p:cNvPr id="16" name="PDF_BULLET_SPAN_303"/>
           <p:cNvSpPr/>
           <p:nvPr/>
         </p:nvSpPr>
@@ -11072,7 +11063,7 @@
       </p:sp>
       <p:sp>
         <p:nvSpPr>
-          <p:cNvPr id="17" name="PDF_BULLET_SPAN_307"/>
+          <p:cNvPr id="17" name="PDF_BULLET_SPAN_306"/>
           <p:cNvSpPr/>
           <p:nvPr/>
         </p:nvSpPr>
@@ -16474,7 +16465,7 @@
       </p:sp>
       <p:sp>
         <p:nvSpPr>
-          <p:cNvPr id="14" name="PDF_BULLET_SPAN_416"/>
+          <p:cNvPr id="14" name="PDF_BULLET_SPAN_415"/>
           <p:cNvSpPr/>
           <p:nvPr/>
         </p:nvSpPr>
@@ -16517,7 +16508,7 @@
       </p:sp>
       <p:sp>
         <p:nvSpPr>
-          <p:cNvPr id="15" name="PDF_BULLET_SPAN_418"/>
+          <p:cNvPr id="15" name="PDF_BULLET_SPAN_417"/>
           <p:cNvSpPr/>
           <p:nvPr/>
         </p:nvSpPr>
@@ -16560,7 +16551,7 @@
       </p:sp>
       <p:sp>
         <p:nvSpPr>
-          <p:cNvPr id="16" name="PDF_BULLET_SPAN_421"/>
+          <p:cNvPr id="16" name="PDF_BULLET_SPAN_420"/>
           <p:cNvSpPr/>
           <p:nvPr/>
         </p:nvSpPr>
@@ -16603,7 +16594,7 @@
       </p:sp>
       <p:sp>
         <p:nvSpPr>
-          <p:cNvPr id="17" name="PDF_BULLET_SPAN_423"/>
+          <p:cNvPr id="17" name="PDF_BULLET_SPAN_422"/>
           <p:cNvSpPr/>
           <p:nvPr/>
         </p:nvSpPr>
@@ -17465,7 +17456,7 @@
       </p:sp>
       <p:sp>
         <p:nvSpPr>
-          <p:cNvPr id="18" name="PDF_BULLET_SPAN_442"/>
+          <p:cNvPr id="18" name="PDF_BULLET_SPAN_441"/>
           <p:cNvSpPr/>
           <p:nvPr/>
         </p:nvSpPr>
@@ -17508,7 +17499,7 @@
       </p:sp>
       <p:sp>
         <p:nvSpPr>
-          <p:cNvPr id="19" name="PDF_BULLET_SPAN_445"/>
+          <p:cNvPr id="19" name="PDF_BULLET_SPAN_444"/>
           <p:cNvSpPr/>
           <p:nvPr/>
         </p:nvSpPr>
@@ -17551,7 +17542,7 @@
       </p:sp>
       <p:sp>
         <p:nvSpPr>
-          <p:cNvPr id="20" name="PDF_BULLET_SPAN_448"/>
+          <p:cNvPr id="20" name="PDF_BULLET_SPAN_447"/>
           <p:cNvSpPr/>
           <p:nvPr/>
         </p:nvSpPr>
@@ -18191,7 +18182,7 @@
       </p:sp>
       <p:sp>
         <p:nvSpPr>
-          <p:cNvPr id="14" name="PDF_BULLET_SPAN_458"/>
+          <p:cNvPr id="14" name="PDF_BULLET_SPAN_457"/>
           <p:cNvSpPr/>
           <p:nvPr/>
         </p:nvSpPr>
@@ -18234,7 +18225,7 @@
       </p:sp>
       <p:sp>
         <p:nvSpPr>
-          <p:cNvPr id="15" name="PDF_BULLET_SPAN_461"/>
+          <p:cNvPr id="15" name="PDF_BULLET_SPAN_460"/>
           <p:cNvSpPr/>
           <p:nvPr/>
         </p:nvSpPr>
@@ -18277,7 +18268,7 @@
       </p:sp>
       <p:sp>
         <p:nvSpPr>
-          <p:cNvPr id="16" name="PDF_BULLET_SPAN_464"/>
+          <p:cNvPr id="16" name="PDF_BULLET_SPAN_463"/>
           <p:cNvSpPr/>
           <p:nvPr/>
         </p:nvSpPr>
@@ -18320,7 +18311,7 @@
       </p:sp>
       <p:sp>
         <p:nvSpPr>
-          <p:cNvPr id="17" name="PDF_BULLET_SPAN_466"/>
+          <p:cNvPr id="17" name="PDF_BULLET_SPAN_465"/>
           <p:cNvSpPr/>
           <p:nvPr/>
         </p:nvSpPr>
@@ -18978,7 +18969,7 @@
       </p:sp>
       <p:sp>
         <p:nvSpPr>
-          <p:cNvPr id="14" name="PDF_BULLET_SPAN_476"/>
+          <p:cNvPr id="14" name="PDF_BULLET_SPAN_475"/>
           <p:cNvSpPr/>
           <p:nvPr/>
         </p:nvSpPr>
@@ -19021,7 +19012,7 @@
       </p:sp>
       <p:sp>
         <p:nvSpPr>
-          <p:cNvPr id="15" name="PDF_BULLET_SPAN_479"/>
+          <p:cNvPr id="15" name="PDF_BULLET_SPAN_478"/>
           <p:cNvSpPr/>
           <p:nvPr/>
         </p:nvSpPr>
@@ -19064,7 +19055,7 @@
       </p:sp>
       <p:sp>
         <p:nvSpPr>
-          <p:cNvPr id="16" name="PDF_BULLET_SPAN_482"/>
+          <p:cNvPr id="16" name="PDF_BULLET_SPAN_481"/>
           <p:cNvSpPr/>
           <p:nvPr/>
         </p:nvSpPr>
@@ -19107,7 +19098,7 @@
       </p:sp>
       <p:sp>
         <p:nvSpPr>
-          <p:cNvPr id="17" name="PDF_BULLET_SPAN_485"/>
+          <p:cNvPr id="17" name="PDF_BULLET_SPAN_484"/>
           <p:cNvSpPr/>
           <p:nvPr/>
         </p:nvSpPr>
@@ -26782,7 +26773,7 @@
       </p:sp>
       <p:sp>
         <p:nvSpPr>
-          <p:cNvPr id="14" name="PDF_BULLET_SPAN_649"/>
+          <p:cNvPr id="14" name="PDF_BULLET_SPAN_648"/>
           <p:cNvSpPr/>
           <p:nvPr/>
         </p:nvSpPr>
@@ -26825,7 +26816,7 @@
       </p:sp>
       <p:sp>
         <p:nvSpPr>
-          <p:cNvPr id="15" name="PDF_BULLET_SPAN_653"/>
+          <p:cNvPr id="15" name="PDF_BULLET_SPAN_652"/>
           <p:cNvSpPr/>
           <p:nvPr/>
         </p:nvSpPr>
@@ -26868,7 +26859,7 @@
       </p:sp>
       <p:sp>
         <p:nvSpPr>
-          <p:cNvPr id="16" name="PDF_BULLET_SPAN_657"/>
+          <p:cNvPr id="16" name="PDF_BULLET_SPAN_656"/>
           <p:cNvSpPr/>
           <p:nvPr/>
         </p:nvSpPr>
@@ -26911,7 +26902,7 @@
       </p:sp>
       <p:sp>
         <p:nvSpPr>
-          <p:cNvPr id="17" name="PDF_BULLET_SPAN_660"/>
+          <p:cNvPr id="17" name="PDF_BULLET_SPAN_659"/>
           <p:cNvSpPr/>
           <p:nvPr/>
         </p:nvSpPr>

--- a/docs/PAPER/proposal-defense/slides/NDNSF_proposal_hybrid_editable.pptx
+++ b/docs/PAPER/proposal-defense/slides/NDNSF_proposal_hybrid_editable.pptx
@@ -447,7 +447,7 @@
           <a:p>
             <a:r>
               <a:rPr lang="en-US" sz="1200"/>
-              <a:t>Design Execution authorization Discovery confidentiality DNMP-inspired roles [12] Role/command signing rules, credential and request-state checks Add encryption and group/key distribution Our per-service role cer- tificates Service/message rules plus caller or Provider credential Add equivalent encryption and lifecycle handling NDNSF ABE-backed Identity signature, encrypted challenges, and authorization/request state Service-level ABE protection of descriptor Content Trust Schema [16] validates signing relationships; it alone does not encrypt Content. NAC [4] also protects distributed content. ABE contributes attribute-policy-based decryption.</a:t>
+              <a:t>Design Execution authorization Discovery confidentiality DNMP-inspired roles [12] Role/command signing rules, credential and request-state checks Add encryption and group/key distribution NDNSF ABE-backed Identity signature, encrypted challenges, and authorization/request state Service-level ABE protection of descriptor Content Trust Schema [16] validates signing relationships; it alone does not encrypt Content. NAC [4] also protects distributed content. ABE contributes attribute-policy-based decryption.</a:t>
             </a:r>
             <a:endParaRPr lang="en-US" sz="1200"/>
           </a:p>
@@ -7750,7 +7750,7 @@
         </p:nvSpPr>
         <p:spPr>
           <a:xfrm>
-            <a:off x="1107736" y="1351581"/>
+            <a:off x="1107736" y="1733449"/>
             <a:ext cx="1082791" cy="385554"/>
           </a:xfrm>
           <a:prstGeom prst="rect">
@@ -7798,7 +7798,7 @@
         </p:nvSpPr>
         <p:spPr>
           <a:xfrm>
-            <a:off x="4951729" y="1351581"/>
+            <a:off x="4951729" y="1733449"/>
             <a:ext cx="3428411" cy="385554"/>
           </a:xfrm>
           <a:prstGeom prst="rect">
@@ -7846,7 +7846,7 @@
         </p:nvSpPr>
         <p:spPr>
           <a:xfrm>
-            <a:off x="9433494" y="1351581"/>
+            <a:off x="9433494" y="1733449"/>
             <a:ext cx="3527306" cy="385554"/>
           </a:xfrm>
           <a:prstGeom prst="rect">
@@ -7894,7 +7894,7 @@
         </p:nvSpPr>
         <p:spPr>
           <a:xfrm>
-            <a:off x="1107736" y="1919940"/>
+            <a:off x="1107736" y="2301809"/>
             <a:ext cx="3690615" cy="385554"/>
           </a:xfrm>
           <a:prstGeom prst="rect">
@@ -7942,7 +7942,7 @@
         </p:nvSpPr>
         <p:spPr>
           <a:xfrm>
-            <a:off x="4951633" y="1919940"/>
+            <a:off x="4951633" y="2301809"/>
             <a:ext cx="4215475" cy="385554"/>
           </a:xfrm>
           <a:prstGeom prst="rect">
@@ -7990,7 +7990,7 @@
         </p:nvSpPr>
         <p:spPr>
           <a:xfrm>
-            <a:off x="9433445" y="1919940"/>
+            <a:off x="9433445" y="2301809"/>
             <a:ext cx="4423717" cy="385554"/>
           </a:xfrm>
           <a:prstGeom prst="rect">
@@ -8038,7 +8038,7 @@
         </p:nvSpPr>
         <p:spPr>
           <a:xfrm>
-            <a:off x="4951637" y="2306268"/>
+            <a:off x="4951637" y="2688137"/>
             <a:ext cx="3851309" cy="828844"/>
           </a:xfrm>
           <a:prstGeom prst="rect">
@@ -8095,7 +8095,7 @@
         </p:nvSpPr>
         <p:spPr>
           <a:xfrm>
-            <a:off x="9433445" y="2306268"/>
+            <a:off x="9433445" y="2688137"/>
             <a:ext cx="1701754" cy="385554"/>
           </a:xfrm>
           <a:prstGeom prst="rect">
@@ -8143,8 +8143,8 @@
         </p:nvSpPr>
         <p:spPr>
           <a:xfrm>
-            <a:off x="1107736" y="3260956"/>
-            <a:ext cx="3586085" cy="828844"/>
+            <a:off x="1107736" y="3642824"/>
+            <a:ext cx="3029497" cy="385554"/>
           </a:xfrm>
           <a:prstGeom prst="rect">
             <a:avLst/>
@@ -8178,8 +8178,47 @@
                 </a:solidFill>
                 <a:latin typeface="Latin Modern Sans"/>
               </a:rPr>
-              <a:t>Our per-service role cer-</a:t>
-            </a:r>
+              <a:t>NDNSF ABE-backed</a:t>
+            </a:r>
+          </a:p>
+        </p:txBody>
+      </p:sp>
+      <p:sp>
+        <p:nvSpPr>
+          <p:cNvPr id="13" name="PDF_TEXT_GROUP_165"/>
+          <p:cNvSpPr txBox="1"/>
+          <p:nvPr/>
+        </p:nvSpPr>
+        <p:spPr>
+          <a:xfrm>
+            <a:off x="4951637" y="3642824"/>
+            <a:ext cx="3962070" cy="1215205"/>
+          </a:xfrm>
+          <a:prstGeom prst="rect">
+            <a:avLst/>
+          </a:prstGeom>
+          <a:noFill/>
+          <a:ln>
+            <a:noFill/>
+          </a:ln>
+        </p:spPr>
+        <p:txBody>
+          <a:bodyPr wrap="square" anchor="t" lIns="0" rIns="0" tIns="0" bIns="0">
+            <a:noAutofit/>
+          </a:bodyPr>
+          <a:lstStyle/>
+          <a:p>
+            <a:pPr algn="l">
+              <a:lnSpc>
+                <a:spcPct val="100000"/>
+              </a:lnSpc>
+              <a:spcBef>
+                <a:spcPts val="0"/>
+              </a:spcBef>
+              <a:spcAft>
+                <a:spcPts val="0"/>
+              </a:spcAft>
+            </a:pPr>
             <a:r>
               <a:rPr sz="2371" b="0" i="0">
                 <a:solidFill>
@@ -8187,47 +8226,8 @@
                 </a:solidFill>
                 <a:latin typeface="Latin Modern Sans"/>
               </a:rPr>
-              <a:t>tificates</a:t>
-            </a:r>
-          </a:p>
-        </p:txBody>
-      </p:sp>
-      <p:sp>
-        <p:nvSpPr>
-          <p:cNvPr id="13" name="PDF_TEXT_GROUP_165"/>
-          <p:cNvSpPr txBox="1"/>
-          <p:nvPr/>
-        </p:nvSpPr>
-        <p:spPr>
-          <a:xfrm>
-            <a:off x="4951637" y="3260956"/>
-            <a:ext cx="3857153" cy="385554"/>
-          </a:xfrm>
-          <a:prstGeom prst="rect">
-            <a:avLst/>
-          </a:prstGeom>
-          <a:noFill/>
-          <a:ln>
-            <a:noFill/>
-          </a:ln>
-        </p:spPr>
-        <p:txBody>
-          <a:bodyPr wrap="square" anchor="t" lIns="0" rIns="0" tIns="0" bIns="0">
-            <a:noAutofit/>
-          </a:bodyPr>
-          <a:lstStyle/>
-          <a:p>
-            <a:pPr algn="l">
-              <a:lnSpc>
-                <a:spcPct val="100000"/>
-              </a:lnSpc>
-              <a:spcBef>
-                <a:spcPts val="0"/>
-              </a:spcBef>
-              <a:spcAft>
-                <a:spcPts val="0"/>
-              </a:spcAft>
-            </a:pPr>
+              <a:t>Identity signature, encrypted</a:t>
+            </a:r>
             <a:r>
               <a:rPr sz="2371" b="0" i="0">
                 <a:solidFill>
@@ -8235,7 +8235,16 @@
                 </a:solidFill>
                 <a:latin typeface="Latin Modern Sans"/>
               </a:rPr>
-              <a:t>Service/message rules plus</a:t>
+              <a:t> challenges, and</a:t>
+            </a:r>
+            <a:r>
+              <a:rPr sz="2371" b="0" i="0">
+                <a:solidFill>
+                  <a:srgbClr val="000000"/>
+                </a:solidFill>
+                <a:latin typeface="Latin Modern Sans"/>
+              </a:rPr>
+              <a:t> authorization/request state</a:t>
             </a:r>
           </a:p>
         </p:txBody>
@@ -8248,8 +8257,8 @@
         </p:nvSpPr>
         <p:spPr>
           <a:xfrm>
-            <a:off x="9433445" y="3260956"/>
-            <a:ext cx="4423717" cy="385554"/>
+            <a:off x="9433445" y="3642824"/>
+            <a:ext cx="3949534" cy="828877"/>
           </a:xfrm>
           <a:prstGeom prst="rect">
             <a:avLst/>
@@ -8283,7 +8292,16 @@
                 </a:solidFill>
                 <a:latin typeface="Latin Modern Sans"/>
               </a:rPr>
-              <a:t>Add equivalent encryption and</a:t>
+              <a:t>Service-level ABE protection</a:t>
+            </a:r>
+            <a:r>
+              <a:rPr sz="2371" b="0" i="0">
+                <a:solidFill>
+                  <a:srgbClr val="000000"/>
+                </a:solidFill>
+                <a:latin typeface="Latin Modern Sans"/>
+              </a:rPr>
+              <a:t> of descriptor Content</a:t>
             </a:r>
           </a:p>
         </p:txBody>
@@ -8296,8 +8314,8 @@
         </p:nvSpPr>
         <p:spPr>
           <a:xfrm>
-            <a:off x="4951637" y="3647284"/>
-            <a:ext cx="3998239" cy="385554"/>
+            <a:off x="1123808" y="5310417"/>
+            <a:ext cx="12276129" cy="828844"/>
           </a:xfrm>
           <a:prstGeom prst="rect">
             <a:avLst/>
@@ -8331,7 +8349,16 @@
                 </a:solidFill>
                 <a:latin typeface="Latin Modern Sans"/>
               </a:rPr>
-              <a:t>caller or Provider credential</a:t>
+              <a:t>Trust Schema [16] validates signing relationships; it alone does not encrypt Content. NAC</a:t>
+            </a:r>
+            <a:r>
+              <a:rPr sz="2371" b="0" i="0">
+                <a:solidFill>
+                  <a:srgbClr val="000000"/>
+                </a:solidFill>
+                <a:latin typeface="Latin Modern Sans"/>
+              </a:rPr>
+              <a:t> [4] also protects distributed content. ABE contributes attribute-policy-based decryption.</a:t>
             </a:r>
           </a:p>
         </p:txBody>
@@ -8339,282 +8366,6 @@
       <p:sp>
         <p:nvSpPr>
           <p:cNvPr id="16" name="PDF_TEXT_GROUP_168"/>
-          <p:cNvSpPr txBox="1"/>
-          <p:nvPr/>
-        </p:nvSpPr>
-        <p:spPr>
-          <a:xfrm>
-            <a:off x="9433445" y="3647284"/>
-            <a:ext cx="2472170" cy="385554"/>
-          </a:xfrm>
-          <a:prstGeom prst="rect">
-            <a:avLst/>
-          </a:prstGeom>
-          <a:noFill/>
-          <a:ln>
-            <a:noFill/>
-          </a:ln>
-        </p:spPr>
-        <p:txBody>
-          <a:bodyPr wrap="square" anchor="t" lIns="0" rIns="0" tIns="0" bIns="0">
-            <a:noAutofit/>
-          </a:bodyPr>
-          <a:lstStyle/>
-          <a:p>
-            <a:pPr algn="l">
-              <a:lnSpc>
-                <a:spcPct val="100000"/>
-              </a:lnSpc>
-              <a:spcBef>
-                <a:spcPts val="0"/>
-              </a:spcBef>
-              <a:spcAft>
-                <a:spcPts val="0"/>
-              </a:spcAft>
-            </a:pPr>
-            <a:r>
-              <a:rPr sz="2371" b="0" i="0">
-                <a:solidFill>
-                  <a:srgbClr val="000000"/>
-                </a:solidFill>
-                <a:latin typeface="Latin Modern Sans"/>
-              </a:rPr>
-              <a:t>lifecycle handling</a:t>
-            </a:r>
-          </a:p>
-        </p:txBody>
-      </p:sp>
-      <p:sp>
-        <p:nvSpPr>
-          <p:cNvPr id="17" name="PDF_TEXT_GROUP_169"/>
-          <p:cNvSpPr txBox="1"/>
-          <p:nvPr/>
-        </p:nvSpPr>
-        <p:spPr>
-          <a:xfrm>
-            <a:off x="1107736" y="4215643"/>
-            <a:ext cx="3029497" cy="385554"/>
-          </a:xfrm>
-          <a:prstGeom prst="rect">
-            <a:avLst/>
-          </a:prstGeom>
-          <a:noFill/>
-          <a:ln>
-            <a:noFill/>
-          </a:ln>
-        </p:spPr>
-        <p:txBody>
-          <a:bodyPr wrap="square" anchor="t" lIns="0" rIns="0" tIns="0" bIns="0">
-            <a:noAutofit/>
-          </a:bodyPr>
-          <a:lstStyle/>
-          <a:p>
-            <a:pPr algn="l">
-              <a:lnSpc>
-                <a:spcPct val="100000"/>
-              </a:lnSpc>
-              <a:spcBef>
-                <a:spcPts val="0"/>
-              </a:spcBef>
-              <a:spcAft>
-                <a:spcPts val="0"/>
-              </a:spcAft>
-            </a:pPr>
-            <a:r>
-              <a:rPr sz="2371" b="0" i="0">
-                <a:solidFill>
-                  <a:srgbClr val="000000"/>
-                </a:solidFill>
-                <a:latin typeface="Latin Modern Sans"/>
-              </a:rPr>
-              <a:t>NDNSF ABE-backed</a:t>
-            </a:r>
-          </a:p>
-        </p:txBody>
-      </p:sp>
-      <p:sp>
-        <p:nvSpPr>
-          <p:cNvPr id="18" name="PDF_TEXT_GROUP_170"/>
-          <p:cNvSpPr txBox="1"/>
-          <p:nvPr/>
-        </p:nvSpPr>
-        <p:spPr>
-          <a:xfrm>
-            <a:off x="4951637" y="4215643"/>
-            <a:ext cx="3962070" cy="1215205"/>
-          </a:xfrm>
-          <a:prstGeom prst="rect">
-            <a:avLst/>
-          </a:prstGeom>
-          <a:noFill/>
-          <a:ln>
-            <a:noFill/>
-          </a:ln>
-        </p:spPr>
-        <p:txBody>
-          <a:bodyPr wrap="square" anchor="t" lIns="0" rIns="0" tIns="0" bIns="0">
-            <a:noAutofit/>
-          </a:bodyPr>
-          <a:lstStyle/>
-          <a:p>
-            <a:pPr algn="l">
-              <a:lnSpc>
-                <a:spcPct val="100000"/>
-              </a:lnSpc>
-              <a:spcBef>
-                <a:spcPts val="0"/>
-              </a:spcBef>
-              <a:spcAft>
-                <a:spcPts val="0"/>
-              </a:spcAft>
-            </a:pPr>
-            <a:r>
-              <a:rPr sz="2371" b="0" i="0">
-                <a:solidFill>
-                  <a:srgbClr val="000000"/>
-                </a:solidFill>
-                <a:latin typeface="Latin Modern Sans"/>
-              </a:rPr>
-              <a:t>Identity signature, encrypted</a:t>
-            </a:r>
-            <a:r>
-              <a:rPr sz="2371" b="0" i="0">
-                <a:solidFill>
-                  <a:srgbClr val="000000"/>
-                </a:solidFill>
-                <a:latin typeface="Latin Modern Sans"/>
-              </a:rPr>
-              <a:t> challenges, and</a:t>
-            </a:r>
-            <a:r>
-              <a:rPr sz="2371" b="0" i="0">
-                <a:solidFill>
-                  <a:srgbClr val="000000"/>
-                </a:solidFill>
-                <a:latin typeface="Latin Modern Sans"/>
-              </a:rPr>
-              <a:t> authorization/request state</a:t>
-            </a:r>
-          </a:p>
-        </p:txBody>
-      </p:sp>
-      <p:sp>
-        <p:nvSpPr>
-          <p:cNvPr id="19" name="PDF_TEXT_GROUP_171"/>
-          <p:cNvSpPr txBox="1"/>
-          <p:nvPr/>
-        </p:nvSpPr>
-        <p:spPr>
-          <a:xfrm>
-            <a:off x="9433445" y="4215643"/>
-            <a:ext cx="3949534" cy="828844"/>
-          </a:xfrm>
-          <a:prstGeom prst="rect">
-            <a:avLst/>
-          </a:prstGeom>
-          <a:noFill/>
-          <a:ln>
-            <a:noFill/>
-          </a:ln>
-        </p:spPr>
-        <p:txBody>
-          <a:bodyPr wrap="square" anchor="t" lIns="0" rIns="0" tIns="0" bIns="0">
-            <a:noAutofit/>
-          </a:bodyPr>
-          <a:lstStyle/>
-          <a:p>
-            <a:pPr algn="l">
-              <a:lnSpc>
-                <a:spcPct val="100000"/>
-              </a:lnSpc>
-              <a:spcBef>
-                <a:spcPts val="0"/>
-              </a:spcBef>
-              <a:spcAft>
-                <a:spcPts val="0"/>
-              </a:spcAft>
-            </a:pPr>
-            <a:r>
-              <a:rPr sz="2371" b="0" i="0">
-                <a:solidFill>
-                  <a:srgbClr val="000000"/>
-                </a:solidFill>
-                <a:latin typeface="Latin Modern Sans"/>
-              </a:rPr>
-              <a:t>Service-level ABE protection</a:t>
-            </a:r>
-            <a:r>
-              <a:rPr sz="2371" b="0" i="0">
-                <a:solidFill>
-                  <a:srgbClr val="000000"/>
-                </a:solidFill>
-                <a:latin typeface="Latin Modern Sans"/>
-              </a:rPr>
-              <a:t> of descriptor Content</a:t>
-            </a:r>
-          </a:p>
-        </p:txBody>
-      </p:sp>
-      <p:sp>
-        <p:nvSpPr>
-          <p:cNvPr id="20" name="PDF_TEXT_GROUP_172"/>
-          <p:cNvSpPr txBox="1"/>
-          <p:nvPr/>
-        </p:nvSpPr>
-        <p:spPr>
-          <a:xfrm>
-            <a:off x="1123808" y="5883236"/>
-            <a:ext cx="12276129" cy="828844"/>
-          </a:xfrm>
-          <a:prstGeom prst="rect">
-            <a:avLst/>
-          </a:prstGeom>
-          <a:noFill/>
-          <a:ln>
-            <a:noFill/>
-          </a:ln>
-        </p:spPr>
-        <p:txBody>
-          <a:bodyPr wrap="square" anchor="t" lIns="0" rIns="0" tIns="0" bIns="0">
-            <a:noAutofit/>
-          </a:bodyPr>
-          <a:lstStyle/>
-          <a:p>
-            <a:pPr algn="l">
-              <a:lnSpc>
-                <a:spcPct val="100000"/>
-              </a:lnSpc>
-              <a:spcBef>
-                <a:spcPts val="0"/>
-              </a:spcBef>
-              <a:spcAft>
-                <a:spcPts val="0"/>
-              </a:spcAft>
-            </a:pPr>
-            <a:r>
-              <a:rPr sz="2371" b="0" i="0">
-                <a:solidFill>
-                  <a:srgbClr val="000000"/>
-                </a:solidFill>
-                <a:latin typeface="Latin Modern Sans"/>
-              </a:rPr>
-              <a:t>Trust Schema [16] validates signing relationships; it alone does not encrypt Content. NAC</a:t>
-            </a:r>
-            <a:r>
-              <a:rPr sz="2371" b="0" i="0">
-                <a:solidFill>
-                  <a:srgbClr val="000000"/>
-                </a:solidFill>
-                <a:latin typeface="Latin Modern Sans"/>
-              </a:rPr>
-              <a:t> [4] also protects distributed content. ABE contributes attribute-policy-based decryption.</a:t>
-            </a:r>
-          </a:p>
-        </p:txBody>
-      </p:sp>
-      <p:sp>
-        <p:nvSpPr>
-          <p:cNvPr id="21" name="PDF_TEXT_GROUP_173"/>
           <p:cNvSpPr txBox="1"/>
           <p:nvPr/>
         </p:nvSpPr>
@@ -8662,7 +8413,7 @@
       </p:sp>
       <p:sp>
         <p:nvSpPr>
-          <p:cNvPr id="22" name="PDF_TEXT_GROUP_174"/>
+          <p:cNvPr id="17" name="PDF_TEXT_GROUP_169"/>
           <p:cNvSpPr txBox="1"/>
           <p:nvPr/>
         </p:nvSpPr>
@@ -8710,7 +8461,7 @@
       </p:sp>
       <p:sp>
         <p:nvSpPr>
-          <p:cNvPr id="23" name="PDF_TEXT_GROUP_175"/>
+          <p:cNvPr id="18" name="PDF_TEXT_GROUP_170"/>
           <p:cNvSpPr txBox="1"/>
           <p:nvPr/>
         </p:nvSpPr>
@@ -8758,7 +8509,7 @@
       </p:sp>
       <p:sp>
         <p:nvSpPr>
-          <p:cNvPr id="24" name="PDF_TEXT_GROUP_176"/>
+          <p:cNvPr id="19" name="PDF_TEXT_GROUP_171"/>
           <p:cNvSpPr txBox="1"/>
           <p:nvPr/>
         </p:nvSpPr>
@@ -8806,7 +8557,7 @@
       </p:sp>
       <p:sp>
         <p:nvSpPr>
-          <p:cNvPr id="25" name="PDF_TEXT_GROUP_177"/>
+          <p:cNvPr id="20" name="PDF_TEXT_GROUP_172"/>
           <p:cNvSpPr txBox="1"/>
           <p:nvPr/>
         </p:nvSpPr>
@@ -8896,7 +8647,7 @@
       </p:pic>
       <p:sp>
         <p:nvSpPr>
-          <p:cNvPr id="3" name="PDF_TEXT_GROUP_178"/>
+          <p:cNvPr id="3" name="PDF_TEXT_GROUP_173"/>
           <p:cNvSpPr txBox="1"/>
           <p:nvPr/>
         </p:nvSpPr>
@@ -8944,7 +8695,7 @@
       </p:sp>
       <p:sp>
         <p:nvSpPr>
-          <p:cNvPr id="4" name="PDF_TEXT_GROUP_179"/>
+          <p:cNvPr id="4" name="PDF_TEXT_GROUP_174"/>
           <p:cNvSpPr txBox="1"/>
           <p:nvPr/>
         </p:nvSpPr>
@@ -9001,7 +8752,7 @@
       </p:sp>
       <p:sp>
         <p:nvSpPr>
-          <p:cNvPr id="5" name="PDF_TEXT_GROUP_180"/>
+          <p:cNvPr id="5" name="PDF_TEXT_GROUP_175"/>
           <p:cNvSpPr txBox="1"/>
           <p:nvPr/>
         </p:nvSpPr>
@@ -9049,7 +8800,7 @@
       </p:sp>
       <p:sp>
         <p:nvSpPr>
-          <p:cNvPr id="6" name="PDF_TEXT_GROUP_181"/>
+          <p:cNvPr id="6" name="PDF_TEXT_GROUP_176"/>
           <p:cNvSpPr txBox="1"/>
           <p:nvPr/>
         </p:nvSpPr>
@@ -9106,7 +8857,7 @@
       </p:sp>
       <p:sp>
         <p:nvSpPr>
-          <p:cNvPr id="7" name="PDF_TEXT_GROUP_182"/>
+          <p:cNvPr id="7" name="PDF_TEXT_GROUP_177"/>
           <p:cNvSpPr txBox="1"/>
           <p:nvPr/>
         </p:nvSpPr>
@@ -9163,7 +8914,7 @@
       </p:sp>
       <p:sp>
         <p:nvSpPr>
-          <p:cNvPr id="8" name="PDF_TEXT_GROUP_183"/>
+          <p:cNvPr id="8" name="PDF_TEXT_GROUP_178"/>
           <p:cNvSpPr txBox="1"/>
           <p:nvPr/>
         </p:nvSpPr>
@@ -9220,7 +8971,7 @@
       </p:sp>
       <p:sp>
         <p:nvSpPr>
-          <p:cNvPr id="9" name="PDF_TEXT_GROUP_184"/>
+          <p:cNvPr id="9" name="PDF_TEXT_GROUP_179"/>
           <p:cNvSpPr txBox="1"/>
           <p:nvPr/>
         </p:nvSpPr>
@@ -9268,7 +9019,7 @@
       </p:sp>
       <p:sp>
         <p:nvSpPr>
-          <p:cNvPr id="10" name="PDF_TEXT_GROUP_185"/>
+          <p:cNvPr id="10" name="PDF_TEXT_GROUP_180"/>
           <p:cNvSpPr txBox="1"/>
           <p:nvPr/>
         </p:nvSpPr>
@@ -9316,7 +9067,7 @@
       </p:sp>
       <p:sp>
         <p:nvSpPr>
-          <p:cNvPr id="11" name="PDF_TEXT_GROUP_186"/>
+          <p:cNvPr id="11" name="PDF_TEXT_GROUP_181"/>
           <p:cNvSpPr txBox="1"/>
           <p:nvPr/>
         </p:nvSpPr>
@@ -9364,7 +9115,7 @@
       </p:sp>
       <p:sp>
         <p:nvSpPr>
-          <p:cNvPr id="12" name="PDF_TEXT_GROUP_187"/>
+          <p:cNvPr id="12" name="PDF_TEXT_GROUP_182"/>
           <p:cNvSpPr txBox="1"/>
           <p:nvPr/>
         </p:nvSpPr>
@@ -9412,7 +9163,7 @@
       </p:sp>
       <p:sp>
         <p:nvSpPr>
-          <p:cNvPr id="13" name="PDF_TEXT_GROUP_188"/>
+          <p:cNvPr id="13" name="PDF_TEXT_GROUP_183"/>
           <p:cNvSpPr txBox="1"/>
           <p:nvPr/>
         </p:nvSpPr>
@@ -9460,7 +9211,7 @@
       </p:sp>
       <p:sp>
         <p:nvSpPr>
-          <p:cNvPr id="14" name="PDF_BULLET_SPAN_261"/>
+          <p:cNvPr id="14" name="PDF_BULLET_SPAN_255"/>
           <p:cNvSpPr/>
           <p:nvPr/>
         </p:nvSpPr>
@@ -9503,7 +9254,7 @@
       </p:sp>
       <p:sp>
         <p:nvSpPr>
-          <p:cNvPr id="15" name="PDF_BULLET_SPAN_264"/>
+          <p:cNvPr id="15" name="PDF_BULLET_SPAN_258"/>
           <p:cNvSpPr/>
           <p:nvPr/>
         </p:nvSpPr>
@@ -9546,7 +9297,7 @@
       </p:sp>
       <p:sp>
         <p:nvSpPr>
-          <p:cNvPr id="16" name="PDF_BULLET_SPAN_266"/>
+          <p:cNvPr id="16" name="PDF_BULLET_SPAN_260"/>
           <p:cNvSpPr/>
           <p:nvPr/>
         </p:nvSpPr>
@@ -9589,7 +9340,7 @@
       </p:sp>
       <p:sp>
         <p:nvSpPr>
-          <p:cNvPr id="17" name="PDF_BULLET_SPAN_269"/>
+          <p:cNvPr id="17" name="PDF_BULLET_SPAN_263"/>
           <p:cNvSpPr/>
           <p:nvPr/>
         </p:nvSpPr>
@@ -9674,7 +9425,7 @@
       </p:pic>
       <p:sp>
         <p:nvSpPr>
-          <p:cNvPr id="3" name="PDF_TEXT_GROUP_189"/>
+          <p:cNvPr id="3" name="PDF_TEXT_GROUP_184"/>
           <p:cNvSpPr txBox="1"/>
           <p:nvPr/>
         </p:nvSpPr>
@@ -9722,7 +9473,7 @@
       </p:sp>
       <p:sp>
         <p:nvSpPr>
-          <p:cNvPr id="4" name="PDF_TEXT_GROUP_190"/>
+          <p:cNvPr id="4" name="PDF_TEXT_GROUP_185"/>
           <p:cNvSpPr txBox="1"/>
           <p:nvPr/>
         </p:nvSpPr>
@@ -9779,7 +9530,7 @@
       </p:sp>
       <p:sp>
         <p:nvSpPr>
-          <p:cNvPr id="5" name="PDF_TEXT_GROUP_191"/>
+          <p:cNvPr id="5" name="PDF_TEXT_GROUP_186"/>
           <p:cNvSpPr txBox="1"/>
           <p:nvPr/>
         </p:nvSpPr>
@@ -9836,7 +9587,7 @@
       </p:sp>
       <p:sp>
         <p:nvSpPr>
-          <p:cNvPr id="6" name="PDF_TEXT_GROUP_192"/>
+          <p:cNvPr id="6" name="PDF_TEXT_GROUP_187"/>
           <p:cNvSpPr txBox="1"/>
           <p:nvPr/>
         </p:nvSpPr>
@@ -9893,7 +9644,7 @@
       </p:sp>
       <p:sp>
         <p:nvSpPr>
-          <p:cNvPr id="7" name="PDF_TEXT_GROUP_193"/>
+          <p:cNvPr id="7" name="PDF_TEXT_GROUP_188"/>
           <p:cNvSpPr txBox="1"/>
           <p:nvPr/>
         </p:nvSpPr>
@@ -9959,7 +9710,7 @@
       </p:sp>
       <p:sp>
         <p:nvSpPr>
-          <p:cNvPr id="8" name="PDF_TEXT_GROUP_194"/>
+          <p:cNvPr id="8" name="PDF_TEXT_GROUP_189"/>
           <p:cNvSpPr txBox="1"/>
           <p:nvPr/>
         </p:nvSpPr>
@@ -10007,7 +9758,7 @@
       </p:sp>
       <p:sp>
         <p:nvSpPr>
-          <p:cNvPr id="9" name="PDF_TEXT_GROUP_195"/>
+          <p:cNvPr id="9" name="PDF_TEXT_GROUP_190"/>
           <p:cNvSpPr txBox="1"/>
           <p:nvPr/>
         </p:nvSpPr>
@@ -10055,7 +9806,7 @@
       </p:sp>
       <p:sp>
         <p:nvSpPr>
-          <p:cNvPr id="10" name="PDF_TEXT_GROUP_196"/>
+          <p:cNvPr id="10" name="PDF_TEXT_GROUP_191"/>
           <p:cNvSpPr txBox="1"/>
           <p:nvPr/>
         </p:nvSpPr>
@@ -10103,7 +9854,7 @@
       </p:sp>
       <p:sp>
         <p:nvSpPr>
-          <p:cNvPr id="11" name="PDF_TEXT_GROUP_197"/>
+          <p:cNvPr id="11" name="PDF_TEXT_GROUP_192"/>
           <p:cNvSpPr txBox="1"/>
           <p:nvPr/>
         </p:nvSpPr>
@@ -10151,7 +9902,7 @@
       </p:sp>
       <p:sp>
         <p:nvSpPr>
-          <p:cNvPr id="12" name="PDF_TEXT_GROUP_198"/>
+          <p:cNvPr id="12" name="PDF_TEXT_GROUP_193"/>
           <p:cNvSpPr txBox="1"/>
           <p:nvPr/>
         </p:nvSpPr>
@@ -10199,7 +9950,7 @@
       </p:sp>
       <p:sp>
         <p:nvSpPr>
-          <p:cNvPr id="13" name="PDF_BULLET_SPAN_280"/>
+          <p:cNvPr id="13" name="PDF_BULLET_SPAN_274"/>
           <p:cNvSpPr/>
           <p:nvPr/>
         </p:nvSpPr>
@@ -10242,7 +9993,7 @@
       </p:sp>
       <p:sp>
         <p:nvSpPr>
-          <p:cNvPr id="14" name="PDF_BULLET_SPAN_283"/>
+          <p:cNvPr id="14" name="PDF_BULLET_SPAN_277"/>
           <p:cNvSpPr/>
           <p:nvPr/>
         </p:nvSpPr>
@@ -10285,7 +10036,7 @@
       </p:sp>
       <p:sp>
         <p:nvSpPr>
-          <p:cNvPr id="15" name="PDF_BULLET_SPAN_286"/>
+          <p:cNvPr id="15" name="PDF_BULLET_SPAN_280"/>
           <p:cNvSpPr/>
           <p:nvPr/>
         </p:nvSpPr>
@@ -10370,7 +10121,7 @@
       </p:pic>
       <p:sp>
         <p:nvSpPr>
-          <p:cNvPr id="3" name="PDF_TEXT_GROUP_199"/>
+          <p:cNvPr id="3" name="PDF_TEXT_GROUP_194"/>
           <p:cNvSpPr txBox="1"/>
           <p:nvPr/>
         </p:nvSpPr>
@@ -10418,7 +10169,7 @@
       </p:sp>
       <p:sp>
         <p:nvSpPr>
-          <p:cNvPr id="4" name="PDF_TEXT_GROUP_200"/>
+          <p:cNvPr id="4" name="PDF_TEXT_GROUP_195"/>
           <p:cNvSpPr txBox="1"/>
           <p:nvPr/>
         </p:nvSpPr>
@@ -10466,7 +10217,7 @@
       </p:sp>
       <p:sp>
         <p:nvSpPr>
-          <p:cNvPr id="5" name="PDF_TEXT_GROUP_201"/>
+          <p:cNvPr id="5" name="PDF_TEXT_GROUP_196"/>
           <p:cNvSpPr txBox="1"/>
           <p:nvPr/>
         </p:nvSpPr>
@@ -10523,7 +10274,7 @@
       </p:sp>
       <p:sp>
         <p:nvSpPr>
-          <p:cNvPr id="6" name="PDF_TEXT_GROUP_202"/>
+          <p:cNvPr id="6" name="PDF_TEXT_GROUP_197"/>
           <p:cNvSpPr txBox="1"/>
           <p:nvPr/>
         </p:nvSpPr>
@@ -10580,7 +10331,7 @@
       </p:sp>
       <p:sp>
         <p:nvSpPr>
-          <p:cNvPr id="7" name="PDF_TEXT_GROUP_203"/>
+          <p:cNvPr id="7" name="PDF_TEXT_GROUP_198"/>
           <p:cNvSpPr txBox="1"/>
           <p:nvPr/>
         </p:nvSpPr>
@@ -10637,7 +10388,7 @@
       </p:sp>
       <p:sp>
         <p:nvSpPr>
-          <p:cNvPr id="8" name="PDF_TEXT_GROUP_204"/>
+          <p:cNvPr id="8" name="PDF_TEXT_GROUP_199"/>
           <p:cNvSpPr txBox="1"/>
           <p:nvPr/>
         </p:nvSpPr>
@@ -10694,7 +10445,7 @@
       </p:sp>
       <p:sp>
         <p:nvSpPr>
-          <p:cNvPr id="9" name="PDF_TEXT_GROUP_205"/>
+          <p:cNvPr id="9" name="PDF_TEXT_GROUP_200"/>
           <p:cNvSpPr txBox="1"/>
           <p:nvPr/>
         </p:nvSpPr>
@@ -10742,7 +10493,7 @@
       </p:sp>
       <p:sp>
         <p:nvSpPr>
-          <p:cNvPr id="10" name="PDF_TEXT_GROUP_206"/>
+          <p:cNvPr id="10" name="PDF_TEXT_GROUP_201"/>
           <p:cNvSpPr txBox="1"/>
           <p:nvPr/>
         </p:nvSpPr>
@@ -10790,7 +10541,7 @@
       </p:sp>
       <p:sp>
         <p:nvSpPr>
-          <p:cNvPr id="11" name="PDF_TEXT_GROUP_207"/>
+          <p:cNvPr id="11" name="PDF_TEXT_GROUP_202"/>
           <p:cNvSpPr txBox="1"/>
           <p:nvPr/>
         </p:nvSpPr>
@@ -10838,7 +10589,7 @@
       </p:sp>
       <p:sp>
         <p:nvSpPr>
-          <p:cNvPr id="12" name="PDF_TEXT_GROUP_208"/>
+          <p:cNvPr id="12" name="PDF_TEXT_GROUP_203"/>
           <p:cNvSpPr txBox="1"/>
           <p:nvPr/>
         </p:nvSpPr>
@@ -10886,7 +10637,7 @@
       </p:sp>
       <p:sp>
         <p:nvSpPr>
-          <p:cNvPr id="13" name="PDF_TEXT_GROUP_209"/>
+          <p:cNvPr id="13" name="PDF_TEXT_GROUP_204"/>
           <p:cNvSpPr txBox="1"/>
           <p:nvPr/>
         </p:nvSpPr>
@@ -10934,7 +10685,7 @@
       </p:sp>
       <p:sp>
         <p:nvSpPr>
-          <p:cNvPr id="14" name="PDF_BULLET_SPAN_298"/>
+          <p:cNvPr id="14" name="PDF_BULLET_SPAN_292"/>
           <p:cNvSpPr/>
           <p:nvPr/>
         </p:nvSpPr>
@@ -10977,7 +10728,7 @@
       </p:sp>
       <p:sp>
         <p:nvSpPr>
-          <p:cNvPr id="15" name="PDF_BULLET_SPAN_300"/>
+          <p:cNvPr id="15" name="PDF_BULLET_SPAN_294"/>
           <p:cNvSpPr/>
           <p:nvPr/>
         </p:nvSpPr>
@@ -11020,7 +10771,7 @@
       </p:sp>
       <p:sp>
         <p:nvSpPr>
-          <p:cNvPr id="16" name="PDF_BULLET_SPAN_303"/>
+          <p:cNvPr id="16" name="PDF_BULLET_SPAN_297"/>
           <p:cNvSpPr/>
           <p:nvPr/>
         </p:nvSpPr>
@@ -11063,7 +10814,7 @@
       </p:sp>
       <p:sp>
         <p:nvSpPr>
-          <p:cNvPr id="17" name="PDF_BULLET_SPAN_306"/>
+          <p:cNvPr id="17" name="PDF_BULLET_SPAN_300"/>
           <p:cNvSpPr/>
           <p:nvPr/>
         </p:nvSpPr>
@@ -11148,7 +10899,7 @@
       </p:pic>
       <p:sp>
         <p:nvSpPr>
-          <p:cNvPr id="3" name="PDF_TEXT_GROUP_210"/>
+          <p:cNvPr id="3" name="PDF_TEXT_GROUP_205"/>
           <p:cNvSpPr txBox="1"/>
           <p:nvPr/>
         </p:nvSpPr>
@@ -11196,7 +10947,7 @@
       </p:sp>
       <p:sp>
         <p:nvSpPr>
-          <p:cNvPr id="4" name="PDF_TEXT_GROUP_211"/>
+          <p:cNvPr id="4" name="PDF_TEXT_GROUP_206"/>
           <p:cNvSpPr txBox="1"/>
           <p:nvPr/>
         </p:nvSpPr>
@@ -11262,7 +11013,7 @@
       </p:sp>
       <p:sp>
         <p:nvSpPr>
-          <p:cNvPr id="5" name="PDF_TEXT_GROUP_212"/>
+          <p:cNvPr id="5" name="PDF_TEXT_GROUP_207"/>
           <p:cNvSpPr txBox="1"/>
           <p:nvPr/>
         </p:nvSpPr>
@@ -11319,7 +11070,7 @@
       </p:sp>
       <p:sp>
         <p:nvSpPr>
-          <p:cNvPr id="6" name="PDF_TEXT_GROUP_213"/>
+          <p:cNvPr id="6" name="PDF_TEXT_GROUP_208"/>
           <p:cNvSpPr txBox="1"/>
           <p:nvPr/>
         </p:nvSpPr>
@@ -11376,7 +11127,7 @@
       </p:sp>
       <p:sp>
         <p:nvSpPr>
-          <p:cNvPr id="7" name="PDF_TEXT_GROUP_214"/>
+          <p:cNvPr id="7" name="PDF_TEXT_GROUP_209"/>
           <p:cNvSpPr txBox="1"/>
           <p:nvPr/>
         </p:nvSpPr>
@@ -11442,7 +11193,7 @@
       </p:sp>
       <p:sp>
         <p:nvSpPr>
-          <p:cNvPr id="8" name="PDF_TEXT_GROUP_215"/>
+          <p:cNvPr id="8" name="PDF_TEXT_GROUP_210"/>
           <p:cNvSpPr txBox="1"/>
           <p:nvPr/>
         </p:nvSpPr>
@@ -11499,7 +11250,7 @@
       </p:sp>
       <p:sp>
         <p:nvSpPr>
-          <p:cNvPr id="9" name="PDF_TEXT_GROUP_216"/>
+          <p:cNvPr id="9" name="PDF_TEXT_GROUP_211"/>
           <p:cNvSpPr txBox="1"/>
           <p:nvPr/>
         </p:nvSpPr>
@@ -11547,7 +11298,7 @@
       </p:sp>
       <p:sp>
         <p:nvSpPr>
-          <p:cNvPr id="10" name="PDF_TEXT_GROUP_217"/>
+          <p:cNvPr id="10" name="PDF_TEXT_GROUP_212"/>
           <p:cNvSpPr txBox="1"/>
           <p:nvPr/>
         </p:nvSpPr>
@@ -11595,7 +11346,7 @@
       </p:sp>
       <p:sp>
         <p:nvSpPr>
-          <p:cNvPr id="11" name="PDF_TEXT_GROUP_218"/>
+          <p:cNvPr id="11" name="PDF_TEXT_GROUP_213"/>
           <p:cNvSpPr txBox="1"/>
           <p:nvPr/>
         </p:nvSpPr>
@@ -11643,7 +11394,7 @@
       </p:sp>
       <p:sp>
         <p:nvSpPr>
-          <p:cNvPr id="12" name="PDF_TEXT_GROUP_219"/>
+          <p:cNvPr id="12" name="PDF_TEXT_GROUP_214"/>
           <p:cNvSpPr txBox="1"/>
           <p:nvPr/>
         </p:nvSpPr>
@@ -11691,7 +11442,7 @@
       </p:sp>
       <p:sp>
         <p:nvSpPr>
-          <p:cNvPr id="13" name="PDF_TEXT_GROUP_220"/>
+          <p:cNvPr id="13" name="PDF_TEXT_GROUP_215"/>
           <p:cNvSpPr txBox="1"/>
           <p:nvPr/>
         </p:nvSpPr>
@@ -11781,7 +11532,7 @@
       </p:pic>
       <p:sp>
         <p:nvSpPr>
-          <p:cNvPr id="3" name="PDF_TEXT_GROUP_221"/>
+          <p:cNvPr id="3" name="PDF_TEXT_GROUP_216"/>
           <p:cNvSpPr txBox="1"/>
           <p:nvPr/>
         </p:nvSpPr>
@@ -11829,7 +11580,7 @@
       </p:sp>
       <p:sp>
         <p:nvSpPr>
-          <p:cNvPr id="4" name="PDF_TEXT_GROUP_222"/>
+          <p:cNvPr id="4" name="PDF_TEXT_GROUP_217"/>
           <p:cNvSpPr txBox="1"/>
           <p:nvPr/>
         </p:nvSpPr>
@@ -11877,7 +11628,7 @@
       </p:sp>
       <p:sp>
         <p:nvSpPr>
-          <p:cNvPr id="5" name="PDF_TEXT_GROUP_223"/>
+          <p:cNvPr id="5" name="PDF_TEXT_GROUP_218"/>
           <p:cNvSpPr txBox="1"/>
           <p:nvPr/>
         </p:nvSpPr>
@@ -11925,7 +11676,7 @@
       </p:sp>
       <p:sp>
         <p:nvSpPr>
-          <p:cNvPr id="6" name="PDF_TEXT_GROUP_224"/>
+          <p:cNvPr id="6" name="PDF_TEXT_GROUP_219"/>
           <p:cNvSpPr txBox="1"/>
           <p:nvPr/>
         </p:nvSpPr>
@@ -11973,7 +11724,7 @@
       </p:sp>
       <p:sp>
         <p:nvSpPr>
-          <p:cNvPr id="7" name="PDF_TEXT_GROUP_225"/>
+          <p:cNvPr id="7" name="PDF_TEXT_GROUP_220"/>
           <p:cNvSpPr txBox="1"/>
           <p:nvPr/>
         </p:nvSpPr>
@@ -12021,7 +11772,7 @@
       </p:sp>
       <p:sp>
         <p:nvSpPr>
-          <p:cNvPr id="8" name="PDF_TEXT_GROUP_226"/>
+          <p:cNvPr id="8" name="PDF_TEXT_GROUP_221"/>
           <p:cNvSpPr txBox="1"/>
           <p:nvPr/>
         </p:nvSpPr>
@@ -12078,7 +11829,7 @@
       </p:sp>
       <p:sp>
         <p:nvSpPr>
-          <p:cNvPr id="9" name="PDF_TEXT_GROUP_227"/>
+          <p:cNvPr id="9" name="PDF_TEXT_GROUP_222"/>
           <p:cNvSpPr txBox="1"/>
           <p:nvPr/>
         </p:nvSpPr>
@@ -12135,7 +11886,7 @@
       </p:sp>
       <p:sp>
         <p:nvSpPr>
-          <p:cNvPr id="10" name="PDF_TEXT_GROUP_228"/>
+          <p:cNvPr id="10" name="PDF_TEXT_GROUP_223"/>
           <p:cNvSpPr txBox="1"/>
           <p:nvPr/>
         </p:nvSpPr>
@@ -12192,7 +11943,7 @@
       </p:sp>
       <p:sp>
         <p:nvSpPr>
-          <p:cNvPr id="11" name="PDF_TEXT_GROUP_229"/>
+          <p:cNvPr id="11" name="PDF_TEXT_GROUP_224"/>
           <p:cNvSpPr txBox="1"/>
           <p:nvPr/>
         </p:nvSpPr>
@@ -12249,7 +12000,7 @@
       </p:sp>
       <p:sp>
         <p:nvSpPr>
-          <p:cNvPr id="12" name="PDF_TEXT_GROUP_230"/>
+          <p:cNvPr id="12" name="PDF_TEXT_GROUP_225"/>
           <p:cNvSpPr txBox="1"/>
           <p:nvPr/>
         </p:nvSpPr>
@@ -12306,7 +12057,7 @@
       </p:sp>
       <p:sp>
         <p:nvSpPr>
-          <p:cNvPr id="13" name="PDF_TEXT_GROUP_231"/>
+          <p:cNvPr id="13" name="PDF_TEXT_GROUP_226"/>
           <p:cNvSpPr txBox="1"/>
           <p:nvPr/>
         </p:nvSpPr>
@@ -12354,7 +12105,7 @@
       </p:sp>
       <p:sp>
         <p:nvSpPr>
-          <p:cNvPr id="14" name="PDF_TEXT_GROUP_232"/>
+          <p:cNvPr id="14" name="PDF_TEXT_GROUP_227"/>
           <p:cNvSpPr txBox="1"/>
           <p:nvPr/>
         </p:nvSpPr>
@@ -12402,7 +12153,7 @@
       </p:sp>
       <p:sp>
         <p:nvSpPr>
-          <p:cNvPr id="15" name="PDF_TEXT_GROUP_233"/>
+          <p:cNvPr id="15" name="PDF_TEXT_GROUP_228"/>
           <p:cNvSpPr txBox="1"/>
           <p:nvPr/>
         </p:nvSpPr>
@@ -12450,7 +12201,7 @@
       </p:sp>
       <p:sp>
         <p:nvSpPr>
-          <p:cNvPr id="16" name="PDF_TEXT_GROUP_234"/>
+          <p:cNvPr id="16" name="PDF_TEXT_GROUP_229"/>
           <p:cNvSpPr txBox="1"/>
           <p:nvPr/>
         </p:nvSpPr>
@@ -12498,7 +12249,7 @@
       </p:sp>
       <p:sp>
         <p:nvSpPr>
-          <p:cNvPr id="17" name="PDF_TEXT_GROUP_235"/>
+          <p:cNvPr id="17" name="PDF_TEXT_GROUP_230"/>
           <p:cNvSpPr txBox="1"/>
           <p:nvPr/>
         </p:nvSpPr>
@@ -12588,7 +12339,7 @@
       </p:pic>
       <p:sp>
         <p:nvSpPr>
-          <p:cNvPr id="3" name="PDF_TEXT_GROUP_236"/>
+          <p:cNvPr id="3" name="PDF_TEXT_GROUP_231"/>
           <p:cNvSpPr txBox="1"/>
           <p:nvPr/>
         </p:nvSpPr>
@@ -12636,7 +12387,7 @@
       </p:sp>
       <p:sp>
         <p:nvSpPr>
-          <p:cNvPr id="4" name="PDF_TEXT_GROUP_237"/>
+          <p:cNvPr id="4" name="PDF_TEXT_GROUP_232"/>
           <p:cNvSpPr txBox="1"/>
           <p:nvPr/>
         </p:nvSpPr>
@@ -12693,7 +12444,7 @@
       </p:sp>
       <p:sp>
         <p:nvSpPr>
-          <p:cNvPr id="5" name="PDF_TEXT_GROUP_238"/>
+          <p:cNvPr id="5" name="PDF_TEXT_GROUP_233"/>
           <p:cNvSpPr txBox="1"/>
           <p:nvPr/>
         </p:nvSpPr>
@@ -12750,7 +12501,7 @@
       </p:sp>
       <p:sp>
         <p:nvSpPr>
-          <p:cNvPr id="6" name="PDF_TEXT_GROUP_239"/>
+          <p:cNvPr id="6" name="PDF_TEXT_GROUP_234"/>
           <p:cNvSpPr txBox="1"/>
           <p:nvPr/>
         </p:nvSpPr>
@@ -12807,7 +12558,7 @@
       </p:sp>
       <p:sp>
         <p:nvSpPr>
-          <p:cNvPr id="7" name="PDF_TEXT_GROUP_240"/>
+          <p:cNvPr id="7" name="PDF_TEXT_GROUP_235"/>
           <p:cNvSpPr txBox="1"/>
           <p:nvPr/>
         </p:nvSpPr>
@@ -12864,7 +12615,7 @@
       </p:sp>
       <p:sp>
         <p:nvSpPr>
-          <p:cNvPr id="8" name="PDF_TEXT_GROUP_241"/>
+          <p:cNvPr id="8" name="PDF_TEXT_GROUP_236"/>
           <p:cNvSpPr txBox="1"/>
           <p:nvPr/>
         </p:nvSpPr>
@@ -12921,7 +12672,7 @@
       </p:sp>
       <p:sp>
         <p:nvSpPr>
-          <p:cNvPr id="9" name="PDF_TEXT_GROUP_242"/>
+          <p:cNvPr id="9" name="PDF_TEXT_GROUP_237"/>
           <p:cNvSpPr txBox="1"/>
           <p:nvPr/>
         </p:nvSpPr>
@@ -12978,7 +12729,7 @@
       </p:sp>
       <p:sp>
         <p:nvSpPr>
-          <p:cNvPr id="10" name="PDF_TEXT_GROUP_243"/>
+          <p:cNvPr id="10" name="PDF_TEXT_GROUP_238"/>
           <p:cNvSpPr txBox="1"/>
           <p:nvPr/>
         </p:nvSpPr>
@@ -13026,7 +12777,7 @@
       </p:sp>
       <p:sp>
         <p:nvSpPr>
-          <p:cNvPr id="11" name="PDF_TEXT_GROUP_244"/>
+          <p:cNvPr id="11" name="PDF_TEXT_GROUP_239"/>
           <p:cNvSpPr txBox="1"/>
           <p:nvPr/>
         </p:nvSpPr>
@@ -13074,7 +12825,7 @@
       </p:sp>
       <p:sp>
         <p:nvSpPr>
-          <p:cNvPr id="12" name="PDF_TEXT_GROUP_245"/>
+          <p:cNvPr id="12" name="PDF_TEXT_GROUP_240"/>
           <p:cNvSpPr txBox="1"/>
           <p:nvPr/>
         </p:nvSpPr>
@@ -13122,7 +12873,7 @@
       </p:sp>
       <p:sp>
         <p:nvSpPr>
-          <p:cNvPr id="13" name="PDF_TEXT_GROUP_246"/>
+          <p:cNvPr id="13" name="PDF_TEXT_GROUP_241"/>
           <p:cNvSpPr txBox="1"/>
           <p:nvPr/>
         </p:nvSpPr>
@@ -13170,7 +12921,7 @@
       </p:sp>
       <p:sp>
         <p:nvSpPr>
-          <p:cNvPr id="14" name="PDF_TEXT_GROUP_247"/>
+          <p:cNvPr id="14" name="PDF_TEXT_GROUP_242"/>
           <p:cNvSpPr txBox="1"/>
           <p:nvPr/>
         </p:nvSpPr>
@@ -14278,7 +14029,7 @@
       </p:pic>
       <p:sp>
         <p:nvSpPr>
-          <p:cNvPr id="3" name="PDF_TEXT_GROUP_248"/>
+          <p:cNvPr id="3" name="PDF_TEXT_GROUP_243"/>
           <p:cNvSpPr txBox="1"/>
           <p:nvPr/>
         </p:nvSpPr>
@@ -14326,7 +14077,7 @@
       </p:sp>
       <p:sp>
         <p:nvSpPr>
-          <p:cNvPr id="4" name="PDF_TEXT_GROUP_249"/>
+          <p:cNvPr id="4" name="PDF_TEXT_GROUP_244"/>
           <p:cNvSpPr txBox="1"/>
           <p:nvPr/>
         </p:nvSpPr>
@@ -14374,7 +14125,7 @@
       </p:sp>
       <p:sp>
         <p:nvSpPr>
-          <p:cNvPr id="5" name="PDF_TEXT_GROUP_250"/>
+          <p:cNvPr id="5" name="PDF_TEXT_GROUP_245"/>
           <p:cNvSpPr txBox="1"/>
           <p:nvPr/>
         </p:nvSpPr>
@@ -14422,7 +14173,7 @@
       </p:sp>
       <p:sp>
         <p:nvSpPr>
-          <p:cNvPr id="6" name="PDF_TEXT_GROUP_251"/>
+          <p:cNvPr id="6" name="PDF_TEXT_GROUP_246"/>
           <p:cNvSpPr txBox="1"/>
           <p:nvPr/>
         </p:nvSpPr>
@@ -14470,7 +14221,7 @@
       </p:sp>
       <p:sp>
         <p:nvSpPr>
-          <p:cNvPr id="7" name="PDF_TEXT_GROUP_252"/>
+          <p:cNvPr id="7" name="PDF_TEXT_GROUP_247"/>
           <p:cNvSpPr txBox="1"/>
           <p:nvPr/>
         </p:nvSpPr>
@@ -14518,7 +14269,7 @@
       </p:sp>
       <p:sp>
         <p:nvSpPr>
-          <p:cNvPr id="8" name="PDF_TEXT_GROUP_253"/>
+          <p:cNvPr id="8" name="PDF_TEXT_GROUP_248"/>
           <p:cNvSpPr txBox="1"/>
           <p:nvPr/>
         </p:nvSpPr>
@@ -14566,7 +14317,7 @@
       </p:sp>
       <p:sp>
         <p:nvSpPr>
-          <p:cNvPr id="9" name="PDF_TEXT_GROUP_254"/>
+          <p:cNvPr id="9" name="PDF_TEXT_GROUP_249"/>
           <p:cNvSpPr txBox="1"/>
           <p:nvPr/>
         </p:nvSpPr>
@@ -14623,7 +14374,7 @@
       </p:sp>
       <p:sp>
         <p:nvSpPr>
-          <p:cNvPr id="10" name="PDF_TEXT_GROUP_255"/>
+          <p:cNvPr id="10" name="PDF_TEXT_GROUP_250"/>
           <p:cNvSpPr txBox="1"/>
           <p:nvPr/>
         </p:nvSpPr>
@@ -14671,7 +14422,7 @@
       </p:sp>
       <p:sp>
         <p:nvSpPr>
-          <p:cNvPr id="11" name="PDF_TEXT_GROUP_256"/>
+          <p:cNvPr id="11" name="PDF_TEXT_GROUP_251"/>
           <p:cNvSpPr txBox="1"/>
           <p:nvPr/>
         </p:nvSpPr>
@@ -14728,7 +14479,7 @@
       </p:sp>
       <p:sp>
         <p:nvSpPr>
-          <p:cNvPr id="12" name="PDF_TEXT_GROUP_257"/>
+          <p:cNvPr id="12" name="PDF_TEXT_GROUP_252"/>
           <p:cNvSpPr txBox="1"/>
           <p:nvPr/>
         </p:nvSpPr>
@@ -14776,7 +14527,7 @@
       </p:sp>
       <p:sp>
         <p:nvSpPr>
-          <p:cNvPr id="13" name="PDF_TEXT_GROUP_258"/>
+          <p:cNvPr id="13" name="PDF_TEXT_GROUP_253"/>
           <p:cNvSpPr txBox="1"/>
           <p:nvPr/>
         </p:nvSpPr>
@@ -14833,7 +14584,7 @@
       </p:sp>
       <p:sp>
         <p:nvSpPr>
-          <p:cNvPr id="14" name="PDF_TEXT_GROUP_259"/>
+          <p:cNvPr id="14" name="PDF_TEXT_GROUP_254"/>
           <p:cNvSpPr txBox="1"/>
           <p:nvPr/>
         </p:nvSpPr>
@@ -14881,7 +14632,7 @@
       </p:sp>
       <p:sp>
         <p:nvSpPr>
-          <p:cNvPr id="15" name="PDF_TEXT_GROUP_260"/>
+          <p:cNvPr id="15" name="PDF_TEXT_GROUP_255"/>
           <p:cNvSpPr txBox="1"/>
           <p:nvPr/>
         </p:nvSpPr>
@@ -14929,7 +14680,7 @@
       </p:sp>
       <p:sp>
         <p:nvSpPr>
-          <p:cNvPr id="16" name="PDF_TEXT_GROUP_261"/>
+          <p:cNvPr id="16" name="PDF_TEXT_GROUP_256"/>
           <p:cNvSpPr txBox="1"/>
           <p:nvPr/>
         </p:nvSpPr>
@@ -14986,7 +14737,7 @@
       </p:sp>
       <p:sp>
         <p:nvSpPr>
-          <p:cNvPr id="17" name="PDF_TEXT_GROUP_262"/>
+          <p:cNvPr id="17" name="PDF_TEXT_GROUP_257"/>
           <p:cNvSpPr txBox="1"/>
           <p:nvPr/>
         </p:nvSpPr>
@@ -15034,7 +14785,7 @@
       </p:sp>
       <p:sp>
         <p:nvSpPr>
-          <p:cNvPr id="18" name="PDF_TEXT_GROUP_263"/>
+          <p:cNvPr id="18" name="PDF_TEXT_GROUP_258"/>
           <p:cNvSpPr txBox="1"/>
           <p:nvPr/>
         </p:nvSpPr>
@@ -15082,7 +14833,7 @@
       </p:sp>
       <p:sp>
         <p:nvSpPr>
-          <p:cNvPr id="19" name="PDF_TEXT_GROUP_264"/>
+          <p:cNvPr id="19" name="PDF_TEXT_GROUP_259"/>
           <p:cNvSpPr txBox="1"/>
           <p:nvPr/>
         </p:nvSpPr>
@@ -15130,7 +14881,7 @@
       </p:sp>
       <p:sp>
         <p:nvSpPr>
-          <p:cNvPr id="20" name="PDF_TEXT_GROUP_265"/>
+          <p:cNvPr id="20" name="PDF_TEXT_GROUP_260"/>
           <p:cNvSpPr txBox="1"/>
           <p:nvPr/>
         </p:nvSpPr>
@@ -15178,7 +14929,7 @@
       </p:sp>
       <p:sp>
         <p:nvSpPr>
-          <p:cNvPr id="21" name="PDF_TEXT_GROUP_266"/>
+          <p:cNvPr id="21" name="PDF_TEXT_GROUP_261"/>
           <p:cNvSpPr txBox="1"/>
           <p:nvPr/>
         </p:nvSpPr>
@@ -15268,7 +15019,7 @@
       </p:pic>
       <p:sp>
         <p:nvSpPr>
-          <p:cNvPr id="3" name="PDF_TEXT_GROUP_267"/>
+          <p:cNvPr id="3" name="PDF_TEXT_GROUP_262"/>
           <p:cNvSpPr txBox="1"/>
           <p:nvPr/>
         </p:nvSpPr>
@@ -15316,7 +15067,7 @@
       </p:sp>
       <p:sp>
         <p:nvSpPr>
-          <p:cNvPr id="4" name="PDF_TEXT_GROUP_268"/>
+          <p:cNvPr id="4" name="PDF_TEXT_GROUP_263"/>
           <p:cNvSpPr txBox="1"/>
           <p:nvPr/>
         </p:nvSpPr>
@@ -15382,7 +15133,7 @@
       </p:sp>
       <p:sp>
         <p:nvSpPr>
-          <p:cNvPr id="5" name="PDF_TEXT_GROUP_269"/>
+          <p:cNvPr id="5" name="PDF_TEXT_GROUP_264"/>
           <p:cNvSpPr txBox="1"/>
           <p:nvPr/>
         </p:nvSpPr>
@@ -15448,7 +15199,7 @@
       </p:sp>
       <p:sp>
         <p:nvSpPr>
-          <p:cNvPr id="6" name="PDF_TEXT_GROUP_270"/>
+          <p:cNvPr id="6" name="PDF_TEXT_GROUP_265"/>
           <p:cNvSpPr txBox="1"/>
           <p:nvPr/>
         </p:nvSpPr>
@@ -15514,7 +15265,7 @@
       </p:sp>
       <p:sp>
         <p:nvSpPr>
-          <p:cNvPr id="7" name="PDF_TEXT_GROUP_271"/>
+          <p:cNvPr id="7" name="PDF_TEXT_GROUP_266"/>
           <p:cNvSpPr txBox="1"/>
           <p:nvPr/>
         </p:nvSpPr>
@@ -15571,7 +15322,7 @@
       </p:sp>
       <p:sp>
         <p:nvSpPr>
-          <p:cNvPr id="8" name="PDF_TEXT_GROUP_272"/>
+          <p:cNvPr id="8" name="PDF_TEXT_GROUP_267"/>
           <p:cNvSpPr txBox="1"/>
           <p:nvPr/>
         </p:nvSpPr>
@@ -15628,7 +15379,7 @@
       </p:sp>
       <p:sp>
         <p:nvSpPr>
-          <p:cNvPr id="9" name="PDF_TEXT_GROUP_273"/>
+          <p:cNvPr id="9" name="PDF_TEXT_GROUP_268"/>
           <p:cNvSpPr txBox="1"/>
           <p:nvPr/>
         </p:nvSpPr>
@@ -15676,7 +15427,7 @@
       </p:sp>
       <p:sp>
         <p:nvSpPr>
-          <p:cNvPr id="10" name="PDF_TEXT_GROUP_274"/>
+          <p:cNvPr id="10" name="PDF_TEXT_GROUP_269"/>
           <p:cNvSpPr txBox="1"/>
           <p:nvPr/>
         </p:nvSpPr>
@@ -15724,7 +15475,7 @@
       </p:sp>
       <p:sp>
         <p:nvSpPr>
-          <p:cNvPr id="11" name="PDF_TEXT_GROUP_275"/>
+          <p:cNvPr id="11" name="PDF_TEXT_GROUP_270"/>
           <p:cNvSpPr txBox="1"/>
           <p:nvPr/>
         </p:nvSpPr>
@@ -15772,7 +15523,7 @@
       </p:sp>
       <p:sp>
         <p:nvSpPr>
-          <p:cNvPr id="12" name="PDF_TEXT_GROUP_276"/>
+          <p:cNvPr id="12" name="PDF_TEXT_GROUP_271"/>
           <p:cNvSpPr txBox="1"/>
           <p:nvPr/>
         </p:nvSpPr>
@@ -15820,7 +15571,7 @@
       </p:sp>
       <p:sp>
         <p:nvSpPr>
-          <p:cNvPr id="13" name="PDF_TEXT_GROUP_277"/>
+          <p:cNvPr id="13" name="PDF_TEXT_GROUP_272"/>
           <p:cNvSpPr txBox="1"/>
           <p:nvPr/>
         </p:nvSpPr>
@@ -15910,7 +15661,7 @@
       </p:pic>
       <p:sp>
         <p:nvSpPr>
-          <p:cNvPr id="3" name="PDF_TEXT_GROUP_278"/>
+          <p:cNvPr id="3" name="PDF_TEXT_GROUP_273"/>
           <p:cNvSpPr txBox="1"/>
           <p:nvPr/>
         </p:nvSpPr>
@@ -15958,7 +15709,7 @@
       </p:sp>
       <p:sp>
         <p:nvSpPr>
-          <p:cNvPr id="4" name="PDF_TEXT_GROUP_279"/>
+          <p:cNvPr id="4" name="PDF_TEXT_GROUP_274"/>
           <p:cNvSpPr txBox="1"/>
           <p:nvPr/>
         </p:nvSpPr>
@@ -16006,7 +15757,7 @@
       </p:sp>
       <p:sp>
         <p:nvSpPr>
-          <p:cNvPr id="5" name="PDF_TEXT_GROUP_280"/>
+          <p:cNvPr id="5" name="PDF_TEXT_GROUP_275"/>
           <p:cNvSpPr txBox="1"/>
           <p:nvPr/>
         </p:nvSpPr>
@@ -16063,7 +15814,7 @@
       </p:sp>
       <p:sp>
         <p:nvSpPr>
-          <p:cNvPr id="6" name="PDF_TEXT_GROUP_281"/>
+          <p:cNvPr id="6" name="PDF_TEXT_GROUP_276"/>
           <p:cNvSpPr txBox="1"/>
           <p:nvPr/>
         </p:nvSpPr>
@@ -16111,7 +15862,7 @@
       </p:sp>
       <p:sp>
         <p:nvSpPr>
-          <p:cNvPr id="7" name="PDF_TEXT_GROUP_282"/>
+          <p:cNvPr id="7" name="PDF_TEXT_GROUP_277"/>
           <p:cNvSpPr txBox="1"/>
           <p:nvPr/>
         </p:nvSpPr>
@@ -16168,7 +15919,7 @@
       </p:sp>
       <p:sp>
         <p:nvSpPr>
-          <p:cNvPr id="8" name="PDF_TEXT_GROUP_283"/>
+          <p:cNvPr id="8" name="PDF_TEXT_GROUP_278"/>
           <p:cNvSpPr txBox="1"/>
           <p:nvPr/>
         </p:nvSpPr>
@@ -16225,7 +15976,7 @@
       </p:sp>
       <p:sp>
         <p:nvSpPr>
-          <p:cNvPr id="9" name="PDF_TEXT_GROUP_284"/>
+          <p:cNvPr id="9" name="PDF_TEXT_GROUP_279"/>
           <p:cNvSpPr txBox="1"/>
           <p:nvPr/>
         </p:nvSpPr>
@@ -16273,7 +16024,7 @@
       </p:sp>
       <p:sp>
         <p:nvSpPr>
-          <p:cNvPr id="10" name="PDF_TEXT_GROUP_285"/>
+          <p:cNvPr id="10" name="PDF_TEXT_GROUP_280"/>
           <p:cNvSpPr txBox="1"/>
           <p:nvPr/>
         </p:nvSpPr>
@@ -16321,7 +16072,7 @@
       </p:sp>
       <p:sp>
         <p:nvSpPr>
-          <p:cNvPr id="11" name="PDF_TEXT_GROUP_286"/>
+          <p:cNvPr id="11" name="PDF_TEXT_GROUP_281"/>
           <p:cNvSpPr txBox="1"/>
           <p:nvPr/>
         </p:nvSpPr>
@@ -16369,7 +16120,7 @@
       </p:sp>
       <p:sp>
         <p:nvSpPr>
-          <p:cNvPr id="12" name="PDF_TEXT_GROUP_287"/>
+          <p:cNvPr id="12" name="PDF_TEXT_GROUP_282"/>
           <p:cNvSpPr txBox="1"/>
           <p:nvPr/>
         </p:nvSpPr>
@@ -16417,7 +16168,7 @@
       </p:sp>
       <p:sp>
         <p:nvSpPr>
-          <p:cNvPr id="13" name="PDF_TEXT_GROUP_288"/>
+          <p:cNvPr id="13" name="PDF_TEXT_GROUP_283"/>
           <p:cNvSpPr txBox="1"/>
           <p:nvPr/>
         </p:nvSpPr>
@@ -16465,7 +16216,7 @@
       </p:sp>
       <p:sp>
         <p:nvSpPr>
-          <p:cNvPr id="14" name="PDF_BULLET_SPAN_415"/>
+          <p:cNvPr id="14" name="PDF_BULLET_SPAN_409"/>
           <p:cNvSpPr/>
           <p:nvPr/>
         </p:nvSpPr>
@@ -16508,7 +16259,7 @@
       </p:sp>
       <p:sp>
         <p:nvSpPr>
-          <p:cNvPr id="15" name="PDF_BULLET_SPAN_417"/>
+          <p:cNvPr id="15" name="PDF_BULLET_SPAN_411"/>
           <p:cNvSpPr/>
           <p:nvPr/>
         </p:nvSpPr>
@@ -16551,7 +16302,7 @@
       </p:sp>
       <p:sp>
         <p:nvSpPr>
-          <p:cNvPr id="16" name="PDF_BULLET_SPAN_420"/>
+          <p:cNvPr id="16" name="PDF_BULLET_SPAN_414"/>
           <p:cNvSpPr/>
           <p:nvPr/>
         </p:nvSpPr>
@@ -16594,7 +16345,7 @@
       </p:sp>
       <p:sp>
         <p:nvSpPr>
-          <p:cNvPr id="17" name="PDF_BULLET_SPAN_422"/>
+          <p:cNvPr id="17" name="PDF_BULLET_SPAN_416"/>
           <p:cNvSpPr/>
           <p:nvPr/>
         </p:nvSpPr>
@@ -16679,7 +16430,7 @@
       </p:pic>
       <p:sp>
         <p:nvSpPr>
-          <p:cNvPr id="3" name="PDF_TEXT_GROUP_289"/>
+          <p:cNvPr id="3" name="PDF_TEXT_GROUP_284"/>
           <p:cNvSpPr txBox="1"/>
           <p:nvPr/>
         </p:nvSpPr>
@@ -16727,7 +16478,7 @@
       </p:sp>
       <p:sp>
         <p:nvSpPr>
-          <p:cNvPr id="4" name="PDF_TEXT_GROUP_290"/>
+          <p:cNvPr id="4" name="PDF_TEXT_GROUP_285"/>
           <p:cNvSpPr txBox="1"/>
           <p:nvPr/>
         </p:nvSpPr>
@@ -16785,7 +16536,7 @@
       </p:sp>
       <p:sp>
         <p:nvSpPr>
-          <p:cNvPr id="5" name="PDF_TEXT_GROUP_291"/>
+          <p:cNvPr id="5" name="PDF_TEXT_GROUP_286"/>
           <p:cNvSpPr txBox="1"/>
           <p:nvPr/>
         </p:nvSpPr>
@@ -16843,7 +16594,7 @@
       </p:sp>
       <p:sp>
         <p:nvSpPr>
-          <p:cNvPr id="6" name="PDF_TEXT_GROUP_292"/>
+          <p:cNvPr id="6" name="PDF_TEXT_GROUP_287"/>
           <p:cNvSpPr txBox="1"/>
           <p:nvPr/>
         </p:nvSpPr>
@@ -16901,7 +16652,7 @@
       </p:sp>
       <p:sp>
         <p:nvSpPr>
-          <p:cNvPr id="7" name="PDF_TEXT_GROUP_293"/>
+          <p:cNvPr id="7" name="PDF_TEXT_GROUP_288"/>
           <p:cNvSpPr txBox="1"/>
           <p:nvPr/>
         </p:nvSpPr>
@@ -16949,7 +16700,7 @@
       </p:sp>
       <p:sp>
         <p:nvSpPr>
-          <p:cNvPr id="8" name="PDF_TEXT_GROUP_294"/>
+          <p:cNvPr id="8" name="PDF_TEXT_GROUP_289"/>
           <p:cNvSpPr txBox="1"/>
           <p:nvPr/>
         </p:nvSpPr>
@@ -16997,7 +16748,7 @@
       </p:sp>
       <p:sp>
         <p:nvSpPr>
-          <p:cNvPr id="9" name="PDF_TEXT_GROUP_295"/>
+          <p:cNvPr id="9" name="PDF_TEXT_GROUP_290"/>
           <p:cNvSpPr txBox="1"/>
           <p:nvPr/>
         </p:nvSpPr>
@@ -17054,7 +16805,7 @@
       </p:sp>
       <p:sp>
         <p:nvSpPr>
-          <p:cNvPr id="10" name="PDF_TEXT_GROUP_296"/>
+          <p:cNvPr id="10" name="PDF_TEXT_GROUP_291"/>
           <p:cNvSpPr txBox="1"/>
           <p:nvPr/>
         </p:nvSpPr>
@@ -17111,7 +16862,7 @@
       </p:sp>
       <p:sp>
         <p:nvSpPr>
-          <p:cNvPr id="11" name="PDF_TEXT_GROUP_297"/>
+          <p:cNvPr id="11" name="PDF_TEXT_GROUP_292"/>
           <p:cNvSpPr txBox="1"/>
           <p:nvPr/>
         </p:nvSpPr>
@@ -17159,7 +16910,7 @@
       </p:sp>
       <p:sp>
         <p:nvSpPr>
-          <p:cNvPr id="12" name="PDF_TEXT_GROUP_298"/>
+          <p:cNvPr id="12" name="PDF_TEXT_GROUP_293"/>
           <p:cNvSpPr txBox="1"/>
           <p:nvPr/>
         </p:nvSpPr>
@@ -17216,7 +16967,7 @@
       </p:sp>
       <p:sp>
         <p:nvSpPr>
-          <p:cNvPr id="13" name="PDF_TEXT_GROUP_299"/>
+          <p:cNvPr id="13" name="PDF_TEXT_GROUP_294"/>
           <p:cNvSpPr txBox="1"/>
           <p:nvPr/>
         </p:nvSpPr>
@@ -17264,7 +17015,7 @@
       </p:sp>
       <p:sp>
         <p:nvSpPr>
-          <p:cNvPr id="14" name="PDF_TEXT_GROUP_300"/>
+          <p:cNvPr id="14" name="PDF_TEXT_GROUP_295"/>
           <p:cNvSpPr txBox="1"/>
           <p:nvPr/>
         </p:nvSpPr>
@@ -17312,7 +17063,7 @@
       </p:sp>
       <p:sp>
         <p:nvSpPr>
-          <p:cNvPr id="15" name="PDF_TEXT_GROUP_301"/>
+          <p:cNvPr id="15" name="PDF_TEXT_GROUP_296"/>
           <p:cNvSpPr txBox="1"/>
           <p:nvPr/>
         </p:nvSpPr>
@@ -17360,7 +17111,7 @@
       </p:sp>
       <p:sp>
         <p:nvSpPr>
-          <p:cNvPr id="16" name="PDF_TEXT_GROUP_302"/>
+          <p:cNvPr id="16" name="PDF_TEXT_GROUP_297"/>
           <p:cNvSpPr txBox="1"/>
           <p:nvPr/>
         </p:nvSpPr>
@@ -17408,7 +17159,7 @@
       </p:sp>
       <p:sp>
         <p:nvSpPr>
-          <p:cNvPr id="17" name="PDF_TEXT_GROUP_303"/>
+          <p:cNvPr id="17" name="PDF_TEXT_GROUP_298"/>
           <p:cNvSpPr txBox="1"/>
           <p:nvPr/>
         </p:nvSpPr>
@@ -17456,7 +17207,7 @@
       </p:sp>
       <p:sp>
         <p:nvSpPr>
-          <p:cNvPr id="18" name="PDF_BULLET_SPAN_441"/>
+          <p:cNvPr id="18" name="PDF_BULLET_SPAN_435"/>
           <p:cNvSpPr/>
           <p:nvPr/>
         </p:nvSpPr>
@@ -17499,7 +17250,7 @@
       </p:sp>
       <p:sp>
         <p:nvSpPr>
-          <p:cNvPr id="19" name="PDF_BULLET_SPAN_444"/>
+          <p:cNvPr id="19" name="PDF_BULLET_SPAN_438"/>
           <p:cNvSpPr/>
           <p:nvPr/>
         </p:nvSpPr>
@@ -17542,7 +17293,7 @@
       </p:sp>
       <p:sp>
         <p:nvSpPr>
-          <p:cNvPr id="20" name="PDF_BULLET_SPAN_447"/>
+          <p:cNvPr id="20" name="PDF_BULLET_SPAN_441"/>
           <p:cNvSpPr/>
           <p:nvPr/>
         </p:nvSpPr>
@@ -17627,7 +17378,7 @@
       </p:pic>
       <p:sp>
         <p:nvSpPr>
-          <p:cNvPr id="3" name="PDF_TEXT_GROUP_304"/>
+          <p:cNvPr id="3" name="PDF_TEXT_GROUP_299"/>
           <p:cNvSpPr txBox="1"/>
           <p:nvPr/>
         </p:nvSpPr>
@@ -17675,7 +17426,7 @@
       </p:sp>
       <p:sp>
         <p:nvSpPr>
-          <p:cNvPr id="4" name="PDF_TEXT_GROUP_305"/>
+          <p:cNvPr id="4" name="PDF_TEXT_GROUP_300"/>
           <p:cNvSpPr txBox="1"/>
           <p:nvPr/>
         </p:nvSpPr>
@@ -17732,7 +17483,7 @@
       </p:sp>
       <p:sp>
         <p:nvSpPr>
-          <p:cNvPr id="5" name="PDF_TEXT_GROUP_306"/>
+          <p:cNvPr id="5" name="PDF_TEXT_GROUP_301"/>
           <p:cNvSpPr txBox="1"/>
           <p:nvPr/>
         </p:nvSpPr>
@@ -17789,7 +17540,7 @@
       </p:sp>
       <p:sp>
         <p:nvSpPr>
-          <p:cNvPr id="6" name="PDF_TEXT_GROUP_307"/>
+          <p:cNvPr id="6" name="PDF_TEXT_GROUP_302"/>
           <p:cNvSpPr txBox="1"/>
           <p:nvPr/>
         </p:nvSpPr>
@@ -17837,7 +17588,7 @@
       </p:sp>
       <p:sp>
         <p:nvSpPr>
-          <p:cNvPr id="7" name="PDF_TEXT_GROUP_308"/>
+          <p:cNvPr id="7" name="PDF_TEXT_GROUP_303"/>
           <p:cNvSpPr txBox="1"/>
           <p:nvPr/>
         </p:nvSpPr>
@@ -17894,7 +17645,7 @@
       </p:sp>
       <p:sp>
         <p:nvSpPr>
-          <p:cNvPr id="8" name="PDF_TEXT_GROUP_309"/>
+          <p:cNvPr id="8" name="PDF_TEXT_GROUP_304"/>
           <p:cNvSpPr txBox="1"/>
           <p:nvPr/>
         </p:nvSpPr>
@@ -17942,7 +17693,7 @@
       </p:sp>
       <p:sp>
         <p:nvSpPr>
-          <p:cNvPr id="9" name="PDF_TEXT_GROUP_310"/>
+          <p:cNvPr id="9" name="PDF_TEXT_GROUP_305"/>
           <p:cNvSpPr txBox="1"/>
           <p:nvPr/>
         </p:nvSpPr>
@@ -17990,7 +17741,7 @@
       </p:sp>
       <p:sp>
         <p:nvSpPr>
-          <p:cNvPr id="10" name="PDF_TEXT_GROUP_311"/>
+          <p:cNvPr id="10" name="PDF_TEXT_GROUP_306"/>
           <p:cNvSpPr txBox="1"/>
           <p:nvPr/>
         </p:nvSpPr>
@@ -18038,7 +17789,7 @@
       </p:sp>
       <p:sp>
         <p:nvSpPr>
-          <p:cNvPr id="11" name="PDF_TEXT_GROUP_312"/>
+          <p:cNvPr id="11" name="PDF_TEXT_GROUP_307"/>
           <p:cNvSpPr txBox="1"/>
           <p:nvPr/>
         </p:nvSpPr>
@@ -18086,7 +17837,7 @@
       </p:sp>
       <p:sp>
         <p:nvSpPr>
-          <p:cNvPr id="12" name="PDF_TEXT_GROUP_313"/>
+          <p:cNvPr id="12" name="PDF_TEXT_GROUP_308"/>
           <p:cNvSpPr txBox="1"/>
           <p:nvPr/>
         </p:nvSpPr>
@@ -18134,7 +17885,7 @@
       </p:sp>
       <p:sp>
         <p:nvSpPr>
-          <p:cNvPr id="13" name="PDF_TEXT_GROUP_314"/>
+          <p:cNvPr id="13" name="PDF_TEXT_GROUP_309"/>
           <p:cNvSpPr txBox="1"/>
           <p:nvPr/>
         </p:nvSpPr>
@@ -18182,7 +17933,7 @@
       </p:sp>
       <p:sp>
         <p:nvSpPr>
-          <p:cNvPr id="14" name="PDF_BULLET_SPAN_457"/>
+          <p:cNvPr id="14" name="PDF_BULLET_SPAN_451"/>
           <p:cNvSpPr/>
           <p:nvPr/>
         </p:nvSpPr>
@@ -18225,7 +17976,7 @@
       </p:sp>
       <p:sp>
         <p:nvSpPr>
-          <p:cNvPr id="15" name="PDF_BULLET_SPAN_460"/>
+          <p:cNvPr id="15" name="PDF_BULLET_SPAN_454"/>
           <p:cNvSpPr/>
           <p:nvPr/>
         </p:nvSpPr>
@@ -18268,7 +18019,7 @@
       </p:sp>
       <p:sp>
         <p:nvSpPr>
-          <p:cNvPr id="16" name="PDF_BULLET_SPAN_463"/>
+          <p:cNvPr id="16" name="PDF_BULLET_SPAN_457"/>
           <p:cNvSpPr/>
           <p:nvPr/>
         </p:nvSpPr>
@@ -18311,7 +18062,7 @@
       </p:sp>
       <p:sp>
         <p:nvSpPr>
-          <p:cNvPr id="17" name="PDF_BULLET_SPAN_465"/>
+          <p:cNvPr id="17" name="PDF_BULLET_SPAN_459"/>
           <p:cNvSpPr/>
           <p:nvPr/>
         </p:nvSpPr>
@@ -18396,7 +18147,7 @@
       </p:pic>
       <p:sp>
         <p:nvSpPr>
-          <p:cNvPr id="3" name="PDF_TEXT_GROUP_315"/>
+          <p:cNvPr id="3" name="PDF_TEXT_GROUP_310"/>
           <p:cNvSpPr txBox="1"/>
           <p:nvPr/>
         </p:nvSpPr>
@@ -18444,7 +18195,7 @@
       </p:sp>
       <p:sp>
         <p:nvSpPr>
-          <p:cNvPr id="4" name="PDF_TEXT_GROUP_316"/>
+          <p:cNvPr id="4" name="PDF_TEXT_GROUP_311"/>
           <p:cNvSpPr txBox="1"/>
           <p:nvPr/>
         </p:nvSpPr>
@@ -18501,7 +18252,7 @@
       </p:sp>
       <p:sp>
         <p:nvSpPr>
-          <p:cNvPr id="5" name="PDF_TEXT_GROUP_317"/>
+          <p:cNvPr id="5" name="PDF_TEXT_GROUP_312"/>
           <p:cNvSpPr txBox="1"/>
           <p:nvPr/>
         </p:nvSpPr>
@@ -18558,7 +18309,7 @@
       </p:sp>
       <p:sp>
         <p:nvSpPr>
-          <p:cNvPr id="6" name="PDF_TEXT_GROUP_318"/>
+          <p:cNvPr id="6" name="PDF_TEXT_GROUP_313"/>
           <p:cNvSpPr txBox="1"/>
           <p:nvPr/>
         </p:nvSpPr>
@@ -18615,7 +18366,7 @@
       </p:sp>
       <p:sp>
         <p:nvSpPr>
-          <p:cNvPr id="7" name="PDF_TEXT_GROUP_319"/>
+          <p:cNvPr id="7" name="PDF_TEXT_GROUP_314"/>
           <p:cNvSpPr txBox="1"/>
           <p:nvPr/>
         </p:nvSpPr>
@@ -18672,7 +18423,7 @@
       </p:sp>
       <p:sp>
         <p:nvSpPr>
-          <p:cNvPr id="8" name="PDF_TEXT_GROUP_320"/>
+          <p:cNvPr id="8" name="PDF_TEXT_GROUP_315"/>
           <p:cNvSpPr txBox="1"/>
           <p:nvPr/>
         </p:nvSpPr>
@@ -18729,7 +18480,7 @@
       </p:sp>
       <p:sp>
         <p:nvSpPr>
-          <p:cNvPr id="9" name="PDF_TEXT_GROUP_321"/>
+          <p:cNvPr id="9" name="PDF_TEXT_GROUP_316"/>
           <p:cNvSpPr txBox="1"/>
           <p:nvPr/>
         </p:nvSpPr>
@@ -18777,7 +18528,7 @@
       </p:sp>
       <p:sp>
         <p:nvSpPr>
-          <p:cNvPr id="10" name="PDF_TEXT_GROUP_322"/>
+          <p:cNvPr id="10" name="PDF_TEXT_GROUP_317"/>
           <p:cNvSpPr txBox="1"/>
           <p:nvPr/>
         </p:nvSpPr>
@@ -18825,7 +18576,7 @@
       </p:sp>
       <p:sp>
         <p:nvSpPr>
-          <p:cNvPr id="11" name="PDF_TEXT_GROUP_323"/>
+          <p:cNvPr id="11" name="PDF_TEXT_GROUP_318"/>
           <p:cNvSpPr txBox="1"/>
           <p:nvPr/>
         </p:nvSpPr>
@@ -18873,7 +18624,7 @@
       </p:sp>
       <p:sp>
         <p:nvSpPr>
-          <p:cNvPr id="12" name="PDF_TEXT_GROUP_324"/>
+          <p:cNvPr id="12" name="PDF_TEXT_GROUP_319"/>
           <p:cNvSpPr txBox="1"/>
           <p:nvPr/>
         </p:nvSpPr>
@@ -18921,7 +18672,7 @@
       </p:sp>
       <p:sp>
         <p:nvSpPr>
-          <p:cNvPr id="13" name="PDF_TEXT_GROUP_325"/>
+          <p:cNvPr id="13" name="PDF_TEXT_GROUP_320"/>
           <p:cNvSpPr txBox="1"/>
           <p:nvPr/>
         </p:nvSpPr>
@@ -18969,7 +18720,7 @@
       </p:sp>
       <p:sp>
         <p:nvSpPr>
-          <p:cNvPr id="14" name="PDF_BULLET_SPAN_475"/>
+          <p:cNvPr id="14" name="PDF_BULLET_SPAN_469"/>
           <p:cNvSpPr/>
           <p:nvPr/>
         </p:nvSpPr>
@@ -19012,7 +18763,7 @@
       </p:sp>
       <p:sp>
         <p:nvSpPr>
-          <p:cNvPr id="15" name="PDF_BULLET_SPAN_478"/>
+          <p:cNvPr id="15" name="PDF_BULLET_SPAN_472"/>
           <p:cNvSpPr/>
           <p:nvPr/>
         </p:nvSpPr>
@@ -19055,7 +18806,7 @@
       </p:sp>
       <p:sp>
         <p:nvSpPr>
-          <p:cNvPr id="16" name="PDF_BULLET_SPAN_481"/>
+          <p:cNvPr id="16" name="PDF_BULLET_SPAN_475"/>
           <p:cNvSpPr/>
           <p:nvPr/>
         </p:nvSpPr>
@@ -19098,7 +18849,7 @@
       </p:sp>
       <p:sp>
         <p:nvSpPr>
-          <p:cNvPr id="17" name="PDF_BULLET_SPAN_484"/>
+          <p:cNvPr id="17" name="PDF_BULLET_SPAN_478"/>
           <p:cNvSpPr/>
           <p:nvPr/>
         </p:nvSpPr>
@@ -19183,7 +18934,7 @@
       </p:pic>
       <p:sp>
         <p:nvSpPr>
-          <p:cNvPr id="3" name="PDF_TEXT_GROUP_326"/>
+          <p:cNvPr id="3" name="PDF_TEXT_GROUP_321"/>
           <p:cNvSpPr txBox="1"/>
           <p:nvPr/>
         </p:nvSpPr>
@@ -19231,7 +18982,7 @@
       </p:sp>
       <p:sp>
         <p:nvSpPr>
-          <p:cNvPr id="4" name="PDF_TEXT_GROUP_327"/>
+          <p:cNvPr id="4" name="PDF_TEXT_GROUP_322"/>
           <p:cNvSpPr txBox="1"/>
           <p:nvPr/>
         </p:nvSpPr>
@@ -19279,7 +19030,7 @@
       </p:sp>
       <p:sp>
         <p:nvSpPr>
-          <p:cNvPr id="5" name="PDF_TEXT_GROUP_328"/>
+          <p:cNvPr id="5" name="PDF_TEXT_GROUP_323"/>
           <p:cNvSpPr txBox="1"/>
           <p:nvPr/>
         </p:nvSpPr>
@@ -19327,7 +19078,7 @@
       </p:sp>
       <p:sp>
         <p:nvSpPr>
-          <p:cNvPr id="6" name="PDF_TEXT_GROUP_329"/>
+          <p:cNvPr id="6" name="PDF_TEXT_GROUP_324"/>
           <p:cNvSpPr txBox="1"/>
           <p:nvPr/>
         </p:nvSpPr>
@@ -19375,7 +19126,7 @@
       </p:sp>
       <p:sp>
         <p:nvSpPr>
-          <p:cNvPr id="7" name="PDF_TEXT_GROUP_330"/>
+          <p:cNvPr id="7" name="PDF_TEXT_GROUP_325"/>
           <p:cNvSpPr txBox="1"/>
           <p:nvPr/>
         </p:nvSpPr>
@@ -19423,7 +19174,7 @@
       </p:sp>
       <p:sp>
         <p:nvSpPr>
-          <p:cNvPr id="8" name="PDF_TEXT_GROUP_331"/>
+          <p:cNvPr id="8" name="PDF_TEXT_GROUP_326"/>
           <p:cNvSpPr txBox="1"/>
           <p:nvPr/>
         </p:nvSpPr>
@@ -19471,7 +19222,7 @@
       </p:sp>
       <p:sp>
         <p:nvSpPr>
-          <p:cNvPr id="9" name="PDF_TEXT_GROUP_332"/>
+          <p:cNvPr id="9" name="PDF_TEXT_GROUP_327"/>
           <p:cNvSpPr txBox="1"/>
           <p:nvPr/>
         </p:nvSpPr>
@@ -19519,7 +19270,7 @@
       </p:sp>
       <p:sp>
         <p:nvSpPr>
-          <p:cNvPr id="10" name="PDF_TEXT_GROUP_333"/>
+          <p:cNvPr id="10" name="PDF_TEXT_GROUP_328"/>
           <p:cNvSpPr txBox="1"/>
           <p:nvPr/>
         </p:nvSpPr>
@@ -19567,7 +19318,7 @@
       </p:sp>
       <p:sp>
         <p:nvSpPr>
-          <p:cNvPr id="11" name="PDF_TEXT_GROUP_334"/>
+          <p:cNvPr id="11" name="PDF_TEXT_GROUP_329"/>
           <p:cNvSpPr txBox="1"/>
           <p:nvPr/>
         </p:nvSpPr>
@@ -19615,7 +19366,7 @@
       </p:sp>
       <p:sp>
         <p:nvSpPr>
-          <p:cNvPr id="12" name="PDF_TEXT_GROUP_335"/>
+          <p:cNvPr id="12" name="PDF_TEXT_GROUP_330"/>
           <p:cNvSpPr txBox="1"/>
           <p:nvPr/>
         </p:nvSpPr>
@@ -19663,7 +19414,7 @@
       </p:sp>
       <p:sp>
         <p:nvSpPr>
-          <p:cNvPr id="13" name="PDF_TEXT_GROUP_336"/>
+          <p:cNvPr id="13" name="PDF_TEXT_GROUP_331"/>
           <p:cNvSpPr txBox="1"/>
           <p:nvPr/>
         </p:nvSpPr>
@@ -19711,7 +19462,7 @@
       </p:sp>
       <p:sp>
         <p:nvSpPr>
-          <p:cNvPr id="14" name="PDF_TEXT_GROUP_337"/>
+          <p:cNvPr id="14" name="PDF_TEXT_GROUP_332"/>
           <p:cNvSpPr txBox="1"/>
           <p:nvPr/>
         </p:nvSpPr>
@@ -19759,7 +19510,7 @@
       </p:sp>
       <p:sp>
         <p:nvSpPr>
-          <p:cNvPr id="15" name="PDF_TEXT_GROUP_338"/>
+          <p:cNvPr id="15" name="PDF_TEXT_GROUP_333"/>
           <p:cNvSpPr txBox="1"/>
           <p:nvPr/>
         </p:nvSpPr>
@@ -19807,7 +19558,7 @@
       </p:sp>
       <p:sp>
         <p:nvSpPr>
-          <p:cNvPr id="16" name="PDF_TEXT_GROUP_339"/>
+          <p:cNvPr id="16" name="PDF_TEXT_GROUP_334"/>
           <p:cNvSpPr txBox="1"/>
           <p:nvPr/>
         </p:nvSpPr>
@@ -19855,7 +19606,7 @@
       </p:sp>
       <p:sp>
         <p:nvSpPr>
-          <p:cNvPr id="17" name="PDF_TEXT_GROUP_340"/>
+          <p:cNvPr id="17" name="PDF_TEXT_GROUP_335"/>
           <p:cNvSpPr txBox="1"/>
           <p:nvPr/>
         </p:nvSpPr>
@@ -19903,7 +19654,7 @@
       </p:sp>
       <p:sp>
         <p:nvSpPr>
-          <p:cNvPr id="18" name="PDF_TEXT_GROUP_341"/>
+          <p:cNvPr id="18" name="PDF_TEXT_GROUP_336"/>
           <p:cNvSpPr txBox="1"/>
           <p:nvPr/>
         </p:nvSpPr>
@@ -19951,7 +19702,7 @@
       </p:sp>
       <p:sp>
         <p:nvSpPr>
-          <p:cNvPr id="19" name="PDF_TEXT_GROUP_342"/>
+          <p:cNvPr id="19" name="PDF_TEXT_GROUP_337"/>
           <p:cNvSpPr txBox="1"/>
           <p:nvPr/>
         </p:nvSpPr>
@@ -19999,7 +19750,7 @@
       </p:sp>
       <p:sp>
         <p:nvSpPr>
-          <p:cNvPr id="20" name="PDF_TEXT_GROUP_343"/>
+          <p:cNvPr id="20" name="PDF_TEXT_GROUP_338"/>
           <p:cNvSpPr txBox="1"/>
           <p:nvPr/>
         </p:nvSpPr>
@@ -20047,7 +19798,7 @@
       </p:sp>
       <p:sp>
         <p:nvSpPr>
-          <p:cNvPr id="21" name="PDF_TEXT_GROUP_344"/>
+          <p:cNvPr id="21" name="PDF_TEXT_GROUP_339"/>
           <p:cNvSpPr txBox="1"/>
           <p:nvPr/>
         </p:nvSpPr>
@@ -20104,7 +19855,7 @@
       </p:sp>
       <p:sp>
         <p:nvSpPr>
-          <p:cNvPr id="22" name="PDF_TEXT_GROUP_345"/>
+          <p:cNvPr id="22" name="PDF_TEXT_GROUP_340"/>
           <p:cNvSpPr txBox="1"/>
           <p:nvPr/>
         </p:nvSpPr>
@@ -20152,7 +19903,7 @@
       </p:sp>
       <p:sp>
         <p:nvSpPr>
-          <p:cNvPr id="23" name="PDF_TEXT_GROUP_346"/>
+          <p:cNvPr id="23" name="PDF_TEXT_GROUP_341"/>
           <p:cNvSpPr txBox="1"/>
           <p:nvPr/>
         </p:nvSpPr>
@@ -20200,7 +19951,7 @@
       </p:sp>
       <p:sp>
         <p:nvSpPr>
-          <p:cNvPr id="24" name="PDF_TEXT_GROUP_347"/>
+          <p:cNvPr id="24" name="PDF_TEXT_GROUP_342"/>
           <p:cNvSpPr txBox="1"/>
           <p:nvPr/>
         </p:nvSpPr>
@@ -20248,7 +19999,7 @@
       </p:sp>
       <p:sp>
         <p:nvSpPr>
-          <p:cNvPr id="25" name="PDF_TEXT_GROUP_348"/>
+          <p:cNvPr id="25" name="PDF_TEXT_GROUP_343"/>
           <p:cNvSpPr txBox="1"/>
           <p:nvPr/>
         </p:nvSpPr>
@@ -20296,7 +20047,7 @@
       </p:sp>
       <p:sp>
         <p:nvSpPr>
-          <p:cNvPr id="26" name="PDF_TEXT_GROUP_349"/>
+          <p:cNvPr id="26" name="PDF_TEXT_GROUP_344"/>
           <p:cNvSpPr txBox="1"/>
           <p:nvPr/>
         </p:nvSpPr>
@@ -20386,7 +20137,7 @@
       </p:pic>
       <p:sp>
         <p:nvSpPr>
-          <p:cNvPr id="3" name="PDF_TEXT_GROUP_350"/>
+          <p:cNvPr id="3" name="PDF_TEXT_GROUP_345"/>
           <p:cNvSpPr txBox="1"/>
           <p:nvPr/>
         </p:nvSpPr>
@@ -20434,7 +20185,7 @@
       </p:sp>
       <p:sp>
         <p:nvSpPr>
-          <p:cNvPr id="4" name="PDF_TEXT_GROUP_351"/>
+          <p:cNvPr id="4" name="PDF_TEXT_GROUP_346"/>
           <p:cNvSpPr txBox="1"/>
           <p:nvPr/>
         </p:nvSpPr>
@@ -20491,7 +20242,7 @@
       </p:sp>
       <p:sp>
         <p:nvSpPr>
-          <p:cNvPr id="5" name="PDF_TEXT_GROUP_352"/>
+          <p:cNvPr id="5" name="PDF_TEXT_GROUP_347"/>
           <p:cNvSpPr txBox="1"/>
           <p:nvPr/>
         </p:nvSpPr>
@@ -20539,7 +20290,7 @@
       </p:sp>
       <p:sp>
         <p:nvSpPr>
-          <p:cNvPr id="6" name="PDF_TEXT_GROUP_353"/>
+          <p:cNvPr id="6" name="PDF_TEXT_GROUP_348"/>
           <p:cNvSpPr txBox="1"/>
           <p:nvPr/>
         </p:nvSpPr>
@@ -20587,7 +20338,7 @@
       </p:sp>
       <p:sp>
         <p:nvSpPr>
-          <p:cNvPr id="7" name="PDF_TEXT_GROUP_354"/>
+          <p:cNvPr id="7" name="PDF_TEXT_GROUP_349"/>
           <p:cNvSpPr txBox="1"/>
           <p:nvPr/>
         </p:nvSpPr>
@@ -20635,7 +20386,7 @@
       </p:sp>
       <p:sp>
         <p:nvSpPr>
-          <p:cNvPr id="8" name="PDF_TEXT_GROUP_355"/>
+          <p:cNvPr id="8" name="PDF_TEXT_GROUP_350"/>
           <p:cNvSpPr txBox="1"/>
           <p:nvPr/>
         </p:nvSpPr>
@@ -20701,7 +20452,7 @@
       </p:sp>
       <p:sp>
         <p:nvSpPr>
-          <p:cNvPr id="9" name="PDF_TEXT_GROUP_357"/>
+          <p:cNvPr id="9" name="PDF_TEXT_GROUP_352"/>
           <p:cNvSpPr txBox="1"/>
           <p:nvPr/>
         </p:nvSpPr>
@@ -20749,7 +20500,7 @@
       </p:sp>
       <p:sp>
         <p:nvSpPr>
-          <p:cNvPr id="10" name="PDF_TEXT_GROUP_356"/>
+          <p:cNvPr id="10" name="PDF_TEXT_GROUP_351"/>
           <p:cNvSpPr txBox="1"/>
           <p:nvPr/>
         </p:nvSpPr>
@@ -20851,7 +20602,7 @@
       </p:sp>
       <p:sp>
         <p:nvSpPr>
-          <p:cNvPr id="11" name="PDF_TEXT_GROUP_358"/>
+          <p:cNvPr id="11" name="PDF_TEXT_GROUP_353"/>
           <p:cNvSpPr txBox="1"/>
           <p:nvPr/>
         </p:nvSpPr>
@@ -20917,7 +20668,7 @@
       </p:sp>
       <p:sp>
         <p:nvSpPr>
-          <p:cNvPr id="12" name="PDF_TEXT_GROUP_360"/>
+          <p:cNvPr id="12" name="PDF_TEXT_GROUP_355"/>
           <p:cNvSpPr txBox="1"/>
           <p:nvPr/>
         </p:nvSpPr>
@@ -20965,7 +20716,7 @@
       </p:sp>
       <p:sp>
         <p:nvSpPr>
-          <p:cNvPr id="13" name="PDF_TEXT_GROUP_359"/>
+          <p:cNvPr id="13" name="PDF_TEXT_GROUP_354"/>
           <p:cNvSpPr txBox="1"/>
           <p:nvPr/>
         </p:nvSpPr>
@@ -21067,7 +20818,7 @@
       </p:sp>
       <p:sp>
         <p:nvSpPr>
-          <p:cNvPr id="14" name="PDF_TEXT_GROUP_361"/>
+          <p:cNvPr id="14" name="PDF_TEXT_GROUP_356"/>
           <p:cNvSpPr txBox="1"/>
           <p:nvPr/>
         </p:nvSpPr>
@@ -21124,7 +20875,7 @@
       </p:sp>
       <p:sp>
         <p:nvSpPr>
-          <p:cNvPr id="15" name="PDF_TEXT_GROUP_362"/>
+          <p:cNvPr id="15" name="PDF_TEXT_GROUP_357"/>
           <p:cNvSpPr txBox="1"/>
           <p:nvPr/>
         </p:nvSpPr>
@@ -21172,7 +20923,7 @@
       </p:sp>
       <p:sp>
         <p:nvSpPr>
-          <p:cNvPr id="16" name="PDF_TEXT_GROUP_363"/>
+          <p:cNvPr id="16" name="PDF_TEXT_GROUP_358"/>
           <p:cNvSpPr txBox="1"/>
           <p:nvPr/>
         </p:nvSpPr>
@@ -21220,7 +20971,7 @@
       </p:sp>
       <p:sp>
         <p:nvSpPr>
-          <p:cNvPr id="17" name="PDF_TEXT_GROUP_364"/>
+          <p:cNvPr id="17" name="PDF_TEXT_GROUP_359"/>
           <p:cNvSpPr txBox="1"/>
           <p:nvPr/>
         </p:nvSpPr>
@@ -21268,7 +21019,7 @@
       </p:sp>
       <p:sp>
         <p:nvSpPr>
-          <p:cNvPr id="18" name="PDF_TEXT_GROUP_365"/>
+          <p:cNvPr id="18" name="PDF_TEXT_GROUP_360"/>
           <p:cNvSpPr txBox="1"/>
           <p:nvPr/>
         </p:nvSpPr>
@@ -21316,7 +21067,7 @@
       </p:sp>
       <p:sp>
         <p:nvSpPr>
-          <p:cNvPr id="19" name="PDF_TEXT_GROUP_366"/>
+          <p:cNvPr id="19" name="PDF_TEXT_GROUP_361"/>
           <p:cNvSpPr txBox="1"/>
           <p:nvPr/>
         </p:nvSpPr>
@@ -21406,7 +21157,7 @@
       </p:pic>
       <p:sp>
         <p:nvSpPr>
-          <p:cNvPr id="3" name="PDF_TEXT_GROUP_367"/>
+          <p:cNvPr id="3" name="PDF_TEXT_GROUP_362"/>
           <p:cNvSpPr txBox="1"/>
           <p:nvPr/>
         </p:nvSpPr>
@@ -21454,7 +21205,7 @@
       </p:sp>
       <p:sp>
         <p:nvSpPr>
-          <p:cNvPr id="4" name="PDF_TEXT_GROUP_368"/>
+          <p:cNvPr id="4" name="PDF_TEXT_GROUP_363"/>
           <p:cNvSpPr txBox="1"/>
           <p:nvPr/>
         </p:nvSpPr>
@@ -21502,7 +21253,7 @@
       </p:sp>
       <p:sp>
         <p:nvSpPr>
-          <p:cNvPr id="5" name="PDF_TEXT_GROUP_369"/>
+          <p:cNvPr id="5" name="PDF_TEXT_GROUP_364"/>
           <p:cNvSpPr txBox="1"/>
           <p:nvPr/>
         </p:nvSpPr>
@@ -21550,7 +21301,7 @@
       </p:sp>
       <p:sp>
         <p:nvSpPr>
-          <p:cNvPr id="6" name="PDF_TEXT_GROUP_370"/>
+          <p:cNvPr id="6" name="PDF_TEXT_GROUP_365"/>
           <p:cNvSpPr txBox="1"/>
           <p:nvPr/>
         </p:nvSpPr>
@@ -21598,7 +21349,7 @@
       </p:sp>
       <p:sp>
         <p:nvSpPr>
-          <p:cNvPr id="7" name="PDF_TEXT_GROUP_371"/>
+          <p:cNvPr id="7" name="PDF_TEXT_GROUP_366"/>
           <p:cNvSpPr txBox="1"/>
           <p:nvPr/>
         </p:nvSpPr>
@@ -21646,7 +21397,7 @@
       </p:sp>
       <p:sp>
         <p:nvSpPr>
-          <p:cNvPr id="8" name="PDF_TEXT_GROUP_372"/>
+          <p:cNvPr id="8" name="PDF_TEXT_GROUP_367"/>
           <p:cNvSpPr txBox="1"/>
           <p:nvPr/>
         </p:nvSpPr>
@@ -21694,7 +21445,7 @@
       </p:sp>
       <p:sp>
         <p:nvSpPr>
-          <p:cNvPr id="9" name="PDF_TEXT_GROUP_373"/>
+          <p:cNvPr id="9" name="PDF_TEXT_GROUP_368"/>
           <p:cNvSpPr txBox="1"/>
           <p:nvPr/>
         </p:nvSpPr>
@@ -21742,7 +21493,7 @@
       </p:sp>
       <p:sp>
         <p:nvSpPr>
-          <p:cNvPr id="10" name="PDF_TEXT_GROUP_374"/>
+          <p:cNvPr id="10" name="PDF_TEXT_GROUP_369"/>
           <p:cNvSpPr txBox="1"/>
           <p:nvPr/>
         </p:nvSpPr>
@@ -21790,7 +21541,7 @@
       </p:sp>
       <p:sp>
         <p:nvSpPr>
-          <p:cNvPr id="11" name="PDF_TEXT_GROUP_375"/>
+          <p:cNvPr id="11" name="PDF_TEXT_GROUP_370"/>
           <p:cNvSpPr txBox="1"/>
           <p:nvPr/>
         </p:nvSpPr>
@@ -21838,7 +21589,7 @@
       </p:sp>
       <p:sp>
         <p:nvSpPr>
-          <p:cNvPr id="12" name="PDF_TEXT_GROUP_376"/>
+          <p:cNvPr id="12" name="PDF_TEXT_GROUP_371"/>
           <p:cNvSpPr txBox="1"/>
           <p:nvPr/>
         </p:nvSpPr>
@@ -21886,7 +21637,7 @@
       </p:sp>
       <p:sp>
         <p:nvSpPr>
-          <p:cNvPr id="13" name="PDF_TEXT_GROUP_377"/>
+          <p:cNvPr id="13" name="PDF_TEXT_GROUP_372"/>
           <p:cNvSpPr txBox="1"/>
           <p:nvPr/>
         </p:nvSpPr>
@@ -21934,7 +21685,7 @@
       </p:sp>
       <p:sp>
         <p:nvSpPr>
-          <p:cNvPr id="14" name="PDF_TEXT_GROUP_378"/>
+          <p:cNvPr id="14" name="PDF_TEXT_GROUP_373"/>
           <p:cNvSpPr txBox="1"/>
           <p:nvPr/>
         </p:nvSpPr>
@@ -21982,7 +21733,7 @@
       </p:sp>
       <p:sp>
         <p:nvSpPr>
-          <p:cNvPr id="15" name="PDF_TEXT_GROUP_379"/>
+          <p:cNvPr id="15" name="PDF_TEXT_GROUP_374"/>
           <p:cNvSpPr txBox="1"/>
           <p:nvPr/>
         </p:nvSpPr>
@@ -22030,7 +21781,7 @@
       </p:sp>
       <p:sp>
         <p:nvSpPr>
-          <p:cNvPr id="16" name="PDF_TEXT_GROUP_380"/>
+          <p:cNvPr id="16" name="PDF_TEXT_GROUP_375"/>
           <p:cNvSpPr txBox="1"/>
           <p:nvPr/>
         </p:nvSpPr>
@@ -22087,7 +21838,7 @@
       </p:sp>
       <p:sp>
         <p:nvSpPr>
-          <p:cNvPr id="17" name="PDF_TEXT_GROUP_381"/>
+          <p:cNvPr id="17" name="PDF_TEXT_GROUP_376"/>
           <p:cNvSpPr txBox="1"/>
           <p:nvPr/>
         </p:nvSpPr>
@@ -22135,7 +21886,7 @@
       </p:sp>
       <p:sp>
         <p:nvSpPr>
-          <p:cNvPr id="18" name="PDF_TEXT_GROUP_382"/>
+          <p:cNvPr id="18" name="PDF_TEXT_GROUP_377"/>
           <p:cNvSpPr txBox="1"/>
           <p:nvPr/>
         </p:nvSpPr>
@@ -22183,7 +21934,7 @@
       </p:sp>
       <p:sp>
         <p:nvSpPr>
-          <p:cNvPr id="19" name="PDF_TEXT_GROUP_383"/>
+          <p:cNvPr id="19" name="PDF_TEXT_GROUP_378"/>
           <p:cNvSpPr txBox="1"/>
           <p:nvPr/>
         </p:nvSpPr>
@@ -22231,7 +21982,7 @@
       </p:sp>
       <p:sp>
         <p:nvSpPr>
-          <p:cNvPr id="20" name="PDF_TEXT_GROUP_384"/>
+          <p:cNvPr id="20" name="PDF_TEXT_GROUP_379"/>
           <p:cNvSpPr txBox="1"/>
           <p:nvPr/>
         </p:nvSpPr>
@@ -22279,7 +22030,7 @@
       </p:sp>
       <p:sp>
         <p:nvSpPr>
-          <p:cNvPr id="21" name="PDF_TEXT_GROUP_385"/>
+          <p:cNvPr id="21" name="PDF_TEXT_GROUP_380"/>
           <p:cNvSpPr txBox="1"/>
           <p:nvPr/>
         </p:nvSpPr>
@@ -22369,7 +22120,7 @@
       </p:pic>
       <p:sp>
         <p:nvSpPr>
-          <p:cNvPr id="3" name="PDF_TEXT_GROUP_386"/>
+          <p:cNvPr id="3" name="PDF_TEXT_GROUP_381"/>
           <p:cNvSpPr txBox="1"/>
           <p:nvPr/>
         </p:nvSpPr>
@@ -22417,7 +22168,7 @@
       </p:sp>
       <p:sp>
         <p:nvSpPr>
-          <p:cNvPr id="4" name="PDF_TEXT_GROUP_387"/>
+          <p:cNvPr id="4" name="PDF_TEXT_GROUP_382"/>
           <p:cNvSpPr txBox="1"/>
           <p:nvPr/>
         </p:nvSpPr>
@@ -22465,7 +22216,7 @@
       </p:sp>
       <p:sp>
         <p:nvSpPr>
-          <p:cNvPr id="5" name="PDF_TEXT_GROUP_388"/>
+          <p:cNvPr id="5" name="PDF_TEXT_GROUP_383"/>
           <p:cNvSpPr txBox="1"/>
           <p:nvPr/>
         </p:nvSpPr>
@@ -22513,7 +22264,7 @@
       </p:sp>
       <p:sp>
         <p:nvSpPr>
-          <p:cNvPr id="6" name="PDF_TEXT_GROUP_389"/>
+          <p:cNvPr id="6" name="PDF_TEXT_GROUP_384"/>
           <p:cNvSpPr txBox="1"/>
           <p:nvPr/>
         </p:nvSpPr>
@@ -22561,7 +22312,7 @@
       </p:sp>
       <p:sp>
         <p:nvSpPr>
-          <p:cNvPr id="7" name="PDF_TEXT_GROUP_390"/>
+          <p:cNvPr id="7" name="PDF_TEXT_GROUP_385"/>
           <p:cNvSpPr txBox="1"/>
           <p:nvPr/>
         </p:nvSpPr>
@@ -22609,7 +22360,7 @@
       </p:sp>
       <p:sp>
         <p:nvSpPr>
-          <p:cNvPr id="8" name="PDF_TEXT_GROUP_391"/>
+          <p:cNvPr id="8" name="PDF_TEXT_GROUP_386"/>
           <p:cNvSpPr txBox="1"/>
           <p:nvPr/>
         </p:nvSpPr>
@@ -22657,7 +22408,7 @@
       </p:sp>
       <p:sp>
         <p:nvSpPr>
-          <p:cNvPr id="9" name="PDF_TEXT_GROUP_392"/>
+          <p:cNvPr id="9" name="PDF_TEXT_GROUP_387"/>
           <p:cNvSpPr txBox="1"/>
           <p:nvPr/>
         </p:nvSpPr>
@@ -22705,7 +22456,7 @@
       </p:sp>
       <p:sp>
         <p:nvSpPr>
-          <p:cNvPr id="10" name="PDF_TEXT_GROUP_393"/>
+          <p:cNvPr id="10" name="PDF_TEXT_GROUP_388"/>
           <p:cNvSpPr txBox="1"/>
           <p:nvPr/>
         </p:nvSpPr>
@@ -22753,7 +22504,7 @@
       </p:sp>
       <p:sp>
         <p:nvSpPr>
-          <p:cNvPr id="11" name="PDF_TEXT_GROUP_394"/>
+          <p:cNvPr id="11" name="PDF_TEXT_GROUP_389"/>
           <p:cNvSpPr txBox="1"/>
           <p:nvPr/>
         </p:nvSpPr>
@@ -22801,7 +22552,7 @@
       </p:sp>
       <p:sp>
         <p:nvSpPr>
-          <p:cNvPr id="12" name="PDF_TEXT_GROUP_395"/>
+          <p:cNvPr id="12" name="PDF_TEXT_GROUP_390"/>
           <p:cNvSpPr txBox="1"/>
           <p:nvPr/>
         </p:nvSpPr>
@@ -22849,7 +22600,7 @@
       </p:sp>
       <p:sp>
         <p:nvSpPr>
-          <p:cNvPr id="13" name="PDF_TEXT_GROUP_396"/>
+          <p:cNvPr id="13" name="PDF_TEXT_GROUP_391"/>
           <p:cNvSpPr txBox="1"/>
           <p:nvPr/>
         </p:nvSpPr>
@@ -22897,7 +22648,7 @@
       </p:sp>
       <p:sp>
         <p:nvSpPr>
-          <p:cNvPr id="14" name="PDF_TEXT_GROUP_397"/>
+          <p:cNvPr id="14" name="PDF_TEXT_GROUP_392"/>
           <p:cNvSpPr txBox="1"/>
           <p:nvPr/>
         </p:nvSpPr>
@@ -22954,7 +22705,7 @@
       </p:sp>
       <p:sp>
         <p:nvSpPr>
-          <p:cNvPr id="15" name="PDF_TEXT_GROUP_398"/>
+          <p:cNvPr id="15" name="PDF_TEXT_GROUP_393"/>
           <p:cNvSpPr txBox="1"/>
           <p:nvPr/>
         </p:nvSpPr>
@@ -23002,7 +22753,7 @@
       </p:sp>
       <p:sp>
         <p:nvSpPr>
-          <p:cNvPr id="16" name="PDF_TEXT_GROUP_399"/>
+          <p:cNvPr id="16" name="PDF_TEXT_GROUP_394"/>
           <p:cNvSpPr txBox="1"/>
           <p:nvPr/>
         </p:nvSpPr>
@@ -23050,7 +22801,7 @@
       </p:sp>
       <p:sp>
         <p:nvSpPr>
-          <p:cNvPr id="17" name="PDF_TEXT_GROUP_400"/>
+          <p:cNvPr id="17" name="PDF_TEXT_GROUP_395"/>
           <p:cNvSpPr txBox="1"/>
           <p:nvPr/>
         </p:nvSpPr>
@@ -23098,7 +22849,7 @@
       </p:sp>
       <p:sp>
         <p:nvSpPr>
-          <p:cNvPr id="18" name="PDF_TEXT_GROUP_401"/>
+          <p:cNvPr id="18" name="PDF_TEXT_GROUP_396"/>
           <p:cNvSpPr txBox="1"/>
           <p:nvPr/>
         </p:nvSpPr>
@@ -23146,7 +22897,7 @@
       </p:sp>
       <p:sp>
         <p:nvSpPr>
-          <p:cNvPr id="19" name="PDF_TEXT_GROUP_402"/>
+          <p:cNvPr id="19" name="PDF_TEXT_GROUP_397"/>
           <p:cNvSpPr txBox="1"/>
           <p:nvPr/>
         </p:nvSpPr>
@@ -23194,7 +22945,7 @@
       </p:sp>
       <p:sp>
         <p:nvSpPr>
-          <p:cNvPr id="20" name="PDF_TEXT_GROUP_403"/>
+          <p:cNvPr id="20" name="PDF_TEXT_GROUP_398"/>
           <p:cNvSpPr txBox="1"/>
           <p:nvPr/>
         </p:nvSpPr>
@@ -23896,7 +23647,7 @@
       </p:pic>
       <p:sp>
         <p:nvSpPr>
-          <p:cNvPr id="3" name="PDF_TEXT_GROUP_404"/>
+          <p:cNvPr id="3" name="PDF_TEXT_GROUP_399"/>
           <p:cNvSpPr txBox="1"/>
           <p:nvPr/>
         </p:nvSpPr>
@@ -23944,7 +23695,7 @@
       </p:sp>
       <p:sp>
         <p:nvSpPr>
-          <p:cNvPr id="4" name="PDF_TEXT_GROUP_405"/>
+          <p:cNvPr id="4" name="PDF_TEXT_GROUP_400"/>
           <p:cNvSpPr txBox="1"/>
           <p:nvPr/>
         </p:nvSpPr>
@@ -23992,7 +23743,7 @@
       </p:sp>
       <p:sp>
         <p:nvSpPr>
-          <p:cNvPr id="5" name="PDF_TEXT_GROUP_406"/>
+          <p:cNvPr id="5" name="PDF_TEXT_GROUP_401"/>
           <p:cNvSpPr txBox="1"/>
           <p:nvPr/>
         </p:nvSpPr>
@@ -24040,7 +23791,7 @@
       </p:sp>
       <p:sp>
         <p:nvSpPr>
-          <p:cNvPr id="6" name="PDF_TEXT_GROUP_407"/>
+          <p:cNvPr id="6" name="PDF_TEXT_GROUP_402"/>
           <p:cNvSpPr txBox="1"/>
           <p:nvPr/>
         </p:nvSpPr>
@@ -24088,7 +23839,7 @@
       </p:sp>
       <p:sp>
         <p:nvSpPr>
-          <p:cNvPr id="7" name="PDF_TEXT_GROUP_408"/>
+          <p:cNvPr id="7" name="PDF_TEXT_GROUP_403"/>
           <p:cNvSpPr txBox="1"/>
           <p:nvPr/>
         </p:nvSpPr>
@@ -24136,7 +23887,7 @@
       </p:sp>
       <p:sp>
         <p:nvSpPr>
-          <p:cNvPr id="8" name="PDF_TEXT_GROUP_409"/>
+          <p:cNvPr id="8" name="PDF_TEXT_GROUP_404"/>
           <p:cNvSpPr txBox="1"/>
           <p:nvPr/>
         </p:nvSpPr>
@@ -24184,7 +23935,7 @@
       </p:sp>
       <p:sp>
         <p:nvSpPr>
-          <p:cNvPr id="9" name="PDF_TEXT_GROUP_410"/>
+          <p:cNvPr id="9" name="PDF_TEXT_GROUP_405"/>
           <p:cNvSpPr txBox="1"/>
           <p:nvPr/>
         </p:nvSpPr>
@@ -24232,7 +23983,7 @@
       </p:sp>
       <p:sp>
         <p:nvSpPr>
-          <p:cNvPr id="10" name="PDF_TEXT_GROUP_411"/>
+          <p:cNvPr id="10" name="PDF_TEXT_GROUP_406"/>
           <p:cNvSpPr txBox="1"/>
           <p:nvPr/>
         </p:nvSpPr>
@@ -24289,7 +24040,7 @@
       </p:sp>
       <p:sp>
         <p:nvSpPr>
-          <p:cNvPr id="11" name="PDF_TEXT_GROUP_412"/>
+          <p:cNvPr id="11" name="PDF_TEXT_GROUP_407"/>
           <p:cNvSpPr txBox="1"/>
           <p:nvPr/>
         </p:nvSpPr>
@@ -24346,7 +24097,7 @@
       </p:sp>
       <p:sp>
         <p:nvSpPr>
-          <p:cNvPr id="12" name="PDF_TEXT_GROUP_413"/>
+          <p:cNvPr id="12" name="PDF_TEXT_GROUP_408"/>
           <p:cNvSpPr txBox="1"/>
           <p:nvPr/>
         </p:nvSpPr>
@@ -24394,7 +24145,7 @@
       </p:sp>
       <p:sp>
         <p:nvSpPr>
-          <p:cNvPr id="13" name="PDF_TEXT_GROUP_414"/>
+          <p:cNvPr id="13" name="PDF_TEXT_GROUP_409"/>
           <p:cNvSpPr txBox="1"/>
           <p:nvPr/>
         </p:nvSpPr>
@@ -24442,7 +24193,7 @@
       </p:sp>
       <p:sp>
         <p:nvSpPr>
-          <p:cNvPr id="14" name="PDF_TEXT_GROUP_415"/>
+          <p:cNvPr id="14" name="PDF_TEXT_GROUP_410"/>
           <p:cNvSpPr txBox="1"/>
           <p:nvPr/>
         </p:nvSpPr>
@@ -24490,7 +24241,7 @@
       </p:sp>
       <p:sp>
         <p:nvSpPr>
-          <p:cNvPr id="15" name="PDF_TEXT_GROUP_416"/>
+          <p:cNvPr id="15" name="PDF_TEXT_GROUP_411"/>
           <p:cNvSpPr txBox="1"/>
           <p:nvPr/>
         </p:nvSpPr>
@@ -24547,7 +24298,7 @@
       </p:sp>
       <p:sp>
         <p:nvSpPr>
-          <p:cNvPr id="16" name="PDF_TEXT_GROUP_417"/>
+          <p:cNvPr id="16" name="PDF_TEXT_GROUP_412"/>
           <p:cNvSpPr txBox="1"/>
           <p:nvPr/>
         </p:nvSpPr>
@@ -24595,7 +24346,7 @@
       </p:sp>
       <p:sp>
         <p:nvSpPr>
-          <p:cNvPr id="17" name="PDF_TEXT_GROUP_418"/>
+          <p:cNvPr id="17" name="PDF_TEXT_GROUP_413"/>
           <p:cNvSpPr txBox="1"/>
           <p:nvPr/>
         </p:nvSpPr>
@@ -24643,7 +24394,7 @@
       </p:sp>
       <p:sp>
         <p:nvSpPr>
-          <p:cNvPr id="18" name="PDF_TEXT_GROUP_419"/>
+          <p:cNvPr id="18" name="PDF_TEXT_GROUP_414"/>
           <p:cNvSpPr txBox="1"/>
           <p:nvPr/>
         </p:nvSpPr>
@@ -24691,7 +24442,7 @@
       </p:sp>
       <p:sp>
         <p:nvSpPr>
-          <p:cNvPr id="19" name="PDF_TEXT_GROUP_420"/>
+          <p:cNvPr id="19" name="PDF_TEXT_GROUP_415"/>
           <p:cNvSpPr txBox="1"/>
           <p:nvPr/>
         </p:nvSpPr>
@@ -24739,7 +24490,7 @@
       </p:sp>
       <p:sp>
         <p:nvSpPr>
-          <p:cNvPr id="20" name="PDF_TEXT_GROUP_421"/>
+          <p:cNvPr id="20" name="PDF_TEXT_GROUP_416"/>
           <p:cNvSpPr txBox="1"/>
           <p:nvPr/>
         </p:nvSpPr>
@@ -24796,7 +24547,7 @@
       </p:sp>
       <p:sp>
         <p:nvSpPr>
-          <p:cNvPr id="21" name="PDF_TEXT_GROUP_422"/>
+          <p:cNvPr id="21" name="PDF_TEXT_GROUP_417"/>
           <p:cNvSpPr txBox="1"/>
           <p:nvPr/>
         </p:nvSpPr>
@@ -24853,7 +24604,7 @@
       </p:sp>
       <p:sp>
         <p:nvSpPr>
-          <p:cNvPr id="22" name="PDF_TEXT_GROUP_423"/>
+          <p:cNvPr id="22" name="PDF_TEXT_GROUP_418"/>
           <p:cNvSpPr txBox="1"/>
           <p:nvPr/>
         </p:nvSpPr>
@@ -24901,7 +24652,7 @@
       </p:sp>
       <p:sp>
         <p:nvSpPr>
-          <p:cNvPr id="23" name="PDF_TEXT_GROUP_424"/>
+          <p:cNvPr id="23" name="PDF_TEXT_GROUP_419"/>
           <p:cNvSpPr txBox="1"/>
           <p:nvPr/>
         </p:nvSpPr>
@@ -24949,7 +24700,7 @@
       </p:sp>
       <p:sp>
         <p:nvSpPr>
-          <p:cNvPr id="24" name="PDF_TEXT_GROUP_425"/>
+          <p:cNvPr id="24" name="PDF_TEXT_GROUP_420"/>
           <p:cNvSpPr txBox="1"/>
           <p:nvPr/>
         </p:nvSpPr>
@@ -24997,7 +24748,7 @@
       </p:sp>
       <p:sp>
         <p:nvSpPr>
-          <p:cNvPr id="25" name="PDF_TEXT_GROUP_426"/>
+          <p:cNvPr id="25" name="PDF_TEXT_GROUP_421"/>
           <p:cNvSpPr txBox="1"/>
           <p:nvPr/>
         </p:nvSpPr>
@@ -25045,7 +24796,7 @@
       </p:sp>
       <p:sp>
         <p:nvSpPr>
-          <p:cNvPr id="26" name="PDF_TEXT_GROUP_427"/>
+          <p:cNvPr id="26" name="PDF_TEXT_GROUP_422"/>
           <p:cNvSpPr txBox="1"/>
           <p:nvPr/>
         </p:nvSpPr>
@@ -25093,7 +24844,7 @@
       </p:sp>
       <p:sp>
         <p:nvSpPr>
-          <p:cNvPr id="27" name="PDF_TEXT_GROUP_428"/>
+          <p:cNvPr id="27" name="PDF_TEXT_GROUP_423"/>
           <p:cNvSpPr txBox="1"/>
           <p:nvPr/>
         </p:nvSpPr>
@@ -25183,7 +24934,7 @@
       </p:pic>
       <p:sp>
         <p:nvSpPr>
-          <p:cNvPr id="3" name="PDF_TEXT_GROUP_429"/>
+          <p:cNvPr id="3" name="PDF_TEXT_GROUP_424"/>
           <p:cNvSpPr txBox="1"/>
           <p:nvPr/>
         </p:nvSpPr>
@@ -25231,7 +24982,7 @@
       </p:sp>
       <p:sp>
         <p:nvSpPr>
-          <p:cNvPr id="4" name="PDF_TEXT_GROUP_430"/>
+          <p:cNvPr id="4" name="PDF_TEXT_GROUP_425"/>
           <p:cNvSpPr txBox="1"/>
           <p:nvPr/>
         </p:nvSpPr>
@@ -25279,7 +25030,7 @@
       </p:sp>
       <p:sp>
         <p:nvSpPr>
-          <p:cNvPr id="5" name="PDF_TEXT_GROUP_431"/>
+          <p:cNvPr id="5" name="PDF_TEXT_GROUP_426"/>
           <p:cNvSpPr txBox="1"/>
           <p:nvPr/>
         </p:nvSpPr>
@@ -25327,7 +25078,7 @@
       </p:sp>
       <p:sp>
         <p:nvSpPr>
-          <p:cNvPr id="6" name="PDF_TEXT_GROUP_432"/>
+          <p:cNvPr id="6" name="PDF_TEXT_GROUP_427"/>
           <p:cNvSpPr txBox="1"/>
           <p:nvPr/>
         </p:nvSpPr>
@@ -25375,7 +25126,7 @@
       </p:sp>
       <p:sp>
         <p:nvSpPr>
-          <p:cNvPr id="7" name="PDF_TEXT_GROUP_433"/>
+          <p:cNvPr id="7" name="PDF_TEXT_GROUP_428"/>
           <p:cNvSpPr txBox="1"/>
           <p:nvPr/>
         </p:nvSpPr>
@@ -25432,7 +25183,7 @@
       </p:sp>
       <p:sp>
         <p:nvSpPr>
-          <p:cNvPr id="8" name="PDF_TEXT_GROUP_434"/>
+          <p:cNvPr id="8" name="PDF_TEXT_GROUP_429"/>
           <p:cNvSpPr txBox="1"/>
           <p:nvPr/>
         </p:nvSpPr>
@@ -25489,7 +25240,7 @@
       </p:sp>
       <p:sp>
         <p:nvSpPr>
-          <p:cNvPr id="9" name="PDF_TEXT_GROUP_435"/>
+          <p:cNvPr id="9" name="PDF_TEXT_GROUP_430"/>
           <p:cNvSpPr txBox="1"/>
           <p:nvPr/>
         </p:nvSpPr>
@@ -25546,7 +25297,7 @@
       </p:sp>
       <p:sp>
         <p:nvSpPr>
-          <p:cNvPr id="10" name="PDF_TEXT_GROUP_436"/>
+          <p:cNvPr id="10" name="PDF_TEXT_GROUP_431"/>
           <p:cNvSpPr txBox="1"/>
           <p:nvPr/>
         </p:nvSpPr>
@@ -25594,7 +25345,7 @@
       </p:sp>
       <p:sp>
         <p:nvSpPr>
-          <p:cNvPr id="11" name="PDF_TEXT_GROUP_437"/>
+          <p:cNvPr id="11" name="PDF_TEXT_GROUP_432"/>
           <p:cNvSpPr txBox="1"/>
           <p:nvPr/>
         </p:nvSpPr>
@@ -25642,7 +25393,7 @@
       </p:sp>
       <p:sp>
         <p:nvSpPr>
-          <p:cNvPr id="12" name="PDF_TEXT_GROUP_438"/>
+          <p:cNvPr id="12" name="PDF_TEXT_GROUP_433"/>
           <p:cNvSpPr txBox="1"/>
           <p:nvPr/>
         </p:nvSpPr>
@@ -25690,7 +25441,7 @@
       </p:sp>
       <p:sp>
         <p:nvSpPr>
-          <p:cNvPr id="13" name="PDF_TEXT_GROUP_439"/>
+          <p:cNvPr id="13" name="PDF_TEXT_GROUP_434"/>
           <p:cNvSpPr txBox="1"/>
           <p:nvPr/>
         </p:nvSpPr>
@@ -25747,7 +25498,7 @@
       </p:sp>
       <p:sp>
         <p:nvSpPr>
-          <p:cNvPr id="14" name="PDF_TEXT_GROUP_440"/>
+          <p:cNvPr id="14" name="PDF_TEXT_GROUP_435"/>
           <p:cNvSpPr txBox="1"/>
           <p:nvPr/>
         </p:nvSpPr>
@@ -25795,7 +25546,7 @@
       </p:sp>
       <p:sp>
         <p:nvSpPr>
-          <p:cNvPr id="15" name="PDF_TEXT_GROUP_441"/>
+          <p:cNvPr id="15" name="PDF_TEXT_GROUP_436"/>
           <p:cNvSpPr txBox="1"/>
           <p:nvPr/>
         </p:nvSpPr>
@@ -25843,7 +25594,7 @@
       </p:sp>
       <p:sp>
         <p:nvSpPr>
-          <p:cNvPr id="16" name="PDF_TEXT_GROUP_442"/>
+          <p:cNvPr id="16" name="PDF_TEXT_GROUP_437"/>
           <p:cNvSpPr txBox="1"/>
           <p:nvPr/>
         </p:nvSpPr>
@@ -25900,7 +25651,7 @@
       </p:sp>
       <p:sp>
         <p:nvSpPr>
-          <p:cNvPr id="17" name="PDF_TEXT_GROUP_443"/>
+          <p:cNvPr id="17" name="PDF_TEXT_GROUP_438"/>
           <p:cNvSpPr txBox="1"/>
           <p:nvPr/>
         </p:nvSpPr>
@@ -25948,7 +25699,7 @@
       </p:sp>
       <p:sp>
         <p:nvSpPr>
-          <p:cNvPr id="18" name="PDF_TEXT_GROUP_444"/>
+          <p:cNvPr id="18" name="PDF_TEXT_GROUP_439"/>
           <p:cNvSpPr txBox="1"/>
           <p:nvPr/>
         </p:nvSpPr>
@@ -25996,7 +25747,7 @@
       </p:sp>
       <p:sp>
         <p:nvSpPr>
-          <p:cNvPr id="19" name="PDF_TEXT_GROUP_445"/>
+          <p:cNvPr id="19" name="PDF_TEXT_GROUP_440"/>
           <p:cNvSpPr txBox="1"/>
           <p:nvPr/>
         </p:nvSpPr>
@@ -26044,7 +25795,7 @@
       </p:sp>
       <p:sp>
         <p:nvSpPr>
-          <p:cNvPr id="20" name="PDF_TEXT_GROUP_446"/>
+          <p:cNvPr id="20" name="PDF_TEXT_GROUP_441"/>
           <p:cNvSpPr txBox="1"/>
           <p:nvPr/>
         </p:nvSpPr>
@@ -26092,7 +25843,7 @@
       </p:sp>
       <p:sp>
         <p:nvSpPr>
-          <p:cNvPr id="21" name="PDF_TEXT_GROUP_447"/>
+          <p:cNvPr id="21" name="PDF_TEXT_GROUP_442"/>
           <p:cNvSpPr txBox="1"/>
           <p:nvPr/>
         </p:nvSpPr>
@@ -26182,7 +25933,7 @@
       </p:pic>
       <p:sp>
         <p:nvSpPr>
-          <p:cNvPr id="3" name="PDF_TEXT_GROUP_448"/>
+          <p:cNvPr id="3" name="PDF_TEXT_GROUP_443"/>
           <p:cNvSpPr txBox="1"/>
           <p:nvPr/>
         </p:nvSpPr>
@@ -26230,7 +25981,7 @@
       </p:sp>
       <p:sp>
         <p:nvSpPr>
-          <p:cNvPr id="4" name="PDF_TEXT_GROUP_449"/>
+          <p:cNvPr id="4" name="PDF_TEXT_GROUP_444"/>
           <p:cNvSpPr txBox="1"/>
           <p:nvPr/>
         </p:nvSpPr>
@@ -26296,7 +26047,7 @@
       </p:sp>
       <p:sp>
         <p:nvSpPr>
-          <p:cNvPr id="5" name="PDF_TEXT_GROUP_450"/>
+          <p:cNvPr id="5" name="PDF_TEXT_GROUP_445"/>
           <p:cNvSpPr txBox="1"/>
           <p:nvPr/>
         </p:nvSpPr>
@@ -26362,7 +26113,7 @@
       </p:sp>
       <p:sp>
         <p:nvSpPr>
-          <p:cNvPr id="6" name="PDF_TEXT_GROUP_451"/>
+          <p:cNvPr id="6" name="PDF_TEXT_GROUP_446"/>
           <p:cNvSpPr txBox="1"/>
           <p:nvPr/>
         </p:nvSpPr>
@@ -26419,7 +26170,7 @@
       </p:sp>
       <p:sp>
         <p:nvSpPr>
-          <p:cNvPr id="7" name="PDF_TEXT_GROUP_452"/>
+          <p:cNvPr id="7" name="PDF_TEXT_GROUP_447"/>
           <p:cNvSpPr txBox="1"/>
           <p:nvPr/>
         </p:nvSpPr>
@@ -26476,7 +26227,7 @@
       </p:sp>
       <p:sp>
         <p:nvSpPr>
-          <p:cNvPr id="8" name="PDF_TEXT_GROUP_453"/>
+          <p:cNvPr id="8" name="PDF_TEXT_GROUP_448"/>
           <p:cNvSpPr txBox="1"/>
           <p:nvPr/>
         </p:nvSpPr>
@@ -26533,7 +26284,7 @@
       </p:sp>
       <p:sp>
         <p:nvSpPr>
-          <p:cNvPr id="9" name="PDF_TEXT_GROUP_454"/>
+          <p:cNvPr id="9" name="PDF_TEXT_GROUP_449"/>
           <p:cNvSpPr txBox="1"/>
           <p:nvPr/>
         </p:nvSpPr>
@@ -26581,7 +26332,7 @@
       </p:sp>
       <p:sp>
         <p:nvSpPr>
-          <p:cNvPr id="10" name="PDF_TEXT_GROUP_455"/>
+          <p:cNvPr id="10" name="PDF_TEXT_GROUP_450"/>
           <p:cNvSpPr txBox="1"/>
           <p:nvPr/>
         </p:nvSpPr>
@@ -26629,7 +26380,7 @@
       </p:sp>
       <p:sp>
         <p:nvSpPr>
-          <p:cNvPr id="11" name="PDF_TEXT_GROUP_456"/>
+          <p:cNvPr id="11" name="PDF_TEXT_GROUP_451"/>
           <p:cNvSpPr txBox="1"/>
           <p:nvPr/>
         </p:nvSpPr>
@@ -26677,7 +26428,7 @@
       </p:sp>
       <p:sp>
         <p:nvSpPr>
-          <p:cNvPr id="12" name="PDF_TEXT_GROUP_457"/>
+          <p:cNvPr id="12" name="PDF_TEXT_GROUP_452"/>
           <p:cNvSpPr txBox="1"/>
           <p:nvPr/>
         </p:nvSpPr>
@@ -26725,7 +26476,7 @@
       </p:sp>
       <p:sp>
         <p:nvSpPr>
-          <p:cNvPr id="13" name="PDF_TEXT_GROUP_458"/>
+          <p:cNvPr id="13" name="PDF_TEXT_GROUP_453"/>
           <p:cNvSpPr txBox="1"/>
           <p:nvPr/>
         </p:nvSpPr>
@@ -26773,7 +26524,7 @@
       </p:sp>
       <p:sp>
         <p:nvSpPr>
-          <p:cNvPr id="14" name="PDF_BULLET_SPAN_648"/>
+          <p:cNvPr id="14" name="PDF_BULLET_SPAN_642"/>
           <p:cNvSpPr/>
           <p:nvPr/>
         </p:nvSpPr>
@@ -26816,7 +26567,7 @@
       </p:sp>
       <p:sp>
         <p:nvSpPr>
-          <p:cNvPr id="15" name="PDF_BULLET_SPAN_652"/>
+          <p:cNvPr id="15" name="PDF_BULLET_SPAN_646"/>
           <p:cNvSpPr/>
           <p:nvPr/>
         </p:nvSpPr>
@@ -26859,7 +26610,7 @@
       </p:sp>
       <p:sp>
         <p:nvSpPr>
-          <p:cNvPr id="16" name="PDF_BULLET_SPAN_656"/>
+          <p:cNvPr id="16" name="PDF_BULLET_SPAN_650"/>
           <p:cNvSpPr/>
           <p:nvPr/>
         </p:nvSpPr>
@@ -26902,7 +26653,7 @@
       </p:sp>
       <p:sp>
         <p:nvSpPr>
-          <p:cNvPr id="17" name="PDF_BULLET_SPAN_659"/>
+          <p:cNvPr id="17" name="PDF_BULLET_SPAN_653"/>
           <p:cNvSpPr/>
           <p:nvPr/>
         </p:nvSpPr>
@@ -26987,7 +26738,7 @@
       </p:pic>
       <p:sp>
         <p:nvSpPr>
-          <p:cNvPr id="3" name="PDF_TEXT_GROUP_459"/>
+          <p:cNvPr id="3" name="PDF_TEXT_GROUP_454"/>
           <p:cNvSpPr txBox="1"/>
           <p:nvPr/>
         </p:nvSpPr>
@@ -27035,7 +26786,7 @@
       </p:sp>
       <p:sp>
         <p:nvSpPr>
-          <p:cNvPr id="4" name="PDF_TEXT_GROUP_460"/>
+          <p:cNvPr id="4" name="PDF_TEXT_GROUP_455"/>
           <p:cNvSpPr txBox="1"/>
           <p:nvPr/>
         </p:nvSpPr>
@@ -27092,7 +26843,7 @@
       </p:sp>
       <p:sp>
         <p:nvSpPr>
-          <p:cNvPr id="5" name="PDF_TEXT_GROUP_461"/>
+          <p:cNvPr id="5" name="PDF_TEXT_GROUP_456"/>
           <p:cNvSpPr txBox="1"/>
           <p:nvPr/>
         </p:nvSpPr>
@@ -27149,7 +26900,7 @@
       </p:sp>
       <p:sp>
         <p:nvSpPr>
-          <p:cNvPr id="6" name="PDF_TEXT_GROUP_462"/>
+          <p:cNvPr id="6" name="PDF_TEXT_GROUP_457"/>
           <p:cNvSpPr txBox="1"/>
           <p:nvPr/>
         </p:nvSpPr>
@@ -27215,7 +26966,7 @@
       </p:sp>
       <p:sp>
         <p:nvSpPr>
-          <p:cNvPr id="7" name="PDF_TEXT_GROUP_463"/>
+          <p:cNvPr id="7" name="PDF_TEXT_GROUP_458"/>
           <p:cNvSpPr txBox="1"/>
           <p:nvPr/>
         </p:nvSpPr>
@@ -27272,7 +27023,7 @@
       </p:sp>
       <p:sp>
         <p:nvSpPr>
-          <p:cNvPr id="8" name="PDF_TEXT_GROUP_464"/>
+          <p:cNvPr id="8" name="PDF_TEXT_GROUP_459"/>
           <p:cNvSpPr txBox="1"/>
           <p:nvPr/>
         </p:nvSpPr>
@@ -27329,7 +27080,7 @@
       </p:sp>
       <p:sp>
         <p:nvSpPr>
-          <p:cNvPr id="9" name="PDF_TEXT_GROUP_465"/>
+          <p:cNvPr id="9" name="PDF_TEXT_GROUP_460"/>
           <p:cNvSpPr txBox="1"/>
           <p:nvPr/>
         </p:nvSpPr>
@@ -27377,7 +27128,7 @@
       </p:sp>
       <p:sp>
         <p:nvSpPr>
-          <p:cNvPr id="10" name="PDF_TEXT_GROUP_466"/>
+          <p:cNvPr id="10" name="PDF_TEXT_GROUP_461"/>
           <p:cNvSpPr txBox="1"/>
           <p:nvPr/>
         </p:nvSpPr>
@@ -27425,7 +27176,7 @@
       </p:sp>
       <p:sp>
         <p:nvSpPr>
-          <p:cNvPr id="11" name="PDF_TEXT_GROUP_467"/>
+          <p:cNvPr id="11" name="PDF_TEXT_GROUP_462"/>
           <p:cNvSpPr txBox="1"/>
           <p:nvPr/>
         </p:nvSpPr>
@@ -27473,7 +27224,7 @@
       </p:sp>
       <p:sp>
         <p:nvSpPr>
-          <p:cNvPr id="12" name="PDF_TEXT_GROUP_468"/>
+          <p:cNvPr id="12" name="PDF_TEXT_GROUP_463"/>
           <p:cNvSpPr txBox="1"/>
           <p:nvPr/>
         </p:nvSpPr>
@@ -27521,7 +27272,7 @@
       </p:sp>
       <p:sp>
         <p:nvSpPr>
-          <p:cNvPr id="13" name="PDF_TEXT_GROUP_469"/>
+          <p:cNvPr id="13" name="PDF_TEXT_GROUP_464"/>
           <p:cNvSpPr txBox="1"/>
           <p:nvPr/>
         </p:nvSpPr>
@@ -27611,7 +27362,7 @@
       </p:pic>
       <p:sp>
         <p:nvSpPr>
-          <p:cNvPr id="3" name="PDF_TEXT_GROUP_470"/>
+          <p:cNvPr id="3" name="PDF_TEXT_GROUP_465"/>
           <p:cNvSpPr txBox="1"/>
           <p:nvPr/>
         </p:nvSpPr>
@@ -27659,7 +27410,7 @@
       </p:sp>
       <p:sp>
         <p:nvSpPr>
-          <p:cNvPr id="4" name="PDF_TEXT_GROUP_471"/>
+          <p:cNvPr id="4" name="PDF_TEXT_GROUP_466"/>
           <p:cNvSpPr txBox="1"/>
           <p:nvPr/>
         </p:nvSpPr>
@@ -27707,7 +27458,7 @@
       </p:sp>
       <p:sp>
         <p:nvSpPr>
-          <p:cNvPr id="5" name="PDF_TEXT_GROUP_472"/>
+          <p:cNvPr id="5" name="PDF_TEXT_GROUP_467"/>
           <p:cNvSpPr txBox="1"/>
           <p:nvPr/>
         </p:nvSpPr>
@@ -27755,7 +27506,7 @@
       </p:sp>
       <p:sp>
         <p:nvSpPr>
-          <p:cNvPr id="6" name="PDF_TEXT_GROUP_473"/>
+          <p:cNvPr id="6" name="PDF_TEXT_GROUP_468"/>
           <p:cNvSpPr txBox="1"/>
           <p:nvPr/>
         </p:nvSpPr>
@@ -27803,7 +27554,7 @@
       </p:sp>
       <p:sp>
         <p:nvSpPr>
-          <p:cNvPr id="7" name="PDF_TEXT_GROUP_474"/>
+          <p:cNvPr id="7" name="PDF_TEXT_GROUP_469"/>
           <p:cNvSpPr txBox="1"/>
           <p:nvPr/>
         </p:nvSpPr>
@@ -27851,7 +27602,7 @@
       </p:sp>
       <p:sp>
         <p:nvSpPr>
-          <p:cNvPr id="8" name="PDF_TEXT_GROUP_475"/>
+          <p:cNvPr id="8" name="PDF_TEXT_GROUP_470"/>
           <p:cNvSpPr txBox="1"/>
           <p:nvPr/>
         </p:nvSpPr>
@@ -27899,7 +27650,7 @@
       </p:sp>
       <p:sp>
         <p:nvSpPr>
-          <p:cNvPr id="9" name="PDF_TEXT_GROUP_476"/>
+          <p:cNvPr id="9" name="PDF_TEXT_GROUP_471"/>
           <p:cNvSpPr txBox="1"/>
           <p:nvPr/>
         </p:nvSpPr>
@@ -27947,7 +27698,7 @@
       </p:sp>
       <p:sp>
         <p:nvSpPr>
-          <p:cNvPr id="10" name="PDF_TEXT_GROUP_477"/>
+          <p:cNvPr id="10" name="PDF_TEXT_GROUP_472"/>
           <p:cNvSpPr txBox="1"/>
           <p:nvPr/>
         </p:nvSpPr>
@@ -27995,7 +27746,7 @@
       </p:sp>
       <p:sp>
         <p:nvSpPr>
-          <p:cNvPr id="11" name="PDF_TEXT_GROUP_478"/>
+          <p:cNvPr id="11" name="PDF_TEXT_GROUP_473"/>
           <p:cNvSpPr txBox="1"/>
           <p:nvPr/>
         </p:nvSpPr>
@@ -28043,7 +27794,7 @@
       </p:sp>
       <p:sp>
         <p:nvSpPr>
-          <p:cNvPr id="12" name="PDF_TEXT_GROUP_479"/>
+          <p:cNvPr id="12" name="PDF_TEXT_GROUP_474"/>
           <p:cNvSpPr txBox="1"/>
           <p:nvPr/>
         </p:nvSpPr>
@@ -28100,7 +27851,7 @@
       </p:sp>
       <p:sp>
         <p:nvSpPr>
-          <p:cNvPr id="13" name="PDF_TEXT_GROUP_480"/>
+          <p:cNvPr id="13" name="PDF_TEXT_GROUP_475"/>
           <p:cNvSpPr txBox="1"/>
           <p:nvPr/>
         </p:nvSpPr>
@@ -28148,7 +27899,7 @@
       </p:sp>
       <p:sp>
         <p:nvSpPr>
-          <p:cNvPr id="14" name="PDF_TEXT_GROUP_481"/>
+          <p:cNvPr id="14" name="PDF_TEXT_GROUP_476"/>
           <p:cNvSpPr txBox="1"/>
           <p:nvPr/>
         </p:nvSpPr>
@@ -28196,7 +27947,7 @@
       </p:sp>
       <p:sp>
         <p:nvSpPr>
-          <p:cNvPr id="15" name="PDF_TEXT_GROUP_482"/>
+          <p:cNvPr id="15" name="PDF_TEXT_GROUP_477"/>
           <p:cNvSpPr txBox="1"/>
           <p:nvPr/>
         </p:nvSpPr>
@@ -28244,7 +27995,7 @@
       </p:sp>
       <p:sp>
         <p:nvSpPr>
-          <p:cNvPr id="16" name="PDF_TEXT_GROUP_483"/>
+          <p:cNvPr id="16" name="PDF_TEXT_GROUP_478"/>
           <p:cNvSpPr txBox="1"/>
           <p:nvPr/>
         </p:nvSpPr>
@@ -28292,7 +28043,7 @@
       </p:sp>
       <p:sp>
         <p:nvSpPr>
-          <p:cNvPr id="17" name="PDF_TEXT_GROUP_484"/>
+          <p:cNvPr id="17" name="PDF_TEXT_GROUP_479"/>
           <p:cNvSpPr txBox="1"/>
           <p:nvPr/>
         </p:nvSpPr>
@@ -28382,7 +28133,7 @@
       </p:pic>
       <p:sp>
         <p:nvSpPr>
-          <p:cNvPr id="3" name="PDF_TEXT_GROUP_485"/>
+          <p:cNvPr id="3" name="PDF_TEXT_GROUP_480"/>
           <p:cNvSpPr txBox="1"/>
           <p:nvPr/>
         </p:nvSpPr>
@@ -28430,7 +28181,7 @@
       </p:sp>
       <p:sp>
         <p:nvSpPr>
-          <p:cNvPr id="4" name="PDF_TEXT_GROUP_486"/>
+          <p:cNvPr id="4" name="PDF_TEXT_GROUP_481"/>
           <p:cNvSpPr txBox="1"/>
           <p:nvPr/>
         </p:nvSpPr>
@@ -28478,7 +28229,7 @@
       </p:sp>
       <p:sp>
         <p:nvSpPr>
-          <p:cNvPr id="5" name="PDF_TEXT_GROUP_487"/>
+          <p:cNvPr id="5" name="PDF_TEXT_GROUP_482"/>
           <p:cNvSpPr txBox="1"/>
           <p:nvPr/>
         </p:nvSpPr>
@@ -28526,7 +28277,7 @@
       </p:sp>
       <p:sp>
         <p:nvSpPr>
-          <p:cNvPr id="6" name="PDF_TEXT_GROUP_488"/>
+          <p:cNvPr id="6" name="PDF_TEXT_GROUP_483"/>
           <p:cNvSpPr txBox="1"/>
           <p:nvPr/>
         </p:nvSpPr>
@@ -28574,7 +28325,7 @@
       </p:sp>
       <p:sp>
         <p:nvSpPr>
-          <p:cNvPr id="7" name="PDF_TEXT_GROUP_489"/>
+          <p:cNvPr id="7" name="PDF_TEXT_GROUP_484"/>
           <p:cNvSpPr txBox="1"/>
           <p:nvPr/>
         </p:nvSpPr>
@@ -28622,7 +28373,7 @@
       </p:sp>
       <p:sp>
         <p:nvSpPr>
-          <p:cNvPr id="8" name="PDF_TEXT_GROUP_490"/>
+          <p:cNvPr id="8" name="PDF_TEXT_GROUP_485"/>
           <p:cNvSpPr txBox="1"/>
           <p:nvPr/>
         </p:nvSpPr>
@@ -28670,7 +28421,7 @@
       </p:sp>
       <p:sp>
         <p:nvSpPr>
-          <p:cNvPr id="9" name="PDF_TEXT_GROUP_491"/>
+          <p:cNvPr id="9" name="PDF_TEXT_GROUP_486"/>
           <p:cNvSpPr txBox="1"/>
           <p:nvPr/>
         </p:nvSpPr>
@@ -28718,7 +28469,7 @@
       </p:sp>
       <p:sp>
         <p:nvSpPr>
-          <p:cNvPr id="10" name="PDF_TEXT_GROUP_492"/>
+          <p:cNvPr id="10" name="PDF_TEXT_GROUP_487"/>
           <p:cNvSpPr txBox="1"/>
           <p:nvPr/>
         </p:nvSpPr>
@@ -28766,7 +28517,7 @@
       </p:sp>
       <p:sp>
         <p:nvSpPr>
-          <p:cNvPr id="11" name="PDF_TEXT_GROUP_493"/>
+          <p:cNvPr id="11" name="PDF_TEXT_GROUP_488"/>
           <p:cNvSpPr txBox="1"/>
           <p:nvPr/>
         </p:nvSpPr>
@@ -28814,7 +28565,7 @@
       </p:sp>
       <p:sp>
         <p:nvSpPr>
-          <p:cNvPr id="12" name="PDF_TEXT_GROUP_494"/>
+          <p:cNvPr id="12" name="PDF_TEXT_GROUP_489"/>
           <p:cNvSpPr txBox="1"/>
           <p:nvPr/>
         </p:nvSpPr>
@@ -28871,7 +28622,7 @@
       </p:sp>
       <p:sp>
         <p:nvSpPr>
-          <p:cNvPr id="13" name="PDF_TEXT_GROUP_495"/>
+          <p:cNvPr id="13" name="PDF_TEXT_GROUP_490"/>
           <p:cNvSpPr txBox="1"/>
           <p:nvPr/>
         </p:nvSpPr>
@@ -28919,7 +28670,7 @@
       </p:sp>
       <p:sp>
         <p:nvSpPr>
-          <p:cNvPr id="14" name="PDF_TEXT_GROUP_496"/>
+          <p:cNvPr id="14" name="PDF_TEXT_GROUP_491"/>
           <p:cNvSpPr txBox="1"/>
           <p:nvPr/>
         </p:nvSpPr>
@@ -29021,7 +28772,7 @@
       </p:sp>
       <p:sp>
         <p:nvSpPr>
-          <p:cNvPr id="15" name="PDF_TEXT_GROUP_497"/>
+          <p:cNvPr id="15" name="PDF_TEXT_GROUP_492"/>
           <p:cNvSpPr txBox="1"/>
           <p:nvPr/>
         </p:nvSpPr>
@@ -29069,7 +28820,7 @@
       </p:sp>
       <p:sp>
         <p:nvSpPr>
-          <p:cNvPr id="16" name="PDF_TEXT_GROUP_498"/>
+          <p:cNvPr id="16" name="PDF_TEXT_GROUP_493"/>
           <p:cNvSpPr txBox="1"/>
           <p:nvPr/>
         </p:nvSpPr>
@@ -29117,7 +28868,7 @@
       </p:sp>
       <p:sp>
         <p:nvSpPr>
-          <p:cNvPr id="17" name="PDF_TEXT_GROUP_499"/>
+          <p:cNvPr id="17" name="PDF_TEXT_GROUP_494"/>
           <p:cNvSpPr txBox="1"/>
           <p:nvPr/>
         </p:nvSpPr>
@@ -29165,7 +28916,7 @@
       </p:sp>
       <p:sp>
         <p:nvSpPr>
-          <p:cNvPr id="18" name="PDF_TEXT_GROUP_500"/>
+          <p:cNvPr id="18" name="PDF_TEXT_GROUP_495"/>
           <p:cNvSpPr txBox="1"/>
           <p:nvPr/>
         </p:nvSpPr>
@@ -29213,7 +28964,7 @@
       </p:sp>
       <p:sp>
         <p:nvSpPr>
-          <p:cNvPr id="19" name="PDF_TEXT_GROUP_501"/>
+          <p:cNvPr id="19" name="PDF_TEXT_GROUP_496"/>
           <p:cNvSpPr txBox="1"/>
           <p:nvPr/>
         </p:nvSpPr>
@@ -29261,7 +29012,7 @@
       </p:sp>
       <p:sp>
         <p:nvSpPr>
-          <p:cNvPr id="20" name="PDF_TEXT_GROUP_502"/>
+          <p:cNvPr id="20" name="PDF_TEXT_GROUP_497"/>
           <p:cNvSpPr txBox="1"/>
           <p:nvPr/>
         </p:nvSpPr>
@@ -29351,7 +29102,7 @@
       </p:pic>
       <p:sp>
         <p:nvSpPr>
-          <p:cNvPr id="3" name="PDF_TEXT_GROUP_503"/>
+          <p:cNvPr id="3" name="PDF_TEXT_GROUP_498"/>
           <p:cNvSpPr txBox="1"/>
           <p:nvPr/>
         </p:nvSpPr>
@@ -29399,7 +29150,7 @@
       </p:sp>
       <p:sp>
         <p:nvSpPr>
-          <p:cNvPr id="4" name="PDF_TEXT_GROUP_504"/>
+          <p:cNvPr id="4" name="PDF_TEXT_GROUP_499"/>
           <p:cNvSpPr txBox="1"/>
           <p:nvPr/>
         </p:nvSpPr>
@@ -29456,7 +29207,7 @@
       </p:sp>
       <p:sp>
         <p:nvSpPr>
-          <p:cNvPr id="5" name="PDF_TEXT_GROUP_505"/>
+          <p:cNvPr id="5" name="PDF_TEXT_GROUP_500"/>
           <p:cNvSpPr txBox="1"/>
           <p:nvPr/>
         </p:nvSpPr>
@@ -29513,7 +29264,7 @@
       </p:sp>
       <p:sp>
         <p:nvSpPr>
-          <p:cNvPr id="6" name="PDF_TEXT_GROUP_506"/>
+          <p:cNvPr id="6" name="PDF_TEXT_GROUP_501"/>
           <p:cNvSpPr txBox="1"/>
           <p:nvPr/>
         </p:nvSpPr>
@@ -29570,7 +29321,7 @@
       </p:sp>
       <p:sp>
         <p:nvSpPr>
-          <p:cNvPr id="7" name="PDF_TEXT_GROUP_507"/>
+          <p:cNvPr id="7" name="PDF_TEXT_GROUP_502"/>
           <p:cNvSpPr txBox="1"/>
           <p:nvPr/>
         </p:nvSpPr>
@@ -29627,7 +29378,7 @@
       </p:sp>
       <p:sp>
         <p:nvSpPr>
-          <p:cNvPr id="8" name="PDF_TEXT_GROUP_508"/>
+          <p:cNvPr id="8" name="PDF_TEXT_GROUP_503"/>
           <p:cNvSpPr txBox="1"/>
           <p:nvPr/>
         </p:nvSpPr>
@@ -29684,7 +29435,7 @@
       </p:sp>
       <p:sp>
         <p:nvSpPr>
-          <p:cNvPr id="9" name="PDF_TEXT_GROUP_509"/>
+          <p:cNvPr id="9" name="PDF_TEXT_GROUP_504"/>
           <p:cNvSpPr txBox="1"/>
           <p:nvPr/>
         </p:nvSpPr>
@@ -29732,7 +29483,7 @@
       </p:sp>
       <p:sp>
         <p:nvSpPr>
-          <p:cNvPr id="10" name="PDF_TEXT_GROUP_510"/>
+          <p:cNvPr id="10" name="PDF_TEXT_GROUP_505"/>
           <p:cNvSpPr txBox="1"/>
           <p:nvPr/>
         </p:nvSpPr>
@@ -29789,7 +29540,7 @@
       </p:sp>
       <p:sp>
         <p:nvSpPr>
-          <p:cNvPr id="11" name="PDF_TEXT_GROUP_511"/>
+          <p:cNvPr id="11" name="PDF_TEXT_GROUP_506"/>
           <p:cNvSpPr txBox="1"/>
           <p:nvPr/>
         </p:nvSpPr>
@@ -29846,7 +29597,7 @@
       </p:sp>
       <p:sp>
         <p:nvSpPr>
-          <p:cNvPr id="12" name="PDF_TEXT_GROUP_512"/>
+          <p:cNvPr id="12" name="PDF_TEXT_GROUP_507"/>
           <p:cNvSpPr txBox="1"/>
           <p:nvPr/>
         </p:nvSpPr>
@@ -29894,7 +29645,7 @@
       </p:sp>
       <p:sp>
         <p:nvSpPr>
-          <p:cNvPr id="13" name="PDF_TEXT_GROUP_513"/>
+          <p:cNvPr id="13" name="PDF_TEXT_GROUP_508"/>
           <p:cNvSpPr txBox="1"/>
           <p:nvPr/>
         </p:nvSpPr>
@@ -29951,7 +29702,7 @@
       </p:sp>
       <p:sp>
         <p:nvSpPr>
-          <p:cNvPr id="14" name="PDF_TEXT_GROUP_514"/>
+          <p:cNvPr id="14" name="PDF_TEXT_GROUP_509"/>
           <p:cNvSpPr txBox="1"/>
           <p:nvPr/>
         </p:nvSpPr>
@@ -29999,7 +29750,7 @@
       </p:sp>
       <p:sp>
         <p:nvSpPr>
-          <p:cNvPr id="15" name="PDF_TEXT_GROUP_515"/>
+          <p:cNvPr id="15" name="PDF_TEXT_GROUP_510"/>
           <p:cNvSpPr txBox="1"/>
           <p:nvPr/>
         </p:nvSpPr>
@@ -30047,7 +29798,7 @@
       </p:sp>
       <p:sp>
         <p:nvSpPr>
-          <p:cNvPr id="16" name="PDF_TEXT_GROUP_516"/>
+          <p:cNvPr id="16" name="PDF_TEXT_GROUP_511"/>
           <p:cNvSpPr txBox="1"/>
           <p:nvPr/>
         </p:nvSpPr>
@@ -30095,7 +29846,7 @@
       </p:sp>
       <p:sp>
         <p:nvSpPr>
-          <p:cNvPr id="17" name="PDF_TEXT_GROUP_517"/>
+          <p:cNvPr id="17" name="PDF_TEXT_GROUP_512"/>
           <p:cNvSpPr txBox="1"/>
           <p:nvPr/>
         </p:nvSpPr>
@@ -30143,7 +29894,7 @@
       </p:sp>
       <p:sp>
         <p:nvSpPr>
-          <p:cNvPr id="18" name="PDF_TEXT_GROUP_518"/>
+          <p:cNvPr id="18" name="PDF_TEXT_GROUP_513"/>
           <p:cNvSpPr txBox="1"/>
           <p:nvPr/>
         </p:nvSpPr>
@@ -30191,7 +29942,7 @@
       </p:sp>
       <p:sp>
         <p:nvSpPr>
-          <p:cNvPr id="19" name="PDF_TEXT_GROUP_519"/>
+          <p:cNvPr id="19" name="PDF_TEXT_GROUP_514"/>
           <p:cNvSpPr txBox="1"/>
           <p:nvPr/>
         </p:nvSpPr>
@@ -30281,7 +30032,7 @@
       </p:pic>
       <p:sp>
         <p:nvSpPr>
-          <p:cNvPr id="3" name="PDF_TEXT_GROUP_520"/>
+          <p:cNvPr id="3" name="PDF_TEXT_GROUP_515"/>
           <p:cNvSpPr txBox="1"/>
           <p:nvPr/>
         </p:nvSpPr>
@@ -30329,7 +30080,7 @@
       </p:sp>
       <p:sp>
         <p:nvSpPr>
-          <p:cNvPr id="4" name="PDF_TEXT_GROUP_521"/>
+          <p:cNvPr id="4" name="PDF_TEXT_GROUP_516"/>
           <p:cNvSpPr txBox="1"/>
           <p:nvPr/>
         </p:nvSpPr>
@@ -30386,7 +30137,7 @@
       </p:sp>
       <p:sp>
         <p:nvSpPr>
-          <p:cNvPr id="5" name="PDF_TEXT_GROUP_522"/>
+          <p:cNvPr id="5" name="PDF_TEXT_GROUP_517"/>
           <p:cNvSpPr txBox="1"/>
           <p:nvPr/>
         </p:nvSpPr>
@@ -30443,7 +30194,7 @@
       </p:sp>
       <p:sp>
         <p:nvSpPr>
-          <p:cNvPr id="6" name="PDF_TEXT_GROUP_523"/>
+          <p:cNvPr id="6" name="PDF_TEXT_GROUP_518"/>
           <p:cNvSpPr txBox="1"/>
           <p:nvPr/>
         </p:nvSpPr>
@@ -30500,7 +30251,7 @@
       </p:sp>
       <p:sp>
         <p:nvSpPr>
-          <p:cNvPr id="7" name="PDF_TEXT_GROUP_524"/>
+          <p:cNvPr id="7" name="PDF_TEXT_GROUP_519"/>
           <p:cNvSpPr txBox="1"/>
           <p:nvPr/>
         </p:nvSpPr>
@@ -30557,7 +30308,7 @@
       </p:sp>
       <p:sp>
         <p:nvSpPr>
-          <p:cNvPr id="8" name="PDF_TEXT_GROUP_525"/>
+          <p:cNvPr id="8" name="PDF_TEXT_GROUP_520"/>
           <p:cNvSpPr txBox="1"/>
           <p:nvPr/>
         </p:nvSpPr>
@@ -30605,7 +30356,7 @@
       </p:sp>
       <p:sp>
         <p:nvSpPr>
-          <p:cNvPr id="9" name="PDF_TEXT_GROUP_526"/>
+          <p:cNvPr id="9" name="PDF_TEXT_GROUP_521"/>
           <p:cNvSpPr txBox="1"/>
           <p:nvPr/>
         </p:nvSpPr>
@@ -30662,7 +30413,7 @@
       </p:sp>
       <p:sp>
         <p:nvSpPr>
-          <p:cNvPr id="10" name="PDF_TEXT_GROUP_527"/>
+          <p:cNvPr id="10" name="PDF_TEXT_GROUP_522"/>
           <p:cNvSpPr txBox="1"/>
           <p:nvPr/>
         </p:nvSpPr>
@@ -30710,7 +30461,7 @@
       </p:sp>
       <p:sp>
         <p:nvSpPr>
-          <p:cNvPr id="11" name="PDF_TEXT_GROUP_528"/>
+          <p:cNvPr id="11" name="PDF_TEXT_GROUP_523"/>
           <p:cNvSpPr txBox="1"/>
           <p:nvPr/>
         </p:nvSpPr>
@@ -30767,7 +30518,7 @@
       </p:sp>
       <p:sp>
         <p:nvSpPr>
-          <p:cNvPr id="12" name="PDF_TEXT_GROUP_529"/>
+          <p:cNvPr id="12" name="PDF_TEXT_GROUP_524"/>
           <p:cNvSpPr txBox="1"/>
           <p:nvPr/>
         </p:nvSpPr>
@@ -30824,7 +30575,7 @@
       </p:sp>
       <p:sp>
         <p:nvSpPr>
-          <p:cNvPr id="13" name="PDF_TEXT_GROUP_530"/>
+          <p:cNvPr id="13" name="PDF_TEXT_GROUP_525"/>
           <p:cNvSpPr txBox="1"/>
           <p:nvPr/>
         </p:nvSpPr>
@@ -30872,7 +30623,7 @@
       </p:sp>
       <p:sp>
         <p:nvSpPr>
-          <p:cNvPr id="14" name="PDF_TEXT_GROUP_531"/>
+          <p:cNvPr id="14" name="PDF_TEXT_GROUP_526"/>
           <p:cNvSpPr txBox="1"/>
           <p:nvPr/>
         </p:nvSpPr>
@@ -30920,7 +30671,7 @@
       </p:sp>
       <p:sp>
         <p:nvSpPr>
-          <p:cNvPr id="15" name="PDF_TEXT_GROUP_532"/>
+          <p:cNvPr id="15" name="PDF_TEXT_GROUP_527"/>
           <p:cNvSpPr txBox="1"/>
           <p:nvPr/>
         </p:nvSpPr>
@@ -30968,7 +30719,7 @@
       </p:sp>
       <p:sp>
         <p:nvSpPr>
-          <p:cNvPr id="16" name="PDF_TEXT_GROUP_533"/>
+          <p:cNvPr id="16" name="PDF_TEXT_GROUP_528"/>
           <p:cNvSpPr txBox="1"/>
           <p:nvPr/>
         </p:nvSpPr>
@@ -31016,7 +30767,7 @@
       </p:sp>
       <p:sp>
         <p:nvSpPr>
-          <p:cNvPr id="17" name="PDF_TEXT_GROUP_534"/>
+          <p:cNvPr id="17" name="PDF_TEXT_GROUP_529"/>
           <p:cNvSpPr txBox="1"/>
           <p:nvPr/>
         </p:nvSpPr>
@@ -31064,7 +30815,7 @@
       </p:sp>
       <p:sp>
         <p:nvSpPr>
-          <p:cNvPr id="18" name="PDF_TEXT_GROUP_535"/>
+          <p:cNvPr id="18" name="PDF_TEXT_GROUP_530"/>
           <p:cNvSpPr txBox="1"/>
           <p:nvPr/>
         </p:nvSpPr>
@@ -31154,7 +30905,7 @@
       </p:pic>
       <p:sp>
         <p:nvSpPr>
-          <p:cNvPr id="3" name="PDF_TEXT_GROUP_536"/>
+          <p:cNvPr id="3" name="PDF_TEXT_GROUP_531"/>
           <p:cNvSpPr txBox="1"/>
           <p:nvPr/>
         </p:nvSpPr>
@@ -31202,7 +30953,7 @@
       </p:sp>
       <p:sp>
         <p:nvSpPr>
-          <p:cNvPr id="4" name="PDF_TEXT_GROUP_537"/>
+          <p:cNvPr id="4" name="PDF_TEXT_GROUP_532"/>
           <p:cNvSpPr txBox="1"/>
           <p:nvPr/>
         </p:nvSpPr>
@@ -31259,7 +31010,7 @@
       </p:sp>
       <p:sp>
         <p:nvSpPr>
-          <p:cNvPr id="5" name="PDF_TEXT_GROUP_538"/>
+          <p:cNvPr id="5" name="PDF_TEXT_GROUP_533"/>
           <p:cNvSpPr txBox="1"/>
           <p:nvPr/>
         </p:nvSpPr>
@@ -31316,7 +31067,7 @@
       </p:sp>
       <p:sp>
         <p:nvSpPr>
-          <p:cNvPr id="6" name="PDF_TEXT_GROUP_539"/>
+          <p:cNvPr id="6" name="PDF_TEXT_GROUP_534"/>
           <p:cNvSpPr txBox="1"/>
           <p:nvPr/>
         </p:nvSpPr>
@@ -31373,7 +31124,7 @@
       </p:sp>
       <p:sp>
         <p:nvSpPr>
-          <p:cNvPr id="7" name="PDF_TEXT_GROUP_540"/>
+          <p:cNvPr id="7" name="PDF_TEXT_GROUP_535"/>
           <p:cNvSpPr txBox="1"/>
           <p:nvPr/>
         </p:nvSpPr>
@@ -31430,7 +31181,7 @@
       </p:sp>
       <p:sp>
         <p:nvSpPr>
-          <p:cNvPr id="8" name="PDF_TEXT_GROUP_541"/>
+          <p:cNvPr id="8" name="PDF_TEXT_GROUP_536"/>
           <p:cNvSpPr txBox="1"/>
           <p:nvPr/>
         </p:nvSpPr>
@@ -31487,7 +31238,7 @@
       </p:sp>
       <p:sp>
         <p:nvSpPr>
-          <p:cNvPr id="9" name="PDF_TEXT_GROUP_542"/>
+          <p:cNvPr id="9" name="PDF_TEXT_GROUP_537"/>
           <p:cNvSpPr txBox="1"/>
           <p:nvPr/>
         </p:nvSpPr>
@@ -31535,7 +31286,7 @@
       </p:sp>
       <p:sp>
         <p:nvSpPr>
-          <p:cNvPr id="10" name="PDF_TEXT_GROUP_543"/>
+          <p:cNvPr id="10" name="PDF_TEXT_GROUP_538"/>
           <p:cNvSpPr txBox="1"/>
           <p:nvPr/>
         </p:nvSpPr>
@@ -31592,7 +31343,7 @@
       </p:sp>
       <p:sp>
         <p:nvSpPr>
-          <p:cNvPr id="11" name="PDF_TEXT_GROUP_544"/>
+          <p:cNvPr id="11" name="PDF_TEXT_GROUP_539"/>
           <p:cNvSpPr txBox="1"/>
           <p:nvPr/>
         </p:nvSpPr>
@@ -31640,7 +31391,7 @@
       </p:sp>
       <p:sp>
         <p:nvSpPr>
-          <p:cNvPr id="12" name="PDF_TEXT_GROUP_545"/>
+          <p:cNvPr id="12" name="PDF_TEXT_GROUP_540"/>
           <p:cNvSpPr txBox="1"/>
           <p:nvPr/>
         </p:nvSpPr>
@@ -31697,7 +31448,7 @@
       </p:sp>
       <p:sp>
         <p:nvSpPr>
-          <p:cNvPr id="13" name="PDF_TEXT_GROUP_546"/>
+          <p:cNvPr id="13" name="PDF_TEXT_GROUP_541"/>
           <p:cNvSpPr txBox="1"/>
           <p:nvPr/>
         </p:nvSpPr>
@@ -31745,7 +31496,7 @@
       </p:sp>
       <p:sp>
         <p:nvSpPr>
-          <p:cNvPr id="14" name="PDF_TEXT_GROUP_547"/>
+          <p:cNvPr id="14" name="PDF_TEXT_GROUP_542"/>
           <p:cNvSpPr txBox="1"/>
           <p:nvPr/>
         </p:nvSpPr>
@@ -31793,7 +31544,7 @@
       </p:sp>
       <p:sp>
         <p:nvSpPr>
-          <p:cNvPr id="15" name="PDF_TEXT_GROUP_548"/>
+          <p:cNvPr id="15" name="PDF_TEXT_GROUP_543"/>
           <p:cNvSpPr txBox="1"/>
           <p:nvPr/>
         </p:nvSpPr>
@@ -31841,7 +31592,7 @@
       </p:sp>
       <p:sp>
         <p:nvSpPr>
-          <p:cNvPr id="16" name="PDF_TEXT_GROUP_549"/>
+          <p:cNvPr id="16" name="PDF_TEXT_GROUP_544"/>
           <p:cNvSpPr txBox="1"/>
           <p:nvPr/>
         </p:nvSpPr>
@@ -31889,7 +31640,7 @@
       </p:sp>
       <p:sp>
         <p:nvSpPr>
-          <p:cNvPr id="17" name="PDF_TEXT_GROUP_550"/>
+          <p:cNvPr id="17" name="PDF_TEXT_GROUP_545"/>
           <p:cNvSpPr txBox="1"/>
           <p:nvPr/>
         </p:nvSpPr>
@@ -31937,7 +31688,7 @@
       </p:sp>
       <p:sp>
         <p:nvSpPr>
-          <p:cNvPr id="18" name="PDF_TEXT_GROUP_551"/>
+          <p:cNvPr id="18" name="PDF_TEXT_GROUP_546"/>
           <p:cNvSpPr txBox="1"/>
           <p:nvPr/>
         </p:nvSpPr>

--- a/docs/PAPER/proposal-defense/slides/NDNSF_proposal_hybrid_editable.pptx
+++ b/docs/PAPER/proposal-defense/slides/NDNSF_proposal_hybrid_editable.pptx
@@ -393,7 +393,7 @@
           <a:p>
             <a:r>
               <a:rPr lang="en-US" sz="1200"/>
-              <a:t>Nodes may retrieve the same Request ciphertext; only holders of matching decryption keys can read its descriptor. The User encrypts by service attributes, without listing Provider identities. The Controller still authorizes entities and issues keys. [19] Different entities retain overlapping service permissions in individual policy keys, independently of identity-signing credentials. Dissemination and read access are separate. Combining permissions in one key does not require encrypting all services’ content under one shared condition.</a:t>
+              <a:t>KP-ABE encodes an access policy in each entity’s decryption key. [19] NDNSF combines service entitlements in that policy while retaining identity-signing credentials. [28] Challenge checks reuse these permissions for invocation; User permission keys and challenge processing still add cost. This avoids a separate role-based invocation policy in NDNSF. It does not eliminate key updates or prove lower total cost; role-based designs can also reuse credentials.</a:t>
             </a:r>
             <a:endParaRPr lang="en-US" sz="1200"/>
           </a:p>
@@ -449,7 +449,7 @@
           <a:p>
             <a:r>
               <a:rPr lang="en-US" sz="1200"/>
-              <a:t>1. The User places a Requester Challenge in ABE-protected Request content. 2. The Provider returns it in ACK Data; the User checks the value against the active request. 3. The Provider encrypts its challenge in ACK content. The User answers in Selection; the Provider checks that response before execution. Both sides also validate signatures under trust rules and check service permissions and request state. Challenge responses show access to protected values; they do not grant permissions or prevent deliberate sharing.</a:t>
+              <a:t>1. The User places a Requester Challenge in ABE-protected Request content. 2. The Provider returns it in ACK Data; the User checks the value against the active request. 3. The Provider encrypts its challenge in ACK content. The User returns the value in Selection; the Provider checks it before execution. Both sides also validate signatures under trust rules and check service permissions and request state. Challenge responses show access to protected values; they do not grant permissions or prevent deliberate sharing.</a:t>
             </a:r>
             <a:endParaRPr lang="en-US" sz="1200"/>
           </a:p>
@@ -673,7 +673,7 @@
           <a:p>
             <a:r>
               <a:rPr lang="en-US" sz="1200"/>
-              <a:t>The Controller publishes signed permission updates; participants apply them only after retrieval and validation. Request-scoped keys protect input/results. Selection delivers keys to selected Providers; the requesting User retains access. Status checks reject withdrawn permissions; key rotation restricts future encrypted exchanges. Current ABE rotation is Controller-wide. [28] Lifecycle requirement, not a third advantage: measure policy/key size, challenge cost, propagation and rekeying. No immediate disconnected revocation or recall of old plaintext/keys.</a:t>
+              <a:t>The Controller publishes signed permission updates; participants apply them only after retrieval and validation. Request-scoped keys protect input/results. Selection delivers keys to selected Providers; the requesting User retains access. Status checks reject withdrawn permissions; key rotation restricts future encrypted exchanges. Current ABE rotation is Controller-wide. [28] Revocation has costs: measure update propagation, rejection delay and rekey traffic. Disconnected nodes cannot learn updates immediately; previously disclosed keys and plaintext cannot be recalled.</a:t>
             </a:r>
             <a:endParaRPr lang="en-US" sz="1200"/>
           </a:p>
@@ -785,7 +785,7 @@
           <a:p>
             <a:r>
               <a:rPr lang="en-US" sz="1200"/>
-              <a:t>1. Application supplies roles, dependency template, constraints and deadline; the template may be handwritten. 2. Close the ACK collection window and validate eligible positive ACKs. 3. The User applies a replaceable planning policy and signs the resulting role assignments and dependencies. 4. Each Provider validates the plan, derives permitted inputs and rechecks its resources before starting. The snapshot freezes observed candidates for this decision, not every Provider in the network or their future availability.</a:t>
+              <a:t>1. Application supplies roles, dependency template, constraints and deadline; the template may be handwritten. 2. The User closes the ACK window and freezes the eligible, validated positive ACKs. 3. The User applies a replaceable planning policy and signs the resulting role assignments and dependencies. 4. Each Provider validates the plan, derives permitted inputs and rechecks its resources before starting. The snapshot freezes observed candidates for this decision, not every Provider in the network or their future availability.</a:t>
             </a:r>
             <a:endParaRPr lang="en-US" sz="1200"/>
           </a:p>
@@ -841,7 +841,7 @@
           <a:p>
             <a:r>
               <a:rPr lang="en-US" sz="1200"/>
-              <a:t>An operator selects a ground area. Nearby UAVs offer suitable views. A compute Provider analyzes the images. The operator receives original images with annotations. UAV A view 1 UAV B view 2 Compute Provider Operator Who can participate now, and which Data may each selected Provider use?</a:t>
+              <a:t>An operator selects a ground area. Nearby unmanned aerial vehicles (UAVs) offer suitable views. A compute Provider analyzes the images. The operator receives original images with annotations. UAV A view 1 UAV B view 2 Compute Provider Operator Who can participate now, and which Data may each selected Provider use?</a:t>
             </a:r>
             <a:endParaRPr lang="en-US" sz="1200"/>
           </a:p>
@@ -953,7 +953,7 @@
           <a:p>
             <a:r>
               <a:rPr lang="en-US" sz="1200"/>
-              <a:t>1. Validate the Data signature using the appropriate trust rules. 2. Match the current request, plan and execution identity. 3. Verify that the signer is the assigned predecessor Provider. 4. Check that the object matches the declared edge, permitted name, data format and key scope. 5. Require complete validated input before the dependent computation starts. Apply the same rules to direct, cached and repository-fetched Data. This is a proposed acceptance contract; full end-to-end qualification remains required.</a:t>
+              <a:t>1. Validate the Data signature using the appropriate trust rules. 2. Check active request, plan, execution identity and deadline. 3. Verify that the signer is the assigned predecessor Provider. 4. Check that the object matches the declared edge, permitted name, data format and key scope. 5. Require complete validated input before the dependent computation starts. Apply the same rules to direct, cached and repository-fetched Data. This is a proposed acceptance contract; full end-to-end qualification remains required.</a:t>
             </a:r>
             <a:endParaRPr lang="en-US" sz="1200"/>
           </a:p>
@@ -1233,7 +1233,7 @@
           <a:p>
             <a:r>
               <a:rPr lang="en-US" sz="1200"/>
-              <a:t>Model weights, reusable artifacts, request activations and KV state have different lifetimes. Autoregressive decoding requires retained K/V and next-step inputs; resident weights do not remove that state dependency. An in-process test does not establish correct execution across processes or devices. Freeze one supported model/partition first; tensor/hybrid and LLM streaming need their own evidence if claimed. Earlier small-model measurements do not qualify all current V3/native features. [28]</a:t>
+              <a:t>Model weights, reusable artifacts, request activations and KV state have different lifetimes. With KV caching, the runtime reuses prior key/value (K/V) tensors and supplies next-step inputs; resident weights do not replace this state. [31] An in-process test does not establish correct execution across processes or devices. Freeze one supported model/partition first; tensor/hybrid and LLM streaming need their own evidence if claimed. Earlier small-model measurements do not validate the newer distributed inference and recovery paths. [28]</a:t>
             </a:r>
             <a:endParaRPr lang="en-US" sz="1200"/>
           </a:p>
@@ -1345,7 +1345,7 @@
           <a:p>
             <a:r>
               <a:rPr lang="en-US" sz="1200"/>
-              <a:t>Ten seeds (62--71), four Providers/system, 2 m/s; mean seed completion rate. [28] AP radius NDNSF gRPC NSC 50 m 54.57% 53.80% 55.47% 100 m 97.97% 97.97% 98.33% 150 m 100.00% 100.00% 100.00% These overall controls do not establish NDNSF superiority. The next slide examines the separately registered switching subset, not all requests.</a:t>
+              <a:t>Ten seeds (62--71), four Providers/system, 2 m/s; mean seed completion rate. [28] AP radius NDNSF gRPC NSC 50 m 54.57% 53.80% 55.47% 100 m 97.97% 97.97% 98.33% 150 m 100.00% 100.00% 100.00% No overall NDNSF advantage is established. The next slide uses a separate holdout campaign (seeds 72--81), not a subset of these runs.</a:t>
             </a:r>
             <a:endParaRPr lang="en-US" sz="1200"/>
           </a:p>
@@ -1401,7 +1401,7 @@
           <a:p>
             <a:r>
               <a:rPr lang="en-US" sz="1200"/>
-              <a:t>Ten seeds; four Providers/system; 100 m, 2 m/s; 1,312 matched requests requiring a Provider switch. [28] Comparison Seed-p95 difference 95% CI NDNSF minus gRPC-SEQ-4 -597 ms [-992, -200] ms NDNSF minus NSC-4 -2618 ms [-2916, -2315] ms This is a conditional latency result, not general completion-rate superiority. Preserve the registered subset definition, overall coverage controls, and failed requests.</a:t>
+              <a:t>Seeds 72--81; four Providers/system; 100 m, 2 m/s; 1,312 aligned switching requests. [28] Comparison Seed-p95 difference 95% CI NDNSF minus gRPC-SEQ-4 -597 ms [-992, -200] ms NDNSF minus NSC-4 -2618 ms [-2916, -2315] ms Completed: NDNSF 1,311; gRPC 1,297; NSC 1,296 (of 1,312 each). Mean paired seed-p95 differences; each p95 uses that system’s successful requests. Different failures limit the comparison; no general advantage is inferred.</a:t>
             </a:r>
             <a:endParaRPr lang="en-US" sz="1200"/>
           </a:p>
@@ -1457,7 +1457,7 @@
           <a:p>
             <a:r>
               <a:rPr lang="en-US" sz="1200"/>
-              <a:t>1. Discover current willingness: reachability, sensors, load, and deadlines affect participation. 2. Authorize before execution: exposing a service does not grant everyone permission to use it. 3. Check task inputs: a valid image signature does not show that its producer was assigned to this task’s dependency. The contribution must explain the mechanism and its cost, not just demonstrate that two UAVs can exchange images.</a:t>
+              <a:t>1. Discover current willingness: reachability, sensors, load, and deadlines affect participation. 2. Authorize before execution: exposing a service does not grant everyone permission to use it. 3. Check task inputs: a valid image signature does not show that its producer was assigned to this task’s dependency. The research connects participation decisions to authorized execution and task-specific input checks, then measures the cost.</a:t>
             </a:r>
             <a:endParaRPr lang="en-US" sz="1200"/>
           </a:p>
@@ -1569,7 +1569,7 @@
           <a:p>
             <a:r>
               <a:rPr lang="en-US" sz="1200"/>
-              <a:t>Earlier small Qwen-style ONNX model; ten successful runs per layout. [28] Layout Mean latency p95 Shared-backbone distributed layout 259.4 ms 283.9 ms Single Provider 186.8 ms 206.3 ms Do not split merely because several Providers exist. Communication/setup overhead is a candidate explanation, not a causal result established by this measurement. This campaign does not validate the newer canonical-layer, tensor/hybrid or multi-accelerator design.</a:t>
+              <a:t>Earlier small Qwen-style ONNX model; ten successful runs per layout. [28] Layout Mean latency p95 Shared-backbone distributed layout 259.4 ms 283.9 ms Single Provider 186.8 ms 206.3 ms Do not split merely because several Providers exist. Communication/setup overhead is a candidate explanation, not a causal result established by this measurement. Retained historical diagnostic; raw-run/model provenance remains to be rechecked. Not evidence for the newer distributed design.</a:t>
             </a:r>
             <a:endParaRPr lang="en-US" sz="1200"/>
           </a:p>
@@ -1681,7 +1681,7 @@
           <a:p>
             <a:r>
               <a:rPr lang="en-US" sz="1200"/>
-              <a:t>Internal target Completion gate September 2026 Agree scope/RQs; freeze one UAV graph and one DI partition; resolve correctness blockers October--November 2026 Complete registered experiments; freeze evidence and write bounded RQ answers December 2026 Complete integrated advisor-review draft January 2027 Committee review and readiness decision; reduce scope or revise timing if core evidence is missing February 2027 Target defense, conditional on evidence and committee approval CS guidance: advisor-approved complete draft to committee two weeks before defense. Spring 2027 final ProQuest deadline: March 26, 2027; recheck before filing. [29,30]</a:t>
+              <a:t>Internal target Required deliverable September 2026 Agree scope/RQs; freeze one UAV graph and one DI partition; resolve correctness blockers October--November 2026 Complete registered experiments; freeze evidence and write bounded RQ answers December 2026 Complete integrated advisor-review draft January 2027 Committee review and readiness decision; reduce scope or revise timing if core evidence is missing February 2027 Target defense, conditional on evidence and committee approval Committee draft: two weeks before defense. Spring 2027 application/candidacy: February 5; final ProQuest: March 26. Recheck before filing. [29,30]</a:t>
             </a:r>
             <a:endParaRPr lang="en-US" sz="1200"/>
           </a:p>
@@ -1737,7 +1737,7 @@
           <a:p>
             <a:r>
               <a:rPr lang="en-US" sz="1200"/>
-              <a:t>RQ1 answer: when ABE-encrypted discovery and ABE-backed service authorization justify their management and revocation costs. RQ2 answer: exactly which task-assignment mistakes are rejected and which recovery behavior is supported. RQ3 answer: measured benefits, negative results and deployment limits. Distinguish the candidate’s research from shared implementations and reused NDN/AI libraries. This proposal defines those obligations. It does not label the remaining collaboration evidence as finished.</a:t>
+              <a:t>RQ1 answer: when ABE-encrypted discovery and ABE-backed service authorization justify their management and revocation costs. RQ2 answer: exactly which task-assignment mistakes are rejected and which recovery behavior is supported. RQ3 answer: measured benefits, negative results and deployment limits. Reproducible configurations and evidence linking each conclusion to its tested scope. The outcome is a tested service protocol and an evidence-backed account of when its mechanisms are worth their cost.</a:t>
             </a:r>
             <a:endParaRPr lang="en-US" sz="1200"/>
           </a:p>
@@ -1905,7 +1905,7 @@
           <a:p>
             <a:r>
               <a:rPr lang="en-US" sz="1200"/>
-              <a:t>Historical per-link loss NDNSF completed requests 1% 599 / 600 3% 598 / 600 10% (best recorded run) 539 / 600 A selected run is not an aggregate estimate. Do not combine these numbers with another batch and label the result “matched.” [28] 1 -(1 -ell)4 assumes four independent equal-loss packet traversals; it is not service failure probability after retries.</a:t>
+              <a:t>Historical per-link loss NDNSF completed requests 1% 599 / 600 3% 598 / 600 10% (best recorded run) 539 / 600 A selected run is not an aggregate estimate. Do not combine these numbers with another batch and label the result “matched.” [28] Per-link packet loss is not the probability of service failure: retrieval retries and the request deadline also affect completion.</a:t>
             </a:r>
             <a:endParaRPr lang="en-US" sz="1200"/>
           </a:p>
@@ -2129,7 +2129,7 @@
           <a:p>
             <a:r>
               <a:rPr lang="en-US" sz="1200"/>
-              <a:t>[22] Mini-NDN, project documentation: minindn.ndn.today. [23] PX4, “Software-in-the-Loop Simulation,” PX4 User Guide. [24] NDN Project, “Repo Protocol Specification,” repo-ng documentation. [25] ONNX, “Open Neural Network Exchange Intermediate Representation Specification.” [28] NDNSF, research-revision-audit.md, companion claim/evidence ledger, September 9, 2026. Contains campaign paths and unresolved acceptance gates. [29] University of Memphis CS, “Information for Computer Science Ph.D. Students,” forms_grad_phd_programinfo.pdf (accessed September 9, 2026). [30] University of Memphis Graduate School, “Graduation Information,” Spring 2027 calendar (accessed September 9, 2026).</a:t>
+              <a:t>[22] Mini-NDN, project documentation: minindn.ndn.today. [23] PX4, “Software-in-the-Loop Simulation,” PX4 User Guide. [24] NDN Project, “Repo Protocol Specification,” repo-ng documentation. [25] ONNX, “Open Neural Network Exchange Intermediate Representation Specification.” [28] NDNSF, research-revision-audit.md, companion claim/evidence ledger, September 9, 2026. Contains campaign paths and unresolved acceptance gates. [29] University of Memphis CS, “Information for Computer Science Ph.D. Students,” forms_grad_phd_programinfo.pdf (accessed September 9, 2026). [30] University of Memphis Graduate School, “Graduation Information,” Spring 2027 calendar (accessed September 9, 2026). [31] ONNX Runtime, “How to configure the past present share buffer,” GenAI documentation (accessed September 11, 2026).</a:t>
             </a:r>
             <a:endParaRPr lang="en-US" sz="1200"/>
           </a:p>
@@ -2185,7 +2185,7 @@
           <a:p>
             <a:r>
               <a:rPr lang="en-US" sz="1200"/>
-              <a:t>RQ1: How can NDNSF discover willing Providers, keep descriptors confidential from unauthorized readers, and check service permissions before execution, and at what cost? RQ2: How can Providers selected at runtime follow task roles and named dependencies, whether Data comes from producers or caches? RQ3: When do these mechanisms improve completion, latency, or execution efficiency, and when do their costs outweigh the benefits? UAV and distributed inference are validation workloads for the same questions; implementing two applications alone does not establish two research contributions.</a:t>
+              <a:t>RQ1: How can NDNSF discover willing Providers, keep descriptors confidential from unauthorized readers, and check service permissions before execution, and at what cost? RQ2: How can Providers selected at runtime follow task roles and named dependencies, whether Data comes from producers or caches? RQ3: When do these mechanisms improve completion, latency, or execution efficiency, and when do their costs outweigh the benefits? UAV sensing tests dependencies between observations; distributed inference tests ordered computation and state. Both evaluate the same framework.</a:t>
             </a:r>
             <a:endParaRPr lang="en-US" sz="1200"/>
           </a:p>
@@ -2241,7 +2241,7 @@
           <a:p>
             <a:r>
               <a:rPr lang="en-US" sz="1200"/>
-              <a:t>Prior work What the comparison must acknowledge NFN [6], NFaaS [7] Named computation and function execution/placement RICE [9], NSC [10] Invocation and security mechanisms; NSC validates signed calls using application trust rules DNMP [12] Role- and command-constrained signing and verification CaSCON [15] Service-composition research; requires a feature-level comparison before claiming a new composition mechanism gRPC [17,27] Complete configurations can include discovery/resolver integration, not only fixed addresses Candidate increment: connect runtime assignment to enforceable object-admission rules. This is not a claim to be the first NDN service framework.</a:t>
+              <a:t>Prior work What the comparison must acknowledge NFN [6], NFaaS [7] Named computation and function execution/placement RICE [9], NSC [10] Invocation and security mechanisms; NSC validates signed calls using application trust rules DNMP [12] Role- and command-constrained signing and verification CaSCON [15] Service-composition research; requires a feature-level comparison before claiming a new composition mechanism gRPC [17,27] Complete configurations can include discovery/resolver integration, not only fixed addresses Proposed contribution: each selected Provider checks whether input Data matches the task’s runtime role assignments and declared dependencies.</a:t>
             </a:r>
             <a:endParaRPr lang="en-US" sz="1200"/>
           </a:p>
@@ -2297,7 +2297,7 @@
           <a:p>
             <a:r>
               <a:rPr lang="en-US" sz="1200"/>
-              <a:t>Intended contribution Current evidence boundary Discovery / authorization design and tradeoffs Invocation implementation and bounded experiments exist; full alternative lifecycle-cost comparison remains open ACK-derived plan and local depen- dency admission Design and implementation work; complete direct/cache and failure acceptance gates remain open Cross-case empirical findings Existing mobility/work-efficiency and small-model results support limited configurations, not all new collaboration claims Proposal status, September 2026: implemented, locally tested, measured, and fully qualified are not interchangeable. [28]</a:t>
+              <a:t>Intended contribution Current evidence boundary Discovery / authorization design and tradeoffs Invocation implementation and bounded experiments exist; full alternative lifecycle-cost comparison remains open ACK-derived plan and local depen- dency checks Design and implementation work; direct/cache and failure validation remains incomplete Cross-case empirical findings Existing mobility/work-efficiency and small-model results support limited configurations, not all new collaboration claims Proposal status, September 2026: implemented, locally tested, measured, and fully qualified are not interchangeable. [28]</a:t>
             </a:r>
             <a:endParaRPr lang="en-US" sz="1200"/>
           </a:p>
@@ -5752,7 +5752,7 @@
       </p:pic>
       <p:sp>
         <p:nvSpPr>
-          <p:cNvPr id="3" name="PDF_TEXT_GROUP_122"/>
+          <p:cNvPr id="3" name="PDF_TEXT_GROUP_121"/>
           <p:cNvSpPr txBox="1"/>
           <p:nvPr/>
         </p:nvSpPr>
@@ -5793,14 +5793,14 @@
                 </a:solidFill>
                 <a:latin typeface="Latin Modern Sans"/>
               </a:rPr>
-              <a:t>Descriptor Before Selection; Input After Selection</a:t>
-            </a:r>
-          </a:p>
-        </p:txBody>
-      </p:sp>
-      <p:sp>
-        <p:nvSpPr>
-          <p:cNvPr id="4" name="PDF_TEXT_GROUP_123"/>
+              <a:t>Request: Discovery Descriptor; Selection: Task Input</a:t>
+            </a:r>
+          </a:p>
+        </p:txBody>
+      </p:sp>
+      <p:sp>
+        <p:nvSpPr>
+          <p:cNvPr id="4" name="PDF_TEXT_GROUP_122"/>
           <p:cNvSpPr txBox="1"/>
           <p:nvPr/>
         </p:nvSpPr>
@@ -5848,7 +5848,7 @@
       </p:sp>
       <p:sp>
         <p:nvSpPr>
-          <p:cNvPr id="5" name="PDF_TEXT_GROUP_124"/>
+          <p:cNvPr id="5" name="PDF_TEXT_GROUP_123"/>
           <p:cNvSpPr txBox="1"/>
           <p:nvPr/>
         </p:nvSpPr>
@@ -5896,7 +5896,7 @@
       </p:sp>
       <p:sp>
         <p:nvSpPr>
-          <p:cNvPr id="6" name="PDF_TEXT_GROUP_125"/>
+          <p:cNvPr id="6" name="PDF_TEXT_GROUP_124"/>
           <p:cNvSpPr txBox="1"/>
           <p:nvPr/>
         </p:nvSpPr>
@@ -5944,7 +5944,7 @@
       </p:sp>
       <p:sp>
         <p:nvSpPr>
-          <p:cNvPr id="7" name="PDF_TEXT_GROUP_126"/>
+          <p:cNvPr id="7" name="PDF_TEXT_GROUP_125"/>
           <p:cNvSpPr txBox="1"/>
           <p:nvPr/>
         </p:nvSpPr>
@@ -5992,7 +5992,7 @@
       </p:sp>
       <p:sp>
         <p:nvSpPr>
-          <p:cNvPr id="8" name="PDF_TEXT_GROUP_127"/>
+          <p:cNvPr id="8" name="PDF_TEXT_GROUP_126"/>
           <p:cNvSpPr txBox="1"/>
           <p:nvPr/>
         </p:nvSpPr>
@@ -6049,7 +6049,7 @@
       </p:sp>
       <p:sp>
         <p:nvSpPr>
-          <p:cNvPr id="9" name="PDF_TEXT_GROUP_128"/>
+          <p:cNvPr id="9" name="PDF_TEXT_GROUP_127"/>
           <p:cNvSpPr txBox="1"/>
           <p:nvPr/>
         </p:nvSpPr>
@@ -6106,7 +6106,7 @@
       </p:sp>
       <p:sp>
         <p:nvSpPr>
-          <p:cNvPr id="10" name="PDF_TEXT_GROUP_129"/>
+          <p:cNvPr id="10" name="PDF_TEXT_GROUP_128"/>
           <p:cNvSpPr txBox="1"/>
           <p:nvPr/>
         </p:nvSpPr>
@@ -6163,7 +6163,7 @@
       </p:sp>
       <p:sp>
         <p:nvSpPr>
-          <p:cNvPr id="11" name="PDF_TEXT_GROUP_130"/>
+          <p:cNvPr id="11" name="PDF_TEXT_GROUP_129"/>
           <p:cNvSpPr txBox="1"/>
           <p:nvPr/>
         </p:nvSpPr>
@@ -6211,7 +6211,7 @@
       </p:sp>
       <p:sp>
         <p:nvSpPr>
-          <p:cNvPr id="12" name="PDF_TEXT_GROUP_131"/>
+          <p:cNvPr id="12" name="PDF_TEXT_GROUP_130"/>
           <p:cNvSpPr txBox="1"/>
           <p:nvPr/>
         </p:nvSpPr>
@@ -6259,7 +6259,7 @@
       </p:sp>
       <p:sp>
         <p:nvSpPr>
-          <p:cNvPr id="13" name="PDF_TEXT_GROUP_132"/>
+          <p:cNvPr id="13" name="PDF_TEXT_GROUP_131"/>
           <p:cNvSpPr txBox="1"/>
           <p:nvPr/>
         </p:nvSpPr>
@@ -6307,7 +6307,7 @@
       </p:sp>
       <p:sp>
         <p:nvSpPr>
-          <p:cNvPr id="14" name="PDF_TEXT_GROUP_133"/>
+          <p:cNvPr id="14" name="PDF_TEXT_GROUP_132"/>
           <p:cNvSpPr txBox="1"/>
           <p:nvPr/>
         </p:nvSpPr>
@@ -6355,7 +6355,7 @@
       </p:sp>
       <p:sp>
         <p:nvSpPr>
-          <p:cNvPr id="15" name="PDF_TEXT_GROUP_134"/>
+          <p:cNvPr id="15" name="PDF_TEXT_GROUP_133"/>
           <p:cNvSpPr txBox="1"/>
           <p:nvPr/>
         </p:nvSpPr>
@@ -6445,7 +6445,7 @@
       </p:pic>
       <p:sp>
         <p:nvSpPr>
-          <p:cNvPr id="3" name="PDF_TEXT_GROUP_135"/>
+          <p:cNvPr id="3" name="PDF_TEXT_GROUP_134"/>
           <p:cNvSpPr txBox="1"/>
           <p:nvPr/>
         </p:nvSpPr>
@@ -6493,7 +6493,7 @@
       </p:sp>
       <p:sp>
         <p:nvSpPr>
-          <p:cNvPr id="4" name="PDF_TEXT_GROUP_136"/>
+          <p:cNvPr id="4" name="PDF_TEXT_GROUP_135"/>
           <p:cNvSpPr txBox="1"/>
           <p:nvPr/>
         </p:nvSpPr>
@@ -6541,7 +6541,7 @@
       </p:sp>
       <p:sp>
         <p:nvSpPr>
-          <p:cNvPr id="5" name="PDF_TEXT_GROUP_137"/>
+          <p:cNvPr id="5" name="PDF_TEXT_GROUP_136"/>
           <p:cNvSpPr txBox="1"/>
           <p:nvPr/>
         </p:nvSpPr>
@@ -6598,7 +6598,7 @@
       </p:sp>
       <p:sp>
         <p:nvSpPr>
-          <p:cNvPr id="6" name="PDF_TEXT_GROUP_138"/>
+          <p:cNvPr id="6" name="PDF_TEXT_GROUP_137"/>
           <p:cNvSpPr txBox="1"/>
           <p:nvPr/>
         </p:nvSpPr>
@@ -6655,7 +6655,7 @@
       </p:sp>
       <p:sp>
         <p:nvSpPr>
-          <p:cNvPr id="7" name="PDF_TEXT_GROUP_139"/>
+          <p:cNvPr id="7" name="PDF_TEXT_GROUP_138"/>
           <p:cNvSpPr txBox="1"/>
           <p:nvPr/>
         </p:nvSpPr>
@@ -6712,7 +6712,7 @@
       </p:sp>
       <p:sp>
         <p:nvSpPr>
-          <p:cNvPr id="8" name="PDF_TEXT_GROUP_140"/>
+          <p:cNvPr id="8" name="PDF_TEXT_GROUP_139"/>
           <p:cNvSpPr txBox="1"/>
           <p:nvPr/>
         </p:nvSpPr>
@@ -6760,7 +6760,7 @@
       </p:sp>
       <p:sp>
         <p:nvSpPr>
-          <p:cNvPr id="9" name="PDF_TEXT_GROUP_141"/>
+          <p:cNvPr id="9" name="PDF_TEXT_GROUP_140"/>
           <p:cNvSpPr txBox="1"/>
           <p:nvPr/>
         </p:nvSpPr>
@@ -6808,7 +6808,7 @@
       </p:sp>
       <p:sp>
         <p:nvSpPr>
-          <p:cNvPr id="10" name="PDF_TEXT_GROUP_142"/>
+          <p:cNvPr id="10" name="PDF_TEXT_GROUP_141"/>
           <p:cNvSpPr txBox="1"/>
           <p:nvPr/>
         </p:nvSpPr>
@@ -6856,7 +6856,7 @@
       </p:sp>
       <p:sp>
         <p:nvSpPr>
-          <p:cNvPr id="11" name="PDF_TEXT_GROUP_143"/>
+          <p:cNvPr id="11" name="PDF_TEXT_GROUP_142"/>
           <p:cNvSpPr txBox="1"/>
           <p:nvPr/>
         </p:nvSpPr>
@@ -6904,7 +6904,7 @@
       </p:sp>
       <p:sp>
         <p:nvSpPr>
-          <p:cNvPr id="12" name="PDF_TEXT_GROUP_144"/>
+          <p:cNvPr id="12" name="PDF_TEXT_GROUP_143"/>
           <p:cNvSpPr txBox="1"/>
           <p:nvPr/>
         </p:nvSpPr>
@@ -7123,7 +7123,7 @@
       </p:pic>
       <p:sp>
         <p:nvSpPr>
-          <p:cNvPr id="3" name="PDF_TEXT_GROUP_145"/>
+          <p:cNvPr id="3" name="PDF_TEXT_GROUP_144"/>
           <p:cNvSpPr txBox="1"/>
           <p:nvPr/>
         </p:nvSpPr>
@@ -7164,21 +7164,21 @@
                 </a:solidFill>
                 <a:latin typeface="Latin Modern Sans"/>
               </a:rPr>
-              <a:t>Reason 2: Separate Dissemination from Access</a:t>
-            </a:r>
-          </a:p>
-        </p:txBody>
-      </p:sp>
-      <p:sp>
-        <p:nvSpPr>
-          <p:cNvPr id="4" name="PDF_TEXT_GROUP_146"/>
-          <p:cNvSpPr txBox="1"/>
-          <p:nvPr/>
-        </p:nvSpPr>
-        <p:spPr>
-          <a:xfrm>
-            <a:off x="1618972" y="2029557"/>
-            <a:ext cx="11099463" cy="929891"/>
+              <a:t>Reason 2: Reuse Service-Permission Management</a:t>
+            </a:r>
+          </a:p>
+        </p:txBody>
+      </p:sp>
+      <p:sp>
+        <p:nvSpPr>
+          <p:cNvPr id="4" name="PDF_TEXT_GROUP_145"/>
+          <p:cNvSpPr txBox="1"/>
+          <p:nvPr/>
+        </p:nvSpPr>
+        <p:spPr>
+          <a:xfrm>
+            <a:off x="1618972" y="2204706"/>
+            <a:ext cx="11203069" cy="440633"/>
           </a:xfrm>
           <a:prstGeom prst="rect">
             <a:avLst/>
@@ -7212,8 +7212,47 @@
                 </a:solidFill>
                 <a:latin typeface="Latin Modern Sans"/>
               </a:rPr>
-              <a:t>Nodes may retrieve the same Request ciphertext; only holders of matching</a:t>
-            </a:r>
+              <a:t>KP-ABE encodes an access policy in each entity’s decryption key. [19]</a:t>
+            </a:r>
+          </a:p>
+        </p:txBody>
+      </p:sp>
+      <p:sp>
+        <p:nvSpPr>
+          <p:cNvPr id="5" name="PDF_TEXT_GROUP_146"/>
+          <p:cNvSpPr txBox="1"/>
+          <p:nvPr/>
+        </p:nvSpPr>
+        <p:spPr>
+          <a:xfrm>
+            <a:off x="1618972" y="2739134"/>
+            <a:ext cx="10090610" cy="929891"/>
+          </a:xfrm>
+          <a:prstGeom prst="rect">
+            <a:avLst/>
+          </a:prstGeom>
+          <a:noFill/>
+          <a:ln>
+            <a:noFill/>
+          </a:ln>
+        </p:spPr>
+        <p:txBody>
+          <a:bodyPr wrap="square" anchor="t" lIns="0" rIns="0" tIns="0" bIns="0">
+            <a:noAutofit/>
+          </a:bodyPr>
+          <a:lstStyle/>
+          <a:p>
+            <a:pPr algn="l">
+              <a:lnSpc>
+                <a:spcPct val="100000"/>
+              </a:lnSpc>
+              <a:spcBef>
+                <a:spcPts val="0"/>
+              </a:spcBef>
+              <a:spcAft>
+                <a:spcPts val="0"/>
+              </a:spcAft>
+            </a:pPr>
             <a:r>
               <a:rPr sz="2710" b="0" i="0">
                 <a:solidFill>
@@ -7221,47 +7260,8 @@
                 </a:solidFill>
                 <a:latin typeface="Latin Modern Sans"/>
               </a:rPr>
-              <a:t> decryption keys can read its descriptor.</a:t>
-            </a:r>
-          </a:p>
-        </p:txBody>
-      </p:sp>
-      <p:sp>
-        <p:nvSpPr>
-          <p:cNvPr id="5" name="PDF_TEXT_GROUP_147"/>
-          <p:cNvSpPr txBox="1"/>
-          <p:nvPr/>
-        </p:nvSpPr>
-        <p:spPr>
-          <a:xfrm>
-            <a:off x="1618972" y="3001824"/>
-            <a:ext cx="11819233" cy="929891"/>
-          </a:xfrm>
-          <a:prstGeom prst="rect">
-            <a:avLst/>
-          </a:prstGeom>
-          <a:noFill/>
-          <a:ln>
-            <a:noFill/>
-          </a:ln>
-        </p:spPr>
-        <p:txBody>
-          <a:bodyPr wrap="square" anchor="t" lIns="0" rIns="0" tIns="0" bIns="0">
-            <a:noAutofit/>
-          </a:bodyPr>
-          <a:lstStyle/>
-          <a:p>
-            <a:pPr algn="l">
-              <a:lnSpc>
-                <a:spcPct val="100000"/>
-              </a:lnSpc>
-              <a:spcBef>
-                <a:spcPts val="0"/>
-              </a:spcBef>
-              <a:spcAft>
-                <a:spcPts val="0"/>
-              </a:spcAft>
-            </a:pPr>
+              <a:t>NDNSF combines service entitlements in that policy while retaining</a:t>
+            </a:r>
             <a:r>
               <a:rPr sz="2710" b="0" i="0">
                 <a:solidFill>
@@ -7269,8 +7269,47 @@
                 </a:solidFill>
                 <a:latin typeface="Latin Modern Sans"/>
               </a:rPr>
-              <a:t>The User encrypts by service attributes, without listing Provider identities. The</a:t>
-            </a:r>
+              <a:t> identity-signing credentials. [28]</a:t>
+            </a:r>
+          </a:p>
+        </p:txBody>
+      </p:sp>
+      <p:sp>
+        <p:nvSpPr>
+          <p:cNvPr id="6" name="PDF_TEXT_GROUP_147"/>
+          <p:cNvSpPr txBox="1"/>
+          <p:nvPr/>
+        </p:nvSpPr>
+        <p:spPr>
+          <a:xfrm>
+            <a:off x="1618972" y="3711401"/>
+            <a:ext cx="12209254" cy="929891"/>
+          </a:xfrm>
+          <a:prstGeom prst="rect">
+            <a:avLst/>
+          </a:prstGeom>
+          <a:noFill/>
+          <a:ln>
+            <a:noFill/>
+          </a:ln>
+        </p:spPr>
+        <p:txBody>
+          <a:bodyPr wrap="square" anchor="t" lIns="0" rIns="0" tIns="0" bIns="0">
+            <a:noAutofit/>
+          </a:bodyPr>
+          <a:lstStyle/>
+          <a:p>
+            <a:pPr algn="l">
+              <a:lnSpc>
+                <a:spcPct val="100000"/>
+              </a:lnSpc>
+              <a:spcBef>
+                <a:spcPts val="0"/>
+              </a:spcBef>
+              <a:spcAft>
+                <a:spcPts val="0"/>
+              </a:spcAft>
+            </a:pPr>
             <a:r>
               <a:rPr sz="2710" b="0" i="0">
                 <a:solidFill>
@@ -7278,47 +7317,8 @@
                 </a:solidFill>
                 <a:latin typeface="Latin Modern Sans"/>
               </a:rPr>
-              <a:t> Controller still authorizes entities and issues keys. [19]</a:t>
-            </a:r>
-          </a:p>
-        </p:txBody>
-      </p:sp>
-      <p:sp>
-        <p:nvSpPr>
-          <p:cNvPr id="6" name="PDF_TEXT_GROUP_148"/>
-          <p:cNvSpPr txBox="1"/>
-          <p:nvPr/>
-        </p:nvSpPr>
-        <p:spPr>
-          <a:xfrm>
-            <a:off x="1618972" y="3974091"/>
-            <a:ext cx="11916509" cy="929924"/>
-          </a:xfrm>
-          <a:prstGeom prst="rect">
-            <a:avLst/>
-          </a:prstGeom>
-          <a:noFill/>
-          <a:ln>
-            <a:noFill/>
-          </a:ln>
-        </p:spPr>
-        <p:txBody>
-          <a:bodyPr wrap="square" anchor="t" lIns="0" rIns="0" tIns="0" bIns="0">
-            <a:noAutofit/>
-          </a:bodyPr>
-          <a:lstStyle/>
-          <a:p>
-            <a:pPr algn="l">
-              <a:lnSpc>
-                <a:spcPct val="100000"/>
-              </a:lnSpc>
-              <a:spcBef>
-                <a:spcPts val="0"/>
-              </a:spcBef>
-              <a:spcAft>
-                <a:spcPts val="0"/>
-              </a:spcAft>
-            </a:pPr>
+              <a:t>Challenge checks reuse these permissions for invocation; User permission keys and</a:t>
+            </a:r>
             <a:r>
               <a:rPr sz="2710" b="0" i="0">
                 <a:solidFill>
@@ -7326,8 +7326,47 @@
                 </a:solidFill>
                 <a:latin typeface="Latin Modern Sans"/>
               </a:rPr>
-              <a:t>Different entities retain overlapping service permissions in individual policy keys,</a:t>
-            </a:r>
+              <a:t> challenge processing still add cost.</a:t>
+            </a:r>
+          </a:p>
+        </p:txBody>
+      </p:sp>
+      <p:sp>
+        <p:nvSpPr>
+          <p:cNvPr id="7" name="PDF_TEXT_GROUP_148"/>
+          <p:cNvSpPr txBox="1"/>
+          <p:nvPr/>
+        </p:nvSpPr>
+        <p:spPr>
+          <a:xfrm>
+            <a:off x="1143656" y="5305089"/>
+            <a:ext cx="12478059" cy="929891"/>
+          </a:xfrm>
+          <a:prstGeom prst="rect">
+            <a:avLst/>
+          </a:prstGeom>
+          <a:noFill/>
+          <a:ln>
+            <a:noFill/>
+          </a:ln>
+        </p:spPr>
+        <p:txBody>
+          <a:bodyPr wrap="square" anchor="t" lIns="0" rIns="0" tIns="0" bIns="0">
+            <a:noAutofit/>
+          </a:bodyPr>
+          <a:lstStyle/>
+          <a:p>
+            <a:pPr algn="l">
+              <a:lnSpc>
+                <a:spcPct val="100000"/>
+              </a:lnSpc>
+              <a:spcBef>
+                <a:spcPts val="0"/>
+              </a:spcBef>
+              <a:spcAft>
+                <a:spcPts val="0"/>
+              </a:spcAft>
+            </a:pPr>
             <a:r>
               <a:rPr sz="2710" b="0" i="0">
                 <a:solidFill>
@@ -7335,47 +7374,8 @@
                 </a:solidFill>
                 <a:latin typeface="Latin Modern Sans"/>
               </a:rPr>
-              <a:t> independently of identity-signing credentials.</a:t>
-            </a:r>
-          </a:p>
-        </p:txBody>
-      </p:sp>
-      <p:sp>
-        <p:nvSpPr>
-          <p:cNvPr id="7" name="PDF_TEXT_GROUP_149"/>
-          <p:cNvSpPr txBox="1"/>
-          <p:nvPr/>
-        </p:nvSpPr>
-        <p:spPr>
-          <a:xfrm>
-            <a:off x="1143656" y="5567779"/>
-            <a:ext cx="12477988" cy="929891"/>
-          </a:xfrm>
-          <a:prstGeom prst="rect">
-            <a:avLst/>
-          </a:prstGeom>
-          <a:noFill/>
-          <a:ln>
-            <a:noFill/>
-          </a:ln>
-        </p:spPr>
-        <p:txBody>
-          <a:bodyPr wrap="square" anchor="t" lIns="0" rIns="0" tIns="0" bIns="0">
-            <a:noAutofit/>
-          </a:bodyPr>
-          <a:lstStyle/>
-          <a:p>
-            <a:pPr algn="l">
-              <a:lnSpc>
-                <a:spcPct val="100000"/>
-              </a:lnSpc>
-              <a:spcBef>
-                <a:spcPts val="0"/>
-              </a:spcBef>
-              <a:spcAft>
-                <a:spcPts val="0"/>
-              </a:spcAft>
-            </a:pPr>
+              <a:t>This avoids a separate role-based invocation policy in NDNSF. It does not eliminate</a:t>
+            </a:r>
             <a:r>
               <a:rPr sz="2710" b="0" i="0">
                 <a:solidFill>
@@ -7383,23 +7383,14 @@
                 </a:solidFill>
                 <a:latin typeface="Latin Modern Sans"/>
               </a:rPr>
-              <a:t>Dissemination and read access are separate. Combining permissions in one key does</a:t>
-            </a:r>
-            <a:r>
-              <a:rPr sz="2710" b="0" i="0">
-                <a:solidFill>
-                  <a:srgbClr val="000000"/>
-                </a:solidFill>
-                <a:latin typeface="Latin Modern Sans"/>
-              </a:rPr>
-              <a:t> not require encrypting all services’ content under one shared condition.</a:t>
-            </a:r>
-          </a:p>
-        </p:txBody>
-      </p:sp>
-      <p:sp>
-        <p:nvSpPr>
-          <p:cNvPr id="8" name="PDF_TEXT_GROUP_150"/>
+              <a:t> key updates or prove lower total cost; role-based designs can also reuse credentials.</a:t>
+            </a:r>
+          </a:p>
+        </p:txBody>
+      </p:sp>
+      <p:sp>
+        <p:nvSpPr>
+          <p:cNvPr id="8" name="PDF_TEXT_GROUP_149"/>
           <p:cNvSpPr txBox="1"/>
           <p:nvPr/>
         </p:nvSpPr>
@@ -7447,7 +7438,7 @@
       </p:sp>
       <p:sp>
         <p:nvSpPr>
-          <p:cNvPr id="9" name="PDF_TEXT_GROUP_151"/>
+          <p:cNvPr id="9" name="PDF_TEXT_GROUP_150"/>
           <p:cNvSpPr txBox="1"/>
           <p:nvPr/>
         </p:nvSpPr>
@@ -7495,7 +7486,7 @@
       </p:sp>
       <p:sp>
         <p:nvSpPr>
-          <p:cNvPr id="10" name="PDF_TEXT_GROUP_152"/>
+          <p:cNvPr id="10" name="PDF_TEXT_GROUP_151"/>
           <p:cNvSpPr txBox="1"/>
           <p:nvPr/>
         </p:nvSpPr>
@@ -7543,7 +7534,7 @@
       </p:sp>
       <p:sp>
         <p:nvSpPr>
-          <p:cNvPr id="11" name="PDF_TEXT_GROUP_153"/>
+          <p:cNvPr id="11" name="PDF_TEXT_GROUP_152"/>
           <p:cNvSpPr txBox="1"/>
           <p:nvPr/>
         </p:nvSpPr>
@@ -7591,7 +7582,7 @@
       </p:sp>
       <p:sp>
         <p:nvSpPr>
-          <p:cNvPr id="12" name="PDF_TEXT_GROUP_154"/>
+          <p:cNvPr id="12" name="PDF_TEXT_GROUP_153"/>
           <p:cNvSpPr txBox="1"/>
           <p:nvPr/>
         </p:nvSpPr>
@@ -7645,7 +7636,7 @@
         </p:nvSpPr>
         <p:spPr>
           <a:xfrm rot="5400000">
-            <a:off x="1207424" y="2115348"/>
+            <a:off x="1207424" y="2290497"/>
             <a:ext cx="197164" cy="197164"/>
           </a:xfrm>
           <a:prstGeom prst="triangle">
@@ -7682,13 +7673,13 @@
       </p:sp>
       <p:sp>
         <p:nvSpPr>
-          <p:cNvPr id="14" name="PDF_BULLET_SPAN_220"/>
+          <p:cNvPr id="14" name="PDF_BULLET_SPAN_219"/>
           <p:cNvSpPr/>
           <p:nvPr/>
         </p:nvSpPr>
         <p:spPr>
           <a:xfrm rot="5400000">
-            <a:off x="1207424" y="3087615"/>
+            <a:off x="1207424" y="2824925"/>
             <a:ext cx="197164" cy="197164"/>
           </a:xfrm>
           <a:prstGeom prst="triangle">
@@ -7725,13 +7716,13 @@
       </p:sp>
       <p:sp>
         <p:nvSpPr>
-          <p:cNvPr id="15" name="PDF_BULLET_SPAN_223"/>
+          <p:cNvPr id="15" name="PDF_BULLET_SPAN_222"/>
           <p:cNvSpPr/>
           <p:nvPr/>
         </p:nvSpPr>
         <p:spPr>
           <a:xfrm rot="5400000">
-            <a:off x="1207424" y="4059882"/>
+            <a:off x="1207424" y="3797192"/>
             <a:ext cx="197164" cy="197164"/>
           </a:xfrm>
           <a:prstGeom prst="triangle">
@@ -7810,7 +7801,7 @@
       </p:pic>
       <p:sp>
         <p:nvSpPr>
-          <p:cNvPr id="3" name="PDF_TEXT_GROUP_155"/>
+          <p:cNvPr id="3" name="PDF_TEXT_GROUP_154"/>
           <p:cNvSpPr txBox="1"/>
           <p:nvPr/>
         </p:nvSpPr>
@@ -7858,13 +7849,13 @@
       </p:sp>
       <p:sp>
         <p:nvSpPr>
-          <p:cNvPr id="4" name="PDF_TEXT_GROUP_156"/>
-          <p:cNvSpPr txBox="1"/>
-          <p:nvPr/>
-        </p:nvSpPr>
-        <p:spPr>
-          <a:xfrm>
-            <a:off x="1169087" y="2029557"/>
+          <p:cNvPr id="4" name="PDF_TEXT_GROUP_155"/>
+          <p:cNvSpPr txBox="1"/>
+          <p:nvPr/>
+        </p:nvSpPr>
+        <p:spPr>
+          <a:xfrm>
+            <a:off x="1169087" y="2039349"/>
             <a:ext cx="12372860" cy="440633"/>
           </a:xfrm>
           <a:prstGeom prst="rect">
@@ -7915,13 +7906,13 @@
       </p:sp>
       <p:sp>
         <p:nvSpPr>
-          <p:cNvPr id="5" name="PDF_TEXT_GROUP_157"/>
-          <p:cNvSpPr txBox="1"/>
-          <p:nvPr/>
-        </p:nvSpPr>
-        <p:spPr>
-          <a:xfrm>
-            <a:off x="1169087" y="2563986"/>
+          <p:cNvPr id="5" name="PDF_TEXT_GROUP_156"/>
+          <p:cNvSpPr txBox="1"/>
+          <p:nvPr/>
+        </p:nvSpPr>
+        <p:spPr>
+          <a:xfrm>
+            <a:off x="1169087" y="2573777"/>
             <a:ext cx="12681379" cy="929891"/>
           </a:xfrm>
           <a:prstGeom prst="rect">
@@ -7981,14 +7972,14 @@
       </p:sp>
       <p:sp>
         <p:nvSpPr>
-          <p:cNvPr id="6" name="PDF_TEXT_GROUP_158"/>
-          <p:cNvSpPr txBox="1"/>
-          <p:nvPr/>
-        </p:nvSpPr>
-        <p:spPr>
-          <a:xfrm>
-            <a:off x="1169087" y="3536253"/>
-            <a:ext cx="11418050" cy="929891"/>
+          <p:cNvPr id="6" name="PDF_TEXT_GROUP_157"/>
+          <p:cNvSpPr txBox="1"/>
+          <p:nvPr/>
+        </p:nvSpPr>
+        <p:spPr>
+          <a:xfrm>
+            <a:off x="1169087" y="3546044"/>
+            <a:ext cx="12383352" cy="929891"/>
           </a:xfrm>
           <a:prstGeom prst="rect">
             <a:avLst/>
@@ -8031,7 +8022,7 @@
                 </a:solidFill>
                 <a:latin typeface="Latin Modern Sans"/>
               </a:rPr>
-              <a:t> The Provider encrypts its challenge in ACK content. The User answers in</a:t>
+              <a:t> The Provider encrypts its challenge in ACK content. The User returns the value</a:t>
             </a:r>
             <a:r>
               <a:rPr sz="2710" b="0" i="0">
@@ -8040,21 +8031,21 @@
                 </a:solidFill>
                 <a:latin typeface="Latin Modern Sans"/>
               </a:rPr>
-              <a:t> Selection; the Provider checks that response before execution.</a:t>
-            </a:r>
-          </a:p>
-        </p:txBody>
-      </p:sp>
-      <p:sp>
-        <p:nvSpPr>
-          <p:cNvPr id="7" name="PDF_TEXT_GROUP_159"/>
-          <p:cNvSpPr txBox="1"/>
-          <p:nvPr/>
-        </p:nvSpPr>
-        <p:spPr>
-          <a:xfrm>
-            <a:off x="1143656" y="5129941"/>
-            <a:ext cx="12477812" cy="1367730"/>
+              <a:t> in Selection; the Provider checks it before execution.</a:t>
+            </a:r>
+          </a:p>
+        </p:txBody>
+      </p:sp>
+      <p:sp>
+        <p:nvSpPr>
+          <p:cNvPr id="7" name="PDF_TEXT_GROUP_158"/>
+          <p:cNvSpPr txBox="1"/>
+          <p:nvPr/>
+        </p:nvSpPr>
+        <p:spPr>
+          <a:xfrm>
+            <a:off x="1143656" y="5115237"/>
+            <a:ext cx="12477812" cy="1367762"/>
           </a:xfrm>
           <a:prstGeom prst="rect">
             <a:avLst/>
@@ -8113,7 +8104,7 @@
       </p:sp>
       <p:sp>
         <p:nvSpPr>
-          <p:cNvPr id="8" name="PDF_TEXT_GROUP_160"/>
+          <p:cNvPr id="8" name="PDF_TEXT_GROUP_159"/>
           <p:cNvSpPr txBox="1"/>
           <p:nvPr/>
         </p:nvSpPr>
@@ -8161,7 +8152,7 @@
       </p:sp>
       <p:sp>
         <p:nvSpPr>
-          <p:cNvPr id="9" name="PDF_TEXT_GROUP_161"/>
+          <p:cNvPr id="9" name="PDF_TEXT_GROUP_160"/>
           <p:cNvSpPr txBox="1"/>
           <p:nvPr/>
         </p:nvSpPr>
@@ -8209,7 +8200,7 @@
       </p:sp>
       <p:sp>
         <p:nvSpPr>
-          <p:cNvPr id="10" name="PDF_TEXT_GROUP_162"/>
+          <p:cNvPr id="10" name="PDF_TEXT_GROUP_161"/>
           <p:cNvSpPr txBox="1"/>
           <p:nvPr/>
         </p:nvSpPr>
@@ -8257,7 +8248,7 @@
       </p:sp>
       <p:sp>
         <p:nvSpPr>
-          <p:cNvPr id="11" name="PDF_TEXT_GROUP_163"/>
+          <p:cNvPr id="11" name="PDF_TEXT_GROUP_162"/>
           <p:cNvSpPr txBox="1"/>
           <p:nvPr/>
         </p:nvSpPr>
@@ -8305,7 +8296,7 @@
       </p:sp>
       <p:sp>
         <p:nvSpPr>
-          <p:cNvPr id="12" name="PDF_TEXT_GROUP_164"/>
+          <p:cNvPr id="12" name="PDF_TEXT_GROUP_163"/>
           <p:cNvSpPr txBox="1"/>
           <p:nvPr/>
         </p:nvSpPr>
@@ -8395,7 +8386,7 @@
       </p:pic>
       <p:sp>
         <p:nvSpPr>
-          <p:cNvPr id="3" name="PDF_TEXT_GROUP_165"/>
+          <p:cNvPr id="3" name="PDF_TEXT_GROUP_164"/>
           <p:cNvSpPr txBox="1"/>
           <p:nvPr/>
         </p:nvSpPr>
@@ -8443,7 +8434,7 @@
       </p:sp>
       <p:sp>
         <p:nvSpPr>
-          <p:cNvPr id="4" name="PDF_TEXT_GROUP_166"/>
+          <p:cNvPr id="4" name="PDF_TEXT_GROUP_165"/>
           <p:cNvSpPr txBox="1"/>
           <p:nvPr/>
         </p:nvSpPr>
@@ -8491,7 +8482,7 @@
       </p:sp>
       <p:sp>
         <p:nvSpPr>
-          <p:cNvPr id="5" name="PDF_TEXT_GROUP_167"/>
+          <p:cNvPr id="5" name="PDF_TEXT_GROUP_166"/>
           <p:cNvSpPr txBox="1"/>
           <p:nvPr/>
         </p:nvSpPr>
@@ -8548,7 +8539,7 @@
       </p:sp>
       <p:sp>
         <p:nvSpPr>
-          <p:cNvPr id="6" name="PDF_TEXT_GROUP_168"/>
+          <p:cNvPr id="6" name="PDF_TEXT_GROUP_167"/>
           <p:cNvSpPr txBox="1"/>
           <p:nvPr/>
         </p:nvSpPr>
@@ -8614,7 +8605,7 @@
       </p:sp>
       <p:sp>
         <p:nvSpPr>
-          <p:cNvPr id="7" name="PDF_TEXT_GROUP_169"/>
+          <p:cNvPr id="7" name="PDF_TEXT_GROUP_168"/>
           <p:cNvSpPr txBox="1"/>
           <p:nvPr/>
         </p:nvSpPr>
@@ -8680,7 +8671,7 @@
       </p:sp>
       <p:sp>
         <p:nvSpPr>
-          <p:cNvPr id="8" name="PDF_TEXT_GROUP_170"/>
+          <p:cNvPr id="8" name="PDF_TEXT_GROUP_169"/>
           <p:cNvSpPr txBox="1"/>
           <p:nvPr/>
         </p:nvSpPr>
@@ -8746,7 +8737,7 @@
       </p:sp>
       <p:sp>
         <p:nvSpPr>
-          <p:cNvPr id="9" name="PDF_TEXT_GROUP_171"/>
+          <p:cNvPr id="9" name="PDF_TEXT_GROUP_170"/>
           <p:cNvSpPr txBox="1"/>
           <p:nvPr/>
         </p:nvSpPr>
@@ -8794,7 +8785,7 @@
       </p:sp>
       <p:sp>
         <p:nvSpPr>
-          <p:cNvPr id="10" name="PDF_TEXT_GROUP_172"/>
+          <p:cNvPr id="10" name="PDF_TEXT_GROUP_171"/>
           <p:cNvSpPr txBox="1"/>
           <p:nvPr/>
         </p:nvSpPr>
@@ -8842,7 +8833,7 @@
       </p:sp>
       <p:sp>
         <p:nvSpPr>
-          <p:cNvPr id="11" name="PDF_TEXT_GROUP_173"/>
+          <p:cNvPr id="11" name="PDF_TEXT_GROUP_172"/>
           <p:cNvSpPr txBox="1"/>
           <p:nvPr/>
         </p:nvSpPr>
@@ -8890,7 +8881,7 @@
       </p:sp>
       <p:sp>
         <p:nvSpPr>
-          <p:cNvPr id="12" name="PDF_TEXT_GROUP_174"/>
+          <p:cNvPr id="12" name="PDF_TEXT_GROUP_173"/>
           <p:cNvSpPr txBox="1"/>
           <p:nvPr/>
         </p:nvSpPr>
@@ -8938,7 +8929,7 @@
       </p:sp>
       <p:sp>
         <p:nvSpPr>
-          <p:cNvPr id="13" name="PDF_TEXT_GROUP_175"/>
+          <p:cNvPr id="13" name="PDF_TEXT_GROUP_174"/>
           <p:cNvSpPr txBox="1"/>
           <p:nvPr/>
         </p:nvSpPr>
@@ -9028,7 +9019,7 @@
       </p:pic>
       <p:sp>
         <p:nvSpPr>
-          <p:cNvPr id="3" name="PDF_TEXT_GROUP_176"/>
+          <p:cNvPr id="3" name="PDF_TEXT_GROUP_175"/>
           <p:cNvSpPr txBox="1"/>
           <p:nvPr/>
         </p:nvSpPr>
@@ -9076,7 +9067,7 @@
       </p:sp>
       <p:sp>
         <p:nvSpPr>
-          <p:cNvPr id="4" name="PDF_TEXT_GROUP_177"/>
+          <p:cNvPr id="4" name="PDF_TEXT_GROUP_176"/>
           <p:cNvSpPr txBox="1"/>
           <p:nvPr/>
         </p:nvSpPr>
@@ -9124,7 +9115,7 @@
       </p:sp>
       <p:sp>
         <p:nvSpPr>
-          <p:cNvPr id="5" name="PDF_TEXT_GROUP_178"/>
+          <p:cNvPr id="5" name="PDF_TEXT_GROUP_177"/>
           <p:cNvSpPr txBox="1"/>
           <p:nvPr/>
         </p:nvSpPr>
@@ -9172,7 +9163,7 @@
       </p:sp>
       <p:sp>
         <p:nvSpPr>
-          <p:cNvPr id="6" name="PDF_TEXT_GROUP_179"/>
+          <p:cNvPr id="6" name="PDF_TEXT_GROUP_178"/>
           <p:cNvSpPr txBox="1"/>
           <p:nvPr/>
         </p:nvSpPr>
@@ -9220,7 +9211,7 @@
       </p:sp>
       <p:sp>
         <p:nvSpPr>
-          <p:cNvPr id="7" name="PDF_TEXT_GROUP_180"/>
+          <p:cNvPr id="7" name="PDF_TEXT_GROUP_179"/>
           <p:cNvSpPr txBox="1"/>
           <p:nvPr/>
         </p:nvSpPr>
@@ -9268,7 +9259,7 @@
       </p:sp>
       <p:sp>
         <p:nvSpPr>
-          <p:cNvPr id="8" name="PDF_TEXT_GROUP_181"/>
+          <p:cNvPr id="8" name="PDF_TEXT_GROUP_180"/>
           <p:cNvSpPr txBox="1"/>
           <p:nvPr/>
         </p:nvSpPr>
@@ -9316,7 +9307,7 @@
       </p:sp>
       <p:sp>
         <p:nvSpPr>
-          <p:cNvPr id="9" name="PDF_TEXT_GROUP_182"/>
+          <p:cNvPr id="9" name="PDF_TEXT_GROUP_181"/>
           <p:cNvSpPr txBox="1"/>
           <p:nvPr/>
         </p:nvSpPr>
@@ -9364,7 +9355,7 @@
       </p:sp>
       <p:sp>
         <p:nvSpPr>
-          <p:cNvPr id="10" name="PDF_TEXT_GROUP_183"/>
+          <p:cNvPr id="10" name="PDF_TEXT_GROUP_182"/>
           <p:cNvSpPr txBox="1"/>
           <p:nvPr/>
         </p:nvSpPr>
@@ -9421,7 +9412,7 @@
       </p:sp>
       <p:sp>
         <p:nvSpPr>
-          <p:cNvPr id="11" name="PDF_TEXT_GROUP_184"/>
+          <p:cNvPr id="11" name="PDF_TEXT_GROUP_183"/>
           <p:cNvSpPr txBox="1"/>
           <p:nvPr/>
         </p:nvSpPr>
@@ -9469,7 +9460,7 @@
       </p:sp>
       <p:sp>
         <p:nvSpPr>
-          <p:cNvPr id="12" name="PDF_TEXT_GROUP_185"/>
+          <p:cNvPr id="12" name="PDF_TEXT_GROUP_184"/>
           <p:cNvSpPr txBox="1"/>
           <p:nvPr/>
         </p:nvSpPr>
@@ -9517,7 +9508,7 @@
       </p:sp>
       <p:sp>
         <p:nvSpPr>
-          <p:cNvPr id="13" name="PDF_TEXT_GROUP_186"/>
+          <p:cNvPr id="13" name="PDF_TEXT_GROUP_185"/>
           <p:cNvSpPr txBox="1"/>
           <p:nvPr/>
         </p:nvSpPr>
@@ -9565,7 +9556,7 @@
       </p:sp>
       <p:sp>
         <p:nvSpPr>
-          <p:cNvPr id="14" name="PDF_TEXT_GROUP_187"/>
+          <p:cNvPr id="14" name="PDF_TEXT_GROUP_186"/>
           <p:cNvSpPr txBox="1"/>
           <p:nvPr/>
         </p:nvSpPr>
@@ -9613,7 +9604,7 @@
       </p:sp>
       <p:sp>
         <p:nvSpPr>
-          <p:cNvPr id="15" name="PDF_TEXT_GROUP_188"/>
+          <p:cNvPr id="15" name="PDF_TEXT_GROUP_187"/>
           <p:cNvSpPr txBox="1"/>
           <p:nvPr/>
         </p:nvSpPr>
@@ -9679,7 +9670,7 @@
       </p:sp>
       <p:sp>
         <p:nvSpPr>
-          <p:cNvPr id="16" name="PDF_TEXT_GROUP_189"/>
+          <p:cNvPr id="16" name="PDF_TEXT_GROUP_188"/>
           <p:cNvSpPr txBox="1"/>
           <p:nvPr/>
         </p:nvSpPr>
@@ -9727,7 +9718,7 @@
       </p:sp>
       <p:sp>
         <p:nvSpPr>
-          <p:cNvPr id="17" name="PDF_TEXT_GROUP_190"/>
+          <p:cNvPr id="17" name="PDF_TEXT_GROUP_189"/>
           <p:cNvSpPr txBox="1"/>
           <p:nvPr/>
         </p:nvSpPr>
@@ -9802,7 +9793,7 @@
       </p:sp>
       <p:sp>
         <p:nvSpPr>
-          <p:cNvPr id="18" name="PDF_TEXT_GROUP_191"/>
+          <p:cNvPr id="18" name="PDF_TEXT_GROUP_190"/>
           <p:cNvSpPr txBox="1"/>
           <p:nvPr/>
         </p:nvSpPr>
@@ -9850,7 +9841,7 @@
       </p:sp>
       <p:sp>
         <p:nvSpPr>
-          <p:cNvPr id="19" name="PDF_TEXT_GROUP_192"/>
+          <p:cNvPr id="19" name="PDF_TEXT_GROUP_191"/>
           <p:cNvSpPr txBox="1"/>
           <p:nvPr/>
         </p:nvSpPr>
@@ -9898,7 +9889,7 @@
       </p:sp>
       <p:sp>
         <p:nvSpPr>
-          <p:cNvPr id="20" name="PDF_TEXT_GROUP_193"/>
+          <p:cNvPr id="20" name="PDF_TEXT_GROUP_192"/>
           <p:cNvSpPr txBox="1"/>
           <p:nvPr/>
         </p:nvSpPr>
@@ -9946,7 +9937,7 @@
       </p:sp>
       <p:sp>
         <p:nvSpPr>
-          <p:cNvPr id="21" name="PDF_TEXT_GROUP_194"/>
+          <p:cNvPr id="21" name="PDF_TEXT_GROUP_193"/>
           <p:cNvSpPr txBox="1"/>
           <p:nvPr/>
         </p:nvSpPr>
@@ -9994,7 +9985,7 @@
       </p:sp>
       <p:sp>
         <p:nvSpPr>
-          <p:cNvPr id="22" name="PDF_TEXT_GROUP_195"/>
+          <p:cNvPr id="22" name="PDF_TEXT_GROUP_194"/>
           <p:cNvSpPr txBox="1"/>
           <p:nvPr/>
         </p:nvSpPr>
@@ -10084,7 +10075,7 @@
       </p:pic>
       <p:sp>
         <p:nvSpPr>
-          <p:cNvPr id="3" name="PDF_TEXT_GROUP_196"/>
+          <p:cNvPr id="3" name="PDF_TEXT_GROUP_195"/>
           <p:cNvSpPr txBox="1"/>
           <p:nvPr/>
         </p:nvSpPr>
@@ -10132,7 +10123,7 @@
       </p:sp>
       <p:sp>
         <p:nvSpPr>
-          <p:cNvPr id="4" name="PDF_TEXT_GROUP_197"/>
+          <p:cNvPr id="4" name="PDF_TEXT_GROUP_196"/>
           <p:cNvSpPr txBox="1"/>
           <p:nvPr/>
         </p:nvSpPr>
@@ -10189,7 +10180,7 @@
       </p:sp>
       <p:sp>
         <p:nvSpPr>
-          <p:cNvPr id="5" name="PDF_TEXT_GROUP_198"/>
+          <p:cNvPr id="5" name="PDF_TEXT_GROUP_197"/>
           <p:cNvSpPr txBox="1"/>
           <p:nvPr/>
         </p:nvSpPr>
@@ -10237,7 +10228,7 @@
       </p:sp>
       <p:sp>
         <p:nvSpPr>
-          <p:cNvPr id="6" name="PDF_TEXT_GROUP_199"/>
+          <p:cNvPr id="6" name="PDF_TEXT_GROUP_198"/>
           <p:cNvSpPr txBox="1"/>
           <p:nvPr/>
         </p:nvSpPr>
@@ -10294,7 +10285,7 @@
       </p:sp>
       <p:sp>
         <p:nvSpPr>
-          <p:cNvPr id="7" name="PDF_TEXT_GROUP_200"/>
+          <p:cNvPr id="7" name="PDF_TEXT_GROUP_199"/>
           <p:cNvSpPr txBox="1"/>
           <p:nvPr/>
         </p:nvSpPr>
@@ -10351,7 +10342,7 @@
       </p:sp>
       <p:sp>
         <p:nvSpPr>
-          <p:cNvPr id="8" name="PDF_TEXT_GROUP_201"/>
+          <p:cNvPr id="8" name="PDF_TEXT_GROUP_200"/>
           <p:cNvSpPr txBox="1"/>
           <p:nvPr/>
         </p:nvSpPr>
@@ -10408,7 +10399,7 @@
       </p:sp>
       <p:sp>
         <p:nvSpPr>
-          <p:cNvPr id="9" name="PDF_TEXT_GROUP_202"/>
+          <p:cNvPr id="9" name="PDF_TEXT_GROUP_201"/>
           <p:cNvSpPr txBox="1"/>
           <p:nvPr/>
         </p:nvSpPr>
@@ -10456,7 +10447,7 @@
       </p:sp>
       <p:sp>
         <p:nvSpPr>
-          <p:cNvPr id="10" name="PDF_TEXT_GROUP_203"/>
+          <p:cNvPr id="10" name="PDF_TEXT_GROUP_202"/>
           <p:cNvSpPr txBox="1"/>
           <p:nvPr/>
         </p:nvSpPr>
@@ -10504,7 +10495,7 @@
       </p:sp>
       <p:sp>
         <p:nvSpPr>
-          <p:cNvPr id="11" name="PDF_TEXT_GROUP_204"/>
+          <p:cNvPr id="11" name="PDF_TEXT_GROUP_203"/>
           <p:cNvSpPr txBox="1"/>
           <p:nvPr/>
         </p:nvSpPr>
@@ -10552,7 +10543,7 @@
       </p:sp>
       <p:sp>
         <p:nvSpPr>
-          <p:cNvPr id="12" name="PDF_TEXT_GROUP_205"/>
+          <p:cNvPr id="12" name="PDF_TEXT_GROUP_204"/>
           <p:cNvSpPr txBox="1"/>
           <p:nvPr/>
         </p:nvSpPr>
@@ -10600,7 +10591,7 @@
       </p:sp>
       <p:sp>
         <p:nvSpPr>
-          <p:cNvPr id="13" name="PDF_TEXT_GROUP_206"/>
+          <p:cNvPr id="13" name="PDF_TEXT_GROUP_205"/>
           <p:cNvSpPr txBox="1"/>
           <p:nvPr/>
         </p:nvSpPr>
@@ -10648,7 +10639,7 @@
       </p:sp>
       <p:sp>
         <p:nvSpPr>
-          <p:cNvPr id="14" name="PDF_BULLET_SPAN_295"/>
+          <p:cNvPr id="14" name="PDF_BULLET_SPAN_294"/>
           <p:cNvSpPr/>
           <p:nvPr/>
         </p:nvSpPr>
@@ -10691,7 +10682,7 @@
       </p:sp>
       <p:sp>
         <p:nvSpPr>
-          <p:cNvPr id="15" name="PDF_BULLET_SPAN_298"/>
+          <p:cNvPr id="15" name="PDF_BULLET_SPAN_297"/>
           <p:cNvSpPr/>
           <p:nvPr/>
         </p:nvSpPr>
@@ -10734,7 +10725,7 @@
       </p:sp>
       <p:sp>
         <p:nvSpPr>
-          <p:cNvPr id="16" name="PDF_BULLET_SPAN_300"/>
+          <p:cNvPr id="16" name="PDF_BULLET_SPAN_299"/>
           <p:cNvSpPr/>
           <p:nvPr/>
         </p:nvSpPr>
@@ -10777,7 +10768,7 @@
       </p:sp>
       <p:sp>
         <p:nvSpPr>
-          <p:cNvPr id="17" name="PDF_BULLET_SPAN_303"/>
+          <p:cNvPr id="17" name="PDF_BULLET_SPAN_302"/>
           <p:cNvSpPr/>
           <p:nvPr/>
         </p:nvSpPr>
@@ -10862,7 +10853,7 @@
       </p:pic>
       <p:sp>
         <p:nvSpPr>
-          <p:cNvPr id="3" name="PDF_TEXT_GROUP_207"/>
+          <p:cNvPr id="3" name="PDF_TEXT_GROUP_206"/>
           <p:cNvSpPr txBox="1"/>
           <p:nvPr/>
         </p:nvSpPr>
@@ -10910,13 +10901,13 @@
       </p:sp>
       <p:sp>
         <p:nvSpPr>
-          <p:cNvPr id="4" name="PDF_TEXT_GROUP_208"/>
-          <p:cNvSpPr txBox="1"/>
-          <p:nvPr/>
-        </p:nvSpPr>
-        <p:spPr>
-          <a:xfrm>
-            <a:off x="1618972" y="1832822"/>
+          <p:cNvPr id="4" name="PDF_TEXT_GROUP_207"/>
+          <p:cNvSpPr txBox="1"/>
+          <p:nvPr/>
+        </p:nvSpPr>
+        <p:spPr>
+          <a:xfrm>
+            <a:off x="1618972" y="1846589"/>
             <a:ext cx="12073884" cy="929891"/>
           </a:xfrm>
           <a:prstGeom prst="rect">
@@ -10967,13 +10958,13 @@
       </p:sp>
       <p:sp>
         <p:nvSpPr>
-          <p:cNvPr id="5" name="PDF_TEXT_GROUP_209"/>
-          <p:cNvSpPr txBox="1"/>
-          <p:nvPr/>
-        </p:nvSpPr>
-        <p:spPr>
-          <a:xfrm>
-            <a:off x="1618972" y="2805089"/>
+          <p:cNvPr id="5" name="PDF_TEXT_GROUP_208"/>
+          <p:cNvSpPr txBox="1"/>
+          <p:nvPr/>
+        </p:nvSpPr>
+        <p:spPr>
+          <a:xfrm>
+            <a:off x="1618972" y="2818856"/>
             <a:ext cx="11481704" cy="929891"/>
           </a:xfrm>
           <a:prstGeom prst="rect">
@@ -11024,14 +11015,14 @@
       </p:sp>
       <p:sp>
         <p:nvSpPr>
-          <p:cNvPr id="6" name="PDF_TEXT_GROUP_210"/>
-          <p:cNvSpPr txBox="1"/>
-          <p:nvPr/>
-        </p:nvSpPr>
-        <p:spPr>
-          <a:xfrm>
-            <a:off x="1618972" y="3777356"/>
-            <a:ext cx="12231540" cy="929924"/>
+          <p:cNvPr id="6" name="PDF_TEXT_GROUP_209"/>
+          <p:cNvSpPr txBox="1"/>
+          <p:nvPr/>
+        </p:nvSpPr>
+        <p:spPr>
+          <a:xfrm>
+            <a:off x="1618972" y="3791123"/>
+            <a:ext cx="12231540" cy="929891"/>
           </a:xfrm>
           <a:prstGeom prst="rect">
             <a:avLst/>
@@ -11081,14 +11072,14 @@
       </p:sp>
       <p:sp>
         <p:nvSpPr>
-          <p:cNvPr id="7" name="PDF_TEXT_GROUP_211"/>
-          <p:cNvSpPr txBox="1"/>
-          <p:nvPr/>
-        </p:nvSpPr>
-        <p:spPr>
-          <a:xfrm>
-            <a:off x="1143656" y="5405460"/>
-            <a:ext cx="12278260" cy="1367730"/>
+          <p:cNvPr id="7" name="PDF_TEXT_GROUP_210"/>
+          <p:cNvSpPr txBox="1"/>
+          <p:nvPr/>
+        </p:nvSpPr>
+        <p:spPr>
+          <a:xfrm>
+            <a:off x="1143656" y="5404393"/>
+            <a:ext cx="12279316" cy="1367730"/>
           </a:xfrm>
           <a:prstGeom prst="rect">
             <a:avLst/>
@@ -11122,7 +11113,7 @@
                 </a:solidFill>
                 <a:latin typeface="Latin Modern Sans"/>
               </a:rPr>
-              <a:t>Lifecycle requirement, not a third advantage: measure policy/key size, challenge</a:t>
+              <a:t>Revocation has costs: measure update propagation, rejection delay and rekey</a:t>
             </a:r>
             <a:r>
               <a:rPr sz="2710" b="0" i="0">
@@ -11131,7 +11122,7 @@
                 </a:solidFill>
                 <a:latin typeface="Latin Modern Sans"/>
               </a:rPr>
-              <a:t> cost, propagation and rekeying. No immediate disconnected revocation or recall of</a:t>
+              <a:t> traffic. Disconnected nodes cannot learn updates immediately; previously disclosed</a:t>
             </a:r>
             <a:r>
               <a:rPr sz="2710" b="0" i="0">
@@ -11140,14 +11131,14 @@
                 </a:solidFill>
                 <a:latin typeface="Latin Modern Sans"/>
               </a:rPr>
-              <a:t> old plaintext/keys.</a:t>
-            </a:r>
-          </a:p>
-        </p:txBody>
-      </p:sp>
-      <p:sp>
-        <p:nvSpPr>
-          <p:cNvPr id="8" name="PDF_TEXT_GROUP_212"/>
+              <a:t> keys and plaintext cannot be recalled.</a:t>
+            </a:r>
+          </a:p>
+        </p:txBody>
+      </p:sp>
+      <p:sp>
+        <p:nvSpPr>
+          <p:cNvPr id="8" name="PDF_TEXT_GROUP_211"/>
           <p:cNvSpPr txBox="1"/>
           <p:nvPr/>
         </p:nvSpPr>
@@ -11195,7 +11186,7 @@
       </p:sp>
       <p:sp>
         <p:nvSpPr>
-          <p:cNvPr id="9" name="PDF_TEXT_GROUP_213"/>
+          <p:cNvPr id="9" name="PDF_TEXT_GROUP_212"/>
           <p:cNvSpPr txBox="1"/>
           <p:nvPr/>
         </p:nvSpPr>
@@ -11243,7 +11234,7 @@
       </p:sp>
       <p:sp>
         <p:nvSpPr>
-          <p:cNvPr id="10" name="PDF_TEXT_GROUP_214"/>
+          <p:cNvPr id="10" name="PDF_TEXT_GROUP_213"/>
           <p:cNvSpPr txBox="1"/>
           <p:nvPr/>
         </p:nvSpPr>
@@ -11291,7 +11282,7 @@
       </p:sp>
       <p:sp>
         <p:nvSpPr>
-          <p:cNvPr id="11" name="PDF_TEXT_GROUP_215"/>
+          <p:cNvPr id="11" name="PDF_TEXT_GROUP_214"/>
           <p:cNvSpPr txBox="1"/>
           <p:nvPr/>
         </p:nvSpPr>
@@ -11339,7 +11330,7 @@
       </p:sp>
       <p:sp>
         <p:nvSpPr>
-          <p:cNvPr id="12" name="PDF_TEXT_GROUP_216"/>
+          <p:cNvPr id="12" name="PDF_TEXT_GROUP_215"/>
           <p:cNvSpPr txBox="1"/>
           <p:nvPr/>
         </p:nvSpPr>
@@ -11387,13 +11378,13 @@
       </p:sp>
       <p:sp>
         <p:nvSpPr>
-          <p:cNvPr id="13" name="PDF_BULLET_SPAN_314"/>
+          <p:cNvPr id="13" name="PDF_BULLET_SPAN_313"/>
           <p:cNvSpPr/>
           <p:nvPr/>
         </p:nvSpPr>
         <p:spPr>
           <a:xfrm rot="5400000">
-            <a:off x="1207424" y="1918613"/>
+            <a:off x="1207424" y="1932380"/>
             <a:ext cx="197164" cy="197164"/>
           </a:xfrm>
           <a:prstGeom prst="triangle">
@@ -11430,13 +11421,13 @@
       </p:sp>
       <p:sp>
         <p:nvSpPr>
-          <p:cNvPr id="14" name="PDF_BULLET_SPAN_317"/>
+          <p:cNvPr id="14" name="PDF_BULLET_SPAN_316"/>
           <p:cNvSpPr/>
           <p:nvPr/>
         </p:nvSpPr>
         <p:spPr>
           <a:xfrm rot="5400000">
-            <a:off x="1207424" y="2890880"/>
+            <a:off x="1207424" y="2904647"/>
             <a:ext cx="197164" cy="197164"/>
           </a:xfrm>
           <a:prstGeom prst="triangle">
@@ -11473,13 +11464,13 @@
       </p:sp>
       <p:sp>
         <p:nvSpPr>
-          <p:cNvPr id="15" name="PDF_BULLET_SPAN_320"/>
+          <p:cNvPr id="15" name="PDF_BULLET_SPAN_319"/>
           <p:cNvSpPr/>
           <p:nvPr/>
         </p:nvSpPr>
         <p:spPr>
           <a:xfrm rot="5400000">
-            <a:off x="1207424" y="3863147"/>
+            <a:off x="1207424" y="3876913"/>
             <a:ext cx="197164" cy="197164"/>
           </a:xfrm>
           <a:prstGeom prst="triangle">
@@ -11558,7 +11549,7 @@
       </p:pic>
       <p:sp>
         <p:nvSpPr>
-          <p:cNvPr id="3" name="PDF_TEXT_GROUP_217"/>
+          <p:cNvPr id="3" name="PDF_TEXT_GROUP_216"/>
           <p:cNvSpPr txBox="1"/>
           <p:nvPr/>
         </p:nvSpPr>
@@ -11606,7 +11597,7 @@
       </p:sp>
       <p:sp>
         <p:nvSpPr>
-          <p:cNvPr id="4" name="PDF_TEXT_GROUP_218"/>
+          <p:cNvPr id="4" name="PDF_TEXT_GROUP_217"/>
           <p:cNvSpPr txBox="1"/>
           <p:nvPr/>
         </p:nvSpPr>
@@ -11654,7 +11645,7 @@
       </p:sp>
       <p:sp>
         <p:nvSpPr>
-          <p:cNvPr id="5" name="PDF_TEXT_GROUP_219"/>
+          <p:cNvPr id="5" name="PDF_TEXT_GROUP_218"/>
           <p:cNvSpPr txBox="1"/>
           <p:nvPr/>
         </p:nvSpPr>
@@ -11711,7 +11702,7 @@
       </p:sp>
       <p:sp>
         <p:nvSpPr>
-          <p:cNvPr id="6" name="PDF_TEXT_GROUP_220"/>
+          <p:cNvPr id="6" name="PDF_TEXT_GROUP_219"/>
           <p:cNvSpPr txBox="1"/>
           <p:nvPr/>
         </p:nvSpPr>
@@ -11768,7 +11759,7 @@
       </p:sp>
       <p:sp>
         <p:nvSpPr>
-          <p:cNvPr id="7" name="PDF_TEXT_GROUP_221"/>
+          <p:cNvPr id="7" name="PDF_TEXT_GROUP_220"/>
           <p:cNvSpPr txBox="1"/>
           <p:nvPr/>
         </p:nvSpPr>
@@ -11825,7 +11816,7 @@
       </p:sp>
       <p:sp>
         <p:nvSpPr>
-          <p:cNvPr id="8" name="PDF_TEXT_GROUP_222"/>
+          <p:cNvPr id="8" name="PDF_TEXT_GROUP_221"/>
           <p:cNvSpPr txBox="1"/>
           <p:nvPr/>
         </p:nvSpPr>
@@ -11882,7 +11873,7 @@
       </p:sp>
       <p:sp>
         <p:nvSpPr>
-          <p:cNvPr id="9" name="PDF_TEXT_GROUP_223"/>
+          <p:cNvPr id="9" name="PDF_TEXT_GROUP_222"/>
           <p:cNvSpPr txBox="1"/>
           <p:nvPr/>
         </p:nvSpPr>
@@ -11930,7 +11921,7 @@
       </p:sp>
       <p:sp>
         <p:nvSpPr>
-          <p:cNvPr id="10" name="PDF_TEXT_GROUP_224"/>
+          <p:cNvPr id="10" name="PDF_TEXT_GROUP_223"/>
           <p:cNvSpPr txBox="1"/>
           <p:nvPr/>
         </p:nvSpPr>
@@ -11978,7 +11969,7 @@
       </p:sp>
       <p:sp>
         <p:nvSpPr>
-          <p:cNvPr id="11" name="PDF_TEXT_GROUP_225"/>
+          <p:cNvPr id="11" name="PDF_TEXT_GROUP_224"/>
           <p:cNvSpPr txBox="1"/>
           <p:nvPr/>
         </p:nvSpPr>
@@ -12026,7 +12017,7 @@
       </p:sp>
       <p:sp>
         <p:nvSpPr>
-          <p:cNvPr id="12" name="PDF_TEXT_GROUP_226"/>
+          <p:cNvPr id="12" name="PDF_TEXT_GROUP_225"/>
           <p:cNvSpPr txBox="1"/>
           <p:nvPr/>
         </p:nvSpPr>
@@ -12074,7 +12065,7 @@
       </p:sp>
       <p:sp>
         <p:nvSpPr>
-          <p:cNvPr id="13" name="PDF_TEXT_GROUP_227"/>
+          <p:cNvPr id="13" name="PDF_TEXT_GROUP_226"/>
           <p:cNvSpPr txBox="1"/>
           <p:nvPr/>
         </p:nvSpPr>
@@ -12122,7 +12113,7 @@
       </p:sp>
       <p:sp>
         <p:nvSpPr>
-          <p:cNvPr id="14" name="PDF_BULLET_SPAN_332"/>
+          <p:cNvPr id="14" name="PDF_BULLET_SPAN_331"/>
           <p:cNvSpPr/>
           <p:nvPr/>
         </p:nvSpPr>
@@ -12165,7 +12156,7 @@
       </p:sp>
       <p:sp>
         <p:nvSpPr>
-          <p:cNvPr id="15" name="PDF_BULLET_SPAN_334"/>
+          <p:cNvPr id="15" name="PDF_BULLET_SPAN_333"/>
           <p:cNvSpPr/>
           <p:nvPr/>
         </p:nvSpPr>
@@ -12208,7 +12199,7 @@
       </p:sp>
       <p:sp>
         <p:nvSpPr>
-          <p:cNvPr id="16" name="PDF_BULLET_SPAN_337"/>
+          <p:cNvPr id="16" name="PDF_BULLET_SPAN_336"/>
           <p:cNvSpPr/>
           <p:nvPr/>
         </p:nvSpPr>
@@ -12251,7 +12242,7 @@
       </p:sp>
       <p:sp>
         <p:nvSpPr>
-          <p:cNvPr id="17" name="PDF_BULLET_SPAN_340"/>
+          <p:cNvPr id="17" name="PDF_BULLET_SPAN_339"/>
           <p:cNvSpPr/>
           <p:nvPr/>
         </p:nvSpPr>
@@ -12336,7 +12327,7 @@
       </p:pic>
       <p:sp>
         <p:nvSpPr>
-          <p:cNvPr id="3" name="PDF_TEXT_GROUP_228"/>
+          <p:cNvPr id="3" name="PDF_TEXT_GROUP_227"/>
           <p:cNvSpPr txBox="1"/>
           <p:nvPr/>
         </p:nvSpPr>
@@ -12384,7 +12375,7 @@
       </p:sp>
       <p:sp>
         <p:nvSpPr>
-          <p:cNvPr id="4" name="PDF_TEXT_GROUP_229"/>
+          <p:cNvPr id="4" name="PDF_TEXT_GROUP_228"/>
           <p:cNvSpPr txBox="1"/>
           <p:nvPr/>
         </p:nvSpPr>
@@ -12450,14 +12441,14 @@
       </p:sp>
       <p:sp>
         <p:nvSpPr>
-          <p:cNvPr id="5" name="PDF_TEXT_GROUP_230"/>
+          <p:cNvPr id="5" name="PDF_TEXT_GROUP_229"/>
           <p:cNvSpPr txBox="1"/>
           <p:nvPr/>
         </p:nvSpPr>
         <p:spPr>
           <a:xfrm>
             <a:off x="1169087" y="2788059"/>
-            <a:ext cx="11490526" cy="440633"/>
+            <a:ext cx="13461312" cy="440633"/>
           </a:xfrm>
           <a:prstGeom prst="rect">
             <a:avLst/>
@@ -12500,14 +12491,14 @@
                 </a:solidFill>
                 <a:latin typeface="Latin Modern Sans"/>
               </a:rPr>
-              <a:t> Close the ACK collection window and validate eligible positive ACKs.</a:t>
-            </a:r>
-          </a:p>
-        </p:txBody>
-      </p:sp>
-      <p:sp>
-        <p:nvSpPr>
-          <p:cNvPr id="6" name="PDF_TEXT_GROUP_231"/>
+              <a:t> The User closes the ACK window and freezes the eligible, validated positive ACKs.</a:t>
+            </a:r>
+          </a:p>
+        </p:txBody>
+      </p:sp>
+      <p:sp>
+        <p:nvSpPr>
+          <p:cNvPr id="6" name="PDF_TEXT_GROUP_230"/>
           <p:cNvSpPr txBox="1"/>
           <p:nvPr/>
         </p:nvSpPr>
@@ -12573,7 +12564,7 @@
       </p:sp>
       <p:sp>
         <p:nvSpPr>
-          <p:cNvPr id="7" name="PDF_TEXT_GROUP_232"/>
+          <p:cNvPr id="7" name="PDF_TEXT_GROUP_231"/>
           <p:cNvSpPr txBox="1"/>
           <p:nvPr/>
         </p:nvSpPr>
@@ -12639,7 +12630,7 @@
       </p:sp>
       <p:sp>
         <p:nvSpPr>
-          <p:cNvPr id="8" name="PDF_TEXT_GROUP_233"/>
+          <p:cNvPr id="8" name="PDF_TEXT_GROUP_232"/>
           <p:cNvSpPr txBox="1"/>
           <p:nvPr/>
         </p:nvSpPr>
@@ -12696,7 +12687,7 @@
       </p:sp>
       <p:sp>
         <p:nvSpPr>
-          <p:cNvPr id="9" name="PDF_TEXT_GROUP_234"/>
+          <p:cNvPr id="9" name="PDF_TEXT_GROUP_233"/>
           <p:cNvSpPr txBox="1"/>
           <p:nvPr/>
         </p:nvSpPr>
@@ -12744,7 +12735,7 @@
       </p:sp>
       <p:sp>
         <p:nvSpPr>
-          <p:cNvPr id="10" name="PDF_TEXT_GROUP_235"/>
+          <p:cNvPr id="10" name="PDF_TEXT_GROUP_234"/>
           <p:cNvSpPr txBox="1"/>
           <p:nvPr/>
         </p:nvSpPr>
@@ -12792,7 +12783,7 @@
       </p:sp>
       <p:sp>
         <p:nvSpPr>
-          <p:cNvPr id="11" name="PDF_TEXT_GROUP_236"/>
+          <p:cNvPr id="11" name="PDF_TEXT_GROUP_235"/>
           <p:cNvSpPr txBox="1"/>
           <p:nvPr/>
         </p:nvSpPr>
@@ -12840,7 +12831,7 @@
       </p:sp>
       <p:sp>
         <p:nvSpPr>
-          <p:cNvPr id="12" name="PDF_TEXT_GROUP_237"/>
+          <p:cNvPr id="12" name="PDF_TEXT_GROUP_236"/>
           <p:cNvSpPr txBox="1"/>
           <p:nvPr/>
         </p:nvSpPr>
@@ -12888,7 +12879,7 @@
       </p:sp>
       <p:sp>
         <p:nvSpPr>
-          <p:cNvPr id="13" name="PDF_TEXT_GROUP_238"/>
+          <p:cNvPr id="13" name="PDF_TEXT_GROUP_237"/>
           <p:cNvSpPr txBox="1"/>
           <p:nvPr/>
         </p:nvSpPr>
@@ -13138,7 +13129,7 @@
         <p:spPr>
           <a:xfrm>
             <a:off x="1618972" y="2434984"/>
-            <a:ext cx="5336587" cy="440633"/>
+            <a:ext cx="4915129" cy="929924"/>
           </a:xfrm>
           <a:prstGeom prst="rect">
             <a:avLst/>
@@ -13172,7 +13163,16 @@
                 </a:solidFill>
                 <a:latin typeface="Latin Modern Sans"/>
               </a:rPr>
-              <a:t>Nearby UAVs offer suitable views.</a:t>
+              <a:t>Nearby unmanned aerial vehicles</a:t>
+            </a:r>
+            <a:r>
+              <a:rPr sz="2710" b="0" i="0">
+                <a:solidFill>
+                  <a:srgbClr val="000000"/>
+                </a:solidFill>
+                <a:latin typeface="Latin Modern Sans"/>
+              </a:rPr>
+              <a:t> (UAVs) offer suitable views.</a:t>
             </a:r>
           </a:p>
         </p:txBody>
@@ -13242,7 +13242,7 @@
         </p:nvSpPr>
         <p:spPr>
           <a:xfrm>
-            <a:off x="1618972" y="2969412"/>
+            <a:off x="1618972" y="3407283"/>
             <a:ext cx="4994873" cy="929891"/>
           </a:xfrm>
           <a:prstGeom prst="rect">
@@ -13300,7 +13300,7 @@
         <p:spPr>
           <a:xfrm>
             <a:off x="8035833" y="3625180"/>
-            <a:ext cx="1116230" cy="385554"/>
+            <a:ext cx="1063517" cy="828844"/>
           </a:xfrm>
           <a:prstGeom prst="rect">
             <a:avLst/>
@@ -13336,6 +13336,15 @@
               </a:rPr>
               <a:t>UAV B</a:t>
             </a:r>
+            <a:r>
+              <a:rPr sz="2371" b="0" i="0">
+                <a:solidFill>
+                  <a:srgbClr val="000000"/>
+                </a:solidFill>
+                <a:latin typeface="Latin Modern Sans"/>
+              </a:rPr>
+              <a:t> view 2</a:t>
+            </a:r>
           </a:p>
         </p:txBody>
       </p:sp>
@@ -13347,8 +13356,8 @@
         </p:nvSpPr>
         <p:spPr>
           <a:xfrm>
-            <a:off x="1618972" y="3941679"/>
-            <a:ext cx="4479057" cy="929924"/>
+            <a:off x="1618972" y="4379550"/>
+            <a:ext cx="4479057" cy="929891"/>
           </a:xfrm>
           <a:prstGeom prst="rect">
             <a:avLst/>
@@ -13399,54 +13408,6 @@
       <p:sp>
         <p:nvSpPr>
           <p:cNvPr id="11" name="PDF_TEXT_GROUP_14"/>
-          <p:cNvSpPr txBox="1"/>
-          <p:nvPr/>
-        </p:nvSpPr>
-        <p:spPr>
-          <a:xfrm>
-            <a:off x="8075819" y="4011508"/>
-            <a:ext cx="1036235" cy="385554"/>
-          </a:xfrm>
-          <a:prstGeom prst="rect">
-            <a:avLst/>
-          </a:prstGeom>
-          <a:noFill/>
-          <a:ln>
-            <a:noFill/>
-          </a:ln>
-        </p:spPr>
-        <p:txBody>
-          <a:bodyPr wrap="square" anchor="t" lIns="0" rIns="0" tIns="0" bIns="0">
-            <a:noAutofit/>
-          </a:bodyPr>
-          <a:lstStyle/>
-          <a:p>
-            <a:pPr algn="l">
-              <a:lnSpc>
-                <a:spcPct val="100000"/>
-              </a:lnSpc>
-              <a:spcBef>
-                <a:spcPts val="0"/>
-              </a:spcBef>
-              <a:spcAft>
-                <a:spcPts val="0"/>
-              </a:spcAft>
-            </a:pPr>
-            <a:r>
-              <a:rPr sz="2371" b="0" i="0">
-                <a:solidFill>
-                  <a:srgbClr val="000000"/>
-                </a:solidFill>
-                <a:latin typeface="Latin Modern Sans"/>
-              </a:rPr>
-              <a:t>view 2</a:t>
-            </a:r>
-          </a:p>
-        </p:txBody>
-      </p:sp>
-      <p:sp>
-        <p:nvSpPr>
-          <p:cNvPr id="12" name="PDF_TEXT_GROUP_15"/>
           <p:cNvSpPr txBox="1"/>
           <p:nvPr/>
         </p:nvSpPr>
@@ -13494,7 +13455,7 @@
       </p:sp>
       <p:sp>
         <p:nvSpPr>
-          <p:cNvPr id="13" name="PDF_TEXT_GROUP_16"/>
+          <p:cNvPr id="12" name="PDF_TEXT_GROUP_15"/>
           <p:cNvSpPr txBox="1"/>
           <p:nvPr/>
         </p:nvSpPr>
@@ -13542,7 +13503,7 @@
       </p:sp>
       <p:sp>
         <p:nvSpPr>
-          <p:cNvPr id="14" name="PDF_TEXT_GROUP_17"/>
+          <p:cNvPr id="13" name="PDF_TEXT_GROUP_16"/>
           <p:cNvSpPr txBox="1"/>
           <p:nvPr/>
         </p:nvSpPr>
@@ -13590,7 +13551,7 @@
       </p:sp>
       <p:sp>
         <p:nvSpPr>
-          <p:cNvPr id="15" name="PDF_TEXT_GROUP_18"/>
+          <p:cNvPr id="14" name="PDF_TEXT_GROUP_17"/>
           <p:cNvSpPr txBox="1"/>
           <p:nvPr/>
         </p:nvSpPr>
@@ -13638,7 +13599,7 @@
       </p:sp>
       <p:sp>
         <p:nvSpPr>
-          <p:cNvPr id="16" name="PDF_TEXT_GROUP_19"/>
+          <p:cNvPr id="15" name="PDF_TEXT_GROUP_18"/>
           <p:cNvSpPr txBox="1"/>
           <p:nvPr/>
         </p:nvSpPr>
@@ -13686,7 +13647,7 @@
       </p:sp>
       <p:sp>
         <p:nvSpPr>
-          <p:cNvPr id="17" name="PDF_TEXT_GROUP_20"/>
+          <p:cNvPr id="16" name="PDF_TEXT_GROUP_19"/>
           <p:cNvSpPr txBox="1"/>
           <p:nvPr/>
         </p:nvSpPr>
@@ -13734,7 +13695,7 @@
       </p:sp>
       <p:sp>
         <p:nvSpPr>
-          <p:cNvPr id="18" name="PDF_TEXT_GROUP_21"/>
+          <p:cNvPr id="17" name="PDF_TEXT_GROUP_20"/>
           <p:cNvSpPr txBox="1"/>
           <p:nvPr/>
         </p:nvSpPr>
@@ -13782,7 +13743,7 @@
       </p:sp>
       <p:sp>
         <p:nvSpPr>
-          <p:cNvPr id="19" name="PDF_BULLET_SPAN_11"/>
+          <p:cNvPr id="18" name="PDF_BULLET_SPAN_11"/>
           <p:cNvSpPr/>
           <p:nvPr/>
         </p:nvSpPr>
@@ -13825,7 +13786,7 @@
       </p:sp>
       <p:sp>
         <p:nvSpPr>
-          <p:cNvPr id="20" name="PDF_BULLET_SPAN_13"/>
+          <p:cNvPr id="19" name="PDF_BULLET_SPAN_13"/>
           <p:cNvSpPr/>
           <p:nvPr/>
         </p:nvSpPr>
@@ -13868,13 +13829,13 @@
       </p:sp>
       <p:sp>
         <p:nvSpPr>
-          <p:cNvPr id="21" name="PDF_BULLET_SPAN_15"/>
+          <p:cNvPr id="20" name="PDF_BULLET_SPAN_16"/>
           <p:cNvSpPr/>
           <p:nvPr/>
         </p:nvSpPr>
         <p:spPr>
           <a:xfrm rot="5400000">
-            <a:off x="1207424" y="3055203"/>
+            <a:off x="1207424" y="3493074"/>
             <a:ext cx="197164" cy="197164"/>
           </a:xfrm>
           <a:prstGeom prst="triangle">
@@ -13911,13 +13872,13 @@
       </p:sp>
       <p:sp>
         <p:nvSpPr>
-          <p:cNvPr id="22" name="PDF_BULLET_SPAN_18"/>
+          <p:cNvPr id="21" name="PDF_BULLET_SPAN_19"/>
           <p:cNvSpPr/>
           <p:nvPr/>
         </p:nvSpPr>
         <p:spPr>
           <a:xfrm rot="5400000">
-            <a:off x="1207424" y="4027470"/>
+            <a:off x="1207424" y="4465341"/>
             <a:ext cx="197164" cy="197164"/>
           </a:xfrm>
           <a:prstGeom prst="triangle">
@@ -13996,7 +13957,7 @@
       </p:pic>
       <p:sp>
         <p:nvSpPr>
-          <p:cNvPr id="3" name="PDF_TEXT_GROUP_239"/>
+          <p:cNvPr id="3" name="PDF_TEXT_GROUP_238"/>
           <p:cNvSpPr txBox="1"/>
           <p:nvPr/>
         </p:nvSpPr>
@@ -14044,7 +14005,7 @@
       </p:sp>
       <p:sp>
         <p:nvSpPr>
-          <p:cNvPr id="4" name="PDF_TEXT_GROUP_240"/>
+          <p:cNvPr id="4" name="PDF_TEXT_GROUP_239"/>
           <p:cNvSpPr txBox="1"/>
           <p:nvPr/>
         </p:nvSpPr>
@@ -14092,7 +14053,7 @@
       </p:sp>
       <p:sp>
         <p:nvSpPr>
-          <p:cNvPr id="5" name="PDF_TEXT_GROUP_241"/>
+          <p:cNvPr id="5" name="PDF_TEXT_GROUP_240"/>
           <p:cNvSpPr txBox="1"/>
           <p:nvPr/>
         </p:nvSpPr>
@@ -14140,7 +14101,7 @@
       </p:sp>
       <p:sp>
         <p:nvSpPr>
-          <p:cNvPr id="6" name="PDF_TEXT_GROUP_242"/>
+          <p:cNvPr id="6" name="PDF_TEXT_GROUP_241"/>
           <p:cNvSpPr txBox="1"/>
           <p:nvPr/>
         </p:nvSpPr>
@@ -14197,7 +14158,7 @@
       </p:sp>
       <p:sp>
         <p:nvSpPr>
-          <p:cNvPr id="7" name="PDF_TEXT_GROUP_243"/>
+          <p:cNvPr id="7" name="PDF_TEXT_GROUP_242"/>
           <p:cNvSpPr txBox="1"/>
           <p:nvPr/>
         </p:nvSpPr>
@@ -14245,7 +14206,7 @@
       </p:sp>
       <p:sp>
         <p:nvSpPr>
-          <p:cNvPr id="8" name="PDF_TEXT_GROUP_244"/>
+          <p:cNvPr id="8" name="PDF_TEXT_GROUP_243"/>
           <p:cNvSpPr txBox="1"/>
           <p:nvPr/>
         </p:nvSpPr>
@@ -14302,7 +14263,7 @@
       </p:sp>
       <p:sp>
         <p:nvSpPr>
-          <p:cNvPr id="9" name="PDF_TEXT_GROUP_245"/>
+          <p:cNvPr id="9" name="PDF_TEXT_GROUP_244"/>
           <p:cNvSpPr txBox="1"/>
           <p:nvPr/>
         </p:nvSpPr>
@@ -14359,7 +14320,7 @@
       </p:sp>
       <p:sp>
         <p:nvSpPr>
-          <p:cNvPr id="10" name="PDF_TEXT_GROUP_246"/>
+          <p:cNvPr id="10" name="PDF_TEXT_GROUP_245"/>
           <p:cNvSpPr txBox="1"/>
           <p:nvPr/>
         </p:nvSpPr>
@@ -14416,7 +14377,7 @@
       </p:sp>
       <p:sp>
         <p:nvSpPr>
-          <p:cNvPr id="11" name="PDF_TEXT_GROUP_247"/>
+          <p:cNvPr id="11" name="PDF_TEXT_GROUP_246"/>
           <p:cNvSpPr txBox="1"/>
           <p:nvPr/>
         </p:nvSpPr>
@@ -14473,7 +14434,7 @@
       </p:sp>
       <p:sp>
         <p:nvSpPr>
-          <p:cNvPr id="12" name="PDF_TEXT_GROUP_248"/>
+          <p:cNvPr id="12" name="PDF_TEXT_GROUP_247"/>
           <p:cNvSpPr txBox="1"/>
           <p:nvPr/>
         </p:nvSpPr>
@@ -14530,7 +14491,7 @@
       </p:sp>
       <p:sp>
         <p:nvSpPr>
-          <p:cNvPr id="13" name="PDF_TEXT_GROUP_249"/>
+          <p:cNvPr id="13" name="PDF_TEXT_GROUP_248"/>
           <p:cNvSpPr txBox="1"/>
           <p:nvPr/>
         </p:nvSpPr>
@@ -14578,7 +14539,7 @@
       </p:sp>
       <p:sp>
         <p:nvSpPr>
-          <p:cNvPr id="14" name="PDF_TEXT_GROUP_250"/>
+          <p:cNvPr id="14" name="PDF_TEXT_GROUP_249"/>
           <p:cNvSpPr txBox="1"/>
           <p:nvPr/>
         </p:nvSpPr>
@@ -14626,7 +14587,7 @@
       </p:sp>
       <p:sp>
         <p:nvSpPr>
-          <p:cNvPr id="15" name="PDF_TEXT_GROUP_251"/>
+          <p:cNvPr id="15" name="PDF_TEXT_GROUP_250"/>
           <p:cNvSpPr txBox="1"/>
           <p:nvPr/>
         </p:nvSpPr>
@@ -14674,7 +14635,7 @@
       </p:sp>
       <p:sp>
         <p:nvSpPr>
-          <p:cNvPr id="16" name="PDF_TEXT_GROUP_252"/>
+          <p:cNvPr id="16" name="PDF_TEXT_GROUP_251"/>
           <p:cNvSpPr txBox="1"/>
           <p:nvPr/>
         </p:nvSpPr>
@@ -14722,7 +14683,7 @@
       </p:sp>
       <p:sp>
         <p:nvSpPr>
-          <p:cNvPr id="17" name="PDF_TEXT_GROUP_253"/>
+          <p:cNvPr id="17" name="PDF_TEXT_GROUP_252"/>
           <p:cNvSpPr txBox="1"/>
           <p:nvPr/>
         </p:nvSpPr>
@@ -14812,7 +14773,7 @@
       </p:pic>
       <p:sp>
         <p:nvSpPr>
-          <p:cNvPr id="3" name="PDF_TEXT_GROUP_254"/>
+          <p:cNvPr id="3" name="PDF_TEXT_GROUP_253"/>
           <p:cNvSpPr txBox="1"/>
           <p:nvPr/>
         </p:nvSpPr>
@@ -14860,7 +14821,7 @@
       </p:sp>
       <p:sp>
         <p:nvSpPr>
-          <p:cNvPr id="4" name="PDF_TEXT_GROUP_255"/>
+          <p:cNvPr id="4" name="PDF_TEXT_GROUP_254"/>
           <p:cNvSpPr txBox="1"/>
           <p:nvPr/>
         </p:nvSpPr>
@@ -14917,14 +14878,14 @@
       </p:sp>
       <p:sp>
         <p:nvSpPr>
-          <p:cNvPr id="5" name="PDF_TEXT_GROUP_256"/>
+          <p:cNvPr id="5" name="PDF_TEXT_GROUP_255"/>
           <p:cNvSpPr txBox="1"/>
           <p:nvPr/>
         </p:nvSpPr>
         <p:spPr>
           <a:xfrm>
             <a:off x="1169087" y="2486720"/>
-            <a:ext cx="9263874" cy="440633"/>
+            <a:ext cx="9931680" cy="440633"/>
           </a:xfrm>
           <a:prstGeom prst="rect">
             <a:avLst/>
@@ -14967,14 +14928,14 @@
                 </a:solidFill>
                 <a:latin typeface="Latin Modern Sans"/>
               </a:rPr>
-              <a:t> Match the current request, plan and execution identity.</a:t>
-            </a:r>
-          </a:p>
-        </p:txBody>
-      </p:sp>
-      <p:sp>
-        <p:nvSpPr>
-          <p:cNvPr id="6" name="PDF_TEXT_GROUP_257"/>
+              <a:t> Check active request, plan, execution identity and deadline.</a:t>
+            </a:r>
+          </a:p>
+        </p:txBody>
+      </p:sp>
+      <p:sp>
+        <p:nvSpPr>
+          <p:cNvPr id="6" name="PDF_TEXT_GROUP_256"/>
           <p:cNvSpPr txBox="1"/>
           <p:nvPr/>
         </p:nvSpPr>
@@ -15031,7 +14992,7 @@
       </p:sp>
       <p:sp>
         <p:nvSpPr>
-          <p:cNvPr id="7" name="PDF_TEXT_GROUP_258"/>
+          <p:cNvPr id="7" name="PDF_TEXT_GROUP_257"/>
           <p:cNvSpPr txBox="1"/>
           <p:nvPr/>
         </p:nvSpPr>
@@ -15097,7 +15058,7 @@
       </p:sp>
       <p:sp>
         <p:nvSpPr>
-          <p:cNvPr id="8" name="PDF_TEXT_GROUP_259"/>
+          <p:cNvPr id="8" name="PDF_TEXT_GROUP_258"/>
           <p:cNvSpPr txBox="1"/>
           <p:nvPr/>
         </p:nvSpPr>
@@ -15154,7 +15115,7 @@
       </p:sp>
       <p:sp>
         <p:nvSpPr>
-          <p:cNvPr id="9" name="PDF_TEXT_GROUP_260"/>
+          <p:cNvPr id="9" name="PDF_TEXT_GROUP_259"/>
           <p:cNvSpPr txBox="1"/>
           <p:nvPr/>
         </p:nvSpPr>
@@ -15211,7 +15172,7 @@
       </p:sp>
       <p:sp>
         <p:nvSpPr>
-          <p:cNvPr id="10" name="PDF_TEXT_GROUP_261"/>
+          <p:cNvPr id="10" name="PDF_TEXT_GROUP_260"/>
           <p:cNvSpPr txBox="1"/>
           <p:nvPr/>
         </p:nvSpPr>
@@ -15259,7 +15220,7 @@
       </p:sp>
       <p:sp>
         <p:nvSpPr>
-          <p:cNvPr id="11" name="PDF_TEXT_GROUP_262"/>
+          <p:cNvPr id="11" name="PDF_TEXT_GROUP_261"/>
           <p:cNvSpPr txBox="1"/>
           <p:nvPr/>
         </p:nvSpPr>
@@ -15307,7 +15268,7 @@
       </p:sp>
       <p:sp>
         <p:nvSpPr>
-          <p:cNvPr id="12" name="PDF_TEXT_GROUP_263"/>
+          <p:cNvPr id="12" name="PDF_TEXT_GROUP_262"/>
           <p:cNvSpPr txBox="1"/>
           <p:nvPr/>
         </p:nvSpPr>
@@ -15355,7 +15316,7 @@
       </p:sp>
       <p:sp>
         <p:nvSpPr>
-          <p:cNvPr id="13" name="PDF_TEXT_GROUP_264"/>
+          <p:cNvPr id="13" name="PDF_TEXT_GROUP_263"/>
           <p:cNvSpPr txBox="1"/>
           <p:nvPr/>
         </p:nvSpPr>
@@ -15403,7 +15364,7 @@
       </p:sp>
       <p:sp>
         <p:nvSpPr>
-          <p:cNvPr id="14" name="PDF_TEXT_GROUP_265"/>
+          <p:cNvPr id="14" name="PDF_TEXT_GROUP_264"/>
           <p:cNvSpPr txBox="1"/>
           <p:nvPr/>
         </p:nvSpPr>
@@ -15493,7 +15454,7 @@
       </p:pic>
       <p:sp>
         <p:nvSpPr>
-          <p:cNvPr id="3" name="PDF_TEXT_GROUP_266"/>
+          <p:cNvPr id="3" name="PDF_TEXT_GROUP_265"/>
           <p:cNvSpPr txBox="1"/>
           <p:nvPr/>
         </p:nvSpPr>
@@ -15541,7 +15502,7 @@
       </p:sp>
       <p:sp>
         <p:nvSpPr>
-          <p:cNvPr id="4" name="PDF_TEXT_GROUP_267"/>
+          <p:cNvPr id="4" name="PDF_TEXT_GROUP_266"/>
           <p:cNvSpPr txBox="1"/>
           <p:nvPr/>
         </p:nvSpPr>
@@ -15589,7 +15550,7 @@
       </p:sp>
       <p:sp>
         <p:nvSpPr>
-          <p:cNvPr id="5" name="PDF_TEXT_GROUP_268"/>
+          <p:cNvPr id="5" name="PDF_TEXT_GROUP_267"/>
           <p:cNvSpPr txBox="1"/>
           <p:nvPr/>
         </p:nvSpPr>
@@ -15637,7 +15598,7 @@
       </p:sp>
       <p:sp>
         <p:nvSpPr>
-          <p:cNvPr id="6" name="PDF_TEXT_GROUP_269"/>
+          <p:cNvPr id="6" name="PDF_TEXT_GROUP_268"/>
           <p:cNvSpPr txBox="1"/>
           <p:nvPr/>
         </p:nvSpPr>
@@ -15685,7 +15646,7 @@
       </p:sp>
       <p:sp>
         <p:nvSpPr>
-          <p:cNvPr id="7" name="PDF_TEXT_GROUP_270"/>
+          <p:cNvPr id="7" name="PDF_TEXT_GROUP_269"/>
           <p:cNvSpPr txBox="1"/>
           <p:nvPr/>
         </p:nvSpPr>
@@ -15733,7 +15694,7 @@
       </p:sp>
       <p:sp>
         <p:nvSpPr>
-          <p:cNvPr id="8" name="PDF_TEXT_GROUP_271"/>
+          <p:cNvPr id="8" name="PDF_TEXT_GROUP_270"/>
           <p:cNvSpPr txBox="1"/>
           <p:nvPr/>
         </p:nvSpPr>
@@ -15781,7 +15742,7 @@
       </p:sp>
       <p:sp>
         <p:nvSpPr>
-          <p:cNvPr id="9" name="PDF_TEXT_GROUP_272"/>
+          <p:cNvPr id="9" name="PDF_TEXT_GROUP_271"/>
           <p:cNvSpPr txBox="1"/>
           <p:nvPr/>
         </p:nvSpPr>
@@ -15838,7 +15799,7 @@
       </p:sp>
       <p:sp>
         <p:nvSpPr>
-          <p:cNvPr id="10" name="PDF_TEXT_GROUP_273"/>
+          <p:cNvPr id="10" name="PDF_TEXT_GROUP_272"/>
           <p:cNvSpPr txBox="1"/>
           <p:nvPr/>
         </p:nvSpPr>
@@ -15886,7 +15847,7 @@
       </p:sp>
       <p:sp>
         <p:nvSpPr>
-          <p:cNvPr id="11" name="PDF_TEXT_GROUP_274"/>
+          <p:cNvPr id="11" name="PDF_TEXT_GROUP_273"/>
           <p:cNvSpPr txBox="1"/>
           <p:nvPr/>
         </p:nvSpPr>
@@ -15943,7 +15904,7 @@
       </p:sp>
       <p:sp>
         <p:nvSpPr>
-          <p:cNvPr id="12" name="PDF_TEXT_GROUP_275"/>
+          <p:cNvPr id="12" name="PDF_TEXT_GROUP_274"/>
           <p:cNvSpPr txBox="1"/>
           <p:nvPr/>
         </p:nvSpPr>
@@ -15991,7 +15952,7 @@
       </p:sp>
       <p:sp>
         <p:nvSpPr>
-          <p:cNvPr id="13" name="PDF_TEXT_GROUP_276"/>
+          <p:cNvPr id="13" name="PDF_TEXT_GROUP_275"/>
           <p:cNvSpPr txBox="1"/>
           <p:nvPr/>
         </p:nvSpPr>
@@ -16048,7 +16009,7 @@
       </p:sp>
       <p:sp>
         <p:nvSpPr>
-          <p:cNvPr id="14" name="PDF_TEXT_GROUP_277"/>
+          <p:cNvPr id="14" name="PDF_TEXT_GROUP_276"/>
           <p:cNvSpPr txBox="1"/>
           <p:nvPr/>
         </p:nvSpPr>
@@ -16096,7 +16057,7 @@
       </p:sp>
       <p:sp>
         <p:nvSpPr>
-          <p:cNvPr id="15" name="PDF_TEXT_GROUP_278"/>
+          <p:cNvPr id="15" name="PDF_TEXT_GROUP_277"/>
           <p:cNvSpPr txBox="1"/>
           <p:nvPr/>
         </p:nvSpPr>
@@ -16144,7 +16105,7 @@
       </p:sp>
       <p:sp>
         <p:nvSpPr>
-          <p:cNvPr id="16" name="PDF_TEXT_GROUP_279"/>
+          <p:cNvPr id="16" name="PDF_TEXT_GROUP_278"/>
           <p:cNvSpPr txBox="1"/>
           <p:nvPr/>
         </p:nvSpPr>
@@ -16201,7 +16162,7 @@
       </p:sp>
       <p:sp>
         <p:nvSpPr>
-          <p:cNvPr id="17" name="PDF_TEXT_GROUP_280"/>
+          <p:cNvPr id="17" name="PDF_TEXT_GROUP_279"/>
           <p:cNvSpPr txBox="1"/>
           <p:nvPr/>
         </p:nvSpPr>
@@ -16249,7 +16210,7 @@
       </p:sp>
       <p:sp>
         <p:nvSpPr>
-          <p:cNvPr id="18" name="PDF_TEXT_GROUP_281"/>
+          <p:cNvPr id="18" name="PDF_TEXT_GROUP_280"/>
           <p:cNvSpPr txBox="1"/>
           <p:nvPr/>
         </p:nvSpPr>
@@ -16297,7 +16258,7 @@
       </p:sp>
       <p:sp>
         <p:nvSpPr>
-          <p:cNvPr id="19" name="PDF_TEXT_GROUP_282"/>
+          <p:cNvPr id="19" name="PDF_TEXT_GROUP_281"/>
           <p:cNvSpPr txBox="1"/>
           <p:nvPr/>
         </p:nvSpPr>
@@ -16345,7 +16306,7 @@
       </p:sp>
       <p:sp>
         <p:nvSpPr>
-          <p:cNvPr id="20" name="PDF_TEXT_GROUP_283"/>
+          <p:cNvPr id="20" name="PDF_TEXT_GROUP_282"/>
           <p:cNvSpPr txBox="1"/>
           <p:nvPr/>
         </p:nvSpPr>
@@ -16393,7 +16354,7 @@
       </p:sp>
       <p:sp>
         <p:nvSpPr>
-          <p:cNvPr id="21" name="PDF_TEXT_GROUP_284"/>
+          <p:cNvPr id="21" name="PDF_TEXT_GROUP_283"/>
           <p:cNvSpPr txBox="1"/>
           <p:nvPr/>
         </p:nvSpPr>
@@ -16483,7 +16444,7 @@
       </p:pic>
       <p:sp>
         <p:nvSpPr>
-          <p:cNvPr id="3" name="PDF_TEXT_GROUP_285"/>
+          <p:cNvPr id="3" name="PDF_TEXT_GROUP_284"/>
           <p:cNvSpPr txBox="1"/>
           <p:nvPr/>
         </p:nvSpPr>
@@ -16531,7 +16492,7 @@
       </p:sp>
       <p:sp>
         <p:nvSpPr>
-          <p:cNvPr id="4" name="PDF_TEXT_GROUP_286"/>
+          <p:cNvPr id="4" name="PDF_TEXT_GROUP_285"/>
           <p:cNvSpPr txBox="1"/>
           <p:nvPr/>
         </p:nvSpPr>
@@ -16597,7 +16558,7 @@
       </p:sp>
       <p:sp>
         <p:nvSpPr>
-          <p:cNvPr id="5" name="PDF_TEXT_GROUP_287"/>
+          <p:cNvPr id="5" name="PDF_TEXT_GROUP_286"/>
           <p:cNvSpPr txBox="1"/>
           <p:nvPr/>
         </p:nvSpPr>
@@ -16663,7 +16624,7 @@
       </p:sp>
       <p:sp>
         <p:nvSpPr>
-          <p:cNvPr id="6" name="PDF_TEXT_GROUP_288"/>
+          <p:cNvPr id="6" name="PDF_TEXT_GROUP_287"/>
           <p:cNvSpPr txBox="1"/>
           <p:nvPr/>
         </p:nvSpPr>
@@ -16729,7 +16690,7 @@
       </p:sp>
       <p:sp>
         <p:nvSpPr>
-          <p:cNvPr id="7" name="PDF_TEXT_GROUP_289"/>
+          <p:cNvPr id="7" name="PDF_TEXT_GROUP_288"/>
           <p:cNvSpPr txBox="1"/>
           <p:nvPr/>
         </p:nvSpPr>
@@ -16786,7 +16747,7 @@
       </p:sp>
       <p:sp>
         <p:nvSpPr>
-          <p:cNvPr id="8" name="PDF_TEXT_GROUP_290"/>
+          <p:cNvPr id="8" name="PDF_TEXT_GROUP_289"/>
           <p:cNvSpPr txBox="1"/>
           <p:nvPr/>
         </p:nvSpPr>
@@ -16843,7 +16804,7 @@
       </p:sp>
       <p:sp>
         <p:nvSpPr>
-          <p:cNvPr id="9" name="PDF_TEXT_GROUP_291"/>
+          <p:cNvPr id="9" name="PDF_TEXT_GROUP_290"/>
           <p:cNvSpPr txBox="1"/>
           <p:nvPr/>
         </p:nvSpPr>
@@ -16891,7 +16852,7 @@
       </p:sp>
       <p:sp>
         <p:nvSpPr>
-          <p:cNvPr id="10" name="PDF_TEXT_GROUP_292"/>
+          <p:cNvPr id="10" name="PDF_TEXT_GROUP_291"/>
           <p:cNvSpPr txBox="1"/>
           <p:nvPr/>
         </p:nvSpPr>
@@ -16939,7 +16900,7 @@
       </p:sp>
       <p:sp>
         <p:nvSpPr>
-          <p:cNvPr id="11" name="PDF_TEXT_GROUP_293"/>
+          <p:cNvPr id="11" name="PDF_TEXT_GROUP_292"/>
           <p:cNvSpPr txBox="1"/>
           <p:nvPr/>
         </p:nvSpPr>
@@ -16987,7 +16948,7 @@
       </p:sp>
       <p:sp>
         <p:nvSpPr>
-          <p:cNvPr id="12" name="PDF_TEXT_GROUP_294"/>
+          <p:cNvPr id="12" name="PDF_TEXT_GROUP_293"/>
           <p:cNvSpPr txBox="1"/>
           <p:nvPr/>
         </p:nvSpPr>
@@ -17035,7 +16996,7 @@
       </p:sp>
       <p:sp>
         <p:nvSpPr>
-          <p:cNvPr id="13" name="PDF_TEXT_GROUP_295"/>
+          <p:cNvPr id="13" name="PDF_TEXT_GROUP_294"/>
           <p:cNvSpPr txBox="1"/>
           <p:nvPr/>
         </p:nvSpPr>
@@ -17125,7 +17086,7 @@
       </p:pic>
       <p:sp>
         <p:nvSpPr>
-          <p:cNvPr id="3" name="PDF_TEXT_GROUP_296"/>
+          <p:cNvPr id="3" name="PDF_TEXT_GROUP_295"/>
           <p:cNvSpPr txBox="1"/>
           <p:nvPr/>
         </p:nvSpPr>
@@ -17173,7 +17134,7 @@
       </p:sp>
       <p:sp>
         <p:nvSpPr>
-          <p:cNvPr id="4" name="PDF_TEXT_GROUP_297"/>
+          <p:cNvPr id="4" name="PDF_TEXT_GROUP_296"/>
           <p:cNvSpPr txBox="1"/>
           <p:nvPr/>
         </p:nvSpPr>
@@ -17221,7 +17182,7 @@
       </p:sp>
       <p:sp>
         <p:nvSpPr>
-          <p:cNvPr id="5" name="PDF_TEXT_GROUP_298"/>
+          <p:cNvPr id="5" name="PDF_TEXT_GROUP_297"/>
           <p:cNvSpPr txBox="1"/>
           <p:nvPr/>
         </p:nvSpPr>
@@ -17278,7 +17239,7 @@
       </p:sp>
       <p:sp>
         <p:nvSpPr>
-          <p:cNvPr id="6" name="PDF_TEXT_GROUP_299"/>
+          <p:cNvPr id="6" name="PDF_TEXT_GROUP_298"/>
           <p:cNvSpPr txBox="1"/>
           <p:nvPr/>
         </p:nvSpPr>
@@ -17335,7 +17296,7 @@
       </p:sp>
       <p:sp>
         <p:nvSpPr>
-          <p:cNvPr id="7" name="PDF_TEXT_GROUP_300"/>
+          <p:cNvPr id="7" name="PDF_TEXT_GROUP_299"/>
           <p:cNvSpPr txBox="1"/>
           <p:nvPr/>
         </p:nvSpPr>
@@ -17392,7 +17353,7 @@
       </p:sp>
       <p:sp>
         <p:nvSpPr>
-          <p:cNvPr id="8" name="PDF_TEXT_GROUP_301"/>
+          <p:cNvPr id="8" name="PDF_TEXT_GROUP_300"/>
           <p:cNvSpPr txBox="1"/>
           <p:nvPr/>
         </p:nvSpPr>
@@ -17449,7 +17410,7 @@
       </p:sp>
       <p:sp>
         <p:nvSpPr>
-          <p:cNvPr id="9" name="PDF_TEXT_GROUP_302"/>
+          <p:cNvPr id="9" name="PDF_TEXT_GROUP_301"/>
           <p:cNvSpPr txBox="1"/>
           <p:nvPr/>
         </p:nvSpPr>
@@ -17497,7 +17458,7 @@
       </p:sp>
       <p:sp>
         <p:nvSpPr>
-          <p:cNvPr id="10" name="PDF_TEXT_GROUP_303"/>
+          <p:cNvPr id="10" name="PDF_TEXT_GROUP_302"/>
           <p:cNvSpPr txBox="1"/>
           <p:nvPr/>
         </p:nvSpPr>
@@ -17545,7 +17506,7 @@
       </p:sp>
       <p:sp>
         <p:nvSpPr>
-          <p:cNvPr id="11" name="PDF_TEXT_GROUP_304"/>
+          <p:cNvPr id="11" name="PDF_TEXT_GROUP_303"/>
           <p:cNvSpPr txBox="1"/>
           <p:nvPr/>
         </p:nvSpPr>
@@ -17593,7 +17554,7 @@
       </p:sp>
       <p:sp>
         <p:nvSpPr>
-          <p:cNvPr id="12" name="PDF_TEXT_GROUP_305"/>
+          <p:cNvPr id="12" name="PDF_TEXT_GROUP_304"/>
           <p:cNvSpPr txBox="1"/>
           <p:nvPr/>
         </p:nvSpPr>
@@ -17641,7 +17602,7 @@
       </p:sp>
       <p:sp>
         <p:nvSpPr>
-          <p:cNvPr id="13" name="PDF_TEXT_GROUP_306"/>
+          <p:cNvPr id="13" name="PDF_TEXT_GROUP_305"/>
           <p:cNvSpPr txBox="1"/>
           <p:nvPr/>
         </p:nvSpPr>
@@ -17689,7 +17650,7 @@
       </p:sp>
       <p:sp>
         <p:nvSpPr>
-          <p:cNvPr id="14" name="PDF_BULLET_SPAN_452"/>
+          <p:cNvPr id="14" name="PDF_BULLET_SPAN_451"/>
           <p:cNvSpPr/>
           <p:nvPr/>
         </p:nvSpPr>
@@ -17732,7 +17693,7 @@
       </p:sp>
       <p:sp>
         <p:nvSpPr>
-          <p:cNvPr id="15" name="PDF_BULLET_SPAN_454"/>
+          <p:cNvPr id="15" name="PDF_BULLET_SPAN_453"/>
           <p:cNvSpPr/>
           <p:nvPr/>
         </p:nvSpPr>
@@ -17775,7 +17736,7 @@
       </p:sp>
       <p:sp>
         <p:nvSpPr>
-          <p:cNvPr id="16" name="PDF_BULLET_SPAN_457"/>
+          <p:cNvPr id="16" name="PDF_BULLET_SPAN_456"/>
           <p:cNvSpPr/>
           <p:nvPr/>
         </p:nvSpPr>
@@ -17818,7 +17779,7 @@
       </p:sp>
       <p:sp>
         <p:nvSpPr>
-          <p:cNvPr id="17" name="PDF_BULLET_SPAN_460"/>
+          <p:cNvPr id="17" name="PDF_BULLET_SPAN_459"/>
           <p:cNvSpPr/>
           <p:nvPr/>
         </p:nvSpPr>
@@ -17903,7 +17864,7 @@
       </p:pic>
       <p:sp>
         <p:nvSpPr>
-          <p:cNvPr id="3" name="PDF_TEXT_GROUP_307"/>
+          <p:cNvPr id="3" name="PDF_TEXT_GROUP_306"/>
           <p:cNvSpPr txBox="1"/>
           <p:nvPr/>
         </p:nvSpPr>
@@ -17944,14 +17905,14 @@
                 </a:solidFill>
                 <a:latin typeface="Latin Modern Sans"/>
               </a:rPr>
-              <a:t>Proposed DI Flow: Compute Follows Named Dependencies</a:t>
-            </a:r>
-          </a:p>
-        </p:txBody>
-      </p:sp>
-      <p:sp>
-        <p:nvSpPr>
-          <p:cNvPr id="4" name="PDF_TEXT_GROUP_308"/>
+              <a:t>Distributed Inference: Named Computation Dependencies</a:t>
+            </a:r>
+          </a:p>
+        </p:txBody>
+      </p:sp>
+      <p:sp>
+        <p:nvSpPr>
+          <p:cNvPr id="4" name="PDF_TEXT_GROUP_307"/>
           <p:cNvSpPr txBox="1"/>
           <p:nvPr/>
         </p:nvSpPr>
@@ -18009,7 +17970,7 @@
       </p:sp>
       <p:sp>
         <p:nvSpPr>
-          <p:cNvPr id="5" name="PDF_TEXT_GROUP_309"/>
+          <p:cNvPr id="5" name="PDF_TEXT_GROUP_308"/>
           <p:cNvSpPr txBox="1"/>
           <p:nvPr/>
         </p:nvSpPr>
@@ -18067,7 +18028,7 @@
       </p:sp>
       <p:sp>
         <p:nvSpPr>
-          <p:cNvPr id="6" name="PDF_TEXT_GROUP_310"/>
+          <p:cNvPr id="6" name="PDF_TEXT_GROUP_309"/>
           <p:cNvSpPr txBox="1"/>
           <p:nvPr/>
         </p:nvSpPr>
@@ -18125,7 +18086,7 @@
       </p:sp>
       <p:sp>
         <p:nvSpPr>
-          <p:cNvPr id="7" name="PDF_TEXT_GROUP_311"/>
+          <p:cNvPr id="7" name="PDF_TEXT_GROUP_310"/>
           <p:cNvSpPr txBox="1"/>
           <p:nvPr/>
         </p:nvSpPr>
@@ -18173,7 +18134,7 @@
       </p:sp>
       <p:sp>
         <p:nvSpPr>
-          <p:cNvPr id="8" name="PDF_TEXT_GROUP_312"/>
+          <p:cNvPr id="8" name="PDF_TEXT_GROUP_311"/>
           <p:cNvSpPr txBox="1"/>
           <p:nvPr/>
         </p:nvSpPr>
@@ -18221,7 +18182,7 @@
       </p:sp>
       <p:sp>
         <p:nvSpPr>
-          <p:cNvPr id="9" name="PDF_TEXT_GROUP_313"/>
+          <p:cNvPr id="9" name="PDF_TEXT_GROUP_312"/>
           <p:cNvSpPr txBox="1"/>
           <p:nvPr/>
         </p:nvSpPr>
@@ -18278,7 +18239,7 @@
       </p:sp>
       <p:sp>
         <p:nvSpPr>
-          <p:cNvPr id="10" name="PDF_TEXT_GROUP_314"/>
+          <p:cNvPr id="10" name="PDF_TEXT_GROUP_313"/>
           <p:cNvSpPr txBox="1"/>
           <p:nvPr/>
         </p:nvSpPr>
@@ -18335,7 +18296,7 @@
       </p:sp>
       <p:sp>
         <p:nvSpPr>
-          <p:cNvPr id="11" name="PDF_TEXT_GROUP_315"/>
+          <p:cNvPr id="11" name="PDF_TEXT_GROUP_314"/>
           <p:cNvSpPr txBox="1"/>
           <p:nvPr/>
         </p:nvSpPr>
@@ -18383,7 +18344,7 @@
       </p:sp>
       <p:sp>
         <p:nvSpPr>
-          <p:cNvPr id="12" name="PDF_TEXT_GROUP_316"/>
+          <p:cNvPr id="12" name="PDF_TEXT_GROUP_315"/>
           <p:cNvSpPr txBox="1"/>
           <p:nvPr/>
         </p:nvSpPr>
@@ -18440,7 +18401,7 @@
       </p:sp>
       <p:sp>
         <p:nvSpPr>
-          <p:cNvPr id="13" name="PDF_TEXT_GROUP_317"/>
+          <p:cNvPr id="13" name="PDF_TEXT_GROUP_316"/>
           <p:cNvSpPr txBox="1"/>
           <p:nvPr/>
         </p:nvSpPr>
@@ -18488,7 +18449,7 @@
       </p:sp>
       <p:sp>
         <p:nvSpPr>
-          <p:cNvPr id="14" name="PDF_TEXT_GROUP_318"/>
+          <p:cNvPr id="14" name="PDF_TEXT_GROUP_317"/>
           <p:cNvSpPr txBox="1"/>
           <p:nvPr/>
         </p:nvSpPr>
@@ -18536,7 +18497,7 @@
       </p:sp>
       <p:sp>
         <p:nvSpPr>
-          <p:cNvPr id="15" name="PDF_TEXT_GROUP_319"/>
+          <p:cNvPr id="15" name="PDF_TEXT_GROUP_318"/>
           <p:cNvSpPr txBox="1"/>
           <p:nvPr/>
         </p:nvSpPr>
@@ -18584,7 +18545,7 @@
       </p:sp>
       <p:sp>
         <p:nvSpPr>
-          <p:cNvPr id="16" name="PDF_TEXT_GROUP_320"/>
+          <p:cNvPr id="16" name="PDF_TEXT_GROUP_319"/>
           <p:cNvSpPr txBox="1"/>
           <p:nvPr/>
         </p:nvSpPr>
@@ -18632,7 +18593,7 @@
       </p:sp>
       <p:sp>
         <p:nvSpPr>
-          <p:cNvPr id="17" name="PDF_TEXT_GROUP_321"/>
+          <p:cNvPr id="17" name="PDF_TEXT_GROUP_320"/>
           <p:cNvSpPr txBox="1"/>
           <p:nvPr/>
         </p:nvSpPr>
@@ -18680,7 +18641,7 @@
       </p:sp>
       <p:sp>
         <p:nvSpPr>
-          <p:cNvPr id="18" name="PDF_BULLET_SPAN_479"/>
+          <p:cNvPr id="18" name="PDF_BULLET_SPAN_478"/>
           <p:cNvSpPr/>
           <p:nvPr/>
         </p:nvSpPr>
@@ -18723,7 +18684,7 @@
       </p:sp>
       <p:sp>
         <p:nvSpPr>
-          <p:cNvPr id="19" name="PDF_BULLET_SPAN_482"/>
+          <p:cNvPr id="19" name="PDF_BULLET_SPAN_481"/>
           <p:cNvSpPr/>
           <p:nvPr/>
         </p:nvSpPr>
@@ -18766,7 +18727,7 @@
       </p:sp>
       <p:sp>
         <p:nvSpPr>
-          <p:cNvPr id="20" name="PDF_BULLET_SPAN_485"/>
+          <p:cNvPr id="20" name="PDF_BULLET_SPAN_484"/>
           <p:cNvSpPr/>
           <p:nvPr/>
         </p:nvSpPr>
@@ -18851,7 +18812,7 @@
       </p:pic>
       <p:sp>
         <p:nvSpPr>
-          <p:cNvPr id="3" name="PDF_TEXT_GROUP_322"/>
+          <p:cNvPr id="3" name="PDF_TEXT_GROUP_321"/>
           <p:cNvSpPr txBox="1"/>
           <p:nvPr/>
         </p:nvSpPr>
@@ -18899,13 +18860,13 @@
       </p:sp>
       <p:sp>
         <p:nvSpPr>
-          <p:cNvPr id="4" name="PDF_TEXT_GROUP_323"/>
-          <p:cNvSpPr txBox="1"/>
-          <p:nvPr/>
-        </p:nvSpPr>
-        <p:spPr>
-          <a:xfrm>
-            <a:off x="1618972" y="2004578"/>
+          <p:cNvPr id="4" name="PDF_TEXT_GROUP_322"/>
+          <p:cNvSpPr txBox="1"/>
+          <p:nvPr/>
+        </p:nvSpPr>
+        <p:spPr>
+          <a:xfrm>
+            <a:off x="1618972" y="1835375"/>
             <a:ext cx="12118843" cy="929891"/>
           </a:xfrm>
           <a:prstGeom prst="rect">
@@ -18956,14 +18917,14 @@
       </p:sp>
       <p:sp>
         <p:nvSpPr>
-          <p:cNvPr id="5" name="PDF_TEXT_GROUP_324"/>
-          <p:cNvSpPr txBox="1"/>
-          <p:nvPr/>
-        </p:nvSpPr>
-        <p:spPr>
-          <a:xfrm>
-            <a:off x="1618972" y="2976845"/>
-            <a:ext cx="11454947" cy="929891"/>
+          <p:cNvPr id="5" name="PDF_TEXT_GROUP_323"/>
+          <p:cNvSpPr txBox="1"/>
+          <p:nvPr/>
+        </p:nvSpPr>
+        <p:spPr>
+          <a:xfrm>
+            <a:off x="1618972" y="2807642"/>
+            <a:ext cx="12008470" cy="929891"/>
           </a:xfrm>
           <a:prstGeom prst="rect">
             <a:avLst/>
@@ -18997,7 +18958,7 @@
                 </a:solidFill>
                 <a:latin typeface="Latin Modern Sans"/>
               </a:rPr>
-              <a:t>Autoregressive decoding requires retained K/V and next-step inputs; resident</a:t>
+              <a:t>With KV caching, the runtime reuses prior key/value (K/V) tensors and supplies</a:t>
             </a:r>
             <a:r>
               <a:rPr sz="2710" b="0" i="0">
@@ -19006,20 +18967,20 @@
                 </a:solidFill>
                 <a:latin typeface="Latin Modern Sans"/>
               </a:rPr>
-              <a:t> weights do not remove that state dependency.</a:t>
-            </a:r>
-          </a:p>
-        </p:txBody>
-      </p:sp>
-      <p:sp>
-        <p:nvSpPr>
-          <p:cNvPr id="6" name="PDF_TEXT_GROUP_325"/>
-          <p:cNvSpPr txBox="1"/>
-          <p:nvPr/>
-        </p:nvSpPr>
-        <p:spPr>
-          <a:xfrm>
-            <a:off x="1618972" y="3949112"/>
+              <a:t> next-step inputs; resident weights do not replace this state. [31]</a:t>
+            </a:r>
+          </a:p>
+        </p:txBody>
+      </p:sp>
+      <p:sp>
+        <p:nvSpPr>
+          <p:cNvPr id="6" name="PDF_TEXT_GROUP_324"/>
+          <p:cNvSpPr txBox="1"/>
+          <p:nvPr/>
+        </p:nvSpPr>
+        <p:spPr>
+          <a:xfrm>
+            <a:off x="1618972" y="3779909"/>
             <a:ext cx="13011427" cy="440633"/>
           </a:xfrm>
           <a:prstGeom prst="rect">
@@ -19061,14 +19022,14 @@
       </p:sp>
       <p:sp>
         <p:nvSpPr>
-          <p:cNvPr id="7" name="PDF_TEXT_GROUP_326"/>
-          <p:cNvSpPr txBox="1"/>
-          <p:nvPr/>
-        </p:nvSpPr>
-        <p:spPr>
-          <a:xfrm>
-            <a:off x="1618972" y="4483540"/>
-            <a:ext cx="11550358" cy="929924"/>
+          <p:cNvPr id="7" name="PDF_TEXT_GROUP_325"/>
+          <p:cNvSpPr txBox="1"/>
+          <p:nvPr/>
+        </p:nvSpPr>
+        <p:spPr>
+          <a:xfrm>
+            <a:off x="1618972" y="4314338"/>
+            <a:ext cx="11550358" cy="929891"/>
           </a:xfrm>
           <a:prstGeom prst="rect">
             <a:avLst/>
@@ -19118,14 +19079,14 @@
       </p:sp>
       <p:sp>
         <p:nvSpPr>
-          <p:cNvPr id="8" name="PDF_TEXT_GROUP_327"/>
-          <p:cNvSpPr txBox="1"/>
-          <p:nvPr/>
-        </p:nvSpPr>
-        <p:spPr>
-          <a:xfrm>
-            <a:off x="1143656" y="6023520"/>
-            <a:ext cx="13337742" cy="440633"/>
+          <p:cNvPr id="8" name="PDF_TEXT_GROUP_326"/>
+          <p:cNvSpPr txBox="1"/>
+          <p:nvPr/>
+        </p:nvSpPr>
+        <p:spPr>
+          <a:xfrm>
+            <a:off x="1143656" y="5839485"/>
+            <a:ext cx="12108316" cy="929891"/>
           </a:xfrm>
           <a:prstGeom prst="rect">
             <a:avLst/>
@@ -19159,14 +19120,23 @@
                 </a:solidFill>
                 <a:latin typeface="Latin Modern Sans"/>
               </a:rPr>
-              <a:t>Earlier small-model measurements do not qualify all current V3/native features. [28]</a:t>
-            </a:r>
-          </a:p>
-        </p:txBody>
-      </p:sp>
-      <p:sp>
-        <p:nvSpPr>
-          <p:cNvPr id="9" name="PDF_TEXT_GROUP_328"/>
+              <a:t>Earlier small-model measurements do not validate the newer distributed inference</a:t>
+            </a:r>
+            <a:r>
+              <a:rPr sz="2710" b="0" i="0">
+                <a:solidFill>
+                  <a:srgbClr val="000000"/>
+                </a:solidFill>
+                <a:latin typeface="Latin Modern Sans"/>
+              </a:rPr>
+              <a:t> and recovery paths. [28]</a:t>
+            </a:r>
+          </a:p>
+        </p:txBody>
+      </p:sp>
+      <p:sp>
+        <p:nvSpPr>
+          <p:cNvPr id="9" name="PDF_TEXT_GROUP_327"/>
           <p:cNvSpPr txBox="1"/>
           <p:nvPr/>
         </p:nvSpPr>
@@ -19214,7 +19184,7 @@
       </p:sp>
       <p:sp>
         <p:nvSpPr>
-          <p:cNvPr id="10" name="PDF_TEXT_GROUP_329"/>
+          <p:cNvPr id="10" name="PDF_TEXT_GROUP_328"/>
           <p:cNvSpPr txBox="1"/>
           <p:nvPr/>
         </p:nvSpPr>
@@ -19262,7 +19232,7 @@
       </p:sp>
       <p:sp>
         <p:nvSpPr>
-          <p:cNvPr id="11" name="PDF_TEXT_GROUP_330"/>
+          <p:cNvPr id="11" name="PDF_TEXT_GROUP_329"/>
           <p:cNvSpPr txBox="1"/>
           <p:nvPr/>
         </p:nvSpPr>
@@ -19310,7 +19280,7 @@
       </p:sp>
       <p:sp>
         <p:nvSpPr>
-          <p:cNvPr id="12" name="PDF_TEXT_GROUP_331"/>
+          <p:cNvPr id="12" name="PDF_TEXT_GROUP_330"/>
           <p:cNvSpPr txBox="1"/>
           <p:nvPr/>
         </p:nvSpPr>
@@ -19358,7 +19328,7 @@
       </p:sp>
       <p:sp>
         <p:nvSpPr>
-          <p:cNvPr id="13" name="PDF_TEXT_GROUP_332"/>
+          <p:cNvPr id="13" name="PDF_TEXT_GROUP_331"/>
           <p:cNvSpPr txBox="1"/>
           <p:nvPr/>
         </p:nvSpPr>
@@ -19406,13 +19376,13 @@
       </p:sp>
       <p:sp>
         <p:nvSpPr>
-          <p:cNvPr id="14" name="PDF_BULLET_SPAN_495"/>
+          <p:cNvPr id="14" name="PDF_BULLET_SPAN_494"/>
           <p:cNvSpPr/>
           <p:nvPr/>
         </p:nvSpPr>
         <p:spPr>
           <a:xfrm rot="5400000">
-            <a:off x="1207424" y="2090369"/>
+            <a:off x="1207424" y="1921166"/>
             <a:ext cx="197164" cy="197164"/>
           </a:xfrm>
           <a:prstGeom prst="triangle">
@@ -19449,13 +19419,13 @@
       </p:sp>
       <p:sp>
         <p:nvSpPr>
-          <p:cNvPr id="15" name="PDF_BULLET_SPAN_498"/>
+          <p:cNvPr id="15" name="PDF_BULLET_SPAN_497"/>
           <p:cNvSpPr/>
           <p:nvPr/>
         </p:nvSpPr>
         <p:spPr>
           <a:xfrm rot="5400000">
-            <a:off x="1207424" y="3062635"/>
+            <a:off x="1207424" y="2893433"/>
             <a:ext cx="197164" cy="197164"/>
           </a:xfrm>
           <a:prstGeom prst="triangle">
@@ -19492,13 +19462,13 @@
       </p:sp>
       <p:sp>
         <p:nvSpPr>
-          <p:cNvPr id="16" name="PDF_BULLET_SPAN_501"/>
+          <p:cNvPr id="16" name="PDF_BULLET_SPAN_500"/>
           <p:cNvSpPr/>
           <p:nvPr/>
         </p:nvSpPr>
         <p:spPr>
           <a:xfrm rot="5400000">
-            <a:off x="1207424" y="4034902"/>
+            <a:off x="1207424" y="3865700"/>
             <a:ext cx="197164" cy="197164"/>
           </a:xfrm>
           <a:prstGeom prst="triangle">
@@ -19535,13 +19505,13 @@
       </p:sp>
       <p:sp>
         <p:nvSpPr>
-          <p:cNvPr id="17" name="PDF_BULLET_SPAN_503"/>
+          <p:cNvPr id="17" name="PDF_BULLET_SPAN_502"/>
           <p:cNvSpPr/>
           <p:nvPr/>
         </p:nvSpPr>
         <p:spPr>
           <a:xfrm rot="5400000">
-            <a:off x="1207424" y="4569331"/>
+            <a:off x="1207424" y="4400129"/>
             <a:ext cx="197164" cy="197164"/>
           </a:xfrm>
           <a:prstGeom prst="triangle">
@@ -19620,7 +19590,7 @@
       </p:pic>
       <p:sp>
         <p:nvSpPr>
-          <p:cNvPr id="3" name="PDF_TEXT_GROUP_333"/>
+          <p:cNvPr id="3" name="PDF_TEXT_GROUP_332"/>
           <p:cNvSpPr txBox="1"/>
           <p:nvPr/>
         </p:nvSpPr>
@@ -19668,7 +19638,7 @@
       </p:sp>
       <p:sp>
         <p:nvSpPr>
-          <p:cNvPr id="4" name="PDF_TEXT_GROUP_334"/>
+          <p:cNvPr id="4" name="PDF_TEXT_GROUP_333"/>
           <p:cNvSpPr txBox="1"/>
           <p:nvPr/>
         </p:nvSpPr>
@@ -19725,7 +19695,7 @@
       </p:sp>
       <p:sp>
         <p:nvSpPr>
-          <p:cNvPr id="5" name="PDF_TEXT_GROUP_335"/>
+          <p:cNvPr id="5" name="PDF_TEXT_GROUP_334"/>
           <p:cNvSpPr txBox="1"/>
           <p:nvPr/>
         </p:nvSpPr>
@@ -19782,7 +19752,7 @@
       </p:sp>
       <p:sp>
         <p:nvSpPr>
-          <p:cNvPr id="6" name="PDF_TEXT_GROUP_336"/>
+          <p:cNvPr id="6" name="PDF_TEXT_GROUP_335"/>
           <p:cNvSpPr txBox="1"/>
           <p:nvPr/>
         </p:nvSpPr>
@@ -19839,7 +19809,7 @@
       </p:sp>
       <p:sp>
         <p:nvSpPr>
-          <p:cNvPr id="7" name="PDF_TEXT_GROUP_337"/>
+          <p:cNvPr id="7" name="PDF_TEXT_GROUP_336"/>
           <p:cNvSpPr txBox="1"/>
           <p:nvPr/>
         </p:nvSpPr>
@@ -19896,7 +19866,7 @@
       </p:sp>
       <p:sp>
         <p:nvSpPr>
-          <p:cNvPr id="8" name="PDF_TEXT_GROUP_338"/>
+          <p:cNvPr id="8" name="PDF_TEXT_GROUP_337"/>
           <p:cNvSpPr txBox="1"/>
           <p:nvPr/>
         </p:nvSpPr>
@@ -19953,7 +19923,7 @@
       </p:sp>
       <p:sp>
         <p:nvSpPr>
-          <p:cNvPr id="9" name="PDF_TEXT_GROUP_339"/>
+          <p:cNvPr id="9" name="PDF_TEXT_GROUP_338"/>
           <p:cNvSpPr txBox="1"/>
           <p:nvPr/>
         </p:nvSpPr>
@@ -20001,7 +19971,7 @@
       </p:sp>
       <p:sp>
         <p:nvSpPr>
-          <p:cNvPr id="10" name="PDF_TEXT_GROUP_340"/>
+          <p:cNvPr id="10" name="PDF_TEXT_GROUP_339"/>
           <p:cNvSpPr txBox="1"/>
           <p:nvPr/>
         </p:nvSpPr>
@@ -20049,7 +20019,7 @@
       </p:sp>
       <p:sp>
         <p:nvSpPr>
-          <p:cNvPr id="11" name="PDF_TEXT_GROUP_341"/>
+          <p:cNvPr id="11" name="PDF_TEXT_GROUP_340"/>
           <p:cNvSpPr txBox="1"/>
           <p:nvPr/>
         </p:nvSpPr>
@@ -20097,7 +20067,7 @@
       </p:sp>
       <p:sp>
         <p:nvSpPr>
-          <p:cNvPr id="12" name="PDF_TEXT_GROUP_342"/>
+          <p:cNvPr id="12" name="PDF_TEXT_GROUP_341"/>
           <p:cNvSpPr txBox="1"/>
           <p:nvPr/>
         </p:nvSpPr>
@@ -20145,7 +20115,7 @@
       </p:sp>
       <p:sp>
         <p:nvSpPr>
-          <p:cNvPr id="13" name="PDF_TEXT_GROUP_343"/>
+          <p:cNvPr id="13" name="PDF_TEXT_GROUP_342"/>
           <p:cNvSpPr txBox="1"/>
           <p:nvPr/>
         </p:nvSpPr>
@@ -20407,7 +20377,7 @@
       </p:pic>
       <p:sp>
         <p:nvSpPr>
-          <p:cNvPr id="3" name="PDF_TEXT_GROUP_344"/>
+          <p:cNvPr id="3" name="PDF_TEXT_GROUP_343"/>
           <p:cNvSpPr txBox="1"/>
           <p:nvPr/>
         </p:nvSpPr>
@@ -20448,20 +20418,20 @@
                 </a:solidFill>
                 <a:latin typeface="Latin Modern Sans"/>
               </a:rPr>
-              <a:t>Mobility: Overall Completion Depends on Coverage</a:t>
-            </a:r>
-          </a:p>
-        </p:txBody>
-      </p:sp>
-      <p:sp>
-        <p:nvSpPr>
-          <p:cNvPr id="4" name="PDF_TEXT_GROUP_345"/>
-          <p:cNvSpPr txBox="1"/>
-          <p:nvPr/>
-        </p:nvSpPr>
-        <p:spPr>
-          <a:xfrm>
-            <a:off x="914808" y="1720717"/>
+              <a:t>Mobility: Completion under Different Coverage Conditions</a:t>
+            </a:r>
+          </a:p>
+        </p:txBody>
+      </p:sp>
+      <p:sp>
+        <p:nvSpPr>
+          <p:cNvPr id="4" name="PDF_TEXT_GROUP_344"/>
+          <p:cNvSpPr txBox="1"/>
+          <p:nvPr/>
+        </p:nvSpPr>
+        <p:spPr>
+          <a:xfrm>
+            <a:off x="914808" y="1713575"/>
             <a:ext cx="12055797" cy="385554"/>
           </a:xfrm>
           <a:prstGeom prst="rect">
@@ -20503,13 +20473,13 @@
       </p:sp>
       <p:sp>
         <p:nvSpPr>
-          <p:cNvPr id="5" name="PDF_TEXT_GROUP_346"/>
-          <p:cNvSpPr txBox="1"/>
-          <p:nvPr/>
-        </p:nvSpPr>
-        <p:spPr>
-          <a:xfrm>
-            <a:off x="1107736" y="2233688"/>
+          <p:cNvPr id="5" name="PDF_TEXT_GROUP_345"/>
+          <p:cNvSpPr txBox="1"/>
+          <p:nvPr/>
+        </p:nvSpPr>
+        <p:spPr>
+          <a:xfrm>
+            <a:off x="1107736" y="2226546"/>
             <a:ext cx="1504243" cy="385554"/>
           </a:xfrm>
           <a:prstGeom prst="rect">
@@ -20551,13 +20521,13 @@
       </p:sp>
       <p:sp>
         <p:nvSpPr>
-          <p:cNvPr id="6" name="PDF_TEXT_GROUP_347"/>
-          <p:cNvSpPr txBox="1"/>
-          <p:nvPr/>
-        </p:nvSpPr>
-        <p:spPr>
-          <a:xfrm>
-            <a:off x="9386102" y="2233688"/>
+          <p:cNvPr id="6" name="PDF_TEXT_GROUP_346"/>
+          <p:cNvSpPr txBox="1"/>
+          <p:nvPr/>
+        </p:nvSpPr>
+        <p:spPr>
+          <a:xfrm>
+            <a:off x="9386102" y="2226546"/>
             <a:ext cx="1230081" cy="385554"/>
           </a:xfrm>
           <a:prstGeom prst="rect">
@@ -20599,13 +20569,13 @@
       </p:sp>
       <p:sp>
         <p:nvSpPr>
-          <p:cNvPr id="7" name="PDF_TEXT_GROUP_348"/>
-          <p:cNvSpPr txBox="1"/>
-          <p:nvPr/>
-        </p:nvSpPr>
-        <p:spPr>
-          <a:xfrm>
-            <a:off x="11203250" y="2233688"/>
+          <p:cNvPr id="7" name="PDF_TEXT_GROUP_347"/>
+          <p:cNvSpPr txBox="1"/>
+          <p:nvPr/>
+        </p:nvSpPr>
+        <p:spPr>
+          <a:xfrm>
+            <a:off x="11203250" y="2226546"/>
             <a:ext cx="959970" cy="385554"/>
           </a:xfrm>
           <a:prstGeom prst="rect">
@@ -20647,13 +20617,13 @@
       </p:sp>
       <p:sp>
         <p:nvSpPr>
-          <p:cNvPr id="8" name="PDF_TEXT_GROUP_349"/>
-          <p:cNvSpPr txBox="1"/>
-          <p:nvPr/>
-        </p:nvSpPr>
-        <p:spPr>
-          <a:xfrm>
-            <a:off x="12917479" y="2233688"/>
+          <p:cNvPr id="8" name="PDF_TEXT_GROUP_348"/>
+          <p:cNvSpPr txBox="1"/>
+          <p:nvPr/>
+        </p:nvSpPr>
+        <p:spPr>
+          <a:xfrm>
+            <a:off x="12917479" y="2226546"/>
             <a:ext cx="792489" cy="385554"/>
           </a:xfrm>
           <a:prstGeom prst="rect">
@@ -20695,13 +20665,13 @@
       </p:sp>
       <p:sp>
         <p:nvSpPr>
-          <p:cNvPr id="9" name="PDF_TEXT_GROUP_350"/>
-          <p:cNvSpPr txBox="1"/>
-          <p:nvPr/>
-        </p:nvSpPr>
-        <p:spPr>
-          <a:xfrm>
-            <a:off x="1107736" y="2802048"/>
+          <p:cNvPr id="9" name="PDF_TEXT_GROUP_349"/>
+          <p:cNvSpPr txBox="1"/>
+          <p:nvPr/>
+        </p:nvSpPr>
+        <p:spPr>
+          <a:xfrm>
+            <a:off x="1107736" y="2794906"/>
             <a:ext cx="864735" cy="385554"/>
           </a:xfrm>
           <a:prstGeom prst="rect">
@@ -20743,13 +20713,13 @@
       </p:sp>
       <p:sp>
         <p:nvSpPr>
-          <p:cNvPr id="10" name="PDF_TEXT_GROUP_351"/>
-          <p:cNvSpPr txBox="1"/>
-          <p:nvPr/>
-        </p:nvSpPr>
-        <p:spPr>
-          <a:xfrm>
-            <a:off x="9435295" y="2802048"/>
+          <p:cNvPr id="10" name="PDF_TEXT_GROUP_350"/>
+          <p:cNvSpPr txBox="1"/>
+          <p:nvPr/>
+        </p:nvSpPr>
+        <p:spPr>
+          <a:xfrm>
+            <a:off x="9435295" y="2794906"/>
             <a:ext cx="1181016" cy="385554"/>
           </a:xfrm>
           <a:prstGeom prst="rect">
@@ -20791,13 +20761,13 @@
       </p:sp>
       <p:sp>
         <p:nvSpPr>
-          <p:cNvPr id="11" name="PDF_TEXT_GROUP_352"/>
-          <p:cNvSpPr txBox="1"/>
-          <p:nvPr/>
-        </p:nvSpPr>
-        <p:spPr>
-          <a:xfrm>
-            <a:off x="10982171" y="2802048"/>
+          <p:cNvPr id="11" name="PDF_TEXT_GROUP_351"/>
+          <p:cNvSpPr txBox="1"/>
+          <p:nvPr/>
+        </p:nvSpPr>
+        <p:spPr>
+          <a:xfrm>
+            <a:off x="10982171" y="2794906"/>
             <a:ext cx="1181016" cy="385554"/>
           </a:xfrm>
           <a:prstGeom prst="rect">
@@ -20839,13 +20809,13 @@
       </p:sp>
       <p:sp>
         <p:nvSpPr>
-          <p:cNvPr id="12" name="PDF_TEXT_GROUP_353"/>
-          <p:cNvSpPr txBox="1"/>
-          <p:nvPr/>
-        </p:nvSpPr>
-        <p:spPr>
-          <a:xfrm>
-            <a:off x="12529048" y="2802048"/>
+          <p:cNvPr id="12" name="PDF_TEXT_GROUP_352"/>
+          <p:cNvSpPr txBox="1"/>
+          <p:nvPr/>
+        </p:nvSpPr>
+        <p:spPr>
+          <a:xfrm>
+            <a:off x="12529048" y="2794906"/>
             <a:ext cx="1181016" cy="385554"/>
           </a:xfrm>
           <a:prstGeom prst="rect">
@@ -20887,13 +20857,13 @@
       </p:sp>
       <p:sp>
         <p:nvSpPr>
-          <p:cNvPr id="13" name="PDF_TEXT_GROUP_354"/>
-          <p:cNvSpPr txBox="1"/>
-          <p:nvPr/>
-        </p:nvSpPr>
-        <p:spPr>
-          <a:xfrm>
-            <a:off x="1107736" y="3370407"/>
+          <p:cNvPr id="13" name="PDF_TEXT_GROUP_353"/>
+          <p:cNvSpPr txBox="1"/>
+          <p:nvPr/>
+        </p:nvSpPr>
+        <p:spPr>
+          <a:xfrm>
+            <a:off x="1107736" y="3363265"/>
             <a:ext cx="1025496" cy="385554"/>
           </a:xfrm>
           <a:prstGeom prst="rect">
@@ -20935,13 +20905,13 @@
       </p:sp>
       <p:sp>
         <p:nvSpPr>
-          <p:cNvPr id="14" name="PDF_TEXT_GROUP_355"/>
-          <p:cNvSpPr txBox="1"/>
-          <p:nvPr/>
-        </p:nvSpPr>
-        <p:spPr>
-          <a:xfrm>
-            <a:off x="9435295" y="3370407"/>
+          <p:cNvPr id="14" name="PDF_TEXT_GROUP_354"/>
+          <p:cNvSpPr txBox="1"/>
+          <p:nvPr/>
+        </p:nvSpPr>
+        <p:spPr>
+          <a:xfrm>
+            <a:off x="9435295" y="3363265"/>
             <a:ext cx="1181016" cy="385554"/>
           </a:xfrm>
           <a:prstGeom prst="rect">
@@ -20983,13 +20953,13 @@
       </p:sp>
       <p:sp>
         <p:nvSpPr>
-          <p:cNvPr id="15" name="PDF_TEXT_GROUP_356"/>
-          <p:cNvSpPr txBox="1"/>
-          <p:nvPr/>
-        </p:nvSpPr>
-        <p:spPr>
-          <a:xfrm>
-            <a:off x="10982171" y="3370407"/>
+          <p:cNvPr id="15" name="PDF_TEXT_GROUP_355"/>
+          <p:cNvSpPr txBox="1"/>
+          <p:nvPr/>
+        </p:nvSpPr>
+        <p:spPr>
+          <a:xfrm>
+            <a:off x="10982171" y="3363265"/>
             <a:ext cx="1181016" cy="385554"/>
           </a:xfrm>
           <a:prstGeom prst="rect">
@@ -21031,13 +21001,13 @@
       </p:sp>
       <p:sp>
         <p:nvSpPr>
-          <p:cNvPr id="16" name="PDF_TEXT_GROUP_357"/>
-          <p:cNvSpPr txBox="1"/>
-          <p:nvPr/>
-        </p:nvSpPr>
-        <p:spPr>
-          <a:xfrm>
-            <a:off x="12529048" y="3370407"/>
+          <p:cNvPr id="16" name="PDF_TEXT_GROUP_356"/>
+          <p:cNvSpPr txBox="1"/>
+          <p:nvPr/>
+        </p:nvSpPr>
+        <p:spPr>
+          <a:xfrm>
+            <a:off x="12529048" y="3363265"/>
             <a:ext cx="1181016" cy="385554"/>
           </a:xfrm>
           <a:prstGeom prst="rect">
@@ -21079,13 +21049,13 @@
       </p:sp>
       <p:sp>
         <p:nvSpPr>
-          <p:cNvPr id="17" name="PDF_TEXT_GROUP_358"/>
-          <p:cNvSpPr txBox="1"/>
-          <p:nvPr/>
-        </p:nvSpPr>
-        <p:spPr>
-          <a:xfrm>
-            <a:off x="1107736" y="3938766"/>
+          <p:cNvPr id="17" name="PDF_TEXT_GROUP_357"/>
+          <p:cNvSpPr txBox="1"/>
+          <p:nvPr/>
+        </p:nvSpPr>
+        <p:spPr>
+          <a:xfrm>
+            <a:off x="1107736" y="3931625"/>
             <a:ext cx="1025496" cy="385554"/>
           </a:xfrm>
           <a:prstGeom prst="rect">
@@ -21127,13 +21097,13 @@
       </p:sp>
       <p:sp>
         <p:nvSpPr>
-          <p:cNvPr id="18" name="PDF_TEXT_GROUP_359"/>
-          <p:cNvSpPr txBox="1"/>
-          <p:nvPr/>
-        </p:nvSpPr>
-        <p:spPr>
-          <a:xfrm>
-            <a:off x="9274534" y="3938766"/>
+          <p:cNvPr id="18" name="PDF_TEXT_GROUP_358"/>
+          <p:cNvSpPr txBox="1"/>
+          <p:nvPr/>
+        </p:nvSpPr>
+        <p:spPr>
+          <a:xfrm>
+            <a:off x="9274534" y="3931625"/>
             <a:ext cx="1341778" cy="385554"/>
           </a:xfrm>
           <a:prstGeom prst="rect">
@@ -21175,13 +21145,13 @@
       </p:sp>
       <p:sp>
         <p:nvSpPr>
-          <p:cNvPr id="19" name="PDF_TEXT_GROUP_360"/>
-          <p:cNvSpPr txBox="1"/>
-          <p:nvPr/>
-        </p:nvSpPr>
-        <p:spPr>
-          <a:xfrm>
-            <a:off x="10821410" y="3938766"/>
+          <p:cNvPr id="19" name="PDF_TEXT_GROUP_359"/>
+          <p:cNvSpPr txBox="1"/>
+          <p:nvPr/>
+        </p:nvSpPr>
+        <p:spPr>
+          <a:xfrm>
+            <a:off x="10821410" y="3931625"/>
             <a:ext cx="1341778" cy="385554"/>
           </a:xfrm>
           <a:prstGeom prst="rect">
@@ -21223,13 +21193,13 @@
       </p:sp>
       <p:sp>
         <p:nvSpPr>
-          <p:cNvPr id="20" name="PDF_TEXT_GROUP_361"/>
-          <p:cNvSpPr txBox="1"/>
-          <p:nvPr/>
-        </p:nvSpPr>
-        <p:spPr>
-          <a:xfrm>
-            <a:off x="12368286" y="3938766"/>
+          <p:cNvPr id="20" name="PDF_TEXT_GROUP_360"/>
+          <p:cNvSpPr txBox="1"/>
+          <p:nvPr/>
+        </p:nvSpPr>
+        <p:spPr>
+          <a:xfrm>
+            <a:off x="12368286" y="3931625"/>
             <a:ext cx="1341778" cy="385554"/>
           </a:xfrm>
           <a:prstGeom prst="rect">
@@ -21271,14 +21241,14 @@
       </p:sp>
       <p:sp>
         <p:nvSpPr>
-          <p:cNvPr id="21" name="PDF_TEXT_GROUP_362"/>
-          <p:cNvSpPr txBox="1"/>
-          <p:nvPr/>
-        </p:nvSpPr>
-        <p:spPr>
-          <a:xfrm>
-            <a:off x="1123808" y="5186553"/>
-            <a:ext cx="11908082" cy="828844"/>
+          <p:cNvPr id="21" name="PDF_TEXT_GROUP_361"/>
+          <p:cNvSpPr txBox="1"/>
+          <p:nvPr/>
+        </p:nvSpPr>
+        <p:spPr>
+          <a:xfrm>
+            <a:off x="1123808" y="5179411"/>
+            <a:ext cx="11376445" cy="828844"/>
           </a:xfrm>
           <a:prstGeom prst="rect">
             <a:avLst/>
@@ -21312,7 +21282,7 @@
                 </a:solidFill>
                 <a:latin typeface="Latin Modern Sans"/>
               </a:rPr>
-              <a:t>These overall controls do not establish NDNSF superiority. The next slide examines the</a:t>
+              <a:t>No overall NDNSF advantage is established. The next slide uses a separate holdout</a:t>
             </a:r>
             <a:r>
               <a:rPr sz="2371" b="0" i="0">
@@ -21321,14 +21291,14 @@
                 </a:solidFill>
                 <a:latin typeface="Latin Modern Sans"/>
               </a:rPr>
-              <a:t> separately registered switching subset, not all requests.</a:t>
-            </a:r>
-          </a:p>
-        </p:txBody>
-      </p:sp>
-      <p:sp>
-        <p:nvSpPr>
-          <p:cNvPr id="22" name="PDF_TEXT_GROUP_363"/>
+              <a:t> campaign (seeds 72–81), not a subset of these runs.</a:t>
+            </a:r>
+          </a:p>
+        </p:txBody>
+      </p:sp>
+      <p:sp>
+        <p:nvSpPr>
+          <p:cNvPr id="22" name="PDF_TEXT_GROUP_362"/>
           <p:cNvSpPr txBox="1"/>
           <p:nvPr/>
         </p:nvSpPr>
@@ -21376,7 +21346,7 @@
       </p:sp>
       <p:sp>
         <p:nvSpPr>
-          <p:cNvPr id="23" name="PDF_TEXT_GROUP_364"/>
+          <p:cNvPr id="23" name="PDF_TEXT_GROUP_363"/>
           <p:cNvSpPr txBox="1"/>
           <p:nvPr/>
         </p:nvSpPr>
@@ -21424,7 +21394,7 @@
       </p:sp>
       <p:sp>
         <p:nvSpPr>
-          <p:cNvPr id="24" name="PDF_TEXT_GROUP_365"/>
+          <p:cNvPr id="24" name="PDF_TEXT_GROUP_364"/>
           <p:cNvSpPr txBox="1"/>
           <p:nvPr/>
         </p:nvSpPr>
@@ -21472,7 +21442,7 @@
       </p:sp>
       <p:sp>
         <p:nvSpPr>
-          <p:cNvPr id="25" name="PDF_TEXT_GROUP_366"/>
+          <p:cNvPr id="25" name="PDF_TEXT_GROUP_365"/>
           <p:cNvSpPr txBox="1"/>
           <p:nvPr/>
         </p:nvSpPr>
@@ -21520,7 +21490,7 @@
       </p:sp>
       <p:sp>
         <p:nvSpPr>
-          <p:cNvPr id="26" name="PDF_TEXT_GROUP_367"/>
+          <p:cNvPr id="26" name="PDF_TEXT_GROUP_366"/>
           <p:cNvSpPr txBox="1"/>
           <p:nvPr/>
         </p:nvSpPr>
@@ -21610,7 +21580,7 @@
       </p:pic>
       <p:sp>
         <p:nvSpPr>
-          <p:cNvPr id="3" name="PDF_TEXT_GROUP_368"/>
+          <p:cNvPr id="3" name="PDF_TEXT_GROUP_367"/>
           <p:cNvSpPr txBox="1"/>
           <p:nvPr/>
         </p:nvSpPr>
@@ -21658,14 +21628,14 @@
       </p:sp>
       <p:sp>
         <p:nvSpPr>
-          <p:cNvPr id="4" name="PDF_TEXT_GROUP_369"/>
-          <p:cNvSpPr txBox="1"/>
-          <p:nvPr/>
-        </p:nvSpPr>
-        <p:spPr>
-          <a:xfrm>
-            <a:off x="914808" y="1793523"/>
-            <a:ext cx="12780726" cy="828844"/>
+          <p:cNvPr id="4" name="PDF_TEXT_GROUP_368"/>
+          <p:cNvSpPr txBox="1"/>
+          <p:nvPr/>
+        </p:nvSpPr>
+        <p:spPr>
+          <a:xfrm>
+            <a:off x="914808" y="1808162"/>
+            <a:ext cx="13105343" cy="385554"/>
           </a:xfrm>
           <a:prstGeom prst="rect">
             <a:avLst/>
@@ -21699,8 +21669,47 @@
                 </a:solidFill>
                 <a:latin typeface="Latin Modern Sans"/>
               </a:rPr>
-              <a:t>Ten seeds; four Providers/system; 100 m, 2 m/s; 1,312 matched requests requiring a Provider</a:t>
-            </a:r>
+              <a:t>Seeds 72–81; four Providers/system; 100 m, 2 m/s; 1,312 aligned switching requests. [28]</a:t>
+            </a:r>
+          </a:p>
+        </p:txBody>
+      </p:sp>
+      <p:sp>
+        <p:nvSpPr>
+          <p:cNvPr id="5" name="PDF_TEXT_GROUP_369"/>
+          <p:cNvSpPr txBox="1"/>
+          <p:nvPr/>
+        </p:nvSpPr>
+        <p:spPr>
+          <a:xfrm>
+            <a:off x="1107736" y="2321133"/>
+            <a:ext cx="1750754" cy="385554"/>
+          </a:xfrm>
+          <a:prstGeom prst="rect">
+            <a:avLst/>
+          </a:prstGeom>
+          <a:noFill/>
+          <a:ln>
+            <a:noFill/>
+          </a:ln>
+        </p:spPr>
+        <p:txBody>
+          <a:bodyPr wrap="square" anchor="t" lIns="0" rIns="0" tIns="0" bIns="0">
+            <a:noAutofit/>
+          </a:bodyPr>
+          <a:lstStyle/>
+          <a:p>
+            <a:pPr algn="l">
+              <a:lnSpc>
+                <a:spcPct val="100000"/>
+              </a:lnSpc>
+              <a:spcBef>
+                <a:spcPts val="0"/>
+              </a:spcBef>
+              <a:spcAft>
+                <a:spcPts val="0"/>
+              </a:spcAft>
+            </a:pPr>
             <a:r>
               <a:rPr sz="2371" b="0" i="0">
                 <a:solidFill>
@@ -21708,21 +21717,21 @@
                 </a:solidFill>
                 <a:latin typeface="Latin Modern Sans"/>
               </a:rPr>
-              <a:t> switch. [28]</a:t>
-            </a:r>
-          </a:p>
-        </p:txBody>
-      </p:sp>
-      <p:sp>
-        <p:nvSpPr>
-          <p:cNvPr id="5" name="PDF_TEXT_GROUP_370"/>
-          <p:cNvSpPr txBox="1"/>
-          <p:nvPr/>
-        </p:nvSpPr>
-        <p:spPr>
-          <a:xfrm>
-            <a:off x="1107736" y="2692855"/>
-            <a:ext cx="1750754" cy="385554"/>
+              <a:t>Comparison</a:t>
+            </a:r>
+          </a:p>
+        </p:txBody>
+      </p:sp>
+      <p:sp>
+        <p:nvSpPr>
+          <p:cNvPr id="6" name="PDF_TEXT_GROUP_370"/>
+          <p:cNvSpPr txBox="1"/>
+          <p:nvPr/>
+        </p:nvSpPr>
+        <p:spPr>
+          <a:xfrm>
+            <a:off x="7937869" y="2321133"/>
+            <a:ext cx="2819102" cy="385554"/>
           </a:xfrm>
           <a:prstGeom prst="rect">
             <a:avLst/>
@@ -21756,21 +21765,21 @@
                 </a:solidFill>
                 <a:latin typeface="Latin Modern Sans"/>
               </a:rPr>
-              <a:t>Comparison</a:t>
-            </a:r>
-          </a:p>
-        </p:txBody>
-      </p:sp>
-      <p:sp>
-        <p:nvSpPr>
-          <p:cNvPr id="6" name="PDF_TEXT_GROUP_371"/>
-          <p:cNvSpPr txBox="1"/>
-          <p:nvPr/>
-        </p:nvSpPr>
-        <p:spPr>
-          <a:xfrm>
-            <a:off x="7937869" y="2692855"/>
-            <a:ext cx="2819102" cy="385554"/>
+              <a:t>Seed-p95 difference</a:t>
+            </a:r>
+          </a:p>
+        </p:txBody>
+      </p:sp>
+      <p:sp>
+        <p:nvSpPr>
+          <p:cNvPr id="7" name="PDF_TEXT_GROUP_371"/>
+          <p:cNvSpPr txBox="1"/>
+          <p:nvPr/>
+        </p:nvSpPr>
+        <p:spPr>
+          <a:xfrm>
+            <a:off x="12538050" y="2321133"/>
+            <a:ext cx="1171982" cy="385554"/>
           </a:xfrm>
           <a:prstGeom prst="rect">
             <a:avLst/>
@@ -21804,21 +21813,21 @@
                 </a:solidFill>
                 <a:latin typeface="Latin Modern Sans"/>
               </a:rPr>
-              <a:t>Seed-p95 difference</a:t>
-            </a:r>
-          </a:p>
-        </p:txBody>
-      </p:sp>
-      <p:sp>
-        <p:nvSpPr>
-          <p:cNvPr id="7" name="PDF_TEXT_GROUP_372"/>
-          <p:cNvSpPr txBox="1"/>
-          <p:nvPr/>
-        </p:nvSpPr>
-        <p:spPr>
-          <a:xfrm>
-            <a:off x="12538050" y="2692855"/>
-            <a:ext cx="1171982" cy="385554"/>
+              <a:t>95% CI</a:t>
+            </a:r>
+          </a:p>
+        </p:txBody>
+      </p:sp>
+      <p:sp>
+        <p:nvSpPr>
+          <p:cNvPr id="8" name="PDF_TEXT_GROUP_372"/>
+          <p:cNvSpPr txBox="1"/>
+          <p:nvPr/>
+        </p:nvSpPr>
+        <p:spPr>
+          <a:xfrm>
+            <a:off x="9330171" y="2871464"/>
+            <a:ext cx="1398901" cy="394278"/>
           </a:xfrm>
           <a:prstGeom prst="rect">
             <a:avLst/>
@@ -21850,54 +21859,129 @@
                 <a:solidFill>
                   <a:srgbClr val="000000"/>
                 </a:solidFill>
-                <a:latin typeface="Latin Modern Sans"/>
-              </a:rPr>
-              <a:t>95% CI</a:t>
-            </a:r>
-          </a:p>
-        </p:txBody>
-      </p:sp>
-      <p:sp>
-        <p:nvSpPr>
-          <p:cNvPr id="8" name="PDF_TEXT_GROUP_373"/>
-          <p:cNvSpPr txBox="1"/>
-          <p:nvPr/>
-        </p:nvSpPr>
-        <p:spPr>
-          <a:xfrm>
-            <a:off x="9330171" y="3243185"/>
-            <a:ext cx="1398901" cy="394278"/>
-          </a:xfrm>
-          <a:prstGeom prst="rect">
-            <a:avLst/>
-          </a:prstGeom>
-          <a:noFill/>
-          <a:ln>
-            <a:noFill/>
-          </a:ln>
-        </p:spPr>
-        <p:txBody>
-          <a:bodyPr wrap="square" anchor="t" lIns="0" rIns="0" tIns="0" bIns="0">
-            <a:noAutofit/>
-          </a:bodyPr>
-          <a:lstStyle/>
-          <a:p>
-            <a:pPr algn="l">
-              <a:lnSpc>
-                <a:spcPct val="100000"/>
-              </a:lnSpc>
-              <a:spcBef>
-                <a:spcPts val="0"/>
-              </a:spcBef>
-              <a:spcAft>
-                <a:spcPts val="0"/>
-              </a:spcAft>
-            </a:pPr>
+                <a:latin typeface="Cambria Math"/>
+              </a:rPr>
+              <a:t>−</a:t>
+            </a:r>
             <a:r>
               <a:rPr sz="2371" b="0" i="0">
                 <a:solidFill>
                   <a:srgbClr val="000000"/>
                 </a:solidFill>
+                <a:latin typeface="Latin Modern Roman"/>
+              </a:rPr>
+              <a:t>597</a:t>
+            </a:r>
+            <a:r>
+              <a:rPr sz="2371" b="0" i="0">
+                <a:solidFill>
+                  <a:srgbClr val="000000"/>
+                </a:solidFill>
+                <a:latin typeface="Latin Modern Sans"/>
+              </a:rPr>
+              <a:t> ms</a:t>
+            </a:r>
+          </a:p>
+        </p:txBody>
+      </p:sp>
+      <p:sp>
+        <p:nvSpPr>
+          <p:cNvPr id="9" name="PDF_TEXT_GROUP_374"/>
+          <p:cNvSpPr txBox="1"/>
+          <p:nvPr/>
+        </p:nvSpPr>
+        <p:spPr>
+          <a:xfrm>
+            <a:off x="1107736" y="2889492"/>
+            <a:ext cx="4118211" cy="385554"/>
+          </a:xfrm>
+          <a:prstGeom prst="rect">
+            <a:avLst/>
+          </a:prstGeom>
+          <a:noFill/>
+          <a:ln>
+            <a:noFill/>
+          </a:ln>
+        </p:spPr>
+        <p:txBody>
+          <a:bodyPr wrap="square" anchor="t" lIns="0" rIns="0" tIns="0" bIns="0">
+            <a:noAutofit/>
+          </a:bodyPr>
+          <a:lstStyle/>
+          <a:p>
+            <a:pPr algn="l">
+              <a:lnSpc>
+                <a:spcPct val="100000"/>
+              </a:lnSpc>
+              <a:spcBef>
+                <a:spcPts val="0"/>
+              </a:spcBef>
+              <a:spcAft>
+                <a:spcPts val="0"/>
+              </a:spcAft>
+            </a:pPr>
+            <a:r>
+              <a:rPr sz="2371" b="0" i="0">
+                <a:solidFill>
+                  <a:srgbClr val="000000"/>
+                </a:solidFill>
+                <a:latin typeface="Latin Modern Sans"/>
+              </a:rPr>
+              <a:t>NDNSF minus gRPC-SEQ-4</a:t>
+            </a:r>
+          </a:p>
+        </p:txBody>
+      </p:sp>
+      <p:sp>
+        <p:nvSpPr>
+          <p:cNvPr id="10" name="PDF_TEXT_GROUP_373"/>
+          <p:cNvSpPr txBox="1"/>
+          <p:nvPr/>
+        </p:nvSpPr>
+        <p:spPr>
+          <a:xfrm>
+            <a:off x="11255736" y="2871464"/>
+            <a:ext cx="2455552" cy="394278"/>
+          </a:xfrm>
+          <a:prstGeom prst="rect">
+            <a:avLst/>
+          </a:prstGeom>
+          <a:noFill/>
+          <a:ln>
+            <a:noFill/>
+          </a:ln>
+        </p:spPr>
+        <p:txBody>
+          <a:bodyPr wrap="square" anchor="t" lIns="0" rIns="0" tIns="0" bIns="0">
+            <a:noAutofit/>
+          </a:bodyPr>
+          <a:lstStyle/>
+          <a:p>
+            <a:pPr algn="l">
+              <a:lnSpc>
+                <a:spcPct val="100000"/>
+              </a:lnSpc>
+              <a:spcBef>
+                <a:spcPts val="0"/>
+              </a:spcBef>
+              <a:spcAft>
+                <a:spcPts val="0"/>
+              </a:spcAft>
+            </a:pPr>
+            <a:r>
+              <a:rPr sz="2371" b="0" i="0">
+                <a:solidFill>
+                  <a:srgbClr val="000000"/>
+                </a:solidFill>
+                <a:latin typeface="Latin Modern Roman"/>
+              </a:rPr>
+              <a:t>[</a:t>
+            </a:r>
+            <a:r>
+              <a:rPr sz="2371" b="0" i="0">
+                <a:solidFill>
+                  <a:srgbClr val="000000"/>
+                </a:solidFill>
                 <a:latin typeface="Cambria Math"/>
               </a:rPr>
               <a:t>−</a:t>
@@ -21909,13 +21993,40 @@
                 </a:solidFill>
                 <a:latin typeface="Latin Modern Roman"/>
               </a:rPr>
-              <a:t>597</a:t>
+              <a:t>992</a:t>
+            </a:r>
+            <a:r>
+              <a:rPr sz="2371" b="0" i="1">
+                <a:solidFill>
+                  <a:srgbClr val="000000"/>
+                </a:solidFill>
+                <a:latin typeface="Cambria Math"/>
+              </a:rPr>
+              <a:t>,</a:t>
             </a:r>
             <a:r>
               <a:rPr sz="2371" b="0" i="0">
                 <a:solidFill>
                   <a:srgbClr val="000000"/>
                 </a:solidFill>
+                <a:latin typeface="Cambria Math"/>
+              </a:rPr>
+              <a:t> −</a:t>
+            </a:r>
+            <a:r>
+              <a:rPr sz="2371" b="0" i="0">
+                <a:solidFill>
+                  <a:srgbClr val="000000"/>
+                </a:solidFill>
+                <a:latin typeface="Latin Modern Roman"/>
+              </a:rPr>
+              <a:t>200]</a:t>
+            </a:r>
+            <a:r>
+              <a:rPr sz="2371" b="0" i="0">
+                <a:solidFill>
+                  <a:srgbClr val="000000"/>
+                </a:solidFill>
                 <a:latin typeface="Latin Modern Sans"/>
               </a:rPr>
               <a:t> ms</a:t>
@@ -21925,14 +22036,14 @@
       </p:sp>
       <p:sp>
         <p:nvSpPr>
-          <p:cNvPr id="9" name="PDF_TEXT_GROUP_375"/>
-          <p:cNvSpPr txBox="1"/>
-          <p:nvPr/>
-        </p:nvSpPr>
-        <p:spPr>
-          <a:xfrm>
-            <a:off x="1107736" y="3261214"/>
-            <a:ext cx="4118211" cy="385554"/>
+          <p:cNvPr id="11" name="PDF_TEXT_GROUP_375"/>
+          <p:cNvSpPr txBox="1"/>
+          <p:nvPr/>
+        </p:nvSpPr>
+        <p:spPr>
+          <a:xfrm>
+            <a:off x="9169388" y="3439823"/>
+            <a:ext cx="1559685" cy="394278"/>
           </a:xfrm>
           <a:prstGeom prst="rect">
             <a:avLst/>
@@ -21964,49 +22075,10 @@
                 <a:solidFill>
                   <a:srgbClr val="000000"/>
                 </a:solidFill>
-                <a:latin typeface="Latin Modern Sans"/>
-              </a:rPr>
-              <a:t>NDNSF minus gRPC-SEQ-4</a:t>
-            </a:r>
-          </a:p>
-        </p:txBody>
-      </p:sp>
-      <p:sp>
-        <p:nvSpPr>
-          <p:cNvPr id="10" name="PDF_TEXT_GROUP_374"/>
-          <p:cNvSpPr txBox="1"/>
-          <p:nvPr/>
-        </p:nvSpPr>
-        <p:spPr>
-          <a:xfrm>
-            <a:off x="11255736" y="3243185"/>
-            <a:ext cx="2455552" cy="394278"/>
-          </a:xfrm>
-          <a:prstGeom prst="rect">
-            <a:avLst/>
-          </a:prstGeom>
-          <a:noFill/>
-          <a:ln>
-            <a:noFill/>
-          </a:ln>
-        </p:spPr>
-        <p:txBody>
-          <a:bodyPr wrap="square" anchor="t" lIns="0" rIns="0" tIns="0" bIns="0">
-            <a:noAutofit/>
-          </a:bodyPr>
-          <a:lstStyle/>
-          <a:p>
-            <a:pPr algn="l">
-              <a:lnSpc>
-                <a:spcPct val="100000"/>
-              </a:lnSpc>
-              <a:spcBef>
-                <a:spcPts val="0"/>
-              </a:spcBef>
-              <a:spcAft>
-                <a:spcPts val="0"/>
-              </a:spcAft>
-            </a:pPr>
+                <a:latin typeface="Cambria Math"/>
+              </a:rPr>
+              <a:t>−</a:t>
+            </a:r>
             <a:r>
               <a:rPr sz="2371" b="0" i="0">
                 <a:solidFill>
@@ -22014,6 +22086,111 @@
                 </a:solidFill>
                 <a:latin typeface="Latin Modern Roman"/>
               </a:rPr>
+              <a:t>2618</a:t>
+            </a:r>
+            <a:r>
+              <a:rPr sz="2371" b="0" i="0">
+                <a:solidFill>
+                  <a:srgbClr val="000000"/>
+                </a:solidFill>
+                <a:latin typeface="Latin Modern Sans"/>
+              </a:rPr>
+              <a:t> ms</a:t>
+            </a:r>
+          </a:p>
+        </p:txBody>
+      </p:sp>
+      <p:sp>
+        <p:nvSpPr>
+          <p:cNvPr id="12" name="PDF_TEXT_GROUP_377"/>
+          <p:cNvSpPr txBox="1"/>
+          <p:nvPr/>
+        </p:nvSpPr>
+        <p:spPr>
+          <a:xfrm>
+            <a:off x="1107736" y="3457852"/>
+            <a:ext cx="3165373" cy="385554"/>
+          </a:xfrm>
+          <a:prstGeom prst="rect">
+            <a:avLst/>
+          </a:prstGeom>
+          <a:noFill/>
+          <a:ln>
+            <a:noFill/>
+          </a:ln>
+        </p:spPr>
+        <p:txBody>
+          <a:bodyPr wrap="square" anchor="t" lIns="0" rIns="0" tIns="0" bIns="0">
+            <a:noAutofit/>
+          </a:bodyPr>
+          <a:lstStyle/>
+          <a:p>
+            <a:pPr algn="l">
+              <a:lnSpc>
+                <a:spcPct val="100000"/>
+              </a:lnSpc>
+              <a:spcBef>
+                <a:spcPts val="0"/>
+              </a:spcBef>
+              <a:spcAft>
+                <a:spcPts val="0"/>
+              </a:spcAft>
+            </a:pPr>
+            <a:r>
+              <a:rPr sz="2371" b="0" i="0">
+                <a:solidFill>
+                  <a:srgbClr val="000000"/>
+                </a:solidFill>
+                <a:latin typeface="Latin Modern Sans"/>
+              </a:rPr>
+              <a:t>NDNSF minus NSC-4</a:t>
+            </a:r>
+          </a:p>
+        </p:txBody>
+      </p:sp>
+      <p:sp>
+        <p:nvSpPr>
+          <p:cNvPr id="13" name="PDF_TEXT_GROUP_376"/>
+          <p:cNvSpPr txBox="1"/>
+          <p:nvPr/>
+        </p:nvSpPr>
+        <p:spPr>
+          <a:xfrm>
+            <a:off x="10934201" y="3439823"/>
+            <a:ext cx="2802810" cy="394278"/>
+          </a:xfrm>
+          <a:prstGeom prst="rect">
+            <a:avLst/>
+          </a:prstGeom>
+          <a:noFill/>
+          <a:ln>
+            <a:noFill/>
+          </a:ln>
+        </p:spPr>
+        <p:txBody>
+          <a:bodyPr wrap="square" anchor="t" lIns="0" rIns="0" tIns="0" bIns="0">
+            <a:noAutofit/>
+          </a:bodyPr>
+          <a:lstStyle/>
+          <a:p>
+            <a:pPr algn="l">
+              <a:lnSpc>
+                <a:spcPct val="100000"/>
+              </a:lnSpc>
+              <a:spcBef>
+                <a:spcPts val="0"/>
+              </a:spcBef>
+              <a:spcAft>
+                <a:spcPts val="0"/>
+              </a:spcAft>
+            </a:pPr>
+            <a:r>
+              <a:rPr sz="2371" b="0" i="0">
+                <a:solidFill>
+                  <a:srgbClr val="000000"/>
+                </a:solidFill>
+                <a:latin typeface="Latin Modern Roman"/>
+              </a:rPr>
               <a:t>[</a:t>
             </a:r>
             <a:r>
@@ -22032,7 +22209,7 @@
                 </a:solidFill>
                 <a:latin typeface="Latin Modern Roman"/>
               </a:rPr>
-              <a:t>992</a:t>
+              <a:t>2916</a:t>
             </a:r>
             <a:r>
               <a:rPr sz="2371" b="0" i="1">
@@ -22059,7 +22236,7 @@
                 </a:solidFill>
                 <a:latin typeface="Latin Modern Roman"/>
               </a:rPr>
-              <a:t>200]</a:t>
+              <a:t>2315]</a:t>
             </a:r>
             <a:r>
               <a:rPr sz="2371" b="0" i="0">
@@ -22075,14 +22252,14 @@
       </p:sp>
       <p:sp>
         <p:nvSpPr>
-          <p:cNvPr id="11" name="PDF_TEXT_GROUP_376"/>
-          <p:cNvSpPr txBox="1"/>
-          <p:nvPr/>
-        </p:nvSpPr>
-        <p:spPr>
-          <a:xfrm>
-            <a:off x="9169388" y="3811545"/>
-            <a:ext cx="1559685" cy="394278"/>
+          <p:cNvPr id="14" name="PDF_TEXT_GROUP_378"/>
+          <p:cNvSpPr txBox="1"/>
+          <p:nvPr/>
+        </p:nvSpPr>
+        <p:spPr>
+          <a:xfrm>
+            <a:off x="914808" y="4300147"/>
+            <a:ext cx="10017161" cy="385554"/>
           </a:xfrm>
           <a:prstGeom prst="rect">
             <a:avLst/>
@@ -22114,18 +22291,57 @@
                 <a:solidFill>
                   <a:srgbClr val="000000"/>
                 </a:solidFill>
-                <a:latin typeface="Cambria Math"/>
-              </a:rPr>
-              <a:t>−</a:t>
-            </a:r>
+                <a:latin typeface="Latin Modern Sans"/>
+              </a:rPr>
+              <a:t>Completed: NDNSF 1,311; gRPC 1,297; NSC 1,296 (of 1,312 each).</a:t>
+            </a:r>
+          </a:p>
+        </p:txBody>
+      </p:sp>
+      <p:sp>
+        <p:nvSpPr>
+          <p:cNvPr id="15" name="PDF_TEXT_GROUP_379"/>
+          <p:cNvSpPr txBox="1"/>
+          <p:nvPr/>
+        </p:nvSpPr>
+        <p:spPr>
+          <a:xfrm>
+            <a:off x="1123808" y="5238612"/>
+            <a:ext cx="12517463" cy="828844"/>
+          </a:xfrm>
+          <a:prstGeom prst="rect">
+            <a:avLst/>
+          </a:prstGeom>
+          <a:noFill/>
+          <a:ln>
+            <a:noFill/>
+          </a:ln>
+        </p:spPr>
+        <p:txBody>
+          <a:bodyPr wrap="square" anchor="t" lIns="0" rIns="0" tIns="0" bIns="0">
+            <a:noAutofit/>
+          </a:bodyPr>
+          <a:lstStyle/>
+          <a:p>
+            <a:pPr algn="l">
+              <a:lnSpc>
+                <a:spcPct val="100000"/>
+              </a:lnSpc>
+              <a:spcBef>
+                <a:spcPts val="0"/>
+              </a:spcBef>
+              <a:spcAft>
+                <a:spcPts val="0"/>
+              </a:spcAft>
+            </a:pPr>
             <a:r>
               <a:rPr sz="2371" b="0" i="0">
                 <a:solidFill>
                   <a:srgbClr val="000000"/>
                 </a:solidFill>
-                <a:latin typeface="Latin Modern Roman"/>
-              </a:rPr>
-              <a:t>2618</a:t>
+                <a:latin typeface="Latin Modern Sans"/>
+              </a:rPr>
+              <a:t>Mean paired seed-p95 differences; each p95 uses that system’s successful requests. Different</a:t>
             </a:r>
             <a:r>
               <a:rPr sz="2371" b="0" i="0">
@@ -22134,221 +22350,14 @@
                 </a:solidFill>
                 <a:latin typeface="Latin Modern Sans"/>
               </a:rPr>
-              <a:t> ms</a:t>
-            </a:r>
-          </a:p>
-        </p:txBody>
-      </p:sp>
-      <p:sp>
-        <p:nvSpPr>
-          <p:cNvPr id="12" name="PDF_TEXT_GROUP_378"/>
-          <p:cNvSpPr txBox="1"/>
-          <p:nvPr/>
-        </p:nvSpPr>
-        <p:spPr>
-          <a:xfrm>
-            <a:off x="1107736" y="3829573"/>
-            <a:ext cx="3165373" cy="385554"/>
-          </a:xfrm>
-          <a:prstGeom prst="rect">
-            <a:avLst/>
-          </a:prstGeom>
-          <a:noFill/>
-          <a:ln>
-            <a:noFill/>
-          </a:ln>
-        </p:spPr>
-        <p:txBody>
-          <a:bodyPr wrap="square" anchor="t" lIns="0" rIns="0" tIns="0" bIns="0">
-            <a:noAutofit/>
-          </a:bodyPr>
-          <a:lstStyle/>
-          <a:p>
-            <a:pPr algn="l">
-              <a:lnSpc>
-                <a:spcPct val="100000"/>
-              </a:lnSpc>
-              <a:spcBef>
-                <a:spcPts val="0"/>
-              </a:spcBef>
-              <a:spcAft>
-                <a:spcPts val="0"/>
-              </a:spcAft>
-            </a:pPr>
-            <a:r>
-              <a:rPr sz="2371" b="0" i="0">
-                <a:solidFill>
-                  <a:srgbClr val="000000"/>
-                </a:solidFill>
-                <a:latin typeface="Latin Modern Sans"/>
-              </a:rPr>
-              <a:t>NDNSF minus NSC-4</a:t>
-            </a:r>
-          </a:p>
-        </p:txBody>
-      </p:sp>
-      <p:sp>
-        <p:nvSpPr>
-          <p:cNvPr id="13" name="PDF_TEXT_GROUP_377"/>
-          <p:cNvSpPr txBox="1"/>
-          <p:nvPr/>
-        </p:nvSpPr>
-        <p:spPr>
-          <a:xfrm>
-            <a:off x="10934201" y="3811545"/>
-            <a:ext cx="2802810" cy="394278"/>
-          </a:xfrm>
-          <a:prstGeom prst="rect">
-            <a:avLst/>
-          </a:prstGeom>
-          <a:noFill/>
-          <a:ln>
-            <a:noFill/>
-          </a:ln>
-        </p:spPr>
-        <p:txBody>
-          <a:bodyPr wrap="square" anchor="t" lIns="0" rIns="0" tIns="0" bIns="0">
-            <a:noAutofit/>
-          </a:bodyPr>
-          <a:lstStyle/>
-          <a:p>
-            <a:pPr algn="l">
-              <a:lnSpc>
-                <a:spcPct val="100000"/>
-              </a:lnSpc>
-              <a:spcBef>
-                <a:spcPts val="0"/>
-              </a:spcBef>
-              <a:spcAft>
-                <a:spcPts val="0"/>
-              </a:spcAft>
-            </a:pPr>
-            <a:r>
-              <a:rPr sz="2371" b="0" i="0">
-                <a:solidFill>
-                  <a:srgbClr val="000000"/>
-                </a:solidFill>
-                <a:latin typeface="Latin Modern Roman"/>
-              </a:rPr>
-              <a:t>[</a:t>
-            </a:r>
-            <a:r>
-              <a:rPr sz="2371" b="0" i="0">
-                <a:solidFill>
-                  <a:srgbClr val="000000"/>
-                </a:solidFill>
-                <a:latin typeface="Cambria Math"/>
-              </a:rPr>
-              <a:t>−</a:t>
-            </a:r>
-            <a:r>
-              <a:rPr sz="2371" b="0" i="0">
-                <a:solidFill>
-                  <a:srgbClr val="000000"/>
-                </a:solidFill>
-                <a:latin typeface="Latin Modern Roman"/>
-              </a:rPr>
-              <a:t>2916</a:t>
-            </a:r>
-            <a:r>
-              <a:rPr sz="2371" b="0" i="1">
-                <a:solidFill>
-                  <a:srgbClr val="000000"/>
-                </a:solidFill>
-                <a:latin typeface="Cambria Math"/>
-              </a:rPr>
-              <a:t>,</a:t>
-            </a:r>
-            <a:r>
-              <a:rPr sz="2371" b="0" i="0">
-                <a:solidFill>
-                  <a:srgbClr val="000000"/>
-                </a:solidFill>
-                <a:latin typeface="Cambria Math"/>
-              </a:rPr>
-              <a:t> −</a:t>
-            </a:r>
-            <a:r>
-              <a:rPr sz="2371" b="0" i="0">
-                <a:solidFill>
-                  <a:srgbClr val="000000"/>
-                </a:solidFill>
-                <a:latin typeface="Latin Modern Roman"/>
-              </a:rPr>
-              <a:t>2315]</a:t>
-            </a:r>
-            <a:r>
-              <a:rPr sz="2371" b="0" i="0">
-                <a:solidFill>
-                  <a:srgbClr val="000000"/>
-                </a:solidFill>
-                <a:latin typeface="Latin Modern Sans"/>
-              </a:rPr>
-              <a:t> ms</a:t>
-            </a:r>
-          </a:p>
-        </p:txBody>
-      </p:sp>
-      <p:sp>
-        <p:nvSpPr>
-          <p:cNvPr id="14" name="PDF_TEXT_GROUP_379"/>
-          <p:cNvSpPr txBox="1"/>
-          <p:nvPr/>
-        </p:nvSpPr>
-        <p:spPr>
-          <a:xfrm>
-            <a:off x="1123808" y="5077327"/>
-            <a:ext cx="12010712" cy="828877"/>
-          </a:xfrm>
-          <a:prstGeom prst="rect">
-            <a:avLst/>
-          </a:prstGeom>
-          <a:noFill/>
-          <a:ln>
-            <a:noFill/>
-          </a:ln>
-        </p:spPr>
-        <p:txBody>
-          <a:bodyPr wrap="square" anchor="t" lIns="0" rIns="0" tIns="0" bIns="0">
-            <a:noAutofit/>
-          </a:bodyPr>
-          <a:lstStyle/>
-          <a:p>
-            <a:pPr algn="l">
-              <a:lnSpc>
-                <a:spcPct val="100000"/>
-              </a:lnSpc>
-              <a:spcBef>
-                <a:spcPts val="0"/>
-              </a:spcBef>
-              <a:spcAft>
-                <a:spcPts val="0"/>
-              </a:spcAft>
-            </a:pPr>
-            <a:r>
-              <a:rPr sz="2371" b="0" i="0">
-                <a:solidFill>
-                  <a:srgbClr val="000000"/>
-                </a:solidFill>
-                <a:latin typeface="Latin Modern Sans"/>
-              </a:rPr>
-              <a:t>This is a conditional latency result, not general completion-rate superiority. Preserve the</a:t>
-            </a:r>
-            <a:r>
-              <a:rPr sz="2371" b="0" i="0">
-                <a:solidFill>
-                  <a:srgbClr val="000000"/>
-                </a:solidFill>
-                <a:latin typeface="Latin Modern Sans"/>
-              </a:rPr>
-              <a:t> registered subset definition, overall coverage controls, and failed requests.</a:t>
-            </a:r>
-          </a:p>
-        </p:txBody>
-      </p:sp>
-      <p:sp>
-        <p:nvSpPr>
-          <p:cNvPr id="15" name="PDF_TEXT_GROUP_380"/>
+              <a:t> failures limit the comparison; no general advantage is inferred.</a:t>
+            </a:r>
+          </a:p>
+        </p:txBody>
+      </p:sp>
+      <p:sp>
+        <p:nvSpPr>
+          <p:cNvPr id="16" name="PDF_TEXT_GROUP_380"/>
           <p:cNvSpPr txBox="1"/>
           <p:nvPr/>
         </p:nvSpPr>
@@ -22396,7 +22405,7 @@
       </p:sp>
       <p:sp>
         <p:nvSpPr>
-          <p:cNvPr id="16" name="PDF_TEXT_GROUP_381"/>
+          <p:cNvPr id="17" name="PDF_TEXT_GROUP_381"/>
           <p:cNvSpPr txBox="1"/>
           <p:nvPr/>
         </p:nvSpPr>
@@ -22444,7 +22453,7 @@
       </p:sp>
       <p:sp>
         <p:nvSpPr>
-          <p:cNvPr id="17" name="PDF_TEXT_GROUP_382"/>
+          <p:cNvPr id="18" name="PDF_TEXT_GROUP_382"/>
           <p:cNvSpPr txBox="1"/>
           <p:nvPr/>
         </p:nvSpPr>
@@ -22492,7 +22501,7 @@
       </p:sp>
       <p:sp>
         <p:nvSpPr>
-          <p:cNvPr id="18" name="PDF_TEXT_GROUP_383"/>
+          <p:cNvPr id="19" name="PDF_TEXT_GROUP_383"/>
           <p:cNvSpPr txBox="1"/>
           <p:nvPr/>
         </p:nvSpPr>
@@ -22540,7 +22549,7 @@
       </p:sp>
       <p:sp>
         <p:nvSpPr>
-          <p:cNvPr id="19" name="PDF_TEXT_GROUP_384"/>
+          <p:cNvPr id="20" name="PDF_TEXT_GROUP_384"/>
           <p:cNvSpPr txBox="1"/>
           <p:nvPr/>
         </p:nvSpPr>
@@ -22630,7 +22639,7 @@
       </p:pic>
       <p:sp>
         <p:nvSpPr>
-          <p:cNvPr id="3" name="PDF_TEXT_GROUP_22"/>
+          <p:cNvPr id="3" name="PDF_TEXT_GROUP_21"/>
           <p:cNvSpPr txBox="1"/>
           <p:nvPr/>
         </p:nvSpPr>
@@ -22678,7 +22687,7 @@
       </p:sp>
       <p:sp>
         <p:nvSpPr>
-          <p:cNvPr id="4" name="PDF_TEXT_GROUP_23"/>
+          <p:cNvPr id="4" name="PDF_TEXT_GROUP_22"/>
           <p:cNvSpPr txBox="1"/>
           <p:nvPr/>
         </p:nvSpPr>
@@ -22753,7 +22762,7 @@
       </p:sp>
       <p:sp>
         <p:nvSpPr>
-          <p:cNvPr id="5" name="PDF_TEXT_GROUP_24"/>
+          <p:cNvPr id="5" name="PDF_TEXT_GROUP_23"/>
           <p:cNvSpPr txBox="1"/>
           <p:nvPr/>
         </p:nvSpPr>
@@ -22828,7 +22837,7 @@
       </p:sp>
       <p:sp>
         <p:nvSpPr>
-          <p:cNvPr id="6" name="PDF_TEXT_GROUP_25"/>
+          <p:cNvPr id="6" name="PDF_TEXT_GROUP_24"/>
           <p:cNvSpPr txBox="1"/>
           <p:nvPr/>
         </p:nvSpPr>
@@ -22903,14 +22912,14 @@
       </p:sp>
       <p:sp>
         <p:nvSpPr>
-          <p:cNvPr id="7" name="PDF_TEXT_GROUP_26"/>
+          <p:cNvPr id="7" name="PDF_TEXT_GROUP_25"/>
           <p:cNvSpPr txBox="1"/>
           <p:nvPr/>
         </p:nvSpPr>
         <p:spPr>
           <a:xfrm>
             <a:off x="1143656" y="5622747"/>
-            <a:ext cx="12015159" cy="929891"/>
+            <a:ext cx="10968177" cy="929891"/>
           </a:xfrm>
           <a:prstGeom prst="rect">
             <a:avLst/>
@@ -22944,7 +22953,7 @@
                 </a:solidFill>
                 <a:latin typeface="Latin Modern Sans"/>
               </a:rPr>
-              <a:t>The contribution must explain the mechanism and its cost, not just demonstrate</a:t>
+              <a:t>The research connects participation decisions to authorized execution and</a:t>
             </a:r>
             <a:r>
               <a:rPr sz="2710" b="0" i="0">
@@ -22953,14 +22962,14 @@
                 </a:solidFill>
                 <a:latin typeface="Latin Modern Sans"/>
               </a:rPr>
-              <a:t> that two UAVs can exchange images.</a:t>
-            </a:r>
-          </a:p>
-        </p:txBody>
-      </p:sp>
-      <p:sp>
-        <p:nvSpPr>
-          <p:cNvPr id="8" name="PDF_TEXT_GROUP_27"/>
+              <a:t> task-specific input checks, then measures the cost.</a:t>
+            </a:r>
+          </a:p>
+        </p:txBody>
+      </p:sp>
+      <p:sp>
+        <p:nvSpPr>
+          <p:cNvPr id="8" name="PDF_TEXT_GROUP_26"/>
           <p:cNvSpPr txBox="1"/>
           <p:nvPr/>
         </p:nvSpPr>
@@ -23008,7 +23017,7 @@
       </p:sp>
       <p:sp>
         <p:nvSpPr>
-          <p:cNvPr id="9" name="PDF_TEXT_GROUP_28"/>
+          <p:cNvPr id="9" name="PDF_TEXT_GROUP_27"/>
           <p:cNvSpPr txBox="1"/>
           <p:nvPr/>
         </p:nvSpPr>
@@ -23056,7 +23065,7 @@
       </p:sp>
       <p:sp>
         <p:nvSpPr>
-          <p:cNvPr id="10" name="PDF_TEXT_GROUP_29"/>
+          <p:cNvPr id="10" name="PDF_TEXT_GROUP_28"/>
           <p:cNvSpPr txBox="1"/>
           <p:nvPr/>
         </p:nvSpPr>
@@ -23104,7 +23113,7 @@
       </p:sp>
       <p:sp>
         <p:nvSpPr>
-          <p:cNvPr id="11" name="PDF_TEXT_GROUP_30"/>
+          <p:cNvPr id="11" name="PDF_TEXT_GROUP_29"/>
           <p:cNvSpPr txBox="1"/>
           <p:nvPr/>
         </p:nvSpPr>
@@ -23152,7 +23161,7 @@
       </p:sp>
       <p:sp>
         <p:nvSpPr>
-          <p:cNvPr id="12" name="PDF_TEXT_GROUP_31"/>
+          <p:cNvPr id="12" name="PDF_TEXT_GROUP_30"/>
           <p:cNvSpPr txBox="1"/>
           <p:nvPr/>
         </p:nvSpPr>
@@ -24259,7 +24268,7 @@
         </p:nvSpPr>
         <p:spPr>
           <a:xfrm>
-            <a:off x="914808" y="1827519"/>
+            <a:off x="914808" y="1710893"/>
             <a:ext cx="10845339" cy="385554"/>
           </a:xfrm>
           <a:prstGeom prst="rect">
@@ -24307,7 +24316,7 @@
         </p:nvSpPr>
         <p:spPr>
           <a:xfrm>
-            <a:off x="1107736" y="2340490"/>
+            <a:off x="1107736" y="2223864"/>
             <a:ext cx="1082630" cy="385554"/>
           </a:xfrm>
           <a:prstGeom prst="rect">
@@ -24355,7 +24364,7 @@
         </p:nvSpPr>
         <p:spPr>
           <a:xfrm>
-            <a:off x="10125828" y="2340490"/>
+            <a:off x="10125828" y="2223864"/>
             <a:ext cx="1980289" cy="385554"/>
           </a:xfrm>
           <a:prstGeom prst="rect">
@@ -24403,7 +24412,7 @@
         </p:nvSpPr>
         <p:spPr>
           <a:xfrm>
-            <a:off x="13041715" y="2340490"/>
+            <a:off x="13041715" y="2223864"/>
             <a:ext cx="668381" cy="385554"/>
           </a:xfrm>
           <a:prstGeom prst="rect">
@@ -24451,7 +24460,7 @@
         </p:nvSpPr>
         <p:spPr>
           <a:xfrm>
-            <a:off x="1107736" y="2908849"/>
+            <a:off x="1107736" y="2792224"/>
             <a:ext cx="5105184" cy="385554"/>
           </a:xfrm>
           <a:prstGeom prst="rect">
@@ -24499,7 +24508,7 @@
         </p:nvSpPr>
         <p:spPr>
           <a:xfrm>
-            <a:off x="10707109" y="2908849"/>
+            <a:off x="10707109" y="2792224"/>
             <a:ext cx="1398816" cy="385554"/>
           </a:xfrm>
           <a:prstGeom prst="rect">
@@ -24547,7 +24556,7 @@
         </p:nvSpPr>
         <p:spPr>
           <a:xfrm>
-            <a:off x="12311023" y="2908849"/>
+            <a:off x="12311023" y="2792224"/>
             <a:ext cx="1398816" cy="385554"/>
           </a:xfrm>
           <a:prstGeom prst="rect">
@@ -24595,7 +24604,7 @@
         </p:nvSpPr>
         <p:spPr>
           <a:xfrm>
-            <a:off x="1107736" y="3477209"/>
+            <a:off x="1107736" y="3360583"/>
             <a:ext cx="2209856" cy="385554"/>
           </a:xfrm>
           <a:prstGeom prst="rect">
@@ -24643,7 +24652,7 @@
         </p:nvSpPr>
         <p:spPr>
           <a:xfrm>
-            <a:off x="10707109" y="3477209"/>
+            <a:off x="10707109" y="3360583"/>
             <a:ext cx="1398816" cy="385554"/>
           </a:xfrm>
           <a:prstGeom prst="rect">
@@ -24691,7 +24700,7 @@
         </p:nvSpPr>
         <p:spPr>
           <a:xfrm>
-            <a:off x="12311023" y="3477209"/>
+            <a:off x="12311023" y="3360583"/>
             <a:ext cx="1399137" cy="385554"/>
           </a:xfrm>
           <a:prstGeom prst="rect">
@@ -24739,7 +24748,7 @@
         </p:nvSpPr>
         <p:spPr>
           <a:xfrm>
-            <a:off x="1123808" y="4738535"/>
+            <a:off x="1123808" y="4621909"/>
             <a:ext cx="12024055" cy="828844"/>
           </a:xfrm>
           <a:prstGeom prst="rect">
@@ -24796,8 +24805,8 @@
         </p:nvSpPr>
         <p:spPr>
           <a:xfrm>
-            <a:off x="914808" y="6194392"/>
-            <a:ext cx="12479598" cy="302935"/>
+            <a:off x="914808" y="6077766"/>
+            <a:ext cx="13699123" cy="302935"/>
           </a:xfrm>
           <a:prstGeom prst="rect">
             <a:avLst/>
@@ -24831,7 +24840,7 @@
                 </a:solidFill>
                 <a:latin typeface="Latin Modern Sans"/>
               </a:rPr>
-              <a:t>This campaign does not validate the newer canonical-layer, tensor/hybrid or multi-accelerator design.</a:t>
+              <a:t>Retained historical diagnostic; raw-run/model provenance remains to be rechecked. Not evidence for the newer</a:t>
             </a:r>
           </a:p>
         </p:txBody>
@@ -24839,6 +24848,54 @@
       <p:sp>
         <p:nvSpPr>
           <p:cNvPr id="16" name="PDF_TEXT_GROUP_417"/>
+          <p:cNvSpPr txBox="1"/>
+          <p:nvPr/>
+        </p:nvSpPr>
+        <p:spPr>
+          <a:xfrm>
+            <a:off x="914808" y="6566824"/>
+            <a:ext cx="2256203" cy="302935"/>
+          </a:xfrm>
+          <a:prstGeom prst="rect">
+            <a:avLst/>
+          </a:prstGeom>
+          <a:noFill/>
+          <a:ln>
+            <a:noFill/>
+          </a:ln>
+        </p:spPr>
+        <p:txBody>
+          <a:bodyPr wrap="square" anchor="t" lIns="0" rIns="0" tIns="0" bIns="0">
+            <a:noAutofit/>
+          </a:bodyPr>
+          <a:lstStyle/>
+          <a:p>
+            <a:pPr algn="l">
+              <a:lnSpc>
+                <a:spcPct val="100000"/>
+              </a:lnSpc>
+              <a:spcBef>
+                <a:spcPts val="0"/>
+              </a:spcBef>
+              <a:spcAft>
+                <a:spcPts val="0"/>
+              </a:spcAft>
+            </a:pPr>
+            <a:r>
+              <a:rPr sz="1863" b="0" i="0">
+                <a:solidFill>
+                  <a:srgbClr val="000000"/>
+                </a:solidFill>
+                <a:latin typeface="Latin Modern Sans"/>
+              </a:rPr>
+              <a:t>distributed design.</a:t>
+            </a:r>
+          </a:p>
+        </p:txBody>
+      </p:sp>
+      <p:sp>
+        <p:nvSpPr>
+          <p:cNvPr id="17" name="PDF_TEXT_GROUP_418"/>
           <p:cNvSpPr txBox="1"/>
           <p:nvPr/>
         </p:nvSpPr>
@@ -24886,7 +24943,7 @@
       </p:sp>
       <p:sp>
         <p:nvSpPr>
-          <p:cNvPr id="17" name="PDF_TEXT_GROUP_418"/>
+          <p:cNvPr id="18" name="PDF_TEXT_GROUP_419"/>
           <p:cNvSpPr txBox="1"/>
           <p:nvPr/>
         </p:nvSpPr>
@@ -24934,7 +24991,7 @@
       </p:sp>
       <p:sp>
         <p:nvSpPr>
-          <p:cNvPr id="18" name="PDF_TEXT_GROUP_419"/>
+          <p:cNvPr id="19" name="PDF_TEXT_GROUP_420"/>
           <p:cNvSpPr txBox="1"/>
           <p:nvPr/>
         </p:nvSpPr>
@@ -24982,7 +25039,7 @@
       </p:sp>
       <p:sp>
         <p:nvSpPr>
-          <p:cNvPr id="19" name="PDF_TEXT_GROUP_420"/>
+          <p:cNvPr id="20" name="PDF_TEXT_GROUP_421"/>
           <p:cNvSpPr txBox="1"/>
           <p:nvPr/>
         </p:nvSpPr>
@@ -25030,7 +25087,7 @@
       </p:sp>
       <p:sp>
         <p:nvSpPr>
-          <p:cNvPr id="20" name="PDF_TEXT_GROUP_421"/>
+          <p:cNvPr id="21" name="PDF_TEXT_GROUP_422"/>
           <p:cNvSpPr txBox="1"/>
           <p:nvPr/>
         </p:nvSpPr>
@@ -25120,7 +25177,7 @@
       </p:pic>
       <p:sp>
         <p:nvSpPr>
-          <p:cNvPr id="3" name="PDF_TEXT_GROUP_422"/>
+          <p:cNvPr id="3" name="PDF_TEXT_GROUP_423"/>
           <p:cNvSpPr txBox="1"/>
           <p:nvPr/>
         </p:nvSpPr>
@@ -25168,7 +25225,7 @@
       </p:sp>
       <p:sp>
         <p:nvSpPr>
-          <p:cNvPr id="4" name="PDF_TEXT_GROUP_423"/>
+          <p:cNvPr id="4" name="PDF_TEXT_GROUP_424"/>
           <p:cNvSpPr txBox="1"/>
           <p:nvPr/>
         </p:nvSpPr>
@@ -25216,7 +25273,7 @@
       </p:sp>
       <p:sp>
         <p:nvSpPr>
-          <p:cNvPr id="5" name="PDF_TEXT_GROUP_424"/>
+          <p:cNvPr id="5" name="PDF_TEXT_GROUP_425"/>
           <p:cNvSpPr txBox="1"/>
           <p:nvPr/>
         </p:nvSpPr>
@@ -25264,7 +25321,7 @@
       </p:sp>
       <p:sp>
         <p:nvSpPr>
-          <p:cNvPr id="6" name="PDF_TEXT_GROUP_425"/>
+          <p:cNvPr id="6" name="PDF_TEXT_GROUP_426"/>
           <p:cNvSpPr txBox="1"/>
           <p:nvPr/>
         </p:nvSpPr>
@@ -25312,7 +25369,7 @@
       </p:sp>
       <p:sp>
         <p:nvSpPr>
-          <p:cNvPr id="7" name="PDF_TEXT_GROUP_426"/>
+          <p:cNvPr id="7" name="PDF_TEXT_GROUP_427"/>
           <p:cNvSpPr txBox="1"/>
           <p:nvPr/>
         </p:nvSpPr>
@@ -25360,7 +25417,7 @@
       </p:sp>
       <p:sp>
         <p:nvSpPr>
-          <p:cNvPr id="8" name="PDF_TEXT_GROUP_427"/>
+          <p:cNvPr id="8" name="PDF_TEXT_GROUP_428"/>
           <p:cNvSpPr txBox="1"/>
           <p:nvPr/>
         </p:nvSpPr>
@@ -25408,7 +25465,7 @@
       </p:sp>
       <p:sp>
         <p:nvSpPr>
-          <p:cNvPr id="9" name="PDF_TEXT_GROUP_428"/>
+          <p:cNvPr id="9" name="PDF_TEXT_GROUP_429"/>
           <p:cNvSpPr txBox="1"/>
           <p:nvPr/>
         </p:nvSpPr>
@@ -25456,7 +25513,7 @@
       </p:sp>
       <p:sp>
         <p:nvSpPr>
-          <p:cNvPr id="10" name="PDF_TEXT_GROUP_429"/>
+          <p:cNvPr id="10" name="PDF_TEXT_GROUP_430"/>
           <p:cNvSpPr txBox="1"/>
           <p:nvPr/>
         </p:nvSpPr>
@@ -25513,7 +25570,7 @@
       </p:sp>
       <p:sp>
         <p:nvSpPr>
-          <p:cNvPr id="11" name="PDF_TEXT_GROUP_430"/>
+          <p:cNvPr id="11" name="PDF_TEXT_GROUP_431"/>
           <p:cNvSpPr txBox="1"/>
           <p:nvPr/>
         </p:nvSpPr>
@@ -25570,7 +25627,7 @@
       </p:sp>
       <p:sp>
         <p:nvSpPr>
-          <p:cNvPr id="12" name="PDF_TEXT_GROUP_431"/>
+          <p:cNvPr id="12" name="PDF_TEXT_GROUP_432"/>
           <p:cNvSpPr txBox="1"/>
           <p:nvPr/>
         </p:nvSpPr>
@@ -25618,7 +25675,7 @@
       </p:sp>
       <p:sp>
         <p:nvSpPr>
-          <p:cNvPr id="13" name="PDF_TEXT_GROUP_432"/>
+          <p:cNvPr id="13" name="PDF_TEXT_GROUP_433"/>
           <p:cNvSpPr txBox="1"/>
           <p:nvPr/>
         </p:nvSpPr>
@@ -25666,7 +25723,7 @@
       </p:sp>
       <p:sp>
         <p:nvSpPr>
-          <p:cNvPr id="14" name="PDF_TEXT_GROUP_433"/>
+          <p:cNvPr id="14" name="PDF_TEXT_GROUP_434"/>
           <p:cNvSpPr txBox="1"/>
           <p:nvPr/>
         </p:nvSpPr>
@@ -25714,7 +25771,7 @@
       </p:sp>
       <p:sp>
         <p:nvSpPr>
-          <p:cNvPr id="15" name="PDF_TEXT_GROUP_434"/>
+          <p:cNvPr id="15" name="PDF_TEXT_GROUP_435"/>
           <p:cNvSpPr txBox="1"/>
           <p:nvPr/>
         </p:nvSpPr>
@@ -25771,7 +25828,7 @@
       </p:sp>
       <p:sp>
         <p:nvSpPr>
-          <p:cNvPr id="16" name="PDF_TEXT_GROUP_435"/>
+          <p:cNvPr id="16" name="PDF_TEXT_GROUP_436"/>
           <p:cNvSpPr txBox="1"/>
           <p:nvPr/>
         </p:nvSpPr>
@@ -25819,7 +25876,7 @@
       </p:sp>
       <p:sp>
         <p:nvSpPr>
-          <p:cNvPr id="17" name="PDF_TEXT_GROUP_436"/>
+          <p:cNvPr id="17" name="PDF_TEXT_GROUP_437"/>
           <p:cNvSpPr txBox="1"/>
           <p:nvPr/>
         </p:nvSpPr>
@@ -25867,7 +25924,7 @@
       </p:sp>
       <p:sp>
         <p:nvSpPr>
-          <p:cNvPr id="18" name="PDF_TEXT_GROUP_437"/>
+          <p:cNvPr id="18" name="PDF_TEXT_GROUP_438"/>
           <p:cNvSpPr txBox="1"/>
           <p:nvPr/>
         </p:nvSpPr>
@@ -25915,7 +25972,7 @@
       </p:sp>
       <p:sp>
         <p:nvSpPr>
-          <p:cNvPr id="19" name="PDF_TEXT_GROUP_438"/>
+          <p:cNvPr id="19" name="PDF_TEXT_GROUP_439"/>
           <p:cNvSpPr txBox="1"/>
           <p:nvPr/>
         </p:nvSpPr>
@@ -25963,7 +26020,7 @@
       </p:sp>
       <p:sp>
         <p:nvSpPr>
-          <p:cNvPr id="20" name="PDF_TEXT_GROUP_439"/>
+          <p:cNvPr id="20" name="PDF_TEXT_GROUP_440"/>
           <p:cNvSpPr txBox="1"/>
           <p:nvPr/>
         </p:nvSpPr>
@@ -26020,7 +26077,7 @@
       </p:sp>
       <p:sp>
         <p:nvSpPr>
-          <p:cNvPr id="21" name="PDF_TEXT_GROUP_440"/>
+          <p:cNvPr id="21" name="PDF_TEXT_GROUP_441"/>
           <p:cNvSpPr txBox="1"/>
           <p:nvPr/>
         </p:nvSpPr>
@@ -26077,7 +26134,7 @@
       </p:sp>
       <p:sp>
         <p:nvSpPr>
-          <p:cNvPr id="22" name="PDF_TEXT_GROUP_441"/>
+          <p:cNvPr id="22" name="PDF_TEXT_GROUP_442"/>
           <p:cNvSpPr txBox="1"/>
           <p:nvPr/>
         </p:nvSpPr>
@@ -26125,7 +26182,7 @@
       </p:sp>
       <p:sp>
         <p:nvSpPr>
-          <p:cNvPr id="23" name="PDF_TEXT_GROUP_442"/>
+          <p:cNvPr id="23" name="PDF_TEXT_GROUP_443"/>
           <p:cNvSpPr txBox="1"/>
           <p:nvPr/>
         </p:nvSpPr>
@@ -26173,7 +26230,7 @@
       </p:sp>
       <p:sp>
         <p:nvSpPr>
-          <p:cNvPr id="24" name="PDF_TEXT_GROUP_443"/>
+          <p:cNvPr id="24" name="PDF_TEXT_GROUP_444"/>
           <p:cNvSpPr txBox="1"/>
           <p:nvPr/>
         </p:nvSpPr>
@@ -26221,7 +26278,7 @@
       </p:sp>
       <p:sp>
         <p:nvSpPr>
-          <p:cNvPr id="25" name="PDF_TEXT_GROUP_444"/>
+          <p:cNvPr id="25" name="PDF_TEXT_GROUP_445"/>
           <p:cNvSpPr txBox="1"/>
           <p:nvPr/>
         </p:nvSpPr>
@@ -26269,7 +26326,7 @@
       </p:sp>
       <p:sp>
         <p:nvSpPr>
-          <p:cNvPr id="26" name="PDF_TEXT_GROUP_445"/>
+          <p:cNvPr id="26" name="PDF_TEXT_GROUP_446"/>
           <p:cNvSpPr txBox="1"/>
           <p:nvPr/>
         </p:nvSpPr>
@@ -26317,7 +26374,7 @@
       </p:sp>
       <p:sp>
         <p:nvSpPr>
-          <p:cNvPr id="27" name="PDF_TEXT_GROUP_446"/>
+          <p:cNvPr id="27" name="PDF_TEXT_GROUP_447"/>
           <p:cNvSpPr txBox="1"/>
           <p:nvPr/>
         </p:nvSpPr>
@@ -26407,7 +26464,7 @@
       </p:pic>
       <p:sp>
         <p:nvSpPr>
-          <p:cNvPr id="3" name="PDF_TEXT_GROUP_447"/>
+          <p:cNvPr id="3" name="PDF_TEXT_GROUP_448"/>
           <p:cNvSpPr txBox="1"/>
           <p:nvPr/>
         </p:nvSpPr>
@@ -26455,13 +26512,13 @@
       </p:sp>
       <p:sp>
         <p:nvSpPr>
-          <p:cNvPr id="4" name="PDF_TEXT_GROUP_448"/>
-          <p:cNvSpPr txBox="1"/>
-          <p:nvPr/>
-        </p:nvSpPr>
-        <p:spPr>
-          <a:xfrm>
-            <a:off x="1107736" y="1248010"/>
+          <p:cNvPr id="4" name="PDF_TEXT_GROUP_449"/>
+          <p:cNvSpPr txBox="1"/>
+          <p:nvPr/>
+        </p:nvSpPr>
+        <p:spPr>
+          <a:xfrm>
+            <a:off x="1107736" y="1242581"/>
             <a:ext cx="2100795" cy="385554"/>
           </a:xfrm>
           <a:prstGeom prst="rect">
@@ -26503,14 +26560,14 @@
       </p:sp>
       <p:sp>
         <p:nvSpPr>
-          <p:cNvPr id="5" name="PDF_TEXT_GROUP_449"/>
-          <p:cNvSpPr txBox="1"/>
-          <p:nvPr/>
-        </p:nvSpPr>
-        <p:spPr>
-          <a:xfrm>
-            <a:off x="4695540" y="1248010"/>
-            <a:ext cx="2389330" cy="385554"/>
+          <p:cNvPr id="5" name="PDF_TEXT_GROUP_450"/>
+          <p:cNvSpPr txBox="1"/>
+          <p:nvPr/>
+        </p:nvSpPr>
+        <p:spPr>
+          <a:xfrm>
+            <a:off x="4695540" y="1242581"/>
+            <a:ext cx="2904489" cy="385554"/>
           </a:xfrm>
           <a:prstGeom prst="rect">
             <a:avLst/>
@@ -26544,20 +26601,20 @@
                 </a:solidFill>
                 <a:latin typeface="Latin Modern Sans"/>
               </a:rPr>
-              <a:t>Completion gate</a:t>
-            </a:r>
-          </a:p>
-        </p:txBody>
-      </p:sp>
-      <p:sp>
-        <p:nvSpPr>
-          <p:cNvPr id="6" name="PDF_TEXT_GROUP_450"/>
-          <p:cNvSpPr txBox="1"/>
-          <p:nvPr/>
-        </p:nvSpPr>
-        <p:spPr>
-          <a:xfrm>
-            <a:off x="1107736" y="1816370"/>
+              <a:t>Required deliverable</a:t>
+            </a:r>
+          </a:p>
+        </p:txBody>
+      </p:sp>
+      <p:sp>
+        <p:nvSpPr>
+          <p:cNvPr id="6" name="PDF_TEXT_GROUP_451"/>
+          <p:cNvSpPr txBox="1"/>
+          <p:nvPr/>
+        </p:nvSpPr>
+        <p:spPr>
+          <a:xfrm>
+            <a:off x="1107736" y="1810941"/>
             <a:ext cx="2360843" cy="385554"/>
           </a:xfrm>
           <a:prstGeom prst="rect">
@@ -26599,14 +26656,14 @@
       </p:sp>
       <p:sp>
         <p:nvSpPr>
-          <p:cNvPr id="7" name="PDF_TEXT_GROUP_451"/>
-          <p:cNvSpPr txBox="1"/>
-          <p:nvPr/>
-        </p:nvSpPr>
-        <p:spPr>
-          <a:xfrm>
-            <a:off x="4695454" y="1816370"/>
-            <a:ext cx="8545172" cy="828844"/>
+          <p:cNvPr id="7" name="PDF_TEXT_GROUP_452"/>
+          <p:cNvSpPr txBox="1"/>
+          <p:nvPr/>
+        </p:nvSpPr>
+        <p:spPr>
+          <a:xfrm>
+            <a:off x="4695454" y="1810941"/>
+            <a:ext cx="8545172" cy="828877"/>
           </a:xfrm>
           <a:prstGeom prst="rect">
             <a:avLst/>
@@ -26656,13 +26713,13 @@
       </p:sp>
       <p:sp>
         <p:nvSpPr>
-          <p:cNvPr id="8" name="PDF_TEXT_GROUP_452"/>
-          <p:cNvSpPr txBox="1"/>
-          <p:nvPr/>
-        </p:nvSpPr>
-        <p:spPr>
-          <a:xfrm>
-            <a:off x="1107736" y="2771057"/>
+          <p:cNvPr id="8" name="PDF_TEXT_GROUP_453"/>
+          <p:cNvSpPr txBox="1"/>
+          <p:nvPr/>
+        </p:nvSpPr>
+        <p:spPr>
+          <a:xfrm>
+            <a:off x="1107736" y="2765661"/>
             <a:ext cx="2735819" cy="828844"/>
           </a:xfrm>
           <a:prstGeom prst="rect">
@@ -26713,13 +26770,13 @@
       </p:sp>
       <p:sp>
         <p:nvSpPr>
-          <p:cNvPr id="9" name="PDF_TEXT_GROUP_453"/>
-          <p:cNvSpPr txBox="1"/>
-          <p:nvPr/>
-        </p:nvSpPr>
-        <p:spPr>
-          <a:xfrm>
-            <a:off x="4695454" y="2771057"/>
+          <p:cNvPr id="9" name="PDF_TEXT_GROUP_454"/>
+          <p:cNvSpPr txBox="1"/>
+          <p:nvPr/>
+        </p:nvSpPr>
+        <p:spPr>
+          <a:xfrm>
+            <a:off x="4695454" y="2765661"/>
             <a:ext cx="8075503" cy="828844"/>
           </a:xfrm>
           <a:prstGeom prst="rect">
@@ -26770,13 +26827,13 @@
       </p:sp>
       <p:sp>
         <p:nvSpPr>
-          <p:cNvPr id="10" name="PDF_TEXT_GROUP_454"/>
-          <p:cNvSpPr txBox="1"/>
-          <p:nvPr/>
-        </p:nvSpPr>
-        <p:spPr>
-          <a:xfrm>
-            <a:off x="1107736" y="3725745"/>
+          <p:cNvPr id="10" name="PDF_TEXT_GROUP_455"/>
+          <p:cNvSpPr txBox="1"/>
+          <p:nvPr/>
+        </p:nvSpPr>
+        <p:spPr>
+          <a:xfrm>
+            <a:off x="1107736" y="3720348"/>
             <a:ext cx="2275125" cy="385554"/>
           </a:xfrm>
           <a:prstGeom prst="rect">
@@ -26818,13 +26875,13 @@
       </p:sp>
       <p:sp>
         <p:nvSpPr>
-          <p:cNvPr id="11" name="PDF_TEXT_GROUP_455"/>
-          <p:cNvSpPr txBox="1"/>
-          <p:nvPr/>
-        </p:nvSpPr>
-        <p:spPr>
-          <a:xfrm>
-            <a:off x="4695283" y="3725745"/>
+          <p:cNvPr id="11" name="PDF_TEXT_GROUP_456"/>
+          <p:cNvSpPr txBox="1"/>
+          <p:nvPr/>
+        </p:nvSpPr>
+        <p:spPr>
+          <a:xfrm>
+            <a:off x="4695283" y="3720348"/>
             <a:ext cx="5900269" cy="385554"/>
           </a:xfrm>
           <a:prstGeom prst="rect">
@@ -26866,13 +26923,13 @@
       </p:sp>
       <p:sp>
         <p:nvSpPr>
-          <p:cNvPr id="12" name="PDF_TEXT_GROUP_456"/>
-          <p:cNvSpPr txBox="1"/>
-          <p:nvPr/>
-        </p:nvSpPr>
-        <p:spPr>
-          <a:xfrm>
-            <a:off x="1107736" y="4294104"/>
+          <p:cNvPr id="12" name="PDF_TEXT_GROUP_457"/>
+          <p:cNvSpPr txBox="1"/>
+          <p:nvPr/>
+        </p:nvSpPr>
+        <p:spPr>
+          <a:xfrm>
+            <a:off x="1107736" y="4288708"/>
             <a:ext cx="1973022" cy="385554"/>
           </a:xfrm>
           <a:prstGeom prst="rect">
@@ -26914,13 +26971,13 @@
       </p:sp>
       <p:sp>
         <p:nvSpPr>
-          <p:cNvPr id="13" name="PDF_TEXT_GROUP_457"/>
-          <p:cNvSpPr txBox="1"/>
-          <p:nvPr/>
-        </p:nvSpPr>
-        <p:spPr>
-          <a:xfrm>
-            <a:off x="4695412" y="4294104"/>
+          <p:cNvPr id="13" name="PDF_TEXT_GROUP_458"/>
+          <p:cNvSpPr txBox="1"/>
+          <p:nvPr/>
+        </p:nvSpPr>
+        <p:spPr>
+          <a:xfrm>
+            <a:off x="4695412" y="4288708"/>
             <a:ext cx="8756198" cy="828844"/>
           </a:xfrm>
           <a:prstGeom prst="rect">
@@ -26971,13 +27028,13 @@
       </p:sp>
       <p:sp>
         <p:nvSpPr>
-          <p:cNvPr id="14" name="PDF_TEXT_GROUP_458"/>
-          <p:cNvSpPr txBox="1"/>
-          <p:nvPr/>
-        </p:nvSpPr>
-        <p:spPr>
-          <a:xfrm>
-            <a:off x="1107736" y="5248824"/>
+          <p:cNvPr id="14" name="PDF_TEXT_GROUP_459"/>
+          <p:cNvSpPr txBox="1"/>
+          <p:nvPr/>
+        </p:nvSpPr>
+        <p:spPr>
+          <a:xfrm>
+            <a:off x="1107736" y="5243395"/>
             <a:ext cx="2084880" cy="385554"/>
           </a:xfrm>
           <a:prstGeom prst="rect">
@@ -27019,13 +27076,13 @@
       </p:sp>
       <p:sp>
         <p:nvSpPr>
-          <p:cNvPr id="15" name="PDF_TEXT_GROUP_459"/>
-          <p:cNvSpPr txBox="1"/>
-          <p:nvPr/>
-        </p:nvSpPr>
-        <p:spPr>
-          <a:xfrm>
-            <a:off x="4695379" y="5248824"/>
+          <p:cNvPr id="15" name="PDF_TEXT_GROUP_460"/>
+          <p:cNvSpPr txBox="1"/>
+          <p:nvPr/>
+        </p:nvSpPr>
+        <p:spPr>
+          <a:xfrm>
+            <a:off x="4695379" y="5243395"/>
             <a:ext cx="9323228" cy="385554"/>
           </a:xfrm>
           <a:prstGeom prst="rect">
@@ -27067,14 +27124,14 @@
       </p:sp>
       <p:sp>
         <p:nvSpPr>
-          <p:cNvPr id="16" name="PDF_TEXT_GROUP_460"/>
-          <p:cNvSpPr txBox="1"/>
-          <p:nvPr/>
-        </p:nvSpPr>
-        <p:spPr>
-          <a:xfrm>
-            <a:off x="1123808" y="6130188"/>
-            <a:ext cx="11811497" cy="828844"/>
+          <p:cNvPr id="16" name="PDF_TEXT_GROUP_461"/>
+          <p:cNvSpPr txBox="1"/>
+          <p:nvPr/>
+        </p:nvSpPr>
+        <p:spPr>
+          <a:xfrm>
+            <a:off x="1123808" y="6138299"/>
+            <a:ext cx="12225778" cy="828844"/>
           </a:xfrm>
           <a:prstGeom prst="rect">
             <a:avLst/>
@@ -27108,7 +27165,7 @@
                 </a:solidFill>
                 <a:latin typeface="Latin Modern Sans"/>
               </a:rPr>
-              <a:t>CS guidance: advisor-approved complete draft to committee two weeks before defense.</a:t>
+              <a:t>Committee draft: two weeks before defense. Spring 2027 application/candidacy: February</a:t>
             </a:r>
             <a:r>
               <a:rPr sz="2371" b="0" i="0">
@@ -27117,14 +27174,14 @@
                 </a:solidFill>
                 <a:latin typeface="Latin Modern Sans"/>
               </a:rPr>
-              <a:t> Spring 2027 final ProQuest deadline: March 26, 2027; recheck before filing. [29,30]</a:t>
-            </a:r>
-          </a:p>
-        </p:txBody>
-      </p:sp>
-      <p:sp>
-        <p:nvSpPr>
-          <p:cNvPr id="17" name="PDF_TEXT_GROUP_461"/>
+              <a:t> 5; final ProQuest: March 26. Recheck before filing. [29,30]</a:t>
+            </a:r>
+          </a:p>
+        </p:txBody>
+      </p:sp>
+      <p:sp>
+        <p:nvSpPr>
+          <p:cNvPr id="17" name="PDF_TEXT_GROUP_462"/>
           <p:cNvSpPr txBox="1"/>
           <p:nvPr/>
         </p:nvSpPr>
@@ -27172,7 +27229,7 @@
       </p:sp>
       <p:sp>
         <p:nvSpPr>
-          <p:cNvPr id="18" name="PDF_TEXT_GROUP_462"/>
+          <p:cNvPr id="18" name="PDF_TEXT_GROUP_463"/>
           <p:cNvSpPr txBox="1"/>
           <p:nvPr/>
         </p:nvSpPr>
@@ -27220,7 +27277,7 @@
       </p:sp>
       <p:sp>
         <p:nvSpPr>
-          <p:cNvPr id="19" name="PDF_TEXT_GROUP_463"/>
+          <p:cNvPr id="19" name="PDF_TEXT_GROUP_464"/>
           <p:cNvSpPr txBox="1"/>
           <p:nvPr/>
         </p:nvSpPr>
@@ -27268,7 +27325,7 @@
       </p:sp>
       <p:sp>
         <p:nvSpPr>
-          <p:cNvPr id="20" name="PDF_TEXT_GROUP_464"/>
+          <p:cNvPr id="20" name="PDF_TEXT_GROUP_465"/>
           <p:cNvSpPr txBox="1"/>
           <p:nvPr/>
         </p:nvSpPr>
@@ -27316,7 +27373,7 @@
       </p:sp>
       <p:sp>
         <p:nvSpPr>
-          <p:cNvPr id="21" name="PDF_TEXT_GROUP_465"/>
+          <p:cNvPr id="21" name="PDF_TEXT_GROUP_466"/>
           <p:cNvSpPr txBox="1"/>
           <p:nvPr/>
         </p:nvSpPr>
@@ -27406,7 +27463,7 @@
       </p:pic>
       <p:sp>
         <p:nvSpPr>
-          <p:cNvPr id="3" name="PDF_TEXT_GROUP_466"/>
+          <p:cNvPr id="3" name="PDF_TEXT_GROUP_467"/>
           <p:cNvSpPr txBox="1"/>
           <p:nvPr/>
         </p:nvSpPr>
@@ -27447,21 +27504,21 @@
                 </a:solidFill>
                 <a:latin typeface="Latin Modern Sans"/>
               </a:rPr>
-              <a:t>What a Final Defense Must Be Able to Claim</a:t>
-            </a:r>
-          </a:p>
-        </p:txBody>
-      </p:sp>
-      <p:sp>
-        <p:nvSpPr>
-          <p:cNvPr id="4" name="PDF_TEXT_GROUP_467"/>
-          <p:cNvSpPr txBox="1"/>
-          <p:nvPr/>
-        </p:nvSpPr>
-        <p:spPr>
-          <a:xfrm>
-            <a:off x="1618972" y="1945279"/>
-            <a:ext cx="10549005" cy="929924"/>
+              <a:t>Expected Research Outcomes</a:t>
+            </a:r>
+          </a:p>
+        </p:txBody>
+      </p:sp>
+      <p:sp>
+        <p:nvSpPr>
+          <p:cNvPr id="4" name="PDF_TEXT_GROUP_468"/>
+          <p:cNvSpPr txBox="1"/>
+          <p:nvPr/>
+        </p:nvSpPr>
+        <p:spPr>
+          <a:xfrm>
+            <a:off x="1618972" y="1953132"/>
+            <a:ext cx="10549005" cy="929891"/>
           </a:xfrm>
           <a:prstGeom prst="rect">
             <a:avLst/>
@@ -27520,13 +27577,13 @@
       </p:sp>
       <p:sp>
         <p:nvSpPr>
-          <p:cNvPr id="5" name="PDF_TEXT_GROUP_468"/>
-          <p:cNvSpPr txBox="1"/>
-          <p:nvPr/>
-        </p:nvSpPr>
-        <p:spPr>
-          <a:xfrm>
-            <a:off x="1618972" y="2917579"/>
+          <p:cNvPr id="5" name="PDF_TEXT_GROUP_469"/>
+          <p:cNvSpPr txBox="1"/>
+          <p:nvPr/>
+        </p:nvSpPr>
+        <p:spPr>
+          <a:xfrm>
+            <a:off x="1618972" y="2925399"/>
             <a:ext cx="11578665" cy="929891"/>
           </a:xfrm>
           <a:prstGeom prst="rect">
@@ -27586,13 +27643,13 @@
       </p:sp>
       <p:sp>
         <p:nvSpPr>
-          <p:cNvPr id="6" name="PDF_TEXT_GROUP_469"/>
-          <p:cNvSpPr txBox="1"/>
-          <p:nvPr/>
-        </p:nvSpPr>
-        <p:spPr>
-          <a:xfrm>
-            <a:off x="1618972" y="3889845"/>
+          <p:cNvPr id="6" name="PDF_TEXT_GROUP_470"/>
+          <p:cNvSpPr txBox="1"/>
+          <p:nvPr/>
+        </p:nvSpPr>
+        <p:spPr>
+          <a:xfrm>
+            <a:off x="1618972" y="3897666"/>
             <a:ext cx="11646728" cy="440633"/>
           </a:xfrm>
           <a:prstGeom prst="rect">
@@ -27643,14 +27700,14 @@
       </p:sp>
       <p:sp>
         <p:nvSpPr>
-          <p:cNvPr id="7" name="PDF_TEXT_GROUP_470"/>
-          <p:cNvSpPr txBox="1"/>
-          <p:nvPr/>
-        </p:nvSpPr>
-        <p:spPr>
-          <a:xfrm>
-            <a:off x="1618972" y="4424274"/>
-            <a:ext cx="11473607" cy="929891"/>
+          <p:cNvPr id="7" name="PDF_TEXT_GROUP_471"/>
+          <p:cNvSpPr txBox="1"/>
+          <p:nvPr/>
+        </p:nvSpPr>
+        <p:spPr>
+          <a:xfrm>
+            <a:off x="1618972" y="4432094"/>
+            <a:ext cx="11572749" cy="929891"/>
           </a:xfrm>
           <a:prstGeom prst="rect">
             <a:avLst/>
@@ -27684,7 +27741,7 @@
                 </a:solidFill>
                 <a:latin typeface="Latin Modern Sans"/>
               </a:rPr>
-              <a:t>Distinguish the candidate’s research from shared implementations and reused</a:t>
+              <a:t>Reproducible configurations and evidence linking each conclusion to its tested</a:t>
             </a:r>
             <a:r>
               <a:rPr sz="2710" b="0" i="0">
@@ -27693,21 +27750,21 @@
                 </a:solidFill>
                 <a:latin typeface="Latin Modern Sans"/>
               </a:rPr>
-              <a:t> NDN/AI libraries.</a:t>
-            </a:r>
-          </a:p>
-        </p:txBody>
-      </p:sp>
-      <p:sp>
-        <p:nvSpPr>
-          <p:cNvPr id="8" name="PDF_TEXT_GROUP_471"/>
-          <p:cNvSpPr txBox="1"/>
-          <p:nvPr/>
-        </p:nvSpPr>
-        <p:spPr>
-          <a:xfrm>
-            <a:off x="1143656" y="5762737"/>
-            <a:ext cx="10610053" cy="929891"/>
+              <a:t> scope.</a:t>
+            </a:r>
+          </a:p>
+        </p:txBody>
+      </p:sp>
+      <p:sp>
+        <p:nvSpPr>
+          <p:cNvPr id="8" name="PDF_TEXT_GROUP_472"/>
+          <p:cNvSpPr txBox="1"/>
+          <p:nvPr/>
+        </p:nvSpPr>
+        <p:spPr>
+          <a:xfrm>
+            <a:off x="1143656" y="5750974"/>
+            <a:ext cx="12248862" cy="929891"/>
           </a:xfrm>
           <a:prstGeom prst="rect">
             <a:avLst/>
@@ -27741,7 +27798,7 @@
                 </a:solidFill>
                 <a:latin typeface="Latin Modern Sans"/>
               </a:rPr>
-              <a:t>This proposal defines those obligations. It does not label the remaining</a:t>
+              <a:t>The outcome is a tested service protocol and an evidence-backed account of when</a:t>
             </a:r>
             <a:r>
               <a:rPr sz="2710" b="0" i="0">
@@ -27750,14 +27807,14 @@
                 </a:solidFill>
                 <a:latin typeface="Latin Modern Sans"/>
               </a:rPr>
-              <a:t> collaboration evidence as finished.</a:t>
-            </a:r>
-          </a:p>
-        </p:txBody>
-      </p:sp>
-      <p:sp>
-        <p:nvSpPr>
-          <p:cNvPr id="9" name="PDF_TEXT_GROUP_472"/>
+              <a:t> its mechanisms are worth their cost.</a:t>
+            </a:r>
+          </a:p>
+        </p:txBody>
+      </p:sp>
+      <p:sp>
+        <p:nvSpPr>
+          <p:cNvPr id="9" name="PDF_TEXT_GROUP_473"/>
           <p:cNvSpPr txBox="1"/>
           <p:nvPr/>
         </p:nvSpPr>
@@ -27805,7 +27862,7 @@
       </p:sp>
       <p:sp>
         <p:nvSpPr>
-          <p:cNvPr id="10" name="PDF_TEXT_GROUP_473"/>
+          <p:cNvPr id="10" name="PDF_TEXT_GROUP_474"/>
           <p:cNvSpPr txBox="1"/>
           <p:nvPr/>
         </p:nvSpPr>
@@ -27853,7 +27910,7 @@
       </p:sp>
       <p:sp>
         <p:nvSpPr>
-          <p:cNvPr id="11" name="PDF_TEXT_GROUP_474"/>
+          <p:cNvPr id="11" name="PDF_TEXT_GROUP_475"/>
           <p:cNvSpPr txBox="1"/>
           <p:nvPr/>
         </p:nvSpPr>
@@ -27901,7 +27958,7 @@
       </p:sp>
       <p:sp>
         <p:nvSpPr>
-          <p:cNvPr id="12" name="PDF_TEXT_GROUP_475"/>
+          <p:cNvPr id="12" name="PDF_TEXT_GROUP_476"/>
           <p:cNvSpPr txBox="1"/>
           <p:nvPr/>
         </p:nvSpPr>
@@ -27949,7 +28006,7 @@
       </p:sp>
       <p:sp>
         <p:nvSpPr>
-          <p:cNvPr id="13" name="PDF_TEXT_GROUP_476"/>
+          <p:cNvPr id="13" name="PDF_TEXT_GROUP_477"/>
           <p:cNvSpPr txBox="1"/>
           <p:nvPr/>
         </p:nvSpPr>
@@ -27997,13 +28054,13 @@
       </p:sp>
       <p:sp>
         <p:nvSpPr>
-          <p:cNvPr id="14" name="PDF_BULLET_SPAN_686"/>
+          <p:cNvPr id="14" name="PDF_BULLET_SPAN_687"/>
           <p:cNvSpPr/>
           <p:nvPr/>
         </p:nvSpPr>
         <p:spPr>
           <a:xfrm rot="5400000">
-            <a:off x="1207424" y="2031070"/>
+            <a:off x="1207424" y="2038923"/>
             <a:ext cx="197164" cy="197164"/>
           </a:xfrm>
           <a:prstGeom prst="triangle">
@@ -28040,13 +28097,13 @@
       </p:sp>
       <p:sp>
         <p:nvSpPr>
-          <p:cNvPr id="15" name="PDF_BULLET_SPAN_690"/>
+          <p:cNvPr id="15" name="PDF_BULLET_SPAN_691"/>
           <p:cNvSpPr/>
           <p:nvPr/>
         </p:nvSpPr>
         <p:spPr>
           <a:xfrm rot="5400000">
-            <a:off x="1207424" y="3003369"/>
+            <a:off x="1207424" y="3011190"/>
             <a:ext cx="197164" cy="197164"/>
           </a:xfrm>
           <a:prstGeom prst="triangle">
@@ -28083,13 +28140,13 @@
       </p:sp>
       <p:sp>
         <p:nvSpPr>
-          <p:cNvPr id="16" name="PDF_BULLET_SPAN_694"/>
+          <p:cNvPr id="16" name="PDF_BULLET_SPAN_695"/>
           <p:cNvSpPr/>
           <p:nvPr/>
         </p:nvSpPr>
         <p:spPr>
           <a:xfrm rot="5400000">
-            <a:off x="1207424" y="3975636"/>
+            <a:off x="1207424" y="3983457"/>
             <a:ext cx="197164" cy="197164"/>
           </a:xfrm>
           <a:prstGeom prst="triangle">
@@ -28126,13 +28183,13 @@
       </p:sp>
       <p:sp>
         <p:nvSpPr>
-          <p:cNvPr id="17" name="PDF_BULLET_SPAN_697"/>
+          <p:cNvPr id="17" name="PDF_BULLET_SPAN_698"/>
           <p:cNvSpPr/>
           <p:nvPr/>
         </p:nvSpPr>
         <p:spPr>
           <a:xfrm rot="5400000">
-            <a:off x="1207424" y="4510065"/>
+            <a:off x="1207424" y="4517885"/>
             <a:ext cx="197164" cy="197164"/>
           </a:xfrm>
           <a:prstGeom prst="triangle">
@@ -28211,7 +28268,7 @@
       </p:pic>
       <p:sp>
         <p:nvSpPr>
-          <p:cNvPr id="3" name="PDF_TEXT_GROUP_477"/>
+          <p:cNvPr id="3" name="PDF_TEXT_GROUP_478"/>
           <p:cNvSpPr txBox="1"/>
           <p:nvPr/>
         </p:nvSpPr>
@@ -28259,7 +28316,7 @@
       </p:sp>
       <p:sp>
         <p:nvSpPr>
-          <p:cNvPr id="4" name="PDF_TEXT_GROUP_478"/>
+          <p:cNvPr id="4" name="PDF_TEXT_GROUP_479"/>
           <p:cNvSpPr txBox="1"/>
           <p:nvPr/>
         </p:nvSpPr>
@@ -28316,7 +28373,7 @@
       </p:sp>
       <p:sp>
         <p:nvSpPr>
-          <p:cNvPr id="5" name="PDF_TEXT_GROUP_479"/>
+          <p:cNvPr id="5" name="PDF_TEXT_GROUP_480"/>
           <p:cNvSpPr txBox="1"/>
           <p:nvPr/>
         </p:nvSpPr>
@@ -28373,7 +28430,7 @@
       </p:sp>
       <p:sp>
         <p:nvSpPr>
-          <p:cNvPr id="6" name="PDF_TEXT_GROUP_480"/>
+          <p:cNvPr id="6" name="PDF_TEXT_GROUP_481"/>
           <p:cNvSpPr txBox="1"/>
           <p:nvPr/>
         </p:nvSpPr>
@@ -28439,7 +28496,7 @@
       </p:sp>
       <p:sp>
         <p:nvSpPr>
-          <p:cNvPr id="7" name="PDF_TEXT_GROUP_481"/>
+          <p:cNvPr id="7" name="PDF_TEXT_GROUP_482"/>
           <p:cNvSpPr txBox="1"/>
           <p:nvPr/>
         </p:nvSpPr>
@@ -28496,7 +28553,7 @@
       </p:sp>
       <p:sp>
         <p:nvSpPr>
-          <p:cNvPr id="8" name="PDF_TEXT_GROUP_482"/>
+          <p:cNvPr id="8" name="PDF_TEXT_GROUP_483"/>
           <p:cNvSpPr txBox="1"/>
           <p:nvPr/>
         </p:nvSpPr>
@@ -28553,7 +28610,7 @@
       </p:sp>
       <p:sp>
         <p:nvSpPr>
-          <p:cNvPr id="9" name="PDF_TEXT_GROUP_483"/>
+          <p:cNvPr id="9" name="PDF_TEXT_GROUP_484"/>
           <p:cNvSpPr txBox="1"/>
           <p:nvPr/>
         </p:nvSpPr>
@@ -28601,7 +28658,7 @@
       </p:sp>
       <p:sp>
         <p:nvSpPr>
-          <p:cNvPr id="10" name="PDF_TEXT_GROUP_484"/>
+          <p:cNvPr id="10" name="PDF_TEXT_GROUP_485"/>
           <p:cNvSpPr txBox="1"/>
           <p:nvPr/>
         </p:nvSpPr>
@@ -28649,7 +28706,7 @@
       </p:sp>
       <p:sp>
         <p:nvSpPr>
-          <p:cNvPr id="11" name="PDF_TEXT_GROUP_485"/>
+          <p:cNvPr id="11" name="PDF_TEXT_GROUP_486"/>
           <p:cNvSpPr txBox="1"/>
           <p:nvPr/>
         </p:nvSpPr>
@@ -28697,7 +28754,7 @@
       </p:sp>
       <p:sp>
         <p:nvSpPr>
-          <p:cNvPr id="12" name="PDF_TEXT_GROUP_486"/>
+          <p:cNvPr id="12" name="PDF_TEXT_GROUP_487"/>
           <p:cNvSpPr txBox="1"/>
           <p:nvPr/>
         </p:nvSpPr>
@@ -28745,7 +28802,7 @@
       </p:sp>
       <p:sp>
         <p:nvSpPr>
-          <p:cNvPr id="13" name="PDF_TEXT_GROUP_487"/>
+          <p:cNvPr id="13" name="PDF_TEXT_GROUP_488"/>
           <p:cNvSpPr txBox="1"/>
           <p:nvPr/>
         </p:nvSpPr>
@@ -28835,7 +28892,7 @@
       </p:pic>
       <p:sp>
         <p:nvSpPr>
-          <p:cNvPr id="3" name="PDF_TEXT_GROUP_488"/>
+          <p:cNvPr id="3" name="PDF_TEXT_GROUP_489"/>
           <p:cNvSpPr txBox="1"/>
           <p:nvPr/>
         </p:nvSpPr>
@@ -28883,7 +28940,7 @@
       </p:sp>
       <p:sp>
         <p:nvSpPr>
-          <p:cNvPr id="4" name="PDF_TEXT_GROUP_489"/>
+          <p:cNvPr id="4" name="PDF_TEXT_GROUP_490"/>
           <p:cNvSpPr txBox="1"/>
           <p:nvPr/>
         </p:nvSpPr>
@@ -28931,7 +28988,7 @@
       </p:sp>
       <p:sp>
         <p:nvSpPr>
-          <p:cNvPr id="5" name="PDF_TEXT_GROUP_490"/>
+          <p:cNvPr id="5" name="PDF_TEXT_GROUP_491"/>
           <p:cNvSpPr txBox="1"/>
           <p:nvPr/>
         </p:nvSpPr>
@@ -28979,7 +29036,7 @@
       </p:sp>
       <p:sp>
         <p:nvSpPr>
-          <p:cNvPr id="6" name="PDF_TEXT_GROUP_491"/>
+          <p:cNvPr id="6" name="PDF_TEXT_GROUP_492"/>
           <p:cNvSpPr txBox="1"/>
           <p:nvPr/>
         </p:nvSpPr>
@@ -29027,7 +29084,7 @@
       </p:sp>
       <p:sp>
         <p:nvSpPr>
-          <p:cNvPr id="7" name="PDF_TEXT_GROUP_492"/>
+          <p:cNvPr id="7" name="PDF_TEXT_GROUP_493"/>
           <p:cNvSpPr txBox="1"/>
           <p:nvPr/>
         </p:nvSpPr>
@@ -29075,7 +29132,7 @@
       </p:sp>
       <p:sp>
         <p:nvSpPr>
-          <p:cNvPr id="8" name="PDF_TEXT_GROUP_493"/>
+          <p:cNvPr id="8" name="PDF_TEXT_GROUP_494"/>
           <p:cNvSpPr txBox="1"/>
           <p:nvPr/>
         </p:nvSpPr>
@@ -29123,7 +29180,7 @@
       </p:sp>
       <p:sp>
         <p:nvSpPr>
-          <p:cNvPr id="9" name="PDF_TEXT_GROUP_494"/>
+          <p:cNvPr id="9" name="PDF_TEXT_GROUP_495"/>
           <p:cNvSpPr txBox="1"/>
           <p:nvPr/>
         </p:nvSpPr>
@@ -29171,7 +29228,7 @@
       </p:sp>
       <p:sp>
         <p:nvSpPr>
-          <p:cNvPr id="10" name="PDF_TEXT_GROUP_495"/>
+          <p:cNvPr id="10" name="PDF_TEXT_GROUP_496"/>
           <p:cNvSpPr txBox="1"/>
           <p:nvPr/>
         </p:nvSpPr>
@@ -29219,7 +29276,7 @@
       </p:sp>
       <p:sp>
         <p:nvSpPr>
-          <p:cNvPr id="11" name="PDF_TEXT_GROUP_496"/>
+          <p:cNvPr id="11" name="PDF_TEXT_GROUP_497"/>
           <p:cNvSpPr txBox="1"/>
           <p:nvPr/>
         </p:nvSpPr>
@@ -29267,7 +29324,7 @@
       </p:sp>
       <p:sp>
         <p:nvSpPr>
-          <p:cNvPr id="12" name="PDF_TEXT_GROUP_497"/>
+          <p:cNvPr id="12" name="PDF_TEXT_GROUP_498"/>
           <p:cNvSpPr txBox="1"/>
           <p:nvPr/>
         </p:nvSpPr>
@@ -29324,7 +29381,7 @@
       </p:sp>
       <p:sp>
         <p:nvSpPr>
-          <p:cNvPr id="13" name="PDF_TEXT_GROUP_498"/>
+          <p:cNvPr id="13" name="PDF_TEXT_GROUP_499"/>
           <p:cNvSpPr txBox="1"/>
           <p:nvPr/>
         </p:nvSpPr>
@@ -29372,7 +29429,7 @@
       </p:sp>
       <p:sp>
         <p:nvSpPr>
-          <p:cNvPr id="14" name="PDF_TEXT_GROUP_499"/>
+          <p:cNvPr id="14" name="PDF_TEXT_GROUP_500"/>
           <p:cNvSpPr txBox="1"/>
           <p:nvPr/>
         </p:nvSpPr>
@@ -29420,7 +29477,7 @@
       </p:sp>
       <p:sp>
         <p:nvSpPr>
-          <p:cNvPr id="15" name="PDF_TEXT_GROUP_500"/>
+          <p:cNvPr id="15" name="PDF_TEXT_GROUP_501"/>
           <p:cNvSpPr txBox="1"/>
           <p:nvPr/>
         </p:nvSpPr>
@@ -29468,7 +29525,7 @@
       </p:sp>
       <p:sp>
         <p:nvSpPr>
-          <p:cNvPr id="16" name="PDF_TEXT_GROUP_501"/>
+          <p:cNvPr id="16" name="PDF_TEXT_GROUP_502"/>
           <p:cNvSpPr txBox="1"/>
           <p:nvPr/>
         </p:nvSpPr>
@@ -29516,7 +29573,7 @@
       </p:sp>
       <p:sp>
         <p:nvSpPr>
-          <p:cNvPr id="17" name="PDF_TEXT_GROUP_502"/>
+          <p:cNvPr id="17" name="PDF_TEXT_GROUP_503"/>
           <p:cNvSpPr txBox="1"/>
           <p:nvPr/>
         </p:nvSpPr>
@@ -29606,7 +29663,7 @@
       </p:pic>
       <p:sp>
         <p:nvSpPr>
-          <p:cNvPr id="3" name="PDF_TEXT_GROUP_503"/>
+          <p:cNvPr id="3" name="PDF_TEXT_GROUP_504"/>
           <p:cNvSpPr txBox="1"/>
           <p:nvPr/>
         </p:nvSpPr>
@@ -29654,13 +29711,13 @@
       </p:sp>
       <p:sp>
         <p:nvSpPr>
-          <p:cNvPr id="4" name="PDF_TEXT_GROUP_504"/>
-          <p:cNvSpPr txBox="1"/>
-          <p:nvPr/>
-        </p:nvSpPr>
-        <p:spPr>
-          <a:xfrm>
-            <a:off x="1107736" y="1929602"/>
+          <p:cNvPr id="4" name="PDF_TEXT_GROUP_505"/>
+          <p:cNvSpPr txBox="1"/>
+          <p:nvPr/>
+        </p:nvSpPr>
+        <p:spPr>
+          <a:xfrm>
+            <a:off x="1107736" y="1909567"/>
             <a:ext cx="3204438" cy="385554"/>
           </a:xfrm>
           <a:prstGeom prst="rect">
@@ -29702,13 +29759,13 @@
       </p:sp>
       <p:sp>
         <p:nvSpPr>
-          <p:cNvPr id="5" name="PDF_TEXT_GROUP_505"/>
-          <p:cNvSpPr txBox="1"/>
-          <p:nvPr/>
-        </p:nvSpPr>
-        <p:spPr>
-          <a:xfrm>
-            <a:off x="9804981" y="1929602"/>
+          <p:cNvPr id="5" name="PDF_TEXT_GROUP_506"/>
+          <p:cNvSpPr txBox="1"/>
+          <p:nvPr/>
+        </p:nvSpPr>
+        <p:spPr>
+          <a:xfrm>
+            <a:off x="9804981" y="1909567"/>
             <a:ext cx="4022407" cy="385554"/>
           </a:xfrm>
           <a:prstGeom prst="rect">
@@ -29750,13 +29807,13 @@
       </p:sp>
       <p:sp>
         <p:nvSpPr>
-          <p:cNvPr id="6" name="PDF_TEXT_GROUP_506"/>
-          <p:cNvSpPr txBox="1"/>
-          <p:nvPr/>
-        </p:nvSpPr>
-        <p:spPr>
-          <a:xfrm>
-            <a:off x="1107736" y="2497962"/>
+          <p:cNvPr id="6" name="PDF_TEXT_GROUP_507"/>
+          <p:cNvSpPr txBox="1"/>
+          <p:nvPr/>
+        </p:nvSpPr>
+        <p:spPr>
+          <a:xfrm>
+            <a:off x="1107736" y="2477926"/>
             <a:ext cx="609414" cy="385554"/>
           </a:xfrm>
           <a:prstGeom prst="rect">
@@ -29798,13 +29855,13 @@
       </p:sp>
       <p:sp>
         <p:nvSpPr>
-          <p:cNvPr id="7" name="PDF_TEXT_GROUP_507"/>
-          <p:cNvSpPr txBox="1"/>
-          <p:nvPr/>
-        </p:nvSpPr>
-        <p:spPr>
-          <a:xfrm>
-            <a:off x="12189748" y="2497962"/>
+          <p:cNvPr id="7" name="PDF_TEXT_GROUP_508"/>
+          <p:cNvSpPr txBox="1"/>
+          <p:nvPr/>
+        </p:nvSpPr>
+        <p:spPr>
+          <a:xfrm>
+            <a:off x="12189748" y="2477926"/>
             <a:ext cx="1520512" cy="385554"/>
           </a:xfrm>
           <a:prstGeom prst="rect">
@@ -29846,13 +29903,13 @@
       </p:sp>
       <p:sp>
         <p:nvSpPr>
-          <p:cNvPr id="8" name="PDF_TEXT_GROUP_508"/>
-          <p:cNvSpPr txBox="1"/>
-          <p:nvPr/>
-        </p:nvSpPr>
-        <p:spPr>
-          <a:xfrm>
-            <a:off x="1107736" y="3066321"/>
+          <p:cNvPr id="8" name="PDF_TEXT_GROUP_509"/>
+          <p:cNvSpPr txBox="1"/>
+          <p:nvPr/>
+        </p:nvSpPr>
+        <p:spPr>
+          <a:xfrm>
+            <a:off x="1107736" y="3046286"/>
             <a:ext cx="609414" cy="385554"/>
           </a:xfrm>
           <a:prstGeom prst="rect">
@@ -29894,13 +29951,13 @@
       </p:sp>
       <p:sp>
         <p:nvSpPr>
-          <p:cNvPr id="9" name="PDF_TEXT_GROUP_509"/>
-          <p:cNvSpPr txBox="1"/>
-          <p:nvPr/>
-        </p:nvSpPr>
-        <p:spPr>
-          <a:xfrm>
-            <a:off x="12189748" y="3066321"/>
+          <p:cNvPr id="9" name="PDF_TEXT_GROUP_510"/>
+          <p:cNvSpPr txBox="1"/>
+          <p:nvPr/>
+        </p:nvSpPr>
+        <p:spPr>
+          <a:xfrm>
+            <a:off x="12189748" y="3046286"/>
             <a:ext cx="1520512" cy="385554"/>
           </a:xfrm>
           <a:prstGeom prst="rect">
@@ -29942,13 +29999,13 @@
       </p:sp>
       <p:sp>
         <p:nvSpPr>
-          <p:cNvPr id="10" name="PDF_TEXT_GROUP_510"/>
-          <p:cNvSpPr txBox="1"/>
-          <p:nvPr/>
-        </p:nvSpPr>
-        <p:spPr>
-          <a:xfrm>
-            <a:off x="1107736" y="3634681"/>
+          <p:cNvPr id="10" name="PDF_TEXT_GROUP_511"/>
+          <p:cNvSpPr txBox="1"/>
+          <p:nvPr/>
+        </p:nvSpPr>
+        <p:spPr>
+          <a:xfrm>
+            <a:off x="1107736" y="3614645"/>
             <a:ext cx="3556509" cy="385554"/>
           </a:xfrm>
           <a:prstGeom prst="rect">
@@ -29990,13 +30047,13 @@
       </p:sp>
       <p:sp>
         <p:nvSpPr>
-          <p:cNvPr id="11" name="PDF_TEXT_GROUP_511"/>
-          <p:cNvSpPr txBox="1"/>
-          <p:nvPr/>
-        </p:nvSpPr>
-        <p:spPr>
-          <a:xfrm>
-            <a:off x="12189681" y="3634681"/>
+          <p:cNvPr id="11" name="PDF_TEXT_GROUP_512"/>
+          <p:cNvSpPr txBox="1"/>
+          <p:nvPr/>
+        </p:nvSpPr>
+        <p:spPr>
+          <a:xfrm>
+            <a:off x="12189681" y="3614645"/>
             <a:ext cx="1520512" cy="385554"/>
           </a:xfrm>
           <a:prstGeom prst="rect">
@@ -30038,13 +30095,13 @@
       </p:sp>
       <p:sp>
         <p:nvSpPr>
-          <p:cNvPr id="12" name="PDF_TEXT_GROUP_512"/>
-          <p:cNvSpPr txBox="1"/>
-          <p:nvPr/>
-        </p:nvSpPr>
-        <p:spPr>
-          <a:xfrm>
-            <a:off x="1123808" y="4516045"/>
+          <p:cNvPr id="12" name="PDF_TEXT_GROUP_513"/>
+          <p:cNvSpPr txBox="1"/>
+          <p:nvPr/>
+        </p:nvSpPr>
+        <p:spPr>
+          <a:xfrm>
+            <a:off x="1123808" y="4496010"/>
             <a:ext cx="12230408" cy="828844"/>
           </a:xfrm>
           <a:prstGeom prst="rect">
@@ -30095,62 +30152,14 @@
       </p:sp>
       <p:sp>
         <p:nvSpPr>
-          <p:cNvPr id="13" name="PDF_TEXT_GROUP_513"/>
-          <p:cNvSpPr txBox="1"/>
-          <p:nvPr/>
-        </p:nvSpPr>
-        <p:spPr>
-          <a:xfrm>
-            <a:off x="2180392" y="5944553"/>
-            <a:ext cx="227618" cy="222203"/>
-          </a:xfrm>
-          <a:prstGeom prst="rect">
-            <a:avLst/>
-          </a:prstGeom>
-          <a:noFill/>
-          <a:ln>
-            <a:noFill/>
-          </a:ln>
-        </p:spPr>
-        <p:txBody>
-          <a:bodyPr wrap="square" anchor="t" lIns="0" rIns="0" tIns="0" bIns="0">
-            <a:noAutofit/>
-          </a:bodyPr>
-          <a:lstStyle/>
-          <a:p>
-            <a:pPr algn="l">
-              <a:lnSpc>
-                <a:spcPct val="100000"/>
-              </a:lnSpc>
-              <a:spcBef>
-                <a:spcPts val="0"/>
-              </a:spcBef>
-              <a:spcAft>
-                <a:spcPts val="0"/>
-              </a:spcAft>
-            </a:pPr>
-            <a:r>
-              <a:rPr sz="1355" b="0" i="0">
-                <a:solidFill>
-                  <a:srgbClr val="000000"/>
-                </a:solidFill>
-                <a:latin typeface="Latin Modern Roman"/>
-              </a:rPr>
-              <a:t>4</a:t>
-            </a:r>
-          </a:p>
-        </p:txBody>
-      </p:sp>
-      <p:sp>
-        <p:nvSpPr>
-          <p:cNvPr id="14" name="PDF_TEXT_GROUP_514"/>
-          <p:cNvSpPr txBox="1"/>
-          <p:nvPr/>
-        </p:nvSpPr>
-        <p:spPr>
-          <a:xfrm>
-            <a:off x="914808" y="5975381"/>
-            <a:ext cx="13195280" cy="314132"/>
+          <p:cNvPr id="13" name="PDF_TEXT_GROUP_514"/>
+          <p:cNvSpPr txBox="1"/>
+          <p:nvPr/>
+        </p:nvSpPr>
+        <p:spPr>
+          <a:xfrm>
+            <a:off x="914808" y="5969769"/>
+            <a:ext cx="13678927" cy="302935"/>
           </a:xfrm>
           <a:prstGeom prst="rect">
             <a:avLst/>
@@ -30182,118 +30191,64 @@
                 <a:solidFill>
                   <a:srgbClr val="000000"/>
                 </a:solidFill>
-                <a:latin typeface="Latin Modern Roman"/>
-              </a:rPr>
-              <a:t>1</a:t>
-            </a:r>
+                <a:latin typeface="Latin Modern Sans"/>
+              </a:rPr>
+              <a:t>Per-link packet loss is not the probability of service failure: retrieval retries and the request deadline also affect</a:t>
+            </a:r>
+          </a:p>
+        </p:txBody>
+      </p:sp>
+      <p:sp>
+        <p:nvSpPr>
+          <p:cNvPr id="14" name="PDF_TEXT_GROUP_515"/>
+          <p:cNvSpPr txBox="1"/>
+          <p:nvPr/>
+        </p:nvSpPr>
+        <p:spPr>
+          <a:xfrm>
+            <a:off x="914808" y="6458795"/>
+            <a:ext cx="1462509" cy="302935"/>
+          </a:xfrm>
+          <a:prstGeom prst="rect">
+            <a:avLst/>
+          </a:prstGeom>
+          <a:noFill/>
+          <a:ln>
+            <a:noFill/>
+          </a:ln>
+        </p:spPr>
+        <p:txBody>
+          <a:bodyPr wrap="square" anchor="t" lIns="0" rIns="0" tIns="0" bIns="0">
+            <a:noAutofit/>
+          </a:bodyPr>
+          <a:lstStyle/>
+          <a:p>
+            <a:pPr algn="l">
+              <a:lnSpc>
+                <a:spcPct val="100000"/>
+              </a:lnSpc>
+              <a:spcBef>
+                <a:spcPts val="0"/>
+              </a:spcBef>
+              <a:spcAft>
+                <a:spcPts val="0"/>
+              </a:spcAft>
+            </a:pPr>
             <a:r>
               <a:rPr sz="1863" b="0" i="0">
                 <a:solidFill>
                   <a:srgbClr val="000000"/>
                 </a:solidFill>
-                <a:latin typeface="Cambria Math"/>
-              </a:rPr>
-              <a:t> −</a:t>
-            </a:r>
-            <a:r>
-              <a:rPr sz="1863" b="0" i="0">
-                <a:solidFill>
-                  <a:srgbClr val="000000"/>
-                </a:solidFill>
-                <a:latin typeface="Latin Modern Roman"/>
-              </a:rPr>
-              <a:t> (1</a:t>
-            </a:r>
-            <a:r>
-              <a:rPr sz="1863" b="0" i="0">
-                <a:solidFill>
-                  <a:srgbClr val="000000"/>
-                </a:solidFill>
-                <a:latin typeface="Cambria Math"/>
-              </a:rPr>
-              <a:t> −</a:t>
-            </a:r>
-            <a:r>
-              <a:rPr sz="1863" b="0" i="1">
-                <a:solidFill>
-                  <a:srgbClr val="000000"/>
-                </a:solidFill>
-                <a:latin typeface="Cambria Math"/>
-              </a:rPr>
-              <a:t> `</a:t>
-            </a:r>
-            <a:r>
-              <a:rPr sz="1863" b="0" i="0">
-                <a:solidFill>
-                  <a:srgbClr val="000000"/>
-                </a:solidFill>
-                <a:latin typeface="Latin Modern Roman"/>
-              </a:rPr>
-              <a:t>)</a:t>
-            </a:r>
-            <a:r>
-              <a:rPr sz="1863" b="0" i="0">
-                <a:solidFill>
-                  <a:srgbClr val="000000"/>
-                </a:solidFill>
-                <a:latin typeface="Latin Modern Sans"/>
-              </a:rPr>
-              <a:t> assumes four independent equal-loss packet traversals; it is not service failure probability after</a:t>
-            </a:r>
-          </a:p>
-        </p:txBody>
-      </p:sp>
-      <p:sp>
-        <p:nvSpPr>
-          <p:cNvPr id="15" name="PDF_TEXT_GROUP_515"/>
-          <p:cNvSpPr txBox="1"/>
-          <p:nvPr/>
-        </p:nvSpPr>
-        <p:spPr>
-          <a:xfrm>
-            <a:off x="914808" y="6478830"/>
-            <a:ext cx="916177" cy="302935"/>
-          </a:xfrm>
-          <a:prstGeom prst="rect">
-            <a:avLst/>
-          </a:prstGeom>
-          <a:noFill/>
-          <a:ln>
-            <a:noFill/>
-          </a:ln>
-        </p:spPr>
-        <p:txBody>
-          <a:bodyPr wrap="square" anchor="t" lIns="0" rIns="0" tIns="0" bIns="0">
-            <a:noAutofit/>
-          </a:bodyPr>
-          <a:lstStyle/>
-          <a:p>
-            <a:pPr algn="l">
-              <a:lnSpc>
-                <a:spcPct val="100000"/>
-              </a:lnSpc>
-              <a:spcBef>
-                <a:spcPts val="0"/>
-              </a:spcBef>
-              <a:spcAft>
-                <a:spcPts val="0"/>
-              </a:spcAft>
-            </a:pPr>
-            <a:r>
-              <a:rPr sz="1863" b="0" i="0">
-                <a:solidFill>
-                  <a:srgbClr val="000000"/>
-                </a:solidFill>
-                <a:latin typeface="Latin Modern Sans"/>
-              </a:rPr>
-              <a:t>retries.</a:t>
-            </a:r>
-          </a:p>
-        </p:txBody>
-      </p:sp>
-      <p:sp>
-        <p:nvSpPr>
-          <p:cNvPr id="16" name="PDF_TEXT_GROUP_516"/>
+                <a:latin typeface="Latin Modern Sans"/>
+              </a:rPr>
+              <a:t>completion.</a:t>
+            </a:r>
+          </a:p>
+        </p:txBody>
+      </p:sp>
+      <p:sp>
+        <p:nvSpPr>
+          <p:cNvPr id="15" name="PDF_TEXT_GROUP_516"/>
           <p:cNvSpPr txBox="1"/>
           <p:nvPr/>
         </p:nvSpPr>
@@ -30341,7 +30296,7 @@
       </p:sp>
       <p:sp>
         <p:nvSpPr>
-          <p:cNvPr id="17" name="PDF_TEXT_GROUP_517"/>
+          <p:cNvPr id="16" name="PDF_TEXT_GROUP_517"/>
           <p:cNvSpPr txBox="1"/>
           <p:nvPr/>
         </p:nvSpPr>
@@ -30389,7 +30344,7 @@
       </p:sp>
       <p:sp>
         <p:nvSpPr>
-          <p:cNvPr id="18" name="PDF_TEXT_GROUP_518"/>
+          <p:cNvPr id="17" name="PDF_TEXT_GROUP_518"/>
           <p:cNvSpPr txBox="1"/>
           <p:nvPr/>
         </p:nvSpPr>
@@ -30437,7 +30392,7 @@
       </p:sp>
       <p:sp>
         <p:nvSpPr>
-          <p:cNvPr id="19" name="PDF_TEXT_GROUP_519"/>
+          <p:cNvPr id="18" name="PDF_TEXT_GROUP_519"/>
           <p:cNvSpPr txBox="1"/>
           <p:nvPr/>
         </p:nvSpPr>
@@ -30485,7 +30440,7 @@
       </p:sp>
       <p:sp>
         <p:nvSpPr>
-          <p:cNvPr id="20" name="PDF_TEXT_GROUP_520"/>
+          <p:cNvPr id="19" name="PDF_TEXT_GROUP_520"/>
           <p:cNvSpPr txBox="1"/>
           <p:nvPr/>
         </p:nvSpPr>
@@ -32378,7 +32333,7 @@
       </p:pic>
       <p:sp>
         <p:nvSpPr>
-          <p:cNvPr id="3" name="PDF_TEXT_GROUP_32"/>
+          <p:cNvPr id="3" name="PDF_TEXT_GROUP_31"/>
           <p:cNvSpPr txBox="1"/>
           <p:nvPr/>
         </p:nvSpPr>
@@ -32426,7 +32381,7 @@
       </p:sp>
       <p:sp>
         <p:nvSpPr>
-          <p:cNvPr id="4" name="PDF_TEXT_GROUP_33"/>
+          <p:cNvPr id="4" name="PDF_TEXT_GROUP_32"/>
           <p:cNvSpPr txBox="1"/>
           <p:nvPr/>
         </p:nvSpPr>
@@ -32474,7 +32429,7 @@
       </p:sp>
       <p:sp>
         <p:nvSpPr>
-          <p:cNvPr id="5" name="PDF_TEXT_GROUP_34"/>
+          <p:cNvPr id="5" name="PDF_TEXT_GROUP_33"/>
           <p:cNvSpPr txBox="1"/>
           <p:nvPr/>
         </p:nvSpPr>
@@ -32522,7 +32477,7 @@
       </p:sp>
       <p:sp>
         <p:nvSpPr>
-          <p:cNvPr id="6" name="PDF_TEXT_GROUP_35"/>
+          <p:cNvPr id="6" name="PDF_TEXT_GROUP_34"/>
           <p:cNvSpPr txBox="1"/>
           <p:nvPr/>
         </p:nvSpPr>
@@ -32570,7 +32525,7 @@
       </p:sp>
       <p:sp>
         <p:nvSpPr>
-          <p:cNvPr id="7" name="PDF_TEXT_GROUP_36"/>
+          <p:cNvPr id="7" name="PDF_TEXT_GROUP_35"/>
           <p:cNvSpPr txBox="1"/>
           <p:nvPr/>
         </p:nvSpPr>
@@ -32627,7 +32582,7 @@
       </p:sp>
       <p:sp>
         <p:nvSpPr>
-          <p:cNvPr id="8" name="PDF_TEXT_GROUP_37"/>
+          <p:cNvPr id="8" name="PDF_TEXT_GROUP_36"/>
           <p:cNvSpPr txBox="1"/>
           <p:nvPr/>
         </p:nvSpPr>
@@ -32675,7 +32630,7 @@
       </p:sp>
       <p:sp>
         <p:nvSpPr>
-          <p:cNvPr id="9" name="PDF_TEXT_GROUP_38"/>
+          <p:cNvPr id="9" name="PDF_TEXT_GROUP_37"/>
           <p:cNvSpPr txBox="1"/>
           <p:nvPr/>
         </p:nvSpPr>
@@ -32732,7 +32687,7 @@
       </p:sp>
       <p:sp>
         <p:nvSpPr>
-          <p:cNvPr id="10" name="PDF_TEXT_GROUP_39"/>
+          <p:cNvPr id="10" name="PDF_TEXT_GROUP_38"/>
           <p:cNvSpPr txBox="1"/>
           <p:nvPr/>
         </p:nvSpPr>
@@ -32780,7 +32735,7 @@
       </p:sp>
       <p:sp>
         <p:nvSpPr>
-          <p:cNvPr id="11" name="PDF_TEXT_GROUP_40"/>
+          <p:cNvPr id="11" name="PDF_TEXT_GROUP_39"/>
           <p:cNvSpPr txBox="1"/>
           <p:nvPr/>
         </p:nvSpPr>
@@ -32837,7 +32792,7 @@
       </p:sp>
       <p:sp>
         <p:nvSpPr>
-          <p:cNvPr id="12" name="PDF_TEXT_GROUP_41"/>
+          <p:cNvPr id="12" name="PDF_TEXT_GROUP_40"/>
           <p:cNvSpPr txBox="1"/>
           <p:nvPr/>
         </p:nvSpPr>
@@ -32885,7 +32840,7 @@
       </p:sp>
       <p:sp>
         <p:nvSpPr>
-          <p:cNvPr id="13" name="PDF_TEXT_GROUP_42"/>
+          <p:cNvPr id="13" name="PDF_TEXT_GROUP_41"/>
           <p:cNvSpPr txBox="1"/>
           <p:nvPr/>
         </p:nvSpPr>
@@ -32942,7 +32897,7 @@
       </p:sp>
       <p:sp>
         <p:nvSpPr>
-          <p:cNvPr id="14" name="PDF_TEXT_GROUP_43"/>
+          <p:cNvPr id="14" name="PDF_TEXT_GROUP_42"/>
           <p:cNvSpPr txBox="1"/>
           <p:nvPr/>
         </p:nvSpPr>
@@ -32990,7 +32945,7 @@
       </p:sp>
       <p:sp>
         <p:nvSpPr>
-          <p:cNvPr id="15" name="PDF_TEXT_GROUP_44"/>
+          <p:cNvPr id="15" name="PDF_TEXT_GROUP_43"/>
           <p:cNvSpPr txBox="1"/>
           <p:nvPr/>
         </p:nvSpPr>
@@ -33038,7 +32993,7 @@
       </p:sp>
       <p:sp>
         <p:nvSpPr>
-          <p:cNvPr id="16" name="PDF_TEXT_GROUP_45"/>
+          <p:cNvPr id="16" name="PDF_TEXT_GROUP_44"/>
           <p:cNvSpPr txBox="1"/>
           <p:nvPr/>
         </p:nvSpPr>
@@ -33086,7 +33041,7 @@
       </p:sp>
       <p:sp>
         <p:nvSpPr>
-          <p:cNvPr id="17" name="PDF_TEXT_GROUP_46"/>
+          <p:cNvPr id="17" name="PDF_TEXT_GROUP_45"/>
           <p:cNvSpPr txBox="1"/>
           <p:nvPr/>
         </p:nvSpPr>
@@ -33134,7 +33089,7 @@
       </p:sp>
       <p:sp>
         <p:nvSpPr>
-          <p:cNvPr id="18" name="PDF_TEXT_GROUP_47"/>
+          <p:cNvPr id="18" name="PDF_TEXT_GROUP_46"/>
           <p:cNvSpPr txBox="1"/>
           <p:nvPr/>
         </p:nvSpPr>
@@ -33182,7 +33137,7 @@
       </p:sp>
       <p:sp>
         <p:nvSpPr>
-          <p:cNvPr id="19" name="PDF_TEXT_GROUP_48"/>
+          <p:cNvPr id="19" name="PDF_TEXT_GROUP_47"/>
           <p:cNvSpPr txBox="1"/>
           <p:nvPr/>
         </p:nvSpPr>
@@ -33230,7 +33185,7 @@
       </p:sp>
       <p:sp>
         <p:nvSpPr>
-          <p:cNvPr id="20" name="PDF_TEXT_GROUP_49"/>
+          <p:cNvPr id="20" name="PDF_TEXT_GROUP_48"/>
           <p:cNvSpPr txBox="1"/>
           <p:nvPr/>
         </p:nvSpPr>
@@ -33374,7 +33329,7 @@
         </p:nvSpPr>
         <p:spPr>
           <a:xfrm>
-            <a:off x="985712" y="2265544"/>
+            <a:off x="985712" y="1976905"/>
             <a:ext cx="7438656" cy="302935"/>
           </a:xfrm>
           <a:prstGeom prst="rect">
@@ -33431,7 +33386,7 @@
         </p:nvSpPr>
         <p:spPr>
           <a:xfrm>
-            <a:off x="985712" y="2681311"/>
+            <a:off x="985712" y="2392672"/>
             <a:ext cx="7872545" cy="302935"/>
           </a:xfrm>
           <a:prstGeom prst="rect">
@@ -33488,7 +33443,7 @@
         </p:nvSpPr>
         <p:spPr>
           <a:xfrm>
-            <a:off x="985712" y="3097079"/>
+            <a:off x="985712" y="2808439"/>
             <a:ext cx="9292611" cy="302935"/>
           </a:xfrm>
           <a:prstGeom prst="rect">
@@ -33545,7 +33500,7 @@
         </p:nvSpPr>
         <p:spPr>
           <a:xfrm>
-            <a:off x="985712" y="3512846"/>
+            <a:off x="985712" y="3224174"/>
             <a:ext cx="11146233" cy="302935"/>
           </a:xfrm>
           <a:prstGeom prst="rect">
@@ -33602,7 +33557,7 @@
         </p:nvSpPr>
         <p:spPr>
           <a:xfrm>
-            <a:off x="985712" y="3928613"/>
+            <a:off x="985712" y="3639941"/>
             <a:ext cx="13061331" cy="302935"/>
           </a:xfrm>
           <a:prstGeom prst="rect">
@@ -33659,7 +33614,7 @@
         </p:nvSpPr>
         <p:spPr>
           <a:xfrm>
-            <a:off x="1582632" y="4234444"/>
+            <a:off x="1582632" y="3945805"/>
             <a:ext cx="6137487" cy="302935"/>
           </a:xfrm>
           <a:prstGeom prst="rect">
@@ -33707,7 +33662,7 @@
         </p:nvSpPr>
         <p:spPr>
           <a:xfrm>
-            <a:off x="985712" y="4650211"/>
+            <a:off x="985712" y="4361572"/>
             <a:ext cx="10556972" cy="302935"/>
           </a:xfrm>
           <a:prstGeom prst="rect">
@@ -33764,7 +33719,7 @@
         </p:nvSpPr>
         <p:spPr>
           <a:xfrm>
-            <a:off x="1582632" y="4956074"/>
+            <a:off x="1582632" y="4667403"/>
             <a:ext cx="8113450" cy="302935"/>
           </a:xfrm>
           <a:prstGeom prst="rect">
@@ -33812,7 +33767,7 @@
         </p:nvSpPr>
         <p:spPr>
           <a:xfrm>
-            <a:off x="985712" y="5371809"/>
+            <a:off x="985712" y="5083170"/>
             <a:ext cx="12901709" cy="302935"/>
           </a:xfrm>
           <a:prstGeom prst="rect">
@@ -33869,7 +33824,7 @@
         </p:nvSpPr>
         <p:spPr>
           <a:xfrm>
-            <a:off x="1582632" y="5677672"/>
+            <a:off x="1582632" y="5389033"/>
             <a:ext cx="2525832" cy="302935"/>
           </a:xfrm>
           <a:prstGeom prst="rect">
@@ -33912,6 +33867,111 @@
       <p:sp>
         <p:nvSpPr>
           <p:cNvPr id="14" name="PDF_TEXT_GROUP_565"/>
+          <p:cNvSpPr txBox="1"/>
+          <p:nvPr/>
+        </p:nvSpPr>
+        <p:spPr>
+          <a:xfrm>
+            <a:off x="985712" y="5804800"/>
+            <a:ext cx="12932878" cy="302935"/>
+          </a:xfrm>
+          <a:prstGeom prst="rect">
+            <a:avLst/>
+          </a:prstGeom>
+          <a:noFill/>
+          <a:ln>
+            <a:noFill/>
+          </a:ln>
+        </p:spPr>
+        <p:txBody>
+          <a:bodyPr wrap="square" anchor="t" lIns="0" rIns="0" tIns="0" bIns="0">
+            <a:noAutofit/>
+          </a:bodyPr>
+          <a:lstStyle/>
+          <a:p>
+            <a:pPr algn="l">
+              <a:lnSpc>
+                <a:spcPct val="100000"/>
+              </a:lnSpc>
+              <a:spcBef>
+                <a:spcPts val="0"/>
+              </a:spcBef>
+              <a:spcAft>
+                <a:spcPts val="0"/>
+              </a:spcAft>
+            </a:pPr>
+            <a:r>
+              <a:rPr sz="1863" b="0" i="0">
+                <a:solidFill>
+                  <a:srgbClr val="1A3E79"/>
+                </a:solidFill>
+                <a:latin typeface="Latin Modern Sans"/>
+              </a:rPr>
+              <a:t>[31]</a:t>
+            </a:r>
+            <a:r>
+              <a:rPr sz="1863" b="0" i="0">
+                <a:solidFill>
+                  <a:srgbClr val="000000"/>
+                </a:solidFill>
+                <a:latin typeface="Latin Modern Sans"/>
+              </a:rPr>
+              <a:t> ONNX Runtime, “How to configure the past present share buffer,” GenAI documentation (accessed</a:t>
+            </a:r>
+          </a:p>
+        </p:txBody>
+      </p:sp>
+      <p:sp>
+        <p:nvSpPr>
+          <p:cNvPr id="15" name="PDF_TEXT_GROUP_566"/>
+          <p:cNvSpPr txBox="1"/>
+          <p:nvPr/>
+        </p:nvSpPr>
+        <p:spPr>
+          <a:xfrm>
+            <a:off x="1582632" y="6110631"/>
+            <a:ext cx="2673425" cy="302935"/>
+          </a:xfrm>
+          <a:prstGeom prst="rect">
+            <a:avLst/>
+          </a:prstGeom>
+          <a:noFill/>
+          <a:ln>
+            <a:noFill/>
+          </a:ln>
+        </p:spPr>
+        <p:txBody>
+          <a:bodyPr wrap="square" anchor="t" lIns="0" rIns="0" tIns="0" bIns="0">
+            <a:noAutofit/>
+          </a:bodyPr>
+          <a:lstStyle/>
+          <a:p>
+            <a:pPr algn="l">
+              <a:lnSpc>
+                <a:spcPct val="100000"/>
+              </a:lnSpc>
+              <a:spcBef>
+                <a:spcPts val="0"/>
+              </a:spcBef>
+              <a:spcAft>
+                <a:spcPts val="0"/>
+              </a:spcAft>
+            </a:pPr>
+            <a:r>
+              <a:rPr sz="1863" b="0" i="0">
+                <a:solidFill>
+                  <a:srgbClr val="000000"/>
+                </a:solidFill>
+                <a:latin typeface="Latin Modern Sans"/>
+              </a:rPr>
+              <a:t>September 11, 2026).</a:t>
+            </a:r>
+          </a:p>
+        </p:txBody>
+      </p:sp>
+      <p:sp>
+        <p:nvSpPr>
+          <p:cNvPr id="16" name="PDF_TEXT_GROUP_567"/>
           <p:cNvSpPr txBox="1"/>
           <p:nvPr/>
         </p:nvSpPr>
@@ -33959,7 +34019,7 @@
       </p:sp>
       <p:sp>
         <p:nvSpPr>
-          <p:cNvPr id="15" name="PDF_TEXT_GROUP_566"/>
+          <p:cNvPr id="17" name="PDF_TEXT_GROUP_568"/>
           <p:cNvSpPr txBox="1"/>
           <p:nvPr/>
         </p:nvSpPr>
@@ -34007,7 +34067,7 @@
       </p:sp>
       <p:sp>
         <p:nvSpPr>
-          <p:cNvPr id="16" name="PDF_TEXT_GROUP_567"/>
+          <p:cNvPr id="18" name="PDF_TEXT_GROUP_569"/>
           <p:cNvSpPr txBox="1"/>
           <p:nvPr/>
         </p:nvSpPr>
@@ -34055,7 +34115,7 @@
       </p:sp>
       <p:sp>
         <p:nvSpPr>
-          <p:cNvPr id="17" name="PDF_TEXT_GROUP_568"/>
+          <p:cNvPr id="19" name="PDF_TEXT_GROUP_570"/>
           <p:cNvSpPr txBox="1"/>
           <p:nvPr/>
         </p:nvSpPr>
@@ -34103,7 +34163,7 @@
       </p:sp>
       <p:sp>
         <p:nvSpPr>
-          <p:cNvPr id="18" name="PDF_TEXT_GROUP_569"/>
+          <p:cNvPr id="20" name="PDF_TEXT_GROUP_571"/>
           <p:cNvSpPr txBox="1"/>
           <p:nvPr/>
         </p:nvSpPr>
@@ -34193,7 +34253,7 @@
       </p:pic>
       <p:sp>
         <p:nvSpPr>
-          <p:cNvPr id="3" name="PDF_TEXT_GROUP_50"/>
+          <p:cNvPr id="3" name="PDF_TEXT_GROUP_49"/>
           <p:cNvSpPr txBox="1"/>
           <p:nvPr/>
         </p:nvSpPr>
@@ -34241,7 +34301,7 @@
       </p:sp>
       <p:sp>
         <p:nvSpPr>
-          <p:cNvPr id="4" name="PDF_TEXT_GROUP_51"/>
+          <p:cNvPr id="4" name="PDF_TEXT_GROUP_50"/>
           <p:cNvSpPr txBox="1"/>
           <p:nvPr/>
         </p:nvSpPr>
@@ -34316,7 +34376,7 @@
       </p:sp>
       <p:sp>
         <p:nvSpPr>
-          <p:cNvPr id="5" name="PDF_TEXT_GROUP_52"/>
+          <p:cNvPr id="5" name="PDF_TEXT_GROUP_51"/>
           <p:cNvSpPr txBox="1"/>
           <p:nvPr/>
         </p:nvSpPr>
@@ -34382,7 +34442,7 @@
       </p:sp>
       <p:sp>
         <p:nvSpPr>
-          <p:cNvPr id="6" name="PDF_TEXT_GROUP_53"/>
+          <p:cNvPr id="6" name="PDF_TEXT_GROUP_52"/>
           <p:cNvSpPr txBox="1"/>
           <p:nvPr/>
         </p:nvSpPr>
@@ -34448,14 +34508,14 @@
       </p:sp>
       <p:sp>
         <p:nvSpPr>
-          <p:cNvPr id="7" name="PDF_TEXT_GROUP_54"/>
+          <p:cNvPr id="7" name="PDF_TEXT_GROUP_53"/>
           <p:cNvSpPr txBox="1"/>
           <p:nvPr/>
         </p:nvSpPr>
         <p:spPr>
           <a:xfrm>
             <a:off x="1143656" y="5830501"/>
-            <a:ext cx="12301672" cy="929891"/>
+            <a:ext cx="12029277" cy="929891"/>
           </a:xfrm>
           <a:prstGeom prst="rect">
             <a:avLst/>
@@ -34489,7 +34549,7 @@
                 </a:solidFill>
                 <a:latin typeface="Latin Modern Sans"/>
               </a:rPr>
-              <a:t>UAV and distributed inference are validation workloads for the same questions;</a:t>
+              <a:t>UAV sensing tests dependencies between observations; distributed inference tests</a:t>
             </a:r>
             <a:r>
               <a:rPr sz="2710" b="0" i="0">
@@ -34498,14 +34558,14 @@
                 </a:solidFill>
                 <a:latin typeface="Latin Modern Sans"/>
               </a:rPr>
-              <a:t> implementing two applications alone does not establish two research contributions.</a:t>
-            </a:r>
-          </a:p>
-        </p:txBody>
-      </p:sp>
-      <p:sp>
-        <p:nvSpPr>
-          <p:cNvPr id="8" name="PDF_TEXT_GROUP_55"/>
+              <a:t> ordered computation and state. Both evaluate the same framework.</a:t>
+            </a:r>
+          </a:p>
+        </p:txBody>
+      </p:sp>
+      <p:sp>
+        <p:nvSpPr>
+          <p:cNvPr id="8" name="PDF_TEXT_GROUP_54"/>
           <p:cNvSpPr txBox="1"/>
           <p:nvPr/>
         </p:nvSpPr>
@@ -34553,7 +34613,7 @@
       </p:sp>
       <p:sp>
         <p:nvSpPr>
-          <p:cNvPr id="9" name="PDF_TEXT_GROUP_56"/>
+          <p:cNvPr id="9" name="PDF_TEXT_GROUP_55"/>
           <p:cNvSpPr txBox="1"/>
           <p:nvPr/>
         </p:nvSpPr>
@@ -34601,7 +34661,7 @@
       </p:sp>
       <p:sp>
         <p:nvSpPr>
-          <p:cNvPr id="10" name="PDF_TEXT_GROUP_57"/>
+          <p:cNvPr id="10" name="PDF_TEXT_GROUP_56"/>
           <p:cNvSpPr txBox="1"/>
           <p:nvPr/>
         </p:nvSpPr>
@@ -34649,7 +34709,7 @@
       </p:sp>
       <p:sp>
         <p:nvSpPr>
-          <p:cNvPr id="11" name="PDF_TEXT_GROUP_58"/>
+          <p:cNvPr id="11" name="PDF_TEXT_GROUP_57"/>
           <p:cNvSpPr txBox="1"/>
           <p:nvPr/>
         </p:nvSpPr>
@@ -34697,7 +34757,7 @@
       </p:sp>
       <p:sp>
         <p:nvSpPr>
-          <p:cNvPr id="12" name="PDF_TEXT_GROUP_59"/>
+          <p:cNvPr id="12" name="PDF_TEXT_GROUP_58"/>
           <p:cNvSpPr txBox="1"/>
           <p:nvPr/>
         </p:nvSpPr>
@@ -34745,7 +34805,7 @@
       </p:sp>
       <p:sp>
         <p:nvSpPr>
-          <p:cNvPr id="13" name="PDF_BULLET_SPAN_77"/>
+          <p:cNvPr id="13" name="PDF_BULLET_SPAN_78"/>
           <p:cNvSpPr/>
           <p:nvPr/>
         </p:nvSpPr>
@@ -34788,7 +34848,7 @@
       </p:sp>
       <p:sp>
         <p:nvSpPr>
-          <p:cNvPr id="14" name="PDF_BULLET_SPAN_82"/>
+          <p:cNvPr id="14" name="PDF_BULLET_SPAN_83"/>
           <p:cNvSpPr/>
           <p:nvPr/>
         </p:nvSpPr>
@@ -34831,7 +34891,7 @@
       </p:sp>
       <p:sp>
         <p:nvSpPr>
-          <p:cNvPr id="15" name="PDF_BULLET_SPAN_86"/>
+          <p:cNvPr id="15" name="PDF_BULLET_SPAN_87"/>
           <p:cNvSpPr/>
           <p:nvPr/>
         </p:nvSpPr>
@@ -34916,7 +34976,7 @@
       </p:pic>
       <p:sp>
         <p:nvSpPr>
-          <p:cNvPr id="3" name="PDF_TEXT_GROUP_60"/>
+          <p:cNvPr id="3" name="PDF_TEXT_GROUP_59"/>
           <p:cNvSpPr txBox="1"/>
           <p:nvPr/>
         </p:nvSpPr>
@@ -34964,13 +35024,13 @@
       </p:sp>
       <p:sp>
         <p:nvSpPr>
-          <p:cNvPr id="4" name="PDF_TEXT_GROUP_61"/>
-          <p:cNvSpPr txBox="1"/>
-          <p:nvPr/>
-        </p:nvSpPr>
-        <p:spPr>
-          <a:xfrm>
-            <a:off x="1107736" y="1280196"/>
+          <p:cNvPr id="4" name="PDF_TEXT_GROUP_60"/>
+          <p:cNvSpPr txBox="1"/>
+          <p:nvPr/>
+        </p:nvSpPr>
+        <p:spPr>
+          <a:xfrm>
+            <a:off x="1107736" y="1255152"/>
             <a:ext cx="1571345" cy="385554"/>
           </a:xfrm>
           <a:prstGeom prst="rect">
@@ -35012,13 +35072,13 @@
       </p:sp>
       <p:sp>
         <p:nvSpPr>
-          <p:cNvPr id="5" name="PDF_TEXT_GROUP_62"/>
-          <p:cNvSpPr txBox="1"/>
-          <p:nvPr/>
-        </p:nvSpPr>
-        <p:spPr>
-          <a:xfrm>
-            <a:off x="4951568" y="1280196"/>
+          <p:cNvPr id="5" name="PDF_TEXT_GROUP_61"/>
+          <p:cNvSpPr txBox="1"/>
+          <p:nvPr/>
+        </p:nvSpPr>
+        <p:spPr>
+          <a:xfrm>
+            <a:off x="4951568" y="1255152"/>
             <a:ext cx="5879781" cy="385554"/>
           </a:xfrm>
           <a:prstGeom prst="rect">
@@ -35060,13 +35120,13 @@
       </p:sp>
       <p:sp>
         <p:nvSpPr>
-          <p:cNvPr id="6" name="PDF_TEXT_GROUP_63"/>
-          <p:cNvSpPr txBox="1"/>
-          <p:nvPr/>
-        </p:nvSpPr>
-        <p:spPr>
-          <a:xfrm>
-            <a:off x="1107736" y="1848556"/>
+          <p:cNvPr id="6" name="PDF_TEXT_GROUP_62"/>
+          <p:cNvSpPr txBox="1"/>
+          <p:nvPr/>
+        </p:nvSpPr>
+        <p:spPr>
+          <a:xfrm>
+            <a:off x="1107736" y="1823512"/>
             <a:ext cx="2842402" cy="385554"/>
           </a:xfrm>
           <a:prstGeom prst="rect">
@@ -35108,13 +35168,13 @@
       </p:sp>
       <p:sp>
         <p:nvSpPr>
-          <p:cNvPr id="7" name="PDF_TEXT_GROUP_64"/>
-          <p:cNvSpPr txBox="1"/>
-          <p:nvPr/>
-        </p:nvSpPr>
-        <p:spPr>
-          <a:xfrm>
-            <a:off x="4951408" y="1848556"/>
+          <p:cNvPr id="7" name="PDF_TEXT_GROUP_63"/>
+          <p:cNvSpPr txBox="1"/>
+          <p:nvPr/>
+        </p:nvSpPr>
+        <p:spPr>
+          <a:xfrm>
+            <a:off x="4951408" y="1823512"/>
             <a:ext cx="8018146" cy="385554"/>
           </a:xfrm>
           <a:prstGeom prst="rect">
@@ -35156,13 +35216,13 @@
       </p:sp>
       <p:sp>
         <p:nvSpPr>
-          <p:cNvPr id="8" name="PDF_TEXT_GROUP_65"/>
-          <p:cNvSpPr txBox="1"/>
-          <p:nvPr/>
-        </p:nvSpPr>
-        <p:spPr>
-          <a:xfrm>
-            <a:off x="1107736" y="2416915"/>
+          <p:cNvPr id="8" name="PDF_TEXT_GROUP_64"/>
+          <p:cNvSpPr txBox="1"/>
+          <p:nvPr/>
+        </p:nvSpPr>
+        <p:spPr>
+          <a:xfrm>
+            <a:off x="1107736" y="2391871"/>
             <a:ext cx="2776495" cy="385554"/>
           </a:xfrm>
           <a:prstGeom prst="rect">
@@ -35204,14 +35264,14 @@
       </p:sp>
       <p:sp>
         <p:nvSpPr>
-          <p:cNvPr id="9" name="PDF_TEXT_GROUP_66"/>
-          <p:cNvSpPr txBox="1"/>
-          <p:nvPr/>
-        </p:nvSpPr>
-        <p:spPr>
-          <a:xfrm>
-            <a:off x="4951472" y="2416915"/>
-            <a:ext cx="8650095" cy="828844"/>
+          <p:cNvPr id="9" name="PDF_TEXT_GROUP_65"/>
+          <p:cNvSpPr txBox="1"/>
+          <p:nvPr/>
+        </p:nvSpPr>
+        <p:spPr>
+          <a:xfrm>
+            <a:off x="4951472" y="2391871"/>
+            <a:ext cx="8650095" cy="828877"/>
           </a:xfrm>
           <a:prstGeom prst="rect">
             <a:avLst/>
@@ -35261,13 +35321,13 @@
       </p:sp>
       <p:sp>
         <p:nvSpPr>
-          <p:cNvPr id="10" name="PDF_TEXT_GROUP_67"/>
-          <p:cNvSpPr txBox="1"/>
-          <p:nvPr/>
-        </p:nvSpPr>
-        <p:spPr>
-          <a:xfrm>
-            <a:off x="1107736" y="3371603"/>
+          <p:cNvPr id="10" name="PDF_TEXT_GROUP_66"/>
+          <p:cNvSpPr txBox="1"/>
+          <p:nvPr/>
+        </p:nvSpPr>
+        <p:spPr>
+          <a:xfrm>
+            <a:off x="1107736" y="3346591"/>
             <a:ext cx="1741784" cy="385554"/>
           </a:xfrm>
           <a:prstGeom prst="rect">
@@ -35309,13 +35369,13 @@
       </p:sp>
       <p:sp>
         <p:nvSpPr>
-          <p:cNvPr id="11" name="PDF_TEXT_GROUP_68"/>
-          <p:cNvSpPr txBox="1"/>
-          <p:nvPr/>
-        </p:nvSpPr>
-        <p:spPr>
-          <a:xfrm>
-            <a:off x="4951601" y="3371603"/>
+          <p:cNvPr id="11" name="PDF_TEXT_GROUP_67"/>
+          <p:cNvSpPr txBox="1"/>
+          <p:nvPr/>
+        </p:nvSpPr>
+        <p:spPr>
+          <a:xfrm>
+            <a:off x="4951601" y="3346591"/>
             <a:ext cx="8139369" cy="385554"/>
           </a:xfrm>
           <a:prstGeom prst="rect">
@@ -35357,13 +35417,13 @@
       </p:sp>
       <p:sp>
         <p:nvSpPr>
-          <p:cNvPr id="12" name="PDF_TEXT_GROUP_69"/>
-          <p:cNvSpPr txBox="1"/>
-          <p:nvPr/>
-        </p:nvSpPr>
-        <p:spPr>
-          <a:xfrm>
-            <a:off x="1107736" y="3939962"/>
+          <p:cNvPr id="12" name="PDF_TEXT_GROUP_68"/>
+          <p:cNvSpPr txBox="1"/>
+          <p:nvPr/>
+        </p:nvSpPr>
+        <p:spPr>
+          <a:xfrm>
+            <a:off x="1107736" y="3914950"/>
             <a:ext cx="2003438" cy="385554"/>
           </a:xfrm>
           <a:prstGeom prst="rect">
@@ -35405,14 +35465,14 @@
       </p:sp>
       <p:sp>
         <p:nvSpPr>
-          <p:cNvPr id="13" name="PDF_TEXT_GROUP_70"/>
-          <p:cNvSpPr txBox="1"/>
-          <p:nvPr/>
-        </p:nvSpPr>
-        <p:spPr>
-          <a:xfrm>
-            <a:off x="4951536" y="3939962"/>
-            <a:ext cx="7990882" cy="828877"/>
+          <p:cNvPr id="13" name="PDF_TEXT_GROUP_69"/>
+          <p:cNvSpPr txBox="1"/>
+          <p:nvPr/>
+        </p:nvSpPr>
+        <p:spPr>
+          <a:xfrm>
+            <a:off x="4951536" y="3914950"/>
+            <a:ext cx="7990882" cy="828844"/>
           </a:xfrm>
           <a:prstGeom prst="rect">
             <a:avLst/>
@@ -35462,13 +35522,13 @@
       </p:sp>
       <p:sp>
         <p:nvSpPr>
-          <p:cNvPr id="14" name="PDF_TEXT_GROUP_71"/>
-          <p:cNvSpPr txBox="1"/>
-          <p:nvPr/>
-        </p:nvSpPr>
-        <p:spPr>
-          <a:xfrm>
-            <a:off x="1107736" y="4894682"/>
+          <p:cNvPr id="14" name="PDF_TEXT_GROUP_70"/>
+          <p:cNvSpPr txBox="1"/>
+          <p:nvPr/>
+        </p:nvSpPr>
+        <p:spPr>
+          <a:xfrm>
+            <a:off x="1107736" y="4869638"/>
             <a:ext cx="1985176" cy="385554"/>
           </a:xfrm>
           <a:prstGeom prst="rect">
@@ -35510,13 +35570,13 @@
       </p:sp>
       <p:sp>
         <p:nvSpPr>
-          <p:cNvPr id="15" name="PDF_TEXT_GROUP_72"/>
-          <p:cNvSpPr txBox="1"/>
-          <p:nvPr/>
-        </p:nvSpPr>
-        <p:spPr>
-          <a:xfrm>
-            <a:off x="4951601" y="4894682"/>
+          <p:cNvPr id="15" name="PDF_TEXT_GROUP_71"/>
+          <p:cNvSpPr txBox="1"/>
+          <p:nvPr/>
+        </p:nvSpPr>
+        <p:spPr>
+          <a:xfrm>
+            <a:off x="4951601" y="4869638"/>
             <a:ext cx="7495476" cy="828844"/>
           </a:xfrm>
           <a:prstGeom prst="rect">
@@ -35567,14 +35627,14 @@
       </p:sp>
       <p:sp>
         <p:nvSpPr>
-          <p:cNvPr id="16" name="PDF_TEXT_GROUP_73"/>
-          <p:cNvSpPr txBox="1"/>
-          <p:nvPr/>
-        </p:nvSpPr>
-        <p:spPr>
-          <a:xfrm>
-            <a:off x="1123808" y="6162374"/>
-            <a:ext cx="12039199" cy="828844"/>
+          <p:cNvPr id="16" name="PDF_TEXT_GROUP_72"/>
+          <p:cNvSpPr txBox="1"/>
+          <p:nvPr/>
+        </p:nvSpPr>
+        <p:spPr>
+          <a:xfrm>
+            <a:off x="1123808" y="6137330"/>
+            <a:ext cx="11787672" cy="828844"/>
           </a:xfrm>
           <a:prstGeom prst="rect">
             <a:avLst/>
@@ -35608,7 +35668,7 @@
                 </a:solidFill>
                 <a:latin typeface="Latin Modern Sans"/>
               </a:rPr>
-              <a:t>Candidate increment: connect runtime assignment to enforceable object-admission rules.</a:t>
+              <a:t>Proposed contribution: each selected Provider checks whether input Data matches the</a:t>
             </a:r>
             <a:r>
               <a:rPr sz="2371" b="0" i="0">
@@ -35617,14 +35677,14 @@
                 </a:solidFill>
                 <a:latin typeface="Latin Modern Sans"/>
               </a:rPr>
-              <a:t> This is not a claim to be the first NDN service framework.</a:t>
-            </a:r>
-          </a:p>
-        </p:txBody>
-      </p:sp>
-      <p:sp>
-        <p:nvSpPr>
-          <p:cNvPr id="17" name="PDF_TEXT_GROUP_74"/>
+              <a:t> task’s runtime role assignments and declared dependencies.</a:t>
+            </a:r>
+          </a:p>
+        </p:txBody>
+      </p:sp>
+      <p:sp>
+        <p:nvSpPr>
+          <p:cNvPr id="17" name="PDF_TEXT_GROUP_73"/>
           <p:cNvSpPr txBox="1"/>
           <p:nvPr/>
         </p:nvSpPr>
@@ -35672,7 +35732,7 @@
       </p:sp>
       <p:sp>
         <p:nvSpPr>
-          <p:cNvPr id="18" name="PDF_TEXT_GROUP_75"/>
+          <p:cNvPr id="18" name="PDF_TEXT_GROUP_74"/>
           <p:cNvSpPr txBox="1"/>
           <p:nvPr/>
         </p:nvSpPr>
@@ -35720,7 +35780,7 @@
       </p:sp>
       <p:sp>
         <p:nvSpPr>
-          <p:cNvPr id="19" name="PDF_TEXT_GROUP_76"/>
+          <p:cNvPr id="19" name="PDF_TEXT_GROUP_75"/>
           <p:cNvSpPr txBox="1"/>
           <p:nvPr/>
         </p:nvSpPr>
@@ -35768,7 +35828,7 @@
       </p:sp>
       <p:sp>
         <p:nvSpPr>
-          <p:cNvPr id="20" name="PDF_TEXT_GROUP_77"/>
+          <p:cNvPr id="20" name="PDF_TEXT_GROUP_76"/>
           <p:cNvSpPr txBox="1"/>
           <p:nvPr/>
         </p:nvSpPr>
@@ -35816,7 +35876,7 @@
       </p:sp>
       <p:sp>
         <p:nvSpPr>
-          <p:cNvPr id="21" name="PDF_TEXT_GROUP_78"/>
+          <p:cNvPr id="21" name="PDF_TEXT_GROUP_77"/>
           <p:cNvSpPr txBox="1"/>
           <p:nvPr/>
         </p:nvSpPr>
@@ -35906,7 +35966,7 @@
       </p:pic>
       <p:sp>
         <p:nvSpPr>
-          <p:cNvPr id="3" name="PDF_TEXT_GROUP_79"/>
+          <p:cNvPr id="3" name="PDF_TEXT_GROUP_78"/>
           <p:cNvSpPr txBox="1"/>
           <p:nvPr/>
         </p:nvSpPr>
@@ -35954,13 +36014,13 @@
       </p:sp>
       <p:sp>
         <p:nvSpPr>
-          <p:cNvPr id="4" name="PDF_TEXT_GROUP_80"/>
-          <p:cNvSpPr txBox="1"/>
-          <p:nvPr/>
-        </p:nvSpPr>
-        <p:spPr>
-          <a:xfrm>
-            <a:off x="1107736" y="1202446"/>
+          <p:cNvPr id="4" name="PDF_TEXT_GROUP_79"/>
+          <p:cNvSpPr txBox="1"/>
+          <p:nvPr/>
+        </p:nvSpPr>
+        <p:spPr>
+          <a:xfrm>
+            <a:off x="1107736" y="1356977"/>
             <a:ext cx="3118495" cy="385554"/>
           </a:xfrm>
           <a:prstGeom prst="rect">
@@ -36002,13 +36062,13 @@
       </p:sp>
       <p:sp>
         <p:nvSpPr>
-          <p:cNvPr id="5" name="PDF_TEXT_GROUP_81"/>
-          <p:cNvSpPr txBox="1"/>
-          <p:nvPr/>
-        </p:nvSpPr>
-        <p:spPr>
-          <a:xfrm>
-            <a:off x="6360351" y="1202446"/>
+          <p:cNvPr id="5" name="PDF_TEXT_GROUP_80"/>
+          <p:cNvSpPr txBox="1"/>
+          <p:nvPr/>
+        </p:nvSpPr>
+        <p:spPr>
+          <a:xfrm>
+            <a:off x="6360351" y="1356977"/>
             <a:ext cx="3885245" cy="385554"/>
           </a:xfrm>
           <a:prstGeom prst="rect">
@@ -36050,14 +36110,14 @@
       </p:sp>
       <p:sp>
         <p:nvSpPr>
-          <p:cNvPr id="6" name="PDF_TEXT_GROUP_82"/>
-          <p:cNvSpPr txBox="1"/>
-          <p:nvPr/>
-        </p:nvSpPr>
-        <p:spPr>
-          <a:xfrm>
-            <a:off x="1107736" y="1770805"/>
-            <a:ext cx="4994836" cy="828844"/>
+          <p:cNvPr id="6" name="PDF_TEXT_GROUP_81"/>
+          <p:cNvSpPr txBox="1"/>
+          <p:nvPr/>
+        </p:nvSpPr>
+        <p:spPr>
+          <a:xfrm>
+            <a:off x="1107736" y="1925337"/>
+            <a:ext cx="4994836" cy="828877"/>
           </a:xfrm>
           <a:prstGeom prst="rect">
             <a:avLst/>
@@ -36107,13 +36167,13 @@
       </p:sp>
       <p:sp>
         <p:nvSpPr>
-          <p:cNvPr id="7" name="PDF_TEXT_GROUP_83"/>
-          <p:cNvSpPr txBox="1"/>
-          <p:nvPr/>
-        </p:nvSpPr>
-        <p:spPr>
-          <a:xfrm>
-            <a:off x="6360480" y="1770805"/>
+          <p:cNvPr id="7" name="PDF_TEXT_GROUP_82"/>
+          <p:cNvSpPr txBox="1"/>
+          <p:nvPr/>
+        </p:nvSpPr>
+        <p:spPr>
+          <a:xfrm>
+            <a:off x="6360480" y="1925337"/>
             <a:ext cx="7249705" cy="1215205"/>
           </a:xfrm>
           <a:prstGeom prst="rect">
@@ -36173,13 +36233,13 @@
       </p:sp>
       <p:sp>
         <p:nvSpPr>
-          <p:cNvPr id="8" name="PDF_TEXT_GROUP_84"/>
-          <p:cNvSpPr txBox="1"/>
-          <p:nvPr/>
-        </p:nvSpPr>
-        <p:spPr>
-          <a:xfrm>
-            <a:off x="1107736" y="3111853"/>
+          <p:cNvPr id="8" name="PDF_TEXT_GROUP_83"/>
+          <p:cNvSpPr txBox="1"/>
+          <p:nvPr/>
+        </p:nvSpPr>
+        <p:spPr>
+          <a:xfrm>
+            <a:off x="1107736" y="3266384"/>
             <a:ext cx="4994675" cy="828844"/>
           </a:xfrm>
           <a:prstGeom prst="rect">
@@ -36223,21 +36283,21 @@
                 </a:solidFill>
                 <a:latin typeface="Latin Modern Sans"/>
               </a:rPr>
-              <a:t>dency admission</a:t>
-            </a:r>
-          </a:p>
-        </p:txBody>
-      </p:sp>
-      <p:sp>
-        <p:nvSpPr>
-          <p:cNvPr id="9" name="PDF_TEXT_GROUP_85"/>
-          <p:cNvSpPr txBox="1"/>
-          <p:nvPr/>
-        </p:nvSpPr>
-        <p:spPr>
-          <a:xfrm>
-            <a:off x="6360480" y="3111853"/>
-            <a:ext cx="6715302" cy="1215172"/>
+              <a:t>dency checks</a:t>
+            </a:r>
+          </a:p>
+        </p:txBody>
+      </p:sp>
+      <p:sp>
+        <p:nvSpPr>
+          <p:cNvPr id="9" name="PDF_TEXT_GROUP_84"/>
+          <p:cNvSpPr txBox="1"/>
+          <p:nvPr/>
+        </p:nvSpPr>
+        <p:spPr>
+          <a:xfrm>
+            <a:off x="6360480" y="3266384"/>
+            <a:ext cx="6995895" cy="828844"/>
           </a:xfrm>
           <a:prstGeom prst="rect">
             <a:avLst/>
@@ -36271,7 +36331,7 @@
                 </a:solidFill>
                 <a:latin typeface="Latin Modern Sans"/>
               </a:rPr>
-              <a:t>Design and implementation work; complete</a:t>
+              <a:t>Design and implementation work; direct/cache and</a:t>
             </a:r>
             <a:r>
               <a:rPr sz="2371" b="0" i="0">
@@ -36280,8 +36340,47 @@
                 </a:solidFill>
                 <a:latin typeface="Latin Modern Sans"/>
               </a:rPr>
-              <a:t> direct/cache and failure acceptance gates remain</a:t>
-            </a:r>
+              <a:t> failure validation remains incomplete</a:t>
+            </a:r>
+          </a:p>
+        </p:txBody>
+      </p:sp>
+      <p:sp>
+        <p:nvSpPr>
+          <p:cNvPr id="10" name="PDF_TEXT_GROUP_85"/>
+          <p:cNvSpPr txBox="1"/>
+          <p:nvPr/>
+        </p:nvSpPr>
+        <p:spPr>
+          <a:xfrm>
+            <a:off x="1107736" y="4221072"/>
+            <a:ext cx="4148422" cy="385554"/>
+          </a:xfrm>
+          <a:prstGeom prst="rect">
+            <a:avLst/>
+          </a:prstGeom>
+          <a:noFill/>
+          <a:ln>
+            <a:noFill/>
+          </a:ln>
+        </p:spPr>
+        <p:txBody>
+          <a:bodyPr wrap="square" anchor="t" lIns="0" rIns="0" tIns="0" bIns="0">
+            <a:noAutofit/>
+          </a:bodyPr>
+          <a:lstStyle/>
+          <a:p>
+            <a:pPr algn="l">
+              <a:lnSpc>
+                <a:spcPct val="100000"/>
+              </a:lnSpc>
+              <a:spcBef>
+                <a:spcPts val="0"/>
+              </a:spcBef>
+              <a:spcAft>
+                <a:spcPts val="0"/>
+              </a:spcAft>
+            </a:pPr>
             <a:r>
               <a:rPr sz="2371" b="0" i="0">
                 <a:solidFill>
@@ -36289,21 +36388,21 @@
                 </a:solidFill>
                 <a:latin typeface="Latin Modern Sans"/>
               </a:rPr>
-              <a:t> open</a:t>
-            </a:r>
-          </a:p>
-        </p:txBody>
-      </p:sp>
-      <p:sp>
-        <p:nvSpPr>
-          <p:cNvPr id="10" name="PDF_TEXT_GROUP_86"/>
-          <p:cNvSpPr txBox="1"/>
-          <p:nvPr/>
-        </p:nvSpPr>
-        <p:spPr>
-          <a:xfrm>
-            <a:off x="1107736" y="4452869"/>
-            <a:ext cx="4148422" cy="385554"/>
+              <a:t>Cross-case empirical findings</a:t>
+            </a:r>
+          </a:p>
+        </p:txBody>
+      </p:sp>
+      <p:sp>
+        <p:nvSpPr>
+          <p:cNvPr id="11" name="PDF_TEXT_GROUP_86"/>
+          <p:cNvSpPr txBox="1"/>
+          <p:nvPr/>
+        </p:nvSpPr>
+        <p:spPr>
+          <a:xfrm>
+            <a:off x="6360351" y="4221072"/>
+            <a:ext cx="6794172" cy="1215172"/>
           </a:xfrm>
           <a:prstGeom prst="rect">
             <a:avLst/>
@@ -36337,47 +36436,8 @@
                 </a:solidFill>
                 <a:latin typeface="Latin Modern Sans"/>
               </a:rPr>
-              <a:t>Cross-case empirical findings</a:t>
-            </a:r>
-          </a:p>
-        </p:txBody>
-      </p:sp>
-      <p:sp>
-        <p:nvSpPr>
-          <p:cNvPr id="11" name="PDF_TEXT_GROUP_87"/>
-          <p:cNvSpPr txBox="1"/>
-          <p:nvPr/>
-        </p:nvSpPr>
-        <p:spPr>
-          <a:xfrm>
-            <a:off x="6360351" y="4452869"/>
-            <a:ext cx="6794172" cy="1215172"/>
-          </a:xfrm>
-          <a:prstGeom prst="rect">
-            <a:avLst/>
-          </a:prstGeom>
-          <a:noFill/>
-          <a:ln>
-            <a:noFill/>
-          </a:ln>
-        </p:spPr>
-        <p:txBody>
-          <a:bodyPr wrap="square" anchor="t" lIns="0" rIns="0" tIns="0" bIns="0">
-            <a:noAutofit/>
-          </a:bodyPr>
-          <a:lstStyle/>
-          <a:p>
-            <a:pPr algn="l">
-              <a:lnSpc>
-                <a:spcPct val="100000"/>
-              </a:lnSpc>
-              <a:spcBef>
-                <a:spcPts val="0"/>
-              </a:spcBef>
-              <a:spcAft>
-                <a:spcPts val="0"/>
-              </a:spcAft>
-            </a:pPr>
+              <a:t>Existing mobility/work-efficiency and small-model</a:t>
+            </a:r>
             <a:r>
               <a:rPr sz="2371" b="0" i="0">
                 <a:solidFill>
@@ -36385,7 +36445,7 @@
                 </a:solidFill>
                 <a:latin typeface="Latin Modern Sans"/>
               </a:rPr>
-              <a:t>Existing mobility/work-efficiency and small-model</a:t>
+              <a:t> results support limited configurations, not all new</a:t>
             </a:r>
             <a:r>
               <a:rPr sz="2371" b="0" i="0">
@@ -36394,8 +36454,47 @@
                 </a:solidFill>
                 <a:latin typeface="Latin Modern Sans"/>
               </a:rPr>
-              <a:t> results support limited configurations, not all new</a:t>
-            </a:r>
+              <a:t> collaboration claims</a:t>
+            </a:r>
+          </a:p>
+        </p:txBody>
+      </p:sp>
+      <p:sp>
+        <p:nvSpPr>
+          <p:cNvPr id="12" name="PDF_TEXT_GROUP_87"/>
+          <p:cNvSpPr txBox="1"/>
+          <p:nvPr/>
+        </p:nvSpPr>
+        <p:spPr>
+          <a:xfrm>
+            <a:off x="1123808" y="5875092"/>
+            <a:ext cx="12516981" cy="828877"/>
+          </a:xfrm>
+          <a:prstGeom prst="rect">
+            <a:avLst/>
+          </a:prstGeom>
+          <a:noFill/>
+          <a:ln>
+            <a:noFill/>
+          </a:ln>
+        </p:spPr>
+        <p:txBody>
+          <a:bodyPr wrap="square" anchor="t" lIns="0" rIns="0" tIns="0" bIns="0">
+            <a:noAutofit/>
+          </a:bodyPr>
+          <a:lstStyle/>
+          <a:p>
+            <a:pPr algn="l">
+              <a:lnSpc>
+                <a:spcPct val="100000"/>
+              </a:lnSpc>
+              <a:spcBef>
+                <a:spcPts val="0"/>
+              </a:spcBef>
+              <a:spcAft>
+                <a:spcPts val="0"/>
+              </a:spcAft>
+            </a:pPr>
             <a:r>
               <a:rPr sz="2371" b="0" i="0">
                 <a:solidFill>
@@ -36403,47 +36502,8 @@
                 </a:solidFill>
                 <a:latin typeface="Latin Modern Sans"/>
               </a:rPr>
-              <a:t> collaboration claims</a:t>
-            </a:r>
-          </a:p>
-        </p:txBody>
-      </p:sp>
-      <p:sp>
-        <p:nvSpPr>
-          <p:cNvPr id="12" name="PDF_TEXT_GROUP_88"/>
-          <p:cNvSpPr txBox="1"/>
-          <p:nvPr/>
-        </p:nvSpPr>
-        <p:spPr>
-          <a:xfrm>
-            <a:off x="1123808" y="6106921"/>
-            <a:ext cx="12516981" cy="828844"/>
-          </a:xfrm>
-          <a:prstGeom prst="rect">
-            <a:avLst/>
-          </a:prstGeom>
-          <a:noFill/>
-          <a:ln>
-            <a:noFill/>
-          </a:ln>
-        </p:spPr>
-        <p:txBody>
-          <a:bodyPr wrap="square" anchor="t" lIns="0" rIns="0" tIns="0" bIns="0">
-            <a:noAutofit/>
-          </a:bodyPr>
-          <a:lstStyle/>
-          <a:p>
-            <a:pPr algn="l">
-              <a:lnSpc>
-                <a:spcPct val="100000"/>
-              </a:lnSpc>
-              <a:spcBef>
-                <a:spcPts val="0"/>
-              </a:spcBef>
-              <a:spcAft>
-                <a:spcPts val="0"/>
-              </a:spcAft>
-            </a:pPr>
+              <a:t>Proposal status, September 2026: implemented, locally tested, measured, and fully qualified</a:t>
+            </a:r>
             <a:r>
               <a:rPr sz="2371" b="0" i="0">
                 <a:solidFill>
@@ -36451,15 +36511,6 @@
                 </a:solidFill>
                 <a:latin typeface="Latin Modern Sans"/>
               </a:rPr>
-              <a:t>Proposal status, September 2026: implemented, locally tested, measured, and fully qualified</a:t>
-            </a:r>
-            <a:r>
-              <a:rPr sz="2371" b="0" i="0">
-                <a:solidFill>
-                  <a:srgbClr val="000000"/>
-                </a:solidFill>
-                <a:latin typeface="Latin Modern Sans"/>
-              </a:rPr>
               <a:t> are not interchangeable. [28]</a:t>
             </a:r>
           </a:p>
@@ -36467,7 +36518,7 @@
       </p:sp>
       <p:sp>
         <p:nvSpPr>
-          <p:cNvPr id="13" name="PDF_TEXT_GROUP_89"/>
+          <p:cNvPr id="13" name="PDF_TEXT_GROUP_88"/>
           <p:cNvSpPr txBox="1"/>
           <p:nvPr/>
         </p:nvSpPr>
@@ -36515,7 +36566,7 @@
       </p:sp>
       <p:sp>
         <p:nvSpPr>
-          <p:cNvPr id="14" name="PDF_TEXT_GROUP_90"/>
+          <p:cNvPr id="14" name="PDF_TEXT_GROUP_89"/>
           <p:cNvSpPr txBox="1"/>
           <p:nvPr/>
         </p:nvSpPr>
@@ -36563,7 +36614,7 @@
       </p:sp>
       <p:sp>
         <p:nvSpPr>
-          <p:cNvPr id="15" name="PDF_TEXT_GROUP_91"/>
+          <p:cNvPr id="15" name="PDF_TEXT_GROUP_90"/>
           <p:cNvSpPr txBox="1"/>
           <p:nvPr/>
         </p:nvSpPr>
@@ -36611,7 +36662,7 @@
       </p:sp>
       <p:sp>
         <p:nvSpPr>
-          <p:cNvPr id="16" name="PDF_TEXT_GROUP_92"/>
+          <p:cNvPr id="16" name="PDF_TEXT_GROUP_91"/>
           <p:cNvSpPr txBox="1"/>
           <p:nvPr/>
         </p:nvSpPr>
@@ -36659,7 +36710,7 @@
       </p:sp>
       <p:sp>
         <p:nvSpPr>
-          <p:cNvPr id="17" name="PDF_TEXT_GROUP_93"/>
+          <p:cNvPr id="17" name="PDF_TEXT_GROUP_92"/>
           <p:cNvSpPr txBox="1"/>
           <p:nvPr/>
         </p:nvSpPr>
@@ -36749,7 +36800,7 @@
       </p:pic>
       <p:sp>
         <p:nvSpPr>
-          <p:cNvPr id="3" name="PDF_TEXT_GROUP_94"/>
+          <p:cNvPr id="3" name="PDF_TEXT_GROUP_93"/>
           <p:cNvSpPr txBox="1"/>
           <p:nvPr/>
         </p:nvSpPr>
@@ -36797,7 +36848,7 @@
       </p:sp>
       <p:sp>
         <p:nvSpPr>
-          <p:cNvPr id="4" name="PDF_TEXT_GROUP_95"/>
+          <p:cNvPr id="4" name="PDF_TEXT_GROUP_94"/>
           <p:cNvSpPr txBox="1"/>
           <p:nvPr/>
         </p:nvSpPr>
@@ -36845,7 +36896,7 @@
       </p:sp>
       <p:sp>
         <p:nvSpPr>
-          <p:cNvPr id="5" name="PDF_TEXT_GROUP_96"/>
+          <p:cNvPr id="5" name="PDF_TEXT_GROUP_95"/>
           <p:cNvSpPr txBox="1"/>
           <p:nvPr/>
         </p:nvSpPr>
@@ -36893,7 +36944,7 @@
       </p:sp>
       <p:sp>
         <p:nvSpPr>
-          <p:cNvPr id="6" name="PDF_TEXT_GROUP_97"/>
+          <p:cNvPr id="6" name="PDF_TEXT_GROUP_96"/>
           <p:cNvSpPr txBox="1"/>
           <p:nvPr/>
         </p:nvSpPr>
@@ -36950,7 +37001,7 @@
       </p:sp>
       <p:sp>
         <p:nvSpPr>
-          <p:cNvPr id="7" name="PDF_TEXT_GROUP_98"/>
+          <p:cNvPr id="7" name="PDF_TEXT_GROUP_97"/>
           <p:cNvSpPr txBox="1"/>
           <p:nvPr/>
         </p:nvSpPr>
@@ -37007,7 +37058,7 @@
       </p:sp>
       <p:sp>
         <p:nvSpPr>
-          <p:cNvPr id="8" name="PDF_TEXT_GROUP_99"/>
+          <p:cNvPr id="8" name="PDF_TEXT_GROUP_98"/>
           <p:cNvSpPr txBox="1"/>
           <p:nvPr/>
         </p:nvSpPr>
@@ -37064,7 +37115,7 @@
       </p:sp>
       <p:sp>
         <p:nvSpPr>
-          <p:cNvPr id="9" name="PDF_TEXT_GROUP_100"/>
+          <p:cNvPr id="9" name="PDF_TEXT_GROUP_99"/>
           <p:cNvSpPr txBox="1"/>
           <p:nvPr/>
         </p:nvSpPr>
@@ -37112,7 +37163,7 @@
       </p:sp>
       <p:sp>
         <p:nvSpPr>
-          <p:cNvPr id="10" name="PDF_TEXT_GROUP_101"/>
+          <p:cNvPr id="10" name="PDF_TEXT_GROUP_100"/>
           <p:cNvSpPr txBox="1"/>
           <p:nvPr/>
         </p:nvSpPr>
@@ -37160,7 +37211,7 @@
       </p:sp>
       <p:sp>
         <p:nvSpPr>
-          <p:cNvPr id="11" name="PDF_TEXT_GROUP_102"/>
+          <p:cNvPr id="11" name="PDF_TEXT_GROUP_101"/>
           <p:cNvSpPr txBox="1"/>
           <p:nvPr/>
         </p:nvSpPr>
@@ -37208,7 +37259,7 @@
       </p:sp>
       <p:sp>
         <p:nvSpPr>
-          <p:cNvPr id="12" name="PDF_TEXT_GROUP_103"/>
+          <p:cNvPr id="12" name="PDF_TEXT_GROUP_102"/>
           <p:cNvSpPr txBox="1"/>
           <p:nvPr/>
         </p:nvSpPr>
@@ -37256,7 +37307,7 @@
       </p:sp>
       <p:sp>
         <p:nvSpPr>
-          <p:cNvPr id="13" name="PDF_TEXT_GROUP_104"/>
+          <p:cNvPr id="13" name="PDF_TEXT_GROUP_103"/>
           <p:cNvSpPr txBox="1"/>
           <p:nvPr/>
         </p:nvSpPr>
@@ -37518,7 +37569,7 @@
       </p:pic>
       <p:sp>
         <p:nvSpPr>
-          <p:cNvPr id="3" name="PDF_TEXT_GROUP_105"/>
+          <p:cNvPr id="3" name="PDF_TEXT_GROUP_104"/>
           <p:cNvSpPr txBox="1"/>
           <p:nvPr/>
         </p:nvSpPr>
@@ -37566,7 +37617,7 @@
       </p:sp>
       <p:sp>
         <p:nvSpPr>
-          <p:cNvPr id="4" name="PDF_TEXT_GROUP_106"/>
+          <p:cNvPr id="4" name="PDF_TEXT_GROUP_105"/>
           <p:cNvSpPr txBox="1"/>
           <p:nvPr/>
         </p:nvSpPr>
@@ -37614,7 +37665,7 @@
       </p:sp>
       <p:sp>
         <p:nvSpPr>
-          <p:cNvPr id="5" name="PDF_TEXT_GROUP_107"/>
+          <p:cNvPr id="5" name="PDF_TEXT_GROUP_106"/>
           <p:cNvSpPr txBox="1"/>
           <p:nvPr/>
         </p:nvSpPr>
@@ -37662,7 +37713,7 @@
       </p:sp>
       <p:sp>
         <p:nvSpPr>
-          <p:cNvPr id="6" name="PDF_TEXT_GROUP_108"/>
+          <p:cNvPr id="6" name="PDF_TEXT_GROUP_107"/>
           <p:cNvSpPr txBox="1"/>
           <p:nvPr/>
         </p:nvSpPr>
@@ -37710,7 +37761,7 @@
       </p:sp>
       <p:sp>
         <p:nvSpPr>
-          <p:cNvPr id="7" name="PDF_TEXT_GROUP_109"/>
+          <p:cNvPr id="7" name="PDF_TEXT_GROUP_108"/>
           <p:cNvSpPr txBox="1"/>
           <p:nvPr/>
         </p:nvSpPr>
@@ -37767,7 +37818,7 @@
       </p:sp>
       <p:sp>
         <p:nvSpPr>
-          <p:cNvPr id="8" name="PDF_TEXT_GROUP_110"/>
+          <p:cNvPr id="8" name="PDF_TEXT_GROUP_109"/>
           <p:cNvSpPr txBox="1"/>
           <p:nvPr/>
         </p:nvSpPr>
@@ -37815,7 +37866,7 @@
       </p:sp>
       <p:sp>
         <p:nvSpPr>
-          <p:cNvPr id="9" name="PDF_TEXT_GROUP_111"/>
+          <p:cNvPr id="9" name="PDF_TEXT_GROUP_110"/>
           <p:cNvSpPr txBox="1"/>
           <p:nvPr/>
         </p:nvSpPr>
@@ -37872,7 +37923,7 @@
       </p:sp>
       <p:sp>
         <p:nvSpPr>
-          <p:cNvPr id="10" name="PDF_TEXT_GROUP_112"/>
+          <p:cNvPr id="10" name="PDF_TEXT_GROUP_111"/>
           <p:cNvSpPr txBox="1"/>
           <p:nvPr/>
         </p:nvSpPr>
@@ -37920,7 +37971,7 @@
       </p:sp>
       <p:sp>
         <p:nvSpPr>
-          <p:cNvPr id="11" name="PDF_TEXT_GROUP_113"/>
+          <p:cNvPr id="11" name="PDF_TEXT_GROUP_112"/>
           <p:cNvSpPr txBox="1"/>
           <p:nvPr/>
         </p:nvSpPr>
@@ -37977,7 +38028,7 @@
       </p:sp>
       <p:sp>
         <p:nvSpPr>
-          <p:cNvPr id="12" name="PDF_TEXT_GROUP_114"/>
+          <p:cNvPr id="12" name="PDF_TEXT_GROUP_113"/>
           <p:cNvSpPr txBox="1"/>
           <p:nvPr/>
         </p:nvSpPr>
@@ -38025,7 +38076,7 @@
       </p:sp>
       <p:sp>
         <p:nvSpPr>
-          <p:cNvPr id="13" name="PDF_TEXT_GROUP_115"/>
+          <p:cNvPr id="13" name="PDF_TEXT_GROUP_114"/>
           <p:cNvSpPr txBox="1"/>
           <p:nvPr/>
         </p:nvSpPr>
@@ -38082,7 +38133,7 @@
       </p:sp>
       <p:sp>
         <p:nvSpPr>
-          <p:cNvPr id="14" name="PDF_TEXT_GROUP_116"/>
+          <p:cNvPr id="14" name="PDF_TEXT_GROUP_115"/>
           <p:cNvSpPr txBox="1"/>
           <p:nvPr/>
         </p:nvSpPr>
@@ -38139,7 +38190,7 @@
       </p:sp>
       <p:sp>
         <p:nvSpPr>
-          <p:cNvPr id="15" name="PDF_TEXT_GROUP_117"/>
+          <p:cNvPr id="15" name="PDF_TEXT_GROUP_116"/>
           <p:cNvSpPr txBox="1"/>
           <p:nvPr/>
         </p:nvSpPr>
@@ -38187,7 +38238,7 @@
       </p:sp>
       <p:sp>
         <p:nvSpPr>
-          <p:cNvPr id="16" name="PDF_TEXT_GROUP_118"/>
+          <p:cNvPr id="16" name="PDF_TEXT_GROUP_117"/>
           <p:cNvSpPr txBox="1"/>
           <p:nvPr/>
         </p:nvSpPr>
@@ -38235,7 +38286,7 @@
       </p:sp>
       <p:sp>
         <p:nvSpPr>
-          <p:cNvPr id="17" name="PDF_TEXT_GROUP_119"/>
+          <p:cNvPr id="17" name="PDF_TEXT_GROUP_118"/>
           <p:cNvSpPr txBox="1"/>
           <p:nvPr/>
         </p:nvSpPr>
@@ -38283,7 +38334,7 @@
       </p:sp>
       <p:sp>
         <p:nvSpPr>
-          <p:cNvPr id="18" name="PDF_TEXT_GROUP_120"/>
+          <p:cNvPr id="18" name="PDF_TEXT_GROUP_119"/>
           <p:cNvSpPr txBox="1"/>
           <p:nvPr/>
         </p:nvSpPr>
@@ -38331,7 +38382,7 @@
       </p:sp>
       <p:sp>
         <p:nvSpPr>
-          <p:cNvPr id="19" name="PDF_TEXT_GROUP_121"/>
+          <p:cNvPr id="19" name="PDF_TEXT_GROUP_120"/>
           <p:cNvSpPr txBox="1"/>
           <p:nvPr/>
         </p:nvSpPr>

--- a/docs/PAPER/proposal-defense/slides/NDNSF_proposal_hybrid_editable.pptx
+++ b/docs/PAPER/proposal-defense/slides/NDNSF_proposal_hybrid_editable.pptx
@@ -841,7 +841,7 @@
           <a:p>
             <a:r>
               <a:rPr lang="en-US" sz="1200"/>
-              <a:t>An operator selects a ground area. Nearby unmanned aerial vehicles (UAVs) offer suitable views. A compute Provider analyzes the images. The operator receives original images with annotations. UAV A view 1 UAV B view 2 Compute Provider Operator Who can participate now, and which Data may each selected Provider use?</a:t>
+              <a:t>The User knows the required service. Reachability, capability and willingness may change. Eligible Providers return ACK Data. The User selects one Provider to execute. Candidate Providers A, B, C User selects B B executes the service Initial NDNSF: discover alternatives and select one Provider per invocation, not multiple collaborating roles. Arrows show the selection process.</a:t>
             </a:r>
             <a:endParaRPr lang="en-US" sz="1200"/>
           </a:p>
@@ -1065,7 +1065,7 @@
           <a:p>
             <a:r>
               <a:rPr lang="en-US" sz="1200"/>
-              <a:t>1. Each sensing UAV signs ViewImage Data containing encrypted image content and publishes it in its own authorized namespace. 2. The compute Provider retrieves images over assigned edges and publishes Annotation Data. 3. The compute Provider includes original image names and permitted image keys in its encrypted result for the requester. 4. The requester retrieves the original images and displays the annotations. No need to republish the same images as if the compute Provider produced them. GPS alone does not establish camera visibility or accurate triangulation.</a:t>
+              <a:t>An operator requests ground-area views from unmanned aerial vehicles (UAVs), followed by analysis. 1. Sensing UAVs sign encrypted ViewImage Data under their authorized namespaces. 2. The compute Provider retrieves images over assigned edges and publishes Annotation Data. 3. Its encrypted result gives the requester original image names and permitted image keys. 4. The requester retrieves the original images and displays the annotations. Original image Data remains under its producer’s name. GPS alone does not establish camera visibility.</a:t>
             </a:r>
             <a:endParaRPr lang="en-US" sz="1200"/>
           </a:p>
@@ -1457,7 +1457,7 @@
           <a:p>
             <a:r>
               <a:rPr lang="en-US" sz="1200"/>
-              <a:t>1. Discover current willingness: reachability, sensors, load, and deadlines affect participation. 2. Authorize before execution: exposing a service does not grant everyone permission to use it. 3. Check task inputs: a valid image signature does not show that its producer was assigned to this task’s dependency. The research connects participation decisions to authorized execution and task-specific input checks, then measures the cost.</a:t>
+              <a:t>Foundation: evaluate discovery and authorization The initial prototype selects one Provider. Discovery confidentiality, service permissions and management costs matter even without collaboration. Extension: coordinate complementary roles Some tasks need several Providers with different responsibilities. Separate calls do not define a shared role assignment or enforce dependencies between them. Evaluate the invocation foundation; develop and validate the collaboration extension. Existing invocation results do not establish collaboration correctness.</a:t>
             </a:r>
             <a:endParaRPr lang="en-US" sz="1200"/>
           </a:p>
@@ -1793,7 +1793,7 @@
           <a:p>
             <a:r>
               <a:rPr lang="en-US" sz="1200"/>
-              <a:t>1. Are the three research questions specific enough to support defensible answers? 2. Are the authorization alternatives complete and fairly configured? 3. Are one UAV graph and one supported DI partition sufficient to test the abstraction? 4. Which optional features should be excluded if they delay the core evidence? NDNSF: runtime service discovery and authorization, connected to explicit named-data execution rules.</a:t>
+              <a:t>1. Are the three research questions specific enough to support defensible answers? 2. Are the authorization alternatives complete and fairly configured? 3. Are one UAV graph and one supported DI partition sufficient to test the abstraction? 4. Which optional features should be excluded if they delay the core evidence? NDNSF: evaluate runtime discovery and authorized invocation; extend the foundation to role-aware collaboration.</a:t>
             </a:r>
             <a:endParaRPr lang="en-US" sz="1200"/>
           </a:p>
@@ -2185,7 +2185,7 @@
           <a:p>
             <a:r>
               <a:rPr lang="en-US" sz="1200"/>
-              <a:t>RQ1: How can NDNSF discover willing Providers, keep descriptors confidential from unauthorized readers, and check service permissions before execution, and at what cost? RQ2: How can Providers selected at runtime follow task roles and named dependencies, whether Data comes from producers or caches? RQ3: When do these mechanisms improve completion, latency, or execution efficiency, and when do their costs outweigh the benefits? UAV sensing tests dependencies between observations; distributed inference tests ordered computation and state. Both evaluate the same framework.</a:t>
+              <a:t>RQ1: How can NDNSF discover willing Providers, keep descriptors confidential from unauthorized readers, and check service permissions before execution, and at what cost? RQ2: How can single-Provider invocation be extended to roles and named dependencies across Providers, whether Data comes from producers or caches? RQ3: When do these mechanisms improve completion, latency, or execution efficiency, and when do their costs outweigh the benefits? RQ1 evaluates the invocation foundation; RQ2 studies its collaboration extension; RQ3 measures both scopes separately.</a:t>
             </a:r>
             <a:endParaRPr lang="en-US" sz="1200"/>
           </a:p>
@@ -2241,7 +2241,7 @@
           <a:p>
             <a:r>
               <a:rPr lang="en-US" sz="1200"/>
-              <a:t>Prior work What the comparison must acknowledge NFN [6], NFaaS [7] Named computation and function execution/placement RICE [9], NSC [10] Invocation and security mechanisms; NSC validates signed calls using application trust rules DNMP [12] Role- and command-constrained signing and verification CaSCON [15] Service-composition research; requires a feature-level comparison before claiming a new composition mechanism gRPC [17,27] Complete configurations can include discovery/resolver integration, not only fixed addresses Proposed contribution: each selected Provider checks whether input Data matches the task’s runtime role assignments and declared dependencies.</a:t>
+              <a:t>Prior work What the comparison must acknowledge NFN [6], NFaaS [7] Named computation and function execution/placement RICE [9], NSC [10] Invocation and security mechanisms; NSC validates signed calls using application trust rules DNMP [12] Role- and command-constrained signing and verification CaSCON [15] Service-composition research; requires a feature-level comparison before claiming a new composition mechanism gRPC [17,27] Complete configurations can include discovery/resolver integration, not only fixed addresses Collaboration research: make runtime assignments constrain intermediate Data use. Discovery and authorization are evaluated separately.</a:t>
             </a:r>
             <a:endParaRPr lang="en-US" sz="1200"/>
           </a:p>
@@ -2353,7 +2353,7 @@
           <a:p>
             <a:r>
               <a:rPr lang="en-US" sz="1200"/>
-              <a:t>User: requests and coordinates the invocation. Provider: offers and executes a service. A node may play both roles. Controller: administers identities and service permissions approved by the organization. Participants use provisioned trust anchors and validation rules for certificates and Controller material. Unknown runtime candidates are not unregistered authorization identities. The User discovers current participation; the Controller does not choose this task’s Providers.</a:t>
+              <a:t>User: requests a service and selects a Provider; the extension also assigns collaboration roles. Provider: offers and executes a service. A node may play both roles. Controller: administers identities and service permissions approved by the organization. Participants use provisioned trust anchors and validation rules for certificates and Controller material. Unknown runtime candidates are not unregistered authorization identities. The User discovers current participation; the Controller does not choose this task’s Providers.</a:t>
             </a:r>
             <a:endParaRPr lang="en-US" sz="1200"/>
           </a:p>
@@ -6952,7 +6952,7 @@
       </p:sp>
       <p:sp>
         <p:nvSpPr>
-          <p:cNvPr id="13" name="PDF_BULLET_SPAN_201"/>
+          <p:cNvPr id="13" name="PDF_BULLET_SPAN_195"/>
           <p:cNvSpPr/>
           <p:nvPr/>
         </p:nvSpPr>
@@ -6995,7 +6995,7 @@
       </p:sp>
       <p:sp>
         <p:nvSpPr>
-          <p:cNvPr id="14" name="PDF_BULLET_SPAN_203"/>
+          <p:cNvPr id="14" name="PDF_BULLET_SPAN_197"/>
           <p:cNvSpPr/>
           <p:nvPr/>
         </p:nvSpPr>
@@ -7038,7 +7038,7 @@
       </p:sp>
       <p:sp>
         <p:nvSpPr>
-          <p:cNvPr id="15" name="PDF_BULLET_SPAN_206"/>
+          <p:cNvPr id="15" name="PDF_BULLET_SPAN_200"/>
           <p:cNvSpPr/>
           <p:nvPr/>
         </p:nvSpPr>
@@ -7630,7 +7630,7 @@
       </p:sp>
       <p:sp>
         <p:nvSpPr>
-          <p:cNvPr id="13" name="PDF_BULLET_SPAN_217"/>
+          <p:cNvPr id="13" name="PDF_BULLET_SPAN_211"/>
           <p:cNvSpPr/>
           <p:nvPr/>
         </p:nvSpPr>
@@ -7673,7 +7673,7 @@
       </p:sp>
       <p:sp>
         <p:nvSpPr>
-          <p:cNvPr id="14" name="PDF_BULLET_SPAN_219"/>
+          <p:cNvPr id="14" name="PDF_BULLET_SPAN_213"/>
           <p:cNvSpPr/>
           <p:nvPr/>
         </p:nvSpPr>
@@ -7716,7 +7716,7 @@
       </p:sp>
       <p:sp>
         <p:nvSpPr>
-          <p:cNvPr id="15" name="PDF_BULLET_SPAN_222"/>
+          <p:cNvPr id="15" name="PDF_BULLET_SPAN_216"/>
           <p:cNvSpPr/>
           <p:nvPr/>
         </p:nvSpPr>
@@ -10639,7 +10639,7 @@
       </p:sp>
       <p:sp>
         <p:nvSpPr>
-          <p:cNvPr id="14" name="PDF_BULLET_SPAN_294"/>
+          <p:cNvPr id="14" name="PDF_BULLET_SPAN_288"/>
           <p:cNvSpPr/>
           <p:nvPr/>
         </p:nvSpPr>
@@ -10682,7 +10682,7 @@
       </p:sp>
       <p:sp>
         <p:nvSpPr>
-          <p:cNvPr id="15" name="PDF_BULLET_SPAN_297"/>
+          <p:cNvPr id="15" name="PDF_BULLET_SPAN_291"/>
           <p:cNvSpPr/>
           <p:nvPr/>
         </p:nvSpPr>
@@ -10725,7 +10725,7 @@
       </p:sp>
       <p:sp>
         <p:nvSpPr>
-          <p:cNvPr id="16" name="PDF_BULLET_SPAN_299"/>
+          <p:cNvPr id="16" name="PDF_BULLET_SPAN_293"/>
           <p:cNvSpPr/>
           <p:nvPr/>
         </p:nvSpPr>
@@ -10768,7 +10768,7 @@
       </p:sp>
       <p:sp>
         <p:nvSpPr>
-          <p:cNvPr id="17" name="PDF_BULLET_SPAN_302"/>
+          <p:cNvPr id="17" name="PDF_BULLET_SPAN_296"/>
           <p:cNvSpPr/>
           <p:nvPr/>
         </p:nvSpPr>
@@ -11378,7 +11378,7 @@
       </p:sp>
       <p:sp>
         <p:nvSpPr>
-          <p:cNvPr id="13" name="PDF_BULLET_SPAN_313"/>
+          <p:cNvPr id="13" name="PDF_BULLET_SPAN_307"/>
           <p:cNvSpPr/>
           <p:nvPr/>
         </p:nvSpPr>
@@ -11421,7 +11421,7 @@
       </p:sp>
       <p:sp>
         <p:nvSpPr>
-          <p:cNvPr id="14" name="PDF_BULLET_SPAN_316"/>
+          <p:cNvPr id="14" name="PDF_BULLET_SPAN_310"/>
           <p:cNvSpPr/>
           <p:nvPr/>
         </p:nvSpPr>
@@ -11464,7 +11464,7 @@
       </p:sp>
       <p:sp>
         <p:nvSpPr>
-          <p:cNvPr id="15" name="PDF_BULLET_SPAN_319"/>
+          <p:cNvPr id="15" name="PDF_BULLET_SPAN_313"/>
           <p:cNvSpPr/>
           <p:nvPr/>
         </p:nvSpPr>
@@ -12113,7 +12113,7 @@
       </p:sp>
       <p:sp>
         <p:nvSpPr>
-          <p:cNvPr id="14" name="PDF_BULLET_SPAN_331"/>
+          <p:cNvPr id="14" name="PDF_BULLET_SPAN_325"/>
           <p:cNvSpPr/>
           <p:nvPr/>
         </p:nvSpPr>
@@ -12156,7 +12156,7 @@
       </p:sp>
       <p:sp>
         <p:nvSpPr>
-          <p:cNvPr id="15" name="PDF_BULLET_SPAN_333"/>
+          <p:cNvPr id="15" name="PDF_BULLET_SPAN_327"/>
           <p:cNvSpPr/>
           <p:nvPr/>
         </p:nvSpPr>
@@ -12199,7 +12199,7 @@
       </p:sp>
       <p:sp>
         <p:nvSpPr>
-          <p:cNvPr id="16" name="PDF_BULLET_SPAN_336"/>
+          <p:cNvPr id="16" name="PDF_BULLET_SPAN_330"/>
           <p:cNvSpPr/>
           <p:nvPr/>
         </p:nvSpPr>
@@ -12242,7 +12242,7 @@
       </p:sp>
       <p:sp>
         <p:nvSpPr>
-          <p:cNvPr id="17" name="PDF_BULLET_SPAN_339"/>
+          <p:cNvPr id="17" name="PDF_BULLET_SPAN_333"/>
           <p:cNvSpPr/>
           <p:nvPr/>
         </p:nvSpPr>
@@ -12368,7 +12368,7 @@
                 </a:solidFill>
                 <a:latin typeface="Latin Modern Sans"/>
               </a:rPr>
-              <a:t>RQ2: Generate the Plan from Eligible Positive ACKs</a:t>
+              <a:t>RQ2 Extension: From Positive ACKs to a Role Plan</a:t>
             </a:r>
           </a:p>
         </p:txBody>
@@ -13010,7 +13010,7 @@
                 </a:solidFill>
                 <a:latin typeface="Latin Modern Sans"/>
               </a:rPr>
-              <a:t>Start with a Task: Several Views, One Result</a:t>
+              <a:t>Service Discovery: Several Candidates, One Executor</a:t>
             </a:r>
           </a:p>
         </p:txBody>
@@ -13023,8 +13023,8 @@
         </p:nvSpPr>
         <p:spPr>
           <a:xfrm>
-            <a:off x="1618972" y="1900555"/>
-            <a:ext cx="5477654" cy="440633"/>
+            <a:off x="1618972" y="1537074"/>
+            <a:ext cx="4373824" cy="929891"/>
           </a:xfrm>
           <a:prstGeom prst="rect">
             <a:avLst/>
@@ -13058,7 +13058,16 @@
                 </a:solidFill>
                 <a:latin typeface="Latin Modern Sans"/>
               </a:rPr>
-              <a:t>An operator selects a ground area.</a:t>
+              <a:t>The User knows the required</a:t>
+            </a:r>
+            <a:r>
+              <a:rPr sz="2710" b="0" i="0">
+                <a:solidFill>
+                  <a:srgbClr val="000000"/>
+                </a:solidFill>
+                <a:latin typeface="Latin Modern Sans"/>
+              </a:rPr>
+              <a:t> service.</a:t>
             </a:r>
           </a:p>
         </p:txBody>
@@ -13071,24 +13080,24 @@
         </p:nvSpPr>
         <p:spPr>
           <a:xfrm>
-            <a:off x="8035833" y="1963469"/>
-            <a:ext cx="1063517" cy="828844"/>
-          </a:xfrm>
-          <a:prstGeom prst="rect">
-            <a:avLst/>
-          </a:prstGeom>
-          <a:noFill/>
-          <a:ln>
-            <a:noFill/>
-          </a:ln>
-        </p:spPr>
-        <p:txBody>
-          <a:bodyPr wrap="square" anchor="t" lIns="0" rIns="0" tIns="0" bIns="0">
-            <a:noAutofit/>
-          </a:bodyPr>
-          <a:lstStyle/>
-          <a:p>
-            <a:pPr algn="l">
+            <a:off x="7730488" y="1579855"/>
+            <a:ext cx="2826971" cy="828844"/>
+          </a:xfrm>
+          <a:prstGeom prst="rect">
+            <a:avLst/>
+          </a:prstGeom>
+          <a:noFill/>
+          <a:ln>
+            <a:noFill/>
+          </a:ln>
+        </p:spPr>
+        <p:txBody>
+          <a:bodyPr wrap="square" anchor="t" lIns="0" rIns="0" tIns="0" bIns="0">
+            <a:noAutofit/>
+          </a:bodyPr>
+          <a:lstStyle/>
+          <a:p>
+            <a:pPr algn="ctr">
               <a:lnSpc>
                 <a:spcPct val="100000"/>
               </a:lnSpc>
@@ -13106,8 +13115,9 @@
                 </a:solidFill>
                 <a:latin typeface="Latin Modern Sans"/>
               </a:rPr>
-              <a:t>UAV A</a:t>
-            </a:r>
+              <a:t>Candidate Providers</a:t>
+            </a:r>
+            <a:br/>
             <a:r>
               <a:rPr sz="2371" b="0" i="0">
                 <a:solidFill>
@@ -13115,7 +13125,7 @@
                 </a:solidFill>
                 <a:latin typeface="Latin Modern Sans"/>
               </a:rPr>
-              <a:t> view 1</a:t>
+              <a:t>A, B, C</a:t>
             </a:r>
           </a:p>
         </p:txBody>
@@ -13128,8 +13138,8 @@
         </p:nvSpPr>
         <p:spPr>
           <a:xfrm>
-            <a:off x="1618972" y="2434984"/>
-            <a:ext cx="4915129" cy="929924"/>
+            <a:off x="1618972" y="2509341"/>
+            <a:ext cx="4129488" cy="929891"/>
           </a:xfrm>
           <a:prstGeom prst="rect">
             <a:avLst/>
@@ -13163,7 +13173,7 @@
                 </a:solidFill>
                 <a:latin typeface="Latin Modern Sans"/>
               </a:rPr>
-              <a:t>Nearby unmanned aerial vehicles</a:t>
+              <a:t>Reachability, capability and</a:t>
             </a:r>
             <a:r>
               <a:rPr sz="2710" b="0" i="0">
@@ -13172,7 +13182,7 @@
                 </a:solidFill>
                 <a:latin typeface="Latin Modern Sans"/>
               </a:rPr>
-              <a:t> (UAVs) offer suitable views.</a:t>
+              <a:t> willingness may change.</a:t>
             </a:r>
           </a:p>
         </p:txBody>
@@ -13185,8 +13195,8 @@
         </p:nvSpPr>
         <p:spPr>
           <a:xfrm>
-            <a:off x="11346617" y="2787894"/>
-            <a:ext cx="1340894" cy="828844"/>
+            <a:off x="8197068" y="3454847"/>
+            <a:ext cx="2074431" cy="385554"/>
           </a:xfrm>
           <a:prstGeom prst="rect">
             <a:avLst/>
@@ -13220,8 +13230,161 @@
                 </a:solidFill>
                 <a:latin typeface="Latin Modern Sans"/>
               </a:rPr>
-              <a:t>Compute</a:t>
-            </a:r>
+              <a:t>User selects B</a:t>
+            </a:r>
+          </a:p>
+        </p:txBody>
+      </p:sp>
+      <p:sp>
+        <p:nvSpPr>
+          <p:cNvPr id="8" name="PDF_TEXT_GROUP_11"/>
+          <p:cNvSpPr txBox="1"/>
+          <p:nvPr/>
+        </p:nvSpPr>
+        <p:spPr>
+          <a:xfrm>
+            <a:off x="1618972" y="3481608"/>
+            <a:ext cx="4484937" cy="929924"/>
+          </a:xfrm>
+          <a:prstGeom prst="rect">
+            <a:avLst/>
+          </a:prstGeom>
+          <a:noFill/>
+          <a:ln>
+            <a:noFill/>
+          </a:ln>
+        </p:spPr>
+        <p:txBody>
+          <a:bodyPr wrap="square" anchor="t" lIns="0" rIns="0" tIns="0" bIns="0">
+            <a:noAutofit/>
+          </a:bodyPr>
+          <a:lstStyle/>
+          <a:p>
+            <a:pPr algn="l">
+              <a:lnSpc>
+                <a:spcPct val="100000"/>
+              </a:lnSpc>
+              <a:spcBef>
+                <a:spcPts val="0"/>
+              </a:spcBef>
+              <a:spcAft>
+                <a:spcPts val="0"/>
+              </a:spcAft>
+            </a:pPr>
+            <a:r>
+              <a:rPr sz="2710" b="0" i="0">
+                <a:solidFill>
+                  <a:srgbClr val="000000"/>
+                </a:solidFill>
+                <a:latin typeface="Latin Modern Sans"/>
+              </a:rPr>
+              <a:t>Eligible Providers return ACK</a:t>
+            </a:r>
+            <a:r>
+              <a:rPr sz="2710" b="0" i="0">
+                <a:solidFill>
+                  <a:srgbClr val="000000"/>
+                </a:solidFill>
+                <a:latin typeface="Latin Modern Sans"/>
+              </a:rPr>
+              <a:t> Data.</a:t>
+            </a:r>
+          </a:p>
+        </p:txBody>
+      </p:sp>
+      <p:sp>
+        <p:nvSpPr>
+          <p:cNvPr id="9" name="PDF_TEXT_GROUP_12"/>
+          <p:cNvSpPr txBox="1"/>
+          <p:nvPr/>
+        </p:nvSpPr>
+        <p:spPr>
+          <a:xfrm>
+            <a:off x="1618972" y="4453907"/>
+            <a:ext cx="4941006" cy="929891"/>
+          </a:xfrm>
+          <a:prstGeom prst="rect">
+            <a:avLst/>
+          </a:prstGeom>
+          <a:noFill/>
+          <a:ln>
+            <a:noFill/>
+          </a:ln>
+        </p:spPr>
+        <p:txBody>
+          <a:bodyPr wrap="square" anchor="t" lIns="0" rIns="0" tIns="0" bIns="0">
+            <a:noAutofit/>
+          </a:bodyPr>
+          <a:lstStyle/>
+          <a:p>
+            <a:pPr algn="l">
+              <a:lnSpc>
+                <a:spcPct val="100000"/>
+              </a:lnSpc>
+              <a:spcBef>
+                <a:spcPts val="0"/>
+              </a:spcBef>
+              <a:spcAft>
+                <a:spcPts val="0"/>
+              </a:spcAft>
+            </a:pPr>
+            <a:r>
+              <a:rPr sz="2710" b="0" i="0">
+                <a:solidFill>
+                  <a:srgbClr val="000000"/>
+                </a:solidFill>
+                <a:latin typeface="Latin Modern Sans"/>
+              </a:rPr>
+              <a:t>The User selects one Provider to</a:t>
+            </a:r>
+            <a:r>
+              <a:rPr sz="2710" b="0" i="0">
+                <a:solidFill>
+                  <a:srgbClr val="000000"/>
+                </a:solidFill>
+                <a:latin typeface="Latin Modern Sans"/>
+              </a:rPr>
+              <a:t> execute.</a:t>
+            </a:r>
+          </a:p>
+        </p:txBody>
+      </p:sp>
+      <p:sp>
+        <p:nvSpPr>
+          <p:cNvPr id="10" name="PDF_TEXT_GROUP_13"/>
+          <p:cNvSpPr txBox="1"/>
+          <p:nvPr/>
+        </p:nvSpPr>
+        <p:spPr>
+          <a:xfrm>
+            <a:off x="7657400" y="5116558"/>
+            <a:ext cx="3211210" cy="385554"/>
+          </a:xfrm>
+          <a:prstGeom prst="rect">
+            <a:avLst/>
+          </a:prstGeom>
+          <a:noFill/>
+          <a:ln>
+            <a:noFill/>
+          </a:ln>
+        </p:spPr>
+        <p:txBody>
+          <a:bodyPr wrap="square" anchor="t" lIns="0" rIns="0" tIns="0" bIns="0">
+            <a:noAutofit/>
+          </a:bodyPr>
+          <a:lstStyle/>
+          <a:p>
+            <a:pPr algn="l">
+              <a:lnSpc>
+                <a:spcPct val="100000"/>
+              </a:lnSpc>
+              <a:spcBef>
+                <a:spcPts val="0"/>
+              </a:spcBef>
+              <a:spcAft>
+                <a:spcPts val="0"/>
+              </a:spcAft>
+            </a:pPr>
             <a:r>
               <a:rPr sz="2371" b="0" i="0">
                 <a:solidFill>
@@ -13229,21 +13392,21 @@
                 </a:solidFill>
                 <a:latin typeface="Latin Modern Sans"/>
               </a:rPr>
-              <a:t> Provider</a:t>
-            </a:r>
-          </a:p>
-        </p:txBody>
-      </p:sp>
-      <p:sp>
-        <p:nvSpPr>
-          <p:cNvPr id="8" name="PDF_TEXT_GROUP_11"/>
-          <p:cNvSpPr txBox="1"/>
-          <p:nvPr/>
-        </p:nvSpPr>
-        <p:spPr>
-          <a:xfrm>
-            <a:off x="1618972" y="3407283"/>
-            <a:ext cx="4994873" cy="929891"/>
+              <a:t>B executes the service</a:t>
+            </a:r>
+          </a:p>
+        </p:txBody>
+      </p:sp>
+      <p:sp>
+        <p:nvSpPr>
+          <p:cNvPr id="11" name="PDF_TEXT_GROUP_14"/>
+          <p:cNvSpPr txBox="1"/>
+          <p:nvPr/>
+        </p:nvSpPr>
+        <p:spPr>
+          <a:xfrm>
+            <a:off x="1143656" y="6438706"/>
+            <a:ext cx="11872360" cy="929891"/>
           </a:xfrm>
           <a:prstGeom prst="rect">
             <a:avLst/>
@@ -13277,7 +13440,7 @@
                 </a:solidFill>
                 <a:latin typeface="Latin Modern Sans"/>
               </a:rPr>
-              <a:t>A compute Provider analyzes the</a:t>
+              <a:t>Initial NDNSF: discover alternatives and select one Provider per invocation, not</a:t>
             </a:r>
             <a:r>
               <a:rPr sz="2710" b="0" i="0">
@@ -13286,169 +13449,7 @@
                 </a:solidFill>
                 <a:latin typeface="Latin Modern Sans"/>
               </a:rPr>
-              <a:t> images.</a:t>
-            </a:r>
-          </a:p>
-        </p:txBody>
-      </p:sp>
-      <p:sp>
-        <p:nvSpPr>
-          <p:cNvPr id="9" name="PDF_TEXT_GROUP_12"/>
-          <p:cNvSpPr txBox="1"/>
-          <p:nvPr/>
-        </p:nvSpPr>
-        <p:spPr>
-          <a:xfrm>
-            <a:off x="8035833" y="3625180"/>
-            <a:ext cx="1063517" cy="828844"/>
-          </a:xfrm>
-          <a:prstGeom prst="rect">
-            <a:avLst/>
-          </a:prstGeom>
-          <a:noFill/>
-          <a:ln>
-            <a:noFill/>
-          </a:ln>
-        </p:spPr>
-        <p:txBody>
-          <a:bodyPr wrap="square" anchor="t" lIns="0" rIns="0" tIns="0" bIns="0">
-            <a:noAutofit/>
-          </a:bodyPr>
-          <a:lstStyle/>
-          <a:p>
-            <a:pPr algn="l">
-              <a:lnSpc>
-                <a:spcPct val="100000"/>
-              </a:lnSpc>
-              <a:spcBef>
-                <a:spcPts val="0"/>
-              </a:spcBef>
-              <a:spcAft>
-                <a:spcPts val="0"/>
-              </a:spcAft>
-            </a:pPr>
-            <a:r>
-              <a:rPr sz="2371" b="0" i="0">
-                <a:solidFill>
-                  <a:srgbClr val="000000"/>
-                </a:solidFill>
-                <a:latin typeface="Latin Modern Sans"/>
-              </a:rPr>
-              <a:t>UAV B</a:t>
-            </a:r>
-            <a:r>
-              <a:rPr sz="2371" b="0" i="0">
-                <a:solidFill>
-                  <a:srgbClr val="000000"/>
-                </a:solidFill>
-                <a:latin typeface="Latin Modern Sans"/>
-              </a:rPr>
-              <a:t> view 2</a:t>
-            </a:r>
-          </a:p>
-        </p:txBody>
-      </p:sp>
-      <p:sp>
-        <p:nvSpPr>
-          <p:cNvPr id="10" name="PDF_TEXT_GROUP_13"/>
-          <p:cNvSpPr txBox="1"/>
-          <p:nvPr/>
-        </p:nvSpPr>
-        <p:spPr>
-          <a:xfrm>
-            <a:off x="1618972" y="4379550"/>
-            <a:ext cx="4479057" cy="929891"/>
-          </a:xfrm>
-          <a:prstGeom prst="rect">
-            <a:avLst/>
-          </a:prstGeom>
-          <a:noFill/>
-          <a:ln>
-            <a:noFill/>
-          </a:ln>
-        </p:spPr>
-        <p:txBody>
-          <a:bodyPr wrap="square" anchor="t" lIns="0" rIns="0" tIns="0" bIns="0">
-            <a:noAutofit/>
-          </a:bodyPr>
-          <a:lstStyle/>
-          <a:p>
-            <a:pPr algn="l">
-              <a:lnSpc>
-                <a:spcPct val="100000"/>
-              </a:lnSpc>
-              <a:spcBef>
-                <a:spcPts val="0"/>
-              </a:spcBef>
-              <a:spcAft>
-                <a:spcPts val="0"/>
-              </a:spcAft>
-            </a:pPr>
-            <a:r>
-              <a:rPr sz="2710" b="0" i="0">
-                <a:solidFill>
-                  <a:srgbClr val="000000"/>
-                </a:solidFill>
-                <a:latin typeface="Latin Modern Sans"/>
-              </a:rPr>
-              <a:t>The operator receives original</a:t>
-            </a:r>
-            <a:r>
-              <a:rPr sz="2710" b="0" i="0">
-                <a:solidFill>
-                  <a:srgbClr val="000000"/>
-                </a:solidFill>
-                <a:latin typeface="Latin Modern Sans"/>
-              </a:rPr>
-              <a:t> images with annotations.</a:t>
-            </a:r>
-          </a:p>
-        </p:txBody>
-      </p:sp>
-      <p:sp>
-        <p:nvSpPr>
-          <p:cNvPr id="11" name="PDF_TEXT_GROUP_14"/>
-          <p:cNvSpPr txBox="1"/>
-          <p:nvPr/>
-        </p:nvSpPr>
-        <p:spPr>
-          <a:xfrm>
-            <a:off x="11354685" y="4977861"/>
-            <a:ext cx="1377531" cy="385554"/>
-          </a:xfrm>
-          <a:prstGeom prst="rect">
-            <a:avLst/>
-          </a:prstGeom>
-          <a:noFill/>
-          <a:ln>
-            <a:noFill/>
-          </a:ln>
-        </p:spPr>
-        <p:txBody>
-          <a:bodyPr wrap="square" anchor="t" lIns="0" rIns="0" tIns="0" bIns="0">
-            <a:noAutofit/>
-          </a:bodyPr>
-          <a:lstStyle/>
-          <a:p>
-            <a:pPr algn="l">
-              <a:lnSpc>
-                <a:spcPct val="100000"/>
-              </a:lnSpc>
-              <a:spcBef>
-                <a:spcPts val="0"/>
-              </a:spcBef>
-              <a:spcAft>
-                <a:spcPts val="0"/>
-              </a:spcAft>
-            </a:pPr>
-            <a:r>
-              <a:rPr sz="2371" b="0" i="0">
-                <a:solidFill>
-                  <a:srgbClr val="000000"/>
-                </a:solidFill>
-                <a:latin typeface="Latin Modern Sans"/>
-              </a:rPr>
-              <a:t>Operator</a:t>
+              <a:t> multiple collaborating roles. Arrows show the selection process.</a:t>
             </a:r>
           </a:p>
         </p:txBody>
@@ -13456,54 +13457,6 @@
       <p:sp>
         <p:nvSpPr>
           <p:cNvPr id="12" name="PDF_TEXT_GROUP_15"/>
-          <p:cNvSpPr txBox="1"/>
-          <p:nvPr/>
-        </p:nvSpPr>
-        <p:spPr>
-          <a:xfrm>
-            <a:off x="1143656" y="6331322"/>
-            <a:ext cx="11995401" cy="440633"/>
-          </a:xfrm>
-          <a:prstGeom prst="rect">
-            <a:avLst/>
-          </a:prstGeom>
-          <a:noFill/>
-          <a:ln>
-            <a:noFill/>
-          </a:ln>
-        </p:spPr>
-        <p:txBody>
-          <a:bodyPr wrap="square" anchor="t" lIns="0" rIns="0" tIns="0" bIns="0">
-            <a:noAutofit/>
-          </a:bodyPr>
-          <a:lstStyle/>
-          <a:p>
-            <a:pPr algn="l">
-              <a:lnSpc>
-                <a:spcPct val="100000"/>
-              </a:lnSpc>
-              <a:spcBef>
-                <a:spcPts val="0"/>
-              </a:spcBef>
-              <a:spcAft>
-                <a:spcPts val="0"/>
-              </a:spcAft>
-            </a:pPr>
-            <a:r>
-              <a:rPr sz="2710" b="0" i="0">
-                <a:solidFill>
-                  <a:srgbClr val="000000"/>
-                </a:solidFill>
-                <a:latin typeface="Latin Modern Sans"/>
-              </a:rPr>
-              <a:t>Who can participate now, and which Data may each selected Provider use?</a:t>
-            </a:r>
-          </a:p>
-        </p:txBody>
-      </p:sp>
-      <p:sp>
-        <p:nvSpPr>
-          <p:cNvPr id="13" name="PDF_TEXT_GROUP_16"/>
           <p:cNvSpPr txBox="1"/>
           <p:nvPr/>
         </p:nvSpPr>
@@ -13551,7 +13504,7 @@
       </p:sp>
       <p:sp>
         <p:nvSpPr>
-          <p:cNvPr id="14" name="PDF_TEXT_GROUP_17"/>
+          <p:cNvPr id="13" name="PDF_TEXT_GROUP_16"/>
           <p:cNvSpPr txBox="1"/>
           <p:nvPr/>
         </p:nvSpPr>
@@ -13599,7 +13552,7 @@
       </p:sp>
       <p:sp>
         <p:nvSpPr>
-          <p:cNvPr id="15" name="PDF_TEXT_GROUP_18"/>
+          <p:cNvPr id="14" name="PDF_TEXT_GROUP_17"/>
           <p:cNvSpPr txBox="1"/>
           <p:nvPr/>
         </p:nvSpPr>
@@ -13647,7 +13600,7 @@
       </p:sp>
       <p:sp>
         <p:nvSpPr>
-          <p:cNvPr id="16" name="PDF_TEXT_GROUP_19"/>
+          <p:cNvPr id="15" name="PDF_TEXT_GROUP_18"/>
           <p:cNvSpPr txBox="1"/>
           <p:nvPr/>
         </p:nvSpPr>
@@ -13695,7 +13648,7 @@
       </p:sp>
       <p:sp>
         <p:nvSpPr>
-          <p:cNvPr id="17" name="PDF_TEXT_GROUP_20"/>
+          <p:cNvPr id="16" name="PDF_TEXT_GROUP_19"/>
           <p:cNvSpPr txBox="1"/>
           <p:nvPr/>
         </p:nvSpPr>
@@ -13743,13 +13696,13 @@
       </p:sp>
       <p:sp>
         <p:nvSpPr>
-          <p:cNvPr id="18" name="PDF_BULLET_SPAN_11"/>
+          <p:cNvPr id="17" name="PDF_BULLET_SPAN_11"/>
           <p:cNvSpPr/>
           <p:nvPr/>
         </p:nvSpPr>
         <p:spPr>
           <a:xfrm rot="5400000">
-            <a:off x="1207424" y="1986346"/>
+            <a:off x="1207424" y="1622865"/>
             <a:ext cx="197164" cy="197164"/>
           </a:xfrm>
           <a:prstGeom prst="triangle">
@@ -13786,13 +13739,13 @@
       </p:sp>
       <p:sp>
         <p:nvSpPr>
-          <p:cNvPr id="19" name="PDF_BULLET_SPAN_13"/>
+          <p:cNvPr id="18" name="PDF_BULLET_SPAN_14"/>
           <p:cNvSpPr/>
           <p:nvPr/>
         </p:nvSpPr>
         <p:spPr>
           <a:xfrm rot="5400000">
-            <a:off x="1207424" y="2520774"/>
+            <a:off x="1207424" y="2595132"/>
             <a:ext cx="197164" cy="197164"/>
           </a:xfrm>
           <a:prstGeom prst="triangle">
@@ -13829,13 +13782,13 @@
       </p:sp>
       <p:sp>
         <p:nvSpPr>
-          <p:cNvPr id="20" name="PDF_BULLET_SPAN_16"/>
+          <p:cNvPr id="19" name="PDF_BULLET_SPAN_17"/>
           <p:cNvSpPr/>
           <p:nvPr/>
         </p:nvSpPr>
         <p:spPr>
           <a:xfrm rot="5400000">
-            <a:off x="1207424" y="3493074"/>
+            <a:off x="1207424" y="3567399"/>
             <a:ext cx="197164" cy="197164"/>
           </a:xfrm>
           <a:prstGeom prst="triangle">
@@ -13872,13 +13825,13 @@
       </p:sp>
       <p:sp>
         <p:nvSpPr>
-          <p:cNvPr id="21" name="PDF_BULLET_SPAN_19"/>
+          <p:cNvPr id="20" name="PDF_BULLET_SPAN_20"/>
           <p:cNvSpPr/>
           <p:nvPr/>
         </p:nvSpPr>
         <p:spPr>
           <a:xfrm rot="5400000">
-            <a:off x="1207424" y="4465341"/>
+            <a:off x="1207424" y="4539698"/>
             <a:ext cx="197164" cy="197164"/>
           </a:xfrm>
           <a:prstGeom prst="triangle">
@@ -15495,7 +15448,7 @@
                 </a:solidFill>
                 <a:latin typeface="Latin Modern Sans"/>
               </a:rPr>
-              <a:t>Failure Handling Needs Explicit State</a:t>
+              <a:t>Collaboration Recovery Needs Explicit State</a:t>
             </a:r>
           </a:p>
         </p:txBody>
@@ -16420,7 +16373,7 @@
       <p:grpSpPr/>
       <p:pic>
         <p:nvPicPr>
-          <p:cNvPr id="2" name="TEXT_FREE_BACKGROUND_23" descr="background-019.png"/>
+          <p:cNvPr id="2" name="TEXT_FREE_BACKGROUND_23" descr="background-023.png"/>
           <p:cNvPicPr>
             <a:picLocks noChangeAspect="1"/>
           </p:cNvPicPr>
@@ -16485,7 +16438,7 @@
                 </a:solidFill>
                 <a:latin typeface="Latin Modern Sans"/>
               </a:rPr>
-              <a:t>Proposed UAV Flow: Capture, Analyze and Return</a:t>
+              <a:t>Proposed UAV Collaboration: Capture, Analyze and Return</a:t>
             </a:r>
           </a:p>
         </p:txBody>
@@ -16498,36 +16451,93 @@
         </p:nvSpPr>
         <p:spPr>
           <a:xfrm>
-            <a:off x="1169087" y="1815792"/>
-            <a:ext cx="12668141" cy="929891"/>
-          </a:xfrm>
-          <a:prstGeom prst="rect">
-            <a:avLst/>
-          </a:prstGeom>
-          <a:noFill/>
-          <a:ln>
-            <a:noFill/>
-          </a:ln>
-        </p:spPr>
-        <p:txBody>
-          <a:bodyPr wrap="square" anchor="t" lIns="0" rIns="0" tIns="0" bIns="0">
-            <a:noAutofit/>
-          </a:bodyPr>
-          <a:lstStyle/>
-          <a:p>
-            <a:pPr algn="l" marL="449873" indent="-449873">
-              <a:lnSpc>
-                <a:spcPct val="100000"/>
-              </a:lnSpc>
-              <a:spcBef>
-                <a:spcPts val="0"/>
-              </a:spcBef>
-              <a:spcAft>
-                <a:spcPts val="0"/>
-              </a:spcAft>
-            </a:pPr>
-            <a:r>
-              <a:rPr sz="2710" b="0" i="0">
+            <a:off x="914808" y="1726372"/>
+            <a:ext cx="12399593" cy="828877"/>
+          </a:xfrm>
+          <a:prstGeom prst="rect">
+            <a:avLst/>
+          </a:prstGeom>
+          <a:noFill/>
+          <a:ln>
+            <a:noFill/>
+          </a:ln>
+        </p:spPr>
+        <p:txBody>
+          <a:bodyPr wrap="square" anchor="t" lIns="0" rIns="0" tIns="0" bIns="0">
+            <a:noAutofit/>
+          </a:bodyPr>
+          <a:lstStyle/>
+          <a:p>
+            <a:pPr algn="l">
+              <a:lnSpc>
+                <a:spcPct val="100000"/>
+              </a:lnSpc>
+              <a:spcBef>
+                <a:spcPts val="0"/>
+              </a:spcBef>
+              <a:spcAft>
+                <a:spcPts val="0"/>
+              </a:spcAft>
+            </a:pPr>
+            <a:r>
+              <a:rPr sz="2371" b="0" i="0">
+                <a:solidFill>
+                  <a:srgbClr val="000000"/>
+                </a:solidFill>
+                <a:latin typeface="Latin Modern Sans"/>
+              </a:rPr>
+              <a:t>An operator requests ground-area views from unmanned aerial vehicles (UAVs), followed by</a:t>
+            </a:r>
+            <a:r>
+              <a:rPr sz="2371" b="0" i="0">
+                <a:solidFill>
+                  <a:srgbClr val="000000"/>
+                </a:solidFill>
+                <a:latin typeface="Latin Modern Sans"/>
+              </a:rPr>
+              <a:t> analysis.</a:t>
+            </a:r>
+          </a:p>
+        </p:txBody>
+      </p:sp>
+      <p:sp>
+        <p:nvSpPr>
+          <p:cNvPr id="5" name="PDF_TEXT_GROUP_286"/>
+          <p:cNvSpPr txBox="1"/>
+          <p:nvPr/>
+        </p:nvSpPr>
+        <p:spPr>
+          <a:xfrm>
+            <a:off x="1192840" y="2692208"/>
+            <a:ext cx="12408875" cy="385554"/>
+          </a:xfrm>
+          <a:prstGeom prst="rect">
+            <a:avLst/>
+          </a:prstGeom>
+          <a:noFill/>
+          <a:ln>
+            <a:noFill/>
+          </a:ln>
+        </p:spPr>
+        <p:txBody>
+          <a:bodyPr wrap="square" anchor="t" lIns="0" rIns="0" tIns="0" bIns="0">
+            <a:noAutofit/>
+          </a:bodyPr>
+          <a:lstStyle/>
+          <a:p>
+            <a:pPr algn="l" marL="426274" indent="-426274">
+              <a:lnSpc>
+                <a:spcPct val="100000"/>
+              </a:lnSpc>
+              <a:spcBef>
+                <a:spcPts val="0"/>
+              </a:spcBef>
+              <a:spcAft>
+                <a:spcPts val="0"/>
+              </a:spcAft>
+            </a:pPr>
+            <a:r>
+              <a:rPr sz="2371" b="0" i="0">
                 <a:solidFill>
                   <a:srgbClr val="3333B2"/>
                 </a:solidFill>
@@ -16536,64 +16546,55 @@
               <a:t>1.</a:t>
             </a:r>
             <a:r>
-              <a:rPr sz="2710" b="0" i="0">
-                <a:solidFill>
-                  <a:srgbClr val="000000"/>
-                </a:solidFill>
-                <a:latin typeface="Latin Modern Sans"/>
-              </a:rPr>
-              <a:t> Each sensing UAV signs ViewImage Data containing encrypted image content and</a:t>
-            </a:r>
-            <a:r>
-              <a:rPr sz="2710" b="0" i="0">
-                <a:solidFill>
-                  <a:srgbClr val="000000"/>
-                </a:solidFill>
-                <a:latin typeface="Latin Modern Sans"/>
-              </a:rPr>
-              <a:t> publishes it in its own authorized namespace.</a:t>
-            </a:r>
-          </a:p>
-        </p:txBody>
-      </p:sp>
-      <p:sp>
-        <p:nvSpPr>
-          <p:cNvPr id="5" name="PDF_TEXT_GROUP_286"/>
-          <p:cNvSpPr txBox="1"/>
-          <p:nvPr/>
-        </p:nvSpPr>
-        <p:spPr>
-          <a:xfrm>
-            <a:off x="1169087" y="2788059"/>
-            <a:ext cx="11412734" cy="929891"/>
-          </a:xfrm>
-          <a:prstGeom prst="rect">
-            <a:avLst/>
-          </a:prstGeom>
-          <a:noFill/>
-          <a:ln>
-            <a:noFill/>
-          </a:ln>
-        </p:spPr>
-        <p:txBody>
-          <a:bodyPr wrap="square" anchor="t" lIns="0" rIns="0" tIns="0" bIns="0">
-            <a:noAutofit/>
-          </a:bodyPr>
-          <a:lstStyle/>
-          <a:p>
-            <a:pPr algn="l" marL="449873" indent="-449873">
-              <a:lnSpc>
-                <a:spcPct val="100000"/>
-              </a:lnSpc>
-              <a:spcBef>
-                <a:spcPts val="0"/>
-              </a:spcBef>
-              <a:spcAft>
-                <a:spcPts val="0"/>
-              </a:spcAft>
-            </a:pPr>
-            <a:r>
-              <a:rPr sz="2710" b="0" i="0">
+              <a:rPr sz="2371" b="0" i="0">
+                <a:solidFill>
+                  <a:srgbClr val="000000"/>
+                </a:solidFill>
+                <a:latin typeface="Latin Modern Sans"/>
+              </a:rPr>
+              <a:t> Sensing UAVs sign encrypted ViewImage Data under their authorized namespaces.</a:t>
+            </a:r>
+          </a:p>
+        </p:txBody>
+      </p:sp>
+      <p:sp>
+        <p:nvSpPr>
+          <p:cNvPr id="6" name="PDF_TEXT_GROUP_287"/>
+          <p:cNvSpPr txBox="1"/>
+          <p:nvPr/>
+        </p:nvSpPr>
+        <p:spPr>
+          <a:xfrm>
+            <a:off x="1192840" y="3271716"/>
+            <a:ext cx="12053925" cy="828844"/>
+          </a:xfrm>
+          <a:prstGeom prst="rect">
+            <a:avLst/>
+          </a:prstGeom>
+          <a:noFill/>
+          <a:ln>
+            <a:noFill/>
+          </a:ln>
+        </p:spPr>
+        <p:txBody>
+          <a:bodyPr wrap="square" anchor="t" lIns="0" rIns="0" tIns="0" bIns="0">
+            <a:noAutofit/>
+          </a:bodyPr>
+          <a:lstStyle/>
+          <a:p>
+            <a:pPr algn="l" marL="426274" indent="-426274">
+              <a:lnSpc>
+                <a:spcPct val="100000"/>
+              </a:lnSpc>
+              <a:spcBef>
+                <a:spcPts val="0"/>
+              </a:spcBef>
+              <a:spcAft>
+                <a:spcPts val="0"/>
+              </a:spcAft>
+            </a:pPr>
+            <a:r>
+              <a:rPr sz="2371" b="0" i="0">
                 <a:solidFill>
                   <a:srgbClr val="3333B2"/>
                 </a:solidFill>
@@ -16602,64 +16603,64 @@
               <a:t>2.</a:t>
             </a:r>
             <a:r>
-              <a:rPr sz="2710" b="0" i="0">
-                <a:solidFill>
-                  <a:srgbClr val="000000"/>
-                </a:solidFill>
-                <a:latin typeface="Latin Modern Sans"/>
-              </a:rPr>
-              <a:t> The compute Provider retrieves images over assigned edges and publishes</a:t>
-            </a:r>
-            <a:r>
-              <a:rPr sz="2710" b="0" i="0">
-                <a:solidFill>
-                  <a:srgbClr val="000000"/>
-                </a:solidFill>
-                <a:latin typeface="Latin Modern Sans"/>
-              </a:rPr>
-              <a:t> Annotation Data.</a:t>
-            </a:r>
-          </a:p>
-        </p:txBody>
-      </p:sp>
-      <p:sp>
-        <p:nvSpPr>
-          <p:cNvPr id="6" name="PDF_TEXT_GROUP_287"/>
-          <p:cNvSpPr txBox="1"/>
-          <p:nvPr/>
-        </p:nvSpPr>
-        <p:spPr>
-          <a:xfrm>
-            <a:off x="1169087" y="3760326"/>
-            <a:ext cx="12653776" cy="929891"/>
-          </a:xfrm>
-          <a:prstGeom prst="rect">
-            <a:avLst/>
-          </a:prstGeom>
-          <a:noFill/>
-          <a:ln>
-            <a:noFill/>
-          </a:ln>
-        </p:spPr>
-        <p:txBody>
-          <a:bodyPr wrap="square" anchor="t" lIns="0" rIns="0" tIns="0" bIns="0">
-            <a:noAutofit/>
-          </a:bodyPr>
-          <a:lstStyle/>
-          <a:p>
-            <a:pPr algn="l" marL="449873" indent="-449873">
-              <a:lnSpc>
-                <a:spcPct val="100000"/>
-              </a:lnSpc>
-              <a:spcBef>
-                <a:spcPts val="0"/>
-              </a:spcBef>
-              <a:spcAft>
-                <a:spcPts val="0"/>
-              </a:spcAft>
-            </a:pPr>
-            <a:r>
-              <a:rPr sz="2710" b="0" i="0">
+              <a:rPr sz="2371" b="0" i="0">
+                <a:solidFill>
+                  <a:srgbClr val="000000"/>
+                </a:solidFill>
+                <a:latin typeface="Latin Modern Sans"/>
+              </a:rPr>
+              <a:t> The compute Provider retrieves images over assigned edges and publishes Annotation</a:t>
+            </a:r>
+            <a:r>
+              <a:rPr sz="2371" b="0" i="0">
+                <a:solidFill>
+                  <a:srgbClr val="000000"/>
+                </a:solidFill>
+                <a:latin typeface="Latin Modern Sans"/>
+              </a:rPr>
+              <a:t> Data.</a:t>
+            </a:r>
+          </a:p>
+        </p:txBody>
+      </p:sp>
+      <p:sp>
+        <p:nvSpPr>
+          <p:cNvPr id="7" name="PDF_TEXT_GROUP_288"/>
+          <p:cNvSpPr txBox="1"/>
+          <p:nvPr/>
+        </p:nvSpPr>
+        <p:spPr>
+          <a:xfrm>
+            <a:off x="1192840" y="4237553"/>
+            <a:ext cx="13187362" cy="385554"/>
+          </a:xfrm>
+          <a:prstGeom prst="rect">
+            <a:avLst/>
+          </a:prstGeom>
+          <a:noFill/>
+          <a:ln>
+            <a:noFill/>
+          </a:ln>
+        </p:spPr>
+        <p:txBody>
+          <a:bodyPr wrap="square" anchor="t" lIns="0" rIns="0" tIns="0" bIns="0">
+            <a:noAutofit/>
+          </a:bodyPr>
+          <a:lstStyle/>
+          <a:p>
+            <a:pPr algn="l" marL="426274" indent="-426274">
+              <a:lnSpc>
+                <a:spcPct val="100000"/>
+              </a:lnSpc>
+              <a:spcBef>
+                <a:spcPts val="0"/>
+              </a:spcBef>
+              <a:spcAft>
+                <a:spcPts val="0"/>
+              </a:spcAft>
+            </a:pPr>
+            <a:r>
+              <a:rPr sz="2371" b="0" i="0">
                 <a:solidFill>
                   <a:srgbClr val="3333B2"/>
                 </a:solidFill>
@@ -16668,64 +16669,55 @@
               <a:t>3.</a:t>
             </a:r>
             <a:r>
-              <a:rPr sz="2710" b="0" i="0">
-                <a:solidFill>
-                  <a:srgbClr val="000000"/>
-                </a:solidFill>
-                <a:latin typeface="Latin Modern Sans"/>
-              </a:rPr>
-              <a:t> The compute Provider includes original image names and permitted image keys in</a:t>
-            </a:r>
-            <a:r>
-              <a:rPr sz="2710" b="0" i="0">
-                <a:solidFill>
-                  <a:srgbClr val="000000"/>
-                </a:solidFill>
-                <a:latin typeface="Latin Modern Sans"/>
-              </a:rPr>
-              <a:t> its encrypted result for the requester.</a:t>
-            </a:r>
-          </a:p>
-        </p:txBody>
-      </p:sp>
-      <p:sp>
-        <p:nvSpPr>
-          <p:cNvPr id="7" name="PDF_TEXT_GROUP_288"/>
-          <p:cNvSpPr txBox="1"/>
-          <p:nvPr/>
-        </p:nvSpPr>
-        <p:spPr>
-          <a:xfrm>
-            <a:off x="1169087" y="4732593"/>
-            <a:ext cx="11987987" cy="440633"/>
-          </a:xfrm>
-          <a:prstGeom prst="rect">
-            <a:avLst/>
-          </a:prstGeom>
-          <a:noFill/>
-          <a:ln>
-            <a:noFill/>
-          </a:ln>
-        </p:spPr>
-        <p:txBody>
-          <a:bodyPr wrap="square" anchor="t" lIns="0" rIns="0" tIns="0" bIns="0">
-            <a:noAutofit/>
-          </a:bodyPr>
-          <a:lstStyle/>
-          <a:p>
-            <a:pPr algn="l" marL="449873" indent="-449873">
-              <a:lnSpc>
-                <a:spcPct val="100000"/>
-              </a:lnSpc>
-              <a:spcBef>
-                <a:spcPts val="0"/>
-              </a:spcBef>
-              <a:spcAft>
-                <a:spcPts val="0"/>
-              </a:spcAft>
-            </a:pPr>
-            <a:r>
-              <a:rPr sz="2710" b="0" i="0">
+              <a:rPr sz="2371" b="0" i="0">
+                <a:solidFill>
+                  <a:srgbClr val="000000"/>
+                </a:solidFill>
+                <a:latin typeface="Latin Modern Sans"/>
+              </a:rPr>
+              <a:t> Its encrypted result gives the requester original image names and permitted image keys.</a:t>
+            </a:r>
+          </a:p>
+        </p:txBody>
+      </p:sp>
+      <p:sp>
+        <p:nvSpPr>
+          <p:cNvPr id="8" name="PDF_TEXT_GROUP_289"/>
+          <p:cNvSpPr txBox="1"/>
+          <p:nvPr/>
+        </p:nvSpPr>
+        <p:spPr>
+          <a:xfrm>
+            <a:off x="1192840" y="4817061"/>
+            <a:ext cx="10964200" cy="385554"/>
+          </a:xfrm>
+          <a:prstGeom prst="rect">
+            <a:avLst/>
+          </a:prstGeom>
+          <a:noFill/>
+          <a:ln>
+            <a:noFill/>
+          </a:ln>
+        </p:spPr>
+        <p:txBody>
+          <a:bodyPr wrap="square" anchor="t" lIns="0" rIns="0" tIns="0" bIns="0">
+            <a:noAutofit/>
+          </a:bodyPr>
+          <a:lstStyle/>
+          <a:p>
+            <a:pPr algn="l" marL="426274" indent="-426274">
+              <a:lnSpc>
+                <a:spcPct val="100000"/>
+              </a:lnSpc>
+              <a:spcBef>
+                <a:spcPts val="0"/>
+              </a:spcBef>
+              <a:spcAft>
+                <a:spcPts val="0"/>
+              </a:spcAft>
+            </a:pPr>
+            <a:r>
+              <a:rPr sz="2371" b="0" i="0">
                 <a:solidFill>
                   <a:srgbClr val="3333B2"/>
                 </a:solidFill>
@@ -16734,7 +16726,7 @@
               <a:t>4.</a:t>
             </a:r>
             <a:r>
-              <a:rPr sz="2710" b="0" i="0">
+              <a:rPr sz="2371" b="0" i="0">
                 <a:solidFill>
                   <a:srgbClr val="000000"/>
                 </a:solidFill>
@@ -16747,64 +16739,64 @@
       </p:sp>
       <p:sp>
         <p:nvSpPr>
-          <p:cNvPr id="8" name="PDF_TEXT_GROUP_289"/>
-          <p:cNvSpPr txBox="1"/>
-          <p:nvPr/>
-        </p:nvSpPr>
-        <p:spPr>
-          <a:xfrm>
-            <a:off x="1143656" y="5888443"/>
-            <a:ext cx="12200241" cy="929891"/>
-          </a:xfrm>
-          <a:prstGeom prst="rect">
-            <a:avLst/>
-          </a:prstGeom>
-          <a:noFill/>
-          <a:ln>
-            <a:noFill/>
-          </a:ln>
-        </p:spPr>
-        <p:txBody>
-          <a:bodyPr wrap="square" anchor="t" lIns="0" rIns="0" tIns="0" bIns="0">
-            <a:noAutofit/>
-          </a:bodyPr>
-          <a:lstStyle/>
-          <a:p>
-            <a:pPr algn="l">
-              <a:lnSpc>
-                <a:spcPct val="100000"/>
-              </a:lnSpc>
-              <a:spcBef>
-                <a:spcPts val="0"/>
-              </a:spcBef>
-              <a:spcAft>
-                <a:spcPts val="0"/>
-              </a:spcAft>
-            </a:pPr>
-            <a:r>
-              <a:rPr sz="2710" b="0" i="0">
-                <a:solidFill>
-                  <a:srgbClr val="000000"/>
-                </a:solidFill>
-                <a:latin typeface="Latin Modern Sans"/>
-              </a:rPr>
-              <a:t>No need to republish the same images as if the compute Provider produced them.</a:t>
-            </a:r>
-            <a:r>
-              <a:rPr sz="2710" b="0" i="0">
-                <a:solidFill>
-                  <a:srgbClr val="000000"/>
-                </a:solidFill>
-                <a:latin typeface="Latin Modern Sans"/>
-              </a:rPr>
-              <a:t> GPS alone does not establish camera visibility or accurate triangulation.</a:t>
-            </a:r>
-          </a:p>
-        </p:txBody>
-      </p:sp>
-      <p:sp>
-        <p:nvSpPr>
           <p:cNvPr id="9" name="PDF_TEXT_GROUP_290"/>
+          <p:cNvSpPr txBox="1"/>
+          <p:nvPr/>
+        </p:nvSpPr>
+        <p:spPr>
+          <a:xfrm>
+            <a:off x="1123808" y="5930804"/>
+            <a:ext cx="11727676" cy="828844"/>
+          </a:xfrm>
+          <a:prstGeom prst="rect">
+            <a:avLst/>
+          </a:prstGeom>
+          <a:noFill/>
+          <a:ln>
+            <a:noFill/>
+          </a:ln>
+        </p:spPr>
+        <p:txBody>
+          <a:bodyPr wrap="square" anchor="t" lIns="0" rIns="0" tIns="0" bIns="0">
+            <a:noAutofit/>
+          </a:bodyPr>
+          <a:lstStyle/>
+          <a:p>
+            <a:pPr algn="l">
+              <a:lnSpc>
+                <a:spcPct val="100000"/>
+              </a:lnSpc>
+              <a:spcBef>
+                <a:spcPts val="0"/>
+              </a:spcBef>
+              <a:spcAft>
+                <a:spcPts val="0"/>
+              </a:spcAft>
+            </a:pPr>
+            <a:r>
+              <a:rPr sz="2371" b="0" i="0">
+                <a:solidFill>
+                  <a:srgbClr val="000000"/>
+                </a:solidFill>
+                <a:latin typeface="Latin Modern Sans"/>
+              </a:rPr>
+              <a:t>Original image Data remains under its producer’s name. GPS alone does not establish</a:t>
+            </a:r>
+            <a:r>
+              <a:rPr sz="2371" b="0" i="0">
+                <a:solidFill>
+                  <a:srgbClr val="000000"/>
+                </a:solidFill>
+                <a:latin typeface="Latin Modern Sans"/>
+              </a:rPr>
+              <a:t> camera visibility.</a:t>
+            </a:r>
+          </a:p>
+        </p:txBody>
+      </p:sp>
+      <p:sp>
+        <p:nvSpPr>
+          <p:cNvPr id="10" name="PDF_TEXT_GROUP_291"/>
           <p:cNvSpPr txBox="1"/>
           <p:nvPr/>
         </p:nvSpPr>
@@ -16852,7 +16844,7 @@
       </p:sp>
       <p:sp>
         <p:nvSpPr>
-          <p:cNvPr id="10" name="PDF_TEXT_GROUP_291"/>
+          <p:cNvPr id="11" name="PDF_TEXT_GROUP_292"/>
           <p:cNvSpPr txBox="1"/>
           <p:nvPr/>
         </p:nvSpPr>
@@ -16900,7 +16892,7 @@
       </p:sp>
       <p:sp>
         <p:nvSpPr>
-          <p:cNvPr id="11" name="PDF_TEXT_GROUP_292"/>
+          <p:cNvPr id="12" name="PDF_TEXT_GROUP_293"/>
           <p:cNvSpPr txBox="1"/>
           <p:nvPr/>
         </p:nvSpPr>
@@ -16948,7 +16940,7 @@
       </p:sp>
       <p:sp>
         <p:nvSpPr>
-          <p:cNvPr id="12" name="PDF_TEXT_GROUP_293"/>
+          <p:cNvPr id="13" name="PDF_TEXT_GROUP_294"/>
           <p:cNvSpPr txBox="1"/>
           <p:nvPr/>
         </p:nvSpPr>
@@ -16996,7 +16988,7 @@
       </p:sp>
       <p:sp>
         <p:nvSpPr>
-          <p:cNvPr id="13" name="PDF_TEXT_GROUP_294"/>
+          <p:cNvPr id="14" name="PDF_TEXT_GROUP_295"/>
           <p:cNvSpPr txBox="1"/>
           <p:nvPr/>
         </p:nvSpPr>
@@ -17086,7 +17078,7 @@
       </p:pic>
       <p:sp>
         <p:nvSpPr>
-          <p:cNvPr id="3" name="PDF_TEXT_GROUP_295"/>
+          <p:cNvPr id="3" name="PDF_TEXT_GROUP_296"/>
           <p:cNvSpPr txBox="1"/>
           <p:nvPr/>
         </p:nvSpPr>
@@ -17134,7 +17126,7 @@
       </p:sp>
       <p:sp>
         <p:nvSpPr>
-          <p:cNvPr id="4" name="PDF_TEXT_GROUP_296"/>
+          <p:cNvPr id="4" name="PDF_TEXT_GROUP_297"/>
           <p:cNvSpPr txBox="1"/>
           <p:nvPr/>
         </p:nvSpPr>
@@ -17182,7 +17174,7 @@
       </p:sp>
       <p:sp>
         <p:nvSpPr>
-          <p:cNvPr id="5" name="PDF_TEXT_GROUP_297"/>
+          <p:cNvPr id="5" name="PDF_TEXT_GROUP_298"/>
           <p:cNvSpPr txBox="1"/>
           <p:nvPr/>
         </p:nvSpPr>
@@ -17239,7 +17231,7 @@
       </p:sp>
       <p:sp>
         <p:nvSpPr>
-          <p:cNvPr id="6" name="PDF_TEXT_GROUP_298"/>
+          <p:cNvPr id="6" name="PDF_TEXT_GROUP_299"/>
           <p:cNvSpPr txBox="1"/>
           <p:nvPr/>
         </p:nvSpPr>
@@ -17296,7 +17288,7 @@
       </p:sp>
       <p:sp>
         <p:nvSpPr>
-          <p:cNvPr id="7" name="PDF_TEXT_GROUP_299"/>
+          <p:cNvPr id="7" name="PDF_TEXT_GROUP_300"/>
           <p:cNvSpPr txBox="1"/>
           <p:nvPr/>
         </p:nvSpPr>
@@ -17353,7 +17345,7 @@
       </p:sp>
       <p:sp>
         <p:nvSpPr>
-          <p:cNvPr id="8" name="PDF_TEXT_GROUP_300"/>
+          <p:cNvPr id="8" name="PDF_TEXT_GROUP_301"/>
           <p:cNvSpPr txBox="1"/>
           <p:nvPr/>
         </p:nvSpPr>
@@ -17410,7 +17402,7 @@
       </p:sp>
       <p:sp>
         <p:nvSpPr>
-          <p:cNvPr id="9" name="PDF_TEXT_GROUP_301"/>
+          <p:cNvPr id="9" name="PDF_TEXT_GROUP_302"/>
           <p:cNvSpPr txBox="1"/>
           <p:nvPr/>
         </p:nvSpPr>
@@ -17458,7 +17450,7 @@
       </p:sp>
       <p:sp>
         <p:nvSpPr>
-          <p:cNvPr id="10" name="PDF_TEXT_GROUP_302"/>
+          <p:cNvPr id="10" name="PDF_TEXT_GROUP_303"/>
           <p:cNvSpPr txBox="1"/>
           <p:nvPr/>
         </p:nvSpPr>
@@ -17506,7 +17498,7 @@
       </p:sp>
       <p:sp>
         <p:nvSpPr>
-          <p:cNvPr id="11" name="PDF_TEXT_GROUP_303"/>
+          <p:cNvPr id="11" name="PDF_TEXT_GROUP_304"/>
           <p:cNvSpPr txBox="1"/>
           <p:nvPr/>
         </p:nvSpPr>
@@ -17554,7 +17546,7 @@
       </p:sp>
       <p:sp>
         <p:nvSpPr>
-          <p:cNvPr id="12" name="PDF_TEXT_GROUP_304"/>
+          <p:cNvPr id="12" name="PDF_TEXT_GROUP_305"/>
           <p:cNvSpPr txBox="1"/>
           <p:nvPr/>
         </p:nvSpPr>
@@ -17602,7 +17594,7 @@
       </p:sp>
       <p:sp>
         <p:nvSpPr>
-          <p:cNvPr id="13" name="PDF_TEXT_GROUP_305"/>
+          <p:cNvPr id="13" name="PDF_TEXT_GROUP_306"/>
           <p:cNvSpPr txBox="1"/>
           <p:nvPr/>
         </p:nvSpPr>
@@ -17650,7 +17642,7 @@
       </p:sp>
       <p:sp>
         <p:nvSpPr>
-          <p:cNvPr id="14" name="PDF_BULLET_SPAN_451"/>
+          <p:cNvPr id="14" name="PDF_BULLET_SPAN_445"/>
           <p:cNvSpPr/>
           <p:nvPr/>
         </p:nvSpPr>
@@ -17693,7 +17685,7 @@
       </p:sp>
       <p:sp>
         <p:nvSpPr>
-          <p:cNvPr id="15" name="PDF_BULLET_SPAN_453"/>
+          <p:cNvPr id="15" name="PDF_BULLET_SPAN_447"/>
           <p:cNvSpPr/>
           <p:nvPr/>
         </p:nvSpPr>
@@ -17736,7 +17728,7 @@
       </p:sp>
       <p:sp>
         <p:nvSpPr>
-          <p:cNvPr id="16" name="PDF_BULLET_SPAN_456"/>
+          <p:cNvPr id="16" name="PDF_BULLET_SPAN_450"/>
           <p:cNvSpPr/>
           <p:nvPr/>
         </p:nvSpPr>
@@ -17779,7 +17771,7 @@
       </p:sp>
       <p:sp>
         <p:nvSpPr>
-          <p:cNvPr id="17" name="PDF_BULLET_SPAN_459"/>
+          <p:cNvPr id="17" name="PDF_BULLET_SPAN_453"/>
           <p:cNvSpPr/>
           <p:nvPr/>
         </p:nvSpPr>
@@ -17864,7 +17856,7 @@
       </p:pic>
       <p:sp>
         <p:nvSpPr>
-          <p:cNvPr id="3" name="PDF_TEXT_GROUP_306"/>
+          <p:cNvPr id="3" name="PDF_TEXT_GROUP_307"/>
           <p:cNvSpPr txBox="1"/>
           <p:nvPr/>
         </p:nvSpPr>
@@ -17912,7 +17904,7 @@
       </p:sp>
       <p:sp>
         <p:nvSpPr>
-          <p:cNvPr id="4" name="PDF_TEXT_GROUP_307"/>
+          <p:cNvPr id="4" name="PDF_TEXT_GROUP_308"/>
           <p:cNvSpPr txBox="1"/>
           <p:nvPr/>
         </p:nvSpPr>
@@ -17970,7 +17962,7 @@
       </p:sp>
       <p:sp>
         <p:nvSpPr>
-          <p:cNvPr id="5" name="PDF_TEXT_GROUP_308"/>
+          <p:cNvPr id="5" name="PDF_TEXT_GROUP_309"/>
           <p:cNvSpPr txBox="1"/>
           <p:nvPr/>
         </p:nvSpPr>
@@ -18028,7 +18020,7 @@
       </p:sp>
       <p:sp>
         <p:nvSpPr>
-          <p:cNvPr id="6" name="PDF_TEXT_GROUP_309"/>
+          <p:cNvPr id="6" name="PDF_TEXT_GROUP_310"/>
           <p:cNvSpPr txBox="1"/>
           <p:nvPr/>
         </p:nvSpPr>
@@ -18086,7 +18078,7 @@
       </p:sp>
       <p:sp>
         <p:nvSpPr>
-          <p:cNvPr id="7" name="PDF_TEXT_GROUP_310"/>
+          <p:cNvPr id="7" name="PDF_TEXT_GROUP_311"/>
           <p:cNvSpPr txBox="1"/>
           <p:nvPr/>
         </p:nvSpPr>
@@ -18134,7 +18126,7 @@
       </p:sp>
       <p:sp>
         <p:nvSpPr>
-          <p:cNvPr id="8" name="PDF_TEXT_GROUP_311"/>
+          <p:cNvPr id="8" name="PDF_TEXT_GROUP_312"/>
           <p:cNvSpPr txBox="1"/>
           <p:nvPr/>
         </p:nvSpPr>
@@ -18182,7 +18174,7 @@
       </p:sp>
       <p:sp>
         <p:nvSpPr>
-          <p:cNvPr id="9" name="PDF_TEXT_GROUP_312"/>
+          <p:cNvPr id="9" name="PDF_TEXT_GROUP_313"/>
           <p:cNvSpPr txBox="1"/>
           <p:nvPr/>
         </p:nvSpPr>
@@ -18239,7 +18231,7 @@
       </p:sp>
       <p:sp>
         <p:nvSpPr>
-          <p:cNvPr id="10" name="PDF_TEXT_GROUP_313"/>
+          <p:cNvPr id="10" name="PDF_TEXT_GROUP_314"/>
           <p:cNvSpPr txBox="1"/>
           <p:nvPr/>
         </p:nvSpPr>
@@ -18296,7 +18288,7 @@
       </p:sp>
       <p:sp>
         <p:nvSpPr>
-          <p:cNvPr id="11" name="PDF_TEXT_GROUP_314"/>
+          <p:cNvPr id="11" name="PDF_TEXT_GROUP_315"/>
           <p:cNvSpPr txBox="1"/>
           <p:nvPr/>
         </p:nvSpPr>
@@ -18344,7 +18336,7 @@
       </p:sp>
       <p:sp>
         <p:nvSpPr>
-          <p:cNvPr id="12" name="PDF_TEXT_GROUP_315"/>
+          <p:cNvPr id="12" name="PDF_TEXT_GROUP_316"/>
           <p:cNvSpPr txBox="1"/>
           <p:nvPr/>
         </p:nvSpPr>
@@ -18401,7 +18393,7 @@
       </p:sp>
       <p:sp>
         <p:nvSpPr>
-          <p:cNvPr id="13" name="PDF_TEXT_GROUP_316"/>
+          <p:cNvPr id="13" name="PDF_TEXT_GROUP_317"/>
           <p:cNvSpPr txBox="1"/>
           <p:nvPr/>
         </p:nvSpPr>
@@ -18449,7 +18441,7 @@
       </p:sp>
       <p:sp>
         <p:nvSpPr>
-          <p:cNvPr id="14" name="PDF_TEXT_GROUP_317"/>
+          <p:cNvPr id="14" name="PDF_TEXT_GROUP_318"/>
           <p:cNvSpPr txBox="1"/>
           <p:nvPr/>
         </p:nvSpPr>
@@ -18497,7 +18489,7 @@
       </p:sp>
       <p:sp>
         <p:nvSpPr>
-          <p:cNvPr id="15" name="PDF_TEXT_GROUP_318"/>
+          <p:cNvPr id="15" name="PDF_TEXT_GROUP_319"/>
           <p:cNvSpPr txBox="1"/>
           <p:nvPr/>
         </p:nvSpPr>
@@ -18545,7 +18537,7 @@
       </p:sp>
       <p:sp>
         <p:nvSpPr>
-          <p:cNvPr id="16" name="PDF_TEXT_GROUP_319"/>
+          <p:cNvPr id="16" name="PDF_TEXT_GROUP_320"/>
           <p:cNvSpPr txBox="1"/>
           <p:nvPr/>
         </p:nvSpPr>
@@ -18593,7 +18585,7 @@
       </p:sp>
       <p:sp>
         <p:nvSpPr>
-          <p:cNvPr id="17" name="PDF_TEXT_GROUP_320"/>
+          <p:cNvPr id="17" name="PDF_TEXT_GROUP_321"/>
           <p:cNvSpPr txBox="1"/>
           <p:nvPr/>
         </p:nvSpPr>
@@ -18641,7 +18633,7 @@
       </p:sp>
       <p:sp>
         <p:nvSpPr>
-          <p:cNvPr id="18" name="PDF_BULLET_SPAN_478"/>
+          <p:cNvPr id="18" name="PDF_BULLET_SPAN_472"/>
           <p:cNvSpPr/>
           <p:nvPr/>
         </p:nvSpPr>
@@ -18684,7 +18676,7 @@
       </p:sp>
       <p:sp>
         <p:nvSpPr>
-          <p:cNvPr id="19" name="PDF_BULLET_SPAN_481"/>
+          <p:cNvPr id="19" name="PDF_BULLET_SPAN_475"/>
           <p:cNvSpPr/>
           <p:nvPr/>
         </p:nvSpPr>
@@ -18727,7 +18719,7 @@
       </p:sp>
       <p:sp>
         <p:nvSpPr>
-          <p:cNvPr id="20" name="PDF_BULLET_SPAN_484"/>
+          <p:cNvPr id="20" name="PDF_BULLET_SPAN_478"/>
           <p:cNvSpPr/>
           <p:nvPr/>
         </p:nvSpPr>
@@ -18812,7 +18804,7 @@
       </p:pic>
       <p:sp>
         <p:nvSpPr>
-          <p:cNvPr id="3" name="PDF_TEXT_GROUP_321"/>
+          <p:cNvPr id="3" name="PDF_TEXT_GROUP_322"/>
           <p:cNvSpPr txBox="1"/>
           <p:nvPr/>
         </p:nvSpPr>
@@ -18860,7 +18852,7 @@
       </p:sp>
       <p:sp>
         <p:nvSpPr>
-          <p:cNvPr id="4" name="PDF_TEXT_GROUP_322"/>
+          <p:cNvPr id="4" name="PDF_TEXT_GROUP_323"/>
           <p:cNvSpPr txBox="1"/>
           <p:nvPr/>
         </p:nvSpPr>
@@ -18917,7 +18909,7 @@
       </p:sp>
       <p:sp>
         <p:nvSpPr>
-          <p:cNvPr id="5" name="PDF_TEXT_GROUP_323"/>
+          <p:cNvPr id="5" name="PDF_TEXT_GROUP_324"/>
           <p:cNvSpPr txBox="1"/>
           <p:nvPr/>
         </p:nvSpPr>
@@ -18974,7 +18966,7 @@
       </p:sp>
       <p:sp>
         <p:nvSpPr>
-          <p:cNvPr id="6" name="PDF_TEXT_GROUP_324"/>
+          <p:cNvPr id="6" name="PDF_TEXT_GROUP_325"/>
           <p:cNvSpPr txBox="1"/>
           <p:nvPr/>
         </p:nvSpPr>
@@ -19022,7 +19014,7 @@
       </p:sp>
       <p:sp>
         <p:nvSpPr>
-          <p:cNvPr id="7" name="PDF_TEXT_GROUP_325"/>
+          <p:cNvPr id="7" name="PDF_TEXT_GROUP_326"/>
           <p:cNvSpPr txBox="1"/>
           <p:nvPr/>
         </p:nvSpPr>
@@ -19079,7 +19071,7 @@
       </p:sp>
       <p:sp>
         <p:nvSpPr>
-          <p:cNvPr id="8" name="PDF_TEXT_GROUP_326"/>
+          <p:cNvPr id="8" name="PDF_TEXT_GROUP_327"/>
           <p:cNvSpPr txBox="1"/>
           <p:nvPr/>
         </p:nvSpPr>
@@ -19136,7 +19128,7 @@
       </p:sp>
       <p:sp>
         <p:nvSpPr>
-          <p:cNvPr id="9" name="PDF_TEXT_GROUP_327"/>
+          <p:cNvPr id="9" name="PDF_TEXT_GROUP_328"/>
           <p:cNvSpPr txBox="1"/>
           <p:nvPr/>
         </p:nvSpPr>
@@ -19184,7 +19176,7 @@
       </p:sp>
       <p:sp>
         <p:nvSpPr>
-          <p:cNvPr id="10" name="PDF_TEXT_GROUP_328"/>
+          <p:cNvPr id="10" name="PDF_TEXT_GROUP_329"/>
           <p:cNvSpPr txBox="1"/>
           <p:nvPr/>
         </p:nvSpPr>
@@ -19232,7 +19224,7 @@
       </p:sp>
       <p:sp>
         <p:nvSpPr>
-          <p:cNvPr id="11" name="PDF_TEXT_GROUP_329"/>
+          <p:cNvPr id="11" name="PDF_TEXT_GROUP_330"/>
           <p:cNvSpPr txBox="1"/>
           <p:nvPr/>
         </p:nvSpPr>
@@ -19280,7 +19272,7 @@
       </p:sp>
       <p:sp>
         <p:nvSpPr>
-          <p:cNvPr id="12" name="PDF_TEXT_GROUP_330"/>
+          <p:cNvPr id="12" name="PDF_TEXT_GROUP_331"/>
           <p:cNvSpPr txBox="1"/>
           <p:nvPr/>
         </p:nvSpPr>
@@ -19328,7 +19320,7 @@
       </p:sp>
       <p:sp>
         <p:nvSpPr>
-          <p:cNvPr id="13" name="PDF_TEXT_GROUP_331"/>
+          <p:cNvPr id="13" name="PDF_TEXT_GROUP_332"/>
           <p:cNvSpPr txBox="1"/>
           <p:nvPr/>
         </p:nvSpPr>
@@ -19376,7 +19368,7 @@
       </p:sp>
       <p:sp>
         <p:nvSpPr>
-          <p:cNvPr id="14" name="PDF_BULLET_SPAN_494"/>
+          <p:cNvPr id="14" name="PDF_BULLET_SPAN_488"/>
           <p:cNvSpPr/>
           <p:nvPr/>
         </p:nvSpPr>
@@ -19419,7 +19411,7 @@
       </p:sp>
       <p:sp>
         <p:nvSpPr>
-          <p:cNvPr id="15" name="PDF_BULLET_SPAN_497"/>
+          <p:cNvPr id="15" name="PDF_BULLET_SPAN_491"/>
           <p:cNvSpPr/>
           <p:nvPr/>
         </p:nvSpPr>
@@ -19462,7 +19454,7 @@
       </p:sp>
       <p:sp>
         <p:nvSpPr>
-          <p:cNvPr id="16" name="PDF_BULLET_SPAN_500"/>
+          <p:cNvPr id="16" name="PDF_BULLET_SPAN_494"/>
           <p:cNvSpPr/>
           <p:nvPr/>
         </p:nvSpPr>
@@ -19505,7 +19497,7 @@
       </p:sp>
       <p:sp>
         <p:nvSpPr>
-          <p:cNvPr id="17" name="PDF_BULLET_SPAN_502"/>
+          <p:cNvPr id="17" name="PDF_BULLET_SPAN_496"/>
           <p:cNvSpPr/>
           <p:nvPr/>
         </p:nvSpPr>
@@ -19590,7 +19582,7 @@
       </p:pic>
       <p:sp>
         <p:nvSpPr>
-          <p:cNvPr id="3" name="PDF_TEXT_GROUP_332"/>
+          <p:cNvPr id="3" name="PDF_TEXT_GROUP_333"/>
           <p:cNvSpPr txBox="1"/>
           <p:nvPr/>
         </p:nvSpPr>
@@ -19638,7 +19630,7 @@
       </p:sp>
       <p:sp>
         <p:nvSpPr>
-          <p:cNvPr id="4" name="PDF_TEXT_GROUP_333"/>
+          <p:cNvPr id="4" name="PDF_TEXT_GROUP_334"/>
           <p:cNvSpPr txBox="1"/>
           <p:nvPr/>
         </p:nvSpPr>
@@ -19695,7 +19687,7 @@
       </p:sp>
       <p:sp>
         <p:nvSpPr>
-          <p:cNvPr id="5" name="PDF_TEXT_GROUP_334"/>
+          <p:cNvPr id="5" name="PDF_TEXT_GROUP_335"/>
           <p:cNvSpPr txBox="1"/>
           <p:nvPr/>
         </p:nvSpPr>
@@ -19752,7 +19744,7 @@
       </p:sp>
       <p:sp>
         <p:nvSpPr>
-          <p:cNvPr id="6" name="PDF_TEXT_GROUP_335"/>
+          <p:cNvPr id="6" name="PDF_TEXT_GROUP_336"/>
           <p:cNvSpPr txBox="1"/>
           <p:nvPr/>
         </p:nvSpPr>
@@ -19809,7 +19801,7 @@
       </p:sp>
       <p:sp>
         <p:nvSpPr>
-          <p:cNvPr id="7" name="PDF_TEXT_GROUP_336"/>
+          <p:cNvPr id="7" name="PDF_TEXT_GROUP_337"/>
           <p:cNvSpPr txBox="1"/>
           <p:nvPr/>
         </p:nvSpPr>
@@ -19866,7 +19858,7 @@
       </p:sp>
       <p:sp>
         <p:nvSpPr>
-          <p:cNvPr id="8" name="PDF_TEXT_GROUP_337"/>
+          <p:cNvPr id="8" name="PDF_TEXT_GROUP_338"/>
           <p:cNvSpPr txBox="1"/>
           <p:nvPr/>
         </p:nvSpPr>
@@ -19923,7 +19915,7 @@
       </p:sp>
       <p:sp>
         <p:nvSpPr>
-          <p:cNvPr id="9" name="PDF_TEXT_GROUP_338"/>
+          <p:cNvPr id="9" name="PDF_TEXT_GROUP_339"/>
           <p:cNvSpPr txBox="1"/>
           <p:nvPr/>
         </p:nvSpPr>
@@ -19971,7 +19963,7 @@
       </p:sp>
       <p:sp>
         <p:nvSpPr>
-          <p:cNvPr id="10" name="PDF_TEXT_GROUP_339"/>
+          <p:cNvPr id="10" name="PDF_TEXT_GROUP_340"/>
           <p:cNvSpPr txBox="1"/>
           <p:nvPr/>
         </p:nvSpPr>
@@ -20019,7 +20011,7 @@
       </p:sp>
       <p:sp>
         <p:nvSpPr>
-          <p:cNvPr id="11" name="PDF_TEXT_GROUP_340"/>
+          <p:cNvPr id="11" name="PDF_TEXT_GROUP_341"/>
           <p:cNvSpPr txBox="1"/>
           <p:nvPr/>
         </p:nvSpPr>
@@ -20067,7 +20059,7 @@
       </p:sp>
       <p:sp>
         <p:nvSpPr>
-          <p:cNvPr id="12" name="PDF_TEXT_GROUP_341"/>
+          <p:cNvPr id="12" name="PDF_TEXT_GROUP_342"/>
           <p:cNvSpPr txBox="1"/>
           <p:nvPr/>
         </p:nvSpPr>
@@ -20115,7 +20107,7 @@
       </p:sp>
       <p:sp>
         <p:nvSpPr>
-          <p:cNvPr id="13" name="PDF_TEXT_GROUP_342"/>
+          <p:cNvPr id="13" name="PDF_TEXT_GROUP_343"/>
           <p:cNvSpPr txBox="1"/>
           <p:nvPr/>
         </p:nvSpPr>
@@ -20163,7 +20155,7 @@
       </p:sp>
       <p:sp>
         <p:nvSpPr>
-          <p:cNvPr id="14" name="PDF_BULLET_SPAN_513"/>
+          <p:cNvPr id="14" name="PDF_BULLET_SPAN_507"/>
           <p:cNvSpPr/>
           <p:nvPr/>
         </p:nvSpPr>
@@ -20206,7 +20198,7 @@
       </p:sp>
       <p:sp>
         <p:nvSpPr>
-          <p:cNvPr id="15" name="PDF_BULLET_SPAN_516"/>
+          <p:cNvPr id="15" name="PDF_BULLET_SPAN_510"/>
           <p:cNvSpPr/>
           <p:nvPr/>
         </p:nvSpPr>
@@ -20249,7 +20241,7 @@
       </p:sp>
       <p:sp>
         <p:nvSpPr>
-          <p:cNvPr id="16" name="PDF_BULLET_SPAN_519"/>
+          <p:cNvPr id="16" name="PDF_BULLET_SPAN_513"/>
           <p:cNvSpPr/>
           <p:nvPr/>
         </p:nvSpPr>
@@ -20292,7 +20284,7 @@
       </p:sp>
       <p:sp>
         <p:nvSpPr>
-          <p:cNvPr id="17" name="PDF_BULLET_SPAN_522"/>
+          <p:cNvPr id="17" name="PDF_BULLET_SPAN_516"/>
           <p:cNvSpPr/>
           <p:nvPr/>
         </p:nvSpPr>
@@ -20377,7 +20369,7 @@
       </p:pic>
       <p:sp>
         <p:nvSpPr>
-          <p:cNvPr id="3" name="PDF_TEXT_GROUP_343"/>
+          <p:cNvPr id="3" name="PDF_TEXT_GROUP_344"/>
           <p:cNvSpPr txBox="1"/>
           <p:nvPr/>
         </p:nvSpPr>
@@ -20425,7 +20417,7 @@
       </p:sp>
       <p:sp>
         <p:nvSpPr>
-          <p:cNvPr id="4" name="PDF_TEXT_GROUP_344"/>
+          <p:cNvPr id="4" name="PDF_TEXT_GROUP_345"/>
           <p:cNvSpPr txBox="1"/>
           <p:nvPr/>
         </p:nvSpPr>
@@ -20473,7 +20465,7 @@
       </p:sp>
       <p:sp>
         <p:nvSpPr>
-          <p:cNvPr id="5" name="PDF_TEXT_GROUP_345"/>
+          <p:cNvPr id="5" name="PDF_TEXT_GROUP_346"/>
           <p:cNvSpPr txBox="1"/>
           <p:nvPr/>
         </p:nvSpPr>
@@ -20521,7 +20513,7 @@
       </p:sp>
       <p:sp>
         <p:nvSpPr>
-          <p:cNvPr id="6" name="PDF_TEXT_GROUP_346"/>
+          <p:cNvPr id="6" name="PDF_TEXT_GROUP_347"/>
           <p:cNvSpPr txBox="1"/>
           <p:nvPr/>
         </p:nvSpPr>
@@ -20569,7 +20561,7 @@
       </p:sp>
       <p:sp>
         <p:nvSpPr>
-          <p:cNvPr id="7" name="PDF_TEXT_GROUP_347"/>
+          <p:cNvPr id="7" name="PDF_TEXT_GROUP_348"/>
           <p:cNvSpPr txBox="1"/>
           <p:nvPr/>
         </p:nvSpPr>
@@ -20617,7 +20609,7 @@
       </p:sp>
       <p:sp>
         <p:nvSpPr>
-          <p:cNvPr id="8" name="PDF_TEXT_GROUP_348"/>
+          <p:cNvPr id="8" name="PDF_TEXT_GROUP_349"/>
           <p:cNvSpPr txBox="1"/>
           <p:nvPr/>
         </p:nvSpPr>
@@ -20665,7 +20657,7 @@
       </p:sp>
       <p:sp>
         <p:nvSpPr>
-          <p:cNvPr id="9" name="PDF_TEXT_GROUP_349"/>
+          <p:cNvPr id="9" name="PDF_TEXT_GROUP_350"/>
           <p:cNvSpPr txBox="1"/>
           <p:nvPr/>
         </p:nvSpPr>
@@ -20713,7 +20705,7 @@
       </p:sp>
       <p:sp>
         <p:nvSpPr>
-          <p:cNvPr id="10" name="PDF_TEXT_GROUP_350"/>
+          <p:cNvPr id="10" name="PDF_TEXT_GROUP_351"/>
           <p:cNvSpPr txBox="1"/>
           <p:nvPr/>
         </p:nvSpPr>
@@ -20761,7 +20753,7 @@
       </p:sp>
       <p:sp>
         <p:nvSpPr>
-          <p:cNvPr id="11" name="PDF_TEXT_GROUP_351"/>
+          <p:cNvPr id="11" name="PDF_TEXT_GROUP_352"/>
           <p:cNvSpPr txBox="1"/>
           <p:nvPr/>
         </p:nvSpPr>
@@ -20809,7 +20801,7 @@
       </p:sp>
       <p:sp>
         <p:nvSpPr>
-          <p:cNvPr id="12" name="PDF_TEXT_GROUP_352"/>
+          <p:cNvPr id="12" name="PDF_TEXT_GROUP_353"/>
           <p:cNvSpPr txBox="1"/>
           <p:nvPr/>
         </p:nvSpPr>
@@ -20857,7 +20849,7 @@
       </p:sp>
       <p:sp>
         <p:nvSpPr>
-          <p:cNvPr id="13" name="PDF_TEXT_GROUP_353"/>
+          <p:cNvPr id="13" name="PDF_TEXT_GROUP_354"/>
           <p:cNvSpPr txBox="1"/>
           <p:nvPr/>
         </p:nvSpPr>
@@ -20905,7 +20897,7 @@
       </p:sp>
       <p:sp>
         <p:nvSpPr>
-          <p:cNvPr id="14" name="PDF_TEXT_GROUP_354"/>
+          <p:cNvPr id="14" name="PDF_TEXT_GROUP_355"/>
           <p:cNvSpPr txBox="1"/>
           <p:nvPr/>
         </p:nvSpPr>
@@ -20953,7 +20945,7 @@
       </p:sp>
       <p:sp>
         <p:nvSpPr>
-          <p:cNvPr id="15" name="PDF_TEXT_GROUP_355"/>
+          <p:cNvPr id="15" name="PDF_TEXT_GROUP_356"/>
           <p:cNvSpPr txBox="1"/>
           <p:nvPr/>
         </p:nvSpPr>
@@ -21001,7 +20993,7 @@
       </p:sp>
       <p:sp>
         <p:nvSpPr>
-          <p:cNvPr id="16" name="PDF_TEXT_GROUP_356"/>
+          <p:cNvPr id="16" name="PDF_TEXT_GROUP_357"/>
           <p:cNvSpPr txBox="1"/>
           <p:nvPr/>
         </p:nvSpPr>
@@ -21049,7 +21041,7 @@
       </p:sp>
       <p:sp>
         <p:nvSpPr>
-          <p:cNvPr id="17" name="PDF_TEXT_GROUP_357"/>
+          <p:cNvPr id="17" name="PDF_TEXT_GROUP_358"/>
           <p:cNvSpPr txBox="1"/>
           <p:nvPr/>
         </p:nvSpPr>
@@ -21097,7 +21089,7 @@
       </p:sp>
       <p:sp>
         <p:nvSpPr>
-          <p:cNvPr id="18" name="PDF_TEXT_GROUP_358"/>
+          <p:cNvPr id="18" name="PDF_TEXT_GROUP_359"/>
           <p:cNvSpPr txBox="1"/>
           <p:nvPr/>
         </p:nvSpPr>
@@ -21145,7 +21137,7 @@
       </p:sp>
       <p:sp>
         <p:nvSpPr>
-          <p:cNvPr id="19" name="PDF_TEXT_GROUP_359"/>
+          <p:cNvPr id="19" name="PDF_TEXT_GROUP_360"/>
           <p:cNvSpPr txBox="1"/>
           <p:nvPr/>
         </p:nvSpPr>
@@ -21193,7 +21185,7 @@
       </p:sp>
       <p:sp>
         <p:nvSpPr>
-          <p:cNvPr id="20" name="PDF_TEXT_GROUP_360"/>
+          <p:cNvPr id="20" name="PDF_TEXT_GROUP_361"/>
           <p:cNvSpPr txBox="1"/>
           <p:nvPr/>
         </p:nvSpPr>
@@ -21241,7 +21233,7 @@
       </p:sp>
       <p:sp>
         <p:nvSpPr>
-          <p:cNvPr id="21" name="PDF_TEXT_GROUP_361"/>
+          <p:cNvPr id="21" name="PDF_TEXT_GROUP_362"/>
           <p:cNvSpPr txBox="1"/>
           <p:nvPr/>
         </p:nvSpPr>
@@ -21298,7 +21290,7 @@
       </p:sp>
       <p:sp>
         <p:nvSpPr>
-          <p:cNvPr id="22" name="PDF_TEXT_GROUP_362"/>
+          <p:cNvPr id="22" name="PDF_TEXT_GROUP_363"/>
           <p:cNvSpPr txBox="1"/>
           <p:nvPr/>
         </p:nvSpPr>
@@ -21346,7 +21338,7 @@
       </p:sp>
       <p:sp>
         <p:nvSpPr>
-          <p:cNvPr id="23" name="PDF_TEXT_GROUP_363"/>
+          <p:cNvPr id="23" name="PDF_TEXT_GROUP_364"/>
           <p:cNvSpPr txBox="1"/>
           <p:nvPr/>
         </p:nvSpPr>
@@ -21394,7 +21386,7 @@
       </p:sp>
       <p:sp>
         <p:nvSpPr>
-          <p:cNvPr id="24" name="PDF_TEXT_GROUP_364"/>
+          <p:cNvPr id="24" name="PDF_TEXT_GROUP_365"/>
           <p:cNvSpPr txBox="1"/>
           <p:nvPr/>
         </p:nvSpPr>
@@ -21442,7 +21434,7 @@
       </p:sp>
       <p:sp>
         <p:nvSpPr>
-          <p:cNvPr id="25" name="PDF_TEXT_GROUP_365"/>
+          <p:cNvPr id="25" name="PDF_TEXT_GROUP_366"/>
           <p:cNvSpPr txBox="1"/>
           <p:nvPr/>
         </p:nvSpPr>
@@ -21490,7 +21482,7 @@
       </p:sp>
       <p:sp>
         <p:nvSpPr>
-          <p:cNvPr id="26" name="PDF_TEXT_GROUP_366"/>
+          <p:cNvPr id="26" name="PDF_TEXT_GROUP_367"/>
           <p:cNvSpPr txBox="1"/>
           <p:nvPr/>
         </p:nvSpPr>
@@ -21580,7 +21572,7 @@
       </p:pic>
       <p:sp>
         <p:nvSpPr>
-          <p:cNvPr id="3" name="PDF_TEXT_GROUP_367"/>
+          <p:cNvPr id="3" name="PDF_TEXT_GROUP_368"/>
           <p:cNvSpPr txBox="1"/>
           <p:nvPr/>
         </p:nvSpPr>
@@ -21628,7 +21620,7 @@
       </p:sp>
       <p:sp>
         <p:nvSpPr>
-          <p:cNvPr id="4" name="PDF_TEXT_GROUP_368"/>
+          <p:cNvPr id="4" name="PDF_TEXT_GROUP_369"/>
           <p:cNvSpPr txBox="1"/>
           <p:nvPr/>
         </p:nvSpPr>
@@ -21676,7 +21668,7 @@
       </p:sp>
       <p:sp>
         <p:nvSpPr>
-          <p:cNvPr id="5" name="PDF_TEXT_GROUP_369"/>
+          <p:cNvPr id="5" name="PDF_TEXT_GROUP_370"/>
           <p:cNvSpPr txBox="1"/>
           <p:nvPr/>
         </p:nvSpPr>
@@ -21724,7 +21716,7 @@
       </p:sp>
       <p:sp>
         <p:nvSpPr>
-          <p:cNvPr id="6" name="PDF_TEXT_GROUP_370"/>
+          <p:cNvPr id="6" name="PDF_TEXT_GROUP_371"/>
           <p:cNvSpPr txBox="1"/>
           <p:nvPr/>
         </p:nvSpPr>
@@ -21772,7 +21764,7 @@
       </p:sp>
       <p:sp>
         <p:nvSpPr>
-          <p:cNvPr id="7" name="PDF_TEXT_GROUP_371"/>
+          <p:cNvPr id="7" name="PDF_TEXT_GROUP_372"/>
           <p:cNvSpPr txBox="1"/>
           <p:nvPr/>
         </p:nvSpPr>
@@ -21820,7 +21812,7 @@
       </p:sp>
       <p:sp>
         <p:nvSpPr>
-          <p:cNvPr id="8" name="PDF_TEXT_GROUP_372"/>
+          <p:cNvPr id="8" name="PDF_TEXT_GROUP_373"/>
           <p:cNvSpPr txBox="1"/>
           <p:nvPr/>
         </p:nvSpPr>
@@ -21886,7 +21878,7 @@
       </p:sp>
       <p:sp>
         <p:nvSpPr>
-          <p:cNvPr id="9" name="PDF_TEXT_GROUP_374"/>
+          <p:cNvPr id="9" name="PDF_TEXT_GROUP_375"/>
           <p:cNvSpPr txBox="1"/>
           <p:nvPr/>
         </p:nvSpPr>
@@ -21934,7 +21926,7 @@
       </p:sp>
       <p:sp>
         <p:nvSpPr>
-          <p:cNvPr id="10" name="PDF_TEXT_GROUP_373"/>
+          <p:cNvPr id="10" name="PDF_TEXT_GROUP_374"/>
           <p:cNvSpPr txBox="1"/>
           <p:nvPr/>
         </p:nvSpPr>
@@ -22036,7 +22028,7 @@
       </p:sp>
       <p:sp>
         <p:nvSpPr>
-          <p:cNvPr id="11" name="PDF_TEXT_GROUP_375"/>
+          <p:cNvPr id="11" name="PDF_TEXT_GROUP_376"/>
           <p:cNvSpPr txBox="1"/>
           <p:nvPr/>
         </p:nvSpPr>
@@ -22102,7 +22094,7 @@
       </p:sp>
       <p:sp>
         <p:nvSpPr>
-          <p:cNvPr id="12" name="PDF_TEXT_GROUP_377"/>
+          <p:cNvPr id="12" name="PDF_TEXT_GROUP_378"/>
           <p:cNvSpPr txBox="1"/>
           <p:nvPr/>
         </p:nvSpPr>
@@ -22150,7 +22142,7 @@
       </p:sp>
       <p:sp>
         <p:nvSpPr>
-          <p:cNvPr id="13" name="PDF_TEXT_GROUP_376"/>
+          <p:cNvPr id="13" name="PDF_TEXT_GROUP_377"/>
           <p:cNvSpPr txBox="1"/>
           <p:nvPr/>
         </p:nvSpPr>
@@ -22252,7 +22244,7 @@
       </p:sp>
       <p:sp>
         <p:nvSpPr>
-          <p:cNvPr id="14" name="PDF_TEXT_GROUP_378"/>
+          <p:cNvPr id="14" name="PDF_TEXT_GROUP_379"/>
           <p:cNvSpPr txBox="1"/>
           <p:nvPr/>
         </p:nvSpPr>
@@ -22300,7 +22292,7 @@
       </p:sp>
       <p:sp>
         <p:nvSpPr>
-          <p:cNvPr id="15" name="PDF_TEXT_GROUP_379"/>
+          <p:cNvPr id="15" name="PDF_TEXT_GROUP_380"/>
           <p:cNvSpPr txBox="1"/>
           <p:nvPr/>
         </p:nvSpPr>
@@ -22357,7 +22349,7 @@
       </p:sp>
       <p:sp>
         <p:nvSpPr>
-          <p:cNvPr id="16" name="PDF_TEXT_GROUP_380"/>
+          <p:cNvPr id="16" name="PDF_TEXT_GROUP_381"/>
           <p:cNvSpPr txBox="1"/>
           <p:nvPr/>
         </p:nvSpPr>
@@ -22405,7 +22397,7 @@
       </p:sp>
       <p:sp>
         <p:nvSpPr>
-          <p:cNvPr id="17" name="PDF_TEXT_GROUP_381"/>
+          <p:cNvPr id="17" name="PDF_TEXT_GROUP_382"/>
           <p:cNvSpPr txBox="1"/>
           <p:nvPr/>
         </p:nvSpPr>
@@ -22453,7 +22445,7 @@
       </p:sp>
       <p:sp>
         <p:nvSpPr>
-          <p:cNvPr id="18" name="PDF_TEXT_GROUP_382"/>
+          <p:cNvPr id="18" name="PDF_TEXT_GROUP_383"/>
           <p:cNvSpPr txBox="1"/>
           <p:nvPr/>
         </p:nvSpPr>
@@ -22501,7 +22493,7 @@
       </p:sp>
       <p:sp>
         <p:nvSpPr>
-          <p:cNvPr id="19" name="PDF_TEXT_GROUP_383"/>
+          <p:cNvPr id="19" name="PDF_TEXT_GROUP_384"/>
           <p:cNvSpPr txBox="1"/>
           <p:nvPr/>
         </p:nvSpPr>
@@ -22549,7 +22541,7 @@
       </p:sp>
       <p:sp>
         <p:nvSpPr>
-          <p:cNvPr id="20" name="PDF_TEXT_GROUP_384"/>
+          <p:cNvPr id="20" name="PDF_TEXT_GROUP_385"/>
           <p:cNvSpPr txBox="1"/>
           <p:nvPr/>
         </p:nvSpPr>
@@ -22639,7 +22631,7 @@
       </p:pic>
       <p:sp>
         <p:nvSpPr>
-          <p:cNvPr id="3" name="PDF_TEXT_GROUP_21"/>
+          <p:cNvPr id="3" name="PDF_TEXT_GROUP_20"/>
           <p:cNvSpPr txBox="1"/>
           <p:nvPr/>
         </p:nvSpPr>
@@ -22680,37 +22672,85 @@
                 </a:solidFill>
                 <a:latin typeface="Latin Modern Sans"/>
               </a:rPr>
-              <a:t>The Task Creates Three Requirements</a:t>
-            </a:r>
-          </a:p>
-        </p:txBody>
-      </p:sp>
-      <p:sp>
-        <p:nvSpPr>
-          <p:cNvPr id="4" name="PDF_TEXT_GROUP_22"/>
-          <p:cNvSpPr txBox="1"/>
-          <p:nvPr/>
-        </p:nvSpPr>
-        <p:spPr>
-          <a:xfrm>
-            <a:off x="1169087" y="1992912"/>
-            <a:ext cx="12147955" cy="929891"/>
-          </a:xfrm>
-          <a:prstGeom prst="rect">
-            <a:avLst/>
-          </a:prstGeom>
-          <a:noFill/>
-          <a:ln>
-            <a:noFill/>
-          </a:ln>
-        </p:spPr>
-        <p:txBody>
-          <a:bodyPr wrap="square" anchor="t" lIns="0" rIns="0" tIns="0" bIns="0">
-            <a:noAutofit/>
-          </a:bodyPr>
-          <a:lstStyle/>
-          <a:p>
-            <a:pPr algn="l" marL="449884" indent="-449884">
+              <a:t>From Invocation to Collaboration: Two Research Scopes</a:t>
+            </a:r>
+          </a:p>
+        </p:txBody>
+      </p:sp>
+      <p:sp>
+        <p:nvSpPr>
+          <p:cNvPr id="4" name="PDF_TEXT_GROUP_21"/>
+          <p:cNvSpPr txBox="1"/>
+          <p:nvPr/>
+        </p:nvSpPr>
+        <p:spPr>
+          <a:xfrm>
+            <a:off x="914808" y="1818119"/>
+            <a:ext cx="8371585" cy="468172"/>
+          </a:xfrm>
+          <a:prstGeom prst="rect">
+            <a:avLst/>
+          </a:prstGeom>
+          <a:noFill/>
+          <a:ln>
+            <a:noFill/>
+          </a:ln>
+        </p:spPr>
+        <p:txBody>
+          <a:bodyPr wrap="square" anchor="t" lIns="0" rIns="0" tIns="0" bIns="0">
+            <a:noAutofit/>
+          </a:bodyPr>
+          <a:lstStyle/>
+          <a:p>
+            <a:pPr algn="l">
+              <a:lnSpc>
+                <a:spcPct val="100000"/>
+              </a:lnSpc>
+              <a:spcBef>
+                <a:spcPts val="0"/>
+              </a:spcBef>
+              <a:spcAft>
+                <a:spcPts val="0"/>
+              </a:spcAft>
+            </a:pPr>
+            <a:r>
+              <a:rPr sz="2880" b="0" i="0">
+                <a:solidFill>
+                  <a:srgbClr val="3333B2"/>
+                </a:solidFill>
+                <a:latin typeface="Latin Modern Sans"/>
+              </a:rPr>
+              <a:t>Foundation: evaluate discovery and authorization</a:t>
+            </a:r>
+          </a:p>
+        </p:txBody>
+      </p:sp>
+      <p:sp>
+        <p:nvSpPr>
+          <p:cNvPr id="5" name="PDF_TEXT_GROUP_22"/>
+          <p:cNvSpPr txBox="1"/>
+          <p:nvPr/>
+        </p:nvSpPr>
+        <p:spPr>
+          <a:xfrm>
+            <a:off x="914808" y="2386769"/>
+            <a:ext cx="12935607" cy="929891"/>
+          </a:xfrm>
+          <a:prstGeom prst="rect">
+            <a:avLst/>
+          </a:prstGeom>
+          <a:noFill/>
+          <a:ln>
+            <a:noFill/>
+          </a:ln>
+        </p:spPr>
+        <p:txBody>
+          <a:bodyPr wrap="square" anchor="t" lIns="0" rIns="0" tIns="0" bIns="0">
+            <a:noAutofit/>
+          </a:bodyPr>
+          <a:lstStyle/>
+          <a:p>
+            <a:pPr algn="l">
               <a:lnSpc>
                 <a:spcPct val="100000"/>
               </a:lnSpc>
@@ -22724,21 +22764,108 @@
             <a:r>
               <a:rPr sz="2710" b="0" i="0">
                 <a:solidFill>
+                  <a:srgbClr val="000000"/>
+                </a:solidFill>
+                <a:latin typeface="Latin Modern Sans"/>
+              </a:rPr>
+              <a:t>The initial prototype selects one Provider. Discovery confidentiality, service permissions</a:t>
+            </a:r>
+            <a:r>
+              <a:rPr sz="2710" b="0" i="0">
+                <a:solidFill>
+                  <a:srgbClr val="000000"/>
+                </a:solidFill>
+                <a:latin typeface="Latin Modern Sans"/>
+              </a:rPr>
+              <a:t> and management costs matter even without collaboration.</a:t>
+            </a:r>
+          </a:p>
+        </p:txBody>
+      </p:sp>
+      <p:sp>
+        <p:nvSpPr>
+          <p:cNvPr id="6" name="PDF_TEXT_GROUP_23"/>
+          <p:cNvSpPr txBox="1"/>
+          <p:nvPr/>
+        </p:nvSpPr>
+        <p:spPr>
+          <a:xfrm>
+            <a:off x="914808" y="3714794"/>
+            <a:ext cx="7307594" cy="468172"/>
+          </a:xfrm>
+          <a:prstGeom prst="rect">
+            <a:avLst/>
+          </a:prstGeom>
+          <a:noFill/>
+          <a:ln>
+            <a:noFill/>
+          </a:ln>
+        </p:spPr>
+        <p:txBody>
+          <a:bodyPr wrap="square" anchor="t" lIns="0" rIns="0" tIns="0" bIns="0">
+            <a:noAutofit/>
+          </a:bodyPr>
+          <a:lstStyle/>
+          <a:p>
+            <a:pPr algn="l">
+              <a:lnSpc>
+                <a:spcPct val="100000"/>
+              </a:lnSpc>
+              <a:spcBef>
+                <a:spcPts val="0"/>
+              </a:spcBef>
+              <a:spcAft>
+                <a:spcPts val="0"/>
+              </a:spcAft>
+            </a:pPr>
+            <a:r>
+              <a:rPr sz="2880" b="0" i="0">
+                <a:solidFill>
                   <a:srgbClr val="3333B2"/>
                 </a:solidFill>
                 <a:latin typeface="Latin Modern Sans"/>
               </a:rPr>
-              <a:t>1.</a:t>
-            </a:r>
-            <a:r>
-              <a:rPr sz="2710" b="1" i="0">
-                <a:solidFill>
-                  <a:srgbClr val="000000"/>
-                </a:solidFill>
-                <a:latin typeface="Latin Modern Sans"/>
-              </a:rPr>
-              <a:t> Discover current willingness:</a:t>
-            </a:r>
+              <a:t>Extension: coordinate complementary roles</a:t>
+            </a:r>
+          </a:p>
+        </p:txBody>
+      </p:sp>
+      <p:sp>
+        <p:nvSpPr>
+          <p:cNvPr id="7" name="PDF_TEXT_GROUP_24"/>
+          <p:cNvSpPr txBox="1"/>
+          <p:nvPr/>
+        </p:nvSpPr>
+        <p:spPr>
+          <a:xfrm>
+            <a:off x="914808" y="4283412"/>
+            <a:ext cx="12826889" cy="929891"/>
+          </a:xfrm>
+          <a:prstGeom prst="rect">
+            <a:avLst/>
+          </a:prstGeom>
+          <a:noFill/>
+          <a:ln>
+            <a:noFill/>
+          </a:ln>
+        </p:spPr>
+        <p:txBody>
+          <a:bodyPr wrap="square" anchor="t" lIns="0" rIns="0" tIns="0" bIns="0">
+            <a:noAutofit/>
+          </a:bodyPr>
+          <a:lstStyle/>
+          <a:p>
+            <a:pPr algn="l">
+              <a:lnSpc>
+                <a:spcPct val="100000"/>
+              </a:lnSpc>
+              <a:spcBef>
+                <a:spcPts val="0"/>
+              </a:spcBef>
+              <a:spcAft>
+                <a:spcPts val="0"/>
+              </a:spcAft>
+            </a:pPr>
             <a:r>
               <a:rPr sz="2710" b="0" i="0">
                 <a:solidFill>
@@ -22746,7 +22873,7 @@
                 </a:solidFill>
                 <a:latin typeface="Latin Modern Sans"/>
               </a:rPr>
-              <a:t> reachability, sensors, load, and deadlines affect</a:t>
+              <a:t>Some tasks need several Providers with different responsibilities. Separate calls do not</a:t>
             </a:r>
             <a:r>
               <a:rPr sz="2710" b="0" i="0">
@@ -22755,37 +22882,37 @@
                 </a:solidFill>
                 <a:latin typeface="Latin Modern Sans"/>
               </a:rPr>
-              <a:t> participation.</a:t>
-            </a:r>
-          </a:p>
-        </p:txBody>
-      </p:sp>
-      <p:sp>
-        <p:nvSpPr>
-          <p:cNvPr id="5" name="PDF_TEXT_GROUP_23"/>
-          <p:cNvSpPr txBox="1"/>
-          <p:nvPr/>
-        </p:nvSpPr>
-        <p:spPr>
-          <a:xfrm>
-            <a:off x="1169087" y="2965179"/>
-            <a:ext cx="11455166" cy="929924"/>
-          </a:xfrm>
-          <a:prstGeom prst="rect">
-            <a:avLst/>
-          </a:prstGeom>
-          <a:noFill/>
-          <a:ln>
-            <a:noFill/>
-          </a:ln>
-        </p:spPr>
-        <p:txBody>
-          <a:bodyPr wrap="square" anchor="t" lIns="0" rIns="0" tIns="0" bIns="0">
-            <a:noAutofit/>
-          </a:bodyPr>
-          <a:lstStyle/>
-          <a:p>
-            <a:pPr algn="l" marL="449884" indent="-449884">
+              <a:t> define a shared role assignment or enforce dependencies between them.</a:t>
+            </a:r>
+          </a:p>
+        </p:txBody>
+      </p:sp>
+      <p:sp>
+        <p:nvSpPr>
+          <p:cNvPr id="8" name="PDF_TEXT_GROUP_25"/>
+          <p:cNvSpPr txBox="1"/>
+          <p:nvPr/>
+        </p:nvSpPr>
+        <p:spPr>
+          <a:xfrm>
+            <a:off x="1143656" y="5994598"/>
+            <a:ext cx="11868487" cy="929891"/>
+          </a:xfrm>
+          <a:prstGeom prst="rect">
+            <a:avLst/>
+          </a:prstGeom>
+          <a:noFill/>
+          <a:ln>
+            <a:noFill/>
+          </a:ln>
+        </p:spPr>
+        <p:txBody>
+          <a:bodyPr wrap="square" anchor="t" lIns="0" rIns="0" tIns="0" bIns="0">
+            <a:noAutofit/>
+          </a:bodyPr>
+          <a:lstStyle/>
+          <a:p>
+            <a:pPr algn="l">
               <a:lnSpc>
                 <a:spcPct val="100000"/>
               </a:lnSpc>
@@ -22799,20 +22926,11 @@
             <a:r>
               <a:rPr sz="2710" b="0" i="0">
                 <a:solidFill>
-                  <a:srgbClr val="3333B2"/>
-                </a:solidFill>
-                <a:latin typeface="Latin Modern Sans"/>
-              </a:rPr>
-              <a:t>2.</a:t>
-            </a:r>
-            <a:r>
-              <a:rPr sz="2710" b="1" i="0">
-                <a:solidFill>
-                  <a:srgbClr val="000000"/>
-                </a:solidFill>
-                <a:latin typeface="Latin Modern Sans"/>
-              </a:rPr>
-              <a:t> Authorize before execution:</a:t>
+                  <a:srgbClr val="000000"/>
+                </a:solidFill>
+                <a:latin typeface="Latin Modern Sans"/>
+              </a:rPr>
+              <a:t>Evaluate the invocation foundation; develop and validate the collaboration</a:t>
             </a:r>
             <a:r>
               <a:rPr sz="2710" b="0" i="0">
@@ -22821,155 +22939,14 @@
                 </a:solidFill>
                 <a:latin typeface="Latin Modern Sans"/>
               </a:rPr>
-              <a:t> exposing a service does not grant everyone</a:t>
-            </a:r>
-            <a:r>
-              <a:rPr sz="2710" b="0" i="0">
-                <a:solidFill>
-                  <a:srgbClr val="000000"/>
-                </a:solidFill>
-                <a:latin typeface="Latin Modern Sans"/>
-              </a:rPr>
-              <a:t> permission to use it.</a:t>
-            </a:r>
-          </a:p>
-        </p:txBody>
-      </p:sp>
-      <p:sp>
-        <p:nvSpPr>
-          <p:cNvPr id="6" name="PDF_TEXT_GROUP_24"/>
-          <p:cNvSpPr txBox="1"/>
-          <p:nvPr/>
-        </p:nvSpPr>
-        <p:spPr>
-          <a:xfrm>
-            <a:off x="1169087" y="3937478"/>
-            <a:ext cx="12571134" cy="929891"/>
-          </a:xfrm>
-          <a:prstGeom prst="rect">
-            <a:avLst/>
-          </a:prstGeom>
-          <a:noFill/>
-          <a:ln>
-            <a:noFill/>
-          </a:ln>
-        </p:spPr>
-        <p:txBody>
-          <a:bodyPr wrap="square" anchor="t" lIns="0" rIns="0" tIns="0" bIns="0">
-            <a:noAutofit/>
-          </a:bodyPr>
-          <a:lstStyle/>
-          <a:p>
-            <a:pPr algn="l" marL="449884" indent="-449884">
-              <a:lnSpc>
-                <a:spcPct val="100000"/>
-              </a:lnSpc>
-              <a:spcBef>
-                <a:spcPts val="0"/>
-              </a:spcBef>
-              <a:spcAft>
-                <a:spcPts val="0"/>
-              </a:spcAft>
-            </a:pPr>
-            <a:r>
-              <a:rPr sz="2710" b="0" i="0">
-                <a:solidFill>
-                  <a:srgbClr val="3333B2"/>
-                </a:solidFill>
-                <a:latin typeface="Latin Modern Sans"/>
-              </a:rPr>
-              <a:t>3.</a:t>
-            </a:r>
-            <a:r>
-              <a:rPr sz="2710" b="1" i="0">
-                <a:solidFill>
-                  <a:srgbClr val="000000"/>
-                </a:solidFill>
-                <a:latin typeface="Latin Modern Sans"/>
-              </a:rPr>
-              <a:t> Check task inputs:</a:t>
-            </a:r>
-            <a:r>
-              <a:rPr sz="2710" b="0" i="0">
-                <a:solidFill>
-                  <a:srgbClr val="000000"/>
-                </a:solidFill>
-                <a:latin typeface="Latin Modern Sans"/>
-              </a:rPr>
-              <a:t> a valid image signature does not show that its producer was</a:t>
-            </a:r>
-            <a:r>
-              <a:rPr sz="2710" b="0" i="0">
-                <a:solidFill>
-                  <a:srgbClr val="000000"/>
-                </a:solidFill>
-                <a:latin typeface="Latin Modern Sans"/>
-              </a:rPr>
-              <a:t> assigned to this task’s dependency.</a:t>
-            </a:r>
-          </a:p>
-        </p:txBody>
-      </p:sp>
-      <p:sp>
-        <p:nvSpPr>
-          <p:cNvPr id="7" name="PDF_TEXT_GROUP_25"/>
-          <p:cNvSpPr txBox="1"/>
-          <p:nvPr/>
-        </p:nvSpPr>
-        <p:spPr>
-          <a:xfrm>
-            <a:off x="1143656" y="5622747"/>
-            <a:ext cx="10968177" cy="929891"/>
-          </a:xfrm>
-          <a:prstGeom prst="rect">
-            <a:avLst/>
-          </a:prstGeom>
-          <a:noFill/>
-          <a:ln>
-            <a:noFill/>
-          </a:ln>
-        </p:spPr>
-        <p:txBody>
-          <a:bodyPr wrap="square" anchor="t" lIns="0" rIns="0" tIns="0" bIns="0">
-            <a:noAutofit/>
-          </a:bodyPr>
-          <a:lstStyle/>
-          <a:p>
-            <a:pPr algn="l">
-              <a:lnSpc>
-                <a:spcPct val="100000"/>
-              </a:lnSpc>
-              <a:spcBef>
-                <a:spcPts val="0"/>
-              </a:spcBef>
-              <a:spcAft>
-                <a:spcPts val="0"/>
-              </a:spcAft>
-            </a:pPr>
-            <a:r>
-              <a:rPr sz="2710" b="0" i="0">
-                <a:solidFill>
-                  <a:srgbClr val="000000"/>
-                </a:solidFill>
-                <a:latin typeface="Latin Modern Sans"/>
-              </a:rPr>
-              <a:t>The research connects participation decisions to authorized execution and</a:t>
-            </a:r>
-            <a:r>
-              <a:rPr sz="2710" b="0" i="0">
-                <a:solidFill>
-                  <a:srgbClr val="000000"/>
-                </a:solidFill>
-                <a:latin typeface="Latin Modern Sans"/>
-              </a:rPr>
-              <a:t> task-specific input checks, then measures the cost.</a:t>
-            </a:r>
-          </a:p>
-        </p:txBody>
-      </p:sp>
-      <p:sp>
-        <p:nvSpPr>
-          <p:cNvPr id="8" name="PDF_TEXT_GROUP_26"/>
+              <a:t> extension. Existing invocation results do not establish collaboration correctness.</a:t>
+            </a:r>
+          </a:p>
+        </p:txBody>
+      </p:sp>
+      <p:sp>
+        <p:nvSpPr>
+          <p:cNvPr id="9" name="PDF_TEXT_GROUP_26"/>
           <p:cNvSpPr txBox="1"/>
           <p:nvPr/>
         </p:nvSpPr>
@@ -23017,7 +22994,7 @@
       </p:sp>
       <p:sp>
         <p:nvSpPr>
-          <p:cNvPr id="9" name="PDF_TEXT_GROUP_27"/>
+          <p:cNvPr id="10" name="PDF_TEXT_GROUP_27"/>
           <p:cNvSpPr txBox="1"/>
           <p:nvPr/>
         </p:nvSpPr>
@@ -23065,7 +23042,7 @@
       </p:sp>
       <p:sp>
         <p:nvSpPr>
-          <p:cNvPr id="10" name="PDF_TEXT_GROUP_28"/>
+          <p:cNvPr id="11" name="PDF_TEXT_GROUP_28"/>
           <p:cNvSpPr txBox="1"/>
           <p:nvPr/>
         </p:nvSpPr>
@@ -23113,7 +23090,7 @@
       </p:sp>
       <p:sp>
         <p:nvSpPr>
-          <p:cNvPr id="11" name="PDF_TEXT_GROUP_29"/>
+          <p:cNvPr id="12" name="PDF_TEXT_GROUP_29"/>
           <p:cNvSpPr txBox="1"/>
           <p:nvPr/>
         </p:nvSpPr>
@@ -23161,7 +23138,7 @@
       </p:sp>
       <p:sp>
         <p:nvSpPr>
-          <p:cNvPr id="12" name="PDF_TEXT_GROUP_30"/>
+          <p:cNvPr id="13" name="PDF_TEXT_GROUP_30"/>
           <p:cNvSpPr txBox="1"/>
           <p:nvPr/>
         </p:nvSpPr>
@@ -23251,7 +23228,7 @@
       </p:pic>
       <p:sp>
         <p:nvSpPr>
-          <p:cNvPr id="3" name="PDF_TEXT_GROUP_385"/>
+          <p:cNvPr id="3" name="PDF_TEXT_GROUP_386"/>
           <p:cNvSpPr txBox="1"/>
           <p:nvPr/>
         </p:nvSpPr>
@@ -23299,7 +23276,7 @@
       </p:sp>
       <p:sp>
         <p:nvSpPr>
-          <p:cNvPr id="4" name="PDF_TEXT_GROUP_386"/>
+          <p:cNvPr id="4" name="PDF_TEXT_GROUP_387"/>
           <p:cNvSpPr txBox="1"/>
           <p:nvPr/>
         </p:nvSpPr>
@@ -23347,7 +23324,7 @@
       </p:sp>
       <p:sp>
         <p:nvSpPr>
-          <p:cNvPr id="5" name="PDF_TEXT_GROUP_387"/>
+          <p:cNvPr id="5" name="PDF_TEXT_GROUP_388"/>
           <p:cNvSpPr txBox="1"/>
           <p:nvPr/>
         </p:nvSpPr>
@@ -23395,7 +23372,7 @@
       </p:sp>
       <p:sp>
         <p:nvSpPr>
-          <p:cNvPr id="6" name="PDF_TEXT_GROUP_388"/>
+          <p:cNvPr id="6" name="PDF_TEXT_GROUP_389"/>
           <p:cNvSpPr txBox="1"/>
           <p:nvPr/>
         </p:nvSpPr>
@@ -23443,7 +23420,7 @@
       </p:sp>
       <p:sp>
         <p:nvSpPr>
-          <p:cNvPr id="7" name="PDF_TEXT_GROUP_389"/>
+          <p:cNvPr id="7" name="PDF_TEXT_GROUP_390"/>
           <p:cNvSpPr txBox="1"/>
           <p:nvPr/>
         </p:nvSpPr>
@@ -23491,7 +23468,7 @@
       </p:sp>
       <p:sp>
         <p:nvSpPr>
-          <p:cNvPr id="8" name="PDF_TEXT_GROUP_390"/>
+          <p:cNvPr id="8" name="PDF_TEXT_GROUP_391"/>
           <p:cNvSpPr txBox="1"/>
           <p:nvPr/>
         </p:nvSpPr>
@@ -23539,7 +23516,7 @@
       </p:sp>
       <p:sp>
         <p:nvSpPr>
-          <p:cNvPr id="9" name="PDF_TEXT_GROUP_391"/>
+          <p:cNvPr id="9" name="PDF_TEXT_GROUP_392"/>
           <p:cNvSpPr txBox="1"/>
           <p:nvPr/>
         </p:nvSpPr>
@@ -23587,7 +23564,7 @@
       </p:sp>
       <p:sp>
         <p:nvSpPr>
-          <p:cNvPr id="10" name="PDF_TEXT_GROUP_392"/>
+          <p:cNvPr id="10" name="PDF_TEXT_GROUP_393"/>
           <p:cNvSpPr txBox="1"/>
           <p:nvPr/>
         </p:nvSpPr>
@@ -23635,7 +23612,7 @@
       </p:sp>
       <p:sp>
         <p:nvSpPr>
-          <p:cNvPr id="11" name="PDF_TEXT_GROUP_393"/>
+          <p:cNvPr id="11" name="PDF_TEXT_GROUP_394"/>
           <p:cNvSpPr txBox="1"/>
           <p:nvPr/>
         </p:nvSpPr>
@@ -23683,7 +23660,7 @@
       </p:sp>
       <p:sp>
         <p:nvSpPr>
-          <p:cNvPr id="12" name="PDF_TEXT_GROUP_394"/>
+          <p:cNvPr id="12" name="PDF_TEXT_GROUP_395"/>
           <p:cNvSpPr txBox="1"/>
           <p:nvPr/>
         </p:nvSpPr>
@@ -23731,7 +23708,7 @@
       </p:sp>
       <p:sp>
         <p:nvSpPr>
-          <p:cNvPr id="13" name="PDF_TEXT_GROUP_395"/>
+          <p:cNvPr id="13" name="PDF_TEXT_GROUP_396"/>
           <p:cNvSpPr txBox="1"/>
           <p:nvPr/>
         </p:nvSpPr>
@@ -23779,7 +23756,7 @@
       </p:sp>
       <p:sp>
         <p:nvSpPr>
-          <p:cNvPr id="14" name="PDF_TEXT_GROUP_396"/>
+          <p:cNvPr id="14" name="PDF_TEXT_GROUP_397"/>
           <p:cNvSpPr txBox="1"/>
           <p:nvPr/>
         </p:nvSpPr>
@@ -23827,7 +23804,7 @@
       </p:sp>
       <p:sp>
         <p:nvSpPr>
-          <p:cNvPr id="15" name="PDF_TEXT_GROUP_397"/>
+          <p:cNvPr id="15" name="PDF_TEXT_GROUP_398"/>
           <p:cNvSpPr txBox="1"/>
           <p:nvPr/>
         </p:nvSpPr>
@@ -23875,7 +23852,7 @@
       </p:sp>
       <p:sp>
         <p:nvSpPr>
-          <p:cNvPr id="16" name="PDF_TEXT_GROUP_398"/>
+          <p:cNvPr id="16" name="PDF_TEXT_GROUP_399"/>
           <p:cNvSpPr txBox="1"/>
           <p:nvPr/>
         </p:nvSpPr>
@@ -23932,7 +23909,7 @@
       </p:sp>
       <p:sp>
         <p:nvSpPr>
-          <p:cNvPr id="17" name="PDF_TEXT_GROUP_399"/>
+          <p:cNvPr id="17" name="PDF_TEXT_GROUP_400"/>
           <p:cNvSpPr txBox="1"/>
           <p:nvPr/>
         </p:nvSpPr>
@@ -23980,7 +23957,7 @@
       </p:sp>
       <p:sp>
         <p:nvSpPr>
-          <p:cNvPr id="18" name="PDF_TEXT_GROUP_400"/>
+          <p:cNvPr id="18" name="PDF_TEXT_GROUP_401"/>
           <p:cNvSpPr txBox="1"/>
           <p:nvPr/>
         </p:nvSpPr>
@@ -24028,7 +24005,7 @@
       </p:sp>
       <p:sp>
         <p:nvSpPr>
-          <p:cNvPr id="19" name="PDF_TEXT_GROUP_401"/>
+          <p:cNvPr id="19" name="PDF_TEXT_GROUP_402"/>
           <p:cNvSpPr txBox="1"/>
           <p:nvPr/>
         </p:nvSpPr>
@@ -24076,7 +24053,7 @@
       </p:sp>
       <p:sp>
         <p:nvSpPr>
-          <p:cNvPr id="20" name="PDF_TEXT_GROUP_402"/>
+          <p:cNvPr id="20" name="PDF_TEXT_GROUP_403"/>
           <p:cNvSpPr txBox="1"/>
           <p:nvPr/>
         </p:nvSpPr>
@@ -24124,7 +24101,7 @@
       </p:sp>
       <p:sp>
         <p:nvSpPr>
-          <p:cNvPr id="21" name="PDF_TEXT_GROUP_403"/>
+          <p:cNvPr id="21" name="PDF_TEXT_GROUP_404"/>
           <p:cNvSpPr txBox="1"/>
           <p:nvPr/>
         </p:nvSpPr>
@@ -24214,7 +24191,7 @@
       </p:pic>
       <p:sp>
         <p:nvSpPr>
-          <p:cNvPr id="3" name="PDF_TEXT_GROUP_404"/>
+          <p:cNvPr id="3" name="PDF_TEXT_GROUP_405"/>
           <p:cNvSpPr txBox="1"/>
           <p:nvPr/>
         </p:nvSpPr>
@@ -24262,7 +24239,7 @@
       </p:sp>
       <p:sp>
         <p:nvSpPr>
-          <p:cNvPr id="4" name="PDF_TEXT_GROUP_405"/>
+          <p:cNvPr id="4" name="PDF_TEXT_GROUP_406"/>
           <p:cNvSpPr txBox="1"/>
           <p:nvPr/>
         </p:nvSpPr>
@@ -24310,7 +24287,7 @@
       </p:sp>
       <p:sp>
         <p:nvSpPr>
-          <p:cNvPr id="5" name="PDF_TEXT_GROUP_406"/>
+          <p:cNvPr id="5" name="PDF_TEXT_GROUP_407"/>
           <p:cNvSpPr txBox="1"/>
           <p:nvPr/>
         </p:nvSpPr>
@@ -24358,7 +24335,7 @@
       </p:sp>
       <p:sp>
         <p:nvSpPr>
-          <p:cNvPr id="6" name="PDF_TEXT_GROUP_407"/>
+          <p:cNvPr id="6" name="PDF_TEXT_GROUP_408"/>
           <p:cNvSpPr txBox="1"/>
           <p:nvPr/>
         </p:nvSpPr>
@@ -24406,7 +24383,7 @@
       </p:sp>
       <p:sp>
         <p:nvSpPr>
-          <p:cNvPr id="7" name="PDF_TEXT_GROUP_408"/>
+          <p:cNvPr id="7" name="PDF_TEXT_GROUP_409"/>
           <p:cNvSpPr txBox="1"/>
           <p:nvPr/>
         </p:nvSpPr>
@@ -24454,7 +24431,7 @@
       </p:sp>
       <p:sp>
         <p:nvSpPr>
-          <p:cNvPr id="8" name="PDF_TEXT_GROUP_409"/>
+          <p:cNvPr id="8" name="PDF_TEXT_GROUP_410"/>
           <p:cNvSpPr txBox="1"/>
           <p:nvPr/>
         </p:nvSpPr>
@@ -24502,7 +24479,7 @@
       </p:sp>
       <p:sp>
         <p:nvSpPr>
-          <p:cNvPr id="9" name="PDF_TEXT_GROUP_410"/>
+          <p:cNvPr id="9" name="PDF_TEXT_GROUP_411"/>
           <p:cNvSpPr txBox="1"/>
           <p:nvPr/>
         </p:nvSpPr>
@@ -24550,7 +24527,7 @@
       </p:sp>
       <p:sp>
         <p:nvSpPr>
-          <p:cNvPr id="10" name="PDF_TEXT_GROUP_411"/>
+          <p:cNvPr id="10" name="PDF_TEXT_GROUP_412"/>
           <p:cNvSpPr txBox="1"/>
           <p:nvPr/>
         </p:nvSpPr>
@@ -24598,7 +24575,7 @@
       </p:sp>
       <p:sp>
         <p:nvSpPr>
-          <p:cNvPr id="11" name="PDF_TEXT_GROUP_412"/>
+          <p:cNvPr id="11" name="PDF_TEXT_GROUP_413"/>
           <p:cNvSpPr txBox="1"/>
           <p:nvPr/>
         </p:nvSpPr>
@@ -24646,7 +24623,7 @@
       </p:sp>
       <p:sp>
         <p:nvSpPr>
-          <p:cNvPr id="12" name="PDF_TEXT_GROUP_413"/>
+          <p:cNvPr id="12" name="PDF_TEXT_GROUP_414"/>
           <p:cNvSpPr txBox="1"/>
           <p:nvPr/>
         </p:nvSpPr>
@@ -24694,7 +24671,7 @@
       </p:sp>
       <p:sp>
         <p:nvSpPr>
-          <p:cNvPr id="13" name="PDF_TEXT_GROUP_414"/>
+          <p:cNvPr id="13" name="PDF_TEXT_GROUP_415"/>
           <p:cNvSpPr txBox="1"/>
           <p:nvPr/>
         </p:nvSpPr>
@@ -24742,7 +24719,7 @@
       </p:sp>
       <p:sp>
         <p:nvSpPr>
-          <p:cNvPr id="14" name="PDF_TEXT_GROUP_415"/>
+          <p:cNvPr id="14" name="PDF_TEXT_GROUP_416"/>
           <p:cNvSpPr txBox="1"/>
           <p:nvPr/>
         </p:nvSpPr>
@@ -24799,7 +24776,7 @@
       </p:sp>
       <p:sp>
         <p:nvSpPr>
-          <p:cNvPr id="15" name="PDF_TEXT_GROUP_416"/>
+          <p:cNvPr id="15" name="PDF_TEXT_GROUP_417"/>
           <p:cNvSpPr txBox="1"/>
           <p:nvPr/>
         </p:nvSpPr>
@@ -24847,7 +24824,7 @@
       </p:sp>
       <p:sp>
         <p:nvSpPr>
-          <p:cNvPr id="16" name="PDF_TEXT_GROUP_417"/>
+          <p:cNvPr id="16" name="PDF_TEXT_GROUP_418"/>
           <p:cNvSpPr txBox="1"/>
           <p:nvPr/>
         </p:nvSpPr>
@@ -24895,7 +24872,7 @@
       </p:sp>
       <p:sp>
         <p:nvSpPr>
-          <p:cNvPr id="17" name="PDF_TEXT_GROUP_418"/>
+          <p:cNvPr id="17" name="PDF_TEXT_GROUP_419"/>
           <p:cNvSpPr txBox="1"/>
           <p:nvPr/>
         </p:nvSpPr>
@@ -24943,7 +24920,7 @@
       </p:sp>
       <p:sp>
         <p:nvSpPr>
-          <p:cNvPr id="18" name="PDF_TEXT_GROUP_419"/>
+          <p:cNvPr id="18" name="PDF_TEXT_GROUP_420"/>
           <p:cNvSpPr txBox="1"/>
           <p:nvPr/>
         </p:nvSpPr>
@@ -24991,7 +24968,7 @@
       </p:sp>
       <p:sp>
         <p:nvSpPr>
-          <p:cNvPr id="19" name="PDF_TEXT_GROUP_420"/>
+          <p:cNvPr id="19" name="PDF_TEXT_GROUP_421"/>
           <p:cNvSpPr txBox="1"/>
           <p:nvPr/>
         </p:nvSpPr>
@@ -25039,7 +25016,7 @@
       </p:sp>
       <p:sp>
         <p:nvSpPr>
-          <p:cNvPr id="20" name="PDF_TEXT_GROUP_421"/>
+          <p:cNvPr id="20" name="PDF_TEXT_GROUP_422"/>
           <p:cNvSpPr txBox="1"/>
           <p:nvPr/>
         </p:nvSpPr>
@@ -25087,7 +25064,7 @@
       </p:sp>
       <p:sp>
         <p:nvSpPr>
-          <p:cNvPr id="21" name="PDF_TEXT_GROUP_422"/>
+          <p:cNvPr id="21" name="PDF_TEXT_GROUP_423"/>
           <p:cNvSpPr txBox="1"/>
           <p:nvPr/>
         </p:nvSpPr>
@@ -25177,7 +25154,7 @@
       </p:pic>
       <p:sp>
         <p:nvSpPr>
-          <p:cNvPr id="3" name="PDF_TEXT_GROUP_423"/>
+          <p:cNvPr id="3" name="PDF_TEXT_GROUP_424"/>
           <p:cNvSpPr txBox="1"/>
           <p:nvPr/>
         </p:nvSpPr>
@@ -25225,7 +25202,7 @@
       </p:sp>
       <p:sp>
         <p:nvSpPr>
-          <p:cNvPr id="4" name="PDF_TEXT_GROUP_424"/>
+          <p:cNvPr id="4" name="PDF_TEXT_GROUP_425"/>
           <p:cNvSpPr txBox="1"/>
           <p:nvPr/>
         </p:nvSpPr>
@@ -25273,7 +25250,7 @@
       </p:sp>
       <p:sp>
         <p:nvSpPr>
-          <p:cNvPr id="5" name="PDF_TEXT_GROUP_425"/>
+          <p:cNvPr id="5" name="PDF_TEXT_GROUP_426"/>
           <p:cNvSpPr txBox="1"/>
           <p:nvPr/>
         </p:nvSpPr>
@@ -25321,7 +25298,7 @@
       </p:sp>
       <p:sp>
         <p:nvSpPr>
-          <p:cNvPr id="6" name="PDF_TEXT_GROUP_426"/>
+          <p:cNvPr id="6" name="PDF_TEXT_GROUP_427"/>
           <p:cNvSpPr txBox="1"/>
           <p:nvPr/>
         </p:nvSpPr>
@@ -25369,7 +25346,7 @@
       </p:sp>
       <p:sp>
         <p:nvSpPr>
-          <p:cNvPr id="7" name="PDF_TEXT_GROUP_427"/>
+          <p:cNvPr id="7" name="PDF_TEXT_GROUP_428"/>
           <p:cNvSpPr txBox="1"/>
           <p:nvPr/>
         </p:nvSpPr>
@@ -25417,7 +25394,7 @@
       </p:sp>
       <p:sp>
         <p:nvSpPr>
-          <p:cNvPr id="8" name="PDF_TEXT_GROUP_428"/>
+          <p:cNvPr id="8" name="PDF_TEXT_GROUP_429"/>
           <p:cNvSpPr txBox="1"/>
           <p:nvPr/>
         </p:nvSpPr>
@@ -25465,7 +25442,7 @@
       </p:sp>
       <p:sp>
         <p:nvSpPr>
-          <p:cNvPr id="9" name="PDF_TEXT_GROUP_429"/>
+          <p:cNvPr id="9" name="PDF_TEXT_GROUP_430"/>
           <p:cNvSpPr txBox="1"/>
           <p:nvPr/>
         </p:nvSpPr>
@@ -25513,7 +25490,7 @@
       </p:sp>
       <p:sp>
         <p:nvSpPr>
-          <p:cNvPr id="10" name="PDF_TEXT_GROUP_430"/>
+          <p:cNvPr id="10" name="PDF_TEXT_GROUP_431"/>
           <p:cNvSpPr txBox="1"/>
           <p:nvPr/>
         </p:nvSpPr>
@@ -25570,7 +25547,7 @@
       </p:sp>
       <p:sp>
         <p:nvSpPr>
-          <p:cNvPr id="11" name="PDF_TEXT_GROUP_431"/>
+          <p:cNvPr id="11" name="PDF_TEXT_GROUP_432"/>
           <p:cNvSpPr txBox="1"/>
           <p:nvPr/>
         </p:nvSpPr>
@@ -25627,7 +25604,7 @@
       </p:sp>
       <p:sp>
         <p:nvSpPr>
-          <p:cNvPr id="12" name="PDF_TEXT_GROUP_432"/>
+          <p:cNvPr id="12" name="PDF_TEXT_GROUP_433"/>
           <p:cNvSpPr txBox="1"/>
           <p:nvPr/>
         </p:nvSpPr>
@@ -25675,7 +25652,7 @@
       </p:sp>
       <p:sp>
         <p:nvSpPr>
-          <p:cNvPr id="13" name="PDF_TEXT_GROUP_433"/>
+          <p:cNvPr id="13" name="PDF_TEXT_GROUP_434"/>
           <p:cNvSpPr txBox="1"/>
           <p:nvPr/>
         </p:nvSpPr>
@@ -25723,7 +25700,7 @@
       </p:sp>
       <p:sp>
         <p:nvSpPr>
-          <p:cNvPr id="14" name="PDF_TEXT_GROUP_434"/>
+          <p:cNvPr id="14" name="PDF_TEXT_GROUP_435"/>
           <p:cNvSpPr txBox="1"/>
           <p:nvPr/>
         </p:nvSpPr>
@@ -25771,7 +25748,7 @@
       </p:sp>
       <p:sp>
         <p:nvSpPr>
-          <p:cNvPr id="15" name="PDF_TEXT_GROUP_435"/>
+          <p:cNvPr id="15" name="PDF_TEXT_GROUP_436"/>
           <p:cNvSpPr txBox="1"/>
           <p:nvPr/>
         </p:nvSpPr>
@@ -25828,7 +25805,7 @@
       </p:sp>
       <p:sp>
         <p:nvSpPr>
-          <p:cNvPr id="16" name="PDF_TEXT_GROUP_436"/>
+          <p:cNvPr id="16" name="PDF_TEXT_GROUP_437"/>
           <p:cNvSpPr txBox="1"/>
           <p:nvPr/>
         </p:nvSpPr>
@@ -25876,7 +25853,7 @@
       </p:sp>
       <p:sp>
         <p:nvSpPr>
-          <p:cNvPr id="17" name="PDF_TEXT_GROUP_437"/>
+          <p:cNvPr id="17" name="PDF_TEXT_GROUP_438"/>
           <p:cNvSpPr txBox="1"/>
           <p:nvPr/>
         </p:nvSpPr>
@@ -25924,7 +25901,7 @@
       </p:sp>
       <p:sp>
         <p:nvSpPr>
-          <p:cNvPr id="18" name="PDF_TEXT_GROUP_438"/>
+          <p:cNvPr id="18" name="PDF_TEXT_GROUP_439"/>
           <p:cNvSpPr txBox="1"/>
           <p:nvPr/>
         </p:nvSpPr>
@@ -25972,7 +25949,7 @@
       </p:sp>
       <p:sp>
         <p:nvSpPr>
-          <p:cNvPr id="19" name="PDF_TEXT_GROUP_439"/>
+          <p:cNvPr id="19" name="PDF_TEXT_GROUP_440"/>
           <p:cNvSpPr txBox="1"/>
           <p:nvPr/>
         </p:nvSpPr>
@@ -26020,7 +25997,7 @@
       </p:sp>
       <p:sp>
         <p:nvSpPr>
-          <p:cNvPr id="20" name="PDF_TEXT_GROUP_440"/>
+          <p:cNvPr id="20" name="PDF_TEXT_GROUP_441"/>
           <p:cNvSpPr txBox="1"/>
           <p:nvPr/>
         </p:nvSpPr>
@@ -26077,7 +26054,7 @@
       </p:sp>
       <p:sp>
         <p:nvSpPr>
-          <p:cNvPr id="21" name="PDF_TEXT_GROUP_441"/>
+          <p:cNvPr id="21" name="PDF_TEXT_GROUP_442"/>
           <p:cNvSpPr txBox="1"/>
           <p:nvPr/>
         </p:nvSpPr>
@@ -26134,7 +26111,7 @@
       </p:sp>
       <p:sp>
         <p:nvSpPr>
-          <p:cNvPr id="22" name="PDF_TEXT_GROUP_442"/>
+          <p:cNvPr id="22" name="PDF_TEXT_GROUP_443"/>
           <p:cNvSpPr txBox="1"/>
           <p:nvPr/>
         </p:nvSpPr>
@@ -26182,7 +26159,7 @@
       </p:sp>
       <p:sp>
         <p:nvSpPr>
-          <p:cNvPr id="23" name="PDF_TEXT_GROUP_443"/>
+          <p:cNvPr id="23" name="PDF_TEXT_GROUP_444"/>
           <p:cNvSpPr txBox="1"/>
           <p:nvPr/>
         </p:nvSpPr>
@@ -26230,7 +26207,7 @@
       </p:sp>
       <p:sp>
         <p:nvSpPr>
-          <p:cNvPr id="24" name="PDF_TEXT_GROUP_444"/>
+          <p:cNvPr id="24" name="PDF_TEXT_GROUP_445"/>
           <p:cNvSpPr txBox="1"/>
           <p:nvPr/>
         </p:nvSpPr>
@@ -26278,7 +26255,7 @@
       </p:sp>
       <p:sp>
         <p:nvSpPr>
-          <p:cNvPr id="25" name="PDF_TEXT_GROUP_445"/>
+          <p:cNvPr id="25" name="PDF_TEXT_GROUP_446"/>
           <p:cNvSpPr txBox="1"/>
           <p:nvPr/>
         </p:nvSpPr>
@@ -26326,7 +26303,7 @@
       </p:sp>
       <p:sp>
         <p:nvSpPr>
-          <p:cNvPr id="26" name="PDF_TEXT_GROUP_446"/>
+          <p:cNvPr id="26" name="PDF_TEXT_GROUP_447"/>
           <p:cNvSpPr txBox="1"/>
           <p:nvPr/>
         </p:nvSpPr>
@@ -26374,7 +26351,7 @@
       </p:sp>
       <p:sp>
         <p:nvSpPr>
-          <p:cNvPr id="27" name="PDF_TEXT_GROUP_447"/>
+          <p:cNvPr id="27" name="PDF_TEXT_GROUP_448"/>
           <p:cNvSpPr txBox="1"/>
           <p:nvPr/>
         </p:nvSpPr>
@@ -26464,7 +26441,7 @@
       </p:pic>
       <p:sp>
         <p:nvSpPr>
-          <p:cNvPr id="3" name="PDF_TEXT_GROUP_448"/>
+          <p:cNvPr id="3" name="PDF_TEXT_GROUP_449"/>
           <p:cNvSpPr txBox="1"/>
           <p:nvPr/>
         </p:nvSpPr>
@@ -26512,7 +26489,7 @@
       </p:sp>
       <p:sp>
         <p:nvSpPr>
-          <p:cNvPr id="4" name="PDF_TEXT_GROUP_449"/>
+          <p:cNvPr id="4" name="PDF_TEXT_GROUP_450"/>
           <p:cNvSpPr txBox="1"/>
           <p:nvPr/>
         </p:nvSpPr>
@@ -26560,7 +26537,7 @@
       </p:sp>
       <p:sp>
         <p:nvSpPr>
-          <p:cNvPr id="5" name="PDF_TEXT_GROUP_450"/>
+          <p:cNvPr id="5" name="PDF_TEXT_GROUP_451"/>
           <p:cNvSpPr txBox="1"/>
           <p:nvPr/>
         </p:nvSpPr>
@@ -26608,7 +26585,7 @@
       </p:sp>
       <p:sp>
         <p:nvSpPr>
-          <p:cNvPr id="6" name="PDF_TEXT_GROUP_451"/>
+          <p:cNvPr id="6" name="PDF_TEXT_GROUP_452"/>
           <p:cNvSpPr txBox="1"/>
           <p:nvPr/>
         </p:nvSpPr>
@@ -26656,7 +26633,7 @@
       </p:sp>
       <p:sp>
         <p:nvSpPr>
-          <p:cNvPr id="7" name="PDF_TEXT_GROUP_452"/>
+          <p:cNvPr id="7" name="PDF_TEXT_GROUP_453"/>
           <p:cNvSpPr txBox="1"/>
           <p:nvPr/>
         </p:nvSpPr>
@@ -26713,7 +26690,7 @@
       </p:sp>
       <p:sp>
         <p:nvSpPr>
-          <p:cNvPr id="8" name="PDF_TEXT_GROUP_453"/>
+          <p:cNvPr id="8" name="PDF_TEXT_GROUP_454"/>
           <p:cNvSpPr txBox="1"/>
           <p:nvPr/>
         </p:nvSpPr>
@@ -26770,7 +26747,7 @@
       </p:sp>
       <p:sp>
         <p:nvSpPr>
-          <p:cNvPr id="9" name="PDF_TEXT_GROUP_454"/>
+          <p:cNvPr id="9" name="PDF_TEXT_GROUP_455"/>
           <p:cNvSpPr txBox="1"/>
           <p:nvPr/>
         </p:nvSpPr>
@@ -26827,7 +26804,7 @@
       </p:sp>
       <p:sp>
         <p:nvSpPr>
-          <p:cNvPr id="10" name="PDF_TEXT_GROUP_455"/>
+          <p:cNvPr id="10" name="PDF_TEXT_GROUP_456"/>
           <p:cNvSpPr txBox="1"/>
           <p:nvPr/>
         </p:nvSpPr>
@@ -26875,7 +26852,7 @@
       </p:sp>
       <p:sp>
         <p:nvSpPr>
-          <p:cNvPr id="11" name="PDF_TEXT_GROUP_456"/>
+          <p:cNvPr id="11" name="PDF_TEXT_GROUP_457"/>
           <p:cNvSpPr txBox="1"/>
           <p:nvPr/>
         </p:nvSpPr>
@@ -26923,7 +26900,7 @@
       </p:sp>
       <p:sp>
         <p:nvSpPr>
-          <p:cNvPr id="12" name="PDF_TEXT_GROUP_457"/>
+          <p:cNvPr id="12" name="PDF_TEXT_GROUP_458"/>
           <p:cNvSpPr txBox="1"/>
           <p:nvPr/>
         </p:nvSpPr>
@@ -26971,7 +26948,7 @@
       </p:sp>
       <p:sp>
         <p:nvSpPr>
-          <p:cNvPr id="13" name="PDF_TEXT_GROUP_458"/>
+          <p:cNvPr id="13" name="PDF_TEXT_GROUP_459"/>
           <p:cNvSpPr txBox="1"/>
           <p:nvPr/>
         </p:nvSpPr>
@@ -27028,7 +27005,7 @@
       </p:sp>
       <p:sp>
         <p:nvSpPr>
-          <p:cNvPr id="14" name="PDF_TEXT_GROUP_459"/>
+          <p:cNvPr id="14" name="PDF_TEXT_GROUP_460"/>
           <p:cNvSpPr txBox="1"/>
           <p:nvPr/>
         </p:nvSpPr>
@@ -27076,7 +27053,7 @@
       </p:sp>
       <p:sp>
         <p:nvSpPr>
-          <p:cNvPr id="15" name="PDF_TEXT_GROUP_460"/>
+          <p:cNvPr id="15" name="PDF_TEXT_GROUP_461"/>
           <p:cNvSpPr txBox="1"/>
           <p:nvPr/>
         </p:nvSpPr>
@@ -27124,7 +27101,7 @@
       </p:sp>
       <p:sp>
         <p:nvSpPr>
-          <p:cNvPr id="16" name="PDF_TEXT_GROUP_461"/>
+          <p:cNvPr id="16" name="PDF_TEXT_GROUP_462"/>
           <p:cNvSpPr txBox="1"/>
           <p:nvPr/>
         </p:nvSpPr>
@@ -27181,7 +27158,7 @@
       </p:sp>
       <p:sp>
         <p:nvSpPr>
-          <p:cNvPr id="17" name="PDF_TEXT_GROUP_462"/>
+          <p:cNvPr id="17" name="PDF_TEXT_GROUP_463"/>
           <p:cNvSpPr txBox="1"/>
           <p:nvPr/>
         </p:nvSpPr>
@@ -27229,7 +27206,7 @@
       </p:sp>
       <p:sp>
         <p:nvSpPr>
-          <p:cNvPr id="18" name="PDF_TEXT_GROUP_463"/>
+          <p:cNvPr id="18" name="PDF_TEXT_GROUP_464"/>
           <p:cNvSpPr txBox="1"/>
           <p:nvPr/>
         </p:nvSpPr>
@@ -27277,7 +27254,7 @@
       </p:sp>
       <p:sp>
         <p:nvSpPr>
-          <p:cNvPr id="19" name="PDF_TEXT_GROUP_464"/>
+          <p:cNvPr id="19" name="PDF_TEXT_GROUP_465"/>
           <p:cNvSpPr txBox="1"/>
           <p:nvPr/>
         </p:nvSpPr>
@@ -27325,7 +27302,7 @@
       </p:sp>
       <p:sp>
         <p:nvSpPr>
-          <p:cNvPr id="20" name="PDF_TEXT_GROUP_465"/>
+          <p:cNvPr id="20" name="PDF_TEXT_GROUP_466"/>
           <p:cNvSpPr txBox="1"/>
           <p:nvPr/>
         </p:nvSpPr>
@@ -27373,7 +27350,7 @@
       </p:sp>
       <p:sp>
         <p:nvSpPr>
-          <p:cNvPr id="21" name="PDF_TEXT_GROUP_466"/>
+          <p:cNvPr id="21" name="PDF_TEXT_GROUP_467"/>
           <p:cNvSpPr txBox="1"/>
           <p:nvPr/>
         </p:nvSpPr>
@@ -27463,7 +27440,7 @@
       </p:pic>
       <p:sp>
         <p:nvSpPr>
-          <p:cNvPr id="3" name="PDF_TEXT_GROUP_467"/>
+          <p:cNvPr id="3" name="PDF_TEXT_GROUP_468"/>
           <p:cNvSpPr txBox="1"/>
           <p:nvPr/>
         </p:nvSpPr>
@@ -27511,7 +27488,7 @@
       </p:sp>
       <p:sp>
         <p:nvSpPr>
-          <p:cNvPr id="4" name="PDF_TEXT_GROUP_468"/>
+          <p:cNvPr id="4" name="PDF_TEXT_GROUP_469"/>
           <p:cNvSpPr txBox="1"/>
           <p:nvPr/>
         </p:nvSpPr>
@@ -27577,7 +27554,7 @@
       </p:sp>
       <p:sp>
         <p:nvSpPr>
-          <p:cNvPr id="5" name="PDF_TEXT_GROUP_469"/>
+          <p:cNvPr id="5" name="PDF_TEXT_GROUP_470"/>
           <p:cNvSpPr txBox="1"/>
           <p:nvPr/>
         </p:nvSpPr>
@@ -27643,7 +27620,7 @@
       </p:sp>
       <p:sp>
         <p:nvSpPr>
-          <p:cNvPr id="6" name="PDF_TEXT_GROUP_470"/>
+          <p:cNvPr id="6" name="PDF_TEXT_GROUP_471"/>
           <p:cNvSpPr txBox="1"/>
           <p:nvPr/>
         </p:nvSpPr>
@@ -27700,7 +27677,7 @@
       </p:sp>
       <p:sp>
         <p:nvSpPr>
-          <p:cNvPr id="7" name="PDF_TEXT_GROUP_471"/>
+          <p:cNvPr id="7" name="PDF_TEXT_GROUP_472"/>
           <p:cNvSpPr txBox="1"/>
           <p:nvPr/>
         </p:nvSpPr>
@@ -27757,7 +27734,7 @@
       </p:sp>
       <p:sp>
         <p:nvSpPr>
-          <p:cNvPr id="8" name="PDF_TEXT_GROUP_472"/>
+          <p:cNvPr id="8" name="PDF_TEXT_GROUP_473"/>
           <p:cNvSpPr txBox="1"/>
           <p:nvPr/>
         </p:nvSpPr>
@@ -27814,7 +27791,7 @@
       </p:sp>
       <p:sp>
         <p:nvSpPr>
-          <p:cNvPr id="9" name="PDF_TEXT_GROUP_473"/>
+          <p:cNvPr id="9" name="PDF_TEXT_GROUP_474"/>
           <p:cNvSpPr txBox="1"/>
           <p:nvPr/>
         </p:nvSpPr>
@@ -27862,7 +27839,7 @@
       </p:sp>
       <p:sp>
         <p:nvSpPr>
-          <p:cNvPr id="10" name="PDF_TEXT_GROUP_474"/>
+          <p:cNvPr id="10" name="PDF_TEXT_GROUP_475"/>
           <p:cNvSpPr txBox="1"/>
           <p:nvPr/>
         </p:nvSpPr>
@@ -27910,7 +27887,7 @@
       </p:sp>
       <p:sp>
         <p:nvSpPr>
-          <p:cNvPr id="11" name="PDF_TEXT_GROUP_475"/>
+          <p:cNvPr id="11" name="PDF_TEXT_GROUP_476"/>
           <p:cNvSpPr txBox="1"/>
           <p:nvPr/>
         </p:nvSpPr>
@@ -27958,7 +27935,7 @@
       </p:sp>
       <p:sp>
         <p:nvSpPr>
-          <p:cNvPr id="12" name="PDF_TEXT_GROUP_476"/>
+          <p:cNvPr id="12" name="PDF_TEXT_GROUP_477"/>
           <p:cNvSpPr txBox="1"/>
           <p:nvPr/>
         </p:nvSpPr>
@@ -28006,7 +27983,7 @@
       </p:sp>
       <p:sp>
         <p:nvSpPr>
-          <p:cNvPr id="13" name="PDF_TEXT_GROUP_477"/>
+          <p:cNvPr id="13" name="PDF_TEXT_GROUP_478"/>
           <p:cNvSpPr txBox="1"/>
           <p:nvPr/>
         </p:nvSpPr>
@@ -28054,7 +28031,7 @@
       </p:sp>
       <p:sp>
         <p:nvSpPr>
-          <p:cNvPr id="14" name="PDF_BULLET_SPAN_687"/>
+          <p:cNvPr id="14" name="PDF_BULLET_SPAN_681"/>
           <p:cNvSpPr/>
           <p:nvPr/>
         </p:nvSpPr>
@@ -28097,7 +28074,7 @@
       </p:sp>
       <p:sp>
         <p:nvSpPr>
-          <p:cNvPr id="15" name="PDF_BULLET_SPAN_691"/>
+          <p:cNvPr id="15" name="PDF_BULLET_SPAN_685"/>
           <p:cNvSpPr/>
           <p:nvPr/>
         </p:nvSpPr>
@@ -28140,7 +28117,7 @@
       </p:sp>
       <p:sp>
         <p:nvSpPr>
-          <p:cNvPr id="16" name="PDF_BULLET_SPAN_695"/>
+          <p:cNvPr id="16" name="PDF_BULLET_SPAN_689"/>
           <p:cNvSpPr/>
           <p:nvPr/>
         </p:nvSpPr>
@@ -28183,7 +28160,7 @@
       </p:sp>
       <p:sp>
         <p:nvSpPr>
-          <p:cNvPr id="17" name="PDF_BULLET_SPAN_698"/>
+          <p:cNvPr id="17" name="PDF_BULLET_SPAN_692"/>
           <p:cNvSpPr/>
           <p:nvPr/>
         </p:nvSpPr>
@@ -28268,7 +28245,7 @@
       </p:pic>
       <p:sp>
         <p:nvSpPr>
-          <p:cNvPr id="3" name="PDF_TEXT_GROUP_478"/>
+          <p:cNvPr id="3" name="PDF_TEXT_GROUP_479"/>
           <p:cNvSpPr txBox="1"/>
           <p:nvPr/>
         </p:nvSpPr>
@@ -28316,7 +28293,7 @@
       </p:sp>
       <p:sp>
         <p:nvSpPr>
-          <p:cNvPr id="4" name="PDF_TEXT_GROUP_479"/>
+          <p:cNvPr id="4" name="PDF_TEXT_GROUP_480"/>
           <p:cNvSpPr txBox="1"/>
           <p:nvPr/>
         </p:nvSpPr>
@@ -28373,7 +28350,7 @@
       </p:sp>
       <p:sp>
         <p:nvSpPr>
-          <p:cNvPr id="5" name="PDF_TEXT_GROUP_480"/>
+          <p:cNvPr id="5" name="PDF_TEXT_GROUP_481"/>
           <p:cNvSpPr txBox="1"/>
           <p:nvPr/>
         </p:nvSpPr>
@@ -28430,7 +28407,7 @@
       </p:sp>
       <p:sp>
         <p:nvSpPr>
-          <p:cNvPr id="6" name="PDF_TEXT_GROUP_481"/>
+          <p:cNvPr id="6" name="PDF_TEXT_GROUP_482"/>
           <p:cNvSpPr txBox="1"/>
           <p:nvPr/>
         </p:nvSpPr>
@@ -28496,7 +28473,7 @@
       </p:sp>
       <p:sp>
         <p:nvSpPr>
-          <p:cNvPr id="7" name="PDF_TEXT_GROUP_482"/>
+          <p:cNvPr id="7" name="PDF_TEXT_GROUP_483"/>
           <p:cNvSpPr txBox="1"/>
           <p:nvPr/>
         </p:nvSpPr>
@@ -28553,14 +28530,14 @@
       </p:sp>
       <p:sp>
         <p:nvSpPr>
-          <p:cNvPr id="8" name="PDF_TEXT_GROUP_483"/>
+          <p:cNvPr id="8" name="PDF_TEXT_GROUP_484"/>
           <p:cNvSpPr txBox="1"/>
           <p:nvPr/>
         </p:nvSpPr>
         <p:spPr>
           <a:xfrm>
             <a:off x="1143656" y="5445401"/>
-            <a:ext cx="11118862" cy="929891"/>
+            <a:ext cx="11080733" cy="929891"/>
           </a:xfrm>
           <a:prstGeom prst="rect">
             <a:avLst/>
@@ -28594,7 +28571,7 @@
                 </a:solidFill>
                 <a:latin typeface="Latin Modern Sans"/>
               </a:rPr>
-              <a:t>NDNSF: runtime service discovery and authorization, connected to explicit</a:t>
+              <a:t>NDNSF: evaluate runtime discovery and authorized invocation; extend the</a:t>
             </a:r>
             <a:r>
               <a:rPr sz="2710" b="0" i="0">
@@ -28603,14 +28580,14 @@
                 </a:solidFill>
                 <a:latin typeface="Latin Modern Sans"/>
               </a:rPr>
-              <a:t> named-data execution rules.</a:t>
-            </a:r>
-          </a:p>
-        </p:txBody>
-      </p:sp>
-      <p:sp>
-        <p:nvSpPr>
-          <p:cNvPr id="9" name="PDF_TEXT_GROUP_484"/>
+              <a:t> foundation to role-aware collaboration.</a:t>
+            </a:r>
+          </a:p>
+        </p:txBody>
+      </p:sp>
+      <p:sp>
+        <p:nvSpPr>
+          <p:cNvPr id="9" name="PDF_TEXT_GROUP_485"/>
           <p:cNvSpPr txBox="1"/>
           <p:nvPr/>
         </p:nvSpPr>
@@ -28658,7 +28635,7 @@
       </p:sp>
       <p:sp>
         <p:nvSpPr>
-          <p:cNvPr id="10" name="PDF_TEXT_GROUP_485"/>
+          <p:cNvPr id="10" name="PDF_TEXT_GROUP_486"/>
           <p:cNvSpPr txBox="1"/>
           <p:nvPr/>
         </p:nvSpPr>
@@ -28706,7 +28683,7 @@
       </p:sp>
       <p:sp>
         <p:nvSpPr>
-          <p:cNvPr id="11" name="PDF_TEXT_GROUP_486"/>
+          <p:cNvPr id="11" name="PDF_TEXT_GROUP_487"/>
           <p:cNvSpPr txBox="1"/>
           <p:nvPr/>
         </p:nvSpPr>
@@ -28754,7 +28731,7 @@
       </p:sp>
       <p:sp>
         <p:nvSpPr>
-          <p:cNvPr id="12" name="PDF_TEXT_GROUP_487"/>
+          <p:cNvPr id="12" name="PDF_TEXT_GROUP_488"/>
           <p:cNvSpPr txBox="1"/>
           <p:nvPr/>
         </p:nvSpPr>
@@ -28802,7 +28779,7 @@
       </p:sp>
       <p:sp>
         <p:nvSpPr>
-          <p:cNvPr id="13" name="PDF_TEXT_GROUP_488"/>
+          <p:cNvPr id="13" name="PDF_TEXT_GROUP_489"/>
           <p:cNvSpPr txBox="1"/>
           <p:nvPr/>
         </p:nvSpPr>
@@ -28892,7 +28869,7 @@
       </p:pic>
       <p:sp>
         <p:nvSpPr>
-          <p:cNvPr id="3" name="PDF_TEXT_GROUP_489"/>
+          <p:cNvPr id="3" name="PDF_TEXT_GROUP_490"/>
           <p:cNvSpPr txBox="1"/>
           <p:nvPr/>
         </p:nvSpPr>
@@ -28940,7 +28917,7 @@
       </p:sp>
       <p:sp>
         <p:nvSpPr>
-          <p:cNvPr id="4" name="PDF_TEXT_GROUP_490"/>
+          <p:cNvPr id="4" name="PDF_TEXT_GROUP_491"/>
           <p:cNvSpPr txBox="1"/>
           <p:nvPr/>
         </p:nvSpPr>
@@ -28988,7 +28965,7 @@
       </p:sp>
       <p:sp>
         <p:nvSpPr>
-          <p:cNvPr id="5" name="PDF_TEXT_GROUP_491"/>
+          <p:cNvPr id="5" name="PDF_TEXT_GROUP_492"/>
           <p:cNvSpPr txBox="1"/>
           <p:nvPr/>
         </p:nvSpPr>
@@ -29036,7 +29013,7 @@
       </p:sp>
       <p:sp>
         <p:nvSpPr>
-          <p:cNvPr id="6" name="PDF_TEXT_GROUP_492"/>
+          <p:cNvPr id="6" name="PDF_TEXT_GROUP_493"/>
           <p:cNvSpPr txBox="1"/>
           <p:nvPr/>
         </p:nvSpPr>
@@ -29084,7 +29061,7 @@
       </p:sp>
       <p:sp>
         <p:nvSpPr>
-          <p:cNvPr id="7" name="PDF_TEXT_GROUP_493"/>
+          <p:cNvPr id="7" name="PDF_TEXT_GROUP_494"/>
           <p:cNvSpPr txBox="1"/>
           <p:nvPr/>
         </p:nvSpPr>
@@ -29132,7 +29109,7 @@
       </p:sp>
       <p:sp>
         <p:nvSpPr>
-          <p:cNvPr id="8" name="PDF_TEXT_GROUP_494"/>
+          <p:cNvPr id="8" name="PDF_TEXT_GROUP_495"/>
           <p:cNvSpPr txBox="1"/>
           <p:nvPr/>
         </p:nvSpPr>
@@ -29180,7 +29157,7 @@
       </p:sp>
       <p:sp>
         <p:nvSpPr>
-          <p:cNvPr id="9" name="PDF_TEXT_GROUP_495"/>
+          <p:cNvPr id="9" name="PDF_TEXT_GROUP_496"/>
           <p:cNvSpPr txBox="1"/>
           <p:nvPr/>
         </p:nvSpPr>
@@ -29228,7 +29205,7 @@
       </p:sp>
       <p:sp>
         <p:nvSpPr>
-          <p:cNvPr id="10" name="PDF_TEXT_GROUP_496"/>
+          <p:cNvPr id="10" name="PDF_TEXT_GROUP_497"/>
           <p:cNvSpPr txBox="1"/>
           <p:nvPr/>
         </p:nvSpPr>
@@ -29276,7 +29253,7 @@
       </p:sp>
       <p:sp>
         <p:nvSpPr>
-          <p:cNvPr id="11" name="PDF_TEXT_GROUP_497"/>
+          <p:cNvPr id="11" name="PDF_TEXT_GROUP_498"/>
           <p:cNvSpPr txBox="1"/>
           <p:nvPr/>
         </p:nvSpPr>
@@ -29324,7 +29301,7 @@
       </p:sp>
       <p:sp>
         <p:nvSpPr>
-          <p:cNvPr id="12" name="PDF_TEXT_GROUP_498"/>
+          <p:cNvPr id="12" name="PDF_TEXT_GROUP_499"/>
           <p:cNvSpPr txBox="1"/>
           <p:nvPr/>
         </p:nvSpPr>
@@ -29381,7 +29358,7 @@
       </p:sp>
       <p:sp>
         <p:nvSpPr>
-          <p:cNvPr id="13" name="PDF_TEXT_GROUP_499"/>
+          <p:cNvPr id="13" name="PDF_TEXT_GROUP_500"/>
           <p:cNvSpPr txBox="1"/>
           <p:nvPr/>
         </p:nvSpPr>
@@ -29429,7 +29406,7 @@
       </p:sp>
       <p:sp>
         <p:nvSpPr>
-          <p:cNvPr id="14" name="PDF_TEXT_GROUP_500"/>
+          <p:cNvPr id="14" name="PDF_TEXT_GROUP_501"/>
           <p:cNvSpPr txBox="1"/>
           <p:nvPr/>
         </p:nvSpPr>
@@ -29477,7 +29454,7 @@
       </p:sp>
       <p:sp>
         <p:nvSpPr>
-          <p:cNvPr id="15" name="PDF_TEXT_GROUP_501"/>
+          <p:cNvPr id="15" name="PDF_TEXT_GROUP_502"/>
           <p:cNvSpPr txBox="1"/>
           <p:nvPr/>
         </p:nvSpPr>
@@ -29525,7 +29502,7 @@
       </p:sp>
       <p:sp>
         <p:nvSpPr>
-          <p:cNvPr id="16" name="PDF_TEXT_GROUP_502"/>
+          <p:cNvPr id="16" name="PDF_TEXT_GROUP_503"/>
           <p:cNvSpPr txBox="1"/>
           <p:nvPr/>
         </p:nvSpPr>
@@ -29573,7 +29550,7 @@
       </p:sp>
       <p:sp>
         <p:nvSpPr>
-          <p:cNvPr id="17" name="PDF_TEXT_GROUP_503"/>
+          <p:cNvPr id="17" name="PDF_TEXT_GROUP_504"/>
           <p:cNvSpPr txBox="1"/>
           <p:nvPr/>
         </p:nvSpPr>
@@ -29663,7 +29640,7 @@
       </p:pic>
       <p:sp>
         <p:nvSpPr>
-          <p:cNvPr id="3" name="PDF_TEXT_GROUP_504"/>
+          <p:cNvPr id="3" name="PDF_TEXT_GROUP_505"/>
           <p:cNvSpPr txBox="1"/>
           <p:nvPr/>
         </p:nvSpPr>
@@ -29711,7 +29688,7 @@
       </p:sp>
       <p:sp>
         <p:nvSpPr>
-          <p:cNvPr id="4" name="PDF_TEXT_GROUP_505"/>
+          <p:cNvPr id="4" name="PDF_TEXT_GROUP_506"/>
           <p:cNvSpPr txBox="1"/>
           <p:nvPr/>
         </p:nvSpPr>
@@ -29759,7 +29736,7 @@
       </p:sp>
       <p:sp>
         <p:nvSpPr>
-          <p:cNvPr id="5" name="PDF_TEXT_GROUP_506"/>
+          <p:cNvPr id="5" name="PDF_TEXT_GROUP_507"/>
           <p:cNvSpPr txBox="1"/>
           <p:nvPr/>
         </p:nvSpPr>
@@ -29807,7 +29784,7 @@
       </p:sp>
       <p:sp>
         <p:nvSpPr>
-          <p:cNvPr id="6" name="PDF_TEXT_GROUP_507"/>
+          <p:cNvPr id="6" name="PDF_TEXT_GROUP_508"/>
           <p:cNvSpPr txBox="1"/>
           <p:nvPr/>
         </p:nvSpPr>
@@ -29855,7 +29832,7 @@
       </p:sp>
       <p:sp>
         <p:nvSpPr>
-          <p:cNvPr id="7" name="PDF_TEXT_GROUP_508"/>
+          <p:cNvPr id="7" name="PDF_TEXT_GROUP_509"/>
           <p:cNvSpPr txBox="1"/>
           <p:nvPr/>
         </p:nvSpPr>
@@ -29903,7 +29880,7 @@
       </p:sp>
       <p:sp>
         <p:nvSpPr>
-          <p:cNvPr id="8" name="PDF_TEXT_GROUP_509"/>
+          <p:cNvPr id="8" name="PDF_TEXT_GROUP_510"/>
           <p:cNvSpPr txBox="1"/>
           <p:nvPr/>
         </p:nvSpPr>
@@ -29951,7 +29928,7 @@
       </p:sp>
       <p:sp>
         <p:nvSpPr>
-          <p:cNvPr id="9" name="PDF_TEXT_GROUP_510"/>
+          <p:cNvPr id="9" name="PDF_TEXT_GROUP_511"/>
           <p:cNvSpPr txBox="1"/>
           <p:nvPr/>
         </p:nvSpPr>
@@ -29999,7 +29976,7 @@
       </p:sp>
       <p:sp>
         <p:nvSpPr>
-          <p:cNvPr id="10" name="PDF_TEXT_GROUP_511"/>
+          <p:cNvPr id="10" name="PDF_TEXT_GROUP_512"/>
           <p:cNvSpPr txBox="1"/>
           <p:nvPr/>
         </p:nvSpPr>
@@ -30047,7 +30024,7 @@
       </p:sp>
       <p:sp>
         <p:nvSpPr>
-          <p:cNvPr id="11" name="PDF_TEXT_GROUP_512"/>
+          <p:cNvPr id="11" name="PDF_TEXT_GROUP_513"/>
           <p:cNvSpPr txBox="1"/>
           <p:nvPr/>
         </p:nvSpPr>
@@ -30095,7 +30072,7 @@
       </p:sp>
       <p:sp>
         <p:nvSpPr>
-          <p:cNvPr id="12" name="PDF_TEXT_GROUP_513"/>
+          <p:cNvPr id="12" name="PDF_TEXT_GROUP_514"/>
           <p:cNvSpPr txBox="1"/>
           <p:nvPr/>
         </p:nvSpPr>
@@ -30152,7 +30129,7 @@
       </p:sp>
       <p:sp>
         <p:nvSpPr>
-          <p:cNvPr id="13" name="PDF_TEXT_GROUP_514"/>
+          <p:cNvPr id="13" name="PDF_TEXT_GROUP_515"/>
           <p:cNvSpPr txBox="1"/>
           <p:nvPr/>
         </p:nvSpPr>
@@ -30200,7 +30177,7 @@
       </p:sp>
       <p:sp>
         <p:nvSpPr>
-          <p:cNvPr id="14" name="PDF_TEXT_GROUP_515"/>
+          <p:cNvPr id="14" name="PDF_TEXT_GROUP_516"/>
           <p:cNvSpPr txBox="1"/>
           <p:nvPr/>
         </p:nvSpPr>
@@ -30248,7 +30225,7 @@
       </p:sp>
       <p:sp>
         <p:nvSpPr>
-          <p:cNvPr id="15" name="PDF_TEXT_GROUP_516"/>
+          <p:cNvPr id="15" name="PDF_TEXT_GROUP_517"/>
           <p:cNvSpPr txBox="1"/>
           <p:nvPr/>
         </p:nvSpPr>
@@ -30296,7 +30273,7 @@
       </p:sp>
       <p:sp>
         <p:nvSpPr>
-          <p:cNvPr id="16" name="PDF_TEXT_GROUP_517"/>
+          <p:cNvPr id="16" name="PDF_TEXT_GROUP_518"/>
           <p:cNvSpPr txBox="1"/>
           <p:nvPr/>
         </p:nvSpPr>
@@ -30344,7 +30321,7 @@
       </p:sp>
       <p:sp>
         <p:nvSpPr>
-          <p:cNvPr id="17" name="PDF_TEXT_GROUP_518"/>
+          <p:cNvPr id="17" name="PDF_TEXT_GROUP_519"/>
           <p:cNvSpPr txBox="1"/>
           <p:nvPr/>
         </p:nvSpPr>
@@ -30392,7 +30369,7 @@
       </p:sp>
       <p:sp>
         <p:nvSpPr>
-          <p:cNvPr id="18" name="PDF_TEXT_GROUP_519"/>
+          <p:cNvPr id="18" name="PDF_TEXT_GROUP_520"/>
           <p:cNvSpPr txBox="1"/>
           <p:nvPr/>
         </p:nvSpPr>
@@ -30440,7 +30417,7 @@
       </p:sp>
       <p:sp>
         <p:nvSpPr>
-          <p:cNvPr id="19" name="PDF_TEXT_GROUP_520"/>
+          <p:cNvPr id="19" name="PDF_TEXT_GROUP_521"/>
           <p:cNvSpPr txBox="1"/>
           <p:nvPr/>
         </p:nvSpPr>
@@ -30530,7 +30507,7 @@
       </p:pic>
       <p:sp>
         <p:nvSpPr>
-          <p:cNvPr id="3" name="PDF_TEXT_GROUP_521"/>
+          <p:cNvPr id="3" name="PDF_TEXT_GROUP_522"/>
           <p:cNvSpPr txBox="1"/>
           <p:nvPr/>
         </p:nvSpPr>
@@ -30578,7 +30555,7 @@
       </p:sp>
       <p:sp>
         <p:nvSpPr>
-          <p:cNvPr id="4" name="PDF_TEXT_GROUP_522"/>
+          <p:cNvPr id="4" name="PDF_TEXT_GROUP_523"/>
           <p:cNvSpPr txBox="1"/>
           <p:nvPr/>
         </p:nvSpPr>
@@ -30635,7 +30612,7 @@
       </p:sp>
       <p:sp>
         <p:nvSpPr>
-          <p:cNvPr id="5" name="PDF_TEXT_GROUP_523"/>
+          <p:cNvPr id="5" name="PDF_TEXT_GROUP_524"/>
           <p:cNvSpPr txBox="1"/>
           <p:nvPr/>
         </p:nvSpPr>
@@ -30692,7 +30669,7 @@
       </p:sp>
       <p:sp>
         <p:nvSpPr>
-          <p:cNvPr id="6" name="PDF_TEXT_GROUP_524"/>
+          <p:cNvPr id="6" name="PDF_TEXT_GROUP_525"/>
           <p:cNvSpPr txBox="1"/>
           <p:nvPr/>
         </p:nvSpPr>
@@ -30749,7 +30726,7 @@
       </p:sp>
       <p:sp>
         <p:nvSpPr>
-          <p:cNvPr id="7" name="PDF_TEXT_GROUP_525"/>
+          <p:cNvPr id="7" name="PDF_TEXT_GROUP_526"/>
           <p:cNvSpPr txBox="1"/>
           <p:nvPr/>
         </p:nvSpPr>
@@ -30806,7 +30783,7 @@
       </p:sp>
       <p:sp>
         <p:nvSpPr>
-          <p:cNvPr id="8" name="PDF_TEXT_GROUP_526"/>
+          <p:cNvPr id="8" name="PDF_TEXT_GROUP_527"/>
           <p:cNvSpPr txBox="1"/>
           <p:nvPr/>
         </p:nvSpPr>
@@ -30863,7 +30840,7 @@
       </p:sp>
       <p:sp>
         <p:nvSpPr>
-          <p:cNvPr id="9" name="PDF_TEXT_GROUP_527"/>
+          <p:cNvPr id="9" name="PDF_TEXT_GROUP_528"/>
           <p:cNvSpPr txBox="1"/>
           <p:nvPr/>
         </p:nvSpPr>
@@ -30911,7 +30888,7 @@
       </p:sp>
       <p:sp>
         <p:nvSpPr>
-          <p:cNvPr id="10" name="PDF_TEXT_GROUP_528"/>
+          <p:cNvPr id="10" name="PDF_TEXT_GROUP_529"/>
           <p:cNvSpPr txBox="1"/>
           <p:nvPr/>
         </p:nvSpPr>
@@ -30968,7 +30945,7 @@
       </p:sp>
       <p:sp>
         <p:nvSpPr>
-          <p:cNvPr id="11" name="PDF_TEXT_GROUP_529"/>
+          <p:cNvPr id="11" name="PDF_TEXT_GROUP_530"/>
           <p:cNvSpPr txBox="1"/>
           <p:nvPr/>
         </p:nvSpPr>
@@ -31025,7 +31002,7 @@
       </p:sp>
       <p:sp>
         <p:nvSpPr>
-          <p:cNvPr id="12" name="PDF_TEXT_GROUP_530"/>
+          <p:cNvPr id="12" name="PDF_TEXT_GROUP_531"/>
           <p:cNvSpPr txBox="1"/>
           <p:nvPr/>
         </p:nvSpPr>
@@ -31073,7 +31050,7 @@
       </p:sp>
       <p:sp>
         <p:nvSpPr>
-          <p:cNvPr id="13" name="PDF_TEXT_GROUP_531"/>
+          <p:cNvPr id="13" name="PDF_TEXT_GROUP_532"/>
           <p:cNvSpPr txBox="1"/>
           <p:nvPr/>
         </p:nvSpPr>
@@ -31130,7 +31107,7 @@
       </p:sp>
       <p:sp>
         <p:nvSpPr>
-          <p:cNvPr id="14" name="PDF_TEXT_GROUP_532"/>
+          <p:cNvPr id="14" name="PDF_TEXT_GROUP_533"/>
           <p:cNvSpPr txBox="1"/>
           <p:nvPr/>
         </p:nvSpPr>
@@ -31178,7 +31155,7 @@
       </p:sp>
       <p:sp>
         <p:nvSpPr>
-          <p:cNvPr id="15" name="PDF_TEXT_GROUP_533"/>
+          <p:cNvPr id="15" name="PDF_TEXT_GROUP_534"/>
           <p:cNvSpPr txBox="1"/>
           <p:nvPr/>
         </p:nvSpPr>
@@ -31226,7 +31203,7 @@
       </p:sp>
       <p:sp>
         <p:nvSpPr>
-          <p:cNvPr id="16" name="PDF_TEXT_GROUP_534"/>
+          <p:cNvPr id="16" name="PDF_TEXT_GROUP_535"/>
           <p:cNvSpPr txBox="1"/>
           <p:nvPr/>
         </p:nvSpPr>
@@ -31274,7 +31251,7 @@
       </p:sp>
       <p:sp>
         <p:nvSpPr>
-          <p:cNvPr id="17" name="PDF_TEXT_GROUP_535"/>
+          <p:cNvPr id="17" name="PDF_TEXT_GROUP_536"/>
           <p:cNvSpPr txBox="1"/>
           <p:nvPr/>
         </p:nvSpPr>
@@ -31322,7 +31299,7 @@
       </p:sp>
       <p:sp>
         <p:nvSpPr>
-          <p:cNvPr id="18" name="PDF_TEXT_GROUP_536"/>
+          <p:cNvPr id="18" name="PDF_TEXT_GROUP_537"/>
           <p:cNvSpPr txBox="1"/>
           <p:nvPr/>
         </p:nvSpPr>
@@ -31370,7 +31347,7 @@
       </p:sp>
       <p:sp>
         <p:nvSpPr>
-          <p:cNvPr id="19" name="PDF_TEXT_GROUP_537"/>
+          <p:cNvPr id="19" name="PDF_TEXT_GROUP_538"/>
           <p:cNvSpPr txBox="1"/>
           <p:nvPr/>
         </p:nvSpPr>
@@ -31460,7 +31437,7 @@
       </p:pic>
       <p:sp>
         <p:nvSpPr>
-          <p:cNvPr id="3" name="PDF_TEXT_GROUP_538"/>
+          <p:cNvPr id="3" name="PDF_TEXT_GROUP_539"/>
           <p:cNvSpPr txBox="1"/>
           <p:nvPr/>
         </p:nvSpPr>
@@ -31508,7 +31485,7 @@
       </p:sp>
       <p:sp>
         <p:nvSpPr>
-          <p:cNvPr id="4" name="PDF_TEXT_GROUP_539"/>
+          <p:cNvPr id="4" name="PDF_TEXT_GROUP_540"/>
           <p:cNvSpPr txBox="1"/>
           <p:nvPr/>
         </p:nvSpPr>
@@ -31565,7 +31542,7 @@
       </p:sp>
       <p:sp>
         <p:nvSpPr>
-          <p:cNvPr id="5" name="PDF_TEXT_GROUP_540"/>
+          <p:cNvPr id="5" name="PDF_TEXT_GROUP_541"/>
           <p:cNvSpPr txBox="1"/>
           <p:nvPr/>
         </p:nvSpPr>
@@ -31622,7 +31599,7 @@
       </p:sp>
       <p:sp>
         <p:nvSpPr>
-          <p:cNvPr id="6" name="PDF_TEXT_GROUP_541"/>
+          <p:cNvPr id="6" name="PDF_TEXT_GROUP_542"/>
           <p:cNvSpPr txBox="1"/>
           <p:nvPr/>
         </p:nvSpPr>
@@ -31679,7 +31656,7 @@
       </p:sp>
       <p:sp>
         <p:nvSpPr>
-          <p:cNvPr id="7" name="PDF_TEXT_GROUP_542"/>
+          <p:cNvPr id="7" name="PDF_TEXT_GROUP_543"/>
           <p:cNvSpPr txBox="1"/>
           <p:nvPr/>
         </p:nvSpPr>
@@ -31736,7 +31713,7 @@
       </p:sp>
       <p:sp>
         <p:nvSpPr>
-          <p:cNvPr id="8" name="PDF_TEXT_GROUP_543"/>
+          <p:cNvPr id="8" name="PDF_TEXT_GROUP_544"/>
           <p:cNvSpPr txBox="1"/>
           <p:nvPr/>
         </p:nvSpPr>
@@ -31784,7 +31761,7 @@
       </p:sp>
       <p:sp>
         <p:nvSpPr>
-          <p:cNvPr id="9" name="PDF_TEXT_GROUP_544"/>
+          <p:cNvPr id="9" name="PDF_TEXT_GROUP_545"/>
           <p:cNvSpPr txBox="1"/>
           <p:nvPr/>
         </p:nvSpPr>
@@ -31841,7 +31818,7 @@
       </p:sp>
       <p:sp>
         <p:nvSpPr>
-          <p:cNvPr id="10" name="PDF_TEXT_GROUP_545"/>
+          <p:cNvPr id="10" name="PDF_TEXT_GROUP_546"/>
           <p:cNvSpPr txBox="1"/>
           <p:nvPr/>
         </p:nvSpPr>
@@ -31889,7 +31866,7 @@
       </p:sp>
       <p:sp>
         <p:nvSpPr>
-          <p:cNvPr id="11" name="PDF_TEXT_GROUP_546"/>
+          <p:cNvPr id="11" name="PDF_TEXT_GROUP_547"/>
           <p:cNvSpPr txBox="1"/>
           <p:nvPr/>
         </p:nvSpPr>
@@ -31946,7 +31923,7 @@
       </p:sp>
       <p:sp>
         <p:nvSpPr>
-          <p:cNvPr id="12" name="PDF_TEXT_GROUP_547"/>
+          <p:cNvPr id="12" name="PDF_TEXT_GROUP_548"/>
           <p:cNvSpPr txBox="1"/>
           <p:nvPr/>
         </p:nvSpPr>
@@ -32003,7 +31980,7 @@
       </p:sp>
       <p:sp>
         <p:nvSpPr>
-          <p:cNvPr id="13" name="PDF_TEXT_GROUP_548"/>
+          <p:cNvPr id="13" name="PDF_TEXT_GROUP_549"/>
           <p:cNvSpPr txBox="1"/>
           <p:nvPr/>
         </p:nvSpPr>
@@ -32051,7 +32028,7 @@
       </p:sp>
       <p:sp>
         <p:nvSpPr>
-          <p:cNvPr id="14" name="PDF_TEXT_GROUP_549"/>
+          <p:cNvPr id="14" name="PDF_TEXT_GROUP_550"/>
           <p:cNvSpPr txBox="1"/>
           <p:nvPr/>
         </p:nvSpPr>
@@ -32099,7 +32076,7 @@
       </p:sp>
       <p:sp>
         <p:nvSpPr>
-          <p:cNvPr id="15" name="PDF_TEXT_GROUP_550"/>
+          <p:cNvPr id="15" name="PDF_TEXT_GROUP_551"/>
           <p:cNvSpPr txBox="1"/>
           <p:nvPr/>
         </p:nvSpPr>
@@ -32147,7 +32124,7 @@
       </p:sp>
       <p:sp>
         <p:nvSpPr>
-          <p:cNvPr id="16" name="PDF_TEXT_GROUP_551"/>
+          <p:cNvPr id="16" name="PDF_TEXT_GROUP_552"/>
           <p:cNvSpPr txBox="1"/>
           <p:nvPr/>
         </p:nvSpPr>
@@ -32195,7 +32172,7 @@
       </p:sp>
       <p:sp>
         <p:nvSpPr>
-          <p:cNvPr id="17" name="PDF_TEXT_GROUP_552"/>
+          <p:cNvPr id="17" name="PDF_TEXT_GROUP_553"/>
           <p:cNvSpPr txBox="1"/>
           <p:nvPr/>
         </p:nvSpPr>
@@ -32243,7 +32220,7 @@
       </p:sp>
       <p:sp>
         <p:nvSpPr>
-          <p:cNvPr id="18" name="PDF_TEXT_GROUP_553"/>
+          <p:cNvPr id="18" name="PDF_TEXT_GROUP_554"/>
           <p:cNvSpPr txBox="1"/>
           <p:nvPr/>
         </p:nvSpPr>
@@ -33275,7 +33252,7 @@
       </p:pic>
       <p:sp>
         <p:nvSpPr>
-          <p:cNvPr id="3" name="PDF_TEXT_GROUP_554"/>
+          <p:cNvPr id="3" name="PDF_TEXT_GROUP_555"/>
           <p:cNvSpPr txBox="1"/>
           <p:nvPr/>
         </p:nvSpPr>
@@ -33323,7 +33300,7 @@
       </p:sp>
       <p:sp>
         <p:nvSpPr>
-          <p:cNvPr id="4" name="PDF_TEXT_GROUP_555"/>
+          <p:cNvPr id="4" name="PDF_TEXT_GROUP_556"/>
           <p:cNvSpPr txBox="1"/>
           <p:nvPr/>
         </p:nvSpPr>
@@ -33380,7 +33357,7 @@
       </p:sp>
       <p:sp>
         <p:nvSpPr>
-          <p:cNvPr id="5" name="PDF_TEXT_GROUP_556"/>
+          <p:cNvPr id="5" name="PDF_TEXT_GROUP_557"/>
           <p:cNvSpPr txBox="1"/>
           <p:nvPr/>
         </p:nvSpPr>
@@ -33437,7 +33414,7 @@
       </p:sp>
       <p:sp>
         <p:nvSpPr>
-          <p:cNvPr id="6" name="PDF_TEXT_GROUP_557"/>
+          <p:cNvPr id="6" name="PDF_TEXT_GROUP_558"/>
           <p:cNvSpPr txBox="1"/>
           <p:nvPr/>
         </p:nvSpPr>
@@ -33494,7 +33471,7 @@
       </p:sp>
       <p:sp>
         <p:nvSpPr>
-          <p:cNvPr id="7" name="PDF_TEXT_GROUP_558"/>
+          <p:cNvPr id="7" name="PDF_TEXT_GROUP_559"/>
           <p:cNvSpPr txBox="1"/>
           <p:nvPr/>
         </p:nvSpPr>
@@ -33551,7 +33528,7 @@
       </p:sp>
       <p:sp>
         <p:nvSpPr>
-          <p:cNvPr id="8" name="PDF_TEXT_GROUP_559"/>
+          <p:cNvPr id="8" name="PDF_TEXT_GROUP_560"/>
           <p:cNvSpPr txBox="1"/>
           <p:nvPr/>
         </p:nvSpPr>
@@ -33608,7 +33585,7 @@
       </p:sp>
       <p:sp>
         <p:nvSpPr>
-          <p:cNvPr id="9" name="PDF_TEXT_GROUP_560"/>
+          <p:cNvPr id="9" name="PDF_TEXT_GROUP_561"/>
           <p:cNvSpPr txBox="1"/>
           <p:nvPr/>
         </p:nvSpPr>
@@ -33656,7 +33633,7 @@
       </p:sp>
       <p:sp>
         <p:nvSpPr>
-          <p:cNvPr id="10" name="PDF_TEXT_GROUP_561"/>
+          <p:cNvPr id="10" name="PDF_TEXT_GROUP_562"/>
           <p:cNvSpPr txBox="1"/>
           <p:nvPr/>
         </p:nvSpPr>
@@ -33713,7 +33690,7 @@
       </p:sp>
       <p:sp>
         <p:nvSpPr>
-          <p:cNvPr id="11" name="PDF_TEXT_GROUP_562"/>
+          <p:cNvPr id="11" name="PDF_TEXT_GROUP_563"/>
           <p:cNvSpPr txBox="1"/>
           <p:nvPr/>
         </p:nvSpPr>
@@ -33761,7 +33738,7 @@
       </p:sp>
       <p:sp>
         <p:nvSpPr>
-          <p:cNvPr id="12" name="PDF_TEXT_GROUP_563"/>
+          <p:cNvPr id="12" name="PDF_TEXT_GROUP_564"/>
           <p:cNvSpPr txBox="1"/>
           <p:nvPr/>
         </p:nvSpPr>
@@ -33818,7 +33795,7 @@
       </p:sp>
       <p:sp>
         <p:nvSpPr>
-          <p:cNvPr id="13" name="PDF_TEXT_GROUP_564"/>
+          <p:cNvPr id="13" name="PDF_TEXT_GROUP_565"/>
           <p:cNvSpPr txBox="1"/>
           <p:nvPr/>
         </p:nvSpPr>
@@ -33866,7 +33843,7 @@
       </p:sp>
       <p:sp>
         <p:nvSpPr>
-          <p:cNvPr id="14" name="PDF_TEXT_GROUP_565"/>
+          <p:cNvPr id="14" name="PDF_TEXT_GROUP_566"/>
           <p:cNvSpPr txBox="1"/>
           <p:nvPr/>
         </p:nvSpPr>
@@ -33923,7 +33900,7 @@
       </p:sp>
       <p:sp>
         <p:nvSpPr>
-          <p:cNvPr id="15" name="PDF_TEXT_GROUP_566"/>
+          <p:cNvPr id="15" name="PDF_TEXT_GROUP_567"/>
           <p:cNvSpPr txBox="1"/>
           <p:nvPr/>
         </p:nvSpPr>
@@ -33971,7 +33948,7 @@
       </p:sp>
       <p:sp>
         <p:nvSpPr>
-          <p:cNvPr id="16" name="PDF_TEXT_GROUP_567"/>
+          <p:cNvPr id="16" name="PDF_TEXT_GROUP_568"/>
           <p:cNvSpPr txBox="1"/>
           <p:nvPr/>
         </p:nvSpPr>
@@ -34019,7 +33996,7 @@
       </p:sp>
       <p:sp>
         <p:nvSpPr>
-          <p:cNvPr id="17" name="PDF_TEXT_GROUP_568"/>
+          <p:cNvPr id="17" name="PDF_TEXT_GROUP_569"/>
           <p:cNvSpPr txBox="1"/>
           <p:nvPr/>
         </p:nvSpPr>
@@ -34067,7 +34044,7 @@
       </p:sp>
       <p:sp>
         <p:nvSpPr>
-          <p:cNvPr id="18" name="PDF_TEXT_GROUP_569"/>
+          <p:cNvPr id="18" name="PDF_TEXT_GROUP_570"/>
           <p:cNvSpPr txBox="1"/>
           <p:nvPr/>
         </p:nvSpPr>
@@ -34115,7 +34092,7 @@
       </p:sp>
       <p:sp>
         <p:nvSpPr>
-          <p:cNvPr id="19" name="PDF_TEXT_GROUP_570"/>
+          <p:cNvPr id="19" name="PDF_TEXT_GROUP_571"/>
           <p:cNvSpPr txBox="1"/>
           <p:nvPr/>
         </p:nvSpPr>
@@ -34163,7 +34140,7 @@
       </p:sp>
       <p:sp>
         <p:nvSpPr>
-          <p:cNvPr id="20" name="PDF_TEXT_GROUP_571"/>
+          <p:cNvPr id="20" name="PDF_TEXT_GROUP_572"/>
           <p:cNvSpPr txBox="1"/>
           <p:nvPr/>
         </p:nvSpPr>
@@ -34383,7 +34360,7 @@
         <p:spPr>
           <a:xfrm>
             <a:off x="1618972" y="3264547"/>
-            <a:ext cx="11029263" cy="929891"/>
+            <a:ext cx="11746249" cy="929891"/>
           </a:xfrm>
           <a:prstGeom prst="rect">
             <a:avLst/>
@@ -34426,7 +34403,7 @@
                 </a:solidFill>
                 <a:latin typeface="Latin Modern Sans"/>
               </a:rPr>
-              <a:t> How can Providers selected at runtime follow task roles and named</a:t>
+              <a:t> How can single-Provider invocation be extended to roles and named</a:t>
             </a:r>
             <a:r>
               <a:rPr sz="2710" b="0" i="0">
@@ -34435,7 +34412,7 @@
                 </a:solidFill>
                 <a:latin typeface="Latin Modern Sans"/>
               </a:rPr>
-              <a:t> dependencies, whether Data comes from producers or caches?</a:t>
+              <a:t> dependencies across Providers, whether Data comes from producers or caches?</a:t>
             </a:r>
           </a:p>
         </p:txBody>
@@ -34515,7 +34492,7 @@
         <p:spPr>
           <a:xfrm>
             <a:off x="1143656" y="5830501"/>
-            <a:ext cx="12029277" cy="929891"/>
+            <a:ext cx="12184258" cy="929891"/>
           </a:xfrm>
           <a:prstGeom prst="rect">
             <a:avLst/>
@@ -34549,7 +34526,7 @@
                 </a:solidFill>
                 <a:latin typeface="Latin Modern Sans"/>
               </a:rPr>
-              <a:t>UAV sensing tests dependencies between observations; distributed inference tests</a:t>
+              <a:t>RQ1 evaluates the invocation foundation; RQ2 studies its collaboration extension;</a:t>
             </a:r>
             <a:r>
               <a:rPr sz="2710" b="0" i="0">
@@ -34558,7 +34535,7 @@
                 </a:solidFill>
                 <a:latin typeface="Latin Modern Sans"/>
               </a:rPr>
-              <a:t> ordered computation and state. Both evaluate the same framework.</a:t>
+              <a:t> RQ3 measures both scopes separately.</a:t>
             </a:r>
           </a:p>
         </p:txBody>
@@ -34805,7 +34782,7 @@
       </p:sp>
       <p:sp>
         <p:nvSpPr>
-          <p:cNvPr id="13" name="PDF_BULLET_SPAN_78"/>
+          <p:cNvPr id="13" name="PDF_BULLET_SPAN_71"/>
           <p:cNvSpPr/>
           <p:nvPr/>
         </p:nvSpPr>
@@ -34848,7 +34825,7 @@
       </p:sp>
       <p:sp>
         <p:nvSpPr>
-          <p:cNvPr id="14" name="PDF_BULLET_SPAN_83"/>
+          <p:cNvPr id="14" name="PDF_BULLET_SPAN_76"/>
           <p:cNvSpPr/>
           <p:nvPr/>
         </p:nvSpPr>
@@ -34891,7 +34868,7 @@
       </p:sp>
       <p:sp>
         <p:nvSpPr>
-          <p:cNvPr id="15" name="PDF_BULLET_SPAN_87"/>
+          <p:cNvPr id="15" name="PDF_BULLET_SPAN_80"/>
           <p:cNvSpPr/>
           <p:nvPr/>
         </p:nvSpPr>
@@ -35634,7 +35611,7 @@
         <p:spPr>
           <a:xfrm>
             <a:off x="1123808" y="6137330"/>
-            <a:ext cx="11787672" cy="828844"/>
+            <a:ext cx="11383711" cy="828844"/>
           </a:xfrm>
           <a:prstGeom prst="rect">
             <a:avLst/>
@@ -35668,7 +35645,7 @@
                 </a:solidFill>
                 <a:latin typeface="Latin Modern Sans"/>
               </a:rPr>
-              <a:t>Proposed contribution: each selected Provider checks whether input Data matches the</a:t>
+              <a:t>Collaboration research: make runtime assignments constrain intermediate Data use.</a:t>
             </a:r>
             <a:r>
               <a:rPr sz="2371" b="0" i="0">
@@ -35677,7 +35654,7 @@
                 </a:solidFill>
                 <a:latin typeface="Latin Modern Sans"/>
               </a:rPr>
-              <a:t> task’s runtime role assignments and declared dependencies.</a:t>
+              <a:t> Discovery and authorization are evaluated separately.</a:t>
             </a:r>
           </a:p>
         </p:txBody>
@@ -36854,8 +36831,8 @@
         </p:nvSpPr>
         <p:spPr>
           <a:xfrm>
-            <a:off x="1618972" y="2018344"/>
-            <a:ext cx="7388673" cy="440633"/>
+            <a:off x="1618972" y="1843196"/>
+            <a:ext cx="10928147" cy="929891"/>
           </a:xfrm>
           <a:prstGeom prst="rect">
             <a:avLst/>
@@ -36889,7 +36866,16 @@
                 </a:solidFill>
                 <a:latin typeface="Latin Modern Sans"/>
               </a:rPr>
-              <a:t>User: requests and coordinates the invocation.</a:t>
+              <a:t>User: requests a service and selects a Provider; the extension also assigns</a:t>
+            </a:r>
+            <a:r>
+              <a:rPr sz="2710" b="0" i="0">
+                <a:solidFill>
+                  <a:srgbClr val="000000"/>
+                </a:solidFill>
+                <a:latin typeface="Latin Modern Sans"/>
+              </a:rPr>
+              <a:t> collaboration roles.</a:t>
             </a:r>
           </a:p>
         </p:txBody>
@@ -36902,7 +36888,7 @@
         </p:nvSpPr>
         <p:spPr>
           <a:xfrm>
-            <a:off x="1618972" y="2552772"/>
+            <a:off x="1618972" y="2815463"/>
             <a:ext cx="10871467" cy="440633"/>
           </a:xfrm>
           <a:prstGeom prst="rect">
@@ -36950,8 +36936,8 @@
         </p:nvSpPr>
         <p:spPr>
           <a:xfrm>
-            <a:off x="1618972" y="3087201"/>
-            <a:ext cx="10931562" cy="929891"/>
+            <a:off x="1618972" y="3349891"/>
+            <a:ext cx="10931562" cy="929924"/>
           </a:xfrm>
           <a:prstGeom prst="rect">
             <a:avLst/>
@@ -37007,7 +36993,7 @@
         </p:nvSpPr>
         <p:spPr>
           <a:xfrm>
-            <a:off x="1618972" y="4059468"/>
+            <a:off x="1618972" y="4322190"/>
             <a:ext cx="12084692" cy="929891"/>
           </a:xfrm>
           <a:prstGeom prst="rect">
@@ -37064,7 +37050,7 @@
         </p:nvSpPr>
         <p:spPr>
           <a:xfrm>
-            <a:off x="1143656" y="5584615"/>
+            <a:off x="1143656" y="5847305"/>
             <a:ext cx="12477742" cy="929891"/>
           </a:xfrm>
           <a:prstGeom prst="rect">
@@ -37355,13 +37341,13 @@
       </p:sp>
       <p:sp>
         <p:nvSpPr>
-          <p:cNvPr id="14" name="PDF_BULLET_SPAN_145"/>
+          <p:cNvPr id="14" name="PDF_BULLET_SPAN_138"/>
           <p:cNvSpPr/>
           <p:nvPr/>
         </p:nvSpPr>
         <p:spPr>
           <a:xfrm rot="5400000">
-            <a:off x="1207424" y="2104135"/>
+            <a:off x="1207424" y="1928987"/>
             <a:ext cx="197164" cy="197164"/>
           </a:xfrm>
           <a:prstGeom prst="triangle">
@@ -37398,13 +37384,13 @@
       </p:sp>
       <p:sp>
         <p:nvSpPr>
-          <p:cNvPr id="15" name="PDF_BULLET_SPAN_147"/>
+          <p:cNvPr id="15" name="PDF_BULLET_SPAN_141"/>
           <p:cNvSpPr/>
           <p:nvPr/>
         </p:nvSpPr>
         <p:spPr>
           <a:xfrm rot="5400000">
-            <a:off x="1207424" y="2638563"/>
+            <a:off x="1207424" y="2901253"/>
             <a:ext cx="197164" cy="197164"/>
           </a:xfrm>
           <a:prstGeom prst="triangle">
@@ -37441,13 +37427,13 @@
       </p:sp>
       <p:sp>
         <p:nvSpPr>
-          <p:cNvPr id="16" name="PDF_BULLET_SPAN_149"/>
+          <p:cNvPr id="16" name="PDF_BULLET_SPAN_143"/>
           <p:cNvSpPr/>
           <p:nvPr/>
         </p:nvSpPr>
         <p:spPr>
           <a:xfrm rot="5400000">
-            <a:off x="1207424" y="3172992"/>
+            <a:off x="1207424" y="3435682"/>
             <a:ext cx="197164" cy="197164"/>
           </a:xfrm>
           <a:prstGeom prst="triangle">
@@ -37484,13 +37470,13 @@
       </p:sp>
       <p:sp>
         <p:nvSpPr>
-          <p:cNvPr id="17" name="PDF_BULLET_SPAN_152"/>
+          <p:cNvPr id="17" name="PDF_BULLET_SPAN_146"/>
           <p:cNvSpPr/>
           <p:nvPr/>
         </p:nvSpPr>
         <p:spPr>
           <a:xfrm rot="5400000">
-            <a:off x="1207424" y="4145259"/>
+            <a:off x="1207424" y="4407981"/>
             <a:ext cx="197164" cy="197164"/>
           </a:xfrm>
           <a:prstGeom prst="triangle">
@@ -37610,7 +37596,7 @@
                 </a:solidFill>
                 <a:latin typeface="Latin Modern Sans"/>
               </a:rPr>
-              <a:t>One Invocation, Four Named Data Types</a:t>
+              <a:t>Single-Provider Invocation: Four Named Data Types</a:t>
             </a:r>
           </a:p>
         </p:txBody>

--- a/docs/PAPER/proposal-defense/slides/NDNSF_proposal_hybrid_editable.pptx
+++ b/docs/PAPER/proposal-defense/slides/NDNSF_proposal_hybrid_editable.pptx
@@ -393,7 +393,7 @@
           <a:p>
             <a:r>
               <a:rPr lang="en-US" sz="1200"/>
-              <a:t>KP-ABE encodes an access policy in each entity’s decryption key. [19] NDNSF combines service entitlements in that policy while retaining identity-signing credentials. [28] Challenge checks reuse these permissions for invocation; User permission keys and challenge processing still add cost. This avoids a separate role-based invocation policy in NDNSF. It does not eliminate key updates or prove lower total cost; role-based designs can also reuse credentials.</a:t>
+              <a:t>KP-ABE encodes an access policy in each entity’s decryption key. [19] NDNSF combines service entitlements in that policy while retaining identity-signing credentials. [28] Challenge checks reuse these permissions for invocation; User permission keys and challenge processing still add cost. DNMP [12] expresses command permissions through role keys and a Trust Schema. Roles can cover several permissions. Compare credential, policy and key updates; reuse alone does not prove lower total cost.</a:t>
             </a:r>
             <a:endParaRPr lang="en-US" sz="1200"/>
           </a:p>
@@ -1625,7 +1625,7 @@
           <a:p>
             <a:r>
               <a:rPr lang="en-US" sz="1200"/>
-              <a:t>RQ Required evidence Outcome and cost RQ1 Full authorization alternatives; unauthorized call, challenge/replay and withdrawal cases No unauthorized handler start; discovery delay, key/policy size, status delay and rekey traffic RQ2 One UAV and one DI graph; wrong role/edge; direct/cache parity; cancellation/replacement Correct task completion; validation, transfer and recovery cost RQ3 Matched workload and failure schedules; feasible single-device control; cold/warm state Completion plus latency, redundant work, bytes, uncertainty, and cases with no advantage Planned tests are not completed findings. Record all scheduled runs and failure boundaries.</a:t>
+              <a:t>RQ Required evidence Outcome and cost RQ1 ABE-backed versus DNMP-inspired rules plus encryption; unauthorized call, replay and withdrawal cases No unauthorized handler start; discovery delay, key/policy size, status delay and rekey traffic RQ2 One UAV and one DI graph; wrong role/edge; direct/cache parity; cancellation/replacement Correct task completion; validation, transfer and recovery cost RQ3 Matched workload and failure schedules; feasible single-device control; cold/warm state Completion plus latency, redundant work, bytes, uncertainty, and cases with no advantage Planned tests are not completed findings. Record all scheduled runs and failure boundaries.</a:t>
             </a:r>
             <a:endParaRPr lang="en-US" sz="1200"/>
           </a:p>
@@ -1737,7 +1737,7 @@
           <a:p>
             <a:r>
               <a:rPr lang="en-US" sz="1200"/>
-              <a:t>RQ1 answer: when ABE-encrypted discovery and ABE-backed service authorization justify their management and revocation costs. RQ2 answer: exactly which task-assignment mistakes are rejected and which recovery behavior is supported. RQ3 answer: measured benefits, negative results and deployment limits. Reproducible configurations and evidence linking each conclusion to its tested scope. The outcome is a tested service protocol and an evidence-backed account of when its mechanisms are worth their cost.</a:t>
+              <a:t>RQ1 answer: when ABE-backed authorization is preferable to DNMP-inspired role rules plus encryption, accounting for confidentiality, management and withdrawal costs. RQ2 answer: exactly which task-assignment mistakes are rejected and which recovery behavior is supported. RQ3 answer: measured benefits, negative results and deployment limits. Reproducible configurations and evidence linking each conclusion to its tested scope. The outcome is a tested service protocol and an evidence-backed account of when its mechanisms are worth their cost.</a:t>
             </a:r>
             <a:endParaRPr lang="en-US" sz="1200"/>
           </a:p>
@@ -2073,7 +2073,7 @@
           <a:p>
             <a:r>
               <a:rPr lang="en-US" sz="1200"/>
-              <a:t>NDN building block Remaining application responsibility Named Data and signatures [1] Validate signatures and signing-key relationships under trust rules; check task permissions separately Interest retrieval and caching [1,26] Enforce task identity, dependencies, and deadlines; caching is not persistent storage Dataset synchronization / SVS [2,3] Discover new names, then retrieve Data; define service-message state transitions NAC [4] / enhanced NAC-ABE [19] Use content encryption for read access; separately check service-invocation permissions and state NAC: Name-based Access Control; ABE: attribute-based encryption; SVS: State Vector Sync. NDNSF builds on these mechanisms; it does not invent them.</a:t>
+              <a:t>NDN building block Remaining application responsibility Named Data and signatures [1] Validate signatures under application trust policies, expressible through a Trust Schema [16] Interest retrieval and caching [1,26] Enforce task identity, dependencies, and deadlines; caching is not persistent storage Dataset synchronization / SVS [2,3] Discover new names, then retrieve Data; define service-message state transitions NAC [4] / enhanced NAC-ABE [19] Use content encryption for read access; separately check service-invocation permissions and state NAC: Name-based Access Control; ABE: attribute-based encryption; SVS: State Vector Sync. NDNSF builds on these mechanisms; it does not invent them.</a:t>
             </a:r>
             <a:endParaRPr lang="en-US" sz="1200"/>
           </a:p>
@@ -2241,7 +2241,7 @@
           <a:p>
             <a:r>
               <a:rPr lang="en-US" sz="1200"/>
-              <a:t>Prior work What the comparison must acknowledge NFN [6], NFaaS [7] Named computation and function execution/placement RICE [9], NSC [10] Invocation and security mechanisms; NSC validates signed calls using application trust rules DNMP [12] Role- and command-constrained signing and verification CaSCON [15] Service-composition research; requires a feature-level comparison before claiming a new composition mechanism gRPC [17,27] Complete configurations can include discovery/resolver integration, not only fixed addresses Collaboration research: make runtime assignments constrain intermediate Data use. Discovery and authorization are evaluated separately.</a:t>
+              <a:t>Prior work What the comparison must acknowledge NFN [6], NFaaS [7] Named computation and function execution/placement RICE [9], NSC [10] Invocation mechanisms; NSC checks signed calls using a Trust Schema DNMP [12] Trust Schema constrains roles and measurement commands CaSCON [15] Service-composition research; requires a feature-level comparison before claiming a new composition mechanism gRPC [17,27] Complete configurations can include discovery/resolver integration, not only fixed addresses Collaboration research: make runtime assignments constrain intermediate Data use. Discovery and authorization are evaluated separately.</a:t>
             </a:r>
             <a:endParaRPr lang="en-US" sz="1200"/>
           </a:p>
@@ -7177,7 +7177,7 @@
         </p:nvSpPr>
         <p:spPr>
           <a:xfrm>
-            <a:off x="1618972" y="2204706"/>
+            <a:off x="1618972" y="2023644"/>
             <a:ext cx="11203069" cy="440633"/>
           </a:xfrm>
           <a:prstGeom prst="rect">
@@ -7225,7 +7225,7 @@
         </p:nvSpPr>
         <p:spPr>
           <a:xfrm>
-            <a:off x="1618972" y="2739134"/>
+            <a:off x="1618972" y="2558072"/>
             <a:ext cx="10090610" cy="929891"/>
           </a:xfrm>
           <a:prstGeom prst="rect">
@@ -7282,7 +7282,7 @@
         </p:nvSpPr>
         <p:spPr>
           <a:xfrm>
-            <a:off x="1618972" y="3711401"/>
+            <a:off x="1618972" y="3530339"/>
             <a:ext cx="12209254" cy="929891"/>
           </a:xfrm>
           <a:prstGeom prst="rect">
@@ -7339,8 +7339,8 @@
         </p:nvSpPr>
         <p:spPr>
           <a:xfrm>
-            <a:off x="1143656" y="5305089"/>
-            <a:ext cx="12478059" cy="929891"/>
+            <a:off x="1143656" y="5138827"/>
+            <a:ext cx="12456195" cy="1367730"/>
           </a:xfrm>
           <a:prstGeom prst="rect">
             <a:avLst/>
@@ -7374,7 +7374,7 @@
                 </a:solidFill>
                 <a:latin typeface="Latin Modern Sans"/>
               </a:rPr>
-              <a:t>This avoids a separate role-based invocation policy in NDNSF. It does not eliminate</a:t>
+              <a:t>DNMP [12] expresses command permissions through role keys and a Trust Schema.</a:t>
             </a:r>
             <a:r>
               <a:rPr sz="2710" b="0" i="0">
@@ -7383,7 +7383,16 @@
                 </a:solidFill>
                 <a:latin typeface="Latin Modern Sans"/>
               </a:rPr>
-              <a:t> key updates or prove lower total cost; role-based designs can also reuse credentials.</a:t>
+              <a:t> Roles can cover several permissions. Compare credential, policy and key updates;</a:t>
+            </a:r>
+            <a:r>
+              <a:rPr sz="2710" b="0" i="0">
+                <a:solidFill>
+                  <a:srgbClr val="000000"/>
+                </a:solidFill>
+                <a:latin typeface="Latin Modern Sans"/>
+              </a:rPr>
+              <a:t> reuse alone does not prove lower total cost.</a:t>
             </a:r>
           </a:p>
         </p:txBody>
@@ -7636,7 +7645,7 @@
         </p:nvSpPr>
         <p:spPr>
           <a:xfrm rot="5400000">
-            <a:off x="1207424" y="2290497"/>
+            <a:off x="1207424" y="2109435"/>
             <a:ext cx="197164" cy="197164"/>
           </a:xfrm>
           <a:prstGeom prst="triangle">
@@ -7679,7 +7688,7 @@
         </p:nvSpPr>
         <p:spPr>
           <a:xfrm rot="5400000">
-            <a:off x="1207424" y="2824925"/>
+            <a:off x="1207424" y="2643863"/>
             <a:ext cx="197164" cy="197164"/>
           </a:xfrm>
           <a:prstGeom prst="triangle">
@@ -7722,7 +7731,7 @@
         </p:nvSpPr>
         <p:spPr>
           <a:xfrm rot="5400000">
-            <a:off x="1207424" y="3797192"/>
+            <a:off x="1207424" y="3616130"/>
             <a:ext cx="197164" cy="197164"/>
           </a:xfrm>
           <a:prstGeom prst="triangle">
@@ -10639,7 +10648,7 @@
       </p:sp>
       <p:sp>
         <p:nvSpPr>
-          <p:cNvPr id="14" name="PDF_BULLET_SPAN_288"/>
+          <p:cNvPr id="14" name="PDF_BULLET_SPAN_289"/>
           <p:cNvSpPr/>
           <p:nvPr/>
         </p:nvSpPr>
@@ -10682,7 +10691,7 @@
       </p:sp>
       <p:sp>
         <p:nvSpPr>
-          <p:cNvPr id="15" name="PDF_BULLET_SPAN_291"/>
+          <p:cNvPr id="15" name="PDF_BULLET_SPAN_292"/>
           <p:cNvSpPr/>
           <p:nvPr/>
         </p:nvSpPr>
@@ -10725,7 +10734,7 @@
       </p:sp>
       <p:sp>
         <p:nvSpPr>
-          <p:cNvPr id="16" name="PDF_BULLET_SPAN_293"/>
+          <p:cNvPr id="16" name="PDF_BULLET_SPAN_294"/>
           <p:cNvSpPr/>
           <p:nvPr/>
         </p:nvSpPr>
@@ -10768,7 +10777,7 @@
       </p:sp>
       <p:sp>
         <p:nvSpPr>
-          <p:cNvPr id="17" name="PDF_BULLET_SPAN_296"/>
+          <p:cNvPr id="17" name="PDF_BULLET_SPAN_297"/>
           <p:cNvSpPr/>
           <p:nvPr/>
         </p:nvSpPr>
@@ -11378,7 +11387,7 @@
       </p:sp>
       <p:sp>
         <p:nvSpPr>
-          <p:cNvPr id="13" name="PDF_BULLET_SPAN_307"/>
+          <p:cNvPr id="13" name="PDF_BULLET_SPAN_308"/>
           <p:cNvSpPr/>
           <p:nvPr/>
         </p:nvSpPr>
@@ -11421,7 +11430,7 @@
       </p:sp>
       <p:sp>
         <p:nvSpPr>
-          <p:cNvPr id="14" name="PDF_BULLET_SPAN_310"/>
+          <p:cNvPr id="14" name="PDF_BULLET_SPAN_311"/>
           <p:cNvSpPr/>
           <p:nvPr/>
         </p:nvSpPr>
@@ -11464,7 +11473,7 @@
       </p:sp>
       <p:sp>
         <p:nvSpPr>
-          <p:cNvPr id="15" name="PDF_BULLET_SPAN_313"/>
+          <p:cNvPr id="15" name="PDF_BULLET_SPAN_314"/>
           <p:cNvSpPr/>
           <p:nvPr/>
         </p:nvSpPr>
@@ -12113,7 +12122,7 @@
       </p:sp>
       <p:sp>
         <p:nvSpPr>
-          <p:cNvPr id="14" name="PDF_BULLET_SPAN_325"/>
+          <p:cNvPr id="14" name="PDF_BULLET_SPAN_326"/>
           <p:cNvSpPr/>
           <p:nvPr/>
         </p:nvSpPr>
@@ -12156,7 +12165,7 @@
       </p:sp>
       <p:sp>
         <p:nvSpPr>
-          <p:cNvPr id="15" name="PDF_BULLET_SPAN_327"/>
+          <p:cNvPr id="15" name="PDF_BULLET_SPAN_328"/>
           <p:cNvSpPr/>
           <p:nvPr/>
         </p:nvSpPr>
@@ -12199,7 +12208,7 @@
       </p:sp>
       <p:sp>
         <p:nvSpPr>
-          <p:cNvPr id="16" name="PDF_BULLET_SPAN_330"/>
+          <p:cNvPr id="16" name="PDF_BULLET_SPAN_331"/>
           <p:cNvSpPr/>
           <p:nvPr/>
         </p:nvSpPr>
@@ -12242,7 +12251,7 @@
       </p:sp>
       <p:sp>
         <p:nvSpPr>
-          <p:cNvPr id="17" name="PDF_BULLET_SPAN_333"/>
+          <p:cNvPr id="17" name="PDF_BULLET_SPAN_334"/>
           <p:cNvSpPr/>
           <p:nvPr/>
         </p:nvSpPr>
@@ -17642,7 +17651,7 @@
       </p:sp>
       <p:sp>
         <p:nvSpPr>
-          <p:cNvPr id="14" name="PDF_BULLET_SPAN_445"/>
+          <p:cNvPr id="14" name="PDF_BULLET_SPAN_446"/>
           <p:cNvSpPr/>
           <p:nvPr/>
         </p:nvSpPr>
@@ -17685,7 +17694,7 @@
       </p:sp>
       <p:sp>
         <p:nvSpPr>
-          <p:cNvPr id="15" name="PDF_BULLET_SPAN_447"/>
+          <p:cNvPr id="15" name="PDF_BULLET_SPAN_448"/>
           <p:cNvSpPr/>
           <p:nvPr/>
         </p:nvSpPr>
@@ -17728,7 +17737,7 @@
       </p:sp>
       <p:sp>
         <p:nvSpPr>
-          <p:cNvPr id="16" name="PDF_BULLET_SPAN_450"/>
+          <p:cNvPr id="16" name="PDF_BULLET_SPAN_451"/>
           <p:cNvSpPr/>
           <p:nvPr/>
         </p:nvSpPr>
@@ -17771,7 +17780,7 @@
       </p:sp>
       <p:sp>
         <p:nvSpPr>
-          <p:cNvPr id="17" name="PDF_BULLET_SPAN_453"/>
+          <p:cNvPr id="17" name="PDF_BULLET_SPAN_454"/>
           <p:cNvSpPr/>
           <p:nvPr/>
         </p:nvSpPr>
@@ -18633,7 +18642,7 @@
       </p:sp>
       <p:sp>
         <p:nvSpPr>
-          <p:cNvPr id="18" name="PDF_BULLET_SPAN_472"/>
+          <p:cNvPr id="18" name="PDF_BULLET_SPAN_473"/>
           <p:cNvSpPr/>
           <p:nvPr/>
         </p:nvSpPr>
@@ -18676,7 +18685,7 @@
       </p:sp>
       <p:sp>
         <p:nvSpPr>
-          <p:cNvPr id="19" name="PDF_BULLET_SPAN_475"/>
+          <p:cNvPr id="19" name="PDF_BULLET_SPAN_476"/>
           <p:cNvSpPr/>
           <p:nvPr/>
         </p:nvSpPr>
@@ -18719,7 +18728,7 @@
       </p:sp>
       <p:sp>
         <p:nvSpPr>
-          <p:cNvPr id="20" name="PDF_BULLET_SPAN_478"/>
+          <p:cNvPr id="20" name="PDF_BULLET_SPAN_479"/>
           <p:cNvSpPr/>
           <p:nvPr/>
         </p:nvSpPr>
@@ -19368,7 +19377,7 @@
       </p:sp>
       <p:sp>
         <p:nvSpPr>
-          <p:cNvPr id="14" name="PDF_BULLET_SPAN_488"/>
+          <p:cNvPr id="14" name="PDF_BULLET_SPAN_489"/>
           <p:cNvSpPr/>
           <p:nvPr/>
         </p:nvSpPr>
@@ -19411,7 +19420,7 @@
       </p:sp>
       <p:sp>
         <p:nvSpPr>
-          <p:cNvPr id="15" name="PDF_BULLET_SPAN_491"/>
+          <p:cNvPr id="15" name="PDF_BULLET_SPAN_492"/>
           <p:cNvSpPr/>
           <p:nvPr/>
         </p:nvSpPr>
@@ -19454,7 +19463,7 @@
       </p:sp>
       <p:sp>
         <p:nvSpPr>
-          <p:cNvPr id="16" name="PDF_BULLET_SPAN_494"/>
+          <p:cNvPr id="16" name="PDF_BULLET_SPAN_495"/>
           <p:cNvSpPr/>
           <p:nvPr/>
         </p:nvSpPr>
@@ -19497,7 +19506,7 @@
       </p:sp>
       <p:sp>
         <p:nvSpPr>
-          <p:cNvPr id="17" name="PDF_BULLET_SPAN_496"/>
+          <p:cNvPr id="17" name="PDF_BULLET_SPAN_497"/>
           <p:cNvSpPr/>
           <p:nvPr/>
         </p:nvSpPr>
@@ -20155,7 +20164,7 @@
       </p:sp>
       <p:sp>
         <p:nvSpPr>
-          <p:cNvPr id="14" name="PDF_BULLET_SPAN_507"/>
+          <p:cNvPr id="14" name="PDF_BULLET_SPAN_508"/>
           <p:cNvSpPr/>
           <p:nvPr/>
         </p:nvSpPr>
@@ -20198,7 +20207,7 @@
       </p:sp>
       <p:sp>
         <p:nvSpPr>
-          <p:cNvPr id="15" name="PDF_BULLET_SPAN_510"/>
+          <p:cNvPr id="15" name="PDF_BULLET_SPAN_511"/>
           <p:cNvSpPr/>
           <p:nvPr/>
         </p:nvSpPr>
@@ -20241,7 +20250,7 @@
       </p:sp>
       <p:sp>
         <p:nvSpPr>
-          <p:cNvPr id="16" name="PDF_BULLET_SPAN_513"/>
+          <p:cNvPr id="16" name="PDF_BULLET_SPAN_514"/>
           <p:cNvSpPr/>
           <p:nvPr/>
         </p:nvSpPr>
@@ -20284,7 +20293,7 @@
       </p:sp>
       <p:sp>
         <p:nvSpPr>
-          <p:cNvPr id="17" name="PDF_BULLET_SPAN_516"/>
+          <p:cNvPr id="17" name="PDF_BULLET_SPAN_517"/>
           <p:cNvSpPr/>
           <p:nvPr/>
         </p:nvSpPr>
@@ -25401,7 +25410,7 @@
         <p:spPr>
           <a:xfrm>
             <a:off x="2646188" y="1969156"/>
-            <a:ext cx="4407570" cy="385554"/>
+            <a:ext cx="5139353" cy="385554"/>
           </a:xfrm>
           <a:prstGeom prst="rect">
             <a:avLst/>
@@ -25435,7 +25444,7 @@
                 </a:solidFill>
                 <a:latin typeface="Latin Modern Sans"/>
               </a:rPr>
-              <a:t>Full authorization alternatives;</a:t>
+              <a:t>ABE-backed versus DNMP-inspired</a:t>
             </a:r>
           </a:p>
         </p:txBody>
@@ -25497,7 +25506,7 @@
         <p:spPr>
           <a:xfrm>
             <a:off x="2646187" y="2355484"/>
-            <a:ext cx="5376547" cy="828844"/>
+            <a:ext cx="5054937" cy="385554"/>
           </a:xfrm>
           <a:prstGeom prst="rect">
             <a:avLst/>
@@ -25531,8 +25540,47 @@
                 </a:solidFill>
                 <a:latin typeface="Latin Modern Sans"/>
               </a:rPr>
-              <a:t>unauthorized call, challenge/replay and</a:t>
-            </a:r>
+              <a:t>rules plus encryption; unauthorized</a:t>
+            </a:r>
+          </a:p>
+        </p:txBody>
+      </p:sp>
+      <p:sp>
+        <p:nvSpPr>
+          <p:cNvPr id="11" name="PDF_TEXT_GROUP_432"/>
+          <p:cNvSpPr txBox="1"/>
+          <p:nvPr/>
+        </p:nvSpPr>
+        <p:spPr>
+          <a:xfrm>
+            <a:off x="8280720" y="2355484"/>
+            <a:ext cx="5553511" cy="385554"/>
+          </a:xfrm>
+          <a:prstGeom prst="rect">
+            <a:avLst/>
+          </a:prstGeom>
+          <a:noFill/>
+          <a:ln>
+            <a:noFill/>
+          </a:ln>
+        </p:spPr>
+        <p:txBody>
+          <a:bodyPr wrap="square" anchor="t" lIns="0" rIns="0" tIns="0" bIns="0">
+            <a:noAutofit/>
+          </a:bodyPr>
+          <a:lstStyle/>
+          <a:p>
+            <a:pPr algn="l">
+              <a:lnSpc>
+                <a:spcPct val="100000"/>
+              </a:lnSpc>
+              <a:spcBef>
+                <a:spcPts val="0"/>
+              </a:spcBef>
+              <a:spcAft>
+                <a:spcPts val="0"/>
+              </a:spcAft>
+            </a:pPr>
             <a:r>
               <a:rPr sz="2371" b="0" i="0">
                 <a:solidFill>
@@ -25540,21 +25588,21 @@
                 </a:solidFill>
                 <a:latin typeface="Latin Modern Sans"/>
               </a:rPr>
-              <a:t> withdrawal cases</a:t>
-            </a:r>
-          </a:p>
-        </p:txBody>
-      </p:sp>
-      <p:sp>
-        <p:nvSpPr>
-          <p:cNvPr id="11" name="PDF_TEXT_GROUP_432"/>
-          <p:cNvSpPr txBox="1"/>
-          <p:nvPr/>
-        </p:nvSpPr>
-        <p:spPr>
-          <a:xfrm>
-            <a:off x="8280720" y="2355484"/>
-            <a:ext cx="5270155" cy="828844"/>
+              <a:t>discovery delay, key/policy size, status</a:t>
+            </a:r>
+          </a:p>
+        </p:txBody>
+      </p:sp>
+      <p:sp>
+        <p:nvSpPr>
+          <p:cNvPr id="12" name="PDF_TEXT_GROUP_433"/>
+          <p:cNvSpPr txBox="1"/>
+          <p:nvPr/>
+        </p:nvSpPr>
+        <p:spPr>
+          <a:xfrm>
+            <a:off x="2646187" y="2741812"/>
+            <a:ext cx="4724118" cy="385554"/>
           </a:xfrm>
           <a:prstGeom prst="rect">
             <a:avLst/>
@@ -25588,8 +25636,47 @@
                 </a:solidFill>
                 <a:latin typeface="Latin Modern Sans"/>
               </a:rPr>
-              <a:t>discovery delay, key/policy size, status</a:t>
-            </a:r>
+              <a:t>call, replay and withdrawal cases</a:t>
+            </a:r>
+          </a:p>
+        </p:txBody>
+      </p:sp>
+      <p:sp>
+        <p:nvSpPr>
+          <p:cNvPr id="13" name="PDF_TEXT_GROUP_434"/>
+          <p:cNvSpPr txBox="1"/>
+          <p:nvPr/>
+        </p:nvSpPr>
+        <p:spPr>
+          <a:xfrm>
+            <a:off x="8280720" y="2741812"/>
+            <a:ext cx="3202285" cy="385554"/>
+          </a:xfrm>
+          <a:prstGeom prst="rect">
+            <a:avLst/>
+          </a:prstGeom>
+          <a:noFill/>
+          <a:ln>
+            <a:noFill/>
+          </a:ln>
+        </p:spPr>
+        <p:txBody>
+          <a:bodyPr wrap="square" anchor="t" lIns="0" rIns="0" tIns="0" bIns="0">
+            <a:noAutofit/>
+          </a:bodyPr>
+          <a:lstStyle/>
+          <a:p>
+            <a:pPr algn="l">
+              <a:lnSpc>
+                <a:spcPct val="100000"/>
+              </a:lnSpc>
+              <a:spcBef>
+                <a:spcPts val="0"/>
+              </a:spcBef>
+              <a:spcAft>
+                <a:spcPts val="0"/>
+              </a:spcAft>
+            </a:pPr>
             <a:r>
               <a:rPr sz="2371" b="0" i="0">
                 <a:solidFill>
@@ -25597,14 +25684,14 @@
                 </a:solidFill>
                 <a:latin typeface="Latin Modern Sans"/>
               </a:rPr>
-              <a:t> delay and rekey traffic</a:t>
-            </a:r>
-          </a:p>
-        </p:txBody>
-      </p:sp>
-      <p:sp>
-        <p:nvSpPr>
-          <p:cNvPr id="12" name="PDF_TEXT_GROUP_433"/>
+              <a:t>delay and rekey traffic</a:t>
+            </a:r>
+          </a:p>
+        </p:txBody>
+      </p:sp>
+      <p:sp>
+        <p:nvSpPr>
+          <p:cNvPr id="14" name="PDF_TEXT_GROUP_435"/>
           <p:cNvSpPr txBox="1"/>
           <p:nvPr/>
         </p:nvSpPr>
@@ -25652,7 +25739,7 @@
       </p:sp>
       <p:sp>
         <p:nvSpPr>
-          <p:cNvPr id="13" name="PDF_TEXT_GROUP_434"/>
+          <p:cNvPr id="15" name="PDF_TEXT_GROUP_436"/>
           <p:cNvSpPr txBox="1"/>
           <p:nvPr/>
         </p:nvSpPr>
@@ -25700,7 +25787,7 @@
       </p:sp>
       <p:sp>
         <p:nvSpPr>
-          <p:cNvPr id="14" name="PDF_TEXT_GROUP_435"/>
+          <p:cNvPr id="16" name="PDF_TEXT_GROUP_437"/>
           <p:cNvSpPr txBox="1"/>
           <p:nvPr/>
         </p:nvSpPr>
@@ -25748,7 +25835,7 @@
       </p:sp>
       <p:sp>
         <p:nvSpPr>
-          <p:cNvPr id="15" name="PDF_TEXT_GROUP_436"/>
+          <p:cNvPr id="17" name="PDF_TEXT_GROUP_438"/>
           <p:cNvSpPr txBox="1"/>
           <p:nvPr/>
         </p:nvSpPr>
@@ -25805,7 +25892,7 @@
       </p:sp>
       <p:sp>
         <p:nvSpPr>
-          <p:cNvPr id="16" name="PDF_TEXT_GROUP_437"/>
+          <p:cNvPr id="18" name="PDF_TEXT_GROUP_439"/>
           <p:cNvSpPr txBox="1"/>
           <p:nvPr/>
         </p:nvSpPr>
@@ -25853,7 +25940,7 @@
       </p:sp>
       <p:sp>
         <p:nvSpPr>
-          <p:cNvPr id="17" name="PDF_TEXT_GROUP_438"/>
+          <p:cNvPr id="19" name="PDF_TEXT_GROUP_440"/>
           <p:cNvSpPr txBox="1"/>
           <p:nvPr/>
         </p:nvSpPr>
@@ -25901,7 +25988,7 @@
       </p:sp>
       <p:sp>
         <p:nvSpPr>
-          <p:cNvPr id="18" name="PDF_TEXT_GROUP_439"/>
+          <p:cNvPr id="20" name="PDF_TEXT_GROUP_441"/>
           <p:cNvSpPr txBox="1"/>
           <p:nvPr/>
         </p:nvSpPr>
@@ -25949,7 +26036,7 @@
       </p:sp>
       <p:sp>
         <p:nvSpPr>
-          <p:cNvPr id="19" name="PDF_TEXT_GROUP_440"/>
+          <p:cNvPr id="21" name="PDF_TEXT_GROUP_442"/>
           <p:cNvSpPr txBox="1"/>
           <p:nvPr/>
         </p:nvSpPr>
@@ -25997,7 +26084,7 @@
       </p:sp>
       <p:sp>
         <p:nvSpPr>
-          <p:cNvPr id="20" name="PDF_TEXT_GROUP_441"/>
+          <p:cNvPr id="22" name="PDF_TEXT_GROUP_443"/>
           <p:cNvSpPr txBox="1"/>
           <p:nvPr/>
         </p:nvSpPr>
@@ -26054,7 +26141,7 @@
       </p:sp>
       <p:sp>
         <p:nvSpPr>
-          <p:cNvPr id="21" name="PDF_TEXT_GROUP_442"/>
+          <p:cNvPr id="23" name="PDF_TEXT_GROUP_444"/>
           <p:cNvSpPr txBox="1"/>
           <p:nvPr/>
         </p:nvSpPr>
@@ -26111,7 +26198,7 @@
       </p:sp>
       <p:sp>
         <p:nvSpPr>
-          <p:cNvPr id="22" name="PDF_TEXT_GROUP_443"/>
+          <p:cNvPr id="24" name="PDF_TEXT_GROUP_445"/>
           <p:cNvSpPr txBox="1"/>
           <p:nvPr/>
         </p:nvSpPr>
@@ -26159,7 +26246,7 @@
       </p:sp>
       <p:sp>
         <p:nvSpPr>
-          <p:cNvPr id="23" name="PDF_TEXT_GROUP_444"/>
+          <p:cNvPr id="25" name="PDF_TEXT_GROUP_446"/>
           <p:cNvSpPr txBox="1"/>
           <p:nvPr/>
         </p:nvSpPr>
@@ -26207,7 +26294,7 @@
       </p:sp>
       <p:sp>
         <p:nvSpPr>
-          <p:cNvPr id="24" name="PDF_TEXT_GROUP_445"/>
+          <p:cNvPr id="26" name="PDF_TEXT_GROUP_447"/>
           <p:cNvSpPr txBox="1"/>
           <p:nvPr/>
         </p:nvSpPr>
@@ -26255,7 +26342,7 @@
       </p:sp>
       <p:sp>
         <p:nvSpPr>
-          <p:cNvPr id="25" name="PDF_TEXT_GROUP_446"/>
+          <p:cNvPr id="27" name="PDF_TEXT_GROUP_448"/>
           <p:cNvSpPr txBox="1"/>
           <p:nvPr/>
         </p:nvSpPr>
@@ -26303,7 +26390,7 @@
       </p:sp>
       <p:sp>
         <p:nvSpPr>
-          <p:cNvPr id="26" name="PDF_TEXT_GROUP_447"/>
+          <p:cNvPr id="28" name="PDF_TEXT_GROUP_449"/>
           <p:cNvSpPr txBox="1"/>
           <p:nvPr/>
         </p:nvSpPr>
@@ -26351,7 +26438,7 @@
       </p:sp>
       <p:sp>
         <p:nvSpPr>
-          <p:cNvPr id="27" name="PDF_TEXT_GROUP_448"/>
+          <p:cNvPr id="29" name="PDF_TEXT_GROUP_450"/>
           <p:cNvSpPr txBox="1"/>
           <p:nvPr/>
         </p:nvSpPr>
@@ -26441,7 +26528,7 @@
       </p:pic>
       <p:sp>
         <p:nvSpPr>
-          <p:cNvPr id="3" name="PDF_TEXT_GROUP_449"/>
+          <p:cNvPr id="3" name="PDF_TEXT_GROUP_451"/>
           <p:cNvSpPr txBox="1"/>
           <p:nvPr/>
         </p:nvSpPr>
@@ -26489,7 +26576,7 @@
       </p:sp>
       <p:sp>
         <p:nvSpPr>
-          <p:cNvPr id="4" name="PDF_TEXT_GROUP_450"/>
+          <p:cNvPr id="4" name="PDF_TEXT_GROUP_452"/>
           <p:cNvSpPr txBox="1"/>
           <p:nvPr/>
         </p:nvSpPr>
@@ -26537,7 +26624,7 @@
       </p:sp>
       <p:sp>
         <p:nvSpPr>
-          <p:cNvPr id="5" name="PDF_TEXT_GROUP_451"/>
+          <p:cNvPr id="5" name="PDF_TEXT_GROUP_453"/>
           <p:cNvSpPr txBox="1"/>
           <p:nvPr/>
         </p:nvSpPr>
@@ -26585,7 +26672,7 @@
       </p:sp>
       <p:sp>
         <p:nvSpPr>
-          <p:cNvPr id="6" name="PDF_TEXT_GROUP_452"/>
+          <p:cNvPr id="6" name="PDF_TEXT_GROUP_454"/>
           <p:cNvSpPr txBox="1"/>
           <p:nvPr/>
         </p:nvSpPr>
@@ -26633,7 +26720,7 @@
       </p:sp>
       <p:sp>
         <p:nvSpPr>
-          <p:cNvPr id="7" name="PDF_TEXT_GROUP_453"/>
+          <p:cNvPr id="7" name="PDF_TEXT_GROUP_455"/>
           <p:cNvSpPr txBox="1"/>
           <p:nvPr/>
         </p:nvSpPr>
@@ -26690,7 +26777,7 @@
       </p:sp>
       <p:sp>
         <p:nvSpPr>
-          <p:cNvPr id="8" name="PDF_TEXT_GROUP_454"/>
+          <p:cNvPr id="8" name="PDF_TEXT_GROUP_456"/>
           <p:cNvSpPr txBox="1"/>
           <p:nvPr/>
         </p:nvSpPr>
@@ -26747,7 +26834,7 @@
       </p:sp>
       <p:sp>
         <p:nvSpPr>
-          <p:cNvPr id="9" name="PDF_TEXT_GROUP_455"/>
+          <p:cNvPr id="9" name="PDF_TEXT_GROUP_457"/>
           <p:cNvSpPr txBox="1"/>
           <p:nvPr/>
         </p:nvSpPr>
@@ -26804,7 +26891,7 @@
       </p:sp>
       <p:sp>
         <p:nvSpPr>
-          <p:cNvPr id="10" name="PDF_TEXT_GROUP_456"/>
+          <p:cNvPr id="10" name="PDF_TEXT_GROUP_458"/>
           <p:cNvSpPr txBox="1"/>
           <p:nvPr/>
         </p:nvSpPr>
@@ -26852,7 +26939,7 @@
       </p:sp>
       <p:sp>
         <p:nvSpPr>
-          <p:cNvPr id="11" name="PDF_TEXT_GROUP_457"/>
+          <p:cNvPr id="11" name="PDF_TEXT_GROUP_459"/>
           <p:cNvSpPr txBox="1"/>
           <p:nvPr/>
         </p:nvSpPr>
@@ -26900,7 +26987,7 @@
       </p:sp>
       <p:sp>
         <p:nvSpPr>
-          <p:cNvPr id="12" name="PDF_TEXT_GROUP_458"/>
+          <p:cNvPr id="12" name="PDF_TEXT_GROUP_460"/>
           <p:cNvSpPr txBox="1"/>
           <p:nvPr/>
         </p:nvSpPr>
@@ -26948,7 +27035,7 @@
       </p:sp>
       <p:sp>
         <p:nvSpPr>
-          <p:cNvPr id="13" name="PDF_TEXT_GROUP_459"/>
+          <p:cNvPr id="13" name="PDF_TEXT_GROUP_461"/>
           <p:cNvSpPr txBox="1"/>
           <p:nvPr/>
         </p:nvSpPr>
@@ -27005,7 +27092,7 @@
       </p:sp>
       <p:sp>
         <p:nvSpPr>
-          <p:cNvPr id="14" name="PDF_TEXT_GROUP_460"/>
+          <p:cNvPr id="14" name="PDF_TEXT_GROUP_462"/>
           <p:cNvSpPr txBox="1"/>
           <p:nvPr/>
         </p:nvSpPr>
@@ -27053,7 +27140,7 @@
       </p:sp>
       <p:sp>
         <p:nvSpPr>
-          <p:cNvPr id="15" name="PDF_TEXT_GROUP_461"/>
+          <p:cNvPr id="15" name="PDF_TEXT_GROUP_463"/>
           <p:cNvSpPr txBox="1"/>
           <p:nvPr/>
         </p:nvSpPr>
@@ -27101,7 +27188,7 @@
       </p:sp>
       <p:sp>
         <p:nvSpPr>
-          <p:cNvPr id="16" name="PDF_TEXT_GROUP_462"/>
+          <p:cNvPr id="16" name="PDF_TEXT_GROUP_464"/>
           <p:cNvSpPr txBox="1"/>
           <p:nvPr/>
         </p:nvSpPr>
@@ -27158,7 +27245,7 @@
       </p:sp>
       <p:sp>
         <p:nvSpPr>
-          <p:cNvPr id="17" name="PDF_TEXT_GROUP_463"/>
+          <p:cNvPr id="17" name="PDF_TEXT_GROUP_465"/>
           <p:cNvSpPr txBox="1"/>
           <p:nvPr/>
         </p:nvSpPr>
@@ -27206,7 +27293,7 @@
       </p:sp>
       <p:sp>
         <p:nvSpPr>
-          <p:cNvPr id="18" name="PDF_TEXT_GROUP_464"/>
+          <p:cNvPr id="18" name="PDF_TEXT_GROUP_466"/>
           <p:cNvSpPr txBox="1"/>
           <p:nvPr/>
         </p:nvSpPr>
@@ -27254,7 +27341,7 @@
       </p:sp>
       <p:sp>
         <p:nvSpPr>
-          <p:cNvPr id="19" name="PDF_TEXT_GROUP_465"/>
+          <p:cNvPr id="19" name="PDF_TEXT_GROUP_467"/>
           <p:cNvSpPr txBox="1"/>
           <p:nvPr/>
         </p:nvSpPr>
@@ -27302,7 +27389,7 @@
       </p:sp>
       <p:sp>
         <p:nvSpPr>
-          <p:cNvPr id="20" name="PDF_TEXT_GROUP_466"/>
+          <p:cNvPr id="20" name="PDF_TEXT_GROUP_468"/>
           <p:cNvSpPr txBox="1"/>
           <p:nvPr/>
         </p:nvSpPr>
@@ -27350,7 +27437,7 @@
       </p:sp>
       <p:sp>
         <p:nvSpPr>
-          <p:cNvPr id="21" name="PDF_TEXT_GROUP_467"/>
+          <p:cNvPr id="21" name="PDF_TEXT_GROUP_469"/>
           <p:cNvSpPr txBox="1"/>
           <p:nvPr/>
         </p:nvSpPr>
@@ -27440,7 +27527,7 @@
       </p:pic>
       <p:sp>
         <p:nvSpPr>
-          <p:cNvPr id="3" name="PDF_TEXT_GROUP_468"/>
+          <p:cNvPr id="3" name="PDF_TEXT_GROUP_470"/>
           <p:cNvSpPr txBox="1"/>
           <p:nvPr/>
         </p:nvSpPr>
@@ -27488,14 +27575,14 @@
       </p:sp>
       <p:sp>
         <p:nvSpPr>
-          <p:cNvPr id="4" name="PDF_TEXT_GROUP_469"/>
-          <p:cNvSpPr txBox="1"/>
-          <p:nvPr/>
-        </p:nvSpPr>
-        <p:spPr>
-          <a:xfrm>
-            <a:off x="1618972" y="1953132"/>
-            <a:ext cx="10549005" cy="929891"/>
+          <p:cNvPr id="4" name="PDF_TEXT_GROUP_471"/>
+          <p:cNvSpPr txBox="1"/>
+          <p:nvPr/>
+        </p:nvSpPr>
+        <p:spPr>
+          <a:xfrm>
+            <a:off x="1618972" y="1777984"/>
+            <a:ext cx="11754312" cy="1367762"/>
           </a:xfrm>
           <a:prstGeom prst="rect">
             <a:avLst/>
@@ -27538,7 +27625,7 @@
                 </a:solidFill>
                 <a:latin typeface="Latin Modern Sans"/>
               </a:rPr>
-              <a:t> when ABE-encrypted discovery and ABE-backed service</a:t>
+              <a:t> when ABE-backed authorization is preferable to DNMP-inspired</a:t>
             </a:r>
             <a:r>
               <a:rPr sz="2710" b="0" i="0">
@@ -27547,20 +27634,29 @@
                 </a:solidFill>
                 <a:latin typeface="Latin Modern Sans"/>
               </a:rPr>
-              <a:t> authorization justify their management and revocation costs.</a:t>
-            </a:r>
-          </a:p>
-        </p:txBody>
-      </p:sp>
-      <p:sp>
-        <p:nvSpPr>
-          <p:cNvPr id="5" name="PDF_TEXT_GROUP_470"/>
-          <p:cNvSpPr txBox="1"/>
-          <p:nvPr/>
-        </p:nvSpPr>
-        <p:spPr>
-          <a:xfrm>
-            <a:off x="1618972" y="2925399"/>
+              <a:t> role rules plus encryption, accounting for confidentiality, management and</a:t>
+            </a:r>
+            <a:r>
+              <a:rPr sz="2710" b="0" i="0">
+                <a:solidFill>
+                  <a:srgbClr val="000000"/>
+                </a:solidFill>
+                <a:latin typeface="Latin Modern Sans"/>
+              </a:rPr>
+              <a:t> withdrawal costs.</a:t>
+            </a:r>
+          </a:p>
+        </p:txBody>
+      </p:sp>
+      <p:sp>
+        <p:nvSpPr>
+          <p:cNvPr id="5" name="PDF_TEXT_GROUP_472"/>
+          <p:cNvSpPr txBox="1"/>
+          <p:nvPr/>
+        </p:nvSpPr>
+        <p:spPr>
+          <a:xfrm>
+            <a:off x="1618972" y="3188121"/>
             <a:ext cx="11578665" cy="929891"/>
           </a:xfrm>
           <a:prstGeom prst="rect">
@@ -27620,13 +27716,13 @@
       </p:sp>
       <p:sp>
         <p:nvSpPr>
-          <p:cNvPr id="6" name="PDF_TEXT_GROUP_471"/>
-          <p:cNvSpPr txBox="1"/>
-          <p:nvPr/>
-        </p:nvSpPr>
-        <p:spPr>
-          <a:xfrm>
-            <a:off x="1618972" y="3897666"/>
+          <p:cNvPr id="6" name="PDF_TEXT_GROUP_473"/>
+          <p:cNvSpPr txBox="1"/>
+          <p:nvPr/>
+        </p:nvSpPr>
+        <p:spPr>
+          <a:xfrm>
+            <a:off x="1618972" y="4160388"/>
             <a:ext cx="11646728" cy="440633"/>
           </a:xfrm>
           <a:prstGeom prst="rect">
@@ -27677,13 +27773,13 @@
       </p:sp>
       <p:sp>
         <p:nvSpPr>
-          <p:cNvPr id="7" name="PDF_TEXT_GROUP_472"/>
-          <p:cNvSpPr txBox="1"/>
-          <p:nvPr/>
-        </p:nvSpPr>
-        <p:spPr>
-          <a:xfrm>
-            <a:off x="1618972" y="4432094"/>
+          <p:cNvPr id="7" name="PDF_TEXT_GROUP_474"/>
+          <p:cNvSpPr txBox="1"/>
+          <p:nvPr/>
+        </p:nvSpPr>
+        <p:spPr>
+          <a:xfrm>
+            <a:off x="1618972" y="4694817"/>
             <a:ext cx="11572749" cy="929891"/>
           </a:xfrm>
           <a:prstGeom prst="rect">
@@ -27734,14 +27830,14 @@
       </p:sp>
       <p:sp>
         <p:nvSpPr>
-          <p:cNvPr id="8" name="PDF_TEXT_GROUP_473"/>
-          <p:cNvSpPr txBox="1"/>
-          <p:nvPr/>
-        </p:nvSpPr>
-        <p:spPr>
-          <a:xfrm>
-            <a:off x="1143656" y="5750974"/>
-            <a:ext cx="12248862" cy="929891"/>
+          <p:cNvPr id="8" name="PDF_TEXT_GROUP_475"/>
+          <p:cNvSpPr txBox="1"/>
+          <p:nvPr/>
+        </p:nvSpPr>
+        <p:spPr>
+          <a:xfrm>
+            <a:off x="1143656" y="6013664"/>
+            <a:ext cx="12248862" cy="929924"/>
           </a:xfrm>
           <a:prstGeom prst="rect">
             <a:avLst/>
@@ -27791,7 +27887,7 @@
       </p:sp>
       <p:sp>
         <p:nvSpPr>
-          <p:cNvPr id="9" name="PDF_TEXT_GROUP_474"/>
+          <p:cNvPr id="9" name="PDF_TEXT_GROUP_476"/>
           <p:cNvSpPr txBox="1"/>
           <p:nvPr/>
         </p:nvSpPr>
@@ -27839,7 +27935,7 @@
       </p:sp>
       <p:sp>
         <p:nvSpPr>
-          <p:cNvPr id="10" name="PDF_TEXT_GROUP_475"/>
+          <p:cNvPr id="10" name="PDF_TEXT_GROUP_477"/>
           <p:cNvSpPr txBox="1"/>
           <p:nvPr/>
         </p:nvSpPr>
@@ -27887,7 +27983,7 @@
       </p:sp>
       <p:sp>
         <p:nvSpPr>
-          <p:cNvPr id="11" name="PDF_TEXT_GROUP_476"/>
+          <p:cNvPr id="11" name="PDF_TEXT_GROUP_478"/>
           <p:cNvSpPr txBox="1"/>
           <p:nvPr/>
         </p:nvSpPr>
@@ -27935,7 +28031,7 @@
       </p:sp>
       <p:sp>
         <p:nvSpPr>
-          <p:cNvPr id="12" name="PDF_TEXT_GROUP_477"/>
+          <p:cNvPr id="12" name="PDF_TEXT_GROUP_479"/>
           <p:cNvSpPr txBox="1"/>
           <p:nvPr/>
         </p:nvSpPr>
@@ -27983,7 +28079,7 @@
       </p:sp>
       <p:sp>
         <p:nvSpPr>
-          <p:cNvPr id="13" name="PDF_TEXT_GROUP_478"/>
+          <p:cNvPr id="13" name="PDF_TEXT_GROUP_480"/>
           <p:cNvSpPr txBox="1"/>
           <p:nvPr/>
         </p:nvSpPr>
@@ -28031,13 +28127,13 @@
       </p:sp>
       <p:sp>
         <p:nvSpPr>
-          <p:cNvPr id="14" name="PDF_BULLET_SPAN_681"/>
+          <p:cNvPr id="14" name="PDF_BULLET_SPAN_682"/>
           <p:cNvSpPr/>
           <p:nvPr/>
         </p:nvSpPr>
         <p:spPr>
           <a:xfrm rot="5400000">
-            <a:off x="1207424" y="2038923"/>
+            <a:off x="1207424" y="1863775"/>
             <a:ext cx="197164" cy="197164"/>
           </a:xfrm>
           <a:prstGeom prst="triangle">
@@ -28074,13 +28170,13 @@
       </p:sp>
       <p:sp>
         <p:nvSpPr>
-          <p:cNvPr id="15" name="PDF_BULLET_SPAN_685"/>
+          <p:cNvPr id="15" name="PDF_BULLET_SPAN_687"/>
           <p:cNvSpPr/>
           <p:nvPr/>
         </p:nvSpPr>
         <p:spPr>
           <a:xfrm rot="5400000">
-            <a:off x="1207424" y="3011190"/>
+            <a:off x="1207424" y="3273912"/>
             <a:ext cx="197164" cy="197164"/>
           </a:xfrm>
           <a:prstGeom prst="triangle">
@@ -28117,13 +28213,13 @@
       </p:sp>
       <p:sp>
         <p:nvSpPr>
-          <p:cNvPr id="16" name="PDF_BULLET_SPAN_689"/>
+          <p:cNvPr id="16" name="PDF_BULLET_SPAN_691"/>
           <p:cNvSpPr/>
           <p:nvPr/>
         </p:nvSpPr>
         <p:spPr>
           <a:xfrm rot="5400000">
-            <a:off x="1207424" y="3983457"/>
+            <a:off x="1207424" y="4246179"/>
             <a:ext cx="197164" cy="197164"/>
           </a:xfrm>
           <a:prstGeom prst="triangle">
@@ -28160,13 +28256,13 @@
       </p:sp>
       <p:sp>
         <p:nvSpPr>
-          <p:cNvPr id="17" name="PDF_BULLET_SPAN_692"/>
+          <p:cNvPr id="17" name="PDF_BULLET_SPAN_694"/>
           <p:cNvSpPr/>
           <p:nvPr/>
         </p:nvSpPr>
         <p:spPr>
           <a:xfrm rot="5400000">
-            <a:off x="1207424" y="4517885"/>
+            <a:off x="1207424" y="4780608"/>
             <a:ext cx="197164" cy="197164"/>
           </a:xfrm>
           <a:prstGeom prst="triangle">
@@ -28245,7 +28341,7 @@
       </p:pic>
       <p:sp>
         <p:nvSpPr>
-          <p:cNvPr id="3" name="PDF_TEXT_GROUP_479"/>
+          <p:cNvPr id="3" name="PDF_TEXT_GROUP_481"/>
           <p:cNvSpPr txBox="1"/>
           <p:nvPr/>
         </p:nvSpPr>
@@ -28293,7 +28389,7 @@
       </p:sp>
       <p:sp>
         <p:nvSpPr>
-          <p:cNvPr id="4" name="PDF_TEXT_GROUP_480"/>
+          <p:cNvPr id="4" name="PDF_TEXT_GROUP_482"/>
           <p:cNvSpPr txBox="1"/>
           <p:nvPr/>
         </p:nvSpPr>
@@ -28350,7 +28446,7 @@
       </p:sp>
       <p:sp>
         <p:nvSpPr>
-          <p:cNvPr id="5" name="PDF_TEXT_GROUP_481"/>
+          <p:cNvPr id="5" name="PDF_TEXT_GROUP_483"/>
           <p:cNvSpPr txBox="1"/>
           <p:nvPr/>
         </p:nvSpPr>
@@ -28407,7 +28503,7 @@
       </p:sp>
       <p:sp>
         <p:nvSpPr>
-          <p:cNvPr id="6" name="PDF_TEXT_GROUP_482"/>
+          <p:cNvPr id="6" name="PDF_TEXT_GROUP_484"/>
           <p:cNvSpPr txBox="1"/>
           <p:nvPr/>
         </p:nvSpPr>
@@ -28473,7 +28569,7 @@
       </p:sp>
       <p:sp>
         <p:nvSpPr>
-          <p:cNvPr id="7" name="PDF_TEXT_GROUP_483"/>
+          <p:cNvPr id="7" name="PDF_TEXT_GROUP_485"/>
           <p:cNvSpPr txBox="1"/>
           <p:nvPr/>
         </p:nvSpPr>
@@ -28530,7 +28626,7 @@
       </p:sp>
       <p:sp>
         <p:nvSpPr>
-          <p:cNvPr id="8" name="PDF_TEXT_GROUP_484"/>
+          <p:cNvPr id="8" name="PDF_TEXT_GROUP_486"/>
           <p:cNvSpPr txBox="1"/>
           <p:nvPr/>
         </p:nvSpPr>
@@ -28587,7 +28683,7 @@
       </p:sp>
       <p:sp>
         <p:nvSpPr>
-          <p:cNvPr id="9" name="PDF_TEXT_GROUP_485"/>
+          <p:cNvPr id="9" name="PDF_TEXT_GROUP_487"/>
           <p:cNvSpPr txBox="1"/>
           <p:nvPr/>
         </p:nvSpPr>
@@ -28635,7 +28731,7 @@
       </p:sp>
       <p:sp>
         <p:nvSpPr>
-          <p:cNvPr id="10" name="PDF_TEXT_GROUP_486"/>
+          <p:cNvPr id="10" name="PDF_TEXT_GROUP_488"/>
           <p:cNvSpPr txBox="1"/>
           <p:nvPr/>
         </p:nvSpPr>
@@ -28683,7 +28779,7 @@
       </p:sp>
       <p:sp>
         <p:nvSpPr>
-          <p:cNvPr id="11" name="PDF_TEXT_GROUP_487"/>
+          <p:cNvPr id="11" name="PDF_TEXT_GROUP_489"/>
           <p:cNvSpPr txBox="1"/>
           <p:nvPr/>
         </p:nvSpPr>
@@ -28731,7 +28827,7 @@
       </p:sp>
       <p:sp>
         <p:nvSpPr>
-          <p:cNvPr id="12" name="PDF_TEXT_GROUP_488"/>
+          <p:cNvPr id="12" name="PDF_TEXT_GROUP_490"/>
           <p:cNvSpPr txBox="1"/>
           <p:nvPr/>
         </p:nvSpPr>
@@ -28779,7 +28875,7 @@
       </p:sp>
       <p:sp>
         <p:nvSpPr>
-          <p:cNvPr id="13" name="PDF_TEXT_GROUP_489"/>
+          <p:cNvPr id="13" name="PDF_TEXT_GROUP_491"/>
           <p:cNvSpPr txBox="1"/>
           <p:nvPr/>
         </p:nvSpPr>
@@ -28869,7 +28965,7 @@
       </p:pic>
       <p:sp>
         <p:nvSpPr>
-          <p:cNvPr id="3" name="PDF_TEXT_GROUP_490"/>
+          <p:cNvPr id="3" name="PDF_TEXT_GROUP_492"/>
           <p:cNvSpPr txBox="1"/>
           <p:nvPr/>
         </p:nvSpPr>
@@ -28917,7 +29013,7 @@
       </p:sp>
       <p:sp>
         <p:nvSpPr>
-          <p:cNvPr id="4" name="PDF_TEXT_GROUP_491"/>
+          <p:cNvPr id="4" name="PDF_TEXT_GROUP_493"/>
           <p:cNvSpPr txBox="1"/>
           <p:nvPr/>
         </p:nvSpPr>
@@ -28965,7 +29061,7 @@
       </p:sp>
       <p:sp>
         <p:nvSpPr>
-          <p:cNvPr id="5" name="PDF_TEXT_GROUP_492"/>
+          <p:cNvPr id="5" name="PDF_TEXT_GROUP_494"/>
           <p:cNvSpPr txBox="1"/>
           <p:nvPr/>
         </p:nvSpPr>
@@ -29013,7 +29109,7 @@
       </p:sp>
       <p:sp>
         <p:nvSpPr>
-          <p:cNvPr id="6" name="PDF_TEXT_GROUP_493"/>
+          <p:cNvPr id="6" name="PDF_TEXT_GROUP_495"/>
           <p:cNvSpPr txBox="1"/>
           <p:nvPr/>
         </p:nvSpPr>
@@ -29061,7 +29157,7 @@
       </p:sp>
       <p:sp>
         <p:nvSpPr>
-          <p:cNvPr id="7" name="PDF_TEXT_GROUP_494"/>
+          <p:cNvPr id="7" name="PDF_TEXT_GROUP_496"/>
           <p:cNvSpPr txBox="1"/>
           <p:nvPr/>
         </p:nvSpPr>
@@ -29109,7 +29205,7 @@
       </p:sp>
       <p:sp>
         <p:nvSpPr>
-          <p:cNvPr id="8" name="PDF_TEXT_GROUP_495"/>
+          <p:cNvPr id="8" name="PDF_TEXT_GROUP_497"/>
           <p:cNvSpPr txBox="1"/>
           <p:nvPr/>
         </p:nvSpPr>
@@ -29157,7 +29253,7 @@
       </p:sp>
       <p:sp>
         <p:nvSpPr>
-          <p:cNvPr id="9" name="PDF_TEXT_GROUP_496"/>
+          <p:cNvPr id="9" name="PDF_TEXT_GROUP_498"/>
           <p:cNvSpPr txBox="1"/>
           <p:nvPr/>
         </p:nvSpPr>
@@ -29205,7 +29301,7 @@
       </p:sp>
       <p:sp>
         <p:nvSpPr>
-          <p:cNvPr id="10" name="PDF_TEXT_GROUP_497"/>
+          <p:cNvPr id="10" name="PDF_TEXT_GROUP_499"/>
           <p:cNvSpPr txBox="1"/>
           <p:nvPr/>
         </p:nvSpPr>
@@ -29253,7 +29349,7 @@
       </p:sp>
       <p:sp>
         <p:nvSpPr>
-          <p:cNvPr id="11" name="PDF_TEXT_GROUP_498"/>
+          <p:cNvPr id="11" name="PDF_TEXT_GROUP_500"/>
           <p:cNvSpPr txBox="1"/>
           <p:nvPr/>
         </p:nvSpPr>
@@ -29301,7 +29397,7 @@
       </p:sp>
       <p:sp>
         <p:nvSpPr>
-          <p:cNvPr id="12" name="PDF_TEXT_GROUP_499"/>
+          <p:cNvPr id="12" name="PDF_TEXT_GROUP_501"/>
           <p:cNvSpPr txBox="1"/>
           <p:nvPr/>
         </p:nvSpPr>
@@ -29358,7 +29454,7 @@
       </p:sp>
       <p:sp>
         <p:nvSpPr>
-          <p:cNvPr id="13" name="PDF_TEXT_GROUP_500"/>
+          <p:cNvPr id="13" name="PDF_TEXT_GROUP_502"/>
           <p:cNvSpPr txBox="1"/>
           <p:nvPr/>
         </p:nvSpPr>
@@ -29406,7 +29502,7 @@
       </p:sp>
       <p:sp>
         <p:nvSpPr>
-          <p:cNvPr id="14" name="PDF_TEXT_GROUP_501"/>
+          <p:cNvPr id="14" name="PDF_TEXT_GROUP_503"/>
           <p:cNvSpPr txBox="1"/>
           <p:nvPr/>
         </p:nvSpPr>
@@ -29454,7 +29550,7 @@
       </p:sp>
       <p:sp>
         <p:nvSpPr>
-          <p:cNvPr id="15" name="PDF_TEXT_GROUP_502"/>
+          <p:cNvPr id="15" name="PDF_TEXT_GROUP_504"/>
           <p:cNvSpPr txBox="1"/>
           <p:nvPr/>
         </p:nvSpPr>
@@ -29502,7 +29598,7 @@
       </p:sp>
       <p:sp>
         <p:nvSpPr>
-          <p:cNvPr id="16" name="PDF_TEXT_GROUP_503"/>
+          <p:cNvPr id="16" name="PDF_TEXT_GROUP_505"/>
           <p:cNvSpPr txBox="1"/>
           <p:nvPr/>
         </p:nvSpPr>
@@ -29550,7 +29646,7 @@
       </p:sp>
       <p:sp>
         <p:nvSpPr>
-          <p:cNvPr id="17" name="PDF_TEXT_GROUP_504"/>
+          <p:cNvPr id="17" name="PDF_TEXT_GROUP_506"/>
           <p:cNvSpPr txBox="1"/>
           <p:nvPr/>
         </p:nvSpPr>
@@ -29640,7 +29736,7 @@
       </p:pic>
       <p:sp>
         <p:nvSpPr>
-          <p:cNvPr id="3" name="PDF_TEXT_GROUP_505"/>
+          <p:cNvPr id="3" name="PDF_TEXT_GROUP_507"/>
           <p:cNvSpPr txBox="1"/>
           <p:nvPr/>
         </p:nvSpPr>
@@ -29688,7 +29784,7 @@
       </p:sp>
       <p:sp>
         <p:nvSpPr>
-          <p:cNvPr id="4" name="PDF_TEXT_GROUP_506"/>
+          <p:cNvPr id="4" name="PDF_TEXT_GROUP_508"/>
           <p:cNvSpPr txBox="1"/>
           <p:nvPr/>
         </p:nvSpPr>
@@ -29736,7 +29832,7 @@
       </p:sp>
       <p:sp>
         <p:nvSpPr>
-          <p:cNvPr id="5" name="PDF_TEXT_GROUP_507"/>
+          <p:cNvPr id="5" name="PDF_TEXT_GROUP_509"/>
           <p:cNvSpPr txBox="1"/>
           <p:nvPr/>
         </p:nvSpPr>
@@ -29784,7 +29880,7 @@
       </p:sp>
       <p:sp>
         <p:nvSpPr>
-          <p:cNvPr id="6" name="PDF_TEXT_GROUP_508"/>
+          <p:cNvPr id="6" name="PDF_TEXT_GROUP_510"/>
           <p:cNvSpPr txBox="1"/>
           <p:nvPr/>
         </p:nvSpPr>
@@ -29832,7 +29928,7 @@
       </p:sp>
       <p:sp>
         <p:nvSpPr>
-          <p:cNvPr id="7" name="PDF_TEXT_GROUP_509"/>
+          <p:cNvPr id="7" name="PDF_TEXT_GROUP_511"/>
           <p:cNvSpPr txBox="1"/>
           <p:nvPr/>
         </p:nvSpPr>
@@ -29880,7 +29976,7 @@
       </p:sp>
       <p:sp>
         <p:nvSpPr>
-          <p:cNvPr id="8" name="PDF_TEXT_GROUP_510"/>
+          <p:cNvPr id="8" name="PDF_TEXT_GROUP_512"/>
           <p:cNvSpPr txBox="1"/>
           <p:nvPr/>
         </p:nvSpPr>
@@ -29928,7 +30024,7 @@
       </p:sp>
       <p:sp>
         <p:nvSpPr>
-          <p:cNvPr id="9" name="PDF_TEXT_GROUP_511"/>
+          <p:cNvPr id="9" name="PDF_TEXT_GROUP_513"/>
           <p:cNvSpPr txBox="1"/>
           <p:nvPr/>
         </p:nvSpPr>
@@ -29976,7 +30072,7 @@
       </p:sp>
       <p:sp>
         <p:nvSpPr>
-          <p:cNvPr id="10" name="PDF_TEXT_GROUP_512"/>
+          <p:cNvPr id="10" name="PDF_TEXT_GROUP_514"/>
           <p:cNvSpPr txBox="1"/>
           <p:nvPr/>
         </p:nvSpPr>
@@ -30024,7 +30120,7 @@
       </p:sp>
       <p:sp>
         <p:nvSpPr>
-          <p:cNvPr id="11" name="PDF_TEXT_GROUP_513"/>
+          <p:cNvPr id="11" name="PDF_TEXT_GROUP_515"/>
           <p:cNvSpPr txBox="1"/>
           <p:nvPr/>
         </p:nvSpPr>
@@ -30072,7 +30168,7 @@
       </p:sp>
       <p:sp>
         <p:nvSpPr>
-          <p:cNvPr id="12" name="PDF_TEXT_GROUP_514"/>
+          <p:cNvPr id="12" name="PDF_TEXT_GROUP_516"/>
           <p:cNvSpPr txBox="1"/>
           <p:nvPr/>
         </p:nvSpPr>
@@ -30129,7 +30225,7 @@
       </p:sp>
       <p:sp>
         <p:nvSpPr>
-          <p:cNvPr id="13" name="PDF_TEXT_GROUP_515"/>
+          <p:cNvPr id="13" name="PDF_TEXT_GROUP_517"/>
           <p:cNvSpPr txBox="1"/>
           <p:nvPr/>
         </p:nvSpPr>
@@ -30177,7 +30273,7 @@
       </p:sp>
       <p:sp>
         <p:nvSpPr>
-          <p:cNvPr id="14" name="PDF_TEXT_GROUP_516"/>
+          <p:cNvPr id="14" name="PDF_TEXT_GROUP_518"/>
           <p:cNvSpPr txBox="1"/>
           <p:nvPr/>
         </p:nvSpPr>
@@ -30225,7 +30321,7 @@
       </p:sp>
       <p:sp>
         <p:nvSpPr>
-          <p:cNvPr id="15" name="PDF_TEXT_GROUP_517"/>
+          <p:cNvPr id="15" name="PDF_TEXT_GROUP_519"/>
           <p:cNvSpPr txBox="1"/>
           <p:nvPr/>
         </p:nvSpPr>
@@ -30273,7 +30369,7 @@
       </p:sp>
       <p:sp>
         <p:nvSpPr>
-          <p:cNvPr id="16" name="PDF_TEXT_GROUP_518"/>
+          <p:cNvPr id="16" name="PDF_TEXT_GROUP_520"/>
           <p:cNvSpPr txBox="1"/>
           <p:nvPr/>
         </p:nvSpPr>
@@ -30321,7 +30417,7 @@
       </p:sp>
       <p:sp>
         <p:nvSpPr>
-          <p:cNvPr id="17" name="PDF_TEXT_GROUP_519"/>
+          <p:cNvPr id="17" name="PDF_TEXT_GROUP_521"/>
           <p:cNvSpPr txBox="1"/>
           <p:nvPr/>
         </p:nvSpPr>
@@ -30369,7 +30465,7 @@
       </p:sp>
       <p:sp>
         <p:nvSpPr>
-          <p:cNvPr id="18" name="PDF_TEXT_GROUP_520"/>
+          <p:cNvPr id="18" name="PDF_TEXT_GROUP_522"/>
           <p:cNvSpPr txBox="1"/>
           <p:nvPr/>
         </p:nvSpPr>
@@ -30417,7 +30513,7 @@
       </p:sp>
       <p:sp>
         <p:nvSpPr>
-          <p:cNvPr id="19" name="PDF_TEXT_GROUP_521"/>
+          <p:cNvPr id="19" name="PDF_TEXT_GROUP_523"/>
           <p:cNvSpPr txBox="1"/>
           <p:nvPr/>
         </p:nvSpPr>
@@ -30507,7 +30603,7 @@
       </p:pic>
       <p:sp>
         <p:nvSpPr>
-          <p:cNvPr id="3" name="PDF_TEXT_GROUP_522"/>
+          <p:cNvPr id="3" name="PDF_TEXT_GROUP_524"/>
           <p:cNvSpPr txBox="1"/>
           <p:nvPr/>
         </p:nvSpPr>
@@ -30555,7 +30651,7 @@
       </p:sp>
       <p:sp>
         <p:nvSpPr>
-          <p:cNvPr id="4" name="PDF_TEXT_GROUP_523"/>
+          <p:cNvPr id="4" name="PDF_TEXT_GROUP_525"/>
           <p:cNvSpPr txBox="1"/>
           <p:nvPr/>
         </p:nvSpPr>
@@ -30612,7 +30708,7 @@
       </p:sp>
       <p:sp>
         <p:nvSpPr>
-          <p:cNvPr id="5" name="PDF_TEXT_GROUP_524"/>
+          <p:cNvPr id="5" name="PDF_TEXT_GROUP_526"/>
           <p:cNvSpPr txBox="1"/>
           <p:nvPr/>
         </p:nvSpPr>
@@ -30669,7 +30765,7 @@
       </p:sp>
       <p:sp>
         <p:nvSpPr>
-          <p:cNvPr id="6" name="PDF_TEXT_GROUP_525"/>
+          <p:cNvPr id="6" name="PDF_TEXT_GROUP_527"/>
           <p:cNvSpPr txBox="1"/>
           <p:nvPr/>
         </p:nvSpPr>
@@ -30726,7 +30822,7 @@
       </p:sp>
       <p:sp>
         <p:nvSpPr>
-          <p:cNvPr id="7" name="PDF_TEXT_GROUP_526"/>
+          <p:cNvPr id="7" name="PDF_TEXT_GROUP_528"/>
           <p:cNvSpPr txBox="1"/>
           <p:nvPr/>
         </p:nvSpPr>
@@ -30783,7 +30879,7 @@
       </p:sp>
       <p:sp>
         <p:nvSpPr>
-          <p:cNvPr id="8" name="PDF_TEXT_GROUP_527"/>
+          <p:cNvPr id="8" name="PDF_TEXT_GROUP_529"/>
           <p:cNvSpPr txBox="1"/>
           <p:nvPr/>
         </p:nvSpPr>
@@ -30840,7 +30936,7 @@
       </p:sp>
       <p:sp>
         <p:nvSpPr>
-          <p:cNvPr id="9" name="PDF_TEXT_GROUP_528"/>
+          <p:cNvPr id="9" name="PDF_TEXT_GROUP_530"/>
           <p:cNvSpPr txBox="1"/>
           <p:nvPr/>
         </p:nvSpPr>
@@ -30888,7 +30984,7 @@
       </p:sp>
       <p:sp>
         <p:nvSpPr>
-          <p:cNvPr id="10" name="PDF_TEXT_GROUP_529"/>
+          <p:cNvPr id="10" name="PDF_TEXT_GROUP_531"/>
           <p:cNvSpPr txBox="1"/>
           <p:nvPr/>
         </p:nvSpPr>
@@ -30945,7 +31041,7 @@
       </p:sp>
       <p:sp>
         <p:nvSpPr>
-          <p:cNvPr id="11" name="PDF_TEXT_GROUP_530"/>
+          <p:cNvPr id="11" name="PDF_TEXT_GROUP_532"/>
           <p:cNvSpPr txBox="1"/>
           <p:nvPr/>
         </p:nvSpPr>
@@ -31002,7 +31098,7 @@
       </p:sp>
       <p:sp>
         <p:nvSpPr>
-          <p:cNvPr id="12" name="PDF_TEXT_GROUP_531"/>
+          <p:cNvPr id="12" name="PDF_TEXT_GROUP_533"/>
           <p:cNvSpPr txBox="1"/>
           <p:nvPr/>
         </p:nvSpPr>
@@ -31050,7 +31146,7 @@
       </p:sp>
       <p:sp>
         <p:nvSpPr>
-          <p:cNvPr id="13" name="PDF_TEXT_GROUP_532"/>
+          <p:cNvPr id="13" name="PDF_TEXT_GROUP_534"/>
           <p:cNvSpPr txBox="1"/>
           <p:nvPr/>
         </p:nvSpPr>
@@ -31107,7 +31203,7 @@
       </p:sp>
       <p:sp>
         <p:nvSpPr>
-          <p:cNvPr id="14" name="PDF_TEXT_GROUP_533"/>
+          <p:cNvPr id="14" name="PDF_TEXT_GROUP_535"/>
           <p:cNvSpPr txBox="1"/>
           <p:nvPr/>
         </p:nvSpPr>
@@ -31155,7 +31251,7 @@
       </p:sp>
       <p:sp>
         <p:nvSpPr>
-          <p:cNvPr id="15" name="PDF_TEXT_GROUP_534"/>
+          <p:cNvPr id="15" name="PDF_TEXT_GROUP_536"/>
           <p:cNvSpPr txBox="1"/>
           <p:nvPr/>
         </p:nvSpPr>
@@ -31203,7 +31299,7 @@
       </p:sp>
       <p:sp>
         <p:nvSpPr>
-          <p:cNvPr id="16" name="PDF_TEXT_GROUP_535"/>
+          <p:cNvPr id="16" name="PDF_TEXT_GROUP_537"/>
           <p:cNvSpPr txBox="1"/>
           <p:nvPr/>
         </p:nvSpPr>
@@ -31251,7 +31347,7 @@
       </p:sp>
       <p:sp>
         <p:nvSpPr>
-          <p:cNvPr id="17" name="PDF_TEXT_GROUP_536"/>
+          <p:cNvPr id="17" name="PDF_TEXT_GROUP_538"/>
           <p:cNvSpPr txBox="1"/>
           <p:nvPr/>
         </p:nvSpPr>
@@ -31299,7 +31395,7 @@
       </p:sp>
       <p:sp>
         <p:nvSpPr>
-          <p:cNvPr id="18" name="PDF_TEXT_GROUP_537"/>
+          <p:cNvPr id="18" name="PDF_TEXT_GROUP_539"/>
           <p:cNvSpPr txBox="1"/>
           <p:nvPr/>
         </p:nvSpPr>
@@ -31347,7 +31443,7 @@
       </p:sp>
       <p:sp>
         <p:nvSpPr>
-          <p:cNvPr id="19" name="PDF_TEXT_GROUP_538"/>
+          <p:cNvPr id="19" name="PDF_TEXT_GROUP_540"/>
           <p:cNvSpPr txBox="1"/>
           <p:nvPr/>
         </p:nvSpPr>
@@ -31437,7 +31533,7 @@
       </p:pic>
       <p:sp>
         <p:nvSpPr>
-          <p:cNvPr id="3" name="PDF_TEXT_GROUP_539"/>
+          <p:cNvPr id="3" name="PDF_TEXT_GROUP_541"/>
           <p:cNvSpPr txBox="1"/>
           <p:nvPr/>
         </p:nvSpPr>
@@ -31485,7 +31581,7 @@
       </p:sp>
       <p:sp>
         <p:nvSpPr>
-          <p:cNvPr id="4" name="PDF_TEXT_GROUP_540"/>
+          <p:cNvPr id="4" name="PDF_TEXT_GROUP_542"/>
           <p:cNvSpPr txBox="1"/>
           <p:nvPr/>
         </p:nvSpPr>
@@ -31542,7 +31638,7 @@
       </p:sp>
       <p:sp>
         <p:nvSpPr>
-          <p:cNvPr id="5" name="PDF_TEXT_GROUP_541"/>
+          <p:cNvPr id="5" name="PDF_TEXT_GROUP_543"/>
           <p:cNvSpPr txBox="1"/>
           <p:nvPr/>
         </p:nvSpPr>
@@ -31599,7 +31695,7 @@
       </p:sp>
       <p:sp>
         <p:nvSpPr>
-          <p:cNvPr id="6" name="PDF_TEXT_GROUP_542"/>
+          <p:cNvPr id="6" name="PDF_TEXT_GROUP_544"/>
           <p:cNvSpPr txBox="1"/>
           <p:nvPr/>
         </p:nvSpPr>
@@ -31656,7 +31752,7 @@
       </p:sp>
       <p:sp>
         <p:nvSpPr>
-          <p:cNvPr id="7" name="PDF_TEXT_GROUP_543"/>
+          <p:cNvPr id="7" name="PDF_TEXT_GROUP_545"/>
           <p:cNvSpPr txBox="1"/>
           <p:nvPr/>
         </p:nvSpPr>
@@ -31713,7 +31809,7 @@
       </p:sp>
       <p:sp>
         <p:nvSpPr>
-          <p:cNvPr id="8" name="PDF_TEXT_GROUP_544"/>
+          <p:cNvPr id="8" name="PDF_TEXT_GROUP_546"/>
           <p:cNvSpPr txBox="1"/>
           <p:nvPr/>
         </p:nvSpPr>
@@ -31761,7 +31857,7 @@
       </p:sp>
       <p:sp>
         <p:nvSpPr>
-          <p:cNvPr id="9" name="PDF_TEXT_GROUP_545"/>
+          <p:cNvPr id="9" name="PDF_TEXT_GROUP_547"/>
           <p:cNvSpPr txBox="1"/>
           <p:nvPr/>
         </p:nvSpPr>
@@ -31818,7 +31914,7 @@
       </p:sp>
       <p:sp>
         <p:nvSpPr>
-          <p:cNvPr id="10" name="PDF_TEXT_GROUP_546"/>
+          <p:cNvPr id="10" name="PDF_TEXT_GROUP_548"/>
           <p:cNvSpPr txBox="1"/>
           <p:nvPr/>
         </p:nvSpPr>
@@ -31866,7 +31962,7 @@
       </p:sp>
       <p:sp>
         <p:nvSpPr>
-          <p:cNvPr id="11" name="PDF_TEXT_GROUP_547"/>
+          <p:cNvPr id="11" name="PDF_TEXT_GROUP_549"/>
           <p:cNvSpPr txBox="1"/>
           <p:nvPr/>
         </p:nvSpPr>
@@ -31923,7 +32019,7 @@
       </p:sp>
       <p:sp>
         <p:nvSpPr>
-          <p:cNvPr id="12" name="PDF_TEXT_GROUP_548"/>
+          <p:cNvPr id="12" name="PDF_TEXT_GROUP_550"/>
           <p:cNvSpPr txBox="1"/>
           <p:nvPr/>
         </p:nvSpPr>
@@ -31980,7 +32076,7 @@
       </p:sp>
       <p:sp>
         <p:nvSpPr>
-          <p:cNvPr id="13" name="PDF_TEXT_GROUP_549"/>
+          <p:cNvPr id="13" name="PDF_TEXT_GROUP_551"/>
           <p:cNvSpPr txBox="1"/>
           <p:nvPr/>
         </p:nvSpPr>
@@ -32028,7 +32124,7 @@
       </p:sp>
       <p:sp>
         <p:nvSpPr>
-          <p:cNvPr id="14" name="PDF_TEXT_GROUP_550"/>
+          <p:cNvPr id="14" name="PDF_TEXT_GROUP_552"/>
           <p:cNvSpPr txBox="1"/>
           <p:nvPr/>
         </p:nvSpPr>
@@ -32076,7 +32172,7 @@
       </p:sp>
       <p:sp>
         <p:nvSpPr>
-          <p:cNvPr id="15" name="PDF_TEXT_GROUP_551"/>
+          <p:cNvPr id="15" name="PDF_TEXT_GROUP_553"/>
           <p:cNvSpPr txBox="1"/>
           <p:nvPr/>
         </p:nvSpPr>
@@ -32124,7 +32220,7 @@
       </p:sp>
       <p:sp>
         <p:nvSpPr>
-          <p:cNvPr id="16" name="PDF_TEXT_GROUP_552"/>
+          <p:cNvPr id="16" name="PDF_TEXT_GROUP_554"/>
           <p:cNvSpPr txBox="1"/>
           <p:nvPr/>
         </p:nvSpPr>
@@ -32172,7 +32268,7 @@
       </p:sp>
       <p:sp>
         <p:nvSpPr>
-          <p:cNvPr id="17" name="PDF_TEXT_GROUP_553"/>
+          <p:cNvPr id="17" name="PDF_TEXT_GROUP_555"/>
           <p:cNvSpPr txBox="1"/>
           <p:nvPr/>
         </p:nvSpPr>
@@ -32220,7 +32316,7 @@
       </p:sp>
       <p:sp>
         <p:nvSpPr>
-          <p:cNvPr id="18" name="PDF_TEXT_GROUP_554"/>
+          <p:cNvPr id="18" name="PDF_TEXT_GROUP_556"/>
           <p:cNvSpPr txBox="1"/>
           <p:nvPr/>
         </p:nvSpPr>
@@ -32509,7 +32605,7 @@
         <p:spPr>
           <a:xfrm>
             <a:off x="6488446" y="1926823"/>
-            <a:ext cx="7024571" cy="828844"/>
+            <a:ext cx="7001071" cy="828844"/>
           </a:xfrm>
           <a:prstGeom prst="rect">
             <a:avLst/>
@@ -32543,7 +32639,7 @@
                 </a:solidFill>
                 <a:latin typeface="Latin Modern Sans"/>
               </a:rPr>
-              <a:t>Validate signatures and signing-key relationships</a:t>
+              <a:t>Validate signatures under application trust policies,</a:t>
             </a:r>
             <a:r>
               <a:rPr sz="2371" b="0" i="0">
@@ -32552,7 +32648,7 @@
                 </a:solidFill>
                 <a:latin typeface="Latin Modern Sans"/>
               </a:rPr>
-              <a:t> under trust rules; check task permissions separately</a:t>
+              <a:t> expressible through a Trust Schema [16]</a:t>
             </a:r>
           </a:p>
         </p:txBody>
@@ -33252,7 +33348,7 @@
       </p:pic>
       <p:sp>
         <p:nvSpPr>
-          <p:cNvPr id="3" name="PDF_TEXT_GROUP_555"/>
+          <p:cNvPr id="3" name="PDF_TEXT_GROUP_557"/>
           <p:cNvSpPr txBox="1"/>
           <p:nvPr/>
         </p:nvSpPr>
@@ -33300,7 +33396,7 @@
       </p:sp>
       <p:sp>
         <p:nvSpPr>
-          <p:cNvPr id="4" name="PDF_TEXT_GROUP_556"/>
+          <p:cNvPr id="4" name="PDF_TEXT_GROUP_558"/>
           <p:cNvSpPr txBox="1"/>
           <p:nvPr/>
         </p:nvSpPr>
@@ -33357,7 +33453,7 @@
       </p:sp>
       <p:sp>
         <p:nvSpPr>
-          <p:cNvPr id="5" name="PDF_TEXT_GROUP_557"/>
+          <p:cNvPr id="5" name="PDF_TEXT_GROUP_559"/>
           <p:cNvSpPr txBox="1"/>
           <p:nvPr/>
         </p:nvSpPr>
@@ -33414,7 +33510,7 @@
       </p:sp>
       <p:sp>
         <p:nvSpPr>
-          <p:cNvPr id="6" name="PDF_TEXT_GROUP_558"/>
+          <p:cNvPr id="6" name="PDF_TEXT_GROUP_560"/>
           <p:cNvSpPr txBox="1"/>
           <p:nvPr/>
         </p:nvSpPr>
@@ -33471,7 +33567,7 @@
       </p:sp>
       <p:sp>
         <p:nvSpPr>
-          <p:cNvPr id="7" name="PDF_TEXT_GROUP_559"/>
+          <p:cNvPr id="7" name="PDF_TEXT_GROUP_561"/>
           <p:cNvSpPr txBox="1"/>
           <p:nvPr/>
         </p:nvSpPr>
@@ -33528,7 +33624,7 @@
       </p:sp>
       <p:sp>
         <p:nvSpPr>
-          <p:cNvPr id="8" name="PDF_TEXT_GROUP_560"/>
+          <p:cNvPr id="8" name="PDF_TEXT_GROUP_562"/>
           <p:cNvSpPr txBox="1"/>
           <p:nvPr/>
         </p:nvSpPr>
@@ -33585,7 +33681,7 @@
       </p:sp>
       <p:sp>
         <p:nvSpPr>
-          <p:cNvPr id="9" name="PDF_TEXT_GROUP_561"/>
+          <p:cNvPr id="9" name="PDF_TEXT_GROUP_563"/>
           <p:cNvSpPr txBox="1"/>
           <p:nvPr/>
         </p:nvSpPr>
@@ -33633,7 +33729,7 @@
       </p:sp>
       <p:sp>
         <p:nvSpPr>
-          <p:cNvPr id="10" name="PDF_TEXT_GROUP_562"/>
+          <p:cNvPr id="10" name="PDF_TEXT_GROUP_564"/>
           <p:cNvSpPr txBox="1"/>
           <p:nvPr/>
         </p:nvSpPr>
@@ -33690,7 +33786,7 @@
       </p:sp>
       <p:sp>
         <p:nvSpPr>
-          <p:cNvPr id="11" name="PDF_TEXT_GROUP_563"/>
+          <p:cNvPr id="11" name="PDF_TEXT_GROUP_565"/>
           <p:cNvSpPr txBox="1"/>
           <p:nvPr/>
         </p:nvSpPr>
@@ -33738,7 +33834,7 @@
       </p:sp>
       <p:sp>
         <p:nvSpPr>
-          <p:cNvPr id="12" name="PDF_TEXT_GROUP_564"/>
+          <p:cNvPr id="12" name="PDF_TEXT_GROUP_566"/>
           <p:cNvSpPr txBox="1"/>
           <p:nvPr/>
         </p:nvSpPr>
@@ -33795,7 +33891,7 @@
       </p:sp>
       <p:sp>
         <p:nvSpPr>
-          <p:cNvPr id="13" name="PDF_TEXT_GROUP_565"/>
+          <p:cNvPr id="13" name="PDF_TEXT_GROUP_567"/>
           <p:cNvSpPr txBox="1"/>
           <p:nvPr/>
         </p:nvSpPr>
@@ -33843,7 +33939,7 @@
       </p:sp>
       <p:sp>
         <p:nvSpPr>
-          <p:cNvPr id="14" name="PDF_TEXT_GROUP_566"/>
+          <p:cNvPr id="14" name="PDF_TEXT_GROUP_568"/>
           <p:cNvSpPr txBox="1"/>
           <p:nvPr/>
         </p:nvSpPr>
@@ -33900,7 +33996,7 @@
       </p:sp>
       <p:sp>
         <p:nvSpPr>
-          <p:cNvPr id="15" name="PDF_TEXT_GROUP_567"/>
+          <p:cNvPr id="15" name="PDF_TEXT_GROUP_569"/>
           <p:cNvSpPr txBox="1"/>
           <p:nvPr/>
         </p:nvSpPr>
@@ -33948,7 +34044,7 @@
       </p:sp>
       <p:sp>
         <p:nvSpPr>
-          <p:cNvPr id="16" name="PDF_TEXT_GROUP_568"/>
+          <p:cNvPr id="16" name="PDF_TEXT_GROUP_570"/>
           <p:cNvSpPr txBox="1"/>
           <p:nvPr/>
         </p:nvSpPr>
@@ -33996,7 +34092,7 @@
       </p:sp>
       <p:sp>
         <p:nvSpPr>
-          <p:cNvPr id="17" name="PDF_TEXT_GROUP_569"/>
+          <p:cNvPr id="17" name="PDF_TEXT_GROUP_571"/>
           <p:cNvSpPr txBox="1"/>
           <p:nvPr/>
         </p:nvSpPr>
@@ -34044,7 +34140,7 @@
       </p:sp>
       <p:sp>
         <p:nvSpPr>
-          <p:cNvPr id="18" name="PDF_TEXT_GROUP_570"/>
+          <p:cNvPr id="18" name="PDF_TEXT_GROUP_572"/>
           <p:cNvSpPr txBox="1"/>
           <p:nvPr/>
         </p:nvSpPr>
@@ -34092,7 +34188,7 @@
       </p:sp>
       <p:sp>
         <p:nvSpPr>
-          <p:cNvPr id="19" name="PDF_TEXT_GROUP_571"/>
+          <p:cNvPr id="19" name="PDF_TEXT_GROUP_573"/>
           <p:cNvSpPr txBox="1"/>
           <p:nvPr/>
         </p:nvSpPr>
@@ -34140,7 +34236,7 @@
       </p:sp>
       <p:sp>
         <p:nvSpPr>
-          <p:cNvPr id="20" name="PDF_TEXT_GROUP_572"/>
+          <p:cNvPr id="20" name="PDF_TEXT_GROUP_574"/>
           <p:cNvSpPr txBox="1"/>
           <p:nvPr/>
         </p:nvSpPr>
@@ -35248,7 +35344,7 @@
         <p:spPr>
           <a:xfrm>
             <a:off x="4951472" y="2391871"/>
-            <a:ext cx="8650095" cy="828877"/>
+            <a:ext cx="8524252" cy="828877"/>
           </a:xfrm>
           <a:prstGeom prst="rect">
             <a:avLst/>
@@ -35282,7 +35378,7 @@
                 </a:solidFill>
                 <a:latin typeface="Latin Modern Sans"/>
               </a:rPr>
-              <a:t>Invocation and security mechanisms; NSC validates signed calls</a:t>
+              <a:t>Invocation mechanisms; NSC checks signed calls using a Trust</a:t>
             </a:r>
             <a:r>
               <a:rPr sz="2371" b="0" i="0">
@@ -35291,7 +35387,7 @@
                 </a:solidFill>
                 <a:latin typeface="Latin Modern Sans"/>
               </a:rPr>
-              <a:t> using application trust rules</a:t>
+              <a:t> Schema</a:t>
             </a:r>
           </a:p>
         </p:txBody>
@@ -35353,7 +35449,7 @@
         <p:spPr>
           <a:xfrm>
             <a:off x="4951601" y="3346591"/>
-            <a:ext cx="8139369" cy="385554"/>
+            <a:ext cx="8673187" cy="385554"/>
           </a:xfrm>
           <a:prstGeom prst="rect">
             <a:avLst/>
@@ -35387,7 +35483,7 @@
                 </a:solidFill>
                 <a:latin typeface="Latin Modern Sans"/>
               </a:rPr>
-              <a:t>Role- and command-constrained signing and verification</a:t>
+              <a:t>Trust Schema constrains roles and measurement commands</a:t>
             </a:r>
           </a:p>
         </p:txBody>

--- a/docs/PAPER/proposal-defense/slides/NDNSF_proposal_hybrid_editable.pptx
+++ b/docs/PAPER/proposal-defense/slides/NDNSF_proposal_hybrid_editable.pptx
@@ -449,7 +449,7 @@
           <a:p>
             <a:r>
               <a:rPr lang="en-US" sz="1200"/>
-              <a:t>1. The User places a Requester Challenge in ABE-protected Request content. 2. The Provider returns it in ACK Data; the User checks the value against the active request. 3. The Provider encrypts its challenge in ACK content. The User returns the value in Selection; the Provider checks it before execution. Both sides also validate signatures under trust rules and check service permissions and request state. Challenge responses show access to protected values; they do not grant permissions or prevent deliberate sharing.</a:t>
+              <a:t>1. The User puts a fresh random RequestNonce in ABE-protected Request content. This is not an Interest Nonce. 2. The Provider returns RequestNonce in ACK Data; the User checks it against the active request. 3. The Provider includes ProviderChallenge in ABE-protected ACK content and checks its challenge response in Selection before execution. Both sides also check signatures under trust rules, service permissions and request state. Matching challenge responses show access to protected values, not exclusive key possession.</a:t>
             </a:r>
             <a:endParaRPr lang="en-US" sz="1200"/>
           </a:p>
@@ -2409,7 +2409,7 @@
           <a:p>
             <a:r>
               <a:rPr lang="en-US" sz="1200"/>
-              <a:t>Data Logical purpose Request Describe required service and participation constraints; include protected discovery information and Requester Challenge ACK Report positive or negative participation; positive ACK supplies selection information and Provider Challenge Selection Assign selected execution; provide input/references, challenge response and protected request-scoped keys Response Return status, results or result references; the User still validates them before use Sync helps discover names; Interests retrieve Data. The Provider checks Selection before execution; a positive ACK alone does not start the task.</a:t>
+              <a:t>Data Logical purpose Request Describe required service and participation constraints; include protected discovery information and RequestNonce ACK Report positive or negative participation; positive ACK supplies selection information and ProviderChallenge Selection Assign selected execution; provide input/references, challenge response and protected request-scoped keys Response Return status, results or result references; the User still validates them before use Sync helps discover names; Interests retrieve Data. The Provider checks Selection before execution; a positive ACK alone does not start the task.</a:t>
             </a:r>
             <a:endParaRPr lang="en-US" sz="1200"/>
           </a:p>
@@ -7864,8 +7864,8 @@
         </p:nvSpPr>
         <p:spPr>
           <a:xfrm>
-            <a:off x="1169087" y="2039349"/>
-            <a:ext cx="12372860" cy="440633"/>
+            <a:off x="1169087" y="1854409"/>
+            <a:ext cx="12483305" cy="929924"/>
           </a:xfrm>
           <a:prstGeom prst="rect">
             <a:avLst/>
@@ -7908,7 +7908,16 @@
                 </a:solidFill>
                 <a:latin typeface="Latin Modern Sans"/>
               </a:rPr>
-              <a:t> The User places a Requester Challenge in ABE-protected Request content.</a:t>
+              <a:t> The User puts a fresh random RequestNonce in ABE-protected Request content.</a:t>
+            </a:r>
+            <a:r>
+              <a:rPr sz="2710" b="0" i="0">
+                <a:solidFill>
+                  <a:srgbClr val="000000"/>
+                </a:solidFill>
+                <a:latin typeface="Latin Modern Sans"/>
+              </a:rPr>
+              <a:t> This is not an Interest Nonce.</a:t>
             </a:r>
           </a:p>
         </p:txBody>
@@ -7921,8 +7930,8 @@
         </p:nvSpPr>
         <p:spPr>
           <a:xfrm>
-            <a:off x="1169087" y="2573777"/>
-            <a:ext cx="12681379" cy="929891"/>
+            <a:off x="1169087" y="2826708"/>
+            <a:ext cx="12474714" cy="929891"/>
           </a:xfrm>
           <a:prstGeom prst="rect">
             <a:avLst/>
@@ -7965,7 +7974,7 @@
                 </a:solidFill>
                 <a:latin typeface="Latin Modern Sans"/>
               </a:rPr>
-              <a:t> The Provider returns it in ACK Data; the User checks the value against the active</a:t>
+              <a:t> The Provider returns RequestNonce in ACK Data; the User checks it against the</a:t>
             </a:r>
             <a:r>
               <a:rPr sz="2710" b="0" i="0">
@@ -7974,7 +7983,7 @@
                 </a:solidFill>
                 <a:latin typeface="Latin Modern Sans"/>
               </a:rPr>
-              <a:t> request.</a:t>
+              <a:t> active request.</a:t>
             </a:r>
           </a:p>
         </p:txBody>
@@ -7987,8 +7996,8 @@
         </p:nvSpPr>
         <p:spPr>
           <a:xfrm>
-            <a:off x="1169087" y="3546044"/>
-            <a:ext cx="12383352" cy="929891"/>
+            <a:off x="1169087" y="3798975"/>
+            <a:ext cx="11895948" cy="929891"/>
           </a:xfrm>
           <a:prstGeom prst="rect">
             <a:avLst/>
@@ -8031,7 +8040,7 @@
                 </a:solidFill>
                 <a:latin typeface="Latin Modern Sans"/>
               </a:rPr>
-              <a:t> The Provider encrypts its challenge in ACK content. The User returns the value</a:t>
+              <a:t> The Provider includes ProviderChallenge in ABE-protected ACK content and</a:t>
             </a:r>
             <a:r>
               <a:rPr sz="2710" b="0" i="0">
@@ -8040,7 +8049,7 @@
                 </a:solidFill>
                 <a:latin typeface="Latin Modern Sans"/>
               </a:rPr>
-              <a:t> in Selection; the Provider checks it before execution.</a:t>
+              <a:t> checks its challenge response in Selection before execution.</a:t>
             </a:r>
           </a:p>
         </p:txBody>
@@ -8053,8 +8062,8 @@
         </p:nvSpPr>
         <p:spPr>
           <a:xfrm>
-            <a:off x="1143656" y="5115237"/>
-            <a:ext cx="12477812" cy="1367762"/>
+            <a:off x="1143656" y="5392631"/>
+            <a:ext cx="12333112" cy="1367762"/>
           </a:xfrm>
           <a:prstGeom prst="rect">
             <a:avLst/>
@@ -8088,7 +8097,7 @@
                 </a:solidFill>
                 <a:latin typeface="Latin Modern Sans"/>
               </a:rPr>
-              <a:t>Both sides also validate signatures under trust rules and check service permissions</a:t>
+              <a:t>Both sides also check signatures under trust rules, service permissions and request</a:t>
             </a:r>
             <a:r>
               <a:rPr sz="2710" b="0" i="0">
@@ -8097,7 +8106,7 @@
                 </a:solidFill>
                 <a:latin typeface="Latin Modern Sans"/>
               </a:rPr>
-              <a:t> and request state. Challenge responses show access to protected values; they do not</a:t>
+              <a:t> state. Matching challenge responses show access to protected values, not exclusive</a:t>
             </a:r>
             <a:r>
               <a:rPr sz="2710" b="0" i="0">
@@ -8106,7 +8115,7 @@
                 </a:solidFill>
                 <a:latin typeface="Latin Modern Sans"/>
               </a:rPr>
-              <a:t> grant permissions or prevent deliberate sharing.</a:t>
+              <a:t> key possession.</a:t>
             </a:r>
           </a:p>
         </p:txBody>
@@ -10648,7 +10657,7 @@
       </p:sp>
       <p:sp>
         <p:nvSpPr>
-          <p:cNvPr id="14" name="PDF_BULLET_SPAN_289"/>
+          <p:cNvPr id="14" name="PDF_BULLET_SPAN_290"/>
           <p:cNvSpPr/>
           <p:nvPr/>
         </p:nvSpPr>
@@ -10691,7 +10700,7 @@
       </p:sp>
       <p:sp>
         <p:nvSpPr>
-          <p:cNvPr id="15" name="PDF_BULLET_SPAN_292"/>
+          <p:cNvPr id="15" name="PDF_BULLET_SPAN_293"/>
           <p:cNvSpPr/>
           <p:nvPr/>
         </p:nvSpPr>
@@ -10734,7 +10743,7 @@
       </p:sp>
       <p:sp>
         <p:nvSpPr>
-          <p:cNvPr id="16" name="PDF_BULLET_SPAN_294"/>
+          <p:cNvPr id="16" name="PDF_BULLET_SPAN_295"/>
           <p:cNvSpPr/>
           <p:nvPr/>
         </p:nvSpPr>
@@ -10777,7 +10786,7 @@
       </p:sp>
       <p:sp>
         <p:nvSpPr>
-          <p:cNvPr id="17" name="PDF_BULLET_SPAN_297"/>
+          <p:cNvPr id="17" name="PDF_BULLET_SPAN_298"/>
           <p:cNvSpPr/>
           <p:nvPr/>
         </p:nvSpPr>
@@ -11387,7 +11396,7 @@
       </p:sp>
       <p:sp>
         <p:nvSpPr>
-          <p:cNvPr id="13" name="PDF_BULLET_SPAN_308"/>
+          <p:cNvPr id="13" name="PDF_BULLET_SPAN_309"/>
           <p:cNvSpPr/>
           <p:nvPr/>
         </p:nvSpPr>
@@ -11430,7 +11439,7 @@
       </p:sp>
       <p:sp>
         <p:nvSpPr>
-          <p:cNvPr id="14" name="PDF_BULLET_SPAN_311"/>
+          <p:cNvPr id="14" name="PDF_BULLET_SPAN_312"/>
           <p:cNvSpPr/>
           <p:nvPr/>
         </p:nvSpPr>
@@ -11473,7 +11482,7 @@
       </p:sp>
       <p:sp>
         <p:nvSpPr>
-          <p:cNvPr id="15" name="PDF_BULLET_SPAN_314"/>
+          <p:cNvPr id="15" name="PDF_BULLET_SPAN_315"/>
           <p:cNvSpPr/>
           <p:nvPr/>
         </p:nvSpPr>
@@ -12122,7 +12131,7 @@
       </p:sp>
       <p:sp>
         <p:nvSpPr>
-          <p:cNvPr id="14" name="PDF_BULLET_SPAN_326"/>
+          <p:cNvPr id="14" name="PDF_BULLET_SPAN_327"/>
           <p:cNvSpPr/>
           <p:nvPr/>
         </p:nvSpPr>
@@ -12165,7 +12174,7 @@
       </p:sp>
       <p:sp>
         <p:nvSpPr>
-          <p:cNvPr id="15" name="PDF_BULLET_SPAN_328"/>
+          <p:cNvPr id="15" name="PDF_BULLET_SPAN_329"/>
           <p:cNvSpPr/>
           <p:nvPr/>
         </p:nvSpPr>
@@ -12208,7 +12217,7 @@
       </p:sp>
       <p:sp>
         <p:nvSpPr>
-          <p:cNvPr id="16" name="PDF_BULLET_SPAN_331"/>
+          <p:cNvPr id="16" name="PDF_BULLET_SPAN_332"/>
           <p:cNvSpPr/>
           <p:nvPr/>
         </p:nvSpPr>
@@ -12251,7 +12260,7 @@
       </p:sp>
       <p:sp>
         <p:nvSpPr>
-          <p:cNvPr id="17" name="PDF_BULLET_SPAN_334"/>
+          <p:cNvPr id="17" name="PDF_BULLET_SPAN_335"/>
           <p:cNvSpPr/>
           <p:nvPr/>
         </p:nvSpPr>
@@ -17651,7 +17660,7 @@
       </p:sp>
       <p:sp>
         <p:nvSpPr>
-          <p:cNvPr id="14" name="PDF_BULLET_SPAN_446"/>
+          <p:cNvPr id="14" name="PDF_BULLET_SPAN_447"/>
           <p:cNvSpPr/>
           <p:nvPr/>
         </p:nvSpPr>
@@ -17694,7 +17703,7 @@
       </p:sp>
       <p:sp>
         <p:nvSpPr>
-          <p:cNvPr id="15" name="PDF_BULLET_SPAN_448"/>
+          <p:cNvPr id="15" name="PDF_BULLET_SPAN_449"/>
           <p:cNvSpPr/>
           <p:nvPr/>
         </p:nvSpPr>
@@ -17737,7 +17746,7 @@
       </p:sp>
       <p:sp>
         <p:nvSpPr>
-          <p:cNvPr id="16" name="PDF_BULLET_SPAN_451"/>
+          <p:cNvPr id="16" name="PDF_BULLET_SPAN_452"/>
           <p:cNvSpPr/>
           <p:nvPr/>
         </p:nvSpPr>
@@ -17780,7 +17789,7 @@
       </p:sp>
       <p:sp>
         <p:nvSpPr>
-          <p:cNvPr id="17" name="PDF_BULLET_SPAN_454"/>
+          <p:cNvPr id="17" name="PDF_BULLET_SPAN_455"/>
           <p:cNvSpPr/>
           <p:nvPr/>
         </p:nvSpPr>
@@ -18642,7 +18651,7 @@
       </p:sp>
       <p:sp>
         <p:nvSpPr>
-          <p:cNvPr id="18" name="PDF_BULLET_SPAN_473"/>
+          <p:cNvPr id="18" name="PDF_BULLET_SPAN_474"/>
           <p:cNvSpPr/>
           <p:nvPr/>
         </p:nvSpPr>
@@ -18685,7 +18694,7 @@
       </p:sp>
       <p:sp>
         <p:nvSpPr>
-          <p:cNvPr id="19" name="PDF_BULLET_SPAN_476"/>
+          <p:cNvPr id="19" name="PDF_BULLET_SPAN_477"/>
           <p:cNvSpPr/>
           <p:nvPr/>
         </p:nvSpPr>
@@ -18728,7 +18737,7 @@
       </p:sp>
       <p:sp>
         <p:nvSpPr>
-          <p:cNvPr id="20" name="PDF_BULLET_SPAN_479"/>
+          <p:cNvPr id="20" name="PDF_BULLET_SPAN_480"/>
           <p:cNvSpPr/>
           <p:nvPr/>
         </p:nvSpPr>
@@ -19377,7 +19386,7 @@
       </p:sp>
       <p:sp>
         <p:nvSpPr>
-          <p:cNvPr id="14" name="PDF_BULLET_SPAN_489"/>
+          <p:cNvPr id="14" name="PDF_BULLET_SPAN_490"/>
           <p:cNvSpPr/>
           <p:nvPr/>
         </p:nvSpPr>
@@ -19420,7 +19429,7 @@
       </p:sp>
       <p:sp>
         <p:nvSpPr>
-          <p:cNvPr id="15" name="PDF_BULLET_SPAN_492"/>
+          <p:cNvPr id="15" name="PDF_BULLET_SPAN_493"/>
           <p:cNvSpPr/>
           <p:nvPr/>
         </p:nvSpPr>
@@ -19463,7 +19472,7 @@
       </p:sp>
       <p:sp>
         <p:nvSpPr>
-          <p:cNvPr id="16" name="PDF_BULLET_SPAN_495"/>
+          <p:cNvPr id="16" name="PDF_BULLET_SPAN_496"/>
           <p:cNvSpPr/>
           <p:nvPr/>
         </p:nvSpPr>
@@ -19506,7 +19515,7 @@
       </p:sp>
       <p:sp>
         <p:nvSpPr>
-          <p:cNvPr id="17" name="PDF_BULLET_SPAN_497"/>
+          <p:cNvPr id="17" name="PDF_BULLET_SPAN_498"/>
           <p:cNvSpPr/>
           <p:nvPr/>
         </p:nvSpPr>
@@ -20164,7 +20173,7 @@
       </p:sp>
       <p:sp>
         <p:nvSpPr>
-          <p:cNvPr id="14" name="PDF_BULLET_SPAN_508"/>
+          <p:cNvPr id="14" name="PDF_BULLET_SPAN_509"/>
           <p:cNvSpPr/>
           <p:nvPr/>
         </p:nvSpPr>
@@ -20207,7 +20216,7 @@
       </p:sp>
       <p:sp>
         <p:nvSpPr>
-          <p:cNvPr id="15" name="PDF_BULLET_SPAN_511"/>
+          <p:cNvPr id="15" name="PDF_BULLET_SPAN_512"/>
           <p:cNvSpPr/>
           <p:nvPr/>
         </p:nvSpPr>
@@ -20250,7 +20259,7 @@
       </p:sp>
       <p:sp>
         <p:nvSpPr>
-          <p:cNvPr id="16" name="PDF_BULLET_SPAN_514"/>
+          <p:cNvPr id="16" name="PDF_BULLET_SPAN_515"/>
           <p:cNvSpPr/>
           <p:nvPr/>
         </p:nvSpPr>
@@ -20293,7 +20302,7 @@
       </p:sp>
       <p:sp>
         <p:nvSpPr>
-          <p:cNvPr id="17" name="PDF_BULLET_SPAN_517"/>
+          <p:cNvPr id="17" name="PDF_BULLET_SPAN_518"/>
           <p:cNvSpPr/>
           <p:nvPr/>
         </p:nvSpPr>
@@ -28127,7 +28136,7 @@
       </p:sp>
       <p:sp>
         <p:nvSpPr>
-          <p:cNvPr id="14" name="PDF_BULLET_SPAN_682"/>
+          <p:cNvPr id="14" name="PDF_BULLET_SPAN_683"/>
           <p:cNvSpPr/>
           <p:nvPr/>
         </p:nvSpPr>
@@ -28170,7 +28179,7 @@
       </p:sp>
       <p:sp>
         <p:nvSpPr>
-          <p:cNvPr id="15" name="PDF_BULLET_SPAN_687"/>
+          <p:cNvPr id="15" name="PDF_BULLET_SPAN_688"/>
           <p:cNvSpPr/>
           <p:nvPr/>
         </p:nvSpPr>
@@ -28213,7 +28222,7 @@
       </p:sp>
       <p:sp>
         <p:nvSpPr>
-          <p:cNvPr id="16" name="PDF_BULLET_SPAN_691"/>
+          <p:cNvPr id="16" name="PDF_BULLET_SPAN_692"/>
           <p:cNvSpPr/>
           <p:nvPr/>
         </p:nvSpPr>
@@ -28256,7 +28265,7 @@
       </p:sp>
       <p:sp>
         <p:nvSpPr>
-          <p:cNvPr id="17" name="PDF_BULLET_SPAN_694"/>
+          <p:cNvPr id="17" name="PDF_BULLET_SPAN_695"/>
           <p:cNvSpPr/>
           <p:nvPr/>
         </p:nvSpPr>
@@ -37893,7 +37902,7 @@
                 </a:solidFill>
                 <a:latin typeface="Latin Modern Sans"/>
               </a:rPr>
-              <a:t> discovery information and Requester Challenge</a:t>
+              <a:t> discovery information and RequestNonce</a:t>
             </a:r>
           </a:p>
         </p:txBody>
@@ -37998,7 +38007,7 @@
                 </a:solidFill>
                 <a:latin typeface="Latin Modern Sans"/>
               </a:rPr>
-              <a:t> information and Provider Challenge</a:t>
+              <a:t> information and ProviderChallenge</a:t>
             </a:r>
           </a:p>
         </p:txBody>

--- a/docs/PAPER/proposal-defense/slides/NDNSF_proposal_hybrid_editable.pptx
+++ b/docs/PAPER/proposal-defense/slides/NDNSF_proposal_hybrid_editable.pptx
@@ -2250,7 +2250,7 @@
           <a:p>
             <a:r>
               <a:rPr lang="en-US" sz="1200"/>
-              <a:t>Internal target Required deliverable September 2026 Agree scope/RQs; freeze one UAV graph and one DI partition; resolve correctness blockers October--November 2026 Complete registered experiments; freeze evidence and write bounded RQ answers December 2026 Complete integrated advisor-review draft January 2027 Committee review and readiness decision; reduce scope or revise timing if core evidence is missing February 2027 Target defense, conditional on evidence and committee approval Committee draft: two weeks before defense. Spring 2027 application/candidacy: February 5; final ProQuest: March 26. Recheck before filing. [29,30]</a:t>
+              <a:t>Internal target Required deliverable September 2026 Agree scope/RQs; freeze one UAV graph and one DI partition; resolve correctness blockers October--November 2026 Complete registered experiments; freeze evidence and write bounded RQ answers December 2026 Complete integrated advisor-review draft January 2027 Committee review and readiness decision; reduce scope or revise timing if core evidence is missing February 2027 Final dissertation defense, subject to committee approval Committee draft: two weeks before defense. Spring 2027 application/candidacy: February 5; final ProQuest: March 26. Recheck before filing. [29,30]</a:t>
             </a:r>
             <a:endParaRPr lang="en-US" sz="1200"/>
           </a:p>
@@ -2306,7 +2306,7 @@
           <a:p>
             <a:r>
               <a:rPr lang="en-US" sz="1200"/>
-              <a:t>RQ1 answer: when ABE-backed authorization is preferable to DNMP-inspired role rules plus encryption, accounting for confidentiality, management and withdrawal costs. RQ2 answer: exactly which task-assignment mistakes are rejected and which recovery behavior is supported. RQ3 answer: measured benefits, negative results and deployment limits. Reproducible configurations and evidence linking each conclusion to its tested scope. The outcome is a tested service protocol and an evidence-backed account of when its mechanisms are worth their cost.</a:t>
+              <a:t>RQ1 answer: when ABE-backed authorization is preferable to DNMP-inspired role rules plus encryption, accounting for confidentiality, management and withdrawal costs. RQ2 answer: exactly which task-assignment mistakes are rejected and which recovery behavior is supported. RQ3 answer: measured benefits, negative results and deployment limits. Reproducible configurations and evidence linking each conclusion to its tested scope. The intended outcome is a tested service protocol and an evidence-backed account of when its mechanisms are worth their cost.</a:t>
             </a:r>
             <a:endParaRPr lang="en-US" sz="1200"/>
           </a:p>
@@ -2362,7 +2362,7 @@
           <a:p>
             <a:r>
               <a:rPr lang="en-US" sz="1200"/>
-              <a:t>1. Are the three research questions specific enough to support defensible answers? 2. Are the authorization alternatives complete and fairly configured? 3. Are one UAV graph and one supported DI partition sufficient to test the abstraction? 4. Which optional features should be excluded if they delay the core evidence? NDNSF: evaluate runtime discovery and authorized invocation; extend the foundation to role-aware collaboration.</a:t>
+              <a:t>1. Are the three research questions specific enough to support defensible answers? 2. Are the authorization alternatives complete and fairly configured? 3. Are one UAV graph and one supported DI partition sufficient to test the abstraction? 4. Which optional features should be excluded if they delay the core evidence? Committee feedback sought: research significance, bounded scope, evaluation criteria, and a feasible completion plan.</a:t>
             </a:r>
             <a:endParaRPr lang="en-US" sz="1200"/>
           </a:p>
@@ -2866,7 +2866,7 @@
           <a:p>
             <a:r>
               <a:rPr lang="en-US" sz="1200"/>
-              <a:t>Intended contribution Current evidence boundary Discovery / authorization design and tradeoffs Invocation implementation and bounded experiments exist; full alternative lifecycle-cost comparison remains open ACK-derived plan and local input checks Design and implementation work; direct/cache and failure validation remains incomplete Cross-case empirical findings Existing mobility/work-efficiency and small-model results support limited configurations, not all new collaboration claims Proposal status, September 2026: implemented, locally tested, measured, and fully qualified are not interchangeable. [28]</a:t>
+              <a:t>Intended contribution Current evidence boundary Discovery / authorization design and tradeoffs Invocation implementation and bounded experiments exist; full alternative lifecycle-cost comparison remains open ACK-derived plan and local input checks Design and implementation work; direct/cache and failure validation remains incomplete Cross-case empirical findings Existing mobility/work-efficiency and small-model results support limited configurations, not all new collaboration claims Existing work supports feasibility. This proposal specifies what remains to be investigated and how the research claims will be tested. [28]</a:t>
             </a:r>
             <a:endParaRPr lang="en-US" sz="1200"/>
           </a:p>
@@ -21255,7 +21255,7 @@
                 </a:solidFill>
                 <a:latin typeface="Latin Modern Sans"/>
               </a:rPr>
-              <a:t>NDNSF-UAV: Application-Level Validation</a:t>
+              <a:t>NDNSF-UAV: Planned Framework Validation</a:t>
             </a:r>
           </a:p>
         </p:txBody>
@@ -24166,7 +24166,7 @@
                 </a:solidFill>
                 <a:latin typeface="Latin Modern Sans"/>
               </a:rPr>
-              <a:t>NDNSF-DI: Application-Level Validation</a:t>
+              <a:t>NDNSF-DI: Planned Framework Validation</a:t>
             </a:r>
           </a:p>
         </p:txBody>
@@ -28158,7 +28158,7 @@
                 </a:solidFill>
                 <a:latin typeface="Latin Modern Sans"/>
               </a:rPr>
-              <a:t>Mobility: Completion under Different Coverage Conditions</a:t>
+              <a:t>Preliminary Evidence: Mobility and Completion</a:t>
             </a:r>
           </a:p>
         </p:txBody>
@@ -29361,7 +29361,7 @@
                 </a:solidFill>
                 <a:latin typeface="Latin Modern Sans"/>
               </a:rPr>
-              <a:t>Mobility: Lower Tail Latency in a Defined Subset</a:t>
+              <a:t>Preliminary Evidence: Switching Latency</a:t>
             </a:r>
           </a:p>
         </p:txBody>
@@ -30420,7 +30420,7 @@
                 </a:solidFill>
                 <a:latin typeface="Latin Modern Sans"/>
               </a:rPr>
-              <a:t>Fewer Execution Starts than the Parallel Baseline</a:t>
+              <a:t>Preliminary Evidence: Execution Starts</a:t>
             </a:r>
           </a:p>
         </p:txBody>
@@ -32325,7 +32325,7 @@
                 </a:solidFill>
                 <a:latin typeface="Latin Modern Sans"/>
               </a:rPr>
-              <a:t>A Useful Negative Result: Splitting Can Be Slower</a:t>
+              <a:t>Preliminary Diagnostic: Splitting Can Be Slower</a:t>
             </a:r>
           </a:p>
         </p:txBody>
@@ -33288,7 +33288,7 @@
                 </a:solidFill>
                 <a:latin typeface="Latin Modern Sans"/>
               </a:rPr>
-              <a:t>Remaining Experiments Follow the Claims</a:t>
+              <a:t>Proposed Evaluation: Evidence for Each RQ</a:t>
             </a:r>
           </a:p>
         </p:txBody>
@@ -35231,7 +35231,7 @@
         <p:spPr>
           <a:xfrm>
             <a:off x="4695379" y="5243395"/>
-            <a:ext cx="9323228" cy="385554"/>
+            <a:ext cx="8274725" cy="385554"/>
           </a:xfrm>
           <a:prstGeom prst="rect">
             <a:avLst/>
@@ -35265,7 +35265,7 @@
                 </a:solidFill>
                 <a:latin typeface="Latin Modern Sans"/>
               </a:rPr>
-              <a:t>Target defense, conditional on evidence and committee approval</a:t>
+              <a:t>Final dissertation defense, subject to committee approval</a:t>
             </a:r>
           </a:p>
         </p:txBody>
@@ -35921,7 +35921,7 @@
         <p:spPr>
           <a:xfrm>
             <a:off x="1143656" y="6013664"/>
-            <a:ext cx="12248862" cy="929924"/>
+            <a:ext cx="12339027" cy="929924"/>
           </a:xfrm>
           <a:prstGeom prst="rect">
             <a:avLst/>
@@ -35955,7 +35955,7 @@
                 </a:solidFill>
                 <a:latin typeface="Latin Modern Sans"/>
               </a:rPr>
-              <a:t>The outcome is a tested service protocol and an evidence-backed account of when</a:t>
+              <a:t>The intended outcome is a tested service protocol and an evidence-backed account</a:t>
             </a:r>
             <a:r>
               <a:rPr sz="2710" b="0" i="0">
@@ -35964,7 +35964,7 @@
                 </a:solidFill>
                 <a:latin typeface="Latin Modern Sans"/>
               </a:rPr>
-              <a:t> its mechanisms are worth their cost.</a:t>
+              <a:t> of when its mechanisms are worth their cost.</a:t>
             </a:r>
           </a:p>
         </p:txBody>
@@ -36479,7 +36479,7 @@
         </p:nvSpPr>
         <p:spPr>
           <a:xfrm>
-            <a:off x="1169087" y="2156847"/>
+            <a:off x="1169087" y="2129411"/>
             <a:ext cx="13110552" cy="440633"/>
           </a:xfrm>
           <a:prstGeom prst="rect">
@@ -36536,7 +36536,7 @@
         </p:nvSpPr>
         <p:spPr>
           <a:xfrm>
-            <a:off x="1169087" y="2691275"/>
+            <a:off x="1169087" y="2663840"/>
             <a:ext cx="10917475" cy="440633"/>
           </a:xfrm>
           <a:prstGeom prst="rect">
@@ -36593,7 +36593,7 @@
         </p:nvSpPr>
         <p:spPr>
           <a:xfrm>
-            <a:off x="1169087" y="3225704"/>
+            <a:off x="1169087" y="3198268"/>
             <a:ext cx="11221526" cy="929891"/>
           </a:xfrm>
           <a:prstGeom prst="rect">
@@ -36659,7 +36659,7 @@
         </p:nvSpPr>
         <p:spPr>
           <a:xfrm>
-            <a:off x="1169087" y="4197971"/>
+            <a:off x="1169087" y="4170535"/>
             <a:ext cx="12521417" cy="440633"/>
           </a:xfrm>
           <a:prstGeom prst="rect">
@@ -36716,8 +36716,8 @@
         </p:nvSpPr>
         <p:spPr>
           <a:xfrm>
-            <a:off x="1143656" y="5445401"/>
-            <a:ext cx="11080733" cy="929891"/>
+            <a:off x="1143656" y="5417998"/>
+            <a:ext cx="11570144" cy="929891"/>
           </a:xfrm>
           <a:prstGeom prst="rect">
             <a:avLst/>
@@ -36751,7 +36751,7 @@
                 </a:solidFill>
                 <a:latin typeface="Latin Modern Sans"/>
               </a:rPr>
-              <a:t>NDNSF: evaluate runtime discovery and authorized invocation; extend the</a:t>
+              <a:t>Committee feedback sought: research significance, bounded scope, evaluation</a:t>
             </a:r>
             <a:r>
               <a:rPr sz="2710" b="0" i="0">
@@ -36760,7 +36760,7 @@
                 </a:solidFill>
                 <a:latin typeface="Latin Modern Sans"/>
               </a:rPr>
-              <a:t> foundation to role-aware collaboration.</a:t>
+              <a:t> criteria, and a feasible completion plan.</a:t>
             </a:r>
           </a:p>
         </p:txBody>
@@ -44248,7 +44248,7 @@
                 </a:solidFill>
                 <a:latin typeface="Latin Modern Sans"/>
               </a:rPr>
-              <a:t>Research Contributions and Current Evidence</a:t>
+              <a:t>Proposed Contributions and Current Foundation</a:t>
             </a:r>
           </a:p>
         </p:txBody>
@@ -44709,7 +44709,7 @@
         <p:spPr>
           <a:xfrm>
             <a:off x="1123808" y="5875092"/>
-            <a:ext cx="12516981" cy="828877"/>
+            <a:ext cx="12147455" cy="828877"/>
           </a:xfrm>
           <a:prstGeom prst="rect">
             <a:avLst/>
@@ -44743,7 +44743,7 @@
                 </a:solidFill>
                 <a:latin typeface="Latin Modern Sans"/>
               </a:rPr>
-              <a:t>Proposal status, September 2026: implemented, locally tested, measured, and fully qualified</a:t>
+              <a:t>Existing work supports feasibility. This proposal specifies what remains to be investigated</a:t>
             </a:r>
             <a:r>
               <a:rPr sz="2371" b="0" i="0">
@@ -44752,7 +44752,7 @@
                 </a:solidFill>
                 <a:latin typeface="Latin Modern Sans"/>
               </a:rPr>
-              <a:t> are not interchangeable. [28]</a:t>
+              <a:t> and how the research claims will be tested. [28]</a:t>
             </a:r>
           </a:p>
         </p:txBody>
